--- a/场景与价值_汇报模块.pptx
+++ b/场景与价值_汇报模块.pptx
@@ -2,18 +2,19 @@
 <file path=ppt/presentation.xml><?xml version="1.0" encoding="utf-8"?>
 <p:presentation xmlns:p="http://schemas.openxmlformats.org/presentationml/2006/main">
   <p:sldMasterIdLst>
-    <p:sldMasterId xmlns:r="http://schemas.openxmlformats.org/officeDocument/2006/relationships" id="2147483648" r:id="Re0e7d6ac1be44353"/>
+    <p:sldMasterId xmlns:r="http://schemas.openxmlformats.org/officeDocument/2006/relationships" id="2147483648" r:id="Rae22850f8f9145d6"/>
   </p:sldMasterIdLst>
   <p:notesMasterIdLst>
-    <p:notesMasterId xmlns:r="http://schemas.openxmlformats.org/officeDocument/2006/relationships" r:id="R60717719bade4dd4"/>
+    <p:notesMasterId xmlns:r="http://schemas.openxmlformats.org/officeDocument/2006/relationships" r:id="R70cb84ca07a94988"/>
   </p:notesMasterIdLst>
   <p:sldIdLst>
-    <p:sldId xmlns:r="http://schemas.openxmlformats.org/officeDocument/2006/relationships" id="256" r:id="R004b81e8dd2a4f3a"/>
-    <p:sldId xmlns:r="http://schemas.openxmlformats.org/officeDocument/2006/relationships" id="257" r:id="Ra97a5a12a7af48a2"/>
-    <p:sldId xmlns:r="http://schemas.openxmlformats.org/officeDocument/2006/relationships" id="258" r:id="R57eaced799584798"/>
-    <p:sldId xmlns:r="http://schemas.openxmlformats.org/officeDocument/2006/relationships" id="259" r:id="Rc9cdb0f1a9114aa5"/>
-    <p:sldId xmlns:r="http://schemas.openxmlformats.org/officeDocument/2006/relationships" id="260" r:id="R6f9da5c678f844b9"/>
-    <p:sldId xmlns:r="http://schemas.openxmlformats.org/officeDocument/2006/relationships" id="261" r:id="Ra6eff293036e4b00"/>
+    <p:sldId xmlns:r="http://schemas.openxmlformats.org/officeDocument/2006/relationships" id="256" r:id="R3a2ab7bf3567457a"/>
+    <p:sldId xmlns:r="http://schemas.openxmlformats.org/officeDocument/2006/relationships" id="257" r:id="R86e26dd244ef446f"/>
+    <p:sldId xmlns:r="http://schemas.openxmlformats.org/officeDocument/2006/relationships" id="258" r:id="R5160bdbb7b8147fe"/>
+    <p:sldId xmlns:r="http://schemas.openxmlformats.org/officeDocument/2006/relationships" id="259" r:id="R0d0dae7b3a9c424f"/>
+    <p:sldId xmlns:r="http://schemas.openxmlformats.org/officeDocument/2006/relationships" id="260" r:id="R3bb0db78f6db4156"/>
+    <p:sldId xmlns:r="http://schemas.openxmlformats.org/officeDocument/2006/relationships" id="261" r:id="R45b2570a35b94e72"/>
+    <p:sldId xmlns:r="http://schemas.openxmlformats.org/officeDocument/2006/relationships" id="262" r:id="R33d08e5738b14f9e"/>
   </p:sldIdLst>
   <p:sldSz cx="12192000" cy="6858000"/>
   <p:notesSz cx="6858000" cy="9144000"/>
@@ -677,7 +678,7 @@
           <a:lstStyle xmlns:a="http://schemas.openxmlformats.org/drawingml/2006/main"/>
           <a:p xmlns:a="http://schemas.openxmlformats.org/drawingml/2006/main">
             <a:r>
-              <a:t>最新研究给出了两个直接证据。第一，CVPR 2026显示，GPT-5、Gemini 2.5 Pro等Judge在多模态任务上的准确率大约为66%到75%，而人类专家超过90%，说明通用Judge不能直接代表业务标准。第二，ICCV 2025表明，可以利用少量验证样本对多个Prompt进行视觉相关的加权，从而改善判断和置信度校准。这正对应本项目的后验校准、邻域共识和人工复核分流。</a:t>
+              <a:t>这一页不强调哪个公司排名第一，而是观察头部团队采用了什么方法。四家的公开路径虽然各有侧重，但结构高度一致：先把质量拆成场景、维度或检查点，再组合自动评价器，并用人工数据做校验。Qwen甚至发布了专用图像Judge和分层评价体系；腾讯把提示词拆成3500个关键点，说明业界已经从一条Prompt打总分，走向细粒度、可核验的评价机制。这正是本合作项目要补齐的能力。</a:t>
             </a:r>
           </a:p>
           <a:p xmlns:a="http://schemas.openxmlformats.org/drawingml/2006/main">
@@ -692,12 +693,22 @@
           </a:p>
           <a:p xmlns:a="http://schemas.openxmlformats.org/drawingml/2006/main">
             <a:r>
-              <a:t>- Multimodal RewardBench 2, CVPR 2026: https://openaccess.thecvf.com/content/CVPR2026/html/Hu_Multimodal_RewardBench_2_Evaluating_Omni_Reward_Models_for_Interleaved_Text_CVPR_2026_paper.html</a:t>
-            </a:r>
-          </a:p>
-          <a:p xmlns:a="http://schemas.openxmlformats.org/drawingml/2006/main">
-            <a:r>
-              <a:t>- Calibrating MLLM-as-a-Judge via Multimodal Bayesian Prompt Ensembles, ICCV 2025: https://arxiv.org/abs/2509.08777</a:t>
+              <a:t>- https://deploymentsafety.openai.com/chatgpt-images-2-0/automated-evaluations-and-adversarial-testing</a:t>
+            </a:r>
+          </a:p>
+          <a:p xmlns:a="http://schemas.openxmlformats.org/drawingml/2006/main">
+            <a:r>
+              <a:t>- https://github.com/QwenLM/Qwen-Image-Bench</a:t>
+            </a:r>
+          </a:p>
+          <a:p xmlns:a="http://schemas.openxmlformats.org/drawingml/2006/main">
+            <a:r>
+              <a:t>- https://seed.bytedance.com/en/blog/bytedance-released-image-editing-model-seededit-3-0-enhanced-image-consistency-and-usability-rate</a:t>
+            </a:r>
+          </a:p>
+          <a:p xmlns:a="http://schemas.openxmlformats.org/drawingml/2006/main">
+            <a:r>
+              <a:t>- https://github.com/Tencent-Hunyuan/HunyuanImage-3.0</a:t>
             </a:r>
           </a:p>
         </p:txBody>
@@ -767,7 +778,27 @@
           <a:lstStyle xmlns:a="http://schemas.openxmlformats.org/drawingml/2006/main"/>
           <a:p xmlns:a="http://schemas.openxmlformats.org/drawingml/2006/main">
             <a:r>
-              <a:t>项目不是再建设一套数据平台，而是在现有规则、Prompt和VLM之上增加一层可插拔的任务自适应能力。输入新任务描述、少量专家样本和已有评估结果，输出经过校准的分数、证据、置信度和人工复核建议。建议首批优先用多图编辑和AIGC图库做闭环验证。</a:t>
+              <a:t>最新研究给出了两个直接证据。第一，CVPR 2026显示，GPT-5、Gemini 2.5 Pro等Judge在多模态任务上的准确率大约为66%到75%，而人类专家超过90%，说明通用Judge不能直接代表业务标准。第二，ICCV 2025表明，可以利用少量验证样本对多个Prompt进行视觉相关的加权，从而改善判断和置信度校准。这正对应本项目的后验校准、邻域共识和人工复核分流。</a:t>
+            </a:r>
+          </a:p>
+          <a:p xmlns:a="http://schemas.openxmlformats.org/drawingml/2006/main">
+            <a:r>
+              <a:t/>
+            </a:r>
+          </a:p>
+          <a:p xmlns:a="http://schemas.openxmlformats.org/drawingml/2006/main">
+            <a:r>
+              <a:t>[Sources]</a:t>
+            </a:r>
+          </a:p>
+          <a:p xmlns:a="http://schemas.openxmlformats.org/drawingml/2006/main">
+            <a:r>
+              <a:t>- Multimodal RewardBench 2, CVPR 2026: https://openaccess.thecvf.com/content/CVPR2026/html/Hu_Multimodal_RewardBench_2_Evaluating_Omni_Reward_Models_for_Interleaved_Text_CVPR_2026_paper.html</a:t>
+            </a:r>
+          </a:p>
+          <a:p xmlns:a="http://schemas.openxmlformats.org/drawingml/2006/main">
+            <a:r>
+              <a:t>- Calibrating MLLM-as-a-Judge via Multimodal Bayesian Prompt Ensembles, ICCV 2025: https://arxiv.org/abs/2509.08777</a:t>
             </a:r>
           </a:p>
         </p:txBody>
@@ -798,6 +829,76 @@
 </file>
 
 <file path=ppt/notesSlides/notesSlide6.xml><?xml version="1.0" encoding="utf-8"?>
+<p:notes xmlns:p="http://schemas.openxmlformats.org/presentationml/2006/main">
+  <p:cSld>
+    <p:spTree>
+      <p:nvGrpSpPr>
+        <p:cNvPr id="1" name=""/>
+        <p:cNvGrpSpPr/>
+        <p:nvPr/>
+      </p:nvGrpSpPr>
+      <p:grpSpPr>
+        <a:xfrm xmlns:a="http://schemas.openxmlformats.org/drawingml/2006/main"/>
+      </p:grpSpPr>
+      <p:sp>
+        <p:nvSpPr>
+          <p:cNvPr id="2" name="Slide Image Placeholder 1"/>
+          <p:cNvSpPr>
+            <a:spLocks xmlns:a="http://schemas.openxmlformats.org/drawingml/2006/main" noGrp="1"/>
+          </p:cNvSpPr>
+          <p:nvPr>
+            <p:ph type="sldImg" idx="0"/>
+          </p:nvPr>
+        </p:nvSpPr>
+        <p:spPr/>
+      </p:sp>
+      <p:sp>
+        <p:nvSpPr>
+          <p:cNvPr id="3" name="Notes Placeholder 2"/>
+          <p:cNvSpPr>
+            <a:spLocks xmlns:a="http://schemas.openxmlformats.org/drawingml/2006/main" noGrp="1"/>
+          </p:cNvSpPr>
+          <p:nvPr>
+            <p:ph type="body" idx="1"/>
+          </p:nvPr>
+        </p:nvSpPr>
+        <p:spPr/>
+        <p:txBody>
+          <a:bodyPr xmlns:a="http://schemas.openxmlformats.org/drawingml/2006/main"/>
+          <a:lstStyle xmlns:a="http://schemas.openxmlformats.org/drawingml/2006/main"/>
+          <a:p xmlns:a="http://schemas.openxmlformats.org/drawingml/2006/main">
+            <a:r>
+              <a:t>项目不是再建设一套数据平台，而是在现有规则、Prompt和VLM之上增加一层可插拔的任务自适应能力。输入新任务描述、少量专家样本和已有评估结果，输出经过校准的分数、证据、置信度和人工复核建议。建议首批优先用多图编辑和AIGC图库做闭环验证。</a:t>
+            </a:r>
+          </a:p>
+        </p:txBody>
+      </p:sp>
+      <p:sp>
+        <p:nvSpPr>
+          <p:cNvPr id="4" name="Slide Number Placeholder 3"/>
+          <p:cNvSpPr>
+            <a:spLocks xmlns:a="http://schemas.openxmlformats.org/drawingml/2006/main" noGrp="1"/>
+          </p:cNvSpPr>
+          <p:nvPr>
+            <p:ph type="sldNum" idx="5"/>
+          </p:nvPr>
+        </p:nvSpPr>
+        <p:spPr/>
+        <p:txBody>
+          <a:bodyPr xmlns:a="http://schemas.openxmlformats.org/drawingml/2006/main"/>
+          <a:lstStyle xmlns:a="http://schemas.openxmlformats.org/drawingml/2006/main"/>
+          <a:p xmlns:a="http://schemas.openxmlformats.org/drawingml/2006/main"/>
+        </p:txBody>
+      </p:sp>
+    </p:spTree>
+  </p:cSld>
+  <p:clrMapOvr>
+    <a:masterClrMapping xmlns:a="http://schemas.openxmlformats.org/drawingml/2006/main"/>
+  </p:clrMapOvr>
+</p:notes>
+</file>
+
+<file path=ppt/notesSlides/notesSlide7.xml><?xml version="1.0" encoding="utf-8"?>
 <p:notes xmlns:p="http://schemas.openxmlformats.org/presentationml/2006/main">
   <p:cSld>
     <p:spTree>
@@ -905,7 +1006,7 @@
   </p:cSld>
   <p:clrMap bg1="lt1" tx1="dk1" bg2="lt2" tx2="dk2" accent1="accent1" accent2="accent2" accent3="accent3" accent4="accent4" accent5="accent5" accent6="accent6" hlink="hlink" folHlink="folHlink"/>
   <p:sldLayoutIdLst>
-    <p:sldLayoutId xmlns:r="http://schemas.openxmlformats.org/officeDocument/2006/relationships" id="2147483649" r:id="R88ae95963e0942f8"/>
+    <p:sldLayoutId xmlns:r="http://schemas.openxmlformats.org/officeDocument/2006/relationships" id="2147483649" r:id="R910baa4a00d74fe5"/>
   </p:sldLayoutIdLst>
   <p:txStyles>
     <p:titleStyle>
@@ -1456,7 +1557,7 @@
           <p:cNvPr id="31" name="accent-1">
             <a:extLst xmlns:a="http://schemas.openxmlformats.org/drawingml/2006/main">
               <a:ext uri="{FF2B5EF4-FFF2-40B4-BE49-F238E27FC236}">
-                <a16:creationId xmlns:a16="http://schemas.microsoft.com/office/drawing/2014/main" id="{B4334C82-F743-47F3-9216-F9B13BF7A8F7}"/>
+                <a16:creationId xmlns:a16="http://schemas.microsoft.com/office/drawing/2014/main" id="{959C2869-05E3-41F6-9FAC-21B7EAF299A7}"/>
               </a:ext>
             </a:extLst>
           </p:cNvPr>
@@ -1491,7 +1592,7 @@
           <p:cNvPr id="2" name="title-1">
             <a:extLst xmlns:a="http://schemas.openxmlformats.org/drawingml/2006/main">
               <a:ext uri="{FF2B5EF4-FFF2-40B4-BE49-F238E27FC236}">
-                <a16:creationId xmlns:a16="http://schemas.microsoft.com/office/drawing/2014/main" id="{7339E3E1-42D3-4FA0-B0F5-6C78AFC020D4}"/>
+                <a16:creationId xmlns:a16="http://schemas.microsoft.com/office/drawing/2014/main" id="{EA9003AE-CD4E-4A7F-97C4-DAB64891FCE8}"/>
               </a:ext>
             </a:extLst>
           </p:cNvPr>
@@ -1549,7 +1650,7 @@
           <p:cNvPr id="3" name="page-1">
             <a:extLst xmlns:a="http://schemas.openxmlformats.org/drawingml/2006/main">
               <a:ext uri="{FF2B5EF4-FFF2-40B4-BE49-F238E27FC236}">
-                <a16:creationId xmlns:a16="http://schemas.microsoft.com/office/drawing/2014/main" id="{23679C2B-046A-475D-BB9B-F4BB031EFBA8}"/>
+                <a16:creationId xmlns:a16="http://schemas.microsoft.com/office/drawing/2014/main" id="{89AA79CC-21A2-44F7-B39D-86A5000726F4}"/>
               </a:ext>
             </a:extLst>
           </p:cNvPr>
@@ -1607,7 +1708,7 @@
           <p:cNvPr id="4" name="auto-text-1">
             <a:extLst xmlns:a="http://schemas.openxmlformats.org/drawingml/2006/main">
               <a:ext uri="{FF2B5EF4-FFF2-40B4-BE49-F238E27FC236}">
-                <a16:creationId xmlns:a16="http://schemas.microsoft.com/office/drawing/2014/main" id="{FDD65D3F-DA8F-4781-97E7-B05724D092C6}"/>
+                <a16:creationId xmlns:a16="http://schemas.microsoft.com/office/drawing/2014/main" id="{7FF7EDA9-898E-43A9-BB65-950BC0F4A556}"/>
               </a:ext>
             </a:extLst>
           </p:cNvPr>
@@ -1665,7 +1766,7 @@
           <p:cNvPr id="5" name="auto-text-2">
             <a:extLst xmlns:a="http://schemas.openxmlformats.org/drawingml/2006/main">
               <a:ext uri="{FF2B5EF4-FFF2-40B4-BE49-F238E27FC236}">
-                <a16:creationId xmlns:a16="http://schemas.microsoft.com/office/drawing/2014/main" id="{BF3C2142-307E-4A38-951C-FA7110B96568}"/>
+                <a16:creationId xmlns:a16="http://schemas.microsoft.com/office/drawing/2014/main" id="{E0EC2284-0A98-4BCC-BF20-159A95EA4608}"/>
               </a:ext>
             </a:extLst>
           </p:cNvPr>
@@ -1723,7 +1824,7 @@
           <p:cNvPr id="6" name="auto-text-3">
             <a:extLst xmlns:a="http://schemas.openxmlformats.org/drawingml/2006/main">
               <a:ext uri="{FF2B5EF4-FFF2-40B4-BE49-F238E27FC236}">
-                <a16:creationId xmlns:a16="http://schemas.microsoft.com/office/drawing/2014/main" id="{9E8E5AF6-7249-47E8-A714-DD8EAEC2CDD6}"/>
+                <a16:creationId xmlns:a16="http://schemas.microsoft.com/office/drawing/2014/main" id="{DA89AF99-51A4-4172-822B-78AF19327D9D}"/>
               </a:ext>
             </a:extLst>
           </p:cNvPr>
@@ -1781,7 +1882,7 @@
           <p:cNvPr id="7" name="edit-media-surface">
             <a:extLst xmlns:a="http://schemas.openxmlformats.org/drawingml/2006/main">
               <a:ext uri="{FF2B5EF4-FFF2-40B4-BE49-F238E27FC236}">
-                <a16:creationId xmlns:a16="http://schemas.microsoft.com/office/drawing/2014/main" id="{49DE6159-FE89-4E0A-9AA1-D932E811BCE4}"/>
+                <a16:creationId xmlns:a16="http://schemas.microsoft.com/office/drawing/2014/main" id="{77079F21-0D82-446B-A94A-1968826B76F9}"/>
               </a:ext>
             </a:extLst>
           </p:cNvPr>
@@ -1816,7 +1917,7 @@
           <p:cNvPr id="8" name="edit-source-frame">
             <a:extLst xmlns:a="http://schemas.openxmlformats.org/drawingml/2006/main">
               <a:ext uri="{FF2B5EF4-FFF2-40B4-BE49-F238E27FC236}">
-                <a16:creationId xmlns:a16="http://schemas.microsoft.com/office/drawing/2014/main" id="{9A2EF980-8385-4180-885C-2283AB645F1A}"/>
+                <a16:creationId xmlns:a16="http://schemas.microsoft.com/office/drawing/2014/main" id="{45351CDF-514A-43A0-8EAB-618623CE590C}"/>
               </a:ext>
             </a:extLst>
           </p:cNvPr>
@@ -1851,7 +1952,7 @@
           <p:cNvPr id="9" name="edit-source-label">
             <a:extLst xmlns:a="http://schemas.openxmlformats.org/drawingml/2006/main">
               <a:ext uri="{FF2B5EF4-FFF2-40B4-BE49-F238E27FC236}">
-                <a16:creationId xmlns:a16="http://schemas.microsoft.com/office/drawing/2014/main" id="{2E4E62C4-F84E-4F1C-AD67-25BE07624767}"/>
+                <a16:creationId xmlns:a16="http://schemas.microsoft.com/office/drawing/2014/main" id="{0C126680-D02F-4A43-9E3F-DF1CF041CB4C}"/>
               </a:ext>
             </a:extLst>
           </p:cNvPr>
@@ -1909,7 +2010,7 @@
           <p:cNvPr id="10" name="edit-source-sub">
             <a:extLst xmlns:a="http://schemas.openxmlformats.org/drawingml/2006/main">
               <a:ext uri="{FF2B5EF4-FFF2-40B4-BE49-F238E27FC236}">
-                <a16:creationId xmlns:a16="http://schemas.microsoft.com/office/drawing/2014/main" id="{19B25C54-2724-4412-A579-AB728F8982BD}"/>
+                <a16:creationId xmlns:a16="http://schemas.microsoft.com/office/drawing/2014/main" id="{8BA4DC85-AA51-4DD4-B31C-98CFCF152437}"/>
               </a:ext>
             </a:extLst>
           </p:cNvPr>
@@ -1967,7 +2068,7 @@
           <p:cNvPr id="11" name="edit-reference-frame">
             <a:extLst xmlns:a="http://schemas.openxmlformats.org/drawingml/2006/main">
               <a:ext uri="{FF2B5EF4-FFF2-40B4-BE49-F238E27FC236}">
-                <a16:creationId xmlns:a16="http://schemas.microsoft.com/office/drawing/2014/main" id="{2C1C0771-4B5D-464A-894D-B1BA05F9268D}"/>
+                <a16:creationId xmlns:a16="http://schemas.microsoft.com/office/drawing/2014/main" id="{EF6F2B81-B4FF-4410-87C6-15A6B13BF364}"/>
               </a:ext>
             </a:extLst>
           </p:cNvPr>
@@ -2002,7 +2103,7 @@
           <p:cNvPr id="12" name="edit-reference-label">
             <a:extLst xmlns:a="http://schemas.openxmlformats.org/drawingml/2006/main">
               <a:ext uri="{FF2B5EF4-FFF2-40B4-BE49-F238E27FC236}">
-                <a16:creationId xmlns:a16="http://schemas.microsoft.com/office/drawing/2014/main" id="{A2D79847-7511-42D4-BB21-C723FF2DEE62}"/>
+                <a16:creationId xmlns:a16="http://schemas.microsoft.com/office/drawing/2014/main" id="{3650ED2B-56C5-4C4F-A9A5-ABEAE08557CE}"/>
               </a:ext>
             </a:extLst>
           </p:cNvPr>
@@ -2060,7 +2161,7 @@
           <p:cNvPr id="13" name="edit-reference-sub">
             <a:extLst xmlns:a="http://schemas.openxmlformats.org/drawingml/2006/main">
               <a:ext uri="{FF2B5EF4-FFF2-40B4-BE49-F238E27FC236}">
-                <a16:creationId xmlns:a16="http://schemas.microsoft.com/office/drawing/2014/main" id="{6C5B1F1A-4445-40CA-96E9-459D9E70315D}"/>
+                <a16:creationId xmlns:a16="http://schemas.microsoft.com/office/drawing/2014/main" id="{7DDCACC9-44BC-472B-A023-F0EDD87ECF61}"/>
               </a:ext>
             </a:extLst>
           </p:cNvPr>
@@ -2118,7 +2219,7 @@
           <p:cNvPr id="14" name="edit-output-frame">
             <a:extLst xmlns:a="http://schemas.openxmlformats.org/drawingml/2006/main">
               <a:ext uri="{FF2B5EF4-FFF2-40B4-BE49-F238E27FC236}">
-                <a16:creationId xmlns:a16="http://schemas.microsoft.com/office/drawing/2014/main" id="{34C121CB-E55C-4A16-9653-8A946AECF6D0}"/>
+                <a16:creationId xmlns:a16="http://schemas.microsoft.com/office/drawing/2014/main" id="{BD8FF3EE-26D2-4EC4-84DE-99E636E7B2C1}"/>
               </a:ext>
             </a:extLst>
           </p:cNvPr>
@@ -2153,7 +2254,7 @@
           <p:cNvPr id="15" name="edit-output-label">
             <a:extLst xmlns:a="http://schemas.openxmlformats.org/drawingml/2006/main">
               <a:ext uri="{FF2B5EF4-FFF2-40B4-BE49-F238E27FC236}">
-                <a16:creationId xmlns:a16="http://schemas.microsoft.com/office/drawing/2014/main" id="{FB8FBBBE-6008-424D-AD25-863193A8AC5E}"/>
+                <a16:creationId xmlns:a16="http://schemas.microsoft.com/office/drawing/2014/main" id="{BE9D750A-3C51-4085-BD0E-E85E50DA9380}"/>
               </a:ext>
             </a:extLst>
           </p:cNvPr>
@@ -2211,7 +2312,7 @@
           <p:cNvPr id="16" name="edit-output-sub">
             <a:extLst xmlns:a="http://schemas.openxmlformats.org/drawingml/2006/main">
               <a:ext uri="{FF2B5EF4-FFF2-40B4-BE49-F238E27FC236}">
-                <a16:creationId xmlns:a16="http://schemas.microsoft.com/office/drawing/2014/main" id="{7FBC965A-61B6-494E-95A0-C7208C183889}"/>
+                <a16:creationId xmlns:a16="http://schemas.microsoft.com/office/drawing/2014/main" id="{0295D4FF-8DAA-4DEB-9621-7E0BE15F56B8}"/>
               </a:ext>
             </a:extLst>
           </p:cNvPr>
@@ -2269,7 +2370,7 @@
           <p:cNvPr id="17" name="auto-text-4">
             <a:extLst xmlns:a="http://schemas.openxmlformats.org/drawingml/2006/main">
               <a:ext uri="{FF2B5EF4-FFF2-40B4-BE49-F238E27FC236}">
-                <a16:creationId xmlns:a16="http://schemas.microsoft.com/office/drawing/2014/main" id="{13871B20-9061-433B-8543-6410DF4794CE}"/>
+                <a16:creationId xmlns:a16="http://schemas.microsoft.com/office/drawing/2014/main" id="{FA7F5FE8-294A-429B-A31B-CE464A84FBE1}"/>
               </a:ext>
             </a:extLst>
           </p:cNvPr>
@@ -2327,7 +2428,7 @@
           <p:cNvPr id="18" name="gallery-media-surface">
             <a:extLst xmlns:a="http://schemas.openxmlformats.org/drawingml/2006/main">
               <a:ext uri="{FF2B5EF4-FFF2-40B4-BE49-F238E27FC236}">
-                <a16:creationId xmlns:a16="http://schemas.microsoft.com/office/drawing/2014/main" id="{B9EEB2B6-B05D-4CD6-BC74-C655212BF5D1}"/>
+                <a16:creationId xmlns:a16="http://schemas.microsoft.com/office/drawing/2014/main" id="{8E3EEF6C-0E02-46D1-984D-0742F273D633}"/>
               </a:ext>
             </a:extLst>
           </p:cNvPr>
@@ -2362,7 +2463,7 @@
           <p:cNvPr id="19" name="gallery-good-frame">
             <a:extLst xmlns:a="http://schemas.openxmlformats.org/drawingml/2006/main">
               <a:ext uri="{FF2B5EF4-FFF2-40B4-BE49-F238E27FC236}">
-                <a16:creationId xmlns:a16="http://schemas.microsoft.com/office/drawing/2014/main" id="{86635CDA-41A8-4F45-8BDE-6F53AFD8752B}"/>
+                <a16:creationId xmlns:a16="http://schemas.microsoft.com/office/drawing/2014/main" id="{71A4EC0E-6CCD-4C70-9AEA-E1E3AC661536}"/>
               </a:ext>
             </a:extLst>
           </p:cNvPr>
@@ -2397,7 +2498,7 @@
           <p:cNvPr id="20" name="gallery-good-label">
             <a:extLst xmlns:a="http://schemas.openxmlformats.org/drawingml/2006/main">
               <a:ext uri="{FF2B5EF4-FFF2-40B4-BE49-F238E27FC236}">
-                <a16:creationId xmlns:a16="http://schemas.microsoft.com/office/drawing/2014/main" id="{27111CE5-5D6E-4478-9A12-FE93C3478275}"/>
+                <a16:creationId xmlns:a16="http://schemas.microsoft.com/office/drawing/2014/main" id="{C6356F11-2DF9-462D-B822-19BB8C1F754D}"/>
               </a:ext>
             </a:extLst>
           </p:cNvPr>
@@ -2455,7 +2556,7 @@
           <p:cNvPr id="21" name="gallery-good-sub">
             <a:extLst xmlns:a="http://schemas.openxmlformats.org/drawingml/2006/main">
               <a:ext uri="{FF2B5EF4-FFF2-40B4-BE49-F238E27FC236}">
-                <a16:creationId xmlns:a16="http://schemas.microsoft.com/office/drawing/2014/main" id="{3F861321-C927-47E7-820E-9DC8EC970921}"/>
+                <a16:creationId xmlns:a16="http://schemas.microsoft.com/office/drawing/2014/main" id="{735B019B-C187-4F24-97B2-BCF2D5EBAD4E}"/>
               </a:ext>
             </a:extLst>
           </p:cNvPr>
@@ -2513,7 +2614,7 @@
           <p:cNvPr id="22" name="gallery-bad-frame">
             <a:extLst xmlns:a="http://schemas.openxmlformats.org/drawingml/2006/main">
               <a:ext uri="{FF2B5EF4-FFF2-40B4-BE49-F238E27FC236}">
-                <a16:creationId xmlns:a16="http://schemas.microsoft.com/office/drawing/2014/main" id="{2E63FC7E-FF43-4CD4-890F-08C40839B7A6}"/>
+                <a16:creationId xmlns:a16="http://schemas.microsoft.com/office/drawing/2014/main" id="{1412DE2A-C823-4B8A-BDB4-FCCAADD19757}"/>
               </a:ext>
             </a:extLst>
           </p:cNvPr>
@@ -2548,7 +2649,7 @@
           <p:cNvPr id="23" name="gallery-bad-label">
             <a:extLst xmlns:a="http://schemas.openxmlformats.org/drawingml/2006/main">
               <a:ext uri="{FF2B5EF4-FFF2-40B4-BE49-F238E27FC236}">
-                <a16:creationId xmlns:a16="http://schemas.microsoft.com/office/drawing/2014/main" id="{CEB1DC47-1068-4FA0-B7EF-C4B090155B15}"/>
+                <a16:creationId xmlns:a16="http://schemas.microsoft.com/office/drawing/2014/main" id="{4F90E44A-902D-4D7B-B5E1-FC35603A5B86}"/>
               </a:ext>
             </a:extLst>
           </p:cNvPr>
@@ -2606,7 +2707,7 @@
           <p:cNvPr id="24" name="gallery-bad-sub">
             <a:extLst xmlns:a="http://schemas.openxmlformats.org/drawingml/2006/main">
               <a:ext uri="{FF2B5EF4-FFF2-40B4-BE49-F238E27FC236}">
-                <a16:creationId xmlns:a16="http://schemas.microsoft.com/office/drawing/2014/main" id="{9F21DCBE-17BD-4AA2-A616-FD66432F4E99}"/>
+                <a16:creationId xmlns:a16="http://schemas.microsoft.com/office/drawing/2014/main" id="{EECE856F-DA62-4274-838A-4BF61C75D5A4}"/>
               </a:ext>
             </a:extLst>
           </p:cNvPr>
@@ -2664,7 +2765,7 @@
           <p:cNvPr id="25" name="auto-text-5">
             <a:extLst xmlns:a="http://schemas.openxmlformats.org/drawingml/2006/main">
               <a:ext uri="{FF2B5EF4-FFF2-40B4-BE49-F238E27FC236}">
-                <a16:creationId xmlns:a16="http://schemas.microsoft.com/office/drawing/2014/main" id="{14BDFD7C-E879-4577-AF66-07D06510242D}"/>
+                <a16:creationId xmlns:a16="http://schemas.microsoft.com/office/drawing/2014/main" id="{87EEB1D1-CFB4-41E2-8450-2DA23FA619F0}"/>
               </a:ext>
             </a:extLst>
           </p:cNvPr>
@@ -2722,7 +2823,7 @@
           <p:cNvPr id="26" name="auto-text-6">
             <a:extLst xmlns:a="http://schemas.openxmlformats.org/drawingml/2006/main">
               <a:ext uri="{FF2B5EF4-FFF2-40B4-BE49-F238E27FC236}">
-                <a16:creationId xmlns:a16="http://schemas.microsoft.com/office/drawing/2014/main" id="{6EFED4AA-5DFF-4111-9F9F-1D98474EDF28}"/>
+                <a16:creationId xmlns:a16="http://schemas.microsoft.com/office/drawing/2014/main" id="{3CAB2C8E-C1C8-471F-A978-A617F2616317}"/>
               </a:ext>
             </a:extLst>
           </p:cNvPr>
@@ -2780,7 +2881,7 @@
           <p:cNvPr id="27" name="auto-text-7">
             <a:extLst xmlns:a="http://schemas.openxmlformats.org/drawingml/2006/main">
               <a:ext uri="{FF2B5EF4-FFF2-40B4-BE49-F238E27FC236}">
-                <a16:creationId xmlns:a16="http://schemas.microsoft.com/office/drawing/2014/main" id="{B60EDF57-BF57-4EF0-9ED5-E657E358E7E8}"/>
+                <a16:creationId xmlns:a16="http://schemas.microsoft.com/office/drawing/2014/main" id="{42B5CF26-5BF6-4D8B-8D6B-1A30592E52DA}"/>
               </a:ext>
             </a:extLst>
           </p:cNvPr>
@@ -2838,7 +2939,7 @@
           <p:cNvPr id="28" name="slide1-conclusion">
             <a:extLst xmlns:a="http://schemas.openxmlformats.org/drawingml/2006/main">
               <a:ext uri="{FF2B5EF4-FFF2-40B4-BE49-F238E27FC236}">
-                <a16:creationId xmlns:a16="http://schemas.microsoft.com/office/drawing/2014/main" id="{31DA8909-DB10-4074-851E-5D1A16B87F45}"/>
+                <a16:creationId xmlns:a16="http://schemas.microsoft.com/office/drawing/2014/main" id="{1416774B-F1B3-4658-9453-2F64C2DAB7FE}"/>
               </a:ext>
             </a:extLst>
           </p:cNvPr>
@@ -2873,7 +2974,7 @@
           <p:cNvPr id="29" name="auto-text-8">
             <a:extLst xmlns:a="http://schemas.openxmlformats.org/drawingml/2006/main">
               <a:ext uri="{FF2B5EF4-FFF2-40B4-BE49-F238E27FC236}">
-                <a16:creationId xmlns:a16="http://schemas.microsoft.com/office/drawing/2014/main" id="{EAC6BBAE-3CCA-4B1A-AC28-AE212C40C9E7}"/>
+                <a16:creationId xmlns:a16="http://schemas.microsoft.com/office/drawing/2014/main" id="{7B67DE97-F897-43CE-B63D-793E8B929DBB}"/>
               </a:ext>
             </a:extLst>
           </p:cNvPr>
@@ -2931,7 +3032,7 @@
           <p:cNvPr id="30" name="auto-text-9">
             <a:extLst xmlns:a="http://schemas.openxmlformats.org/drawingml/2006/main">
               <a:ext uri="{FF2B5EF4-FFF2-40B4-BE49-F238E27FC236}">
-                <a16:creationId xmlns:a16="http://schemas.microsoft.com/office/drawing/2014/main" id="{7ABB6DB1-4C98-4FC8-8974-BCE1B0A9D81E}"/>
+                <a16:creationId xmlns:a16="http://schemas.microsoft.com/office/drawing/2014/main" id="{C44A1EAD-E328-4077-AF15-70507D51F7E1}"/>
               </a:ext>
             </a:extLst>
           </p:cNvPr>
@@ -2987,7 +3088,7 @@
     </p:spTree>
     <p:extLst>
       <p:ext uri="{BB962C8B-B14F-4D97-AF65-F5344CB8AC3E}">
-        <p14:creationId xmlns:p14="http://schemas.microsoft.com/office/powerpoint/2010/main" val="752403680"/>
+        <p14:creationId xmlns:p14="http://schemas.microsoft.com/office/powerpoint/2010/main" val="252651356"/>
       </p:ext>
     </p:extLst>
   </p:cSld>
@@ -3018,7 +3119,7 @@
           <p:cNvPr id="30" name="accent-2">
             <a:extLst xmlns:a="http://schemas.openxmlformats.org/drawingml/2006/main">
               <a:ext uri="{FF2B5EF4-FFF2-40B4-BE49-F238E27FC236}">
-                <a16:creationId xmlns:a16="http://schemas.microsoft.com/office/drawing/2014/main" id="{192C953A-46B6-4630-B83F-5F7C18523F57}"/>
+                <a16:creationId xmlns:a16="http://schemas.microsoft.com/office/drawing/2014/main" id="{247A374D-AA8F-464A-88F0-4A156E0973C1}"/>
               </a:ext>
             </a:extLst>
           </p:cNvPr>
@@ -3053,7 +3154,7 @@
           <p:cNvPr id="2" name="title-2">
             <a:extLst xmlns:a="http://schemas.openxmlformats.org/drawingml/2006/main">
               <a:ext uri="{FF2B5EF4-FFF2-40B4-BE49-F238E27FC236}">
-                <a16:creationId xmlns:a16="http://schemas.microsoft.com/office/drawing/2014/main" id="{6A224D38-7A47-4039-AC67-7635FF4C336B}"/>
+                <a16:creationId xmlns:a16="http://schemas.microsoft.com/office/drawing/2014/main" id="{BB100D3A-EBEB-4DA9-AAEB-A80452227FCF}"/>
               </a:ext>
             </a:extLst>
           </p:cNvPr>
@@ -3111,7 +3212,7 @@
           <p:cNvPr id="3" name="page-2">
             <a:extLst xmlns:a="http://schemas.openxmlformats.org/drawingml/2006/main">
               <a:ext uri="{FF2B5EF4-FFF2-40B4-BE49-F238E27FC236}">
-                <a16:creationId xmlns:a16="http://schemas.microsoft.com/office/drawing/2014/main" id="{5E29F1EB-F93E-4E70-BA44-348E29C42346}"/>
+                <a16:creationId xmlns:a16="http://schemas.microsoft.com/office/drawing/2014/main" id="{39DF6F88-9DEC-46F4-9630-690B82C44E93}"/>
               </a:ext>
             </a:extLst>
           </p:cNvPr>
@@ -3169,7 +3270,7 @@
           <p:cNvPr id="4" name="auto-text-10">
             <a:extLst xmlns:a="http://schemas.openxmlformats.org/drawingml/2006/main">
               <a:ext uri="{FF2B5EF4-FFF2-40B4-BE49-F238E27FC236}">
-                <a16:creationId xmlns:a16="http://schemas.microsoft.com/office/drawing/2014/main" id="{5A16B9B3-3DEA-44CE-9438-D95445BC380C}"/>
+                <a16:creationId xmlns:a16="http://schemas.microsoft.com/office/drawing/2014/main" id="{9992616A-A86D-422E-8A48-2CAF803C2D7C}"/>
               </a:ext>
             </a:extLst>
           </p:cNvPr>
@@ -3227,7 +3328,7 @@
           <p:cNvPr id="5" name="step-dot-0">
             <a:extLst xmlns:a="http://schemas.openxmlformats.org/drawingml/2006/main">
               <a:ext uri="{FF2B5EF4-FFF2-40B4-BE49-F238E27FC236}">
-                <a16:creationId xmlns:a16="http://schemas.microsoft.com/office/drawing/2014/main" id="{5B024735-11E3-40FC-9367-A57EB472D7C9}"/>
+                <a16:creationId xmlns:a16="http://schemas.microsoft.com/office/drawing/2014/main" id="{09CC6424-EF7E-4F4A-82C5-C57FDFFA6E18}"/>
               </a:ext>
             </a:extLst>
           </p:cNvPr>
@@ -3262,7 +3363,7 @@
           <p:cNvPr id="6" name="step-line-0">
             <a:extLst xmlns:a="http://schemas.openxmlformats.org/drawingml/2006/main">
               <a:ext uri="{FF2B5EF4-FFF2-40B4-BE49-F238E27FC236}">
-                <a16:creationId xmlns:a16="http://schemas.microsoft.com/office/drawing/2014/main" id="{2BB711BB-1D64-4E7D-9C99-693AA8240011}"/>
+                <a16:creationId xmlns:a16="http://schemas.microsoft.com/office/drawing/2014/main" id="{52D6E37A-D9C2-466D-B308-72F9330D2132}"/>
               </a:ext>
             </a:extLst>
           </p:cNvPr>
@@ -3297,7 +3398,7 @@
           <p:cNvPr id="7" name="step-text-0">
             <a:extLst xmlns:a="http://schemas.openxmlformats.org/drawingml/2006/main">
               <a:ext uri="{FF2B5EF4-FFF2-40B4-BE49-F238E27FC236}">
-                <a16:creationId xmlns:a16="http://schemas.microsoft.com/office/drawing/2014/main" id="{ACDA41F3-40DD-46C7-9A2F-D050978CFEC4}"/>
+                <a16:creationId xmlns:a16="http://schemas.microsoft.com/office/drawing/2014/main" id="{2ED0DC7B-1A41-4FA4-9555-365C7CACA07A}"/>
               </a:ext>
             </a:extLst>
           </p:cNvPr>
@@ -3355,7 +3456,7 @@
           <p:cNvPr id="8" name="step-dot-1">
             <a:extLst xmlns:a="http://schemas.openxmlformats.org/drawingml/2006/main">
               <a:ext uri="{FF2B5EF4-FFF2-40B4-BE49-F238E27FC236}">
-                <a16:creationId xmlns:a16="http://schemas.microsoft.com/office/drawing/2014/main" id="{5CCA2F8C-321B-482F-8E1E-50B0C2FD053B}"/>
+                <a16:creationId xmlns:a16="http://schemas.microsoft.com/office/drawing/2014/main" id="{BDA5A043-E9AF-4E66-A0C8-37628C9E93D3}"/>
               </a:ext>
             </a:extLst>
           </p:cNvPr>
@@ -3390,7 +3491,7 @@
           <p:cNvPr id="9" name="step-line-1">
             <a:extLst xmlns:a="http://schemas.openxmlformats.org/drawingml/2006/main">
               <a:ext uri="{FF2B5EF4-FFF2-40B4-BE49-F238E27FC236}">
-                <a16:creationId xmlns:a16="http://schemas.microsoft.com/office/drawing/2014/main" id="{CC8A0800-7D18-413F-BFF8-C3944F575E5A}"/>
+                <a16:creationId xmlns:a16="http://schemas.microsoft.com/office/drawing/2014/main" id="{0FEC3488-FCD3-4EDE-A307-E6BC985D7DD7}"/>
               </a:ext>
             </a:extLst>
           </p:cNvPr>
@@ -3425,7 +3526,7 @@
           <p:cNvPr id="10" name="step-text-1">
             <a:extLst xmlns:a="http://schemas.openxmlformats.org/drawingml/2006/main">
               <a:ext uri="{FF2B5EF4-FFF2-40B4-BE49-F238E27FC236}">
-                <a16:creationId xmlns:a16="http://schemas.microsoft.com/office/drawing/2014/main" id="{F6D9FC9D-F32A-4A14-B29B-EC270FCE1F5A}"/>
+                <a16:creationId xmlns:a16="http://schemas.microsoft.com/office/drawing/2014/main" id="{BCE7A8A6-1DF9-4DA6-A4B6-88753C3C2E14}"/>
               </a:ext>
             </a:extLst>
           </p:cNvPr>
@@ -3483,7 +3584,7 @@
           <p:cNvPr id="11" name="step-dot-2">
             <a:extLst xmlns:a="http://schemas.openxmlformats.org/drawingml/2006/main">
               <a:ext uri="{FF2B5EF4-FFF2-40B4-BE49-F238E27FC236}">
-                <a16:creationId xmlns:a16="http://schemas.microsoft.com/office/drawing/2014/main" id="{FC54C369-FA3B-48A8-8FD5-95BE7AD67110}"/>
+                <a16:creationId xmlns:a16="http://schemas.microsoft.com/office/drawing/2014/main" id="{7E5F6A53-C140-4059-9364-E58AE433A752}"/>
               </a:ext>
             </a:extLst>
           </p:cNvPr>
@@ -3518,7 +3619,7 @@
           <p:cNvPr id="12" name="step-line-2">
             <a:extLst xmlns:a="http://schemas.openxmlformats.org/drawingml/2006/main">
               <a:ext uri="{FF2B5EF4-FFF2-40B4-BE49-F238E27FC236}">
-                <a16:creationId xmlns:a16="http://schemas.microsoft.com/office/drawing/2014/main" id="{719A0391-5B56-4A1A-BE4D-5CB0BE987D59}"/>
+                <a16:creationId xmlns:a16="http://schemas.microsoft.com/office/drawing/2014/main" id="{2D162183-6B14-415A-9219-066B5B837572}"/>
               </a:ext>
             </a:extLst>
           </p:cNvPr>
@@ -3553,7 +3654,7 @@
           <p:cNvPr id="13" name="step-text-2">
             <a:extLst xmlns:a="http://schemas.openxmlformats.org/drawingml/2006/main">
               <a:ext uri="{FF2B5EF4-FFF2-40B4-BE49-F238E27FC236}">
-                <a16:creationId xmlns:a16="http://schemas.microsoft.com/office/drawing/2014/main" id="{DCB6C023-F896-430D-A289-BCC2756645E9}"/>
+                <a16:creationId xmlns:a16="http://schemas.microsoft.com/office/drawing/2014/main" id="{46AD0DBF-61C8-4CD0-A102-4E24312FC939}"/>
               </a:ext>
             </a:extLst>
           </p:cNvPr>
@@ -3611,7 +3712,7 @@
           <p:cNvPr id="14" name="step-dot-3">
             <a:extLst xmlns:a="http://schemas.openxmlformats.org/drawingml/2006/main">
               <a:ext uri="{FF2B5EF4-FFF2-40B4-BE49-F238E27FC236}">
-                <a16:creationId xmlns:a16="http://schemas.microsoft.com/office/drawing/2014/main" id="{AC63ACFB-C88B-43CF-92B6-A64213D8BF79}"/>
+                <a16:creationId xmlns:a16="http://schemas.microsoft.com/office/drawing/2014/main" id="{84803876-CB06-4B12-9B94-221A6266FC95}"/>
               </a:ext>
             </a:extLst>
           </p:cNvPr>
@@ -3646,7 +3747,7 @@
           <p:cNvPr id="15" name="step-line-3">
             <a:extLst xmlns:a="http://schemas.openxmlformats.org/drawingml/2006/main">
               <a:ext uri="{FF2B5EF4-FFF2-40B4-BE49-F238E27FC236}">
-                <a16:creationId xmlns:a16="http://schemas.microsoft.com/office/drawing/2014/main" id="{3BFEAF2F-8CEF-4430-810B-F16F618CDCCA}"/>
+                <a16:creationId xmlns:a16="http://schemas.microsoft.com/office/drawing/2014/main" id="{37E01275-559C-4473-B243-C8AC14619556}"/>
               </a:ext>
             </a:extLst>
           </p:cNvPr>
@@ -3681,7 +3782,7 @@
           <p:cNvPr id="16" name="step-text-3">
             <a:extLst xmlns:a="http://schemas.openxmlformats.org/drawingml/2006/main">
               <a:ext uri="{FF2B5EF4-FFF2-40B4-BE49-F238E27FC236}">
-                <a16:creationId xmlns:a16="http://schemas.microsoft.com/office/drawing/2014/main" id="{C8E66C43-FE58-424A-A492-D4350F23A56B}"/>
+                <a16:creationId xmlns:a16="http://schemas.microsoft.com/office/drawing/2014/main" id="{3CDC592D-EA63-44FD-8836-FF6EFB9A79DF}"/>
               </a:ext>
             </a:extLst>
           </p:cNvPr>
@@ -3739,7 +3840,7 @@
           <p:cNvPr id="17" name="step-dot-4">
             <a:extLst xmlns:a="http://schemas.openxmlformats.org/drawingml/2006/main">
               <a:ext uri="{FF2B5EF4-FFF2-40B4-BE49-F238E27FC236}">
-                <a16:creationId xmlns:a16="http://schemas.microsoft.com/office/drawing/2014/main" id="{170042F4-CB50-45A1-8226-B0E0462A13C8}"/>
+                <a16:creationId xmlns:a16="http://schemas.microsoft.com/office/drawing/2014/main" id="{F0B367A1-1155-45F1-B4E6-1ABC89BAB4DE}"/>
               </a:ext>
             </a:extLst>
           </p:cNvPr>
@@ -3774,7 +3875,7 @@
           <p:cNvPr id="18" name="step-text-4">
             <a:extLst xmlns:a="http://schemas.openxmlformats.org/drawingml/2006/main">
               <a:ext uri="{FF2B5EF4-FFF2-40B4-BE49-F238E27FC236}">
-                <a16:creationId xmlns:a16="http://schemas.microsoft.com/office/drawing/2014/main" id="{8E3B0AC7-9B86-41D1-8F46-167F7F235412}"/>
+                <a16:creationId xmlns:a16="http://schemas.microsoft.com/office/drawing/2014/main" id="{A188772F-3F39-44F4-8D17-337DF7DEE079}"/>
               </a:ext>
             </a:extLst>
           </p:cNvPr>
@@ -3832,7 +3933,7 @@
           <p:cNvPr id="19" name="pain-summary">
             <a:extLst xmlns:a="http://schemas.openxmlformats.org/drawingml/2006/main">
               <a:ext uri="{FF2B5EF4-FFF2-40B4-BE49-F238E27FC236}">
-                <a16:creationId xmlns:a16="http://schemas.microsoft.com/office/drawing/2014/main" id="{A9AFF6D3-05C9-44CB-A6EF-0BC7DE19A7C2}"/>
+                <a16:creationId xmlns:a16="http://schemas.microsoft.com/office/drawing/2014/main" id="{95B3A311-CEA5-48F4-8B26-258BA726E1ED}"/>
               </a:ext>
             </a:extLst>
           </p:cNvPr>
@@ -3867,7 +3968,7 @@
           <p:cNvPr id="20" name="auto-text-11">
             <a:extLst xmlns:a="http://schemas.openxmlformats.org/drawingml/2006/main">
               <a:ext uri="{FF2B5EF4-FFF2-40B4-BE49-F238E27FC236}">
-                <a16:creationId xmlns:a16="http://schemas.microsoft.com/office/drawing/2014/main" id="{FFB49076-ECC3-4E30-9640-C89C01BDF6B6}"/>
+                <a16:creationId xmlns:a16="http://schemas.microsoft.com/office/drawing/2014/main" id="{2E5D6E6A-2E94-44F7-9414-2CFE20506117}"/>
               </a:ext>
             </a:extLst>
           </p:cNvPr>
@@ -3925,7 +4026,7 @@
           <p:cNvPr id="21" name="auto-text-12">
             <a:extLst xmlns:a="http://schemas.openxmlformats.org/drawingml/2006/main">
               <a:ext uri="{FF2B5EF4-FFF2-40B4-BE49-F238E27FC236}">
-                <a16:creationId xmlns:a16="http://schemas.microsoft.com/office/drawing/2014/main" id="{3087735C-C5BD-4FBD-A1F6-8939E973DE09}"/>
+                <a16:creationId xmlns:a16="http://schemas.microsoft.com/office/drawing/2014/main" id="{D63C4F66-66D7-4B9A-BB0A-C5B367252F0E}"/>
               </a:ext>
             </a:extLst>
           </p:cNvPr>
@@ -4052,7 +4153,7 @@
           <p:cNvPr id="22" name="auto-text-13">
             <a:extLst xmlns:a="http://schemas.openxmlformats.org/drawingml/2006/main">
               <a:ext uri="{FF2B5EF4-FFF2-40B4-BE49-F238E27FC236}">
-                <a16:creationId xmlns:a16="http://schemas.microsoft.com/office/drawing/2014/main" id="{73125CB9-9401-4F66-A4D0-B626BA1044FA}"/>
+                <a16:creationId xmlns:a16="http://schemas.microsoft.com/office/drawing/2014/main" id="{1F97706B-582B-417B-BA56-BFB77D6DC702}"/>
               </a:ext>
             </a:extLst>
           </p:cNvPr>
@@ -4110,7 +4211,7 @@
           <p:cNvPr id="23" name="prompt-shot-frame">
             <a:extLst xmlns:a="http://schemas.openxmlformats.org/drawingml/2006/main">
               <a:ext uri="{FF2B5EF4-FFF2-40B4-BE49-F238E27FC236}">
-                <a16:creationId xmlns:a16="http://schemas.microsoft.com/office/drawing/2014/main" id="{7AF36877-7C2F-4281-A41F-6096AFB4DE10}"/>
+                <a16:creationId xmlns:a16="http://schemas.microsoft.com/office/drawing/2014/main" id="{6463C3D5-7224-4871-8A87-1D3A54243C7B}"/>
               </a:ext>
             </a:extLst>
           </p:cNvPr>
@@ -4145,7 +4246,7 @@
           <p:cNvPr id="24" name="prompt-shot-label">
             <a:extLst xmlns:a="http://schemas.openxmlformats.org/drawingml/2006/main">
               <a:ext uri="{FF2B5EF4-FFF2-40B4-BE49-F238E27FC236}">
-                <a16:creationId xmlns:a16="http://schemas.microsoft.com/office/drawing/2014/main" id="{F5BD87F2-E125-4EDF-874E-C3D6639E6FB7}"/>
+                <a16:creationId xmlns:a16="http://schemas.microsoft.com/office/drawing/2014/main" id="{AD3AE4AE-6D51-4B99-BEC4-103B0A31B710}"/>
               </a:ext>
             </a:extLst>
           </p:cNvPr>
@@ -4203,7 +4304,7 @@
           <p:cNvPr id="25" name="prompt-shot-sub">
             <a:extLst xmlns:a="http://schemas.openxmlformats.org/drawingml/2006/main">
               <a:ext uri="{FF2B5EF4-FFF2-40B4-BE49-F238E27FC236}">
-                <a16:creationId xmlns:a16="http://schemas.microsoft.com/office/drawing/2014/main" id="{32EDF13D-C700-4B68-A305-55CEDB1D3688}"/>
+                <a16:creationId xmlns:a16="http://schemas.microsoft.com/office/drawing/2014/main" id="{70DD3ECF-1591-417F-8F1A-4D9A3CBD93BE}"/>
               </a:ext>
             </a:extLst>
           </p:cNvPr>
@@ -4261,7 +4362,7 @@
           <p:cNvPr id="26" name="misjudge-case-frame">
             <a:extLst xmlns:a="http://schemas.openxmlformats.org/drawingml/2006/main">
               <a:ext uri="{FF2B5EF4-FFF2-40B4-BE49-F238E27FC236}">
-                <a16:creationId xmlns:a16="http://schemas.microsoft.com/office/drawing/2014/main" id="{4C086BF8-6A97-477D-B948-C021E7F6B746}"/>
+                <a16:creationId xmlns:a16="http://schemas.microsoft.com/office/drawing/2014/main" id="{B839B8EE-5121-4071-BCD8-B20102E18FBD}"/>
               </a:ext>
             </a:extLst>
           </p:cNvPr>
@@ -4296,7 +4397,7 @@
           <p:cNvPr id="27" name="misjudge-case-label">
             <a:extLst xmlns:a="http://schemas.openxmlformats.org/drawingml/2006/main">
               <a:ext uri="{FF2B5EF4-FFF2-40B4-BE49-F238E27FC236}">
-                <a16:creationId xmlns:a16="http://schemas.microsoft.com/office/drawing/2014/main" id="{A8E735DE-74FE-4365-89CB-27D4508EC374}"/>
+                <a16:creationId xmlns:a16="http://schemas.microsoft.com/office/drawing/2014/main" id="{B7ECE82A-D3C9-41FA-8562-18A1255A1869}"/>
               </a:ext>
             </a:extLst>
           </p:cNvPr>
@@ -4354,7 +4455,7 @@
           <p:cNvPr id="28" name="misjudge-case-sub">
             <a:extLst xmlns:a="http://schemas.openxmlformats.org/drawingml/2006/main">
               <a:ext uri="{FF2B5EF4-FFF2-40B4-BE49-F238E27FC236}">
-                <a16:creationId xmlns:a16="http://schemas.microsoft.com/office/drawing/2014/main" id="{7260AE7A-283D-4536-B58F-6725F8B6E903}"/>
+                <a16:creationId xmlns:a16="http://schemas.microsoft.com/office/drawing/2014/main" id="{FA8A65A1-8F9F-4B84-9F81-23D801844383}"/>
               </a:ext>
             </a:extLst>
           </p:cNvPr>
@@ -4412,7 +4513,7 @@
           <p:cNvPr id="29" name="auto-text-14">
             <a:extLst xmlns:a="http://schemas.openxmlformats.org/drawingml/2006/main">
               <a:ext uri="{FF2B5EF4-FFF2-40B4-BE49-F238E27FC236}">
-                <a16:creationId xmlns:a16="http://schemas.microsoft.com/office/drawing/2014/main" id="{75BF2FB8-13A7-401E-8ADB-73B34F006D7E}"/>
+                <a16:creationId xmlns:a16="http://schemas.microsoft.com/office/drawing/2014/main" id="{D5C796B7-3748-4756-9655-88C7C08439D4}"/>
               </a:ext>
             </a:extLst>
           </p:cNvPr>
@@ -4468,7 +4569,7 @@
     </p:spTree>
     <p:extLst>
       <p:ext uri="{BB962C8B-B14F-4D97-AF65-F5344CB8AC3E}">
-        <p14:creationId xmlns:p14="http://schemas.microsoft.com/office/powerpoint/2010/main" val="2049449619"/>
+        <p14:creationId xmlns:p14="http://schemas.microsoft.com/office/powerpoint/2010/main" val="1774512191"/>
       </p:ext>
     </p:extLst>
   </p:cSld>
@@ -4499,7 +4600,7 @@
           <p:cNvPr id="14" name="accent-3">
             <a:extLst xmlns:a="http://schemas.openxmlformats.org/drawingml/2006/main">
               <a:ext uri="{FF2B5EF4-FFF2-40B4-BE49-F238E27FC236}">
-                <a16:creationId xmlns:a16="http://schemas.microsoft.com/office/drawing/2014/main" id="{F09200BB-5FE7-446B-BF2E-A99DEB8DAC61}"/>
+                <a16:creationId xmlns:a16="http://schemas.microsoft.com/office/drawing/2014/main" id="{2049BCBD-B5A4-462F-8981-AB188CF03B37}"/>
               </a:ext>
             </a:extLst>
           </p:cNvPr>
@@ -4534,7 +4635,7 @@
           <p:cNvPr id="2" name="title-3">
             <a:extLst xmlns:a="http://schemas.openxmlformats.org/drawingml/2006/main">
               <a:ext uri="{FF2B5EF4-FFF2-40B4-BE49-F238E27FC236}">
-                <a16:creationId xmlns:a16="http://schemas.microsoft.com/office/drawing/2014/main" id="{FE7569BD-474C-4F11-866C-BB1277565CDC}"/>
+                <a16:creationId xmlns:a16="http://schemas.microsoft.com/office/drawing/2014/main" id="{70382952-F01B-417D-B96D-C021FD7E2AA7}"/>
               </a:ext>
             </a:extLst>
           </p:cNvPr>
@@ -4592,7 +4693,7 @@
           <p:cNvPr id="3" name="page-3">
             <a:extLst xmlns:a="http://schemas.openxmlformats.org/drawingml/2006/main">
               <a:ext uri="{FF2B5EF4-FFF2-40B4-BE49-F238E27FC236}">
-                <a16:creationId xmlns:a16="http://schemas.microsoft.com/office/drawing/2014/main" id="{6C04D440-BBBE-4191-80B9-9E128808049F}"/>
+                <a16:creationId xmlns:a16="http://schemas.microsoft.com/office/drawing/2014/main" id="{C9FA7035-47B7-4306-9532-2580A6DB6993}"/>
               </a:ext>
             </a:extLst>
           </p:cNvPr>
@@ -4650,7 +4751,7 @@
           <p:cNvPr id="4" name="auto-text-15">
             <a:extLst xmlns:a="http://schemas.openxmlformats.org/drawingml/2006/main">
               <a:ext uri="{FF2B5EF4-FFF2-40B4-BE49-F238E27FC236}">
-                <a16:creationId xmlns:a16="http://schemas.microsoft.com/office/drawing/2014/main" id="{CBAEC919-71E1-463D-851F-1AFEDBB0336F}"/>
+                <a16:creationId xmlns:a16="http://schemas.microsoft.com/office/drawing/2014/main" id="{C013EDFE-F46D-4FAE-AD69-F3DD4690744A}"/>
               </a:ext>
             </a:extLst>
           </p:cNvPr>
@@ -4708,7 +4809,7 @@
           <p:cNvPr id="5" name="mjbench-dimensions-back">
             <a:extLst xmlns:a="http://schemas.openxmlformats.org/drawingml/2006/main">
               <a:ext uri="{FF2B5EF4-FFF2-40B4-BE49-F238E27FC236}">
-                <a16:creationId xmlns:a16="http://schemas.microsoft.com/office/drawing/2014/main" id="{EC80C6FC-362D-4CDC-B610-F70B10400B83}"/>
+                <a16:creationId xmlns:a16="http://schemas.microsoft.com/office/drawing/2014/main" id="{46DBE557-D215-43D8-ABCE-4283A89233D9}"/>
               </a:ext>
             </a:extLst>
           </p:cNvPr>
@@ -4747,7 +4848,7 @@
           <p:nvPr/>
         </p:nvPicPr>
         <p:blipFill>
-          <a:blip xmlns:r="http://schemas.openxmlformats.org/officeDocument/2006/relationships" xmlns:a="http://schemas.openxmlformats.org/drawingml/2006/main" r:embed="R14ef856186284197"/>
+          <a:blip xmlns:r="http://schemas.openxmlformats.org/officeDocument/2006/relationships" xmlns:a="http://schemas.openxmlformats.org/drawingml/2006/main" r:embed="R1aed782c5c804b61"/>
           <a:stretch xmlns:a="http://schemas.openxmlformats.org/drawingml/2006/main"/>
         </p:blipFill>
         <p:spPr>
@@ -4767,7 +4868,7 @@
           <p:cNvPr id="7" name="mmrb2-tasks-back">
             <a:extLst xmlns:a="http://schemas.openxmlformats.org/drawingml/2006/main">
               <a:ext uri="{FF2B5EF4-FFF2-40B4-BE49-F238E27FC236}">
-                <a16:creationId xmlns:a16="http://schemas.microsoft.com/office/drawing/2014/main" id="{168E96B0-6CD2-476B-974B-0431146D6192}"/>
+                <a16:creationId xmlns:a16="http://schemas.microsoft.com/office/drawing/2014/main" id="{69D58279-4AB1-4C5A-9D38-B53FBEC19E29}"/>
               </a:ext>
             </a:extLst>
           </p:cNvPr>
@@ -4806,7 +4907,7 @@
           <p:nvPr/>
         </p:nvPicPr>
         <p:blipFill>
-          <a:blip xmlns:r="http://schemas.openxmlformats.org/officeDocument/2006/relationships" xmlns:a="http://schemas.openxmlformats.org/drawingml/2006/main" r:embed="Rfd3ef7574a624324"/>
+          <a:blip xmlns:r="http://schemas.openxmlformats.org/officeDocument/2006/relationships" xmlns:a="http://schemas.openxmlformats.org/drawingml/2006/main" r:embed="Ra72faef281e6476c"/>
           <a:stretch xmlns:a="http://schemas.openxmlformats.org/drawingml/2006/main"/>
         </p:blipFill>
         <p:spPr>
@@ -4826,7 +4927,7 @@
           <p:cNvPr id="9" name="auto-text-16">
             <a:extLst xmlns:a="http://schemas.openxmlformats.org/drawingml/2006/main">
               <a:ext uri="{FF2B5EF4-FFF2-40B4-BE49-F238E27FC236}">
-                <a16:creationId xmlns:a16="http://schemas.microsoft.com/office/drawing/2014/main" id="{29A6AFCB-DCA6-468E-98A5-D4CA2C3B7EEC}"/>
+                <a16:creationId xmlns:a16="http://schemas.microsoft.com/office/drawing/2014/main" id="{3D92A2A3-6E1F-400D-8183-27E410932E9C}"/>
               </a:ext>
             </a:extLst>
           </p:cNvPr>
@@ -4884,7 +4985,7 @@
           <p:cNvPr id="10" name="auto-text-17">
             <a:extLst xmlns:a="http://schemas.openxmlformats.org/drawingml/2006/main">
               <a:ext uri="{FF2B5EF4-FFF2-40B4-BE49-F238E27FC236}">
-                <a16:creationId xmlns:a16="http://schemas.microsoft.com/office/drawing/2014/main" id="{1C3DE863-2B26-4250-80D8-F638137AFB0A}"/>
+                <a16:creationId xmlns:a16="http://schemas.microsoft.com/office/drawing/2014/main" id="{18197D70-0C78-4E93-98B8-8E774E60A0EF}"/>
               </a:ext>
             </a:extLst>
           </p:cNvPr>
@@ -4942,7 +5043,7 @@
           <p:cNvPr id="11" name="trend-conclusion">
             <a:extLst xmlns:a="http://schemas.openxmlformats.org/drawingml/2006/main">
               <a:ext uri="{FF2B5EF4-FFF2-40B4-BE49-F238E27FC236}">
-                <a16:creationId xmlns:a16="http://schemas.microsoft.com/office/drawing/2014/main" id="{7FAF6697-AEA4-4B2E-A75D-5C84617C0E1B}"/>
+                <a16:creationId xmlns:a16="http://schemas.microsoft.com/office/drawing/2014/main" id="{1A8B8197-3E74-4281-B2C9-8B76A8AC4528}"/>
               </a:ext>
             </a:extLst>
           </p:cNvPr>
@@ -4977,7 +5078,7 @@
           <p:cNvPr id="12" name="auto-text-18">
             <a:extLst xmlns:a="http://schemas.openxmlformats.org/drawingml/2006/main">
               <a:ext uri="{FF2B5EF4-FFF2-40B4-BE49-F238E27FC236}">
-                <a16:creationId xmlns:a16="http://schemas.microsoft.com/office/drawing/2014/main" id="{242BEBB1-E218-44EB-A871-607EFF15D817}"/>
+                <a16:creationId xmlns:a16="http://schemas.microsoft.com/office/drawing/2014/main" id="{D1650898-C3E4-4E1E-A4B2-2F6342A6D1BB}"/>
               </a:ext>
             </a:extLst>
           </p:cNvPr>
@@ -5032,10 +5133,10 @@
       </p:sp>
       <p:sp>
         <p:nvSpPr>
-          <p:cNvPr id="13" name="source-650-0.8152843049171624">
-            <a:extLst xmlns:a="http://schemas.openxmlformats.org/drawingml/2006/main">
-              <a:ext uri="{FF2B5EF4-FFF2-40B4-BE49-F238E27FC236}">
-                <a16:creationId xmlns:a16="http://schemas.microsoft.com/office/drawing/2014/main" id="{6E8ECD40-0072-4BC8-B6E4-95532C49055C}"/>
+          <p:cNvPr id="13" name="source-650-0.4428498297981984">
+            <a:extLst xmlns:a="http://schemas.openxmlformats.org/drawingml/2006/main">
+              <a:ext uri="{FF2B5EF4-FFF2-40B4-BE49-F238E27FC236}">
+                <a16:creationId xmlns:a16="http://schemas.microsoft.com/office/drawing/2014/main" id="{AC9763D8-6D35-4B1D-B24B-21541F5F9DCC}"/>
               </a:ext>
             </a:extLst>
           </p:cNvPr>
@@ -5091,7 +5192,7 @@
     </p:spTree>
     <p:extLst>
       <p:ext uri="{BB962C8B-B14F-4D97-AF65-F5344CB8AC3E}">
-        <p14:creationId xmlns:p14="http://schemas.microsoft.com/office/powerpoint/2010/main" val="718333687"/>
+        <p14:creationId xmlns:p14="http://schemas.microsoft.com/office/powerpoint/2010/main" val="23789263"/>
       </p:ext>
     </p:extLst>
   </p:cSld>
@@ -5119,10 +5220,10 @@
       </p:grpSpPr>
       <p:sp>
         <p:nvSpPr>
-          <p:cNvPr id="20" name="accent-4">
-            <a:extLst xmlns:a="http://schemas.openxmlformats.org/drawingml/2006/main">
-              <a:ext uri="{FF2B5EF4-FFF2-40B4-BE49-F238E27FC236}">
-                <a16:creationId xmlns:a16="http://schemas.microsoft.com/office/drawing/2014/main" id="{92DA0F88-F989-471C-8127-AE9387AAC980}"/>
+          <p:cNvPr id="28" name="accent-4">
+            <a:extLst xmlns:a="http://schemas.openxmlformats.org/drawingml/2006/main">
+              <a:ext uri="{FF2B5EF4-FFF2-40B4-BE49-F238E27FC236}">
+                <a16:creationId xmlns:a16="http://schemas.microsoft.com/office/drawing/2014/main" id="{F873B106-55C7-4712-8156-95978284E523}"/>
               </a:ext>
             </a:extLst>
           </p:cNvPr>
@@ -5157,7 +5258,7 @@
           <p:cNvPr id="2" name="title-4">
             <a:extLst xmlns:a="http://schemas.openxmlformats.org/drawingml/2006/main">
               <a:ext uri="{FF2B5EF4-FFF2-40B4-BE49-F238E27FC236}">
-                <a16:creationId xmlns:a16="http://schemas.microsoft.com/office/drawing/2014/main" id="{47E8E797-D5F6-43B1-A392-9FB4B53354F9}"/>
+                <a16:creationId xmlns:a16="http://schemas.microsoft.com/office/drawing/2014/main" id="{4E71CF60-D29D-4A62-B050-5D9AFEB80282}"/>
               </a:ext>
             </a:extLst>
           </p:cNvPr>
@@ -5205,7 +5306,7 @@
                 <a:ea typeface="Microsoft YaHei"/>
                 <a:cs typeface="Microsoft YaHei"/>
               </a:rPr>
-              <a:t>VLM能够规模化评价图像，但仍需校准、共识与证据核验</a:t>
+              <a:t>头部公司已形成“任务标准＋自动Judge＋人工校准”闭环</a:t>
             </a:r>
           </a:p>
         </p:txBody>
@@ -5215,7 +5316,7 @@
           <p:cNvPr id="3" name="page-4">
             <a:extLst xmlns:a="http://schemas.openxmlformats.org/drawingml/2006/main">
               <a:ext uri="{FF2B5EF4-FFF2-40B4-BE49-F238E27FC236}">
-                <a16:creationId xmlns:a16="http://schemas.microsoft.com/office/drawing/2014/main" id="{2E2FC8D9-6FFA-4501-81E2-477FF29D31E5}"/>
+                <a16:creationId xmlns:a16="http://schemas.microsoft.com/office/drawing/2014/main" id="{3666CB23-3173-453A-9EF3-4556684EF79B}"/>
               </a:ext>
             </a:extLst>
           </p:cNvPr>
@@ -5270,34 +5371,266 @@
       </p:sp>
       <p:sp>
         <p:nvSpPr>
-          <p:cNvPr id="4" name="stat-left">
-            <a:extLst xmlns:a="http://schemas.openxmlformats.org/drawingml/2006/main">
-              <a:ext uri="{FF2B5EF4-FFF2-40B4-BE49-F238E27FC236}">
-                <a16:creationId xmlns:a16="http://schemas.microsoft.com/office/drawing/2014/main" id="{8335ABFD-79BF-460B-83F9-0BDD6862FD31}"/>
-              </a:ext>
-            </a:extLst>
-          </p:cNvPr>
-          <p:cNvSpPr>
-            <a:spLocks xmlns:a="http://schemas.openxmlformats.org/drawingml/2006/main" noGrp="1"/>
-          </p:cNvSpPr>
-          <p:nvPr/>
-        </p:nvSpPr>
-        <p:spPr>
-          <a:xfrm xmlns:a="http://schemas.openxmlformats.org/drawingml/2006/main">
-            <a:off x="514350" y="1200150"/>
-            <a:ext cx="5334000" cy="990600"/>
+          <p:cNvPr id="4" name="auto-text-19">
+            <a:extLst xmlns:a="http://schemas.openxmlformats.org/drawingml/2006/main">
+              <a:ext uri="{FF2B5EF4-FFF2-40B4-BE49-F238E27FC236}">
+                <a16:creationId xmlns:a16="http://schemas.microsoft.com/office/drawing/2014/main" id="{6EF79B60-1356-4EF5-B9C3-5B7CB4E01358}"/>
+              </a:ext>
+            </a:extLst>
+          </p:cNvPr>
+          <p:cNvSpPr>
+            <a:spLocks xmlns:a="http://schemas.openxmlformats.org/drawingml/2006/main" noGrp="1"/>
+          </p:cNvSpPr>
+          <p:nvPr/>
+        </p:nvSpPr>
+        <p:spPr>
+          <a:xfrm xmlns:a="http://schemas.openxmlformats.org/drawingml/2006/main">
+            <a:off x="628650" y="990600"/>
+            <a:ext cx="10668000" cy="323850"/>
+          </a:xfrm>
+          <a:prstGeom xmlns:a="http://schemas.openxmlformats.org/drawingml/2006/main" prst="rect">
+            <a:avLst/>
+          </a:prstGeom>
+          <a:noFill xmlns:a="http://schemas.openxmlformats.org/drawingml/2006/main"/>
+          <a:ln xmlns:a="http://schemas.openxmlformats.org/drawingml/2006/main" w="0">
+            <a:noFill/>
+            <a:prstDash val="solid"/>
+          </a:ln>
+        </p:spPr>
+        <p:txBody>
+          <a:bodyPr xmlns:a="http://schemas.openxmlformats.org/drawingml/2006/main" wrap="square" lIns="0" tIns="0" rIns="0" bIns="0" anchor="t">
+            <a:normAutofit fontScale="100000"/>
+          </a:bodyPr>
+          <a:lstStyle xmlns:a="http://schemas.openxmlformats.org/drawingml/2006/main"/>
+          <a:p xmlns:a="http://schemas.openxmlformats.org/drawingml/2006/main">
+            <a:pPr algn="l">
+              <a:defRPr sz="1350" b="0" i="0">
+                <a:solidFill>
+                  <a:srgbClr val="66778A"/>
+                </a:solidFill>
+                <a:latin typeface="Microsoft YaHei"/>
+                <a:ea typeface="Microsoft YaHei"/>
+                <a:cs typeface="Microsoft YaHei"/>
+              </a:defRPr>
+            </a:pPr>
+            <a:r>
+              <a:rPr sz="1350" b="0" i="0">
+                <a:solidFill>
+                  <a:srgbClr val="66778A"/>
+                </a:solidFill>
+                <a:latin typeface="Microsoft YaHei"/>
+                <a:ea typeface="Microsoft YaHei"/>
+                <a:cs typeface="Microsoft YaHei"/>
+              </a:rPr>
+              <a:t>公开做法虽不完全相同，但都先拆解任务标准，再组合自动评估、人工验证和训练回流。</a:t>
+            </a:r>
+          </a:p>
+        </p:txBody>
+      </p:sp>
+      <p:sp>
+        <p:nvSpPr>
+          <p:cNvPr id="5" name="auto-text-20">
+            <a:extLst xmlns:a="http://schemas.openxmlformats.org/drawingml/2006/main">
+              <a:ext uri="{FF2B5EF4-FFF2-40B4-BE49-F238E27FC236}">
+                <a16:creationId xmlns:a16="http://schemas.microsoft.com/office/drawing/2014/main" id="{F6DF4BC1-8FE0-4E8D-ABF7-AA20ADBDB6F4}"/>
+              </a:ext>
+            </a:extLst>
+          </p:cNvPr>
+          <p:cNvSpPr>
+            <a:spLocks xmlns:a="http://schemas.openxmlformats.org/drawingml/2006/main" noGrp="1"/>
+          </p:cNvSpPr>
+          <p:nvPr/>
+        </p:nvSpPr>
+        <p:spPr>
+          <a:xfrm xmlns:a="http://schemas.openxmlformats.org/drawingml/2006/main">
+            <a:off x="590550" y="1428750"/>
+            <a:ext cx="1619250" cy="266700"/>
+          </a:xfrm>
+          <a:prstGeom xmlns:a="http://schemas.openxmlformats.org/drawingml/2006/main" prst="rect">
+            <a:avLst/>
+          </a:prstGeom>
+          <a:noFill xmlns:a="http://schemas.openxmlformats.org/drawingml/2006/main"/>
+          <a:ln xmlns:a="http://schemas.openxmlformats.org/drawingml/2006/main" w="0">
+            <a:noFill/>
+            <a:prstDash val="solid"/>
+          </a:ln>
+        </p:spPr>
+        <p:txBody>
+          <a:bodyPr xmlns:a="http://schemas.openxmlformats.org/drawingml/2006/main" wrap="square" lIns="0" tIns="0" rIns="0" bIns="0" anchor="t">
+            <a:normAutofit fontScale="100000"/>
+          </a:bodyPr>
+          <a:lstStyle xmlns:a="http://schemas.openxmlformats.org/drawingml/2006/main"/>
+          <a:p xmlns:a="http://schemas.openxmlformats.org/drawingml/2006/main">
+            <a:pPr algn="l">
+              <a:defRPr sz="1350" b="1" i="0">
+                <a:solidFill>
+                  <a:srgbClr val="66778A"/>
+                </a:solidFill>
+                <a:latin typeface="Microsoft YaHei"/>
+                <a:ea typeface="Microsoft YaHei"/>
+                <a:cs typeface="Microsoft YaHei"/>
+              </a:defRPr>
+            </a:pPr>
+            <a:r>
+              <a:rPr sz="1350" b="1" i="0">
+                <a:solidFill>
+                  <a:srgbClr val="66778A"/>
+                </a:solidFill>
+                <a:latin typeface="Microsoft YaHei"/>
+                <a:ea typeface="Microsoft YaHei"/>
+                <a:cs typeface="Microsoft YaHei"/>
+              </a:rPr>
+              <a:t>公司／团队</a:t>
+            </a:r>
+          </a:p>
+        </p:txBody>
+      </p:sp>
+      <p:sp>
+        <p:nvSpPr>
+          <p:cNvPr id="6" name="auto-text-21">
+            <a:extLst xmlns:a="http://schemas.openxmlformats.org/drawingml/2006/main">
+              <a:ext uri="{FF2B5EF4-FFF2-40B4-BE49-F238E27FC236}">
+                <a16:creationId xmlns:a16="http://schemas.microsoft.com/office/drawing/2014/main" id="{0184258A-B1A4-4C98-B127-4C5ACE58964D}"/>
+              </a:ext>
+            </a:extLst>
+          </p:cNvPr>
+          <p:cNvSpPr>
+            <a:spLocks xmlns:a="http://schemas.openxmlformats.org/drawingml/2006/main" noGrp="1"/>
+          </p:cNvSpPr>
+          <p:nvPr/>
+        </p:nvSpPr>
+        <p:spPr>
+          <a:xfrm xmlns:a="http://schemas.openxmlformats.org/drawingml/2006/main">
+            <a:off x="2533650" y="1428750"/>
+            <a:ext cx="6477000" cy="266700"/>
+          </a:xfrm>
+          <a:prstGeom xmlns:a="http://schemas.openxmlformats.org/drawingml/2006/main" prst="rect">
+            <a:avLst/>
+          </a:prstGeom>
+          <a:noFill xmlns:a="http://schemas.openxmlformats.org/drawingml/2006/main"/>
+          <a:ln xmlns:a="http://schemas.openxmlformats.org/drawingml/2006/main" w="0">
+            <a:noFill/>
+            <a:prstDash val="solid"/>
+          </a:ln>
+        </p:spPr>
+        <p:txBody>
+          <a:bodyPr xmlns:a="http://schemas.openxmlformats.org/drawingml/2006/main" wrap="square" lIns="0" tIns="0" rIns="0" bIns="0" anchor="t">
+            <a:normAutofit fontScale="100000"/>
+          </a:bodyPr>
+          <a:lstStyle xmlns:a="http://schemas.openxmlformats.org/drawingml/2006/main"/>
+          <a:p xmlns:a="http://schemas.openxmlformats.org/drawingml/2006/main">
+            <a:pPr algn="l">
+              <a:defRPr sz="1350" b="1" i="0">
+                <a:solidFill>
+                  <a:srgbClr val="66778A"/>
+                </a:solidFill>
+                <a:latin typeface="Microsoft YaHei"/>
+                <a:ea typeface="Microsoft YaHei"/>
+                <a:cs typeface="Microsoft YaHei"/>
+              </a:defRPr>
+            </a:pPr>
+            <a:r>
+              <a:rPr sz="1350" b="1" i="0">
+                <a:solidFill>
+                  <a:srgbClr val="66778A"/>
+                </a:solidFill>
+                <a:latin typeface="Microsoft YaHei"/>
+                <a:ea typeface="Microsoft YaHei"/>
+                <a:cs typeface="Microsoft YaHei"/>
+              </a:rPr>
+              <a:t>公开实践</a:t>
+            </a:r>
+          </a:p>
+        </p:txBody>
+      </p:sp>
+      <p:sp>
+        <p:nvSpPr>
+          <p:cNvPr id="7" name="auto-text-22">
+            <a:extLst xmlns:a="http://schemas.openxmlformats.org/drawingml/2006/main">
+              <a:ext uri="{FF2B5EF4-FFF2-40B4-BE49-F238E27FC236}">
+                <a16:creationId xmlns:a16="http://schemas.microsoft.com/office/drawing/2014/main" id="{BA46CB41-8A3E-4194-BC17-F97CABBF966C}"/>
+              </a:ext>
+            </a:extLst>
+          </p:cNvPr>
+          <p:cNvSpPr>
+            <a:spLocks xmlns:a="http://schemas.openxmlformats.org/drawingml/2006/main" noGrp="1"/>
+          </p:cNvSpPr>
+          <p:nvPr/>
+        </p:nvSpPr>
+        <p:spPr>
+          <a:xfrm xmlns:a="http://schemas.openxmlformats.org/drawingml/2006/main">
+            <a:off x="9620250" y="1428750"/>
+            <a:ext cx="1714500" cy="266700"/>
+          </a:xfrm>
+          <a:prstGeom xmlns:a="http://schemas.openxmlformats.org/drawingml/2006/main" prst="rect">
+            <a:avLst/>
+          </a:prstGeom>
+          <a:noFill xmlns:a="http://schemas.openxmlformats.org/drawingml/2006/main"/>
+          <a:ln xmlns:a="http://schemas.openxmlformats.org/drawingml/2006/main" w="0">
+            <a:noFill/>
+            <a:prstDash val="solid"/>
+          </a:ln>
+        </p:spPr>
+        <p:txBody>
+          <a:bodyPr xmlns:a="http://schemas.openxmlformats.org/drawingml/2006/main" wrap="square" lIns="0" tIns="0" rIns="0" bIns="0" anchor="t">
+            <a:normAutofit fontScale="100000"/>
+          </a:bodyPr>
+          <a:lstStyle xmlns:a="http://schemas.openxmlformats.org/drawingml/2006/main"/>
+          <a:p xmlns:a="http://schemas.openxmlformats.org/drawingml/2006/main">
+            <a:pPr algn="ctr">
+              <a:defRPr sz="1350" b="1" i="0">
+                <a:solidFill>
+                  <a:srgbClr val="66778A"/>
+                </a:solidFill>
+                <a:latin typeface="Microsoft YaHei"/>
+                <a:ea typeface="Microsoft YaHei"/>
+                <a:cs typeface="Microsoft YaHei"/>
+              </a:defRPr>
+            </a:pPr>
+            <a:r>
+              <a:rPr sz="1350" b="1" i="0">
+                <a:solidFill>
+                  <a:srgbClr val="66778A"/>
+                </a:solidFill>
+                <a:latin typeface="Microsoft YaHei"/>
+                <a:ea typeface="Microsoft YaHei"/>
+                <a:cs typeface="Microsoft YaHei"/>
+              </a:rPr>
+              <a:t>方法特征</a:t>
+            </a:r>
+          </a:p>
+        </p:txBody>
+      </p:sp>
+      <p:sp>
+        <p:nvSpPr>
+          <p:cNvPr id="8" name="company-row-0">
+            <a:extLst xmlns:a="http://schemas.openxmlformats.org/drawingml/2006/main">
+              <a:ext uri="{FF2B5EF4-FFF2-40B4-BE49-F238E27FC236}">
+                <a16:creationId xmlns:a16="http://schemas.microsoft.com/office/drawing/2014/main" id="{334714F6-1DBD-4876-AD5C-27A8E0754E11}"/>
+              </a:ext>
+            </a:extLst>
+          </p:cNvPr>
+          <p:cNvSpPr>
+            <a:spLocks xmlns:a="http://schemas.openxmlformats.org/drawingml/2006/main" noGrp="1"/>
+          </p:cNvSpPr>
+          <p:nvPr/>
+        </p:nvSpPr>
+        <p:spPr>
+          <a:xfrm xmlns:a="http://schemas.openxmlformats.org/drawingml/2006/main">
+            <a:off x="514350" y="1752600"/>
+            <a:ext cx="11163300" cy="781050"/>
           </a:xfrm>
           <a:prstGeom xmlns:a="http://schemas.openxmlformats.org/drawingml/2006/main" prst="roundRect">
             <a:avLst>
-              <a:gd name="adj" fmla="val 11538"/>
+              <a:gd name="adj" fmla="val 9756"/>
             </a:avLst>
           </a:prstGeom>
           <a:solidFill xmlns:a="http://schemas.openxmlformats.org/drawingml/2006/main">
-            <a:srgbClr val="FCECEB"/>
+            <a:srgbClr val="F5F8FF"/>
           </a:solidFill>
           <a:ln xmlns:a="http://schemas.openxmlformats.org/drawingml/2006/main" w="9525">
             <a:solidFill>
-              <a:srgbClr val="FCECEB"/>
+              <a:srgbClr val="F5F8FF"/>
             </a:solidFill>
             <a:prstDash val="solid"/>
           </a:ln>
@@ -5305,22 +5638,22 @@
       </p:sp>
       <p:sp>
         <p:nvSpPr>
-          <p:cNvPr id="5" name="auto-text-19">
-            <a:extLst xmlns:a="http://schemas.openxmlformats.org/drawingml/2006/main">
-              <a:ext uri="{FF2B5EF4-FFF2-40B4-BE49-F238E27FC236}">
-                <a16:creationId xmlns:a16="http://schemas.microsoft.com/office/drawing/2014/main" id="{0E1EB20A-B8F4-4BF6-A75C-587011F35885}"/>
-              </a:ext>
-            </a:extLst>
-          </p:cNvPr>
-          <p:cNvSpPr>
-            <a:spLocks xmlns:a="http://schemas.openxmlformats.org/drawingml/2006/main" noGrp="1"/>
-          </p:cNvSpPr>
-          <p:nvPr/>
-        </p:nvSpPr>
-        <p:spPr>
-          <a:xfrm xmlns:a="http://schemas.openxmlformats.org/drawingml/2006/main">
-            <a:off x="742950" y="1333500"/>
-            <a:ext cx="1714500" cy="495300"/>
+          <p:cNvPr id="9" name="company-name-0">
+            <a:extLst xmlns:a="http://schemas.openxmlformats.org/drawingml/2006/main">
+              <a:ext uri="{FF2B5EF4-FFF2-40B4-BE49-F238E27FC236}">
+                <a16:creationId xmlns:a16="http://schemas.microsoft.com/office/drawing/2014/main" id="{5E33E864-1875-4F04-A5AC-0664D76EB830}"/>
+              </a:ext>
+            </a:extLst>
+          </p:cNvPr>
+          <p:cNvSpPr>
+            <a:spLocks xmlns:a="http://schemas.openxmlformats.org/drawingml/2006/main" noGrp="1"/>
+          </p:cNvSpPr>
+          <p:nvPr/>
+        </p:nvSpPr>
+        <p:spPr>
+          <a:xfrm xmlns:a="http://schemas.openxmlformats.org/drawingml/2006/main">
+            <a:off x="685800" y="1971675"/>
+            <a:ext cx="1619250" cy="323850"/>
           </a:xfrm>
           <a:prstGeom xmlns:a="http://schemas.openxmlformats.org/drawingml/2006/main" prst="rect">
             <a:avLst/>
@@ -5338,47 +5671,47 @@
           <a:lstStyle xmlns:a="http://schemas.openxmlformats.org/drawingml/2006/main"/>
           <a:p xmlns:a="http://schemas.openxmlformats.org/drawingml/2006/main">
             <a:pPr algn="l">
-              <a:defRPr sz="2850" b="1" i="0">
-                <a:solidFill>
-                  <a:srgbClr val="E65C55"/>
-                </a:solidFill>
-                <a:latin typeface="Microsoft YaHei"/>
-                <a:ea typeface="Microsoft YaHei"/>
-                <a:cs typeface="Microsoft YaHei"/>
-              </a:defRPr>
-            </a:pPr>
-            <a:r>
-              <a:rPr sz="2850" b="1" i="0">
-                <a:solidFill>
-                  <a:srgbClr val="E65C55"/>
-                </a:solidFill>
-                <a:latin typeface="Microsoft YaHei"/>
-                <a:ea typeface="Microsoft YaHei"/>
-                <a:cs typeface="Microsoft YaHei"/>
-              </a:rPr>
-              <a:t>66–75%</a:t>
-            </a:r>
-          </a:p>
-        </p:txBody>
-      </p:sp>
-      <p:sp>
-        <p:nvSpPr>
-          <p:cNvPr id="6" name="auto-text-20">
-            <a:extLst xmlns:a="http://schemas.openxmlformats.org/drawingml/2006/main">
-              <a:ext uri="{FF2B5EF4-FFF2-40B4-BE49-F238E27FC236}">
-                <a16:creationId xmlns:a16="http://schemas.microsoft.com/office/drawing/2014/main" id="{08070F58-AA55-4A56-853C-7D63F9422AB6}"/>
-              </a:ext>
-            </a:extLst>
-          </p:cNvPr>
-          <p:cNvSpPr>
-            <a:spLocks xmlns:a="http://schemas.openxmlformats.org/drawingml/2006/main" noGrp="1"/>
-          </p:cNvSpPr>
-          <p:nvPr/>
-        </p:nvSpPr>
-        <p:spPr>
-          <a:xfrm xmlns:a="http://schemas.openxmlformats.org/drawingml/2006/main">
-            <a:off x="2438400" y="1428750"/>
-            <a:ext cx="3048000" cy="266700"/>
+              <a:defRPr sz="1800" b="1" i="0">
+                <a:solidFill>
+                  <a:srgbClr val="2F6BFF"/>
+                </a:solidFill>
+                <a:latin typeface="Microsoft YaHei"/>
+                <a:ea typeface="Microsoft YaHei"/>
+                <a:cs typeface="Microsoft YaHei"/>
+              </a:defRPr>
+            </a:pPr>
+            <a:r>
+              <a:rPr sz="1800" b="1" i="0">
+                <a:solidFill>
+                  <a:srgbClr val="2F6BFF"/>
+                </a:solidFill>
+                <a:latin typeface="Microsoft YaHei"/>
+                <a:ea typeface="Microsoft YaHei"/>
+                <a:cs typeface="Microsoft YaHei"/>
+              </a:rPr>
+              <a:t>OpenAI</a:t>
+            </a:r>
+          </a:p>
+        </p:txBody>
+      </p:sp>
+      <p:sp>
+        <p:nvSpPr>
+          <p:cNvPr id="10" name="company-body-0">
+            <a:extLst xmlns:a="http://schemas.openxmlformats.org/drawingml/2006/main">
+              <a:ext uri="{FF2B5EF4-FFF2-40B4-BE49-F238E27FC236}">
+                <a16:creationId xmlns:a16="http://schemas.microsoft.com/office/drawing/2014/main" id="{A44335B0-BB3C-41BF-9596-E4A44157D710}"/>
+              </a:ext>
+            </a:extLst>
+          </p:cNvPr>
+          <p:cNvSpPr>
+            <a:spLocks xmlns:a="http://schemas.openxmlformats.org/drawingml/2006/main" noGrp="1"/>
+          </p:cNvSpPr>
+          <p:nvPr/>
+        </p:nvSpPr>
+        <p:spPr>
+          <a:xfrm xmlns:a="http://schemas.openxmlformats.org/drawingml/2006/main">
+            <a:off x="2533650" y="1895475"/>
+            <a:ext cx="6572250" cy="533400"/>
           </a:xfrm>
           <a:prstGeom xmlns:a="http://schemas.openxmlformats.org/drawingml/2006/main" prst="rect">
             <a:avLst/>
@@ -5396,7 +5729,7 @@
           <a:lstStyle xmlns:a="http://schemas.openxmlformats.org/drawingml/2006/main"/>
           <a:p xmlns:a="http://schemas.openxmlformats.org/drawingml/2006/main">
             <a:pPr algn="l">
-              <a:defRPr sz="1425" b="1" i="0">
+              <a:defRPr sz="1275" b="0" i="0">
                 <a:solidFill>
                   <a:srgbClr val="12263A"/>
                 </a:solidFill>
@@ -5406,7 +5739,7 @@
               </a:defRPr>
             </a:pPr>
             <a:r>
-              <a:rPr sz="1425" b="1" i="0">
+              <a:rPr sz="1275" b="0" i="0">
                 <a:solidFill>
                   <a:srgbClr val="12263A"/>
                 </a:solidFill>
@@ -5414,29 +5747,29 @@
                 <a:ea typeface="Microsoft YaHei"/>
                 <a:cs typeface="Microsoft YaHei"/>
               </a:rPr>
-              <a:t>头部多模态Judge准确率</a:t>
-            </a:r>
-          </a:p>
-        </p:txBody>
-      </p:sp>
-      <p:sp>
-        <p:nvSpPr>
-          <p:cNvPr id="7" name="auto-text-21">
-            <a:extLst xmlns:a="http://schemas.openxmlformats.org/drawingml/2006/main">
-              <a:ext uri="{FF2B5EF4-FFF2-40B4-BE49-F238E27FC236}">
-                <a16:creationId xmlns:a16="http://schemas.microsoft.com/office/drawing/2014/main" id="{47917BBF-2AD4-413E-A96B-DC8C4BC33F91}"/>
-              </a:ext>
-            </a:extLst>
-          </p:cNvPr>
-          <p:cNvSpPr>
-            <a:spLocks xmlns:a="http://schemas.openxmlformats.org/drawingml/2006/main" noGrp="1"/>
-          </p:cNvSpPr>
-          <p:nvPr/>
-        </p:nvSpPr>
-        <p:spPr>
-          <a:xfrm xmlns:a="http://schemas.openxmlformats.org/drawingml/2006/main">
-            <a:off x="2438400" y="1733550"/>
-            <a:ext cx="2857500" cy="247650"/>
+              <a:t>按能力与安全风险切分评测集；用自动分类器／推理模型做离线评估，并结合对抗测试与人工规范校验。</a:t>
+            </a:r>
+          </a:p>
+        </p:txBody>
+      </p:sp>
+      <p:sp>
+        <p:nvSpPr>
+          <p:cNvPr id="11" name="company-tag-0">
+            <a:extLst xmlns:a="http://schemas.openxmlformats.org/drawingml/2006/main">
+              <a:ext uri="{FF2B5EF4-FFF2-40B4-BE49-F238E27FC236}">
+                <a16:creationId xmlns:a16="http://schemas.microsoft.com/office/drawing/2014/main" id="{0F91A6A3-B599-4042-AFEE-1EF493F3A96E}"/>
+              </a:ext>
+            </a:extLst>
+          </p:cNvPr>
+          <p:cNvSpPr>
+            <a:spLocks xmlns:a="http://schemas.openxmlformats.org/drawingml/2006/main" noGrp="1"/>
+          </p:cNvSpPr>
+          <p:nvPr/>
+        </p:nvSpPr>
+        <p:spPr>
+          <a:xfrm xmlns:a="http://schemas.openxmlformats.org/drawingml/2006/main">
+            <a:off x="9525000" y="1981200"/>
+            <a:ext cx="1809750" cy="285750"/>
           </a:xfrm>
           <a:prstGeom xmlns:a="http://schemas.openxmlformats.org/drawingml/2006/main" prst="rect">
             <a:avLst/>
@@ -5453,60 +5786,60 @@
           </a:bodyPr>
           <a:lstStyle xmlns:a="http://schemas.openxmlformats.org/drawingml/2006/main"/>
           <a:p xmlns:a="http://schemas.openxmlformats.org/drawingml/2006/main">
-            <a:pPr algn="l">
-              <a:defRPr sz="1200" b="0" i="0">
-                <a:solidFill>
-                  <a:srgbClr val="66778A"/>
-                </a:solidFill>
-                <a:latin typeface="Microsoft YaHei"/>
-                <a:ea typeface="Microsoft YaHei"/>
-                <a:cs typeface="Microsoft YaHei"/>
-              </a:defRPr>
-            </a:pPr>
-            <a:r>
-              <a:rPr sz="1200" b="0" i="0">
-                <a:solidFill>
-                  <a:srgbClr val="66778A"/>
-                </a:solidFill>
-                <a:latin typeface="Microsoft YaHei"/>
-                <a:ea typeface="Microsoft YaHei"/>
-                <a:cs typeface="Microsoft YaHei"/>
-              </a:rPr>
-              <a:t>对比：人类专家 &gt;90%</a:t>
-            </a:r>
-          </a:p>
-        </p:txBody>
-      </p:sp>
-      <p:sp>
-        <p:nvSpPr>
-          <p:cNvPr id="8" name="stat-right">
-            <a:extLst xmlns:a="http://schemas.openxmlformats.org/drawingml/2006/main">
-              <a:ext uri="{FF2B5EF4-FFF2-40B4-BE49-F238E27FC236}">
-                <a16:creationId xmlns:a16="http://schemas.microsoft.com/office/drawing/2014/main" id="{E7CE5ACF-D736-4314-8E29-D0A6F0F8C091}"/>
-              </a:ext>
-            </a:extLst>
-          </p:cNvPr>
-          <p:cNvSpPr>
-            <a:spLocks xmlns:a="http://schemas.openxmlformats.org/drawingml/2006/main" noGrp="1"/>
-          </p:cNvSpPr>
-          <p:nvPr/>
-        </p:nvSpPr>
-        <p:spPr>
-          <a:xfrm xmlns:a="http://schemas.openxmlformats.org/drawingml/2006/main">
-            <a:off x="6343650" y="1200150"/>
-            <a:ext cx="5334000" cy="990600"/>
+            <a:pPr algn="ctr">
+              <a:defRPr sz="1350" b="1" i="0">
+                <a:solidFill>
+                  <a:srgbClr val="2F6BFF"/>
+                </a:solidFill>
+                <a:latin typeface="Microsoft YaHei"/>
+                <a:ea typeface="Microsoft YaHei"/>
+                <a:cs typeface="Microsoft YaHei"/>
+              </a:defRPr>
+            </a:pPr>
+            <a:r>
+              <a:rPr sz="1350" b="1" i="0">
+                <a:solidFill>
+                  <a:srgbClr val="2F6BFF"/>
+                </a:solidFill>
+                <a:latin typeface="Microsoft YaHei"/>
+                <a:ea typeface="Microsoft YaHei"/>
+                <a:cs typeface="Microsoft YaHei"/>
+              </a:rPr>
+              <a:t>持续评测</a:t>
+            </a:r>
+          </a:p>
+        </p:txBody>
+      </p:sp>
+      <p:sp>
+        <p:nvSpPr>
+          <p:cNvPr id="12" name="company-row-1">
+            <a:extLst xmlns:a="http://schemas.openxmlformats.org/drawingml/2006/main">
+              <a:ext uri="{FF2B5EF4-FFF2-40B4-BE49-F238E27FC236}">
+                <a16:creationId xmlns:a16="http://schemas.microsoft.com/office/drawing/2014/main" id="{9C5F8D87-CF40-4C22-896A-D7F990EFC53D}"/>
+              </a:ext>
+            </a:extLst>
+          </p:cNvPr>
+          <p:cNvSpPr>
+            <a:spLocks xmlns:a="http://schemas.openxmlformats.org/drawingml/2006/main" noGrp="1"/>
+          </p:cNvSpPr>
+          <p:nvPr/>
+        </p:nvSpPr>
+        <p:spPr>
+          <a:xfrm xmlns:a="http://schemas.openxmlformats.org/drawingml/2006/main">
+            <a:off x="514350" y="2667000"/>
+            <a:ext cx="11163300" cy="781050"/>
           </a:xfrm>
           <a:prstGeom xmlns:a="http://schemas.openxmlformats.org/drawingml/2006/main" prst="roundRect">
             <a:avLst>
-              <a:gd name="adj" fmla="val 11538"/>
+              <a:gd name="adj" fmla="val 9756"/>
             </a:avLst>
           </a:prstGeom>
           <a:solidFill xmlns:a="http://schemas.openxmlformats.org/drawingml/2006/main">
-            <a:srgbClr val="EAF0FF"/>
+            <a:srgbClr val="F8F6FF"/>
           </a:solidFill>
           <a:ln xmlns:a="http://schemas.openxmlformats.org/drawingml/2006/main" w="9525">
             <a:solidFill>
-              <a:srgbClr val="EAF0FF"/>
+              <a:srgbClr val="F8F6FF"/>
             </a:solidFill>
             <a:prstDash val="solid"/>
           </a:ln>
@@ -5514,22 +5847,22 @@
       </p:sp>
       <p:sp>
         <p:nvSpPr>
-          <p:cNvPr id="9" name="auto-text-22">
-            <a:extLst xmlns:a="http://schemas.openxmlformats.org/drawingml/2006/main">
-              <a:ext uri="{FF2B5EF4-FFF2-40B4-BE49-F238E27FC236}">
-                <a16:creationId xmlns:a16="http://schemas.microsoft.com/office/drawing/2014/main" id="{4D410FEF-61E4-46CA-936F-FDB401EB31EE}"/>
-              </a:ext>
-            </a:extLst>
-          </p:cNvPr>
-          <p:cNvSpPr>
-            <a:spLocks xmlns:a="http://schemas.openxmlformats.org/drawingml/2006/main" noGrp="1"/>
-          </p:cNvSpPr>
-          <p:nvPr/>
-        </p:nvSpPr>
-        <p:spPr>
-          <a:xfrm xmlns:a="http://schemas.openxmlformats.org/drawingml/2006/main">
-            <a:off x="6572250" y="1362075"/>
-            <a:ext cx="2095500" cy="381000"/>
+          <p:cNvPr id="13" name="company-name-1">
+            <a:extLst xmlns:a="http://schemas.openxmlformats.org/drawingml/2006/main">
+              <a:ext uri="{FF2B5EF4-FFF2-40B4-BE49-F238E27FC236}">
+                <a16:creationId xmlns:a16="http://schemas.microsoft.com/office/drawing/2014/main" id="{4D614C6E-D1BE-44B3-BA6B-0B75E218DA22}"/>
+              </a:ext>
+            </a:extLst>
+          </p:cNvPr>
+          <p:cNvSpPr>
+            <a:spLocks xmlns:a="http://schemas.openxmlformats.org/drawingml/2006/main" noGrp="1"/>
+          </p:cNvSpPr>
+          <p:nvPr/>
+        </p:nvSpPr>
+        <p:spPr>
+          <a:xfrm xmlns:a="http://schemas.openxmlformats.org/drawingml/2006/main">
+            <a:off x="685800" y="2886075"/>
+            <a:ext cx="1619250" cy="323850"/>
           </a:xfrm>
           <a:prstGeom xmlns:a="http://schemas.openxmlformats.org/drawingml/2006/main" prst="rect">
             <a:avLst/>
@@ -5547,47 +5880,47 @@
           <a:lstStyle xmlns:a="http://schemas.openxmlformats.org/drawingml/2006/main"/>
           <a:p xmlns:a="http://schemas.openxmlformats.org/drawingml/2006/main">
             <a:pPr algn="l">
-              <a:defRPr sz="1950" b="1" i="0">
-                <a:solidFill>
-                  <a:srgbClr val="2F6BFF"/>
-                </a:solidFill>
-                <a:latin typeface="Microsoft YaHei"/>
-                <a:ea typeface="Microsoft YaHei"/>
-                <a:cs typeface="Microsoft YaHei"/>
-              </a:defRPr>
-            </a:pPr>
-            <a:r>
-              <a:rPr sz="1950" b="1" i="0">
-                <a:solidFill>
-                  <a:srgbClr val="2F6BFF"/>
-                </a:solidFill>
-                <a:latin typeface="Microsoft YaHei"/>
-                <a:ea typeface="Microsoft YaHei"/>
-                <a:cs typeface="Microsoft YaHei"/>
-              </a:rPr>
-              <a:t>少量验证样本</a:t>
-            </a:r>
-          </a:p>
-        </p:txBody>
-      </p:sp>
-      <p:sp>
-        <p:nvSpPr>
-          <p:cNvPr id="10" name="auto-text-23">
-            <a:extLst xmlns:a="http://schemas.openxmlformats.org/drawingml/2006/main">
-              <a:ext uri="{FF2B5EF4-FFF2-40B4-BE49-F238E27FC236}">
-                <a16:creationId xmlns:a16="http://schemas.microsoft.com/office/drawing/2014/main" id="{1091A3FD-5214-44DD-859E-D9DF3C2D110E}"/>
-              </a:ext>
-            </a:extLst>
-          </p:cNvPr>
-          <p:cNvSpPr>
-            <a:spLocks xmlns:a="http://schemas.openxmlformats.org/drawingml/2006/main" noGrp="1"/>
-          </p:cNvSpPr>
-          <p:nvPr/>
-        </p:nvSpPr>
-        <p:spPr>
-          <a:xfrm xmlns:a="http://schemas.openxmlformats.org/drawingml/2006/main">
-            <a:off x="8629650" y="1362075"/>
-            <a:ext cx="2781300" cy="533400"/>
+              <a:defRPr sz="1800" b="1" i="0">
+                <a:solidFill>
+                  <a:srgbClr val="7B61D1"/>
+                </a:solidFill>
+                <a:latin typeface="Microsoft YaHei"/>
+                <a:ea typeface="Microsoft YaHei"/>
+                <a:cs typeface="Microsoft YaHei"/>
+              </a:defRPr>
+            </a:pPr>
+            <a:r>
+              <a:rPr sz="1800" b="1" i="0">
+                <a:solidFill>
+                  <a:srgbClr val="7B61D1"/>
+                </a:solidFill>
+                <a:latin typeface="Microsoft YaHei"/>
+                <a:ea typeface="Microsoft YaHei"/>
+                <a:cs typeface="Microsoft YaHei"/>
+              </a:rPr>
+              <a:t>阿里 Qwen</a:t>
+            </a:r>
+          </a:p>
+        </p:txBody>
+      </p:sp>
+      <p:sp>
+        <p:nvSpPr>
+          <p:cNvPr id="14" name="company-body-1">
+            <a:extLst xmlns:a="http://schemas.openxmlformats.org/drawingml/2006/main">
+              <a:ext uri="{FF2B5EF4-FFF2-40B4-BE49-F238E27FC236}">
+                <a16:creationId xmlns:a16="http://schemas.microsoft.com/office/drawing/2014/main" id="{811C9E61-379F-423B-A63C-9C2B3B51B2A0}"/>
+              </a:ext>
+            </a:extLst>
+          </p:cNvPr>
+          <p:cNvSpPr>
+            <a:spLocks xmlns:a="http://schemas.openxmlformats.org/drawingml/2006/main" noGrp="1"/>
+          </p:cNvSpPr>
+          <p:nvPr/>
+        </p:nvSpPr>
+        <p:spPr>
+          <a:xfrm xmlns:a="http://schemas.openxmlformats.org/drawingml/2006/main">
+            <a:off x="2533650" y="2809875"/>
+            <a:ext cx="6572250" cy="533400"/>
           </a:xfrm>
           <a:prstGeom xmlns:a="http://schemas.openxmlformats.org/drawingml/2006/main" prst="rect">
             <a:avLst/>
@@ -5605,7 +5938,7 @@
           <a:lstStyle xmlns:a="http://schemas.openxmlformats.org/drawingml/2006/main"/>
           <a:p xmlns:a="http://schemas.openxmlformats.org/drawingml/2006/main">
             <a:pPr algn="l">
-              <a:defRPr sz="1275" b="1" i="0">
+              <a:defRPr sz="1275" b="0" i="0">
                 <a:solidFill>
                   <a:srgbClr val="12263A"/>
                 </a:solidFill>
@@ -5615,7 +5948,7 @@
               </a:defRPr>
             </a:pPr>
             <a:r>
-              <a:rPr sz="1275" b="1" i="0">
+              <a:rPr sz="1275" b="0" i="0">
                 <a:solidFill>
                   <a:srgbClr val="12263A"/>
                 </a:solidFill>
@@ -5623,275 +5956,517 @@
                 <a:ea typeface="Microsoft YaHei"/>
                 <a:cs typeface="Microsoft YaHei"/>
               </a:rPr>
-              <a:t>即可学习不同Prompt／视觉类型的权重，并改善置信度校准</a:t>
-            </a:r>
-          </a:p>
-        </p:txBody>
-      </p:sp>
-      <p:sp>
-        <p:nvSpPr>
-          <p:cNvPr id="11" name="mmrb2-results-back">
-            <a:extLst xmlns:a="http://schemas.openxmlformats.org/drawingml/2006/main">
-              <a:ext uri="{FF2B5EF4-FFF2-40B4-BE49-F238E27FC236}">
-                <a16:creationId xmlns:a16="http://schemas.microsoft.com/office/drawing/2014/main" id="{B714977B-5DA2-424D-8686-3E41240D210C}"/>
-              </a:ext>
-            </a:extLst>
-          </p:cNvPr>
-          <p:cNvSpPr>
-            <a:spLocks xmlns:a="http://schemas.openxmlformats.org/drawingml/2006/main" noGrp="1"/>
-          </p:cNvSpPr>
-          <p:nvPr/>
-        </p:nvSpPr>
-        <p:spPr>
-          <a:xfrm xmlns:a="http://schemas.openxmlformats.org/drawingml/2006/main">
-            <a:off x="495300" y="2400300"/>
-            <a:ext cx="5372100" cy="2667000"/>
+              <a:t>建设多级图像评测体系；专用 Q-Judger 按5个一级维度、56个细粒度因素评分，并结合公开基准与盲测。</a:t>
+            </a:r>
+          </a:p>
+        </p:txBody>
+      </p:sp>
+      <p:sp>
+        <p:nvSpPr>
+          <p:cNvPr id="15" name="company-tag-1">
+            <a:extLst xmlns:a="http://schemas.openxmlformats.org/drawingml/2006/main">
+              <a:ext uri="{FF2B5EF4-FFF2-40B4-BE49-F238E27FC236}">
+                <a16:creationId xmlns:a16="http://schemas.microsoft.com/office/drawing/2014/main" id="{D57CBBD6-5492-49B0-97CD-42382E3EF0C1}"/>
+              </a:ext>
+            </a:extLst>
+          </p:cNvPr>
+          <p:cNvSpPr>
+            <a:spLocks xmlns:a="http://schemas.openxmlformats.org/drawingml/2006/main" noGrp="1"/>
+          </p:cNvSpPr>
+          <p:nvPr/>
+        </p:nvSpPr>
+        <p:spPr>
+          <a:xfrm xmlns:a="http://schemas.openxmlformats.org/drawingml/2006/main">
+            <a:off x="9525000" y="2895600"/>
+            <a:ext cx="1809750" cy="285750"/>
+          </a:xfrm>
+          <a:prstGeom xmlns:a="http://schemas.openxmlformats.org/drawingml/2006/main" prst="rect">
+            <a:avLst/>
+          </a:prstGeom>
+          <a:noFill xmlns:a="http://schemas.openxmlformats.org/drawingml/2006/main"/>
+          <a:ln xmlns:a="http://schemas.openxmlformats.org/drawingml/2006/main" w="0">
+            <a:noFill/>
+            <a:prstDash val="solid"/>
+          </a:ln>
+        </p:spPr>
+        <p:txBody>
+          <a:bodyPr xmlns:a="http://schemas.openxmlformats.org/drawingml/2006/main" wrap="square" lIns="0" tIns="0" rIns="0" bIns="0" anchor="t">
+            <a:normAutofit fontScale="100000"/>
+          </a:bodyPr>
+          <a:lstStyle xmlns:a="http://schemas.openxmlformats.org/drawingml/2006/main"/>
+          <a:p xmlns:a="http://schemas.openxmlformats.org/drawingml/2006/main">
+            <a:pPr algn="ctr">
+              <a:defRPr sz="1350" b="1" i="0">
+                <a:solidFill>
+                  <a:srgbClr val="7B61D1"/>
+                </a:solidFill>
+                <a:latin typeface="Microsoft YaHei"/>
+                <a:ea typeface="Microsoft YaHei"/>
+                <a:cs typeface="Microsoft YaHei"/>
+              </a:defRPr>
+            </a:pPr>
+            <a:r>
+              <a:rPr sz="1350" b="1" i="0">
+                <a:solidFill>
+                  <a:srgbClr val="7B61D1"/>
+                </a:solidFill>
+                <a:latin typeface="Microsoft YaHei"/>
+                <a:ea typeface="Microsoft YaHei"/>
+                <a:cs typeface="Microsoft YaHei"/>
+              </a:rPr>
+              <a:t>专用 Judge</a:t>
+            </a:r>
+          </a:p>
+        </p:txBody>
+      </p:sp>
+      <p:sp>
+        <p:nvSpPr>
+          <p:cNvPr id="16" name="company-row-2">
+            <a:extLst xmlns:a="http://schemas.openxmlformats.org/drawingml/2006/main">
+              <a:ext uri="{FF2B5EF4-FFF2-40B4-BE49-F238E27FC236}">
+                <a16:creationId xmlns:a16="http://schemas.microsoft.com/office/drawing/2014/main" id="{094AD8E1-1950-4309-A475-E6F35065C1A5}"/>
+              </a:ext>
+            </a:extLst>
+          </p:cNvPr>
+          <p:cNvSpPr>
+            <a:spLocks xmlns:a="http://schemas.openxmlformats.org/drawingml/2006/main" noGrp="1"/>
+          </p:cNvSpPr>
+          <p:nvPr/>
+        </p:nvSpPr>
+        <p:spPr>
+          <a:xfrm xmlns:a="http://schemas.openxmlformats.org/drawingml/2006/main">
+            <a:off x="514350" y="3581400"/>
+            <a:ext cx="11163300" cy="781050"/>
           </a:xfrm>
           <a:prstGeom xmlns:a="http://schemas.openxmlformats.org/drawingml/2006/main" prst="roundRect">
             <a:avLst>
-              <a:gd name="adj" fmla="val 2857"/>
+              <a:gd name="adj" fmla="val 9756"/>
             </a:avLst>
           </a:prstGeom>
           <a:solidFill xmlns:a="http://schemas.openxmlformats.org/drawingml/2006/main">
-            <a:srgbClr val="FFFFFF"/>
+            <a:srgbClr val="FFF7F5"/>
           </a:solidFill>
           <a:ln xmlns:a="http://schemas.openxmlformats.org/drawingml/2006/main" w="9525">
             <a:solidFill>
-              <a:srgbClr val="D8E0E8"/>
+              <a:srgbClr val="FFF7F5"/>
             </a:solidFill>
             <a:prstDash val="solid"/>
           </a:ln>
         </p:spPr>
       </p:sp>
-      <p:pic>
-        <p:nvPicPr>
-          <p:cNvPr id="31" name=""/>
-          <p:cNvPicPr>
-            <a:picLocks xmlns:a="http://schemas.openxmlformats.org/drawingml/2006/main" noChangeAspect="1"/>
-          </p:cNvPicPr>
-          <p:nvPr/>
-        </p:nvPicPr>
-        <p:blipFill>
-          <a:blip xmlns:r="http://schemas.openxmlformats.org/officeDocument/2006/relationships" xmlns:a="http://schemas.openxmlformats.org/drawingml/2006/main" r:embed="R4d03a7e91fd1471b"/>
-          <a:stretch xmlns:a="http://schemas.openxmlformats.org/drawingml/2006/main"/>
-        </p:blipFill>
-        <p:spPr>
-          <a:xfrm xmlns:a="http://schemas.openxmlformats.org/drawingml/2006/main">
-            <a:off x="627135" y="2419350"/>
-            <a:ext cx="5108431" cy="2628900"/>
+      <p:sp>
+        <p:nvSpPr>
+          <p:cNvPr id="17" name="company-name-2">
+            <a:extLst xmlns:a="http://schemas.openxmlformats.org/drawingml/2006/main">
+              <a:ext uri="{FF2B5EF4-FFF2-40B4-BE49-F238E27FC236}">
+                <a16:creationId xmlns:a16="http://schemas.microsoft.com/office/drawing/2014/main" id="{04A754B7-5882-4309-8D70-CCA607AE0FE8}"/>
+              </a:ext>
+            </a:extLst>
+          </p:cNvPr>
+          <p:cNvSpPr>
+            <a:spLocks xmlns:a="http://schemas.openxmlformats.org/drawingml/2006/main" noGrp="1"/>
+          </p:cNvSpPr>
+          <p:nvPr/>
+        </p:nvSpPr>
+        <p:spPr>
+          <a:xfrm xmlns:a="http://schemas.openxmlformats.org/drawingml/2006/main">
+            <a:off x="685800" y="3800475"/>
+            <a:ext cx="1619250" cy="323850"/>
+          </a:xfrm>
+          <a:prstGeom xmlns:a="http://schemas.openxmlformats.org/drawingml/2006/main" prst="rect">
+            <a:avLst/>
+          </a:prstGeom>
+          <a:noFill xmlns:a="http://schemas.openxmlformats.org/drawingml/2006/main"/>
+          <a:ln xmlns:a="http://schemas.openxmlformats.org/drawingml/2006/main" w="0">
+            <a:noFill/>
+            <a:prstDash val="solid"/>
+          </a:ln>
+        </p:spPr>
+        <p:txBody>
+          <a:bodyPr xmlns:a="http://schemas.openxmlformats.org/drawingml/2006/main" wrap="square" lIns="0" tIns="0" rIns="0" bIns="0" anchor="t">
+            <a:normAutofit fontScale="100000"/>
+          </a:bodyPr>
+          <a:lstStyle xmlns:a="http://schemas.openxmlformats.org/drawingml/2006/main"/>
+          <a:p xmlns:a="http://schemas.openxmlformats.org/drawingml/2006/main">
+            <a:pPr algn="l">
+              <a:defRPr sz="1800" b="1" i="0">
+                <a:solidFill>
+                  <a:srgbClr val="E65C55"/>
+                </a:solidFill>
+                <a:latin typeface="Microsoft YaHei"/>
+                <a:ea typeface="Microsoft YaHei"/>
+                <a:cs typeface="Microsoft YaHei"/>
+              </a:defRPr>
+            </a:pPr>
+            <a:r>
+              <a:rPr sz="1800" b="1" i="0">
+                <a:solidFill>
+                  <a:srgbClr val="E65C55"/>
+                </a:solidFill>
+                <a:latin typeface="Microsoft YaHei"/>
+                <a:ea typeface="Microsoft YaHei"/>
+                <a:cs typeface="Microsoft YaHei"/>
+              </a:rPr>
+              <a:t>字节 Seed</a:t>
+            </a:r>
+          </a:p>
+        </p:txBody>
+      </p:sp>
+      <p:sp>
+        <p:nvSpPr>
+          <p:cNvPr id="18" name="company-body-2">
+            <a:extLst xmlns:a="http://schemas.openxmlformats.org/drawingml/2006/main">
+              <a:ext uri="{FF2B5EF4-FFF2-40B4-BE49-F238E27FC236}">
+                <a16:creationId xmlns:a16="http://schemas.microsoft.com/office/drawing/2014/main" id="{0C032ECB-68DD-4F3B-A1AE-51D7E9D1B94F}"/>
+              </a:ext>
+            </a:extLst>
+          </p:cNvPr>
+          <p:cNvSpPr>
+            <a:spLocks xmlns:a="http://schemas.openxmlformats.org/drawingml/2006/main" noGrp="1"/>
+          </p:cNvSpPr>
+          <p:nvPr/>
+        </p:nvSpPr>
+        <p:spPr>
+          <a:xfrm xmlns:a="http://schemas.openxmlformats.org/drawingml/2006/main">
+            <a:off x="2533650" y="3724275"/>
+            <a:ext cx="6572250" cy="533400"/>
+          </a:xfrm>
+          <a:prstGeom xmlns:a="http://schemas.openxmlformats.org/drawingml/2006/main" prst="rect">
+            <a:avLst/>
+          </a:prstGeom>
+          <a:noFill xmlns:a="http://schemas.openxmlformats.org/drawingml/2006/main"/>
+          <a:ln xmlns:a="http://schemas.openxmlformats.org/drawingml/2006/main" w="0">
+            <a:noFill/>
+            <a:prstDash val="solid"/>
+          </a:ln>
+        </p:spPr>
+        <p:txBody>
+          <a:bodyPr xmlns:a="http://schemas.openxmlformats.org/drawingml/2006/main" wrap="square" lIns="0" tIns="0" rIns="0" bIns="0" anchor="t">
+            <a:normAutofit fontScale="100000"/>
+          </a:bodyPr>
+          <a:lstStyle xmlns:a="http://schemas.openxmlformats.org/drawingml/2006/main"/>
+          <a:p xmlns:a="http://schemas.openxmlformats.org/drawingml/2006/main">
+            <a:pPr algn="l">
+              <a:defRPr sz="1275" b="0" i="0">
+                <a:solidFill>
+                  <a:srgbClr val="12263A"/>
+                </a:solidFill>
+                <a:latin typeface="Microsoft YaHei"/>
+                <a:ea typeface="Microsoft YaHei"/>
+                <a:cs typeface="Microsoft YaHei"/>
+              </a:defRPr>
+            </a:pPr>
+            <a:r>
+              <a:rPr sz="1275" b="0" i="0">
+                <a:solidFill>
+                  <a:srgbClr val="12263A"/>
+                </a:solidFill>
+                <a:latin typeface="Microsoft YaHei"/>
+                <a:ea typeface="Microsoft YaHei"/>
+                <a:cs typeface="Microsoft YaHei"/>
+              </a:rPr>
+              <a:t>覆盖23类图像编辑子任务；CLIP评一致性、第三方VLM评指令响应，再以人工可用率验证最终效果。</a:t>
+            </a:r>
+          </a:p>
+        </p:txBody>
+      </p:sp>
+      <p:sp>
+        <p:nvSpPr>
+          <p:cNvPr id="19" name="company-tag-2">
+            <a:extLst xmlns:a="http://schemas.openxmlformats.org/drawingml/2006/main">
+              <a:ext uri="{FF2B5EF4-FFF2-40B4-BE49-F238E27FC236}">
+                <a16:creationId xmlns:a16="http://schemas.microsoft.com/office/drawing/2014/main" id="{D530D33C-B827-4CDC-8EA9-4F201F702954}"/>
+              </a:ext>
+            </a:extLst>
+          </p:cNvPr>
+          <p:cNvSpPr>
+            <a:spLocks xmlns:a="http://schemas.openxmlformats.org/drawingml/2006/main" noGrp="1"/>
+          </p:cNvSpPr>
+          <p:nvPr/>
+        </p:nvSpPr>
+        <p:spPr>
+          <a:xfrm xmlns:a="http://schemas.openxmlformats.org/drawingml/2006/main">
+            <a:off x="9525000" y="3810000"/>
+            <a:ext cx="1809750" cy="285750"/>
+          </a:xfrm>
+          <a:prstGeom xmlns:a="http://schemas.openxmlformats.org/drawingml/2006/main" prst="rect">
+            <a:avLst/>
+          </a:prstGeom>
+          <a:noFill xmlns:a="http://schemas.openxmlformats.org/drawingml/2006/main"/>
+          <a:ln xmlns:a="http://schemas.openxmlformats.org/drawingml/2006/main" w="0">
+            <a:noFill/>
+            <a:prstDash val="solid"/>
+          </a:ln>
+        </p:spPr>
+        <p:txBody>
+          <a:bodyPr xmlns:a="http://schemas.openxmlformats.org/drawingml/2006/main" wrap="square" lIns="0" tIns="0" rIns="0" bIns="0" anchor="t">
+            <a:normAutofit fontScale="100000"/>
+          </a:bodyPr>
+          <a:lstStyle xmlns:a="http://schemas.openxmlformats.org/drawingml/2006/main"/>
+          <a:p xmlns:a="http://schemas.openxmlformats.org/drawingml/2006/main">
+            <a:pPr algn="ctr">
+              <a:defRPr sz="1350" b="1" i="0">
+                <a:solidFill>
+                  <a:srgbClr val="E65C55"/>
+                </a:solidFill>
+                <a:latin typeface="Microsoft YaHei"/>
+                <a:ea typeface="Microsoft YaHei"/>
+                <a:cs typeface="Microsoft YaHei"/>
+              </a:defRPr>
+            </a:pPr>
+            <a:r>
+              <a:rPr sz="1350" b="1" i="0">
+                <a:solidFill>
+                  <a:srgbClr val="E65C55"/>
+                </a:solidFill>
+                <a:latin typeface="Microsoft YaHei"/>
+                <a:ea typeface="Microsoft YaHei"/>
+                <a:cs typeface="Microsoft YaHei"/>
+              </a:rPr>
+              <a:t>混合指标</a:t>
+            </a:r>
+          </a:p>
+        </p:txBody>
+      </p:sp>
+      <p:sp>
+        <p:nvSpPr>
+          <p:cNvPr id="20" name="company-row-3">
+            <a:extLst xmlns:a="http://schemas.openxmlformats.org/drawingml/2006/main">
+              <a:ext uri="{FF2B5EF4-FFF2-40B4-BE49-F238E27FC236}">
+                <a16:creationId xmlns:a16="http://schemas.microsoft.com/office/drawing/2014/main" id="{4CDBE11B-C2D9-4BA8-927F-EFB7D557CAF1}"/>
+              </a:ext>
+            </a:extLst>
+          </p:cNvPr>
+          <p:cNvSpPr>
+            <a:spLocks xmlns:a="http://schemas.openxmlformats.org/drawingml/2006/main" noGrp="1"/>
+          </p:cNvSpPr>
+          <p:nvPr/>
+        </p:nvSpPr>
+        <p:spPr>
+          <a:xfrm xmlns:a="http://schemas.openxmlformats.org/drawingml/2006/main">
+            <a:off x="514350" y="4495800"/>
+            <a:ext cx="11163300" cy="781050"/>
           </a:xfrm>
           <a:prstGeom xmlns:a="http://schemas.openxmlformats.org/drawingml/2006/main" prst="roundRect">
             <a:avLst>
-              <a:gd name="adj" fmla="val 2899"/>
+              <a:gd name="adj" fmla="val 9756"/>
             </a:avLst>
           </a:prstGeom>
-        </p:spPr>
-      </p:pic>
-      <p:sp>
-        <p:nvSpPr>
-          <p:cNvPr id="13" name="calibration-curves-back">
-            <a:extLst xmlns:a="http://schemas.openxmlformats.org/drawingml/2006/main">
-              <a:ext uri="{FF2B5EF4-FFF2-40B4-BE49-F238E27FC236}">
-                <a16:creationId xmlns:a16="http://schemas.microsoft.com/office/drawing/2014/main" id="{8A9762E1-84DC-4DDE-A988-BC91290A76B7}"/>
-              </a:ext>
-            </a:extLst>
-          </p:cNvPr>
-          <p:cNvSpPr>
-            <a:spLocks xmlns:a="http://schemas.openxmlformats.org/drawingml/2006/main" noGrp="1"/>
-          </p:cNvSpPr>
-          <p:nvPr/>
-        </p:nvSpPr>
-        <p:spPr>
-          <a:xfrm xmlns:a="http://schemas.openxmlformats.org/drawingml/2006/main">
-            <a:off x="6324600" y="2400300"/>
-            <a:ext cx="5372100" cy="2667000"/>
-          </a:xfrm>
-          <a:prstGeom xmlns:a="http://schemas.openxmlformats.org/drawingml/2006/main" prst="roundRect">
-            <a:avLst>
-              <a:gd name="adj" fmla="val 2857"/>
-            </a:avLst>
-          </a:prstGeom>
           <a:solidFill xmlns:a="http://schemas.openxmlformats.org/drawingml/2006/main">
-            <a:srgbClr val="FFFFFF"/>
+            <a:srgbClr val="F3FBFA"/>
           </a:solidFill>
           <a:ln xmlns:a="http://schemas.openxmlformats.org/drawingml/2006/main" w="9525">
             <a:solidFill>
-              <a:srgbClr val="D8E0E8"/>
+              <a:srgbClr val="F3FBFA"/>
             </a:solidFill>
             <a:prstDash val="solid"/>
           </a:ln>
         </p:spPr>
       </p:sp>
-      <p:pic>
-        <p:nvPicPr>
-          <p:cNvPr id="33" name=""/>
-          <p:cNvPicPr>
-            <a:picLocks xmlns:a="http://schemas.openxmlformats.org/drawingml/2006/main" noChangeAspect="1"/>
-          </p:cNvPicPr>
-          <p:nvPr/>
-        </p:nvPicPr>
-        <p:blipFill>
-          <a:blip xmlns:r="http://schemas.openxmlformats.org/officeDocument/2006/relationships" xmlns:a="http://schemas.openxmlformats.org/drawingml/2006/main" r:embed="Rb3160206ee58495f"/>
-          <a:stretch xmlns:a="http://schemas.openxmlformats.org/drawingml/2006/main"/>
-        </p:blipFill>
-        <p:spPr>
-          <a:xfrm xmlns:a="http://schemas.openxmlformats.org/drawingml/2006/main">
-            <a:off x="6343650" y="2514600"/>
-            <a:ext cx="5334000" cy="2438400"/>
+      <p:sp>
+        <p:nvSpPr>
+          <p:cNvPr id="21" name="company-name-3">
+            <a:extLst xmlns:a="http://schemas.openxmlformats.org/drawingml/2006/main">
+              <a:ext uri="{FF2B5EF4-FFF2-40B4-BE49-F238E27FC236}">
+                <a16:creationId xmlns:a16="http://schemas.microsoft.com/office/drawing/2014/main" id="{3D227F35-17B2-4842-9D53-77D41C9D7C5F}"/>
+              </a:ext>
+            </a:extLst>
+          </p:cNvPr>
+          <p:cNvSpPr>
+            <a:spLocks xmlns:a="http://schemas.openxmlformats.org/drawingml/2006/main" noGrp="1"/>
+          </p:cNvSpPr>
+          <p:nvPr/>
+        </p:nvSpPr>
+        <p:spPr>
+          <a:xfrm xmlns:a="http://schemas.openxmlformats.org/drawingml/2006/main">
+            <a:off x="685800" y="4714875"/>
+            <a:ext cx="1619250" cy="323850"/>
+          </a:xfrm>
+          <a:prstGeom xmlns:a="http://schemas.openxmlformats.org/drawingml/2006/main" prst="rect">
+            <a:avLst/>
+          </a:prstGeom>
+          <a:noFill xmlns:a="http://schemas.openxmlformats.org/drawingml/2006/main"/>
+          <a:ln xmlns:a="http://schemas.openxmlformats.org/drawingml/2006/main" w="0">
+            <a:noFill/>
+            <a:prstDash val="solid"/>
+          </a:ln>
+        </p:spPr>
+        <p:txBody>
+          <a:bodyPr xmlns:a="http://schemas.openxmlformats.org/drawingml/2006/main" wrap="square" lIns="0" tIns="0" rIns="0" bIns="0" anchor="t">
+            <a:normAutofit fontScale="100000"/>
+          </a:bodyPr>
+          <a:lstStyle xmlns:a="http://schemas.openxmlformats.org/drawingml/2006/main"/>
+          <a:p xmlns:a="http://schemas.openxmlformats.org/drawingml/2006/main">
+            <a:pPr algn="l">
+              <a:defRPr sz="1800" b="1" i="0">
+                <a:solidFill>
+                  <a:srgbClr val="159A91"/>
+                </a:solidFill>
+                <a:latin typeface="Microsoft YaHei"/>
+                <a:ea typeface="Microsoft YaHei"/>
+                <a:cs typeface="Microsoft YaHei"/>
+              </a:defRPr>
+            </a:pPr>
+            <a:r>
+              <a:rPr sz="1800" b="1" i="0">
+                <a:solidFill>
+                  <a:srgbClr val="159A91"/>
+                </a:solidFill>
+                <a:latin typeface="Microsoft YaHei"/>
+                <a:ea typeface="Microsoft YaHei"/>
+                <a:cs typeface="Microsoft YaHei"/>
+              </a:rPr>
+              <a:t>腾讯混元</a:t>
+            </a:r>
+          </a:p>
+        </p:txBody>
+      </p:sp>
+      <p:sp>
+        <p:nvSpPr>
+          <p:cNvPr id="22" name="company-body-3">
+            <a:extLst xmlns:a="http://schemas.openxmlformats.org/drawingml/2006/main">
+              <a:ext uri="{FF2B5EF4-FFF2-40B4-BE49-F238E27FC236}">
+                <a16:creationId xmlns:a16="http://schemas.microsoft.com/office/drawing/2014/main" id="{EB0F82F5-525A-4E10-A28A-1B999F35DDA6}"/>
+              </a:ext>
+            </a:extLst>
+          </p:cNvPr>
+          <p:cNvSpPr>
+            <a:spLocks xmlns:a="http://schemas.openxmlformats.org/drawingml/2006/main" noGrp="1"/>
+          </p:cNvSpPr>
+          <p:nvPr/>
+        </p:nvSpPr>
+        <p:spPr>
+          <a:xfrm xmlns:a="http://schemas.openxmlformats.org/drawingml/2006/main">
+            <a:off x="2533650" y="4638675"/>
+            <a:ext cx="6572250" cy="533400"/>
+          </a:xfrm>
+          <a:prstGeom xmlns:a="http://schemas.openxmlformats.org/drawingml/2006/main" prst="rect">
+            <a:avLst/>
+          </a:prstGeom>
+          <a:noFill xmlns:a="http://schemas.openxmlformats.org/drawingml/2006/main"/>
+          <a:ln xmlns:a="http://schemas.openxmlformats.org/drawingml/2006/main" w="0">
+            <a:noFill/>
+            <a:prstDash val="solid"/>
+          </a:ln>
+        </p:spPr>
+        <p:txBody>
+          <a:bodyPr xmlns:a="http://schemas.openxmlformats.org/drawingml/2006/main" wrap="square" lIns="0" tIns="0" rIns="0" bIns="0" anchor="t">
+            <a:normAutofit fontScale="100000"/>
+          </a:bodyPr>
+          <a:lstStyle xmlns:a="http://schemas.openxmlformats.org/drawingml/2006/main"/>
+          <a:p xmlns:a="http://schemas.openxmlformats.org/drawingml/2006/main">
+            <a:pPr algn="l">
+              <a:defRPr sz="1275" b="0" i="0">
+                <a:solidFill>
+                  <a:srgbClr val="12263A"/>
+                </a:solidFill>
+                <a:latin typeface="Microsoft YaHei"/>
+                <a:ea typeface="Microsoft YaHei"/>
+                <a:cs typeface="Microsoft YaHei"/>
+              </a:defRPr>
+            </a:pPr>
+            <a:r>
+              <a:rPr sz="1275" b="0" i="0">
+                <a:solidFill>
+                  <a:srgbClr val="12263A"/>
+                </a:solidFill>
+                <a:latin typeface="Microsoft YaHei"/>
+                <a:ea typeface="Microsoft YaHei"/>
+                <a:cs typeface="Microsoft YaHei"/>
+              </a:rPr>
+              <a:t>SSAE将提示词拆成3500个关键点／12类，由MLLM逐点评分；同时以100+专业评估员开展GSB对比。</a:t>
+            </a:r>
+          </a:p>
+        </p:txBody>
+      </p:sp>
+      <p:sp>
+        <p:nvSpPr>
+          <p:cNvPr id="23" name="company-tag-3">
+            <a:extLst xmlns:a="http://schemas.openxmlformats.org/drawingml/2006/main">
+              <a:ext uri="{FF2B5EF4-FFF2-40B4-BE49-F238E27FC236}">
+                <a16:creationId xmlns:a16="http://schemas.microsoft.com/office/drawing/2014/main" id="{DEB8B8CA-B2A2-4826-877B-E33E6A51D3FD}"/>
+              </a:ext>
+            </a:extLst>
+          </p:cNvPr>
+          <p:cNvSpPr>
+            <a:spLocks xmlns:a="http://schemas.openxmlformats.org/drawingml/2006/main" noGrp="1"/>
+          </p:cNvSpPr>
+          <p:nvPr/>
+        </p:nvSpPr>
+        <p:spPr>
+          <a:xfrm xmlns:a="http://schemas.openxmlformats.org/drawingml/2006/main">
+            <a:off x="9525000" y="4724400"/>
+            <a:ext cx="1809750" cy="285750"/>
+          </a:xfrm>
+          <a:prstGeom xmlns:a="http://schemas.openxmlformats.org/drawingml/2006/main" prst="rect">
+            <a:avLst/>
+          </a:prstGeom>
+          <a:noFill xmlns:a="http://schemas.openxmlformats.org/drawingml/2006/main"/>
+          <a:ln xmlns:a="http://schemas.openxmlformats.org/drawingml/2006/main" w="0">
+            <a:noFill/>
+            <a:prstDash val="solid"/>
+          </a:ln>
+        </p:spPr>
+        <p:txBody>
+          <a:bodyPr xmlns:a="http://schemas.openxmlformats.org/drawingml/2006/main" wrap="square" lIns="0" tIns="0" rIns="0" bIns="0" anchor="t">
+            <a:normAutofit fontScale="100000"/>
+          </a:bodyPr>
+          <a:lstStyle xmlns:a="http://schemas.openxmlformats.org/drawingml/2006/main"/>
+          <a:p xmlns:a="http://schemas.openxmlformats.org/drawingml/2006/main">
+            <a:pPr algn="ctr">
+              <a:defRPr sz="1350" b="1" i="0">
+                <a:solidFill>
+                  <a:srgbClr val="159A91"/>
+                </a:solidFill>
+                <a:latin typeface="Microsoft YaHei"/>
+                <a:ea typeface="Microsoft YaHei"/>
+                <a:cs typeface="Microsoft YaHei"/>
+              </a:defRPr>
+            </a:pPr>
+            <a:r>
+              <a:rPr sz="1350" b="1" i="0">
+                <a:solidFill>
+                  <a:srgbClr val="159A91"/>
+                </a:solidFill>
+                <a:latin typeface="Microsoft YaHei"/>
+                <a:ea typeface="Microsoft YaHei"/>
+                <a:cs typeface="Microsoft YaHei"/>
+              </a:rPr>
+              <a:t>检查点＋人工</a:t>
+            </a:r>
+          </a:p>
+        </p:txBody>
+      </p:sp>
+      <p:sp>
+        <p:nvSpPr>
+          <p:cNvPr id="24" name="company-conclusion">
+            <a:extLst xmlns:a="http://schemas.openxmlformats.org/drawingml/2006/main">
+              <a:ext uri="{FF2B5EF4-FFF2-40B4-BE49-F238E27FC236}">
+                <a16:creationId xmlns:a16="http://schemas.microsoft.com/office/drawing/2014/main" id="{74C01788-67CB-4F3A-B680-00903AE528E8}"/>
+              </a:ext>
+            </a:extLst>
+          </p:cNvPr>
+          <p:cNvSpPr>
+            <a:spLocks xmlns:a="http://schemas.openxmlformats.org/drawingml/2006/main" noGrp="1"/>
+          </p:cNvSpPr>
+          <p:nvPr/>
+        </p:nvSpPr>
+        <p:spPr>
+          <a:xfrm xmlns:a="http://schemas.openxmlformats.org/drawingml/2006/main">
+            <a:off x="514350" y="5505450"/>
+            <a:ext cx="11163300" cy="609600"/>
           </a:xfrm>
           <a:prstGeom xmlns:a="http://schemas.openxmlformats.org/drawingml/2006/main" prst="roundRect">
             <a:avLst>
-              <a:gd name="adj" fmla="val 2899"/>
+              <a:gd name="adj" fmla="val 12500"/>
             </a:avLst>
           </a:prstGeom>
-        </p:spPr>
-      </p:pic>
-      <p:sp>
-        <p:nvSpPr>
-          <p:cNvPr id="15" name="auto-text-24">
-            <a:extLst xmlns:a="http://schemas.openxmlformats.org/drawingml/2006/main">
-              <a:ext uri="{FF2B5EF4-FFF2-40B4-BE49-F238E27FC236}">
-                <a16:creationId xmlns:a16="http://schemas.microsoft.com/office/drawing/2014/main" id="{7C2FEA69-86FD-4594-9E38-21667B8E780F}"/>
-              </a:ext>
-            </a:extLst>
-          </p:cNvPr>
-          <p:cNvSpPr>
-            <a:spLocks xmlns:a="http://schemas.openxmlformats.org/drawingml/2006/main" noGrp="1"/>
-          </p:cNvSpPr>
-          <p:nvPr/>
-        </p:nvSpPr>
-        <p:spPr>
-          <a:xfrm xmlns:a="http://schemas.openxmlformats.org/drawingml/2006/main">
-            <a:off x="552450" y="5219700"/>
-            <a:ext cx="5238750" cy="457200"/>
-          </a:xfrm>
-          <a:prstGeom xmlns:a="http://schemas.openxmlformats.org/drawingml/2006/main" prst="rect">
-            <a:avLst/>
-          </a:prstGeom>
-          <a:noFill xmlns:a="http://schemas.openxmlformats.org/drawingml/2006/main"/>
-          <a:ln xmlns:a="http://schemas.openxmlformats.org/drawingml/2006/main" w="0">
-            <a:noFill/>
-            <a:prstDash val="solid"/>
-          </a:ln>
-        </p:spPr>
-        <p:txBody>
-          <a:bodyPr xmlns:a="http://schemas.openxmlformats.org/drawingml/2006/main" wrap="square" lIns="0" tIns="0" rIns="0" bIns="0" anchor="t">
-            <a:normAutofit fontScale="100000"/>
-          </a:bodyPr>
-          <a:lstStyle xmlns:a="http://schemas.openxmlformats.org/drawingml/2006/main"/>
-          <a:p xmlns:a="http://schemas.openxmlformats.org/drawingml/2006/main">
-            <a:pPr algn="l">
-              <a:defRPr sz="1275" b="1" i="0">
-                <a:solidFill>
-                  <a:srgbClr val="12263A"/>
-                </a:solidFill>
-                <a:latin typeface="Microsoft YaHei"/>
-                <a:ea typeface="Microsoft YaHei"/>
-                <a:cs typeface="Microsoft YaHei"/>
-              </a:defRPr>
-            </a:pPr>
-            <a:r>
-              <a:rPr sz="1275" b="1" i="0">
-                <a:solidFill>
-                  <a:srgbClr val="12263A"/>
-                </a:solidFill>
-                <a:latin typeface="Microsoft YaHei"/>
-                <a:ea typeface="Microsoft YaHei"/>
-                <a:cs typeface="Microsoft YaHei"/>
-              </a:rPr>
-              <a:t>结论一｜通用Judge与专家偏好仍有明显差距，且不同任务表现差异较大。</a:t>
-            </a:r>
-          </a:p>
-        </p:txBody>
-      </p:sp>
-      <p:sp>
-        <p:nvSpPr>
-          <p:cNvPr id="16" name="auto-text-25">
-            <a:extLst xmlns:a="http://schemas.openxmlformats.org/drawingml/2006/main">
-              <a:ext uri="{FF2B5EF4-FFF2-40B4-BE49-F238E27FC236}">
-                <a16:creationId xmlns:a16="http://schemas.microsoft.com/office/drawing/2014/main" id="{471313CC-06DE-444E-87D0-C4DCB118FF4A}"/>
-              </a:ext>
-            </a:extLst>
-          </p:cNvPr>
-          <p:cNvSpPr>
-            <a:spLocks xmlns:a="http://schemas.openxmlformats.org/drawingml/2006/main" noGrp="1"/>
-          </p:cNvSpPr>
-          <p:nvPr/>
-        </p:nvSpPr>
-        <p:spPr>
-          <a:xfrm xmlns:a="http://schemas.openxmlformats.org/drawingml/2006/main">
-            <a:off x="6381750" y="5219700"/>
-            <a:ext cx="5238750" cy="457200"/>
-          </a:xfrm>
-          <a:prstGeom xmlns:a="http://schemas.openxmlformats.org/drawingml/2006/main" prst="rect">
-            <a:avLst/>
-          </a:prstGeom>
-          <a:noFill xmlns:a="http://schemas.openxmlformats.org/drawingml/2006/main"/>
-          <a:ln xmlns:a="http://schemas.openxmlformats.org/drawingml/2006/main" w="0">
-            <a:noFill/>
-            <a:prstDash val="solid"/>
-          </a:ln>
-        </p:spPr>
-        <p:txBody>
-          <a:bodyPr xmlns:a="http://schemas.openxmlformats.org/drawingml/2006/main" wrap="square" lIns="0" tIns="0" rIns="0" bIns="0" anchor="t">
-            <a:normAutofit fontScale="100000"/>
-          </a:bodyPr>
-          <a:lstStyle xmlns:a="http://schemas.openxmlformats.org/drawingml/2006/main"/>
-          <a:p xmlns:a="http://schemas.openxmlformats.org/drawingml/2006/main">
-            <a:pPr algn="l">
-              <a:defRPr sz="1275" b="1" i="0">
-                <a:solidFill>
-                  <a:srgbClr val="12263A"/>
-                </a:solidFill>
-                <a:latin typeface="Microsoft YaHei"/>
-                <a:ea typeface="Microsoft YaHei"/>
-                <a:cs typeface="Microsoft YaHei"/>
-              </a:defRPr>
-            </a:pPr>
-            <a:r>
-              <a:rPr sz="1275" b="1" i="0">
-                <a:solidFill>
-                  <a:srgbClr val="12263A"/>
-                </a:solidFill>
-                <a:latin typeface="Microsoft YaHei"/>
-                <a:ea typeface="Microsoft YaHei"/>
-                <a:cs typeface="Microsoft YaHei"/>
-              </a:rPr>
-              <a:t>结论二｜视觉任务需要专门校准；低置信和分歧样本应转入证据核验或人工复核。</a:t>
-            </a:r>
-          </a:p>
-        </p:txBody>
-      </p:sp>
-      <p:sp>
-        <p:nvSpPr>
-          <p:cNvPr id="17" name="gap-conclusion">
-            <a:extLst xmlns:a="http://schemas.openxmlformats.org/drawingml/2006/main">
-              <a:ext uri="{FF2B5EF4-FFF2-40B4-BE49-F238E27FC236}">
-                <a16:creationId xmlns:a16="http://schemas.microsoft.com/office/drawing/2014/main" id="{87E57065-AF49-4459-B867-93066304756A}"/>
-              </a:ext>
-            </a:extLst>
-          </p:cNvPr>
-          <p:cNvSpPr>
-            <a:spLocks xmlns:a="http://schemas.openxmlformats.org/drawingml/2006/main" noGrp="1"/>
-          </p:cNvSpPr>
-          <p:nvPr/>
-        </p:nvSpPr>
-        <p:spPr>
-          <a:xfrm xmlns:a="http://schemas.openxmlformats.org/drawingml/2006/main">
-            <a:off x="514350" y="5753100"/>
-            <a:ext cx="11163300" cy="381000"/>
-          </a:xfrm>
-          <a:prstGeom xmlns:a="http://schemas.openxmlformats.org/drawingml/2006/main" prst="roundRect">
-            <a:avLst>
-              <a:gd name="adj" fmla="val 20000"/>
-            </a:avLst>
-          </a:prstGeom>
           <a:solidFill xmlns:a="http://schemas.openxmlformats.org/drawingml/2006/main">
-            <a:srgbClr val="F4F7FA"/>
+            <a:srgbClr val="12263A"/>
           </a:solidFill>
           <a:ln xmlns:a="http://schemas.openxmlformats.org/drawingml/2006/main" w="9525">
             <a:solidFill>
-              <a:srgbClr val="F4F7FA"/>
+              <a:srgbClr val="12263A"/>
             </a:solidFill>
             <a:prstDash val="solid"/>
           </a:ln>
@@ -5899,22 +6474,22 @@
       </p:sp>
       <p:sp>
         <p:nvSpPr>
-          <p:cNvPr id="18" name="auto-text-26">
-            <a:extLst xmlns:a="http://schemas.openxmlformats.org/drawingml/2006/main">
-              <a:ext uri="{FF2B5EF4-FFF2-40B4-BE49-F238E27FC236}">
-                <a16:creationId xmlns:a16="http://schemas.microsoft.com/office/drawing/2014/main" id="{7E99A7D1-9C62-4F1C-8886-646D6FE8A7EF}"/>
-              </a:ext>
-            </a:extLst>
-          </p:cNvPr>
-          <p:cNvSpPr>
-            <a:spLocks xmlns:a="http://schemas.openxmlformats.org/drawingml/2006/main" noGrp="1"/>
-          </p:cNvSpPr>
-          <p:nvPr/>
-        </p:nvSpPr>
-        <p:spPr>
-          <a:xfrm xmlns:a="http://schemas.openxmlformats.org/drawingml/2006/main">
-            <a:off x="704850" y="5838825"/>
-            <a:ext cx="10782300" cy="228600"/>
+          <p:cNvPr id="25" name="auto-text-23">
+            <a:extLst xmlns:a="http://schemas.openxmlformats.org/drawingml/2006/main">
+              <a:ext uri="{FF2B5EF4-FFF2-40B4-BE49-F238E27FC236}">
+                <a16:creationId xmlns:a16="http://schemas.microsoft.com/office/drawing/2014/main" id="{8F8B8E00-A675-4BA7-9F8D-4D72C4539905}"/>
+              </a:ext>
+            </a:extLst>
+          </p:cNvPr>
+          <p:cNvSpPr>
+            <a:spLocks xmlns:a="http://schemas.openxmlformats.org/drawingml/2006/main" noGrp="1"/>
+          </p:cNvSpPr>
+          <p:nvPr/>
+        </p:nvSpPr>
+        <p:spPr>
+          <a:xfrm xmlns:a="http://schemas.openxmlformats.org/drawingml/2006/main">
+            <a:off x="723900" y="5676900"/>
+            <a:ext cx="1047750" cy="266700"/>
           </a:xfrm>
           <a:prstGeom xmlns:a="http://schemas.openxmlformats.org/drawingml/2006/main" prst="rect">
             <a:avLst/>
@@ -5931,10 +6506,10 @@
           </a:bodyPr>
           <a:lstStyle xmlns:a="http://schemas.openxmlformats.org/drawingml/2006/main"/>
           <a:p xmlns:a="http://schemas.openxmlformats.org/drawingml/2006/main">
-            <a:pPr algn="ctr">
+            <a:pPr algn="l">
               <a:defRPr sz="1350" b="1" i="0">
                 <a:solidFill>
-                  <a:srgbClr val="12263A"/>
+                  <a:srgbClr val="8EB0FF"/>
                 </a:solidFill>
                 <a:latin typeface="Microsoft YaHei"/>
                 <a:ea typeface="Microsoft YaHei"/>
@@ -5944,23 +6519,81 @@
             <a:r>
               <a:rPr sz="1350" b="1" i="0">
                 <a:solidFill>
-                  <a:srgbClr val="12263A"/>
-                </a:solidFill>
-                <a:latin typeface="Microsoft YaHei"/>
-                <a:ea typeface="Microsoft YaHei"/>
-                <a:cs typeface="Microsoft YaHei"/>
-              </a:rPr>
-              <a:t>真正需要建设的不是“能打分的模型”，而是“能根据任务校准、识别分歧并给出证据的评估机制”。</a:t>
-            </a:r>
-          </a:p>
-        </p:txBody>
-      </p:sp>
-      <p:sp>
-        <p:nvSpPr>
-          <p:cNvPr id="19" name="source-650-0.02424874232370411">
-            <a:extLst xmlns:a="http://schemas.openxmlformats.org/drawingml/2006/main">
-              <a:ext uri="{FF2B5EF4-FFF2-40B4-BE49-F238E27FC236}">
-                <a16:creationId xmlns:a16="http://schemas.microsoft.com/office/drawing/2014/main" id="{97796EAC-3EC2-4411-A9E4-85FCC66937BF}"/>
+                  <a:srgbClr val="8EB0FF"/>
+                </a:solidFill>
+                <a:latin typeface="Microsoft YaHei"/>
+                <a:ea typeface="Microsoft YaHei"/>
+                <a:cs typeface="Microsoft YaHei"/>
+              </a:rPr>
+              <a:t>行业共识</a:t>
+            </a:r>
+          </a:p>
+        </p:txBody>
+      </p:sp>
+      <p:sp>
+        <p:nvSpPr>
+          <p:cNvPr id="26" name="auto-text-24">
+            <a:extLst xmlns:a="http://schemas.openxmlformats.org/drawingml/2006/main">
+              <a:ext uri="{FF2B5EF4-FFF2-40B4-BE49-F238E27FC236}">
+                <a16:creationId xmlns:a16="http://schemas.microsoft.com/office/drawing/2014/main" id="{0B3002E6-FF9D-4AA2-A6CD-623BB505180E}"/>
+              </a:ext>
+            </a:extLst>
+          </p:cNvPr>
+          <p:cNvSpPr>
+            <a:spLocks xmlns:a="http://schemas.openxmlformats.org/drawingml/2006/main" noGrp="1"/>
+          </p:cNvSpPr>
+          <p:nvPr/>
+        </p:nvSpPr>
+        <p:spPr>
+          <a:xfrm xmlns:a="http://schemas.openxmlformats.org/drawingml/2006/main">
+            <a:off x="1847850" y="5638800"/>
+            <a:ext cx="9525000" cy="323850"/>
+          </a:xfrm>
+          <a:prstGeom xmlns:a="http://schemas.openxmlformats.org/drawingml/2006/main" prst="rect">
+            <a:avLst/>
+          </a:prstGeom>
+          <a:noFill xmlns:a="http://schemas.openxmlformats.org/drawingml/2006/main"/>
+          <a:ln xmlns:a="http://schemas.openxmlformats.org/drawingml/2006/main" w="0">
+            <a:noFill/>
+            <a:prstDash val="solid"/>
+          </a:ln>
+        </p:spPr>
+        <p:txBody>
+          <a:bodyPr xmlns:a="http://schemas.openxmlformats.org/drawingml/2006/main" wrap="square" lIns="0" tIns="0" rIns="0" bIns="0" anchor="t">
+            <a:normAutofit fontScale="100000"/>
+          </a:bodyPr>
+          <a:lstStyle xmlns:a="http://schemas.openxmlformats.org/drawingml/2006/main"/>
+          <a:p xmlns:a="http://schemas.openxmlformats.org/drawingml/2006/main">
+            <a:pPr algn="l">
+              <a:defRPr sz="1500" b="1" i="0">
+                <a:solidFill>
+                  <a:srgbClr val="FFFFFF"/>
+                </a:solidFill>
+                <a:latin typeface="Microsoft YaHei"/>
+                <a:ea typeface="Microsoft YaHei"/>
+                <a:cs typeface="Microsoft YaHei"/>
+              </a:defRPr>
+            </a:pPr>
+            <a:r>
+              <a:rPr sz="1500" b="1" i="0">
+                <a:solidFill>
+                  <a:srgbClr val="FFFFFF"/>
+                </a:solidFill>
+                <a:latin typeface="Microsoft YaHei"/>
+                <a:ea typeface="Microsoft YaHei"/>
+                <a:cs typeface="Microsoft YaHei"/>
+              </a:rPr>
+              <a:t>通用模型只是底座；真正拉开效果的是任务Rubric、评价器组合、人工校准与持续回流。</a:t>
+            </a:r>
+          </a:p>
+        </p:txBody>
+      </p:sp>
+      <p:sp>
+        <p:nvSpPr>
+          <p:cNvPr id="27" name="source-650-0.29204073758027194">
+            <a:extLst xmlns:a="http://schemas.openxmlformats.org/drawingml/2006/main">
+              <a:ext uri="{FF2B5EF4-FFF2-40B4-BE49-F238E27FC236}">
+                <a16:creationId xmlns:a16="http://schemas.microsoft.com/office/drawing/2014/main" id="{24BF9F33-724E-481F-BC72-E034E77BC63F}"/>
               </a:ext>
             </a:extLst>
           </p:cNvPr>
@@ -6008,7 +6641,7 @@
                 <a:ea typeface="Cambria"/>
                 <a:cs typeface="Cambria"/>
               </a:rPr>
-              <a:t>数据与图源：Multimodal RewardBench 2（CVPR 2026）；Calibrating MLLM-as-a-Judge（ICCV 2025）</a:t>
+              <a:t>公开资料：OpenAI Images 2.0；Qwen-Image-Bench；SeedEdit 3.0；HunyuanImage 3.0</a:t>
             </a:r>
           </a:p>
         </p:txBody>
@@ -6016,7 +6649,7 @@
     </p:spTree>
     <p:extLst>
       <p:ext uri="{BB962C8B-B14F-4D97-AF65-F5344CB8AC3E}">
-        <p14:creationId xmlns:p14="http://schemas.microsoft.com/office/powerpoint/2010/main" val="1938707041"/>
+        <p14:creationId xmlns:p14="http://schemas.microsoft.com/office/powerpoint/2010/main" val="1066314508"/>
       </p:ext>
     </p:extLst>
   </p:cSld>
@@ -6044,10 +6677,10 @@
       </p:grpSpPr>
       <p:sp>
         <p:nvSpPr>
-          <p:cNvPr id="22" name="accent-5">
-            <a:extLst xmlns:a="http://schemas.openxmlformats.org/drawingml/2006/main">
-              <a:ext uri="{FF2B5EF4-FFF2-40B4-BE49-F238E27FC236}">
-                <a16:creationId xmlns:a16="http://schemas.microsoft.com/office/drawing/2014/main" id="{C776D50B-3B40-47FF-AC56-5DFE3E258871}"/>
+          <p:cNvPr id="20" name="accent-5">
+            <a:extLst xmlns:a="http://schemas.openxmlformats.org/drawingml/2006/main">
+              <a:ext uri="{FF2B5EF4-FFF2-40B4-BE49-F238E27FC236}">
+                <a16:creationId xmlns:a16="http://schemas.microsoft.com/office/drawing/2014/main" id="{95A69164-6ACA-4E59-8AA7-A7FCDAA7BF73}"/>
               </a:ext>
             </a:extLst>
           </p:cNvPr>
@@ -6082,7 +6715,7 @@
           <p:cNvPr id="2" name="title-5">
             <a:extLst xmlns:a="http://schemas.openxmlformats.org/drawingml/2006/main">
               <a:ext uri="{FF2B5EF4-FFF2-40B4-BE49-F238E27FC236}">
-                <a16:creationId xmlns:a16="http://schemas.microsoft.com/office/drawing/2014/main" id="{E0F18D58-5EE5-4D08-86F0-016FE4397118}"/>
+                <a16:creationId xmlns:a16="http://schemas.microsoft.com/office/drawing/2014/main" id="{C0575721-80EA-417C-874F-58B72147CEC5}"/>
               </a:ext>
             </a:extLst>
           </p:cNvPr>
@@ -6130,7 +6763,7 @@
                 <a:ea typeface="Microsoft YaHei"/>
                 <a:cs typeface="Microsoft YaHei"/>
               </a:rPr>
-              <a:t>项目将在现有质检能力之上增加可复用的任务自适应评估层</a:t>
+              <a:t>VLM能够规模化评价图像，但仍需校准、共识与证据核验</a:t>
             </a:r>
           </a:p>
         </p:txBody>
@@ -6140,7 +6773,7 @@
           <p:cNvPr id="3" name="page-5">
             <a:extLst xmlns:a="http://schemas.openxmlformats.org/drawingml/2006/main">
               <a:ext uri="{FF2B5EF4-FFF2-40B4-BE49-F238E27FC236}">
-                <a16:creationId xmlns:a16="http://schemas.microsoft.com/office/drawing/2014/main" id="{8EE7AA8A-B161-4DCC-89AD-1497CE59A0FD}"/>
+                <a16:creationId xmlns:a16="http://schemas.microsoft.com/office/drawing/2014/main" id="{EED95B75-094D-4BC3-A744-BB75A291DE7E}"/>
               </a:ext>
             </a:extLst>
           </p:cNvPr>
@@ -6195,88 +6828,390 @@
       </p:sp>
       <p:sp>
         <p:nvSpPr>
-          <p:cNvPr id="4" name="auto-text-27">
-            <a:extLst xmlns:a="http://schemas.openxmlformats.org/drawingml/2006/main">
-              <a:ext uri="{FF2B5EF4-FFF2-40B4-BE49-F238E27FC236}">
-                <a16:creationId xmlns:a16="http://schemas.microsoft.com/office/drawing/2014/main" id="{C9E9F3D6-8656-425A-BD09-031C2890D4F2}"/>
-              </a:ext>
-            </a:extLst>
-          </p:cNvPr>
-          <p:cNvSpPr>
-            <a:spLocks xmlns:a="http://schemas.openxmlformats.org/drawingml/2006/main" noGrp="1"/>
-          </p:cNvSpPr>
-          <p:nvPr/>
-        </p:nvSpPr>
-        <p:spPr>
-          <a:xfrm xmlns:a="http://schemas.openxmlformats.org/drawingml/2006/main">
-            <a:off x="628650" y="990600"/>
-            <a:ext cx="10668000" cy="323850"/>
-          </a:xfrm>
-          <a:prstGeom xmlns:a="http://schemas.openxmlformats.org/drawingml/2006/main" prst="rect">
-            <a:avLst/>
-          </a:prstGeom>
-          <a:noFill xmlns:a="http://schemas.openxmlformats.org/drawingml/2006/main"/>
-          <a:ln xmlns:a="http://schemas.openxmlformats.org/drawingml/2006/main" w="0">
-            <a:noFill/>
-            <a:prstDash val="solid"/>
-          </a:ln>
-        </p:spPr>
-        <p:txBody>
-          <a:bodyPr xmlns:a="http://schemas.openxmlformats.org/drawingml/2006/main" wrap="square" lIns="0" tIns="0" rIns="0" bIns="0" anchor="t">
-            <a:normAutofit fontScale="100000"/>
-          </a:bodyPr>
-          <a:lstStyle xmlns:a="http://schemas.openxmlformats.org/drawingml/2006/main"/>
-          <a:p xmlns:a="http://schemas.openxmlformats.org/drawingml/2006/main">
-            <a:pPr algn="l">
-              <a:defRPr sz="1425" b="0" i="0">
-                <a:solidFill>
-                  <a:srgbClr val="66778A"/>
-                </a:solidFill>
-                <a:latin typeface="Microsoft YaHei"/>
-                <a:ea typeface="Microsoft YaHei"/>
-                <a:cs typeface="Microsoft YaHei"/>
-              </a:defRPr>
-            </a:pPr>
-            <a:r>
-              <a:rPr sz="1425" b="0" i="0">
-                <a:solidFill>
-                  <a:srgbClr val="66778A"/>
-                </a:solidFill>
-                <a:latin typeface="Microsoft YaHei"/>
-                <a:ea typeface="Microsoft YaHei"/>
-                <a:cs typeface="Microsoft YaHei"/>
-              </a:rPr>
-              <a:t>不重建生产平台，而是利用少量专家样本，对已有规则、Prompt和VLM Judge进行后验校准。</a:t>
-            </a:r>
-          </a:p>
-        </p:txBody>
-      </p:sp>
-      <p:sp>
-        <p:nvSpPr>
-          <p:cNvPr id="5" name="input-node">
-            <a:extLst xmlns:a="http://schemas.openxmlformats.org/drawingml/2006/main">
-              <a:ext uri="{FF2B5EF4-FFF2-40B4-BE49-F238E27FC236}">
-                <a16:creationId xmlns:a16="http://schemas.microsoft.com/office/drawing/2014/main" id="{7E10894C-E893-4B64-A589-F780CDC8AED3}"/>
-              </a:ext>
-            </a:extLst>
-          </p:cNvPr>
-          <p:cNvSpPr>
-            <a:spLocks xmlns:a="http://schemas.openxmlformats.org/drawingml/2006/main" noGrp="1"/>
-          </p:cNvSpPr>
-          <p:nvPr/>
-        </p:nvSpPr>
-        <p:spPr>
-          <a:xfrm xmlns:a="http://schemas.openxmlformats.org/drawingml/2006/main">
-            <a:off x="514350" y="1695450"/>
-            <a:ext cx="2952750" cy="3276600"/>
+          <p:cNvPr id="4" name="stat-left">
+            <a:extLst xmlns:a="http://schemas.openxmlformats.org/drawingml/2006/main">
+              <a:ext uri="{FF2B5EF4-FFF2-40B4-BE49-F238E27FC236}">
+                <a16:creationId xmlns:a16="http://schemas.microsoft.com/office/drawing/2014/main" id="{502825D5-72BD-4C64-9546-5832F371FF64}"/>
+              </a:ext>
+            </a:extLst>
+          </p:cNvPr>
+          <p:cNvSpPr>
+            <a:spLocks xmlns:a="http://schemas.openxmlformats.org/drawingml/2006/main" noGrp="1"/>
+          </p:cNvSpPr>
+          <p:nvPr/>
+        </p:nvSpPr>
+        <p:spPr>
+          <a:xfrm xmlns:a="http://schemas.openxmlformats.org/drawingml/2006/main">
+            <a:off x="514350" y="1200150"/>
+            <a:ext cx="5334000" cy="990600"/>
           </a:xfrm>
           <a:prstGeom xmlns:a="http://schemas.openxmlformats.org/drawingml/2006/main" prst="roundRect">
             <a:avLst>
-              <a:gd name="adj" fmla="val 3871"/>
+              <a:gd name="adj" fmla="val 11538"/>
             </a:avLst>
           </a:prstGeom>
           <a:solidFill xmlns:a="http://schemas.openxmlformats.org/drawingml/2006/main">
-            <a:srgbClr val="F4F7FA"/>
+            <a:srgbClr val="FCECEB"/>
+          </a:solidFill>
+          <a:ln xmlns:a="http://schemas.openxmlformats.org/drawingml/2006/main" w="9525">
+            <a:solidFill>
+              <a:srgbClr val="FCECEB"/>
+            </a:solidFill>
+            <a:prstDash val="solid"/>
+          </a:ln>
+        </p:spPr>
+      </p:sp>
+      <p:sp>
+        <p:nvSpPr>
+          <p:cNvPr id="5" name="auto-text-25">
+            <a:extLst xmlns:a="http://schemas.openxmlformats.org/drawingml/2006/main">
+              <a:ext uri="{FF2B5EF4-FFF2-40B4-BE49-F238E27FC236}">
+                <a16:creationId xmlns:a16="http://schemas.microsoft.com/office/drawing/2014/main" id="{F22ED6C1-5F76-4F69-A75E-862B6DDBA406}"/>
+              </a:ext>
+            </a:extLst>
+          </p:cNvPr>
+          <p:cNvSpPr>
+            <a:spLocks xmlns:a="http://schemas.openxmlformats.org/drawingml/2006/main" noGrp="1"/>
+          </p:cNvSpPr>
+          <p:nvPr/>
+        </p:nvSpPr>
+        <p:spPr>
+          <a:xfrm xmlns:a="http://schemas.openxmlformats.org/drawingml/2006/main">
+            <a:off x="742950" y="1333500"/>
+            <a:ext cx="1714500" cy="495300"/>
+          </a:xfrm>
+          <a:prstGeom xmlns:a="http://schemas.openxmlformats.org/drawingml/2006/main" prst="rect">
+            <a:avLst/>
+          </a:prstGeom>
+          <a:noFill xmlns:a="http://schemas.openxmlformats.org/drawingml/2006/main"/>
+          <a:ln xmlns:a="http://schemas.openxmlformats.org/drawingml/2006/main" w="0">
+            <a:noFill/>
+            <a:prstDash val="solid"/>
+          </a:ln>
+        </p:spPr>
+        <p:txBody>
+          <a:bodyPr xmlns:a="http://schemas.openxmlformats.org/drawingml/2006/main" wrap="square" lIns="0" tIns="0" rIns="0" bIns="0" anchor="t">
+            <a:normAutofit fontScale="100000"/>
+          </a:bodyPr>
+          <a:lstStyle xmlns:a="http://schemas.openxmlformats.org/drawingml/2006/main"/>
+          <a:p xmlns:a="http://schemas.openxmlformats.org/drawingml/2006/main">
+            <a:pPr algn="l">
+              <a:defRPr sz="2850" b="1" i="0">
+                <a:solidFill>
+                  <a:srgbClr val="E65C55"/>
+                </a:solidFill>
+                <a:latin typeface="Microsoft YaHei"/>
+                <a:ea typeface="Microsoft YaHei"/>
+                <a:cs typeface="Microsoft YaHei"/>
+              </a:defRPr>
+            </a:pPr>
+            <a:r>
+              <a:rPr sz="2850" b="1" i="0">
+                <a:solidFill>
+                  <a:srgbClr val="E65C55"/>
+                </a:solidFill>
+                <a:latin typeface="Microsoft YaHei"/>
+                <a:ea typeface="Microsoft YaHei"/>
+                <a:cs typeface="Microsoft YaHei"/>
+              </a:rPr>
+              <a:t>66–75%</a:t>
+            </a:r>
+          </a:p>
+        </p:txBody>
+      </p:sp>
+      <p:sp>
+        <p:nvSpPr>
+          <p:cNvPr id="6" name="auto-text-26">
+            <a:extLst xmlns:a="http://schemas.openxmlformats.org/drawingml/2006/main">
+              <a:ext uri="{FF2B5EF4-FFF2-40B4-BE49-F238E27FC236}">
+                <a16:creationId xmlns:a16="http://schemas.microsoft.com/office/drawing/2014/main" id="{F7A47AD4-1F59-441A-BA04-FB535D1FF753}"/>
+              </a:ext>
+            </a:extLst>
+          </p:cNvPr>
+          <p:cNvSpPr>
+            <a:spLocks xmlns:a="http://schemas.openxmlformats.org/drawingml/2006/main" noGrp="1"/>
+          </p:cNvSpPr>
+          <p:nvPr/>
+        </p:nvSpPr>
+        <p:spPr>
+          <a:xfrm xmlns:a="http://schemas.openxmlformats.org/drawingml/2006/main">
+            <a:off x="2438400" y="1428750"/>
+            <a:ext cx="3048000" cy="266700"/>
+          </a:xfrm>
+          <a:prstGeom xmlns:a="http://schemas.openxmlformats.org/drawingml/2006/main" prst="rect">
+            <a:avLst/>
+          </a:prstGeom>
+          <a:noFill xmlns:a="http://schemas.openxmlformats.org/drawingml/2006/main"/>
+          <a:ln xmlns:a="http://schemas.openxmlformats.org/drawingml/2006/main" w="0">
+            <a:noFill/>
+            <a:prstDash val="solid"/>
+          </a:ln>
+        </p:spPr>
+        <p:txBody>
+          <a:bodyPr xmlns:a="http://schemas.openxmlformats.org/drawingml/2006/main" wrap="square" lIns="0" tIns="0" rIns="0" bIns="0" anchor="t">
+            <a:normAutofit fontScale="100000"/>
+          </a:bodyPr>
+          <a:lstStyle xmlns:a="http://schemas.openxmlformats.org/drawingml/2006/main"/>
+          <a:p xmlns:a="http://schemas.openxmlformats.org/drawingml/2006/main">
+            <a:pPr algn="l">
+              <a:defRPr sz="1425" b="1" i="0">
+                <a:solidFill>
+                  <a:srgbClr val="12263A"/>
+                </a:solidFill>
+                <a:latin typeface="Microsoft YaHei"/>
+                <a:ea typeface="Microsoft YaHei"/>
+                <a:cs typeface="Microsoft YaHei"/>
+              </a:defRPr>
+            </a:pPr>
+            <a:r>
+              <a:rPr sz="1425" b="1" i="0">
+                <a:solidFill>
+                  <a:srgbClr val="12263A"/>
+                </a:solidFill>
+                <a:latin typeface="Microsoft YaHei"/>
+                <a:ea typeface="Microsoft YaHei"/>
+                <a:cs typeface="Microsoft YaHei"/>
+              </a:rPr>
+              <a:t>头部多模态Judge准确率</a:t>
+            </a:r>
+          </a:p>
+        </p:txBody>
+      </p:sp>
+      <p:sp>
+        <p:nvSpPr>
+          <p:cNvPr id="7" name="auto-text-27">
+            <a:extLst xmlns:a="http://schemas.openxmlformats.org/drawingml/2006/main">
+              <a:ext uri="{FF2B5EF4-FFF2-40B4-BE49-F238E27FC236}">
+                <a16:creationId xmlns:a16="http://schemas.microsoft.com/office/drawing/2014/main" id="{00525442-42BE-4894-B5E0-1C0EC334C704}"/>
+              </a:ext>
+            </a:extLst>
+          </p:cNvPr>
+          <p:cNvSpPr>
+            <a:spLocks xmlns:a="http://schemas.openxmlformats.org/drawingml/2006/main" noGrp="1"/>
+          </p:cNvSpPr>
+          <p:nvPr/>
+        </p:nvSpPr>
+        <p:spPr>
+          <a:xfrm xmlns:a="http://schemas.openxmlformats.org/drawingml/2006/main">
+            <a:off x="2438400" y="1733550"/>
+            <a:ext cx="2857500" cy="247650"/>
+          </a:xfrm>
+          <a:prstGeom xmlns:a="http://schemas.openxmlformats.org/drawingml/2006/main" prst="rect">
+            <a:avLst/>
+          </a:prstGeom>
+          <a:noFill xmlns:a="http://schemas.openxmlformats.org/drawingml/2006/main"/>
+          <a:ln xmlns:a="http://schemas.openxmlformats.org/drawingml/2006/main" w="0">
+            <a:noFill/>
+            <a:prstDash val="solid"/>
+          </a:ln>
+        </p:spPr>
+        <p:txBody>
+          <a:bodyPr xmlns:a="http://schemas.openxmlformats.org/drawingml/2006/main" wrap="square" lIns="0" tIns="0" rIns="0" bIns="0" anchor="t">
+            <a:normAutofit fontScale="100000"/>
+          </a:bodyPr>
+          <a:lstStyle xmlns:a="http://schemas.openxmlformats.org/drawingml/2006/main"/>
+          <a:p xmlns:a="http://schemas.openxmlformats.org/drawingml/2006/main">
+            <a:pPr algn="l">
+              <a:defRPr sz="1200" b="0" i="0">
+                <a:solidFill>
+                  <a:srgbClr val="66778A"/>
+                </a:solidFill>
+                <a:latin typeface="Microsoft YaHei"/>
+                <a:ea typeface="Microsoft YaHei"/>
+                <a:cs typeface="Microsoft YaHei"/>
+              </a:defRPr>
+            </a:pPr>
+            <a:r>
+              <a:rPr sz="1200" b="0" i="0">
+                <a:solidFill>
+                  <a:srgbClr val="66778A"/>
+                </a:solidFill>
+                <a:latin typeface="Microsoft YaHei"/>
+                <a:ea typeface="Microsoft YaHei"/>
+                <a:cs typeface="Microsoft YaHei"/>
+              </a:rPr>
+              <a:t>对比：人类专家 &gt;90%</a:t>
+            </a:r>
+          </a:p>
+        </p:txBody>
+      </p:sp>
+      <p:sp>
+        <p:nvSpPr>
+          <p:cNvPr id="8" name="stat-right">
+            <a:extLst xmlns:a="http://schemas.openxmlformats.org/drawingml/2006/main">
+              <a:ext uri="{FF2B5EF4-FFF2-40B4-BE49-F238E27FC236}">
+                <a16:creationId xmlns:a16="http://schemas.microsoft.com/office/drawing/2014/main" id="{2F7340E2-C158-4D1E-9DF9-AD6A35C5BAE8}"/>
+              </a:ext>
+            </a:extLst>
+          </p:cNvPr>
+          <p:cNvSpPr>
+            <a:spLocks xmlns:a="http://schemas.openxmlformats.org/drawingml/2006/main" noGrp="1"/>
+          </p:cNvSpPr>
+          <p:nvPr/>
+        </p:nvSpPr>
+        <p:spPr>
+          <a:xfrm xmlns:a="http://schemas.openxmlformats.org/drawingml/2006/main">
+            <a:off x="6343650" y="1200150"/>
+            <a:ext cx="5334000" cy="990600"/>
+          </a:xfrm>
+          <a:prstGeom xmlns:a="http://schemas.openxmlformats.org/drawingml/2006/main" prst="roundRect">
+            <a:avLst>
+              <a:gd name="adj" fmla="val 11538"/>
+            </a:avLst>
+          </a:prstGeom>
+          <a:solidFill xmlns:a="http://schemas.openxmlformats.org/drawingml/2006/main">
+            <a:srgbClr val="EAF0FF"/>
+          </a:solidFill>
+          <a:ln xmlns:a="http://schemas.openxmlformats.org/drawingml/2006/main" w="9525">
+            <a:solidFill>
+              <a:srgbClr val="EAF0FF"/>
+            </a:solidFill>
+            <a:prstDash val="solid"/>
+          </a:ln>
+        </p:spPr>
+      </p:sp>
+      <p:sp>
+        <p:nvSpPr>
+          <p:cNvPr id="9" name="auto-text-28">
+            <a:extLst xmlns:a="http://schemas.openxmlformats.org/drawingml/2006/main">
+              <a:ext uri="{FF2B5EF4-FFF2-40B4-BE49-F238E27FC236}">
+                <a16:creationId xmlns:a16="http://schemas.microsoft.com/office/drawing/2014/main" id="{26E35736-D455-4190-8006-63EEF3FEA78A}"/>
+              </a:ext>
+            </a:extLst>
+          </p:cNvPr>
+          <p:cNvSpPr>
+            <a:spLocks xmlns:a="http://schemas.openxmlformats.org/drawingml/2006/main" noGrp="1"/>
+          </p:cNvSpPr>
+          <p:nvPr/>
+        </p:nvSpPr>
+        <p:spPr>
+          <a:xfrm xmlns:a="http://schemas.openxmlformats.org/drawingml/2006/main">
+            <a:off x="6572250" y="1362075"/>
+            <a:ext cx="2095500" cy="381000"/>
+          </a:xfrm>
+          <a:prstGeom xmlns:a="http://schemas.openxmlformats.org/drawingml/2006/main" prst="rect">
+            <a:avLst/>
+          </a:prstGeom>
+          <a:noFill xmlns:a="http://schemas.openxmlformats.org/drawingml/2006/main"/>
+          <a:ln xmlns:a="http://schemas.openxmlformats.org/drawingml/2006/main" w="0">
+            <a:noFill/>
+            <a:prstDash val="solid"/>
+          </a:ln>
+        </p:spPr>
+        <p:txBody>
+          <a:bodyPr xmlns:a="http://schemas.openxmlformats.org/drawingml/2006/main" wrap="square" lIns="0" tIns="0" rIns="0" bIns="0" anchor="t">
+            <a:normAutofit fontScale="100000"/>
+          </a:bodyPr>
+          <a:lstStyle xmlns:a="http://schemas.openxmlformats.org/drawingml/2006/main"/>
+          <a:p xmlns:a="http://schemas.openxmlformats.org/drawingml/2006/main">
+            <a:pPr algn="l">
+              <a:defRPr sz="1950" b="1" i="0">
+                <a:solidFill>
+                  <a:srgbClr val="2F6BFF"/>
+                </a:solidFill>
+                <a:latin typeface="Microsoft YaHei"/>
+                <a:ea typeface="Microsoft YaHei"/>
+                <a:cs typeface="Microsoft YaHei"/>
+              </a:defRPr>
+            </a:pPr>
+            <a:r>
+              <a:rPr sz="1950" b="1" i="0">
+                <a:solidFill>
+                  <a:srgbClr val="2F6BFF"/>
+                </a:solidFill>
+                <a:latin typeface="Microsoft YaHei"/>
+                <a:ea typeface="Microsoft YaHei"/>
+                <a:cs typeface="Microsoft YaHei"/>
+              </a:rPr>
+              <a:t>少量验证样本</a:t>
+            </a:r>
+          </a:p>
+        </p:txBody>
+      </p:sp>
+      <p:sp>
+        <p:nvSpPr>
+          <p:cNvPr id="10" name="auto-text-29">
+            <a:extLst xmlns:a="http://schemas.openxmlformats.org/drawingml/2006/main">
+              <a:ext uri="{FF2B5EF4-FFF2-40B4-BE49-F238E27FC236}">
+                <a16:creationId xmlns:a16="http://schemas.microsoft.com/office/drawing/2014/main" id="{DF8FA692-652D-481A-A6D0-4029F007803B}"/>
+              </a:ext>
+            </a:extLst>
+          </p:cNvPr>
+          <p:cNvSpPr>
+            <a:spLocks xmlns:a="http://schemas.openxmlformats.org/drawingml/2006/main" noGrp="1"/>
+          </p:cNvSpPr>
+          <p:nvPr/>
+        </p:nvSpPr>
+        <p:spPr>
+          <a:xfrm xmlns:a="http://schemas.openxmlformats.org/drawingml/2006/main">
+            <a:off x="8629650" y="1362075"/>
+            <a:ext cx="2781300" cy="533400"/>
+          </a:xfrm>
+          <a:prstGeom xmlns:a="http://schemas.openxmlformats.org/drawingml/2006/main" prst="rect">
+            <a:avLst/>
+          </a:prstGeom>
+          <a:noFill xmlns:a="http://schemas.openxmlformats.org/drawingml/2006/main"/>
+          <a:ln xmlns:a="http://schemas.openxmlformats.org/drawingml/2006/main" w="0">
+            <a:noFill/>
+            <a:prstDash val="solid"/>
+          </a:ln>
+        </p:spPr>
+        <p:txBody>
+          <a:bodyPr xmlns:a="http://schemas.openxmlformats.org/drawingml/2006/main" wrap="square" lIns="0" tIns="0" rIns="0" bIns="0" anchor="t">
+            <a:normAutofit fontScale="100000"/>
+          </a:bodyPr>
+          <a:lstStyle xmlns:a="http://schemas.openxmlformats.org/drawingml/2006/main"/>
+          <a:p xmlns:a="http://schemas.openxmlformats.org/drawingml/2006/main">
+            <a:pPr algn="l">
+              <a:defRPr sz="1275" b="1" i="0">
+                <a:solidFill>
+                  <a:srgbClr val="12263A"/>
+                </a:solidFill>
+                <a:latin typeface="Microsoft YaHei"/>
+                <a:ea typeface="Microsoft YaHei"/>
+                <a:cs typeface="Microsoft YaHei"/>
+              </a:defRPr>
+            </a:pPr>
+            <a:r>
+              <a:rPr sz="1275" b="1" i="0">
+                <a:solidFill>
+                  <a:srgbClr val="12263A"/>
+                </a:solidFill>
+                <a:latin typeface="Microsoft YaHei"/>
+                <a:ea typeface="Microsoft YaHei"/>
+                <a:cs typeface="Microsoft YaHei"/>
+              </a:rPr>
+              <a:t>即可学习不同Prompt／视觉类型的权重，并改善置信度校准</a:t>
+            </a:r>
+          </a:p>
+        </p:txBody>
+      </p:sp>
+      <p:sp>
+        <p:nvSpPr>
+          <p:cNvPr id="11" name="mmrb2-results-back">
+            <a:extLst xmlns:a="http://schemas.openxmlformats.org/drawingml/2006/main">
+              <a:ext uri="{FF2B5EF4-FFF2-40B4-BE49-F238E27FC236}">
+                <a16:creationId xmlns:a16="http://schemas.microsoft.com/office/drawing/2014/main" id="{F36489D8-3BDC-46D5-878D-8C9875BA9A8D}"/>
+              </a:ext>
+            </a:extLst>
+          </p:cNvPr>
+          <p:cNvSpPr>
+            <a:spLocks xmlns:a="http://schemas.openxmlformats.org/drawingml/2006/main" noGrp="1"/>
+          </p:cNvSpPr>
+          <p:nvPr/>
+        </p:nvSpPr>
+        <p:spPr>
+          <a:xfrm xmlns:a="http://schemas.openxmlformats.org/drawingml/2006/main">
+            <a:off x="495300" y="2400300"/>
+            <a:ext cx="5372100" cy="2667000"/>
+          </a:xfrm>
+          <a:prstGeom xmlns:a="http://schemas.openxmlformats.org/drawingml/2006/main" prst="roundRect">
+            <a:avLst>
+              <a:gd name="adj" fmla="val 2857"/>
+            </a:avLst>
+          </a:prstGeom>
+          <a:solidFill xmlns:a="http://schemas.openxmlformats.org/drawingml/2006/main">
+            <a:srgbClr val="FFFFFF"/>
           </a:solidFill>
           <a:ln xmlns:a="http://schemas.openxmlformats.org/drawingml/2006/main" w="9525">
             <a:solidFill>
@@ -6286,610 +7221,107 @@
           </a:ln>
         </p:spPr>
       </p:sp>
-      <p:sp>
-        <p:nvSpPr>
-          <p:cNvPr id="6" name="auto-text-28">
-            <a:extLst xmlns:a="http://schemas.openxmlformats.org/drawingml/2006/main">
-              <a:ext uri="{FF2B5EF4-FFF2-40B4-BE49-F238E27FC236}">
-                <a16:creationId xmlns:a16="http://schemas.microsoft.com/office/drawing/2014/main" id="{6254A7A0-ECDD-4489-9F48-A77387D8B3ED}"/>
-              </a:ext>
-            </a:extLst>
-          </p:cNvPr>
-          <p:cNvSpPr>
-            <a:spLocks xmlns:a="http://schemas.openxmlformats.org/drawingml/2006/main" noGrp="1"/>
-          </p:cNvSpPr>
-          <p:nvPr/>
-        </p:nvSpPr>
-        <p:spPr>
-          <a:xfrm xmlns:a="http://schemas.openxmlformats.org/drawingml/2006/main">
-            <a:off x="762000" y="1924050"/>
-            <a:ext cx="1143000" cy="323850"/>
-          </a:xfrm>
-          <a:prstGeom xmlns:a="http://schemas.openxmlformats.org/drawingml/2006/main" prst="rect">
-            <a:avLst/>
-          </a:prstGeom>
-          <a:noFill xmlns:a="http://schemas.openxmlformats.org/drawingml/2006/main"/>
-          <a:ln xmlns:a="http://schemas.openxmlformats.org/drawingml/2006/main" w="0">
-            <a:noFill/>
-            <a:prstDash val="solid"/>
-          </a:ln>
-        </p:spPr>
-        <p:txBody>
-          <a:bodyPr xmlns:a="http://schemas.openxmlformats.org/drawingml/2006/main" wrap="square" lIns="0" tIns="0" rIns="0" bIns="0" anchor="t">
-            <a:normAutofit fontScale="100000"/>
-          </a:bodyPr>
-          <a:lstStyle xmlns:a="http://schemas.openxmlformats.org/drawingml/2006/main"/>
-          <a:p xmlns:a="http://schemas.openxmlformats.org/drawingml/2006/main">
-            <a:pPr algn="l">
-              <a:defRPr sz="1875" b="1" i="0">
-                <a:solidFill>
-                  <a:srgbClr val="2F6BFF"/>
-                </a:solidFill>
-                <a:latin typeface="Microsoft YaHei"/>
-                <a:ea typeface="Microsoft YaHei"/>
-                <a:cs typeface="Microsoft YaHei"/>
-              </a:defRPr>
-            </a:pPr>
-            <a:r>
-              <a:rPr sz="1875" b="1" i="0">
-                <a:solidFill>
-                  <a:srgbClr val="2F6BFF"/>
-                </a:solidFill>
-                <a:latin typeface="Microsoft YaHei"/>
-                <a:ea typeface="Microsoft YaHei"/>
-                <a:cs typeface="Microsoft YaHei"/>
-              </a:rPr>
-              <a:t>输入</a:t>
-            </a:r>
-          </a:p>
-        </p:txBody>
-      </p:sp>
-      <p:sp>
-        <p:nvSpPr>
-          <p:cNvPr id="7" name="auto-text-29">
-            <a:extLst xmlns:a="http://schemas.openxmlformats.org/drawingml/2006/main">
-              <a:ext uri="{FF2B5EF4-FFF2-40B4-BE49-F238E27FC236}">
-                <a16:creationId xmlns:a16="http://schemas.microsoft.com/office/drawing/2014/main" id="{5C9F9DC9-538E-407A-ABC4-085A5C1D29B7}"/>
-              </a:ext>
-            </a:extLst>
-          </p:cNvPr>
-          <p:cNvSpPr>
-            <a:spLocks xmlns:a="http://schemas.openxmlformats.org/drawingml/2006/main" noGrp="1"/>
-          </p:cNvSpPr>
-          <p:nvPr/>
-        </p:nvSpPr>
-        <p:spPr>
-          <a:xfrm xmlns:a="http://schemas.openxmlformats.org/drawingml/2006/main">
-            <a:off x="762000" y="2419350"/>
-            <a:ext cx="2381250" cy="2095500"/>
-          </a:xfrm>
-          <a:prstGeom xmlns:a="http://schemas.openxmlformats.org/drawingml/2006/main" prst="rect">
-            <a:avLst/>
-          </a:prstGeom>
-          <a:noFill xmlns:a="http://schemas.openxmlformats.org/drawingml/2006/main"/>
-          <a:ln xmlns:a="http://schemas.openxmlformats.org/drawingml/2006/main" w="0">
-            <a:noFill/>
-            <a:prstDash val="solid"/>
-          </a:ln>
-        </p:spPr>
-        <p:txBody>
-          <a:bodyPr xmlns:a="http://schemas.openxmlformats.org/drawingml/2006/main" wrap="square" lIns="0" tIns="0" rIns="0" bIns="0" anchor="t">
-            <a:normAutofit fontScale="100000"/>
-          </a:bodyPr>
-          <a:lstStyle xmlns:a="http://schemas.openxmlformats.org/drawingml/2006/main"/>
-          <a:p xmlns:a="http://schemas.openxmlformats.org/drawingml/2006/main">
-            <a:pPr algn="l">
-              <a:defRPr sz="1350" b="0" i="0">
-                <a:solidFill>
-                  <a:srgbClr val="25364A"/>
-                </a:solidFill>
-                <a:latin typeface="Microsoft YaHei"/>
-                <a:ea typeface="Microsoft YaHei"/>
-                <a:cs typeface="Microsoft YaHei"/>
-              </a:defRPr>
-            </a:pPr>
-            <a:r>
-              <a:rPr sz="1350" b="0" i="0">
-                <a:solidFill>
-                  <a:srgbClr val="25364A"/>
-                </a:solidFill>
-                <a:latin typeface="Microsoft YaHei"/>
-                <a:ea typeface="Microsoft YaHei"/>
-                <a:cs typeface="Microsoft YaHei"/>
-              </a:rPr>
-              <a:t>任务描述</a:t>
-            </a:r>
-          </a:p>
-          <a:p xmlns:a="http://schemas.openxmlformats.org/drawingml/2006/main">
-            <a:r>
-              <a:t/>
-            </a:r>
-          </a:p>
-          <a:p xmlns:a="http://schemas.openxmlformats.org/drawingml/2006/main">
-            <a:pPr algn="l">
-              <a:defRPr sz="1350" b="0" i="0">
-                <a:solidFill>
-                  <a:srgbClr val="25364A"/>
-                </a:solidFill>
-                <a:latin typeface="Microsoft YaHei"/>
-                <a:ea typeface="Microsoft YaHei"/>
-                <a:cs typeface="Microsoft YaHei"/>
-              </a:defRPr>
-            </a:pPr>
-            <a:r>
-              <a:rPr sz="1350" b="0" i="0">
-                <a:solidFill>
-                  <a:srgbClr val="25364A"/>
-                </a:solidFill>
-                <a:latin typeface="Microsoft YaHei"/>
-                <a:ea typeface="Microsoft YaHei"/>
-                <a:cs typeface="Microsoft YaHei"/>
-              </a:rPr>
-              <a:t>少量人工标注／专家偏好</a:t>
-            </a:r>
-          </a:p>
-          <a:p xmlns:a="http://schemas.openxmlformats.org/drawingml/2006/main">
-            <a:r>
-              <a:t/>
-            </a:r>
-          </a:p>
-          <a:p xmlns:a="http://schemas.openxmlformats.org/drawingml/2006/main">
-            <a:pPr algn="l">
-              <a:defRPr sz="1350" b="0" i="0">
-                <a:solidFill>
-                  <a:srgbClr val="25364A"/>
-                </a:solidFill>
-                <a:latin typeface="Microsoft YaHei"/>
-                <a:ea typeface="Microsoft YaHei"/>
-                <a:cs typeface="Microsoft YaHei"/>
-              </a:defRPr>
-            </a:pPr>
-            <a:r>
-              <a:rPr sz="1350" b="0" i="0">
-                <a:solidFill>
-                  <a:srgbClr val="25364A"/>
-                </a:solidFill>
-                <a:latin typeface="Microsoft YaHei"/>
-                <a:ea typeface="Microsoft YaHei"/>
-                <a:cs typeface="Microsoft YaHei"/>
-              </a:rPr>
-              <a:t>已有规则、Prompt和评估器输出</a:t>
-            </a:r>
-          </a:p>
-          <a:p xmlns:a="http://schemas.openxmlformats.org/drawingml/2006/main">
-            <a:r>
-              <a:t/>
-            </a:r>
-          </a:p>
-          <a:p xmlns:a="http://schemas.openxmlformats.org/drawingml/2006/main">
-            <a:pPr algn="l">
-              <a:defRPr sz="1350" b="0" i="0">
-                <a:solidFill>
-                  <a:srgbClr val="25364A"/>
-                </a:solidFill>
-                <a:latin typeface="Microsoft YaHei"/>
-                <a:ea typeface="Microsoft YaHei"/>
-                <a:cs typeface="Microsoft YaHei"/>
-              </a:defRPr>
-            </a:pPr>
-            <a:r>
-              <a:rPr sz="1350" b="0" i="0">
-                <a:solidFill>
-                  <a:srgbClr val="25364A"/>
-                </a:solidFill>
-                <a:latin typeface="Microsoft YaHei"/>
-                <a:ea typeface="Microsoft YaHei"/>
-                <a:cs typeface="Microsoft YaHei"/>
-              </a:rPr>
-              <a:t>业务关注的质量维度</a:t>
-            </a:r>
-          </a:p>
-        </p:txBody>
-      </p:sp>
-      <p:sp>
-        <p:nvSpPr>
-          <p:cNvPr id="8" name="auto-text-30">
-            <a:extLst xmlns:a="http://schemas.openxmlformats.org/drawingml/2006/main">
-              <a:ext uri="{FF2B5EF4-FFF2-40B4-BE49-F238E27FC236}">
-                <a16:creationId xmlns:a16="http://schemas.microsoft.com/office/drawing/2014/main" id="{4E0AADB7-1FED-43D5-BAA9-8825A7624596}"/>
-              </a:ext>
-            </a:extLst>
-          </p:cNvPr>
-          <p:cNvSpPr>
-            <a:spLocks xmlns:a="http://schemas.openxmlformats.org/drawingml/2006/main" noGrp="1"/>
-          </p:cNvSpPr>
-          <p:nvPr/>
-        </p:nvSpPr>
-        <p:spPr>
-          <a:xfrm xmlns:a="http://schemas.openxmlformats.org/drawingml/2006/main">
-            <a:off x="3562350" y="2971800"/>
-            <a:ext cx="685800" cy="685800"/>
-          </a:xfrm>
-          <a:prstGeom xmlns:a="http://schemas.openxmlformats.org/drawingml/2006/main" prst="rect">
-            <a:avLst/>
-          </a:prstGeom>
-          <a:noFill xmlns:a="http://schemas.openxmlformats.org/drawingml/2006/main"/>
-          <a:ln xmlns:a="http://schemas.openxmlformats.org/drawingml/2006/main" w="0">
-            <a:noFill/>
-            <a:prstDash val="solid"/>
-          </a:ln>
-        </p:spPr>
-        <p:txBody>
-          <a:bodyPr xmlns:a="http://schemas.openxmlformats.org/drawingml/2006/main" wrap="square" lIns="0" tIns="0" rIns="0" bIns="0" anchor="t">
-            <a:normAutofit fontScale="100000"/>
-          </a:bodyPr>
-          <a:lstStyle xmlns:a="http://schemas.openxmlformats.org/drawingml/2006/main"/>
-          <a:p xmlns:a="http://schemas.openxmlformats.org/drawingml/2006/main">
-            <a:pPr algn="ctr">
-              <a:defRPr sz="3900" b="1" i="0">
-                <a:solidFill>
-                  <a:srgbClr val="9BB3E9"/>
-                </a:solidFill>
-                <a:latin typeface="Microsoft YaHei"/>
-                <a:ea typeface="Microsoft YaHei"/>
-                <a:cs typeface="Microsoft YaHei"/>
-              </a:defRPr>
-            </a:pPr>
-            <a:r>
-              <a:rPr sz="3900" b="1" i="0">
-                <a:solidFill>
-                  <a:srgbClr val="9BB3E9"/>
-                </a:solidFill>
-                <a:latin typeface="Microsoft YaHei"/>
-                <a:ea typeface="Microsoft YaHei"/>
-                <a:cs typeface="Microsoft YaHei"/>
-              </a:rPr>
-              <a:t>→</a:t>
-            </a:r>
-          </a:p>
-        </p:txBody>
-      </p:sp>
-      <p:sp>
-        <p:nvSpPr>
-          <p:cNvPr id="9" name="calibration-node">
-            <a:extLst xmlns:a="http://schemas.openxmlformats.org/drawingml/2006/main">
-              <a:ext uri="{FF2B5EF4-FFF2-40B4-BE49-F238E27FC236}">
-                <a16:creationId xmlns:a16="http://schemas.microsoft.com/office/drawing/2014/main" id="{B58ACA64-4398-468D-A0B2-5E7A6FD23810}"/>
-              </a:ext>
-            </a:extLst>
-          </p:cNvPr>
-          <p:cNvSpPr>
-            <a:spLocks xmlns:a="http://schemas.openxmlformats.org/drawingml/2006/main" noGrp="1"/>
-          </p:cNvSpPr>
-          <p:nvPr/>
-        </p:nvSpPr>
-        <p:spPr>
-          <a:xfrm xmlns:a="http://schemas.openxmlformats.org/drawingml/2006/main">
-            <a:off x="4191000" y="1504950"/>
-            <a:ext cx="3810000" cy="3657600"/>
+      <p:pic>
+        <p:nvPicPr>
+          <p:cNvPr id="31" name=""/>
+          <p:cNvPicPr>
+            <a:picLocks xmlns:a="http://schemas.openxmlformats.org/drawingml/2006/main" noChangeAspect="1"/>
+          </p:cNvPicPr>
+          <p:nvPr/>
+        </p:nvPicPr>
+        <p:blipFill>
+          <a:blip xmlns:r="http://schemas.openxmlformats.org/officeDocument/2006/relationships" xmlns:a="http://schemas.openxmlformats.org/drawingml/2006/main" r:embed="R1e87d69a04ec4424"/>
+          <a:stretch xmlns:a="http://schemas.openxmlformats.org/drawingml/2006/main"/>
+        </p:blipFill>
+        <p:spPr>
+          <a:xfrm xmlns:a="http://schemas.openxmlformats.org/drawingml/2006/main">
+            <a:off x="627135" y="2419350"/>
+            <a:ext cx="5108431" cy="2628900"/>
           </a:xfrm>
           <a:prstGeom xmlns:a="http://schemas.openxmlformats.org/drawingml/2006/main" prst="roundRect">
             <a:avLst>
-              <a:gd name="adj" fmla="val 3125"/>
+              <a:gd name="adj" fmla="val 2899"/>
             </a:avLst>
           </a:prstGeom>
+        </p:spPr>
+      </p:pic>
+      <p:sp>
+        <p:nvSpPr>
+          <p:cNvPr id="13" name="calibration-curves-back">
+            <a:extLst xmlns:a="http://schemas.openxmlformats.org/drawingml/2006/main">
+              <a:ext uri="{FF2B5EF4-FFF2-40B4-BE49-F238E27FC236}">
+                <a16:creationId xmlns:a16="http://schemas.microsoft.com/office/drawing/2014/main" id="{2F7533A3-720A-45F4-9D11-D534CA4C7479}"/>
+              </a:ext>
+            </a:extLst>
+          </p:cNvPr>
+          <p:cNvSpPr>
+            <a:spLocks xmlns:a="http://schemas.openxmlformats.org/drawingml/2006/main" noGrp="1"/>
+          </p:cNvSpPr>
+          <p:nvPr/>
+        </p:nvSpPr>
+        <p:spPr>
+          <a:xfrm xmlns:a="http://schemas.openxmlformats.org/drawingml/2006/main">
+            <a:off x="6324600" y="2400300"/>
+            <a:ext cx="5372100" cy="2667000"/>
+          </a:xfrm>
+          <a:prstGeom xmlns:a="http://schemas.openxmlformats.org/drawingml/2006/main" prst="roundRect">
+            <a:avLst>
+              <a:gd name="adj" fmla="val 2857"/>
+            </a:avLst>
+          </a:prstGeom>
           <a:solidFill xmlns:a="http://schemas.openxmlformats.org/drawingml/2006/main">
-            <a:srgbClr val="EAF0FF"/>
+            <a:srgbClr val="FFFFFF"/>
           </a:solidFill>
           <a:ln xmlns:a="http://schemas.openxmlformats.org/drawingml/2006/main" w="9525">
             <a:solidFill>
-              <a:srgbClr val="B7C8F5"/>
+              <a:srgbClr val="D8E0E8"/>
             </a:solidFill>
             <a:prstDash val="solid"/>
           </a:ln>
         </p:spPr>
       </p:sp>
-      <p:sp>
-        <p:nvSpPr>
-          <p:cNvPr id="10" name="auto-text-31">
-            <a:extLst xmlns:a="http://schemas.openxmlformats.org/drawingml/2006/main">
-              <a:ext uri="{FF2B5EF4-FFF2-40B4-BE49-F238E27FC236}">
-                <a16:creationId xmlns:a16="http://schemas.microsoft.com/office/drawing/2014/main" id="{F05B3145-CF58-4F69-8674-103B8F07B7B8}"/>
-              </a:ext>
-            </a:extLst>
-          </p:cNvPr>
-          <p:cNvSpPr>
-            <a:spLocks xmlns:a="http://schemas.openxmlformats.org/drawingml/2006/main" noGrp="1"/>
-          </p:cNvSpPr>
-          <p:nvPr/>
-        </p:nvSpPr>
-        <p:spPr>
-          <a:xfrm xmlns:a="http://schemas.openxmlformats.org/drawingml/2006/main">
-            <a:off x="4495800" y="1809750"/>
-            <a:ext cx="3219450" cy="381000"/>
-          </a:xfrm>
-          <a:prstGeom xmlns:a="http://schemas.openxmlformats.org/drawingml/2006/main" prst="rect">
-            <a:avLst/>
-          </a:prstGeom>
-          <a:noFill xmlns:a="http://schemas.openxmlformats.org/drawingml/2006/main"/>
-          <a:ln xmlns:a="http://schemas.openxmlformats.org/drawingml/2006/main" w="0">
-            <a:noFill/>
-            <a:prstDash val="solid"/>
-          </a:ln>
-        </p:spPr>
-        <p:txBody>
-          <a:bodyPr xmlns:a="http://schemas.openxmlformats.org/drawingml/2006/main" wrap="square" lIns="0" tIns="0" rIns="0" bIns="0" anchor="t">
-            <a:normAutofit fontScale="100000"/>
-          </a:bodyPr>
-          <a:lstStyle xmlns:a="http://schemas.openxmlformats.org/drawingml/2006/main"/>
-          <a:p xmlns:a="http://schemas.openxmlformats.org/drawingml/2006/main">
-            <a:pPr algn="ctr">
-              <a:defRPr sz="2025" b="1" i="0">
-                <a:solidFill>
-                  <a:srgbClr val="2F6BFF"/>
-                </a:solidFill>
-                <a:latin typeface="Microsoft YaHei"/>
-                <a:ea typeface="Microsoft YaHei"/>
-                <a:cs typeface="Microsoft YaHei"/>
-              </a:defRPr>
-            </a:pPr>
-            <a:r>
-              <a:rPr sz="2025" b="1" i="0">
-                <a:solidFill>
-                  <a:srgbClr val="2F6BFF"/>
-                </a:solidFill>
-                <a:latin typeface="Microsoft YaHei"/>
-                <a:ea typeface="Microsoft YaHei"/>
-                <a:cs typeface="Microsoft YaHei"/>
-              </a:rPr>
-              <a:t>任务自适应质量评估层</a:t>
-            </a:r>
-          </a:p>
-        </p:txBody>
-      </p:sp>
-      <p:sp>
-        <p:nvSpPr>
-          <p:cNvPr id="11" name="auto-text-32">
-            <a:extLst xmlns:a="http://schemas.openxmlformats.org/drawingml/2006/main">
-              <a:ext uri="{FF2B5EF4-FFF2-40B4-BE49-F238E27FC236}">
-                <a16:creationId xmlns:a16="http://schemas.microsoft.com/office/drawing/2014/main" id="{F421328C-9844-466E-A1F8-1A6A712EFB2C}"/>
-              </a:ext>
-            </a:extLst>
-          </p:cNvPr>
-          <p:cNvSpPr>
-            <a:spLocks xmlns:a="http://schemas.openxmlformats.org/drawingml/2006/main" noGrp="1"/>
-          </p:cNvSpPr>
-          <p:nvPr/>
-        </p:nvSpPr>
-        <p:spPr>
-          <a:xfrm xmlns:a="http://schemas.openxmlformats.org/drawingml/2006/main">
-            <a:off x="4552950" y="2438400"/>
-            <a:ext cx="3143250" cy="2152650"/>
-          </a:xfrm>
-          <a:prstGeom xmlns:a="http://schemas.openxmlformats.org/drawingml/2006/main" prst="rect">
-            <a:avLst/>
-          </a:prstGeom>
-          <a:noFill xmlns:a="http://schemas.openxmlformats.org/drawingml/2006/main"/>
-          <a:ln xmlns:a="http://schemas.openxmlformats.org/drawingml/2006/main" w="0">
-            <a:noFill/>
-            <a:prstDash val="solid"/>
-          </a:ln>
-        </p:spPr>
-        <p:txBody>
-          <a:bodyPr xmlns:a="http://schemas.openxmlformats.org/drawingml/2006/main" wrap="square" lIns="0" tIns="0" rIns="0" bIns="0" anchor="t">
-            <a:normAutofit fontScale="100000"/>
-          </a:bodyPr>
-          <a:lstStyle xmlns:a="http://schemas.openxmlformats.org/drawingml/2006/main"/>
-          <a:p xmlns:a="http://schemas.openxmlformats.org/drawingml/2006/main">
-            <a:pPr algn="l">
-              <a:defRPr sz="1350" b="0" i="0">
-                <a:solidFill>
-                  <a:srgbClr val="12263A"/>
-                </a:solidFill>
-                <a:latin typeface="Microsoft YaHei"/>
-                <a:ea typeface="Microsoft YaHei"/>
-                <a:cs typeface="Microsoft YaHei"/>
-              </a:defRPr>
-            </a:pPr>
-            <a:r>
-              <a:rPr sz="1350" b="0" i="0">
-                <a:solidFill>
-                  <a:srgbClr val="12263A"/>
-                </a:solidFill>
-                <a:latin typeface="Microsoft YaHei"/>
-                <a:ea typeface="Microsoft YaHei"/>
-                <a:cs typeface="Microsoft YaHei"/>
-              </a:rPr>
-              <a:t>01  任务偏好与质量维度建模</a:t>
-            </a:r>
-          </a:p>
-          <a:p xmlns:a="http://schemas.openxmlformats.org/drawingml/2006/main">
-            <a:r>
-              <a:t/>
-            </a:r>
-          </a:p>
-          <a:p xmlns:a="http://schemas.openxmlformats.org/drawingml/2006/main">
-            <a:pPr algn="l">
-              <a:defRPr sz="1350" b="0" i="0">
-                <a:solidFill>
-                  <a:srgbClr val="12263A"/>
-                </a:solidFill>
-                <a:latin typeface="Microsoft YaHei"/>
-                <a:ea typeface="Microsoft YaHei"/>
-                <a:cs typeface="Microsoft YaHei"/>
-              </a:defRPr>
-            </a:pPr>
-            <a:r>
-              <a:rPr sz="1350" b="0" i="0">
-                <a:solidFill>
-                  <a:srgbClr val="12263A"/>
-                </a:solidFill>
-                <a:latin typeface="Microsoft YaHei"/>
-                <a:ea typeface="Microsoft YaHei"/>
-                <a:cs typeface="Microsoft YaHei"/>
-              </a:rPr>
-              <a:t>02  分数／权重／阈值与置信度校准</a:t>
-            </a:r>
-          </a:p>
-          <a:p xmlns:a="http://schemas.openxmlformats.org/drawingml/2006/main">
-            <a:r>
-              <a:t/>
-            </a:r>
-          </a:p>
-          <a:p xmlns:a="http://schemas.openxmlformats.org/drawingml/2006/main">
-            <a:pPr algn="l">
-              <a:defRPr sz="1350" b="0" i="0">
-                <a:solidFill>
-                  <a:srgbClr val="12263A"/>
-                </a:solidFill>
-                <a:latin typeface="Microsoft YaHei"/>
-                <a:ea typeface="Microsoft YaHei"/>
-                <a:cs typeface="Microsoft YaHei"/>
-              </a:defRPr>
-            </a:pPr>
-            <a:r>
-              <a:rPr sz="1350" b="0" i="0">
-                <a:solidFill>
-                  <a:srgbClr val="12263A"/>
-                </a:solidFill>
-                <a:latin typeface="Microsoft YaHei"/>
-                <a:ea typeface="Microsoft YaHei"/>
-                <a:cs typeface="Microsoft YaHei"/>
-              </a:rPr>
-              <a:t>03  多视角邻域共识与分歧检测</a:t>
-            </a:r>
-          </a:p>
-          <a:p xmlns:a="http://schemas.openxmlformats.org/drawingml/2006/main">
-            <a:r>
-              <a:t/>
-            </a:r>
-          </a:p>
-          <a:p xmlns:a="http://schemas.openxmlformats.org/drawingml/2006/main">
-            <a:pPr algn="l">
-              <a:defRPr sz="1350" b="0" i="0">
-                <a:solidFill>
-                  <a:srgbClr val="12263A"/>
-                </a:solidFill>
-                <a:latin typeface="Microsoft YaHei"/>
-                <a:ea typeface="Microsoft YaHei"/>
-                <a:cs typeface="Microsoft YaHei"/>
-              </a:defRPr>
-            </a:pPr>
-            <a:r>
-              <a:rPr sz="1350" b="0" i="0">
-                <a:solidFill>
-                  <a:srgbClr val="12263A"/>
-                </a:solidFill>
-                <a:latin typeface="Microsoft YaHei"/>
-                <a:ea typeface="Microsoft YaHei"/>
-                <a:cs typeface="Microsoft YaHei"/>
-              </a:rPr>
-              <a:t>04  对象、属性、数量、空间关系等证据核验</a:t>
-            </a:r>
-          </a:p>
-        </p:txBody>
-      </p:sp>
-      <p:sp>
-        <p:nvSpPr>
-          <p:cNvPr id="12" name="auto-text-33">
-            <a:extLst xmlns:a="http://schemas.openxmlformats.org/drawingml/2006/main">
-              <a:ext uri="{FF2B5EF4-FFF2-40B4-BE49-F238E27FC236}">
-                <a16:creationId xmlns:a16="http://schemas.microsoft.com/office/drawing/2014/main" id="{C11BC014-95CB-49F5-872F-9828258C6758}"/>
-              </a:ext>
-            </a:extLst>
-          </p:cNvPr>
-          <p:cNvSpPr>
-            <a:spLocks xmlns:a="http://schemas.openxmlformats.org/drawingml/2006/main" noGrp="1"/>
-          </p:cNvSpPr>
-          <p:nvPr/>
-        </p:nvSpPr>
-        <p:spPr>
-          <a:xfrm xmlns:a="http://schemas.openxmlformats.org/drawingml/2006/main">
-            <a:off x="8096250" y="2971800"/>
-            <a:ext cx="685800" cy="685800"/>
-          </a:xfrm>
-          <a:prstGeom xmlns:a="http://schemas.openxmlformats.org/drawingml/2006/main" prst="rect">
-            <a:avLst/>
-          </a:prstGeom>
-          <a:noFill xmlns:a="http://schemas.openxmlformats.org/drawingml/2006/main"/>
-          <a:ln xmlns:a="http://schemas.openxmlformats.org/drawingml/2006/main" w="0">
-            <a:noFill/>
-            <a:prstDash val="solid"/>
-          </a:ln>
-        </p:spPr>
-        <p:txBody>
-          <a:bodyPr xmlns:a="http://schemas.openxmlformats.org/drawingml/2006/main" wrap="square" lIns="0" tIns="0" rIns="0" bIns="0" anchor="t">
-            <a:normAutofit fontScale="100000"/>
-          </a:bodyPr>
-          <a:lstStyle xmlns:a="http://schemas.openxmlformats.org/drawingml/2006/main"/>
-          <a:p xmlns:a="http://schemas.openxmlformats.org/drawingml/2006/main">
-            <a:pPr algn="ctr">
-              <a:defRPr sz="3900" b="1" i="0">
-                <a:solidFill>
-                  <a:srgbClr val="86C9C2"/>
-                </a:solidFill>
-                <a:latin typeface="Microsoft YaHei"/>
-                <a:ea typeface="Microsoft YaHei"/>
-                <a:cs typeface="Microsoft YaHei"/>
-              </a:defRPr>
-            </a:pPr>
-            <a:r>
-              <a:rPr sz="3900" b="1" i="0">
-                <a:solidFill>
-                  <a:srgbClr val="86C9C2"/>
-                </a:solidFill>
-                <a:latin typeface="Microsoft YaHei"/>
-                <a:ea typeface="Microsoft YaHei"/>
-                <a:cs typeface="Microsoft YaHei"/>
-              </a:rPr>
-              <a:t>→</a:t>
-            </a:r>
-          </a:p>
-        </p:txBody>
-      </p:sp>
-      <p:sp>
-        <p:nvSpPr>
-          <p:cNvPr id="13" name="output-node">
-            <a:extLst xmlns:a="http://schemas.openxmlformats.org/drawingml/2006/main">
-              <a:ext uri="{FF2B5EF4-FFF2-40B4-BE49-F238E27FC236}">
-                <a16:creationId xmlns:a16="http://schemas.microsoft.com/office/drawing/2014/main" id="{E8D4B88D-BEF7-431E-BB74-C17B4A110204}"/>
-              </a:ext>
-            </a:extLst>
-          </p:cNvPr>
-          <p:cNvSpPr>
-            <a:spLocks xmlns:a="http://schemas.openxmlformats.org/drawingml/2006/main" noGrp="1"/>
-          </p:cNvSpPr>
-          <p:nvPr/>
-        </p:nvSpPr>
-        <p:spPr>
-          <a:xfrm xmlns:a="http://schemas.openxmlformats.org/drawingml/2006/main">
-            <a:off x="8724900" y="1695450"/>
-            <a:ext cx="2952750" cy="3276600"/>
+      <p:pic>
+        <p:nvPicPr>
+          <p:cNvPr id="33" name=""/>
+          <p:cNvPicPr>
+            <a:picLocks xmlns:a="http://schemas.openxmlformats.org/drawingml/2006/main" noChangeAspect="1"/>
+          </p:cNvPicPr>
+          <p:nvPr/>
+        </p:nvPicPr>
+        <p:blipFill>
+          <a:blip xmlns:r="http://schemas.openxmlformats.org/officeDocument/2006/relationships" xmlns:a="http://schemas.openxmlformats.org/drawingml/2006/main" r:embed="Re817d940fdbd47d4"/>
+          <a:stretch xmlns:a="http://schemas.openxmlformats.org/drawingml/2006/main"/>
+        </p:blipFill>
+        <p:spPr>
+          <a:xfrm xmlns:a="http://schemas.openxmlformats.org/drawingml/2006/main">
+            <a:off x="6343650" y="2514600"/>
+            <a:ext cx="5334000" cy="2438400"/>
           </a:xfrm>
           <a:prstGeom xmlns:a="http://schemas.openxmlformats.org/drawingml/2006/main" prst="roundRect">
             <a:avLst>
-              <a:gd name="adj" fmla="val 3871"/>
+              <a:gd name="adj" fmla="val 2899"/>
             </a:avLst>
           </a:prstGeom>
-          <a:solidFill xmlns:a="http://schemas.openxmlformats.org/drawingml/2006/main">
-            <a:srgbClr val="E7F6F3"/>
-          </a:solidFill>
-          <a:ln xmlns:a="http://schemas.openxmlformats.org/drawingml/2006/main" w="9525">
-            <a:solidFill>
-              <a:srgbClr val="B6DDD8"/>
-            </a:solidFill>
-            <a:prstDash val="solid"/>
-          </a:ln>
-        </p:spPr>
-      </p:sp>
-      <p:sp>
-        <p:nvSpPr>
-          <p:cNvPr id="14" name="auto-text-34">
-            <a:extLst xmlns:a="http://schemas.openxmlformats.org/drawingml/2006/main">
-              <a:ext uri="{FF2B5EF4-FFF2-40B4-BE49-F238E27FC236}">
-                <a16:creationId xmlns:a16="http://schemas.microsoft.com/office/drawing/2014/main" id="{EFEDD199-B926-47DA-AB0D-0E9CB9D744A3}"/>
-              </a:ext>
-            </a:extLst>
-          </p:cNvPr>
-          <p:cNvSpPr>
-            <a:spLocks xmlns:a="http://schemas.openxmlformats.org/drawingml/2006/main" noGrp="1"/>
-          </p:cNvSpPr>
-          <p:nvPr/>
-        </p:nvSpPr>
-        <p:spPr>
-          <a:xfrm xmlns:a="http://schemas.openxmlformats.org/drawingml/2006/main">
-            <a:off x="8991600" y="1924050"/>
-            <a:ext cx="1143000" cy="323850"/>
+        </p:spPr>
+      </p:pic>
+      <p:sp>
+        <p:nvSpPr>
+          <p:cNvPr id="15" name="auto-text-30">
+            <a:extLst xmlns:a="http://schemas.openxmlformats.org/drawingml/2006/main">
+              <a:ext uri="{FF2B5EF4-FFF2-40B4-BE49-F238E27FC236}">
+                <a16:creationId xmlns:a16="http://schemas.microsoft.com/office/drawing/2014/main" id="{687146F1-4526-4F7C-86FE-5140681AAA43}"/>
+              </a:ext>
+            </a:extLst>
+          </p:cNvPr>
+          <p:cNvSpPr>
+            <a:spLocks xmlns:a="http://schemas.openxmlformats.org/drawingml/2006/main" noGrp="1"/>
+          </p:cNvSpPr>
+          <p:nvPr/>
+        </p:nvSpPr>
+        <p:spPr>
+          <a:xfrm xmlns:a="http://schemas.openxmlformats.org/drawingml/2006/main">
+            <a:off x="552450" y="5219700"/>
+            <a:ext cx="5238750" cy="457200"/>
           </a:xfrm>
           <a:prstGeom xmlns:a="http://schemas.openxmlformats.org/drawingml/2006/main" prst="rect">
             <a:avLst/>
@@ -6907,47 +7339,47 @@
           <a:lstStyle xmlns:a="http://schemas.openxmlformats.org/drawingml/2006/main"/>
           <a:p xmlns:a="http://schemas.openxmlformats.org/drawingml/2006/main">
             <a:pPr algn="l">
-              <a:defRPr sz="1875" b="1" i="0">
-                <a:solidFill>
-                  <a:srgbClr val="159A91"/>
-                </a:solidFill>
-                <a:latin typeface="Microsoft YaHei"/>
-                <a:ea typeface="Microsoft YaHei"/>
-                <a:cs typeface="Microsoft YaHei"/>
-              </a:defRPr>
-            </a:pPr>
-            <a:r>
-              <a:rPr sz="1875" b="1" i="0">
-                <a:solidFill>
-                  <a:srgbClr val="159A91"/>
-                </a:solidFill>
-                <a:latin typeface="Microsoft YaHei"/>
-                <a:ea typeface="Microsoft YaHei"/>
-                <a:cs typeface="Microsoft YaHei"/>
-              </a:rPr>
-              <a:t>输出</a:t>
-            </a:r>
-          </a:p>
-        </p:txBody>
-      </p:sp>
-      <p:sp>
-        <p:nvSpPr>
-          <p:cNvPr id="15" name="auto-text-35">
-            <a:extLst xmlns:a="http://schemas.openxmlformats.org/drawingml/2006/main">
-              <a:ext uri="{FF2B5EF4-FFF2-40B4-BE49-F238E27FC236}">
-                <a16:creationId xmlns:a16="http://schemas.microsoft.com/office/drawing/2014/main" id="{2155D92B-983C-40A1-B306-281D8BC8B75B}"/>
-              </a:ext>
-            </a:extLst>
-          </p:cNvPr>
-          <p:cNvSpPr>
-            <a:spLocks xmlns:a="http://schemas.openxmlformats.org/drawingml/2006/main" noGrp="1"/>
-          </p:cNvSpPr>
-          <p:nvPr/>
-        </p:nvSpPr>
-        <p:spPr>
-          <a:xfrm xmlns:a="http://schemas.openxmlformats.org/drawingml/2006/main">
-            <a:off x="8991600" y="2419350"/>
-            <a:ext cx="2381250" cy="2266950"/>
+              <a:defRPr sz="1275" b="1" i="0">
+                <a:solidFill>
+                  <a:srgbClr val="12263A"/>
+                </a:solidFill>
+                <a:latin typeface="Microsoft YaHei"/>
+                <a:ea typeface="Microsoft YaHei"/>
+                <a:cs typeface="Microsoft YaHei"/>
+              </a:defRPr>
+            </a:pPr>
+            <a:r>
+              <a:rPr sz="1275" b="1" i="0">
+                <a:solidFill>
+                  <a:srgbClr val="12263A"/>
+                </a:solidFill>
+                <a:latin typeface="Microsoft YaHei"/>
+                <a:ea typeface="Microsoft YaHei"/>
+                <a:cs typeface="Microsoft YaHei"/>
+              </a:rPr>
+              <a:t>结论一｜通用Judge与专家偏好仍有明显差距，且不同任务表现差异较大。</a:t>
+            </a:r>
+          </a:p>
+        </p:txBody>
+      </p:sp>
+      <p:sp>
+        <p:nvSpPr>
+          <p:cNvPr id="16" name="auto-text-31">
+            <a:extLst xmlns:a="http://schemas.openxmlformats.org/drawingml/2006/main">
+              <a:ext uri="{FF2B5EF4-FFF2-40B4-BE49-F238E27FC236}">
+                <a16:creationId xmlns:a16="http://schemas.microsoft.com/office/drawing/2014/main" id="{D1DE009D-7CD4-4455-9E70-D2542E5B1F20}"/>
+              </a:ext>
+            </a:extLst>
+          </p:cNvPr>
+          <p:cNvSpPr>
+            <a:spLocks xmlns:a="http://schemas.openxmlformats.org/drawingml/2006/main" noGrp="1"/>
+          </p:cNvSpPr>
+          <p:nvPr/>
+        </p:nvSpPr>
+        <p:spPr>
+          <a:xfrm xmlns:a="http://schemas.openxmlformats.org/drawingml/2006/main">
+            <a:off x="6381750" y="5219700"/>
+            <a:ext cx="5238750" cy="457200"/>
           </a:xfrm>
           <a:prstGeom xmlns:a="http://schemas.openxmlformats.org/drawingml/2006/main" prst="rect">
             <a:avLst/>
@@ -6965,163 +7397,51 @@
           <a:lstStyle xmlns:a="http://schemas.openxmlformats.org/drawingml/2006/main"/>
           <a:p xmlns:a="http://schemas.openxmlformats.org/drawingml/2006/main">
             <a:pPr algn="l">
-              <a:defRPr sz="1350" b="0" i="0">
-                <a:solidFill>
-                  <a:srgbClr val="25364A"/>
-                </a:solidFill>
-                <a:latin typeface="Microsoft YaHei"/>
-                <a:ea typeface="Microsoft YaHei"/>
-                <a:cs typeface="Microsoft YaHei"/>
-              </a:defRPr>
-            </a:pPr>
-            <a:r>
-              <a:rPr sz="1350" b="0" i="0">
-                <a:solidFill>
-                  <a:srgbClr val="25364A"/>
-                </a:solidFill>
-                <a:latin typeface="Microsoft YaHei"/>
-                <a:ea typeface="Microsoft YaHei"/>
-                <a:cs typeface="Microsoft YaHei"/>
-              </a:rPr>
-              <a:t>任务适配后的质量分数</a:t>
-            </a:r>
-          </a:p>
-          <a:p xmlns:a="http://schemas.openxmlformats.org/drawingml/2006/main">
-            <a:r>
-              <a:t/>
-            </a:r>
-          </a:p>
-          <a:p xmlns:a="http://schemas.openxmlformats.org/drawingml/2006/main">
-            <a:pPr algn="l">
-              <a:defRPr sz="1350" b="0" i="0">
-                <a:solidFill>
-                  <a:srgbClr val="25364A"/>
-                </a:solidFill>
-                <a:latin typeface="Microsoft YaHei"/>
-                <a:ea typeface="Microsoft YaHei"/>
-                <a:cs typeface="Microsoft YaHei"/>
-              </a:defRPr>
-            </a:pPr>
-            <a:r>
-              <a:rPr sz="1350" b="0" i="0">
-                <a:solidFill>
-                  <a:srgbClr val="25364A"/>
-                </a:solidFill>
-                <a:latin typeface="Microsoft YaHei"/>
-                <a:ea typeface="Microsoft YaHei"/>
-                <a:cs typeface="Microsoft YaHei"/>
-              </a:rPr>
-              <a:t>高／低质量筛选结论</a:t>
-            </a:r>
-          </a:p>
-          <a:p xmlns:a="http://schemas.openxmlformats.org/drawingml/2006/main">
-            <a:r>
-              <a:t/>
-            </a:r>
-          </a:p>
-          <a:p xmlns:a="http://schemas.openxmlformats.org/drawingml/2006/main">
-            <a:pPr algn="l">
-              <a:defRPr sz="1350" b="0" i="0">
-                <a:solidFill>
-                  <a:srgbClr val="25364A"/>
-                </a:solidFill>
-                <a:latin typeface="Microsoft YaHei"/>
-                <a:ea typeface="Microsoft YaHei"/>
-                <a:cs typeface="Microsoft YaHei"/>
-              </a:defRPr>
-            </a:pPr>
-            <a:r>
-              <a:rPr sz="1350" b="0" i="0">
-                <a:solidFill>
-                  <a:srgbClr val="25364A"/>
-                </a:solidFill>
-                <a:latin typeface="Microsoft YaHei"/>
-                <a:ea typeface="Microsoft YaHei"/>
-                <a:cs typeface="Microsoft YaHei"/>
-              </a:rPr>
-              <a:t>问题标签与证据摘要</a:t>
-            </a:r>
-          </a:p>
-          <a:p xmlns:a="http://schemas.openxmlformats.org/drawingml/2006/main">
-            <a:r>
-              <a:t/>
-            </a:r>
-          </a:p>
-          <a:p xmlns:a="http://schemas.openxmlformats.org/drawingml/2006/main">
-            <a:pPr algn="l">
-              <a:defRPr sz="1350" b="0" i="0">
-                <a:solidFill>
-                  <a:srgbClr val="25364A"/>
-                </a:solidFill>
-                <a:latin typeface="Microsoft YaHei"/>
-                <a:ea typeface="Microsoft YaHei"/>
-                <a:cs typeface="Microsoft YaHei"/>
-              </a:defRPr>
-            </a:pPr>
-            <a:r>
-              <a:rPr sz="1350" b="0" i="0">
-                <a:solidFill>
-                  <a:srgbClr val="25364A"/>
-                </a:solidFill>
-                <a:latin typeface="Microsoft YaHei"/>
-                <a:ea typeface="Microsoft YaHei"/>
-                <a:cs typeface="Microsoft YaHei"/>
-              </a:rPr>
-              <a:t>置信度与人工复核建议</a:t>
-            </a:r>
-          </a:p>
-          <a:p xmlns:a="http://schemas.openxmlformats.org/drawingml/2006/main">
-            <a:r>
-              <a:t/>
-            </a:r>
-          </a:p>
-          <a:p xmlns:a="http://schemas.openxmlformats.org/drawingml/2006/main">
-            <a:pPr algn="l">
-              <a:defRPr sz="1350" b="0" i="0">
-                <a:solidFill>
-                  <a:srgbClr val="25364A"/>
-                </a:solidFill>
-                <a:latin typeface="Microsoft YaHei"/>
-                <a:ea typeface="Microsoft YaHei"/>
-                <a:cs typeface="Microsoft YaHei"/>
-              </a:defRPr>
-            </a:pPr>
-            <a:r>
-              <a:rPr sz="1350" b="0" i="0">
-                <a:solidFill>
-                  <a:srgbClr val="25364A"/>
-                </a:solidFill>
-                <a:latin typeface="Microsoft YaHei"/>
-                <a:ea typeface="Microsoft YaHei"/>
-                <a:cs typeface="Microsoft YaHei"/>
-              </a:rPr>
-              <a:t>可复用接口与评测脚本</a:t>
-            </a:r>
-          </a:p>
-        </p:txBody>
-      </p:sp>
-      <p:sp>
-        <p:nvSpPr>
-          <p:cNvPr id="16" name="scenario-band">
-            <a:extLst xmlns:a="http://schemas.openxmlformats.org/drawingml/2006/main">
-              <a:ext uri="{FF2B5EF4-FFF2-40B4-BE49-F238E27FC236}">
-                <a16:creationId xmlns:a16="http://schemas.microsoft.com/office/drawing/2014/main" id="{5DCD92E9-B38D-4209-9EB1-BEECCB1840C2}"/>
-              </a:ext>
-            </a:extLst>
-          </p:cNvPr>
-          <p:cNvSpPr>
-            <a:spLocks xmlns:a="http://schemas.openxmlformats.org/drawingml/2006/main" noGrp="1"/>
-          </p:cNvSpPr>
-          <p:nvPr/>
-        </p:nvSpPr>
-        <p:spPr>
-          <a:xfrm xmlns:a="http://schemas.openxmlformats.org/drawingml/2006/main">
-            <a:off x="514350" y="5429250"/>
-            <a:ext cx="7810500" cy="571500"/>
+              <a:defRPr sz="1275" b="1" i="0">
+                <a:solidFill>
+                  <a:srgbClr val="12263A"/>
+                </a:solidFill>
+                <a:latin typeface="Microsoft YaHei"/>
+                <a:ea typeface="Microsoft YaHei"/>
+                <a:cs typeface="Microsoft YaHei"/>
+              </a:defRPr>
+            </a:pPr>
+            <a:r>
+              <a:rPr sz="1275" b="1" i="0">
+                <a:solidFill>
+                  <a:srgbClr val="12263A"/>
+                </a:solidFill>
+                <a:latin typeface="Microsoft YaHei"/>
+                <a:ea typeface="Microsoft YaHei"/>
+                <a:cs typeface="Microsoft YaHei"/>
+              </a:rPr>
+              <a:t>结论二｜视觉任务需要专门校准；低置信和分歧样本应转入证据核验或人工复核。</a:t>
+            </a:r>
+          </a:p>
+        </p:txBody>
+      </p:sp>
+      <p:sp>
+        <p:nvSpPr>
+          <p:cNvPr id="17" name="gap-conclusion">
+            <a:extLst xmlns:a="http://schemas.openxmlformats.org/drawingml/2006/main">
+              <a:ext uri="{FF2B5EF4-FFF2-40B4-BE49-F238E27FC236}">
+                <a16:creationId xmlns:a16="http://schemas.microsoft.com/office/drawing/2014/main" id="{430D96FD-617E-4ACB-9E42-CACBA4F0A767}"/>
+              </a:ext>
+            </a:extLst>
+          </p:cNvPr>
+          <p:cNvSpPr>
+            <a:spLocks xmlns:a="http://schemas.openxmlformats.org/drawingml/2006/main" noGrp="1"/>
+          </p:cNvSpPr>
+          <p:nvPr/>
+        </p:nvSpPr>
+        <p:spPr>
+          <a:xfrm xmlns:a="http://schemas.openxmlformats.org/drawingml/2006/main">
+            <a:off x="514350" y="5753100"/>
+            <a:ext cx="11163300" cy="381000"/>
           </a:xfrm>
           <a:prstGeom xmlns:a="http://schemas.openxmlformats.org/drawingml/2006/main" prst="roundRect">
             <a:avLst>
-              <a:gd name="adj" fmla="val 13333"/>
+              <a:gd name="adj" fmla="val 20000"/>
             </a:avLst>
           </a:prstGeom>
           <a:solidFill xmlns:a="http://schemas.openxmlformats.org/drawingml/2006/main">
@@ -7137,22 +7457,22 @@
       </p:sp>
       <p:sp>
         <p:nvSpPr>
-          <p:cNvPr id="17" name="auto-text-36">
-            <a:extLst xmlns:a="http://schemas.openxmlformats.org/drawingml/2006/main">
-              <a:ext uri="{FF2B5EF4-FFF2-40B4-BE49-F238E27FC236}">
-                <a16:creationId xmlns:a16="http://schemas.microsoft.com/office/drawing/2014/main" id="{BEC847AD-E80D-43E5-8DD6-7DDCACD41DAC}"/>
-              </a:ext>
-            </a:extLst>
-          </p:cNvPr>
-          <p:cNvSpPr>
-            <a:spLocks xmlns:a="http://schemas.openxmlformats.org/drawingml/2006/main" noGrp="1"/>
-          </p:cNvSpPr>
-          <p:nvPr/>
-        </p:nvSpPr>
-        <p:spPr>
-          <a:xfrm xmlns:a="http://schemas.openxmlformats.org/drawingml/2006/main">
-            <a:off x="723900" y="5591175"/>
-            <a:ext cx="7391400" cy="247650"/>
+          <p:cNvPr id="18" name="auto-text-32">
+            <a:extLst xmlns:a="http://schemas.openxmlformats.org/drawingml/2006/main">
+              <a:ext uri="{FF2B5EF4-FFF2-40B4-BE49-F238E27FC236}">
+                <a16:creationId xmlns:a16="http://schemas.microsoft.com/office/drawing/2014/main" id="{5654669D-99EE-472C-9E2C-184A411F4B4A}"/>
+              </a:ext>
+            </a:extLst>
+          </p:cNvPr>
+          <p:cNvSpPr>
+            <a:spLocks xmlns:a="http://schemas.openxmlformats.org/drawingml/2006/main" noGrp="1"/>
+          </p:cNvSpPr>
+          <p:nvPr/>
+        </p:nvSpPr>
+        <p:spPr>
+          <a:xfrm xmlns:a="http://schemas.openxmlformats.org/drawingml/2006/main">
+            <a:off x="704850" y="5838825"/>
+            <a:ext cx="10782300" cy="228600"/>
           </a:xfrm>
           <a:prstGeom xmlns:a="http://schemas.openxmlformats.org/drawingml/2006/main" prst="rect">
             <a:avLst/>
@@ -7188,122 +7508,29 @@
                 <a:ea typeface="Microsoft YaHei"/>
                 <a:cs typeface="Microsoft YaHei"/>
               </a:rPr>
-              <a:t>首批建议验证：多图编辑＋AIGC图库　｜　后续泛化：盲超分＋颜色标注</a:t>
-            </a:r>
-          </a:p>
-        </p:txBody>
-      </p:sp>
-      <p:sp>
-        <p:nvSpPr>
-          <p:cNvPr id="18" name="current-pipeline-frame">
-            <a:extLst xmlns:a="http://schemas.openxmlformats.org/drawingml/2006/main">
-              <a:ext uri="{FF2B5EF4-FFF2-40B4-BE49-F238E27FC236}">
-                <a16:creationId xmlns:a16="http://schemas.microsoft.com/office/drawing/2014/main" id="{DED6F017-370E-4E5C-91F1-9A631F22E767}"/>
-              </a:ext>
-            </a:extLst>
-          </p:cNvPr>
-          <p:cNvSpPr>
-            <a:spLocks xmlns:a="http://schemas.openxmlformats.org/drawingml/2006/main" noGrp="1"/>
-          </p:cNvSpPr>
-          <p:nvPr/>
-        </p:nvSpPr>
-        <p:spPr>
-          <a:xfrm xmlns:a="http://schemas.openxmlformats.org/drawingml/2006/main">
-            <a:off x="8572500" y="5429250"/>
-            <a:ext cx="3105150" cy="571500"/>
-          </a:xfrm>
-          <a:prstGeom xmlns:a="http://schemas.openxmlformats.org/drawingml/2006/main" prst="roundRect">
-            <a:avLst>
-              <a:gd name="adj" fmla="val 13333"/>
-            </a:avLst>
-          </a:prstGeom>
-          <a:solidFill xmlns:a="http://schemas.openxmlformats.org/drawingml/2006/main">
-            <a:srgbClr val="F0F3F6"/>
-          </a:solidFill>
-          <a:ln xmlns:a="http://schemas.openxmlformats.org/drawingml/2006/main" w="9525">
-            <a:solidFill>
-              <a:srgbClr val="AAB5C0"/>
-            </a:solidFill>
-            <a:prstDash val="solid"/>
-          </a:ln>
-        </p:spPr>
-      </p:sp>
-      <p:sp>
-        <p:nvSpPr>
-          <p:cNvPr id="19" name="current-pipeline-label">
-            <a:extLst xmlns:a="http://schemas.openxmlformats.org/drawingml/2006/main">
-              <a:ext uri="{FF2B5EF4-FFF2-40B4-BE49-F238E27FC236}">
-                <a16:creationId xmlns:a16="http://schemas.microsoft.com/office/drawing/2014/main" id="{EA472EE5-223E-441B-A24C-D8B58BCF0A6C}"/>
-              </a:ext>
-            </a:extLst>
-          </p:cNvPr>
-          <p:cNvSpPr>
-            <a:spLocks xmlns:a="http://schemas.openxmlformats.org/drawingml/2006/main" noGrp="1"/>
-          </p:cNvSpPr>
-          <p:nvPr/>
-        </p:nvSpPr>
-        <p:spPr>
-          <a:xfrm xmlns:a="http://schemas.openxmlformats.org/drawingml/2006/main">
-            <a:off x="8724900" y="5486400"/>
-            <a:ext cx="2800350" cy="266700"/>
-          </a:xfrm>
-          <a:prstGeom xmlns:a="http://schemas.openxmlformats.org/drawingml/2006/main" prst="rect">
-            <a:avLst/>
-          </a:prstGeom>
-          <a:noFill xmlns:a="http://schemas.openxmlformats.org/drawingml/2006/main"/>
-          <a:ln xmlns:a="http://schemas.openxmlformats.org/drawingml/2006/main" w="0">
-            <a:noFill/>
-            <a:prstDash val="solid"/>
-          </a:ln>
-        </p:spPr>
-        <p:txBody>
-          <a:bodyPr xmlns:a="http://schemas.openxmlformats.org/drawingml/2006/main" wrap="square" lIns="0" tIns="0" rIns="0" bIns="0" anchor="ctr">
-            <a:normAutofit fontScale="100000"/>
-          </a:bodyPr>
-          <a:lstStyle xmlns:a="http://schemas.openxmlformats.org/drawingml/2006/main"/>
-          <a:p xmlns:a="http://schemas.openxmlformats.org/drawingml/2006/main">
-            <a:pPr algn="ctr">
-              <a:defRPr sz="1350" b="1" i="0">
-                <a:solidFill>
-                  <a:srgbClr val="5E6C7A"/>
-                </a:solidFill>
-                <a:latin typeface="Microsoft YaHei"/>
-                <a:ea typeface="Microsoft YaHei"/>
-                <a:cs typeface="Microsoft YaHei"/>
-              </a:defRPr>
-            </a:pPr>
-            <a:r>
-              <a:rPr sz="1350" b="1" i="0">
-                <a:solidFill>
-                  <a:srgbClr val="5E6C7A"/>
-                </a:solidFill>
-                <a:latin typeface="Microsoft YaHei"/>
-                <a:ea typeface="Microsoft YaHei"/>
-                <a:cs typeface="Microsoft YaHei"/>
-              </a:rPr>
-              <a:t>可选｜现有质检Pipeline截图</a:t>
-            </a:r>
-          </a:p>
-        </p:txBody>
-      </p:sp>
-      <p:sp>
-        <p:nvSpPr>
-          <p:cNvPr id="20" name="current-pipeline-sub">
-            <a:extLst xmlns:a="http://schemas.openxmlformats.org/drawingml/2006/main">
-              <a:ext uri="{FF2B5EF4-FFF2-40B4-BE49-F238E27FC236}">
-                <a16:creationId xmlns:a16="http://schemas.microsoft.com/office/drawing/2014/main" id="{6E12A758-F1B7-4A4D-B8FA-1F2EF7477F81}"/>
-              </a:ext>
-            </a:extLst>
-          </p:cNvPr>
-          <p:cNvSpPr>
-            <a:spLocks xmlns:a="http://schemas.openxmlformats.org/drawingml/2006/main" noGrp="1"/>
-          </p:cNvSpPr>
-          <p:nvPr/>
-        </p:nvSpPr>
-        <p:spPr>
-          <a:xfrm xmlns:a="http://schemas.openxmlformats.org/drawingml/2006/main">
-            <a:off x="8724900" y="5791200"/>
-            <a:ext cx="2800350" cy="209550"/>
+              <a:t>真正需要建设的不是“能打分的模型”，而是“能根据任务校准、识别分歧并给出证据的评估机制”。</a:t>
+            </a:r>
+          </a:p>
+        </p:txBody>
+      </p:sp>
+      <p:sp>
+        <p:nvSpPr>
+          <p:cNvPr id="19" name="source-650-0.23211381938726783">
+            <a:extLst xmlns:a="http://schemas.openxmlformats.org/drawingml/2006/main">
+              <a:ext uri="{FF2B5EF4-FFF2-40B4-BE49-F238E27FC236}">
+                <a16:creationId xmlns:a16="http://schemas.microsoft.com/office/drawing/2014/main" id="{CB4F7130-3E5F-4F19-A178-AC88BE156CD6}"/>
+              </a:ext>
+            </a:extLst>
+          </p:cNvPr>
+          <p:cNvSpPr>
+            <a:spLocks xmlns:a="http://schemas.openxmlformats.org/drawingml/2006/main" noGrp="1"/>
+          </p:cNvSpPr>
+          <p:nvPr/>
+        </p:nvSpPr>
+        <p:spPr>
+          <a:xfrm xmlns:a="http://schemas.openxmlformats.org/drawingml/2006/main">
+            <a:off x="476250" y="6191250"/>
+            <a:ext cx="10763250" cy="209550"/>
           </a:xfrm>
           <a:prstGeom xmlns:a="http://schemas.openxmlformats.org/drawingml/2006/main" prst="rect">
             <a:avLst/>
@@ -7320,84 +7547,26 @@
           </a:bodyPr>
           <a:lstStyle xmlns:a="http://schemas.openxmlformats.org/drawingml/2006/main"/>
           <a:p xmlns:a="http://schemas.openxmlformats.org/drawingml/2006/main">
-            <a:pPr algn="ctr">
-              <a:defRPr sz="975" b="0" i="0">
-                <a:solidFill>
-                  <a:srgbClr val="8A98A8"/>
-                </a:solidFill>
-                <a:latin typeface="Microsoft YaHei"/>
-                <a:ea typeface="Microsoft YaHei"/>
-                <a:cs typeface="Microsoft YaHei"/>
-              </a:defRPr>
-            </a:pPr>
-            <a:r>
-              <a:rPr sz="975" b="0" i="0">
-                <a:solidFill>
-                  <a:srgbClr val="8A98A8"/>
-                </a:solidFill>
-                <a:latin typeface="Microsoft YaHei"/>
-                <a:ea typeface="Microsoft YaHei"/>
-                <a:cs typeface="Microsoft YaHei"/>
-              </a:rPr>
-              <a:t>如无材料可删除此框</a:t>
-            </a:r>
-          </a:p>
-        </p:txBody>
-      </p:sp>
-      <p:sp>
-        <p:nvSpPr>
-          <p:cNvPr id="21" name="auto-text-37">
-            <a:extLst xmlns:a="http://schemas.openxmlformats.org/drawingml/2006/main">
-              <a:ext uri="{FF2B5EF4-FFF2-40B4-BE49-F238E27FC236}">
-                <a16:creationId xmlns:a16="http://schemas.microsoft.com/office/drawing/2014/main" id="{C394B729-3901-4C51-9477-C5E0BFD892A3}"/>
-              </a:ext>
-            </a:extLst>
-          </p:cNvPr>
-          <p:cNvSpPr>
-            <a:spLocks xmlns:a="http://schemas.openxmlformats.org/drawingml/2006/main" noGrp="1"/>
-          </p:cNvSpPr>
-          <p:nvPr/>
-        </p:nvSpPr>
-        <p:spPr>
-          <a:xfrm xmlns:a="http://schemas.openxmlformats.org/drawingml/2006/main">
-            <a:off x="628650" y="6191250"/>
-            <a:ext cx="10668000" cy="247650"/>
-          </a:xfrm>
-          <a:prstGeom xmlns:a="http://schemas.openxmlformats.org/drawingml/2006/main" prst="rect">
-            <a:avLst/>
-          </a:prstGeom>
-          <a:noFill xmlns:a="http://schemas.openxmlformats.org/drawingml/2006/main"/>
-          <a:ln xmlns:a="http://schemas.openxmlformats.org/drawingml/2006/main" w="0">
-            <a:noFill/>
-            <a:prstDash val="solid"/>
-          </a:ln>
-        </p:spPr>
-        <p:txBody>
-          <a:bodyPr xmlns:a="http://schemas.openxmlformats.org/drawingml/2006/main" wrap="square" lIns="0" tIns="0" rIns="0" bIns="0" anchor="t">
-            <a:normAutofit fontScale="100000"/>
-          </a:bodyPr>
-          <a:lstStyle xmlns:a="http://schemas.openxmlformats.org/drawingml/2006/main"/>
-          <a:p xmlns:a="http://schemas.openxmlformats.org/drawingml/2006/main">
-            <a:pPr algn="ctr">
-              <a:defRPr sz="975" b="0" i="0">
-                <a:solidFill>
-                  <a:srgbClr val="66778A"/>
-                </a:solidFill>
-                <a:latin typeface="Microsoft YaHei"/>
-                <a:ea typeface="Microsoft YaHei"/>
-                <a:cs typeface="Microsoft YaHei"/>
-              </a:defRPr>
-            </a:pPr>
-            <a:r>
-              <a:rPr sz="975" b="0" i="0">
-                <a:solidFill>
-                  <a:srgbClr val="66778A"/>
-                </a:solidFill>
-                <a:latin typeface="Microsoft YaHei"/>
-                <a:ea typeface="Microsoft YaHei"/>
-                <a:cs typeface="Microsoft YaHei"/>
-              </a:rPr>
-              <a:t>合作边界：高校交付核心算法原型与评测方法；公司提供业务数据、专家反馈，并负责后续平台集成。</a:t>
+            <a:pPr algn="l">
+              <a:defRPr sz="825" b="0" i="1">
+                <a:solidFill>
+                  <a:srgbClr val="7B8794"/>
+                </a:solidFill>
+                <a:latin typeface="Cambria"/>
+                <a:ea typeface="Cambria"/>
+                <a:cs typeface="Cambria"/>
+              </a:defRPr>
+            </a:pPr>
+            <a:r>
+              <a:rPr sz="825" b="0" i="1">
+                <a:solidFill>
+                  <a:srgbClr val="7B8794"/>
+                </a:solidFill>
+                <a:latin typeface="Cambria"/>
+                <a:ea typeface="Cambria"/>
+                <a:cs typeface="Cambria"/>
+              </a:rPr>
+              <a:t>数据与图源：Multimodal RewardBench 2（CVPR 2026）；Calibrating MLLM-as-a-Judge（ICCV 2025）</a:t>
             </a:r>
           </a:p>
         </p:txBody>
@@ -7405,7 +7574,7 @@
     </p:spTree>
     <p:extLst>
       <p:ext uri="{BB962C8B-B14F-4D97-AF65-F5344CB8AC3E}">
-        <p14:creationId xmlns:p14="http://schemas.microsoft.com/office/powerpoint/2010/main" val="983200915"/>
+        <p14:creationId xmlns:p14="http://schemas.microsoft.com/office/powerpoint/2010/main" val="1394194579"/>
       </p:ext>
     </p:extLst>
   </p:cSld>
@@ -7433,10 +7602,10 @@
       </p:grpSpPr>
       <p:sp>
         <p:nvSpPr>
-          <p:cNvPr id="33" name="accent-6">
-            <a:extLst xmlns:a="http://schemas.openxmlformats.org/drawingml/2006/main">
-              <a:ext uri="{FF2B5EF4-FFF2-40B4-BE49-F238E27FC236}">
-                <a16:creationId xmlns:a16="http://schemas.microsoft.com/office/drawing/2014/main" id="{1D461570-AD37-4CD8-B214-0E60982A6610}"/>
+          <p:cNvPr id="22" name="accent-6">
+            <a:extLst xmlns:a="http://schemas.openxmlformats.org/drawingml/2006/main">
+              <a:ext uri="{FF2B5EF4-FFF2-40B4-BE49-F238E27FC236}">
+                <a16:creationId xmlns:a16="http://schemas.microsoft.com/office/drawing/2014/main" id="{909E4D01-ABD9-4B04-8397-EC7C09FEEF5C}"/>
               </a:ext>
             </a:extLst>
           </p:cNvPr>
@@ -7471,7 +7640,7 @@
           <p:cNvPr id="2" name="title-6">
             <a:extLst xmlns:a="http://schemas.openxmlformats.org/drawingml/2006/main">
               <a:ext uri="{FF2B5EF4-FFF2-40B4-BE49-F238E27FC236}">
-                <a16:creationId xmlns:a16="http://schemas.microsoft.com/office/drawing/2014/main" id="{E07F5357-AAE8-445D-BF21-82163822EACB}"/>
+                <a16:creationId xmlns:a16="http://schemas.microsoft.com/office/drawing/2014/main" id="{D6749101-A04D-4CC3-84F9-7BFF4CE7D370}"/>
               </a:ext>
             </a:extLst>
           </p:cNvPr>
@@ -7519,7 +7688,7 @@
                 <a:ea typeface="Microsoft YaHei"/>
                 <a:cs typeface="Microsoft YaHei"/>
               </a:rPr>
-              <a:t>合作项目将把临时质检方案沉淀为可复用、可验证的质量能力</a:t>
+              <a:t>项目将在现有质检能力之上增加可复用的任务自适应评估层</a:t>
             </a:r>
           </a:p>
         </p:txBody>
@@ -7529,7 +7698,7 @@
           <p:cNvPr id="3" name="page-6">
             <a:extLst xmlns:a="http://schemas.openxmlformats.org/drawingml/2006/main">
               <a:ext uri="{FF2B5EF4-FFF2-40B4-BE49-F238E27FC236}">
-                <a16:creationId xmlns:a16="http://schemas.microsoft.com/office/drawing/2014/main" id="{4202B87A-ABA6-4545-BF4B-37C8FC50BE35}"/>
+                <a16:creationId xmlns:a16="http://schemas.microsoft.com/office/drawing/2014/main" id="{35778D7C-9000-4F51-A824-B7440AF3DEE9}"/>
               </a:ext>
             </a:extLst>
           </p:cNvPr>
@@ -7584,10 +7753,10 @@
       </p:sp>
       <p:sp>
         <p:nvSpPr>
-          <p:cNvPr id="4" name="auto-text-38">
-            <a:extLst xmlns:a="http://schemas.openxmlformats.org/drawingml/2006/main">
-              <a:ext uri="{FF2B5EF4-FFF2-40B4-BE49-F238E27FC236}">
-                <a16:creationId xmlns:a16="http://schemas.microsoft.com/office/drawing/2014/main" id="{A07EF51A-9EA9-4C92-ADB3-E39FE2FE6A6C}"/>
+          <p:cNvPr id="4" name="auto-text-33">
+            <a:extLst xmlns:a="http://schemas.openxmlformats.org/drawingml/2006/main">
+              <a:ext uri="{FF2B5EF4-FFF2-40B4-BE49-F238E27FC236}">
+                <a16:creationId xmlns:a16="http://schemas.microsoft.com/office/drawing/2014/main" id="{A4AE0745-C467-4D02-9FA2-8532AF9FF95B}"/>
               </a:ext>
             </a:extLst>
           </p:cNvPr>
@@ -7635,6 +7804,1395 @@
                 <a:ea typeface="Microsoft YaHei"/>
                 <a:cs typeface="Microsoft YaHei"/>
               </a:rPr>
+              <a:t>不重建生产平台，而是利用少量专家样本，对已有规则、Prompt和VLM Judge进行后验校准。</a:t>
+            </a:r>
+          </a:p>
+        </p:txBody>
+      </p:sp>
+      <p:sp>
+        <p:nvSpPr>
+          <p:cNvPr id="5" name="input-node">
+            <a:extLst xmlns:a="http://schemas.openxmlformats.org/drawingml/2006/main">
+              <a:ext uri="{FF2B5EF4-FFF2-40B4-BE49-F238E27FC236}">
+                <a16:creationId xmlns:a16="http://schemas.microsoft.com/office/drawing/2014/main" id="{26864CB3-0A83-47C6-A691-4CC796607F86}"/>
+              </a:ext>
+            </a:extLst>
+          </p:cNvPr>
+          <p:cNvSpPr>
+            <a:spLocks xmlns:a="http://schemas.openxmlformats.org/drawingml/2006/main" noGrp="1"/>
+          </p:cNvSpPr>
+          <p:nvPr/>
+        </p:nvSpPr>
+        <p:spPr>
+          <a:xfrm xmlns:a="http://schemas.openxmlformats.org/drawingml/2006/main">
+            <a:off x="514350" y="1695450"/>
+            <a:ext cx="2952750" cy="3276600"/>
+          </a:xfrm>
+          <a:prstGeom xmlns:a="http://schemas.openxmlformats.org/drawingml/2006/main" prst="roundRect">
+            <a:avLst>
+              <a:gd name="adj" fmla="val 3871"/>
+            </a:avLst>
+          </a:prstGeom>
+          <a:solidFill xmlns:a="http://schemas.openxmlformats.org/drawingml/2006/main">
+            <a:srgbClr val="F4F7FA"/>
+          </a:solidFill>
+          <a:ln xmlns:a="http://schemas.openxmlformats.org/drawingml/2006/main" w="9525">
+            <a:solidFill>
+              <a:srgbClr val="D8E0E8"/>
+            </a:solidFill>
+            <a:prstDash val="solid"/>
+          </a:ln>
+        </p:spPr>
+      </p:sp>
+      <p:sp>
+        <p:nvSpPr>
+          <p:cNvPr id="6" name="auto-text-34">
+            <a:extLst xmlns:a="http://schemas.openxmlformats.org/drawingml/2006/main">
+              <a:ext uri="{FF2B5EF4-FFF2-40B4-BE49-F238E27FC236}">
+                <a16:creationId xmlns:a16="http://schemas.microsoft.com/office/drawing/2014/main" id="{6959B036-10B9-4D36-B8C5-8AAB97E1ECEE}"/>
+              </a:ext>
+            </a:extLst>
+          </p:cNvPr>
+          <p:cNvSpPr>
+            <a:spLocks xmlns:a="http://schemas.openxmlformats.org/drawingml/2006/main" noGrp="1"/>
+          </p:cNvSpPr>
+          <p:nvPr/>
+        </p:nvSpPr>
+        <p:spPr>
+          <a:xfrm xmlns:a="http://schemas.openxmlformats.org/drawingml/2006/main">
+            <a:off x="762000" y="1924050"/>
+            <a:ext cx="1143000" cy="323850"/>
+          </a:xfrm>
+          <a:prstGeom xmlns:a="http://schemas.openxmlformats.org/drawingml/2006/main" prst="rect">
+            <a:avLst/>
+          </a:prstGeom>
+          <a:noFill xmlns:a="http://schemas.openxmlformats.org/drawingml/2006/main"/>
+          <a:ln xmlns:a="http://schemas.openxmlformats.org/drawingml/2006/main" w="0">
+            <a:noFill/>
+            <a:prstDash val="solid"/>
+          </a:ln>
+        </p:spPr>
+        <p:txBody>
+          <a:bodyPr xmlns:a="http://schemas.openxmlformats.org/drawingml/2006/main" wrap="square" lIns="0" tIns="0" rIns="0" bIns="0" anchor="t">
+            <a:normAutofit fontScale="100000"/>
+          </a:bodyPr>
+          <a:lstStyle xmlns:a="http://schemas.openxmlformats.org/drawingml/2006/main"/>
+          <a:p xmlns:a="http://schemas.openxmlformats.org/drawingml/2006/main">
+            <a:pPr algn="l">
+              <a:defRPr sz="1875" b="1" i="0">
+                <a:solidFill>
+                  <a:srgbClr val="2F6BFF"/>
+                </a:solidFill>
+                <a:latin typeface="Microsoft YaHei"/>
+                <a:ea typeface="Microsoft YaHei"/>
+                <a:cs typeface="Microsoft YaHei"/>
+              </a:defRPr>
+            </a:pPr>
+            <a:r>
+              <a:rPr sz="1875" b="1" i="0">
+                <a:solidFill>
+                  <a:srgbClr val="2F6BFF"/>
+                </a:solidFill>
+                <a:latin typeface="Microsoft YaHei"/>
+                <a:ea typeface="Microsoft YaHei"/>
+                <a:cs typeface="Microsoft YaHei"/>
+              </a:rPr>
+              <a:t>输入</a:t>
+            </a:r>
+          </a:p>
+        </p:txBody>
+      </p:sp>
+      <p:sp>
+        <p:nvSpPr>
+          <p:cNvPr id="7" name="auto-text-35">
+            <a:extLst xmlns:a="http://schemas.openxmlformats.org/drawingml/2006/main">
+              <a:ext uri="{FF2B5EF4-FFF2-40B4-BE49-F238E27FC236}">
+                <a16:creationId xmlns:a16="http://schemas.microsoft.com/office/drawing/2014/main" id="{1C041F79-C70F-433F-BC8F-D3AA709C1916}"/>
+              </a:ext>
+            </a:extLst>
+          </p:cNvPr>
+          <p:cNvSpPr>
+            <a:spLocks xmlns:a="http://schemas.openxmlformats.org/drawingml/2006/main" noGrp="1"/>
+          </p:cNvSpPr>
+          <p:nvPr/>
+        </p:nvSpPr>
+        <p:spPr>
+          <a:xfrm xmlns:a="http://schemas.openxmlformats.org/drawingml/2006/main">
+            <a:off x="762000" y="2419350"/>
+            <a:ext cx="2381250" cy="2095500"/>
+          </a:xfrm>
+          <a:prstGeom xmlns:a="http://schemas.openxmlformats.org/drawingml/2006/main" prst="rect">
+            <a:avLst/>
+          </a:prstGeom>
+          <a:noFill xmlns:a="http://schemas.openxmlformats.org/drawingml/2006/main"/>
+          <a:ln xmlns:a="http://schemas.openxmlformats.org/drawingml/2006/main" w="0">
+            <a:noFill/>
+            <a:prstDash val="solid"/>
+          </a:ln>
+        </p:spPr>
+        <p:txBody>
+          <a:bodyPr xmlns:a="http://schemas.openxmlformats.org/drawingml/2006/main" wrap="square" lIns="0" tIns="0" rIns="0" bIns="0" anchor="t">
+            <a:normAutofit fontScale="100000"/>
+          </a:bodyPr>
+          <a:lstStyle xmlns:a="http://schemas.openxmlformats.org/drawingml/2006/main"/>
+          <a:p xmlns:a="http://schemas.openxmlformats.org/drawingml/2006/main">
+            <a:pPr algn="l">
+              <a:defRPr sz="1350" b="0" i="0">
+                <a:solidFill>
+                  <a:srgbClr val="25364A"/>
+                </a:solidFill>
+                <a:latin typeface="Microsoft YaHei"/>
+                <a:ea typeface="Microsoft YaHei"/>
+                <a:cs typeface="Microsoft YaHei"/>
+              </a:defRPr>
+            </a:pPr>
+            <a:r>
+              <a:rPr sz="1350" b="0" i="0">
+                <a:solidFill>
+                  <a:srgbClr val="25364A"/>
+                </a:solidFill>
+                <a:latin typeface="Microsoft YaHei"/>
+                <a:ea typeface="Microsoft YaHei"/>
+                <a:cs typeface="Microsoft YaHei"/>
+              </a:rPr>
+              <a:t>任务描述</a:t>
+            </a:r>
+          </a:p>
+          <a:p xmlns:a="http://schemas.openxmlformats.org/drawingml/2006/main">
+            <a:r>
+              <a:t/>
+            </a:r>
+          </a:p>
+          <a:p xmlns:a="http://schemas.openxmlformats.org/drawingml/2006/main">
+            <a:pPr algn="l">
+              <a:defRPr sz="1350" b="0" i="0">
+                <a:solidFill>
+                  <a:srgbClr val="25364A"/>
+                </a:solidFill>
+                <a:latin typeface="Microsoft YaHei"/>
+                <a:ea typeface="Microsoft YaHei"/>
+                <a:cs typeface="Microsoft YaHei"/>
+              </a:defRPr>
+            </a:pPr>
+            <a:r>
+              <a:rPr sz="1350" b="0" i="0">
+                <a:solidFill>
+                  <a:srgbClr val="25364A"/>
+                </a:solidFill>
+                <a:latin typeface="Microsoft YaHei"/>
+                <a:ea typeface="Microsoft YaHei"/>
+                <a:cs typeface="Microsoft YaHei"/>
+              </a:rPr>
+              <a:t>少量人工标注／专家偏好</a:t>
+            </a:r>
+          </a:p>
+          <a:p xmlns:a="http://schemas.openxmlformats.org/drawingml/2006/main">
+            <a:r>
+              <a:t/>
+            </a:r>
+          </a:p>
+          <a:p xmlns:a="http://schemas.openxmlformats.org/drawingml/2006/main">
+            <a:pPr algn="l">
+              <a:defRPr sz="1350" b="0" i="0">
+                <a:solidFill>
+                  <a:srgbClr val="25364A"/>
+                </a:solidFill>
+                <a:latin typeface="Microsoft YaHei"/>
+                <a:ea typeface="Microsoft YaHei"/>
+                <a:cs typeface="Microsoft YaHei"/>
+              </a:defRPr>
+            </a:pPr>
+            <a:r>
+              <a:rPr sz="1350" b="0" i="0">
+                <a:solidFill>
+                  <a:srgbClr val="25364A"/>
+                </a:solidFill>
+                <a:latin typeface="Microsoft YaHei"/>
+                <a:ea typeface="Microsoft YaHei"/>
+                <a:cs typeface="Microsoft YaHei"/>
+              </a:rPr>
+              <a:t>已有规则、Prompt和评估器输出</a:t>
+            </a:r>
+          </a:p>
+          <a:p xmlns:a="http://schemas.openxmlformats.org/drawingml/2006/main">
+            <a:r>
+              <a:t/>
+            </a:r>
+          </a:p>
+          <a:p xmlns:a="http://schemas.openxmlformats.org/drawingml/2006/main">
+            <a:pPr algn="l">
+              <a:defRPr sz="1350" b="0" i="0">
+                <a:solidFill>
+                  <a:srgbClr val="25364A"/>
+                </a:solidFill>
+                <a:latin typeface="Microsoft YaHei"/>
+                <a:ea typeface="Microsoft YaHei"/>
+                <a:cs typeface="Microsoft YaHei"/>
+              </a:defRPr>
+            </a:pPr>
+            <a:r>
+              <a:rPr sz="1350" b="0" i="0">
+                <a:solidFill>
+                  <a:srgbClr val="25364A"/>
+                </a:solidFill>
+                <a:latin typeface="Microsoft YaHei"/>
+                <a:ea typeface="Microsoft YaHei"/>
+                <a:cs typeface="Microsoft YaHei"/>
+              </a:rPr>
+              <a:t>业务关注的质量维度</a:t>
+            </a:r>
+          </a:p>
+        </p:txBody>
+      </p:sp>
+      <p:sp>
+        <p:nvSpPr>
+          <p:cNvPr id="8" name="auto-text-36">
+            <a:extLst xmlns:a="http://schemas.openxmlformats.org/drawingml/2006/main">
+              <a:ext uri="{FF2B5EF4-FFF2-40B4-BE49-F238E27FC236}">
+                <a16:creationId xmlns:a16="http://schemas.microsoft.com/office/drawing/2014/main" id="{029DFD7F-9525-4E2B-9D90-C99CB4E9A676}"/>
+              </a:ext>
+            </a:extLst>
+          </p:cNvPr>
+          <p:cNvSpPr>
+            <a:spLocks xmlns:a="http://schemas.openxmlformats.org/drawingml/2006/main" noGrp="1"/>
+          </p:cNvSpPr>
+          <p:nvPr/>
+        </p:nvSpPr>
+        <p:spPr>
+          <a:xfrm xmlns:a="http://schemas.openxmlformats.org/drawingml/2006/main">
+            <a:off x="3562350" y="2971800"/>
+            <a:ext cx="685800" cy="685800"/>
+          </a:xfrm>
+          <a:prstGeom xmlns:a="http://schemas.openxmlformats.org/drawingml/2006/main" prst="rect">
+            <a:avLst/>
+          </a:prstGeom>
+          <a:noFill xmlns:a="http://schemas.openxmlformats.org/drawingml/2006/main"/>
+          <a:ln xmlns:a="http://schemas.openxmlformats.org/drawingml/2006/main" w="0">
+            <a:noFill/>
+            <a:prstDash val="solid"/>
+          </a:ln>
+        </p:spPr>
+        <p:txBody>
+          <a:bodyPr xmlns:a="http://schemas.openxmlformats.org/drawingml/2006/main" wrap="square" lIns="0" tIns="0" rIns="0" bIns="0" anchor="t">
+            <a:normAutofit fontScale="100000"/>
+          </a:bodyPr>
+          <a:lstStyle xmlns:a="http://schemas.openxmlformats.org/drawingml/2006/main"/>
+          <a:p xmlns:a="http://schemas.openxmlformats.org/drawingml/2006/main">
+            <a:pPr algn="ctr">
+              <a:defRPr sz="3900" b="1" i="0">
+                <a:solidFill>
+                  <a:srgbClr val="9BB3E9"/>
+                </a:solidFill>
+                <a:latin typeface="Microsoft YaHei"/>
+                <a:ea typeface="Microsoft YaHei"/>
+                <a:cs typeface="Microsoft YaHei"/>
+              </a:defRPr>
+            </a:pPr>
+            <a:r>
+              <a:rPr sz="3900" b="1" i="0">
+                <a:solidFill>
+                  <a:srgbClr val="9BB3E9"/>
+                </a:solidFill>
+                <a:latin typeface="Microsoft YaHei"/>
+                <a:ea typeface="Microsoft YaHei"/>
+                <a:cs typeface="Microsoft YaHei"/>
+              </a:rPr>
+              <a:t>→</a:t>
+            </a:r>
+          </a:p>
+        </p:txBody>
+      </p:sp>
+      <p:sp>
+        <p:nvSpPr>
+          <p:cNvPr id="9" name="calibration-node">
+            <a:extLst xmlns:a="http://schemas.openxmlformats.org/drawingml/2006/main">
+              <a:ext uri="{FF2B5EF4-FFF2-40B4-BE49-F238E27FC236}">
+                <a16:creationId xmlns:a16="http://schemas.microsoft.com/office/drawing/2014/main" id="{701F1F2D-B42E-4DD3-904E-DD7BDFF5D50C}"/>
+              </a:ext>
+            </a:extLst>
+          </p:cNvPr>
+          <p:cNvSpPr>
+            <a:spLocks xmlns:a="http://schemas.openxmlformats.org/drawingml/2006/main" noGrp="1"/>
+          </p:cNvSpPr>
+          <p:nvPr/>
+        </p:nvSpPr>
+        <p:spPr>
+          <a:xfrm xmlns:a="http://schemas.openxmlformats.org/drawingml/2006/main">
+            <a:off x="4191000" y="1504950"/>
+            <a:ext cx="3810000" cy="3657600"/>
+          </a:xfrm>
+          <a:prstGeom xmlns:a="http://schemas.openxmlformats.org/drawingml/2006/main" prst="roundRect">
+            <a:avLst>
+              <a:gd name="adj" fmla="val 3125"/>
+            </a:avLst>
+          </a:prstGeom>
+          <a:solidFill xmlns:a="http://schemas.openxmlformats.org/drawingml/2006/main">
+            <a:srgbClr val="EAF0FF"/>
+          </a:solidFill>
+          <a:ln xmlns:a="http://schemas.openxmlformats.org/drawingml/2006/main" w="9525">
+            <a:solidFill>
+              <a:srgbClr val="B7C8F5"/>
+            </a:solidFill>
+            <a:prstDash val="solid"/>
+          </a:ln>
+        </p:spPr>
+      </p:sp>
+      <p:sp>
+        <p:nvSpPr>
+          <p:cNvPr id="10" name="auto-text-37">
+            <a:extLst xmlns:a="http://schemas.openxmlformats.org/drawingml/2006/main">
+              <a:ext uri="{FF2B5EF4-FFF2-40B4-BE49-F238E27FC236}">
+                <a16:creationId xmlns:a16="http://schemas.microsoft.com/office/drawing/2014/main" id="{412BD883-FFFE-4B5A-B79F-A2303E6C3A89}"/>
+              </a:ext>
+            </a:extLst>
+          </p:cNvPr>
+          <p:cNvSpPr>
+            <a:spLocks xmlns:a="http://schemas.openxmlformats.org/drawingml/2006/main" noGrp="1"/>
+          </p:cNvSpPr>
+          <p:nvPr/>
+        </p:nvSpPr>
+        <p:spPr>
+          <a:xfrm xmlns:a="http://schemas.openxmlformats.org/drawingml/2006/main">
+            <a:off x="4495800" y="1809750"/>
+            <a:ext cx="3219450" cy="381000"/>
+          </a:xfrm>
+          <a:prstGeom xmlns:a="http://schemas.openxmlformats.org/drawingml/2006/main" prst="rect">
+            <a:avLst/>
+          </a:prstGeom>
+          <a:noFill xmlns:a="http://schemas.openxmlformats.org/drawingml/2006/main"/>
+          <a:ln xmlns:a="http://schemas.openxmlformats.org/drawingml/2006/main" w="0">
+            <a:noFill/>
+            <a:prstDash val="solid"/>
+          </a:ln>
+        </p:spPr>
+        <p:txBody>
+          <a:bodyPr xmlns:a="http://schemas.openxmlformats.org/drawingml/2006/main" wrap="square" lIns="0" tIns="0" rIns="0" bIns="0" anchor="t">
+            <a:normAutofit fontScale="100000"/>
+          </a:bodyPr>
+          <a:lstStyle xmlns:a="http://schemas.openxmlformats.org/drawingml/2006/main"/>
+          <a:p xmlns:a="http://schemas.openxmlformats.org/drawingml/2006/main">
+            <a:pPr algn="ctr">
+              <a:defRPr sz="2025" b="1" i="0">
+                <a:solidFill>
+                  <a:srgbClr val="2F6BFF"/>
+                </a:solidFill>
+                <a:latin typeface="Microsoft YaHei"/>
+                <a:ea typeface="Microsoft YaHei"/>
+                <a:cs typeface="Microsoft YaHei"/>
+              </a:defRPr>
+            </a:pPr>
+            <a:r>
+              <a:rPr sz="2025" b="1" i="0">
+                <a:solidFill>
+                  <a:srgbClr val="2F6BFF"/>
+                </a:solidFill>
+                <a:latin typeface="Microsoft YaHei"/>
+                <a:ea typeface="Microsoft YaHei"/>
+                <a:cs typeface="Microsoft YaHei"/>
+              </a:rPr>
+              <a:t>任务自适应质量评估层</a:t>
+            </a:r>
+          </a:p>
+        </p:txBody>
+      </p:sp>
+      <p:sp>
+        <p:nvSpPr>
+          <p:cNvPr id="11" name="auto-text-38">
+            <a:extLst xmlns:a="http://schemas.openxmlformats.org/drawingml/2006/main">
+              <a:ext uri="{FF2B5EF4-FFF2-40B4-BE49-F238E27FC236}">
+                <a16:creationId xmlns:a16="http://schemas.microsoft.com/office/drawing/2014/main" id="{44C239D0-9632-4718-A982-36FDD7521F67}"/>
+              </a:ext>
+            </a:extLst>
+          </p:cNvPr>
+          <p:cNvSpPr>
+            <a:spLocks xmlns:a="http://schemas.openxmlformats.org/drawingml/2006/main" noGrp="1"/>
+          </p:cNvSpPr>
+          <p:nvPr/>
+        </p:nvSpPr>
+        <p:spPr>
+          <a:xfrm xmlns:a="http://schemas.openxmlformats.org/drawingml/2006/main">
+            <a:off x="4552950" y="2438400"/>
+            <a:ext cx="3143250" cy="2152650"/>
+          </a:xfrm>
+          <a:prstGeom xmlns:a="http://schemas.openxmlformats.org/drawingml/2006/main" prst="rect">
+            <a:avLst/>
+          </a:prstGeom>
+          <a:noFill xmlns:a="http://schemas.openxmlformats.org/drawingml/2006/main"/>
+          <a:ln xmlns:a="http://schemas.openxmlformats.org/drawingml/2006/main" w="0">
+            <a:noFill/>
+            <a:prstDash val="solid"/>
+          </a:ln>
+        </p:spPr>
+        <p:txBody>
+          <a:bodyPr xmlns:a="http://schemas.openxmlformats.org/drawingml/2006/main" wrap="square" lIns="0" tIns="0" rIns="0" bIns="0" anchor="t">
+            <a:normAutofit fontScale="100000"/>
+          </a:bodyPr>
+          <a:lstStyle xmlns:a="http://schemas.openxmlformats.org/drawingml/2006/main"/>
+          <a:p xmlns:a="http://schemas.openxmlformats.org/drawingml/2006/main">
+            <a:pPr algn="l">
+              <a:defRPr sz="1350" b="0" i="0">
+                <a:solidFill>
+                  <a:srgbClr val="12263A"/>
+                </a:solidFill>
+                <a:latin typeface="Microsoft YaHei"/>
+                <a:ea typeface="Microsoft YaHei"/>
+                <a:cs typeface="Microsoft YaHei"/>
+              </a:defRPr>
+            </a:pPr>
+            <a:r>
+              <a:rPr sz="1350" b="0" i="0">
+                <a:solidFill>
+                  <a:srgbClr val="12263A"/>
+                </a:solidFill>
+                <a:latin typeface="Microsoft YaHei"/>
+                <a:ea typeface="Microsoft YaHei"/>
+                <a:cs typeface="Microsoft YaHei"/>
+              </a:rPr>
+              <a:t>01  任务偏好与质量维度建模</a:t>
+            </a:r>
+          </a:p>
+          <a:p xmlns:a="http://schemas.openxmlformats.org/drawingml/2006/main">
+            <a:r>
+              <a:t/>
+            </a:r>
+          </a:p>
+          <a:p xmlns:a="http://schemas.openxmlformats.org/drawingml/2006/main">
+            <a:pPr algn="l">
+              <a:defRPr sz="1350" b="0" i="0">
+                <a:solidFill>
+                  <a:srgbClr val="12263A"/>
+                </a:solidFill>
+                <a:latin typeface="Microsoft YaHei"/>
+                <a:ea typeface="Microsoft YaHei"/>
+                <a:cs typeface="Microsoft YaHei"/>
+              </a:defRPr>
+            </a:pPr>
+            <a:r>
+              <a:rPr sz="1350" b="0" i="0">
+                <a:solidFill>
+                  <a:srgbClr val="12263A"/>
+                </a:solidFill>
+                <a:latin typeface="Microsoft YaHei"/>
+                <a:ea typeface="Microsoft YaHei"/>
+                <a:cs typeface="Microsoft YaHei"/>
+              </a:rPr>
+              <a:t>02  分数／权重／阈值与置信度校准</a:t>
+            </a:r>
+          </a:p>
+          <a:p xmlns:a="http://schemas.openxmlformats.org/drawingml/2006/main">
+            <a:r>
+              <a:t/>
+            </a:r>
+          </a:p>
+          <a:p xmlns:a="http://schemas.openxmlformats.org/drawingml/2006/main">
+            <a:pPr algn="l">
+              <a:defRPr sz="1350" b="0" i="0">
+                <a:solidFill>
+                  <a:srgbClr val="12263A"/>
+                </a:solidFill>
+                <a:latin typeface="Microsoft YaHei"/>
+                <a:ea typeface="Microsoft YaHei"/>
+                <a:cs typeface="Microsoft YaHei"/>
+              </a:defRPr>
+            </a:pPr>
+            <a:r>
+              <a:rPr sz="1350" b="0" i="0">
+                <a:solidFill>
+                  <a:srgbClr val="12263A"/>
+                </a:solidFill>
+                <a:latin typeface="Microsoft YaHei"/>
+                <a:ea typeface="Microsoft YaHei"/>
+                <a:cs typeface="Microsoft YaHei"/>
+              </a:rPr>
+              <a:t>03  多视角邻域共识与分歧检测</a:t>
+            </a:r>
+          </a:p>
+          <a:p xmlns:a="http://schemas.openxmlformats.org/drawingml/2006/main">
+            <a:r>
+              <a:t/>
+            </a:r>
+          </a:p>
+          <a:p xmlns:a="http://schemas.openxmlformats.org/drawingml/2006/main">
+            <a:pPr algn="l">
+              <a:defRPr sz="1350" b="0" i="0">
+                <a:solidFill>
+                  <a:srgbClr val="12263A"/>
+                </a:solidFill>
+                <a:latin typeface="Microsoft YaHei"/>
+                <a:ea typeface="Microsoft YaHei"/>
+                <a:cs typeface="Microsoft YaHei"/>
+              </a:defRPr>
+            </a:pPr>
+            <a:r>
+              <a:rPr sz="1350" b="0" i="0">
+                <a:solidFill>
+                  <a:srgbClr val="12263A"/>
+                </a:solidFill>
+                <a:latin typeface="Microsoft YaHei"/>
+                <a:ea typeface="Microsoft YaHei"/>
+                <a:cs typeface="Microsoft YaHei"/>
+              </a:rPr>
+              <a:t>04  对象、属性、数量、空间关系等证据核验</a:t>
+            </a:r>
+          </a:p>
+        </p:txBody>
+      </p:sp>
+      <p:sp>
+        <p:nvSpPr>
+          <p:cNvPr id="12" name="auto-text-39">
+            <a:extLst xmlns:a="http://schemas.openxmlformats.org/drawingml/2006/main">
+              <a:ext uri="{FF2B5EF4-FFF2-40B4-BE49-F238E27FC236}">
+                <a16:creationId xmlns:a16="http://schemas.microsoft.com/office/drawing/2014/main" id="{4D4377D3-4E6A-40EA-BB31-CA62A0CA5585}"/>
+              </a:ext>
+            </a:extLst>
+          </p:cNvPr>
+          <p:cNvSpPr>
+            <a:spLocks xmlns:a="http://schemas.openxmlformats.org/drawingml/2006/main" noGrp="1"/>
+          </p:cNvSpPr>
+          <p:nvPr/>
+        </p:nvSpPr>
+        <p:spPr>
+          <a:xfrm xmlns:a="http://schemas.openxmlformats.org/drawingml/2006/main">
+            <a:off x="8096250" y="2971800"/>
+            <a:ext cx="685800" cy="685800"/>
+          </a:xfrm>
+          <a:prstGeom xmlns:a="http://schemas.openxmlformats.org/drawingml/2006/main" prst="rect">
+            <a:avLst/>
+          </a:prstGeom>
+          <a:noFill xmlns:a="http://schemas.openxmlformats.org/drawingml/2006/main"/>
+          <a:ln xmlns:a="http://schemas.openxmlformats.org/drawingml/2006/main" w="0">
+            <a:noFill/>
+            <a:prstDash val="solid"/>
+          </a:ln>
+        </p:spPr>
+        <p:txBody>
+          <a:bodyPr xmlns:a="http://schemas.openxmlformats.org/drawingml/2006/main" wrap="square" lIns="0" tIns="0" rIns="0" bIns="0" anchor="t">
+            <a:normAutofit fontScale="100000"/>
+          </a:bodyPr>
+          <a:lstStyle xmlns:a="http://schemas.openxmlformats.org/drawingml/2006/main"/>
+          <a:p xmlns:a="http://schemas.openxmlformats.org/drawingml/2006/main">
+            <a:pPr algn="ctr">
+              <a:defRPr sz="3900" b="1" i="0">
+                <a:solidFill>
+                  <a:srgbClr val="86C9C2"/>
+                </a:solidFill>
+                <a:latin typeface="Microsoft YaHei"/>
+                <a:ea typeface="Microsoft YaHei"/>
+                <a:cs typeface="Microsoft YaHei"/>
+              </a:defRPr>
+            </a:pPr>
+            <a:r>
+              <a:rPr sz="3900" b="1" i="0">
+                <a:solidFill>
+                  <a:srgbClr val="86C9C2"/>
+                </a:solidFill>
+                <a:latin typeface="Microsoft YaHei"/>
+                <a:ea typeface="Microsoft YaHei"/>
+                <a:cs typeface="Microsoft YaHei"/>
+              </a:rPr>
+              <a:t>→</a:t>
+            </a:r>
+          </a:p>
+        </p:txBody>
+      </p:sp>
+      <p:sp>
+        <p:nvSpPr>
+          <p:cNvPr id="13" name="output-node">
+            <a:extLst xmlns:a="http://schemas.openxmlformats.org/drawingml/2006/main">
+              <a:ext uri="{FF2B5EF4-FFF2-40B4-BE49-F238E27FC236}">
+                <a16:creationId xmlns:a16="http://schemas.microsoft.com/office/drawing/2014/main" id="{450AE108-F70F-4DB2-A090-5894346C7DB0}"/>
+              </a:ext>
+            </a:extLst>
+          </p:cNvPr>
+          <p:cNvSpPr>
+            <a:spLocks xmlns:a="http://schemas.openxmlformats.org/drawingml/2006/main" noGrp="1"/>
+          </p:cNvSpPr>
+          <p:nvPr/>
+        </p:nvSpPr>
+        <p:spPr>
+          <a:xfrm xmlns:a="http://schemas.openxmlformats.org/drawingml/2006/main">
+            <a:off x="8724900" y="1695450"/>
+            <a:ext cx="2952750" cy="3276600"/>
+          </a:xfrm>
+          <a:prstGeom xmlns:a="http://schemas.openxmlformats.org/drawingml/2006/main" prst="roundRect">
+            <a:avLst>
+              <a:gd name="adj" fmla="val 3871"/>
+            </a:avLst>
+          </a:prstGeom>
+          <a:solidFill xmlns:a="http://schemas.openxmlformats.org/drawingml/2006/main">
+            <a:srgbClr val="E7F6F3"/>
+          </a:solidFill>
+          <a:ln xmlns:a="http://schemas.openxmlformats.org/drawingml/2006/main" w="9525">
+            <a:solidFill>
+              <a:srgbClr val="B6DDD8"/>
+            </a:solidFill>
+            <a:prstDash val="solid"/>
+          </a:ln>
+        </p:spPr>
+      </p:sp>
+      <p:sp>
+        <p:nvSpPr>
+          <p:cNvPr id="14" name="auto-text-40">
+            <a:extLst xmlns:a="http://schemas.openxmlformats.org/drawingml/2006/main">
+              <a:ext uri="{FF2B5EF4-FFF2-40B4-BE49-F238E27FC236}">
+                <a16:creationId xmlns:a16="http://schemas.microsoft.com/office/drawing/2014/main" id="{785F55D4-7FB3-4F86-868D-A0F2FCE97BDD}"/>
+              </a:ext>
+            </a:extLst>
+          </p:cNvPr>
+          <p:cNvSpPr>
+            <a:spLocks xmlns:a="http://schemas.openxmlformats.org/drawingml/2006/main" noGrp="1"/>
+          </p:cNvSpPr>
+          <p:nvPr/>
+        </p:nvSpPr>
+        <p:spPr>
+          <a:xfrm xmlns:a="http://schemas.openxmlformats.org/drawingml/2006/main">
+            <a:off x="8991600" y="1924050"/>
+            <a:ext cx="1143000" cy="323850"/>
+          </a:xfrm>
+          <a:prstGeom xmlns:a="http://schemas.openxmlformats.org/drawingml/2006/main" prst="rect">
+            <a:avLst/>
+          </a:prstGeom>
+          <a:noFill xmlns:a="http://schemas.openxmlformats.org/drawingml/2006/main"/>
+          <a:ln xmlns:a="http://schemas.openxmlformats.org/drawingml/2006/main" w="0">
+            <a:noFill/>
+            <a:prstDash val="solid"/>
+          </a:ln>
+        </p:spPr>
+        <p:txBody>
+          <a:bodyPr xmlns:a="http://schemas.openxmlformats.org/drawingml/2006/main" wrap="square" lIns="0" tIns="0" rIns="0" bIns="0" anchor="t">
+            <a:normAutofit fontScale="100000"/>
+          </a:bodyPr>
+          <a:lstStyle xmlns:a="http://schemas.openxmlformats.org/drawingml/2006/main"/>
+          <a:p xmlns:a="http://schemas.openxmlformats.org/drawingml/2006/main">
+            <a:pPr algn="l">
+              <a:defRPr sz="1875" b="1" i="0">
+                <a:solidFill>
+                  <a:srgbClr val="159A91"/>
+                </a:solidFill>
+                <a:latin typeface="Microsoft YaHei"/>
+                <a:ea typeface="Microsoft YaHei"/>
+                <a:cs typeface="Microsoft YaHei"/>
+              </a:defRPr>
+            </a:pPr>
+            <a:r>
+              <a:rPr sz="1875" b="1" i="0">
+                <a:solidFill>
+                  <a:srgbClr val="159A91"/>
+                </a:solidFill>
+                <a:latin typeface="Microsoft YaHei"/>
+                <a:ea typeface="Microsoft YaHei"/>
+                <a:cs typeface="Microsoft YaHei"/>
+              </a:rPr>
+              <a:t>输出</a:t>
+            </a:r>
+          </a:p>
+        </p:txBody>
+      </p:sp>
+      <p:sp>
+        <p:nvSpPr>
+          <p:cNvPr id="15" name="auto-text-41">
+            <a:extLst xmlns:a="http://schemas.openxmlformats.org/drawingml/2006/main">
+              <a:ext uri="{FF2B5EF4-FFF2-40B4-BE49-F238E27FC236}">
+                <a16:creationId xmlns:a16="http://schemas.microsoft.com/office/drawing/2014/main" id="{427D202C-E90F-4B0B-872B-C30E907254B1}"/>
+              </a:ext>
+            </a:extLst>
+          </p:cNvPr>
+          <p:cNvSpPr>
+            <a:spLocks xmlns:a="http://schemas.openxmlformats.org/drawingml/2006/main" noGrp="1"/>
+          </p:cNvSpPr>
+          <p:nvPr/>
+        </p:nvSpPr>
+        <p:spPr>
+          <a:xfrm xmlns:a="http://schemas.openxmlformats.org/drawingml/2006/main">
+            <a:off x="8991600" y="2419350"/>
+            <a:ext cx="2381250" cy="2266950"/>
+          </a:xfrm>
+          <a:prstGeom xmlns:a="http://schemas.openxmlformats.org/drawingml/2006/main" prst="rect">
+            <a:avLst/>
+          </a:prstGeom>
+          <a:noFill xmlns:a="http://schemas.openxmlformats.org/drawingml/2006/main"/>
+          <a:ln xmlns:a="http://schemas.openxmlformats.org/drawingml/2006/main" w="0">
+            <a:noFill/>
+            <a:prstDash val="solid"/>
+          </a:ln>
+        </p:spPr>
+        <p:txBody>
+          <a:bodyPr xmlns:a="http://schemas.openxmlformats.org/drawingml/2006/main" wrap="square" lIns="0" tIns="0" rIns="0" bIns="0" anchor="t">
+            <a:normAutofit fontScale="100000"/>
+          </a:bodyPr>
+          <a:lstStyle xmlns:a="http://schemas.openxmlformats.org/drawingml/2006/main"/>
+          <a:p xmlns:a="http://schemas.openxmlformats.org/drawingml/2006/main">
+            <a:pPr algn="l">
+              <a:defRPr sz="1350" b="0" i="0">
+                <a:solidFill>
+                  <a:srgbClr val="25364A"/>
+                </a:solidFill>
+                <a:latin typeface="Microsoft YaHei"/>
+                <a:ea typeface="Microsoft YaHei"/>
+                <a:cs typeface="Microsoft YaHei"/>
+              </a:defRPr>
+            </a:pPr>
+            <a:r>
+              <a:rPr sz="1350" b="0" i="0">
+                <a:solidFill>
+                  <a:srgbClr val="25364A"/>
+                </a:solidFill>
+                <a:latin typeface="Microsoft YaHei"/>
+                <a:ea typeface="Microsoft YaHei"/>
+                <a:cs typeface="Microsoft YaHei"/>
+              </a:rPr>
+              <a:t>任务适配后的质量分数</a:t>
+            </a:r>
+          </a:p>
+          <a:p xmlns:a="http://schemas.openxmlformats.org/drawingml/2006/main">
+            <a:r>
+              <a:t/>
+            </a:r>
+          </a:p>
+          <a:p xmlns:a="http://schemas.openxmlformats.org/drawingml/2006/main">
+            <a:pPr algn="l">
+              <a:defRPr sz="1350" b="0" i="0">
+                <a:solidFill>
+                  <a:srgbClr val="25364A"/>
+                </a:solidFill>
+                <a:latin typeface="Microsoft YaHei"/>
+                <a:ea typeface="Microsoft YaHei"/>
+                <a:cs typeface="Microsoft YaHei"/>
+              </a:defRPr>
+            </a:pPr>
+            <a:r>
+              <a:rPr sz="1350" b="0" i="0">
+                <a:solidFill>
+                  <a:srgbClr val="25364A"/>
+                </a:solidFill>
+                <a:latin typeface="Microsoft YaHei"/>
+                <a:ea typeface="Microsoft YaHei"/>
+                <a:cs typeface="Microsoft YaHei"/>
+              </a:rPr>
+              <a:t>高／低质量筛选结论</a:t>
+            </a:r>
+          </a:p>
+          <a:p xmlns:a="http://schemas.openxmlformats.org/drawingml/2006/main">
+            <a:r>
+              <a:t/>
+            </a:r>
+          </a:p>
+          <a:p xmlns:a="http://schemas.openxmlformats.org/drawingml/2006/main">
+            <a:pPr algn="l">
+              <a:defRPr sz="1350" b="0" i="0">
+                <a:solidFill>
+                  <a:srgbClr val="25364A"/>
+                </a:solidFill>
+                <a:latin typeface="Microsoft YaHei"/>
+                <a:ea typeface="Microsoft YaHei"/>
+                <a:cs typeface="Microsoft YaHei"/>
+              </a:defRPr>
+            </a:pPr>
+            <a:r>
+              <a:rPr sz="1350" b="0" i="0">
+                <a:solidFill>
+                  <a:srgbClr val="25364A"/>
+                </a:solidFill>
+                <a:latin typeface="Microsoft YaHei"/>
+                <a:ea typeface="Microsoft YaHei"/>
+                <a:cs typeface="Microsoft YaHei"/>
+              </a:rPr>
+              <a:t>问题标签与证据摘要</a:t>
+            </a:r>
+          </a:p>
+          <a:p xmlns:a="http://schemas.openxmlformats.org/drawingml/2006/main">
+            <a:r>
+              <a:t/>
+            </a:r>
+          </a:p>
+          <a:p xmlns:a="http://schemas.openxmlformats.org/drawingml/2006/main">
+            <a:pPr algn="l">
+              <a:defRPr sz="1350" b="0" i="0">
+                <a:solidFill>
+                  <a:srgbClr val="25364A"/>
+                </a:solidFill>
+                <a:latin typeface="Microsoft YaHei"/>
+                <a:ea typeface="Microsoft YaHei"/>
+                <a:cs typeface="Microsoft YaHei"/>
+              </a:defRPr>
+            </a:pPr>
+            <a:r>
+              <a:rPr sz="1350" b="0" i="0">
+                <a:solidFill>
+                  <a:srgbClr val="25364A"/>
+                </a:solidFill>
+                <a:latin typeface="Microsoft YaHei"/>
+                <a:ea typeface="Microsoft YaHei"/>
+                <a:cs typeface="Microsoft YaHei"/>
+              </a:rPr>
+              <a:t>置信度与人工复核建议</a:t>
+            </a:r>
+          </a:p>
+          <a:p xmlns:a="http://schemas.openxmlformats.org/drawingml/2006/main">
+            <a:r>
+              <a:t/>
+            </a:r>
+          </a:p>
+          <a:p xmlns:a="http://schemas.openxmlformats.org/drawingml/2006/main">
+            <a:pPr algn="l">
+              <a:defRPr sz="1350" b="0" i="0">
+                <a:solidFill>
+                  <a:srgbClr val="25364A"/>
+                </a:solidFill>
+                <a:latin typeface="Microsoft YaHei"/>
+                <a:ea typeface="Microsoft YaHei"/>
+                <a:cs typeface="Microsoft YaHei"/>
+              </a:defRPr>
+            </a:pPr>
+            <a:r>
+              <a:rPr sz="1350" b="0" i="0">
+                <a:solidFill>
+                  <a:srgbClr val="25364A"/>
+                </a:solidFill>
+                <a:latin typeface="Microsoft YaHei"/>
+                <a:ea typeface="Microsoft YaHei"/>
+                <a:cs typeface="Microsoft YaHei"/>
+              </a:rPr>
+              <a:t>可复用接口与评测脚本</a:t>
+            </a:r>
+          </a:p>
+        </p:txBody>
+      </p:sp>
+      <p:sp>
+        <p:nvSpPr>
+          <p:cNvPr id="16" name="scenario-band">
+            <a:extLst xmlns:a="http://schemas.openxmlformats.org/drawingml/2006/main">
+              <a:ext uri="{FF2B5EF4-FFF2-40B4-BE49-F238E27FC236}">
+                <a16:creationId xmlns:a16="http://schemas.microsoft.com/office/drawing/2014/main" id="{DEA4D5B2-78D1-47A8-812F-6D162FED2FB7}"/>
+              </a:ext>
+            </a:extLst>
+          </p:cNvPr>
+          <p:cNvSpPr>
+            <a:spLocks xmlns:a="http://schemas.openxmlformats.org/drawingml/2006/main" noGrp="1"/>
+          </p:cNvSpPr>
+          <p:nvPr/>
+        </p:nvSpPr>
+        <p:spPr>
+          <a:xfrm xmlns:a="http://schemas.openxmlformats.org/drawingml/2006/main">
+            <a:off x="514350" y="5429250"/>
+            <a:ext cx="7810500" cy="571500"/>
+          </a:xfrm>
+          <a:prstGeom xmlns:a="http://schemas.openxmlformats.org/drawingml/2006/main" prst="roundRect">
+            <a:avLst>
+              <a:gd name="adj" fmla="val 13333"/>
+            </a:avLst>
+          </a:prstGeom>
+          <a:solidFill xmlns:a="http://schemas.openxmlformats.org/drawingml/2006/main">
+            <a:srgbClr val="F4F7FA"/>
+          </a:solidFill>
+          <a:ln xmlns:a="http://schemas.openxmlformats.org/drawingml/2006/main" w="9525">
+            <a:solidFill>
+              <a:srgbClr val="F4F7FA"/>
+            </a:solidFill>
+            <a:prstDash val="solid"/>
+          </a:ln>
+        </p:spPr>
+      </p:sp>
+      <p:sp>
+        <p:nvSpPr>
+          <p:cNvPr id="17" name="auto-text-42">
+            <a:extLst xmlns:a="http://schemas.openxmlformats.org/drawingml/2006/main">
+              <a:ext uri="{FF2B5EF4-FFF2-40B4-BE49-F238E27FC236}">
+                <a16:creationId xmlns:a16="http://schemas.microsoft.com/office/drawing/2014/main" id="{8B07032B-A038-4575-809B-D35E491A8A8B}"/>
+              </a:ext>
+            </a:extLst>
+          </p:cNvPr>
+          <p:cNvSpPr>
+            <a:spLocks xmlns:a="http://schemas.openxmlformats.org/drawingml/2006/main" noGrp="1"/>
+          </p:cNvSpPr>
+          <p:nvPr/>
+        </p:nvSpPr>
+        <p:spPr>
+          <a:xfrm xmlns:a="http://schemas.openxmlformats.org/drawingml/2006/main">
+            <a:off x="723900" y="5591175"/>
+            <a:ext cx="7391400" cy="247650"/>
+          </a:xfrm>
+          <a:prstGeom xmlns:a="http://schemas.openxmlformats.org/drawingml/2006/main" prst="rect">
+            <a:avLst/>
+          </a:prstGeom>
+          <a:noFill xmlns:a="http://schemas.openxmlformats.org/drawingml/2006/main"/>
+          <a:ln xmlns:a="http://schemas.openxmlformats.org/drawingml/2006/main" w="0">
+            <a:noFill/>
+            <a:prstDash val="solid"/>
+          </a:ln>
+        </p:spPr>
+        <p:txBody>
+          <a:bodyPr xmlns:a="http://schemas.openxmlformats.org/drawingml/2006/main" wrap="square" lIns="0" tIns="0" rIns="0" bIns="0" anchor="t">
+            <a:normAutofit fontScale="100000"/>
+          </a:bodyPr>
+          <a:lstStyle xmlns:a="http://schemas.openxmlformats.org/drawingml/2006/main"/>
+          <a:p xmlns:a="http://schemas.openxmlformats.org/drawingml/2006/main">
+            <a:pPr algn="ctr">
+              <a:defRPr sz="1350" b="1" i="0">
+                <a:solidFill>
+                  <a:srgbClr val="12263A"/>
+                </a:solidFill>
+                <a:latin typeface="Microsoft YaHei"/>
+                <a:ea typeface="Microsoft YaHei"/>
+                <a:cs typeface="Microsoft YaHei"/>
+              </a:defRPr>
+            </a:pPr>
+            <a:r>
+              <a:rPr sz="1350" b="1" i="0">
+                <a:solidFill>
+                  <a:srgbClr val="12263A"/>
+                </a:solidFill>
+                <a:latin typeface="Microsoft YaHei"/>
+                <a:ea typeface="Microsoft YaHei"/>
+                <a:cs typeface="Microsoft YaHei"/>
+              </a:rPr>
+              <a:t>首批建议验证：多图编辑＋AIGC图库　｜　后续泛化：盲超分＋颜色标注</a:t>
+            </a:r>
+          </a:p>
+        </p:txBody>
+      </p:sp>
+      <p:sp>
+        <p:nvSpPr>
+          <p:cNvPr id="18" name="current-pipeline-frame">
+            <a:extLst xmlns:a="http://schemas.openxmlformats.org/drawingml/2006/main">
+              <a:ext uri="{FF2B5EF4-FFF2-40B4-BE49-F238E27FC236}">
+                <a16:creationId xmlns:a16="http://schemas.microsoft.com/office/drawing/2014/main" id="{AC72DA3E-2C45-4F83-9192-9D8AA8FC35E2}"/>
+              </a:ext>
+            </a:extLst>
+          </p:cNvPr>
+          <p:cNvSpPr>
+            <a:spLocks xmlns:a="http://schemas.openxmlformats.org/drawingml/2006/main" noGrp="1"/>
+          </p:cNvSpPr>
+          <p:nvPr/>
+        </p:nvSpPr>
+        <p:spPr>
+          <a:xfrm xmlns:a="http://schemas.openxmlformats.org/drawingml/2006/main">
+            <a:off x="8572500" y="5429250"/>
+            <a:ext cx="3105150" cy="571500"/>
+          </a:xfrm>
+          <a:prstGeom xmlns:a="http://schemas.openxmlformats.org/drawingml/2006/main" prst="roundRect">
+            <a:avLst>
+              <a:gd name="adj" fmla="val 13333"/>
+            </a:avLst>
+          </a:prstGeom>
+          <a:solidFill xmlns:a="http://schemas.openxmlformats.org/drawingml/2006/main">
+            <a:srgbClr val="F0F3F6"/>
+          </a:solidFill>
+          <a:ln xmlns:a="http://schemas.openxmlformats.org/drawingml/2006/main" w="9525">
+            <a:solidFill>
+              <a:srgbClr val="AAB5C0"/>
+            </a:solidFill>
+            <a:prstDash val="solid"/>
+          </a:ln>
+        </p:spPr>
+      </p:sp>
+      <p:sp>
+        <p:nvSpPr>
+          <p:cNvPr id="19" name="current-pipeline-label">
+            <a:extLst xmlns:a="http://schemas.openxmlformats.org/drawingml/2006/main">
+              <a:ext uri="{FF2B5EF4-FFF2-40B4-BE49-F238E27FC236}">
+                <a16:creationId xmlns:a16="http://schemas.microsoft.com/office/drawing/2014/main" id="{8A836FAC-A0F0-40E9-B367-298947DD4220}"/>
+              </a:ext>
+            </a:extLst>
+          </p:cNvPr>
+          <p:cNvSpPr>
+            <a:spLocks xmlns:a="http://schemas.openxmlformats.org/drawingml/2006/main" noGrp="1"/>
+          </p:cNvSpPr>
+          <p:nvPr/>
+        </p:nvSpPr>
+        <p:spPr>
+          <a:xfrm xmlns:a="http://schemas.openxmlformats.org/drawingml/2006/main">
+            <a:off x="8724900" y="5486400"/>
+            <a:ext cx="2800350" cy="266700"/>
+          </a:xfrm>
+          <a:prstGeom xmlns:a="http://schemas.openxmlformats.org/drawingml/2006/main" prst="rect">
+            <a:avLst/>
+          </a:prstGeom>
+          <a:noFill xmlns:a="http://schemas.openxmlformats.org/drawingml/2006/main"/>
+          <a:ln xmlns:a="http://schemas.openxmlformats.org/drawingml/2006/main" w="0">
+            <a:noFill/>
+            <a:prstDash val="solid"/>
+          </a:ln>
+        </p:spPr>
+        <p:txBody>
+          <a:bodyPr xmlns:a="http://schemas.openxmlformats.org/drawingml/2006/main" wrap="square" lIns="0" tIns="0" rIns="0" bIns="0" anchor="ctr">
+            <a:normAutofit fontScale="100000"/>
+          </a:bodyPr>
+          <a:lstStyle xmlns:a="http://schemas.openxmlformats.org/drawingml/2006/main"/>
+          <a:p xmlns:a="http://schemas.openxmlformats.org/drawingml/2006/main">
+            <a:pPr algn="ctr">
+              <a:defRPr sz="1350" b="1" i="0">
+                <a:solidFill>
+                  <a:srgbClr val="5E6C7A"/>
+                </a:solidFill>
+                <a:latin typeface="Microsoft YaHei"/>
+                <a:ea typeface="Microsoft YaHei"/>
+                <a:cs typeface="Microsoft YaHei"/>
+              </a:defRPr>
+            </a:pPr>
+            <a:r>
+              <a:rPr sz="1350" b="1" i="0">
+                <a:solidFill>
+                  <a:srgbClr val="5E6C7A"/>
+                </a:solidFill>
+                <a:latin typeface="Microsoft YaHei"/>
+                <a:ea typeface="Microsoft YaHei"/>
+                <a:cs typeface="Microsoft YaHei"/>
+              </a:rPr>
+              <a:t>可选｜现有质检Pipeline截图</a:t>
+            </a:r>
+          </a:p>
+        </p:txBody>
+      </p:sp>
+      <p:sp>
+        <p:nvSpPr>
+          <p:cNvPr id="20" name="current-pipeline-sub">
+            <a:extLst xmlns:a="http://schemas.openxmlformats.org/drawingml/2006/main">
+              <a:ext uri="{FF2B5EF4-FFF2-40B4-BE49-F238E27FC236}">
+                <a16:creationId xmlns:a16="http://schemas.microsoft.com/office/drawing/2014/main" id="{C6DE9030-DA76-4B5A-AF27-E72065C33700}"/>
+              </a:ext>
+            </a:extLst>
+          </p:cNvPr>
+          <p:cNvSpPr>
+            <a:spLocks xmlns:a="http://schemas.openxmlformats.org/drawingml/2006/main" noGrp="1"/>
+          </p:cNvSpPr>
+          <p:nvPr/>
+        </p:nvSpPr>
+        <p:spPr>
+          <a:xfrm xmlns:a="http://schemas.openxmlformats.org/drawingml/2006/main">
+            <a:off x="8724900" y="5791200"/>
+            <a:ext cx="2800350" cy="209550"/>
+          </a:xfrm>
+          <a:prstGeom xmlns:a="http://schemas.openxmlformats.org/drawingml/2006/main" prst="rect">
+            <a:avLst/>
+          </a:prstGeom>
+          <a:noFill xmlns:a="http://schemas.openxmlformats.org/drawingml/2006/main"/>
+          <a:ln xmlns:a="http://schemas.openxmlformats.org/drawingml/2006/main" w="0">
+            <a:noFill/>
+            <a:prstDash val="solid"/>
+          </a:ln>
+        </p:spPr>
+        <p:txBody>
+          <a:bodyPr xmlns:a="http://schemas.openxmlformats.org/drawingml/2006/main" wrap="square" lIns="0" tIns="0" rIns="0" bIns="0" anchor="t">
+            <a:normAutofit fontScale="100000"/>
+          </a:bodyPr>
+          <a:lstStyle xmlns:a="http://schemas.openxmlformats.org/drawingml/2006/main"/>
+          <a:p xmlns:a="http://schemas.openxmlformats.org/drawingml/2006/main">
+            <a:pPr algn="ctr">
+              <a:defRPr sz="975" b="0" i="0">
+                <a:solidFill>
+                  <a:srgbClr val="8A98A8"/>
+                </a:solidFill>
+                <a:latin typeface="Microsoft YaHei"/>
+                <a:ea typeface="Microsoft YaHei"/>
+                <a:cs typeface="Microsoft YaHei"/>
+              </a:defRPr>
+            </a:pPr>
+            <a:r>
+              <a:rPr sz="975" b="0" i="0">
+                <a:solidFill>
+                  <a:srgbClr val="8A98A8"/>
+                </a:solidFill>
+                <a:latin typeface="Microsoft YaHei"/>
+                <a:ea typeface="Microsoft YaHei"/>
+                <a:cs typeface="Microsoft YaHei"/>
+              </a:rPr>
+              <a:t>如无材料可删除此框</a:t>
+            </a:r>
+          </a:p>
+        </p:txBody>
+      </p:sp>
+      <p:sp>
+        <p:nvSpPr>
+          <p:cNvPr id="21" name="auto-text-43">
+            <a:extLst xmlns:a="http://schemas.openxmlformats.org/drawingml/2006/main">
+              <a:ext uri="{FF2B5EF4-FFF2-40B4-BE49-F238E27FC236}">
+                <a16:creationId xmlns:a16="http://schemas.microsoft.com/office/drawing/2014/main" id="{ED56648D-FF3B-4036-A8E3-803CA5E24F3A}"/>
+              </a:ext>
+            </a:extLst>
+          </p:cNvPr>
+          <p:cNvSpPr>
+            <a:spLocks xmlns:a="http://schemas.openxmlformats.org/drawingml/2006/main" noGrp="1"/>
+          </p:cNvSpPr>
+          <p:nvPr/>
+        </p:nvSpPr>
+        <p:spPr>
+          <a:xfrm xmlns:a="http://schemas.openxmlformats.org/drawingml/2006/main">
+            <a:off x="628650" y="6191250"/>
+            <a:ext cx="10668000" cy="247650"/>
+          </a:xfrm>
+          <a:prstGeom xmlns:a="http://schemas.openxmlformats.org/drawingml/2006/main" prst="rect">
+            <a:avLst/>
+          </a:prstGeom>
+          <a:noFill xmlns:a="http://schemas.openxmlformats.org/drawingml/2006/main"/>
+          <a:ln xmlns:a="http://schemas.openxmlformats.org/drawingml/2006/main" w="0">
+            <a:noFill/>
+            <a:prstDash val="solid"/>
+          </a:ln>
+        </p:spPr>
+        <p:txBody>
+          <a:bodyPr xmlns:a="http://schemas.openxmlformats.org/drawingml/2006/main" wrap="square" lIns="0" tIns="0" rIns="0" bIns="0" anchor="t">
+            <a:normAutofit fontScale="100000"/>
+          </a:bodyPr>
+          <a:lstStyle xmlns:a="http://schemas.openxmlformats.org/drawingml/2006/main"/>
+          <a:p xmlns:a="http://schemas.openxmlformats.org/drawingml/2006/main">
+            <a:pPr algn="ctr">
+              <a:defRPr sz="975" b="0" i="0">
+                <a:solidFill>
+                  <a:srgbClr val="66778A"/>
+                </a:solidFill>
+                <a:latin typeface="Microsoft YaHei"/>
+                <a:ea typeface="Microsoft YaHei"/>
+                <a:cs typeface="Microsoft YaHei"/>
+              </a:defRPr>
+            </a:pPr>
+            <a:r>
+              <a:rPr sz="975" b="0" i="0">
+                <a:solidFill>
+                  <a:srgbClr val="66778A"/>
+                </a:solidFill>
+                <a:latin typeface="Microsoft YaHei"/>
+                <a:ea typeface="Microsoft YaHei"/>
+                <a:cs typeface="Microsoft YaHei"/>
+              </a:rPr>
+              <a:t>合作边界：高校交付核心算法原型与评测方法；公司提供业务数据、专家反馈，并负责后续平台集成。</a:t>
+            </a:r>
+          </a:p>
+        </p:txBody>
+      </p:sp>
+    </p:spTree>
+    <p:extLst>
+      <p:ext uri="{BB962C8B-B14F-4D97-AF65-F5344CB8AC3E}">
+        <p14:creationId xmlns:p14="http://schemas.microsoft.com/office/powerpoint/2010/main" val="1530288938"/>
+      </p:ext>
+    </p:extLst>
+  </p:cSld>
+</p:sld>
+</file>
+
+<file path=ppt/slides/slide7.xml><?xml version="1.0" encoding="utf-8"?>
+<p:sld xmlns:p="http://schemas.openxmlformats.org/presentationml/2006/main">
+  <p:cSld>
+    <p:bg>
+      <p:bgPr>
+        <a:solidFill xmlns:a="http://schemas.openxmlformats.org/drawingml/2006/main">
+          <a:srgbClr val="FFFFFF"/>
+        </a:solidFill>
+      </p:bgPr>
+    </p:bg>
+    <p:spTree>
+      <p:nvGrpSpPr>
+        <p:cNvPr id="1" name=""/>
+        <p:cNvGrpSpPr/>
+        <p:nvPr/>
+      </p:nvGrpSpPr>
+      <p:grpSpPr>
+        <a:xfrm xmlns:a="http://schemas.openxmlformats.org/drawingml/2006/main"/>
+      </p:grpSpPr>
+      <p:sp>
+        <p:nvSpPr>
+          <p:cNvPr id="33" name="accent-7">
+            <a:extLst xmlns:a="http://schemas.openxmlformats.org/drawingml/2006/main">
+              <a:ext uri="{FF2B5EF4-FFF2-40B4-BE49-F238E27FC236}">
+                <a16:creationId xmlns:a16="http://schemas.microsoft.com/office/drawing/2014/main" id="{370DD843-DED4-4341-A359-5ED3095D10B3}"/>
+              </a:ext>
+            </a:extLst>
+          </p:cNvPr>
+          <p:cNvSpPr>
+            <a:spLocks xmlns:a="http://schemas.openxmlformats.org/drawingml/2006/main" noGrp="1"/>
+          </p:cNvSpPr>
+          <p:nvPr/>
+        </p:nvSpPr>
+        <p:spPr>
+          <a:xfrm xmlns:a="http://schemas.openxmlformats.org/drawingml/2006/main">
+            <a:off x="400050" y="381000"/>
+            <a:ext cx="76200" cy="495300"/>
+          </a:xfrm>
+          <a:prstGeom xmlns:a="http://schemas.openxmlformats.org/drawingml/2006/main" prst="roundRect">
+            <a:avLst>
+              <a:gd name="adj" fmla="val 50000"/>
+            </a:avLst>
+          </a:prstGeom>
+          <a:solidFill xmlns:a="http://schemas.openxmlformats.org/drawingml/2006/main">
+            <a:srgbClr val="2F6BFF"/>
+          </a:solidFill>
+          <a:ln xmlns:a="http://schemas.openxmlformats.org/drawingml/2006/main" w="9525">
+            <a:solidFill>
+              <a:srgbClr val="2F6BFF"/>
+            </a:solidFill>
+            <a:prstDash val="solid"/>
+          </a:ln>
+        </p:spPr>
+      </p:sp>
+      <p:sp>
+        <p:nvSpPr>
+          <p:cNvPr id="2" name="title-7">
+            <a:extLst xmlns:a="http://schemas.openxmlformats.org/drawingml/2006/main">
+              <a:ext uri="{FF2B5EF4-FFF2-40B4-BE49-F238E27FC236}">
+                <a16:creationId xmlns:a16="http://schemas.microsoft.com/office/drawing/2014/main" id="{EE03C538-9C74-4CA0-9ACA-5C68F9729763}"/>
+              </a:ext>
+            </a:extLst>
+          </p:cNvPr>
+          <p:cNvSpPr>
+            <a:spLocks xmlns:a="http://schemas.openxmlformats.org/drawingml/2006/main" noGrp="1"/>
+          </p:cNvSpPr>
+          <p:nvPr/>
+        </p:nvSpPr>
+        <p:spPr>
+          <a:xfrm xmlns:a="http://schemas.openxmlformats.org/drawingml/2006/main">
+            <a:off x="628650" y="323850"/>
+            <a:ext cx="10810875" cy="628650"/>
+          </a:xfrm>
+          <a:prstGeom xmlns:a="http://schemas.openxmlformats.org/drawingml/2006/main" prst="rect">
+            <a:avLst/>
+          </a:prstGeom>
+          <a:noFill xmlns:a="http://schemas.openxmlformats.org/drawingml/2006/main"/>
+          <a:ln xmlns:a="http://schemas.openxmlformats.org/drawingml/2006/main" w="0">
+            <a:noFill/>
+            <a:prstDash val="solid"/>
+          </a:ln>
+        </p:spPr>
+        <p:txBody>
+          <a:bodyPr xmlns:a="http://schemas.openxmlformats.org/drawingml/2006/main" wrap="square" lIns="0" tIns="0" rIns="0" bIns="0" anchor="t">
+            <a:normAutofit fontScale="100000"/>
+          </a:bodyPr>
+          <a:lstStyle xmlns:a="http://schemas.openxmlformats.org/drawingml/2006/main"/>
+          <a:p xmlns:a="http://schemas.openxmlformats.org/drawingml/2006/main">
+            <a:pPr algn="l">
+              <a:defRPr sz="3150" b="1" i="0">
+                <a:solidFill>
+                  <a:srgbClr val="12263A"/>
+                </a:solidFill>
+                <a:latin typeface="Microsoft YaHei"/>
+                <a:ea typeface="Microsoft YaHei"/>
+                <a:cs typeface="Microsoft YaHei"/>
+              </a:defRPr>
+            </a:pPr>
+            <a:r>
+              <a:rPr sz="3150" b="1" i="0">
+                <a:solidFill>
+                  <a:srgbClr val="12263A"/>
+                </a:solidFill>
+                <a:latin typeface="Microsoft YaHei"/>
+                <a:ea typeface="Microsoft YaHei"/>
+                <a:cs typeface="Microsoft YaHei"/>
+              </a:rPr>
+              <a:t>合作项目将把临时质检方案沉淀为可复用、可验证的质量能力</a:t>
+            </a:r>
+          </a:p>
+        </p:txBody>
+      </p:sp>
+      <p:sp>
+        <p:nvSpPr>
+          <p:cNvPr id="3" name="page-7">
+            <a:extLst xmlns:a="http://schemas.openxmlformats.org/drawingml/2006/main">
+              <a:ext uri="{FF2B5EF4-FFF2-40B4-BE49-F238E27FC236}">
+                <a16:creationId xmlns:a16="http://schemas.microsoft.com/office/drawing/2014/main" id="{2404C339-3546-4A76-B73B-FF84BE61F739}"/>
+              </a:ext>
+            </a:extLst>
+          </p:cNvPr>
+          <p:cNvSpPr>
+            <a:spLocks xmlns:a="http://schemas.openxmlformats.org/drawingml/2006/main" noGrp="1"/>
+          </p:cNvSpPr>
+          <p:nvPr/>
+        </p:nvSpPr>
+        <p:spPr>
+          <a:xfrm xmlns:a="http://schemas.openxmlformats.org/drawingml/2006/main">
+            <a:off x="11287125" y="6400800"/>
+            <a:ext cx="476250" cy="190500"/>
+          </a:xfrm>
+          <a:prstGeom xmlns:a="http://schemas.openxmlformats.org/drawingml/2006/main" prst="rect">
+            <a:avLst/>
+          </a:prstGeom>
+          <a:noFill xmlns:a="http://schemas.openxmlformats.org/drawingml/2006/main"/>
+          <a:ln xmlns:a="http://schemas.openxmlformats.org/drawingml/2006/main" w="0">
+            <a:noFill/>
+            <a:prstDash val="solid"/>
+          </a:ln>
+        </p:spPr>
+        <p:txBody>
+          <a:bodyPr xmlns:a="http://schemas.openxmlformats.org/drawingml/2006/main" wrap="square" lIns="0" tIns="0" rIns="0" bIns="0" anchor="t">
+            <a:normAutofit fontScale="100000"/>
+          </a:bodyPr>
+          <a:lstStyle xmlns:a="http://schemas.openxmlformats.org/drawingml/2006/main"/>
+          <a:p xmlns:a="http://schemas.openxmlformats.org/drawingml/2006/main">
+            <a:pPr algn="r">
+              <a:defRPr sz="900" b="0" i="0">
+                <a:solidFill>
+                  <a:srgbClr val="8A98A8"/>
+                </a:solidFill>
+                <a:latin typeface="Microsoft YaHei"/>
+                <a:ea typeface="Microsoft YaHei"/>
+                <a:cs typeface="Microsoft YaHei"/>
+              </a:defRPr>
+            </a:pPr>
+            <a:r>
+              <a:rPr sz="900" b="0" i="0">
+                <a:solidFill>
+                  <a:srgbClr val="8A98A8"/>
+                </a:solidFill>
+                <a:latin typeface="Microsoft YaHei"/>
+                <a:ea typeface="Microsoft YaHei"/>
+                <a:cs typeface="Microsoft YaHei"/>
+              </a:rPr>
+              <a:t>07</a:t>
+            </a:r>
+          </a:p>
+        </p:txBody>
+      </p:sp>
+      <p:sp>
+        <p:nvSpPr>
+          <p:cNvPr id="4" name="auto-text-44">
+            <a:extLst xmlns:a="http://schemas.openxmlformats.org/drawingml/2006/main">
+              <a:ext uri="{FF2B5EF4-FFF2-40B4-BE49-F238E27FC236}">
+                <a16:creationId xmlns:a16="http://schemas.microsoft.com/office/drawing/2014/main" id="{6F4B1A53-6661-41F9-952B-86066EB3EBB2}"/>
+              </a:ext>
+            </a:extLst>
+          </p:cNvPr>
+          <p:cNvSpPr>
+            <a:spLocks xmlns:a="http://schemas.openxmlformats.org/drawingml/2006/main" noGrp="1"/>
+          </p:cNvSpPr>
+          <p:nvPr/>
+        </p:nvSpPr>
+        <p:spPr>
+          <a:xfrm xmlns:a="http://schemas.openxmlformats.org/drawingml/2006/main">
+            <a:off x="628650" y="990600"/>
+            <a:ext cx="10668000" cy="323850"/>
+          </a:xfrm>
+          <a:prstGeom xmlns:a="http://schemas.openxmlformats.org/drawingml/2006/main" prst="rect">
+            <a:avLst/>
+          </a:prstGeom>
+          <a:noFill xmlns:a="http://schemas.openxmlformats.org/drawingml/2006/main"/>
+          <a:ln xmlns:a="http://schemas.openxmlformats.org/drawingml/2006/main" w="0">
+            <a:noFill/>
+            <a:prstDash val="solid"/>
+          </a:ln>
+        </p:spPr>
+        <p:txBody>
+          <a:bodyPr xmlns:a="http://schemas.openxmlformats.org/drawingml/2006/main" wrap="square" lIns="0" tIns="0" rIns="0" bIns="0" anchor="t">
+            <a:normAutofit fontScale="100000"/>
+          </a:bodyPr>
+          <a:lstStyle xmlns:a="http://schemas.openxmlformats.org/drawingml/2006/main"/>
+          <a:p xmlns:a="http://schemas.openxmlformats.org/drawingml/2006/main">
+            <a:pPr algn="l">
+              <a:defRPr sz="1425" b="0" i="0">
+                <a:solidFill>
+                  <a:srgbClr val="66778A"/>
+                </a:solidFill>
+                <a:latin typeface="Microsoft YaHei"/>
+                <a:ea typeface="Microsoft YaHei"/>
+                <a:cs typeface="Microsoft YaHei"/>
+              </a:defRPr>
+            </a:pPr>
+            <a:r>
+              <a:rPr sz="1425" b="0" i="0">
+                <a:solidFill>
+                  <a:srgbClr val="66778A"/>
+                </a:solidFill>
+                <a:latin typeface="Microsoft YaHei"/>
+                <a:ea typeface="Microsoft YaHei"/>
+                <a:cs typeface="Microsoft YaHei"/>
+              </a:rPr>
               <a:t>项目价值不仅是提高一次筛选准确率，更重要的是形成可服务多个图像项目的共同能力。</a:t>
             </a:r>
           </a:p>
@@ -7645,7 +9203,7 @@
           <p:cNvPr id="5" name="value-0">
             <a:extLst xmlns:a="http://schemas.openxmlformats.org/drawingml/2006/main">
               <a:ext uri="{FF2B5EF4-FFF2-40B4-BE49-F238E27FC236}">
-                <a16:creationId xmlns:a16="http://schemas.microsoft.com/office/drawing/2014/main" id="{9061903F-E51F-4FCC-BB1A-96D23CE70E8D}"/>
+                <a16:creationId xmlns:a16="http://schemas.microsoft.com/office/drawing/2014/main" id="{5A45D8BB-B101-4BB8-80B2-D743241498F4}"/>
               </a:ext>
             </a:extLst>
           </p:cNvPr>
@@ -7680,7 +9238,7 @@
           <p:cNvPr id="6" name="value-title-0">
             <a:extLst xmlns:a="http://schemas.openxmlformats.org/drawingml/2006/main">
               <a:ext uri="{FF2B5EF4-FFF2-40B4-BE49-F238E27FC236}">
-                <a16:creationId xmlns:a16="http://schemas.microsoft.com/office/drawing/2014/main" id="{CCFA3093-B928-43E0-B4A2-1EB7DCBE5509}"/>
+                <a16:creationId xmlns:a16="http://schemas.microsoft.com/office/drawing/2014/main" id="{73CC0331-F9DE-41FA-9F86-9AF919AB7C0F}"/>
               </a:ext>
             </a:extLst>
           </p:cNvPr>
@@ -7738,7 +9296,7 @@
           <p:cNvPr id="7" name="value-body-0">
             <a:extLst xmlns:a="http://schemas.openxmlformats.org/drawingml/2006/main">
               <a:ext uri="{FF2B5EF4-FFF2-40B4-BE49-F238E27FC236}">
-                <a16:creationId xmlns:a16="http://schemas.microsoft.com/office/drawing/2014/main" id="{4E4D7D9F-E575-49A6-B2BB-0DF47B7F6E61}"/>
+                <a16:creationId xmlns:a16="http://schemas.microsoft.com/office/drawing/2014/main" id="{BE374A20-2D8C-4C81-89FE-588FFF6240D5}"/>
               </a:ext>
             </a:extLst>
           </p:cNvPr>
@@ -7842,7 +9400,7 @@
           <p:cNvPr id="8" name="value-1">
             <a:extLst xmlns:a="http://schemas.openxmlformats.org/drawingml/2006/main">
               <a:ext uri="{FF2B5EF4-FFF2-40B4-BE49-F238E27FC236}">
-                <a16:creationId xmlns:a16="http://schemas.microsoft.com/office/drawing/2014/main" id="{1D5A4F1F-38EF-4A7C-8212-81AA866B303B}"/>
+                <a16:creationId xmlns:a16="http://schemas.microsoft.com/office/drawing/2014/main" id="{D8C9B661-AD8D-48CB-9FB6-1EDB350FA798}"/>
               </a:ext>
             </a:extLst>
           </p:cNvPr>
@@ -7877,7 +9435,7 @@
           <p:cNvPr id="9" name="value-title-1">
             <a:extLst xmlns:a="http://schemas.openxmlformats.org/drawingml/2006/main">
               <a:ext uri="{FF2B5EF4-FFF2-40B4-BE49-F238E27FC236}">
-                <a16:creationId xmlns:a16="http://schemas.microsoft.com/office/drawing/2014/main" id="{E2FB3801-6588-441E-A1B3-913BB513BE6F}"/>
+                <a16:creationId xmlns:a16="http://schemas.microsoft.com/office/drawing/2014/main" id="{402809ED-43F2-4E33-97A5-75924C352400}"/>
               </a:ext>
             </a:extLst>
           </p:cNvPr>
@@ -7935,7 +9493,7 @@
           <p:cNvPr id="10" name="value-body-1">
             <a:extLst xmlns:a="http://schemas.openxmlformats.org/drawingml/2006/main">
               <a:ext uri="{FF2B5EF4-FFF2-40B4-BE49-F238E27FC236}">
-                <a16:creationId xmlns:a16="http://schemas.microsoft.com/office/drawing/2014/main" id="{F3C9F8E6-7208-4A67-B154-00D7CE7B7B4F}"/>
+                <a16:creationId xmlns:a16="http://schemas.microsoft.com/office/drawing/2014/main" id="{44FA4840-E6B6-4B48-99AC-B4F72B4F9058}"/>
               </a:ext>
             </a:extLst>
           </p:cNvPr>
@@ -8039,7 +9597,7 @@
           <p:cNvPr id="11" name="value-2">
             <a:extLst xmlns:a="http://schemas.openxmlformats.org/drawingml/2006/main">
               <a:ext uri="{FF2B5EF4-FFF2-40B4-BE49-F238E27FC236}">
-                <a16:creationId xmlns:a16="http://schemas.microsoft.com/office/drawing/2014/main" id="{88D9110C-5BA6-4F08-B138-8ABAF33C5ECE}"/>
+                <a16:creationId xmlns:a16="http://schemas.microsoft.com/office/drawing/2014/main" id="{CCF1A12F-FC35-4FD3-851C-1EA57375BBC7}"/>
               </a:ext>
             </a:extLst>
           </p:cNvPr>
@@ -8074,7 +9632,7 @@
           <p:cNvPr id="12" name="value-title-2">
             <a:extLst xmlns:a="http://schemas.openxmlformats.org/drawingml/2006/main">
               <a:ext uri="{FF2B5EF4-FFF2-40B4-BE49-F238E27FC236}">
-                <a16:creationId xmlns:a16="http://schemas.microsoft.com/office/drawing/2014/main" id="{688BAFE5-F846-42E8-A586-A3BA65295EB1}"/>
+                <a16:creationId xmlns:a16="http://schemas.microsoft.com/office/drawing/2014/main" id="{E4B085E3-4356-4C6C-8B63-F3343C883684}"/>
               </a:ext>
             </a:extLst>
           </p:cNvPr>
@@ -8132,7 +9690,7 @@
           <p:cNvPr id="13" name="value-body-2">
             <a:extLst xmlns:a="http://schemas.openxmlformats.org/drawingml/2006/main">
               <a:ext uri="{FF2B5EF4-FFF2-40B4-BE49-F238E27FC236}">
-                <a16:creationId xmlns:a16="http://schemas.microsoft.com/office/drawing/2014/main" id="{2CFBF651-A08B-450E-AC6F-BFAEA79318C4}"/>
+                <a16:creationId xmlns:a16="http://schemas.microsoft.com/office/drawing/2014/main" id="{E9BC181E-32F1-4243-934E-F0D57101606C}"/>
               </a:ext>
             </a:extLst>
           </p:cNvPr>
@@ -8233,10 +9791,10 @@
       </p:sp>
       <p:sp>
         <p:nvSpPr>
-          <p:cNvPr id="14" name="auto-text-39">
-            <a:extLst xmlns:a="http://schemas.openxmlformats.org/drawingml/2006/main">
-              <a:ext uri="{FF2B5EF4-FFF2-40B4-BE49-F238E27FC236}">
-                <a16:creationId xmlns:a16="http://schemas.microsoft.com/office/drawing/2014/main" id="{B028997D-3352-4189-BEF4-4A4A8F046411}"/>
+          <p:cNvPr id="14" name="auto-text-45">
+            <a:extLst xmlns:a="http://schemas.openxmlformats.org/drawingml/2006/main">
+              <a:ext uri="{FF2B5EF4-FFF2-40B4-BE49-F238E27FC236}">
+                <a16:creationId xmlns:a16="http://schemas.microsoft.com/office/drawing/2014/main" id="{CE0C7D5B-093E-4DBA-B640-3CACE51301F2}"/>
               </a:ext>
             </a:extLst>
           </p:cNvPr>
@@ -8294,7 +9852,7 @@
           <p:cNvPr id="15" name="metric-0">
             <a:extLst xmlns:a="http://schemas.openxmlformats.org/drawingml/2006/main">
               <a:ext uri="{FF2B5EF4-FFF2-40B4-BE49-F238E27FC236}">
-                <a16:creationId xmlns:a16="http://schemas.microsoft.com/office/drawing/2014/main" id="{9F885632-F863-4DB3-8376-FCA4568A4796}"/>
+                <a16:creationId xmlns:a16="http://schemas.microsoft.com/office/drawing/2014/main" id="{6014A61A-B868-48D5-BE93-27C7553D2163}"/>
               </a:ext>
             </a:extLst>
           </p:cNvPr>
@@ -8329,7 +9887,7 @@
           <p:cNvPr id="16" name="metric-stat-0">
             <a:extLst xmlns:a="http://schemas.openxmlformats.org/drawingml/2006/main">
               <a:ext uri="{FF2B5EF4-FFF2-40B4-BE49-F238E27FC236}">
-                <a16:creationId xmlns:a16="http://schemas.microsoft.com/office/drawing/2014/main" id="{322487AD-65F2-4788-ADF1-951CF9607571}"/>
+                <a16:creationId xmlns:a16="http://schemas.microsoft.com/office/drawing/2014/main" id="{B1DAFDBD-4ADD-4910-B625-56E46A3BD9B1}"/>
               </a:ext>
             </a:extLst>
           </p:cNvPr>
@@ -8387,7 +9945,7 @@
           <p:cNvPr id="17" name="metric-label-0">
             <a:extLst xmlns:a="http://schemas.openxmlformats.org/drawingml/2006/main">
               <a:ext uri="{FF2B5EF4-FFF2-40B4-BE49-F238E27FC236}">
-                <a16:creationId xmlns:a16="http://schemas.microsoft.com/office/drawing/2014/main" id="{112E781C-6929-46EF-8633-8AB0B4C98788}"/>
+                <a16:creationId xmlns:a16="http://schemas.microsoft.com/office/drawing/2014/main" id="{74CE1E8B-1D33-46F1-AA05-33C071CA3947}"/>
               </a:ext>
             </a:extLst>
           </p:cNvPr>
@@ -8445,7 +10003,7 @@
           <p:cNvPr id="18" name="metric-1">
             <a:extLst xmlns:a="http://schemas.openxmlformats.org/drawingml/2006/main">
               <a:ext uri="{FF2B5EF4-FFF2-40B4-BE49-F238E27FC236}">
-                <a16:creationId xmlns:a16="http://schemas.microsoft.com/office/drawing/2014/main" id="{C89AAEFB-5EB6-4F37-9AD5-38167B511F77}"/>
+                <a16:creationId xmlns:a16="http://schemas.microsoft.com/office/drawing/2014/main" id="{15527CF8-A213-40DC-9428-D674C5965BE5}"/>
               </a:ext>
             </a:extLst>
           </p:cNvPr>
@@ -8480,7 +10038,7 @@
           <p:cNvPr id="19" name="metric-stat-1">
             <a:extLst xmlns:a="http://schemas.openxmlformats.org/drawingml/2006/main">
               <a:ext uri="{FF2B5EF4-FFF2-40B4-BE49-F238E27FC236}">
-                <a16:creationId xmlns:a16="http://schemas.microsoft.com/office/drawing/2014/main" id="{BB03C7E4-FEA1-494E-B30C-754083E14F3D}"/>
+                <a16:creationId xmlns:a16="http://schemas.microsoft.com/office/drawing/2014/main" id="{065EB09A-EA82-47CC-AE83-86569376F342}"/>
               </a:ext>
             </a:extLst>
           </p:cNvPr>
@@ -8538,7 +10096,7 @@
           <p:cNvPr id="20" name="metric-label-1">
             <a:extLst xmlns:a="http://schemas.openxmlformats.org/drawingml/2006/main">
               <a:ext uri="{FF2B5EF4-FFF2-40B4-BE49-F238E27FC236}">
-                <a16:creationId xmlns:a16="http://schemas.microsoft.com/office/drawing/2014/main" id="{FE52D35E-BD26-4770-BBCF-E58603C9E602}"/>
+                <a16:creationId xmlns:a16="http://schemas.microsoft.com/office/drawing/2014/main" id="{D388FE81-92C2-41B5-91F3-9D6D782B9EE1}"/>
               </a:ext>
             </a:extLst>
           </p:cNvPr>
@@ -8596,7 +10154,7 @@
           <p:cNvPr id="21" name="metric-2">
             <a:extLst xmlns:a="http://schemas.openxmlformats.org/drawingml/2006/main">
               <a:ext uri="{FF2B5EF4-FFF2-40B4-BE49-F238E27FC236}">
-                <a16:creationId xmlns:a16="http://schemas.microsoft.com/office/drawing/2014/main" id="{5E7B5B4B-FA71-44C8-ABFE-C5889A44D90A}"/>
+                <a16:creationId xmlns:a16="http://schemas.microsoft.com/office/drawing/2014/main" id="{402B7488-D890-466B-B9DD-EA0B0D6F6E8E}"/>
               </a:ext>
             </a:extLst>
           </p:cNvPr>
@@ -8631,7 +10189,7 @@
           <p:cNvPr id="22" name="metric-stat-2">
             <a:extLst xmlns:a="http://schemas.openxmlformats.org/drawingml/2006/main">
               <a:ext uri="{FF2B5EF4-FFF2-40B4-BE49-F238E27FC236}">
-                <a16:creationId xmlns:a16="http://schemas.microsoft.com/office/drawing/2014/main" id="{A22218DF-A77F-47D5-8B03-6FA432328AF6}"/>
+                <a16:creationId xmlns:a16="http://schemas.microsoft.com/office/drawing/2014/main" id="{2016E897-B4B6-4517-868B-D82F8E818508}"/>
               </a:ext>
             </a:extLst>
           </p:cNvPr>
@@ -8689,7 +10247,7 @@
           <p:cNvPr id="23" name="metric-label-2">
             <a:extLst xmlns:a="http://schemas.openxmlformats.org/drawingml/2006/main">
               <a:ext uri="{FF2B5EF4-FFF2-40B4-BE49-F238E27FC236}">
-                <a16:creationId xmlns:a16="http://schemas.microsoft.com/office/drawing/2014/main" id="{A91B6C3C-4F70-4A12-AE4A-8831EB0B72BA}"/>
+                <a16:creationId xmlns:a16="http://schemas.microsoft.com/office/drawing/2014/main" id="{E5E083F4-1643-4F24-94E0-64B23805668D}"/>
               </a:ext>
             </a:extLst>
           </p:cNvPr>
@@ -8747,7 +10305,7 @@
           <p:cNvPr id="24" name="metric-3">
             <a:extLst xmlns:a="http://schemas.openxmlformats.org/drawingml/2006/main">
               <a:ext uri="{FF2B5EF4-FFF2-40B4-BE49-F238E27FC236}">
-                <a16:creationId xmlns:a16="http://schemas.microsoft.com/office/drawing/2014/main" id="{3DAF303F-0496-4EDB-83B4-241118681A56}"/>
+                <a16:creationId xmlns:a16="http://schemas.microsoft.com/office/drawing/2014/main" id="{EAB2C6D7-C743-49DE-8D2B-72FED6A320B0}"/>
               </a:ext>
             </a:extLst>
           </p:cNvPr>
@@ -8782,7 +10340,7 @@
           <p:cNvPr id="25" name="metric-stat-3">
             <a:extLst xmlns:a="http://schemas.openxmlformats.org/drawingml/2006/main">
               <a:ext uri="{FF2B5EF4-FFF2-40B4-BE49-F238E27FC236}">
-                <a16:creationId xmlns:a16="http://schemas.microsoft.com/office/drawing/2014/main" id="{07F868A8-2EE0-4DC2-8868-E9F98F77D7BC}"/>
+                <a16:creationId xmlns:a16="http://schemas.microsoft.com/office/drawing/2014/main" id="{19299C51-7D82-4F79-B9EB-EFF8194885FE}"/>
               </a:ext>
             </a:extLst>
           </p:cNvPr>
@@ -8840,7 +10398,7 @@
           <p:cNvPr id="26" name="metric-label-3">
             <a:extLst xmlns:a="http://schemas.openxmlformats.org/drawingml/2006/main">
               <a:ext uri="{FF2B5EF4-FFF2-40B4-BE49-F238E27FC236}">
-                <a16:creationId xmlns:a16="http://schemas.microsoft.com/office/drawing/2014/main" id="{E7271278-40F9-49B0-89A5-BF6FC3D31FFB}"/>
+                <a16:creationId xmlns:a16="http://schemas.microsoft.com/office/drawing/2014/main" id="{B5470FA0-6398-4376-AD15-F8145E26990A}"/>
               </a:ext>
             </a:extLst>
           </p:cNvPr>
@@ -8898,7 +10456,7 @@
           <p:cNvPr id="27" name="metric-4">
             <a:extLst xmlns:a="http://schemas.openxmlformats.org/drawingml/2006/main">
               <a:ext uri="{FF2B5EF4-FFF2-40B4-BE49-F238E27FC236}">
-                <a16:creationId xmlns:a16="http://schemas.microsoft.com/office/drawing/2014/main" id="{6768F4B7-2CAE-4301-A0B7-756CCBC125A8}"/>
+                <a16:creationId xmlns:a16="http://schemas.microsoft.com/office/drawing/2014/main" id="{0F365740-83C1-4F50-A176-C8D0C21AB333}"/>
               </a:ext>
             </a:extLst>
           </p:cNvPr>
@@ -8933,7 +10491,7 @@
           <p:cNvPr id="28" name="metric-stat-4">
             <a:extLst xmlns:a="http://schemas.openxmlformats.org/drawingml/2006/main">
               <a:ext uri="{FF2B5EF4-FFF2-40B4-BE49-F238E27FC236}">
-                <a16:creationId xmlns:a16="http://schemas.microsoft.com/office/drawing/2014/main" id="{076D4718-E205-4432-A9B4-FD0D1104FE9F}"/>
+                <a16:creationId xmlns:a16="http://schemas.microsoft.com/office/drawing/2014/main" id="{5C68CC8A-32C6-4D40-842E-EB4DCD61C79E}"/>
               </a:ext>
             </a:extLst>
           </p:cNvPr>
@@ -8991,7 +10549,7 @@
           <p:cNvPr id="29" name="metric-label-4">
             <a:extLst xmlns:a="http://schemas.openxmlformats.org/drawingml/2006/main">
               <a:ext uri="{FF2B5EF4-FFF2-40B4-BE49-F238E27FC236}">
-                <a16:creationId xmlns:a16="http://schemas.microsoft.com/office/drawing/2014/main" id="{FFA44656-53AA-4CA2-AB87-805B77393A58}"/>
+                <a16:creationId xmlns:a16="http://schemas.microsoft.com/office/drawing/2014/main" id="{015AECFD-1D85-4877-847E-19122FC10426}"/>
               </a:ext>
             </a:extLst>
           </p:cNvPr>
@@ -9046,10 +10604,10 @@
       </p:sp>
       <p:sp>
         <p:nvSpPr>
-          <p:cNvPr id="30" name="auto-text-40">
-            <a:extLst xmlns:a="http://schemas.openxmlformats.org/drawingml/2006/main">
-              <a:ext uri="{FF2B5EF4-FFF2-40B4-BE49-F238E27FC236}">
-                <a16:creationId xmlns:a16="http://schemas.microsoft.com/office/drawing/2014/main" id="{79CA06BA-7C02-4E9C-87A2-5417F936A99B}"/>
+          <p:cNvPr id="30" name="auto-text-46">
+            <a:extLst xmlns:a="http://schemas.openxmlformats.org/drawingml/2006/main">
+              <a:ext uri="{FF2B5EF4-FFF2-40B4-BE49-F238E27FC236}">
+                <a16:creationId xmlns:a16="http://schemas.microsoft.com/office/drawing/2014/main" id="{03198D85-53B3-4AFC-8878-2EAE6865408F}"/>
               </a:ext>
             </a:extLst>
           </p:cNvPr>
@@ -9107,7 +10665,7 @@
           <p:cNvPr id="31" name="approval-band">
             <a:extLst xmlns:a="http://schemas.openxmlformats.org/drawingml/2006/main">
               <a:ext uri="{FF2B5EF4-FFF2-40B4-BE49-F238E27FC236}">
-                <a16:creationId xmlns:a16="http://schemas.microsoft.com/office/drawing/2014/main" id="{0CD3DE9C-3524-4840-B763-7D83CFBCEC91}"/>
+                <a16:creationId xmlns:a16="http://schemas.microsoft.com/office/drawing/2014/main" id="{A1E7BC61-408D-4D58-8FB5-C7DF8A8FD54A}"/>
               </a:ext>
             </a:extLst>
           </p:cNvPr>
@@ -9139,10 +10697,10 @@
       </p:sp>
       <p:sp>
         <p:nvSpPr>
-          <p:cNvPr id="32" name="auto-text-41">
-            <a:extLst xmlns:a="http://schemas.openxmlformats.org/drawingml/2006/main">
-              <a:ext uri="{FF2B5EF4-FFF2-40B4-BE49-F238E27FC236}">
-                <a16:creationId xmlns:a16="http://schemas.microsoft.com/office/drawing/2014/main" id="{EAC573A5-3799-41CE-A32B-350982EF4E2E}"/>
+          <p:cNvPr id="32" name="auto-text-47">
+            <a:extLst xmlns:a="http://schemas.openxmlformats.org/drawingml/2006/main">
+              <a:ext uri="{FF2B5EF4-FFF2-40B4-BE49-F238E27FC236}">
+                <a16:creationId xmlns:a16="http://schemas.microsoft.com/office/drawing/2014/main" id="{CE5E424F-CCBB-4374-8B34-CBCE38E220FD}"/>
               </a:ext>
             </a:extLst>
           </p:cNvPr>
@@ -9198,7 +10756,7 @@
     </p:spTree>
     <p:extLst>
       <p:ext uri="{BB962C8B-B14F-4D97-AF65-F5344CB8AC3E}">
-        <p14:creationId xmlns:p14="http://schemas.microsoft.com/office/powerpoint/2010/main" val="49206390"/>
+        <p14:creationId xmlns:p14="http://schemas.microsoft.com/office/powerpoint/2010/main" val="1598991922"/>
       </p:ext>
     </p:extLst>
   </p:cSld>

--- a/场景与价值_汇报模块.pptx
+++ b/场景与价值_汇报模块.pptx
@@ -2,19 +2,19 @@
 <file path=ppt/presentation.xml><?xml version="1.0" encoding="utf-8"?>
 <p:presentation xmlns:p="http://schemas.openxmlformats.org/presentationml/2006/main">
   <p:sldMasterIdLst>
-    <p:sldMasterId xmlns:r="http://schemas.openxmlformats.org/officeDocument/2006/relationships" id="2147483648" r:id="Rae22850f8f9145d6"/>
+    <p:sldMasterId xmlns:r="http://schemas.openxmlformats.org/officeDocument/2006/relationships" id="2147483648" r:id="Rca4bbb6d3b0d4d13"/>
   </p:sldMasterIdLst>
   <p:notesMasterIdLst>
-    <p:notesMasterId xmlns:r="http://schemas.openxmlformats.org/officeDocument/2006/relationships" r:id="R70cb84ca07a94988"/>
+    <p:notesMasterId xmlns:r="http://schemas.openxmlformats.org/officeDocument/2006/relationships" r:id="R9f5ef66de9614c6e"/>
   </p:notesMasterIdLst>
   <p:sldIdLst>
-    <p:sldId xmlns:r="http://schemas.openxmlformats.org/officeDocument/2006/relationships" id="256" r:id="R3a2ab7bf3567457a"/>
-    <p:sldId xmlns:r="http://schemas.openxmlformats.org/officeDocument/2006/relationships" id="257" r:id="R86e26dd244ef446f"/>
-    <p:sldId xmlns:r="http://schemas.openxmlformats.org/officeDocument/2006/relationships" id="258" r:id="R5160bdbb7b8147fe"/>
-    <p:sldId xmlns:r="http://schemas.openxmlformats.org/officeDocument/2006/relationships" id="259" r:id="R0d0dae7b3a9c424f"/>
-    <p:sldId xmlns:r="http://schemas.openxmlformats.org/officeDocument/2006/relationships" id="260" r:id="R3bb0db78f6db4156"/>
-    <p:sldId xmlns:r="http://schemas.openxmlformats.org/officeDocument/2006/relationships" id="261" r:id="R45b2570a35b94e72"/>
-    <p:sldId xmlns:r="http://schemas.openxmlformats.org/officeDocument/2006/relationships" id="262" r:id="R33d08e5738b14f9e"/>
+    <p:sldId xmlns:r="http://schemas.openxmlformats.org/officeDocument/2006/relationships" id="256" r:id="R7ed6104f1d0246fc"/>
+    <p:sldId xmlns:r="http://schemas.openxmlformats.org/officeDocument/2006/relationships" id="257" r:id="R98e6e42e78c44054"/>
+    <p:sldId xmlns:r="http://schemas.openxmlformats.org/officeDocument/2006/relationships" id="258" r:id="R13ac2705235d4e89"/>
+    <p:sldId xmlns:r="http://schemas.openxmlformats.org/officeDocument/2006/relationships" id="259" r:id="R025a00fe80e94e3b"/>
+    <p:sldId xmlns:r="http://schemas.openxmlformats.org/officeDocument/2006/relationships" id="260" r:id="R5789e67e7b66450d"/>
+    <p:sldId xmlns:r="http://schemas.openxmlformats.org/officeDocument/2006/relationships" id="261" r:id="Rff49a18b0a1a47da"/>
+    <p:sldId xmlns:r="http://schemas.openxmlformats.org/officeDocument/2006/relationships" id="262" r:id="R38965814f7024885"/>
   </p:sldIdLst>
   <p:sldSz cx="12192000" cy="6858000"/>
   <p:notesSz cx="6858000" cy="9144000"/>
@@ -588,7 +588,7 @@
           <a:lstStyle xmlns:a="http://schemas.openxmlformats.org/drawingml/2006/main"/>
           <a:p xmlns:a="http://schemas.openxmlformats.org/drawingml/2006/main">
             <a:r>
-              <a:t>外部趋势不是用一个通用VLM替代所有人工，而是把质量评价拆成多个任务维度，再用人类偏好检验Judge，并让评价进入数据筛选和模型训练。左图展示MJ-Bench的多维评价体系，右图展示CVPR 2026的文本生图、图像编辑、图文交错和多模态推理任务。</a:t>
+              <a:t>这一页将学术趋势重新对齐SOW。第一条路线是后验校准：已有评分器会有偏差，但可以利用少量验证样本修正分数、权重、阈值与置信度。第二条路线是邻域共识：对于细粒度或长尾偏好，不依赖一次Prompt，而是围绕目标偏好生成相邻配置，再聚合或保守选择。第三条路线是证据核验：对对象、属性和空间关系等结论，回到结构化视觉证据或专用工具验证。VLM Judge位于这些方法的底层，不是项目的全部。</a:t>
             </a:r>
           </a:p>
           <a:p xmlns:a="http://schemas.openxmlformats.org/drawingml/2006/main">
@@ -603,12 +603,27 @@
           </a:p>
           <a:p xmlns:a="http://schemas.openxmlformats.org/drawingml/2006/main">
             <a:r>
-              <a:t>- MJ-Bench, NeurIPS 2025: https://proceedings.neurips.cc/paper_files/paper/2025/hash/59d2eaa5842fa641ff9b8e4c7ff0f6ee-Abstract-Datasets_and_Benchmarks_Track.html</a:t>
-            </a:r>
-          </a:p>
-          <a:p xmlns:a="http://schemas.openxmlformats.org/drawingml/2006/main">
-            <a:r>
-              <a:t>- Multimodal RewardBench 2, CVPR 2026: https://openaccess.thecvf.com/content/CVPR2026/html/Hu_Multimodal_RewardBench_2_Evaluating_Omni_Reward_Models_for_Interleaved_Text_CVPR_2026_paper.html</a:t>
+              <a:t>- Improving Data Efficiency via Curating LLM-Driven Rating Systems, ICLR 2025: https://proceedings.iclr.cc/paper_files/paper/2025/hash/faa6144674bce872365874c576b4f56f-Abstract-Conference.html</a:t>
+            </a:r>
+          </a:p>
+          <a:p xmlns:a="http://schemas.openxmlformats.org/drawingml/2006/main">
+            <a:r>
+              <a:t>- Robust Preference Alignment via Directional Neighborhood Consensus, ICLR 2026: https://iclr.cc/virtual/2026/poster/10007833</a:t>
+            </a:r>
+          </a:p>
+          <a:p xmlns:a="http://schemas.openxmlformats.org/drawingml/2006/main">
+            <a:r>
+              <a:t>- Trust but Verify: Programmatic VLM Evaluation in the Wild, ICCV 2025: https://openaccess.thecvf.com/content/ICCV2025/html/Prabhu_Trust_but_Verify_Programmatic_VLM_Evaluation_in_the_Wild_ICCV_2025_paper.html</a:t>
+            </a:r>
+          </a:p>
+          <a:p xmlns:a="http://schemas.openxmlformats.org/drawingml/2006/main">
+            <a:r>
+              <a:t>- Do Humans and Machines Have the Same Eyes?, AAAI 2025: https://arxiv.org/abs/2304.08733</a:t>
+            </a:r>
+          </a:p>
+          <a:p xmlns:a="http://schemas.openxmlformats.org/drawingml/2006/main">
+            <a:r>
+              <a:t>- Calibrating MLLM-as-a-Judge via Multimodal Bayesian Prompt Ensembles, ICCV 2025: https://arxiv.org/abs/2509.08777</a:t>
             </a:r>
           </a:p>
         </p:txBody>
@@ -778,27 +793,7 @@
           <a:lstStyle xmlns:a="http://schemas.openxmlformats.org/drawingml/2006/main"/>
           <a:p xmlns:a="http://schemas.openxmlformats.org/drawingml/2006/main">
             <a:r>
-              <a:t>最新研究给出了两个直接证据。第一，CVPR 2026显示，GPT-5、Gemini 2.5 Pro等Judge在多模态任务上的准确率大约为66%到75%，而人类专家超过90%，说明通用Judge不能直接代表业务标准。第二，ICCV 2025表明，可以利用少量验证样本对多个Prompt进行视觉相关的加权，从而改善判断和置信度校准。这正对应本项目的后验校准、邻域共识和人工复核分流。</a:t>
-            </a:r>
-          </a:p>
-          <a:p xmlns:a="http://schemas.openxmlformats.org/drawingml/2006/main">
-            <a:r>
-              <a:t/>
-            </a:r>
-          </a:p>
-          <a:p xmlns:a="http://schemas.openxmlformats.org/drawingml/2006/main">
-            <a:r>
-              <a:t>[Sources]</a:t>
-            </a:r>
-          </a:p>
-          <a:p xmlns:a="http://schemas.openxmlformats.org/drawingml/2006/main">
-            <a:r>
-              <a:t>- Multimodal RewardBench 2, CVPR 2026: https://openaccess.thecvf.com/content/CVPR2026/html/Hu_Multimodal_RewardBench_2_Evaluating_Omni_Reward_Models_for_Interleaved_Text_CVPR_2026_paper.html</a:t>
-            </a:r>
-          </a:p>
-          <a:p xmlns:a="http://schemas.openxmlformats.org/drawingml/2006/main">
-            <a:r>
-              <a:t>- Calibrating MLLM-as-a-Judge via Multimodal Bayesian Prompt Ensembles, ICCV 2025: https://arxiv.org/abs/2509.08777</a:t>
+              <a:t>这页需要明确纠正一个可能的误解：高校不是来交付一个VLM Judge。VLM、CLIP、OCR、视觉定位、传统指标和人工反馈都可以成为底层输入。合作项目真正交付的是三层上层算法：第一层把业务偏好转换成可优化的评分标准并做后验校准；第二层通过相邻配置和共识处理单一Prompt的不稳定；第三层用专用工具核验证据，并通过下游实验验证筛选是否有效。因此项目价值在于形成可迁移的评估机制，而不是绑定某个模型。</a:t>
             </a:r>
           </a:p>
         </p:txBody>
@@ -1006,7 +1001,7 @@
   </p:cSld>
   <p:clrMap bg1="lt1" tx1="dk1" bg2="lt2" tx2="dk2" accent1="accent1" accent2="accent2" accent3="accent3" accent4="accent4" accent5="accent5" accent6="accent6" hlink="hlink" folHlink="folHlink"/>
   <p:sldLayoutIdLst>
-    <p:sldLayoutId xmlns:r="http://schemas.openxmlformats.org/officeDocument/2006/relationships" id="2147483649" r:id="R910baa4a00d74fe5"/>
+    <p:sldLayoutId xmlns:r="http://schemas.openxmlformats.org/officeDocument/2006/relationships" id="2147483649" r:id="R1f9dc170802d4c87"/>
   </p:sldLayoutIdLst>
   <p:txStyles>
     <p:titleStyle>
@@ -1557,7 +1552,7 @@
           <p:cNvPr id="31" name="accent-1">
             <a:extLst xmlns:a="http://schemas.openxmlformats.org/drawingml/2006/main">
               <a:ext uri="{FF2B5EF4-FFF2-40B4-BE49-F238E27FC236}">
-                <a16:creationId xmlns:a16="http://schemas.microsoft.com/office/drawing/2014/main" id="{959C2869-05E3-41F6-9FAC-21B7EAF299A7}"/>
+                <a16:creationId xmlns:a16="http://schemas.microsoft.com/office/drawing/2014/main" id="{72E3BF9C-0602-4691-8FD2-182368DDA024}"/>
               </a:ext>
             </a:extLst>
           </p:cNvPr>
@@ -1592,7 +1587,7 @@
           <p:cNvPr id="2" name="title-1">
             <a:extLst xmlns:a="http://schemas.openxmlformats.org/drawingml/2006/main">
               <a:ext uri="{FF2B5EF4-FFF2-40B4-BE49-F238E27FC236}">
-                <a16:creationId xmlns:a16="http://schemas.microsoft.com/office/drawing/2014/main" id="{EA9003AE-CD4E-4A7F-97C4-DAB64891FCE8}"/>
+                <a16:creationId xmlns:a16="http://schemas.microsoft.com/office/drawing/2014/main" id="{5F9E27E2-3EF1-4D08-8F61-FF63E9751DC8}"/>
               </a:ext>
             </a:extLst>
           </p:cNvPr>
@@ -1650,7 +1645,7 @@
           <p:cNvPr id="3" name="page-1">
             <a:extLst xmlns:a="http://schemas.openxmlformats.org/drawingml/2006/main">
               <a:ext uri="{FF2B5EF4-FFF2-40B4-BE49-F238E27FC236}">
-                <a16:creationId xmlns:a16="http://schemas.microsoft.com/office/drawing/2014/main" id="{89AA79CC-21A2-44F7-B39D-86A5000726F4}"/>
+                <a16:creationId xmlns:a16="http://schemas.microsoft.com/office/drawing/2014/main" id="{27D091C1-C150-495C-97A5-0C92804B9E8A}"/>
               </a:ext>
             </a:extLst>
           </p:cNvPr>
@@ -1708,7 +1703,7 @@
           <p:cNvPr id="4" name="auto-text-1">
             <a:extLst xmlns:a="http://schemas.openxmlformats.org/drawingml/2006/main">
               <a:ext uri="{FF2B5EF4-FFF2-40B4-BE49-F238E27FC236}">
-                <a16:creationId xmlns:a16="http://schemas.microsoft.com/office/drawing/2014/main" id="{7FF7EDA9-898E-43A9-BB65-950BC0F4A556}"/>
+                <a16:creationId xmlns:a16="http://schemas.microsoft.com/office/drawing/2014/main" id="{1568F0E7-39D5-4C1F-9DC5-7C2858D158F0}"/>
               </a:ext>
             </a:extLst>
           </p:cNvPr>
@@ -1766,7 +1761,7 @@
           <p:cNvPr id="5" name="auto-text-2">
             <a:extLst xmlns:a="http://schemas.openxmlformats.org/drawingml/2006/main">
               <a:ext uri="{FF2B5EF4-FFF2-40B4-BE49-F238E27FC236}">
-                <a16:creationId xmlns:a16="http://schemas.microsoft.com/office/drawing/2014/main" id="{E0EC2284-0A98-4BCC-BF20-159A95EA4608}"/>
+                <a16:creationId xmlns:a16="http://schemas.microsoft.com/office/drawing/2014/main" id="{5FF97A5E-FB93-4C3D-BDF3-E17840E62594}"/>
               </a:ext>
             </a:extLst>
           </p:cNvPr>
@@ -1824,7 +1819,7 @@
           <p:cNvPr id="6" name="auto-text-3">
             <a:extLst xmlns:a="http://schemas.openxmlformats.org/drawingml/2006/main">
               <a:ext uri="{FF2B5EF4-FFF2-40B4-BE49-F238E27FC236}">
-                <a16:creationId xmlns:a16="http://schemas.microsoft.com/office/drawing/2014/main" id="{DA89AF99-51A4-4172-822B-78AF19327D9D}"/>
+                <a16:creationId xmlns:a16="http://schemas.microsoft.com/office/drawing/2014/main" id="{5A3E2A82-6691-489F-A524-F7C328A39A57}"/>
               </a:ext>
             </a:extLst>
           </p:cNvPr>
@@ -1882,7 +1877,7 @@
           <p:cNvPr id="7" name="edit-media-surface">
             <a:extLst xmlns:a="http://schemas.openxmlformats.org/drawingml/2006/main">
               <a:ext uri="{FF2B5EF4-FFF2-40B4-BE49-F238E27FC236}">
-                <a16:creationId xmlns:a16="http://schemas.microsoft.com/office/drawing/2014/main" id="{77079F21-0D82-446B-A94A-1968826B76F9}"/>
+                <a16:creationId xmlns:a16="http://schemas.microsoft.com/office/drawing/2014/main" id="{CEC6FEBC-B26A-46EF-9E6A-1E332B3A84A9}"/>
               </a:ext>
             </a:extLst>
           </p:cNvPr>
@@ -1917,7 +1912,7 @@
           <p:cNvPr id="8" name="edit-source-frame">
             <a:extLst xmlns:a="http://schemas.openxmlformats.org/drawingml/2006/main">
               <a:ext uri="{FF2B5EF4-FFF2-40B4-BE49-F238E27FC236}">
-                <a16:creationId xmlns:a16="http://schemas.microsoft.com/office/drawing/2014/main" id="{45351CDF-514A-43A0-8EAB-618623CE590C}"/>
+                <a16:creationId xmlns:a16="http://schemas.microsoft.com/office/drawing/2014/main" id="{C156C8DE-F52E-4DAD-A601-BE03CA11A81E}"/>
               </a:ext>
             </a:extLst>
           </p:cNvPr>
@@ -1952,7 +1947,7 @@
           <p:cNvPr id="9" name="edit-source-label">
             <a:extLst xmlns:a="http://schemas.openxmlformats.org/drawingml/2006/main">
               <a:ext uri="{FF2B5EF4-FFF2-40B4-BE49-F238E27FC236}">
-                <a16:creationId xmlns:a16="http://schemas.microsoft.com/office/drawing/2014/main" id="{0C126680-D02F-4A43-9E3F-DF1CF041CB4C}"/>
+                <a16:creationId xmlns:a16="http://schemas.microsoft.com/office/drawing/2014/main" id="{24DC80AE-AF94-4AA5-86B5-7A18558AB025}"/>
               </a:ext>
             </a:extLst>
           </p:cNvPr>
@@ -2010,7 +2005,7 @@
           <p:cNvPr id="10" name="edit-source-sub">
             <a:extLst xmlns:a="http://schemas.openxmlformats.org/drawingml/2006/main">
               <a:ext uri="{FF2B5EF4-FFF2-40B4-BE49-F238E27FC236}">
-                <a16:creationId xmlns:a16="http://schemas.microsoft.com/office/drawing/2014/main" id="{8BA4DC85-AA51-4DD4-B31C-98CFCF152437}"/>
+                <a16:creationId xmlns:a16="http://schemas.microsoft.com/office/drawing/2014/main" id="{75A36E67-CE3E-496C-8441-D417A8F9B9BE}"/>
               </a:ext>
             </a:extLst>
           </p:cNvPr>
@@ -2068,7 +2063,7 @@
           <p:cNvPr id="11" name="edit-reference-frame">
             <a:extLst xmlns:a="http://schemas.openxmlformats.org/drawingml/2006/main">
               <a:ext uri="{FF2B5EF4-FFF2-40B4-BE49-F238E27FC236}">
-                <a16:creationId xmlns:a16="http://schemas.microsoft.com/office/drawing/2014/main" id="{EF6F2B81-B4FF-4410-87C6-15A6B13BF364}"/>
+                <a16:creationId xmlns:a16="http://schemas.microsoft.com/office/drawing/2014/main" id="{992CFEBC-3C86-49EE-8BB6-18DB7E370D78}"/>
               </a:ext>
             </a:extLst>
           </p:cNvPr>
@@ -2103,7 +2098,7 @@
           <p:cNvPr id="12" name="edit-reference-label">
             <a:extLst xmlns:a="http://schemas.openxmlformats.org/drawingml/2006/main">
               <a:ext uri="{FF2B5EF4-FFF2-40B4-BE49-F238E27FC236}">
-                <a16:creationId xmlns:a16="http://schemas.microsoft.com/office/drawing/2014/main" id="{3650ED2B-56C5-4C4F-A9A5-ABEAE08557CE}"/>
+                <a16:creationId xmlns:a16="http://schemas.microsoft.com/office/drawing/2014/main" id="{280C28A8-48F8-4556-9377-401BA0553858}"/>
               </a:ext>
             </a:extLst>
           </p:cNvPr>
@@ -2161,7 +2156,7 @@
           <p:cNvPr id="13" name="edit-reference-sub">
             <a:extLst xmlns:a="http://schemas.openxmlformats.org/drawingml/2006/main">
               <a:ext uri="{FF2B5EF4-FFF2-40B4-BE49-F238E27FC236}">
-                <a16:creationId xmlns:a16="http://schemas.microsoft.com/office/drawing/2014/main" id="{7DDCACC9-44BC-472B-A023-F0EDD87ECF61}"/>
+                <a16:creationId xmlns:a16="http://schemas.microsoft.com/office/drawing/2014/main" id="{ADA27781-51C3-4E60-8E03-6A4435C9E883}"/>
               </a:ext>
             </a:extLst>
           </p:cNvPr>
@@ -2219,7 +2214,7 @@
           <p:cNvPr id="14" name="edit-output-frame">
             <a:extLst xmlns:a="http://schemas.openxmlformats.org/drawingml/2006/main">
               <a:ext uri="{FF2B5EF4-FFF2-40B4-BE49-F238E27FC236}">
-                <a16:creationId xmlns:a16="http://schemas.microsoft.com/office/drawing/2014/main" id="{BD8FF3EE-26D2-4EC4-84DE-99E636E7B2C1}"/>
+                <a16:creationId xmlns:a16="http://schemas.microsoft.com/office/drawing/2014/main" id="{6CB075E8-F044-410C-A26C-1C78D41BD3C1}"/>
               </a:ext>
             </a:extLst>
           </p:cNvPr>
@@ -2254,7 +2249,7 @@
           <p:cNvPr id="15" name="edit-output-label">
             <a:extLst xmlns:a="http://schemas.openxmlformats.org/drawingml/2006/main">
               <a:ext uri="{FF2B5EF4-FFF2-40B4-BE49-F238E27FC236}">
-                <a16:creationId xmlns:a16="http://schemas.microsoft.com/office/drawing/2014/main" id="{BE9D750A-3C51-4085-BD0E-E85E50DA9380}"/>
+                <a16:creationId xmlns:a16="http://schemas.microsoft.com/office/drawing/2014/main" id="{92EFED62-F7D0-44BE-8F04-5EEC7BB95933}"/>
               </a:ext>
             </a:extLst>
           </p:cNvPr>
@@ -2312,7 +2307,7 @@
           <p:cNvPr id="16" name="edit-output-sub">
             <a:extLst xmlns:a="http://schemas.openxmlformats.org/drawingml/2006/main">
               <a:ext uri="{FF2B5EF4-FFF2-40B4-BE49-F238E27FC236}">
-                <a16:creationId xmlns:a16="http://schemas.microsoft.com/office/drawing/2014/main" id="{0295D4FF-8DAA-4DEB-9621-7E0BE15F56B8}"/>
+                <a16:creationId xmlns:a16="http://schemas.microsoft.com/office/drawing/2014/main" id="{1668C043-F927-4CA6-BAE7-5358E1522D78}"/>
               </a:ext>
             </a:extLst>
           </p:cNvPr>
@@ -2370,7 +2365,7 @@
           <p:cNvPr id="17" name="auto-text-4">
             <a:extLst xmlns:a="http://schemas.openxmlformats.org/drawingml/2006/main">
               <a:ext uri="{FF2B5EF4-FFF2-40B4-BE49-F238E27FC236}">
-                <a16:creationId xmlns:a16="http://schemas.microsoft.com/office/drawing/2014/main" id="{FA7F5FE8-294A-429B-A31B-CE464A84FBE1}"/>
+                <a16:creationId xmlns:a16="http://schemas.microsoft.com/office/drawing/2014/main" id="{F98B02C8-3B01-47A1-A164-BDB9DF270868}"/>
               </a:ext>
             </a:extLst>
           </p:cNvPr>
@@ -2428,7 +2423,7 @@
           <p:cNvPr id="18" name="gallery-media-surface">
             <a:extLst xmlns:a="http://schemas.openxmlformats.org/drawingml/2006/main">
               <a:ext uri="{FF2B5EF4-FFF2-40B4-BE49-F238E27FC236}">
-                <a16:creationId xmlns:a16="http://schemas.microsoft.com/office/drawing/2014/main" id="{8E3EEF6C-0E02-46D1-984D-0742F273D633}"/>
+                <a16:creationId xmlns:a16="http://schemas.microsoft.com/office/drawing/2014/main" id="{7C0D55E9-2652-4709-B439-FF97FAE11599}"/>
               </a:ext>
             </a:extLst>
           </p:cNvPr>
@@ -2463,7 +2458,7 @@
           <p:cNvPr id="19" name="gallery-good-frame">
             <a:extLst xmlns:a="http://schemas.openxmlformats.org/drawingml/2006/main">
               <a:ext uri="{FF2B5EF4-FFF2-40B4-BE49-F238E27FC236}">
-                <a16:creationId xmlns:a16="http://schemas.microsoft.com/office/drawing/2014/main" id="{71A4EC0E-6CCD-4C70-9AEA-E1E3AC661536}"/>
+                <a16:creationId xmlns:a16="http://schemas.microsoft.com/office/drawing/2014/main" id="{7C97C144-AD7C-479D-ABF0-14A1053E4A71}"/>
               </a:ext>
             </a:extLst>
           </p:cNvPr>
@@ -2498,7 +2493,7 @@
           <p:cNvPr id="20" name="gallery-good-label">
             <a:extLst xmlns:a="http://schemas.openxmlformats.org/drawingml/2006/main">
               <a:ext uri="{FF2B5EF4-FFF2-40B4-BE49-F238E27FC236}">
-                <a16:creationId xmlns:a16="http://schemas.microsoft.com/office/drawing/2014/main" id="{C6356F11-2DF9-462D-B822-19BB8C1F754D}"/>
+                <a16:creationId xmlns:a16="http://schemas.microsoft.com/office/drawing/2014/main" id="{3211E937-671B-4C5B-B394-7DC3F32F8AD0}"/>
               </a:ext>
             </a:extLst>
           </p:cNvPr>
@@ -2556,7 +2551,7 @@
           <p:cNvPr id="21" name="gallery-good-sub">
             <a:extLst xmlns:a="http://schemas.openxmlformats.org/drawingml/2006/main">
               <a:ext uri="{FF2B5EF4-FFF2-40B4-BE49-F238E27FC236}">
-                <a16:creationId xmlns:a16="http://schemas.microsoft.com/office/drawing/2014/main" id="{735B019B-C187-4F24-97B2-BCF2D5EBAD4E}"/>
+                <a16:creationId xmlns:a16="http://schemas.microsoft.com/office/drawing/2014/main" id="{7C045741-4833-413E-8038-39D17B96442D}"/>
               </a:ext>
             </a:extLst>
           </p:cNvPr>
@@ -2614,7 +2609,7 @@
           <p:cNvPr id="22" name="gallery-bad-frame">
             <a:extLst xmlns:a="http://schemas.openxmlformats.org/drawingml/2006/main">
               <a:ext uri="{FF2B5EF4-FFF2-40B4-BE49-F238E27FC236}">
-                <a16:creationId xmlns:a16="http://schemas.microsoft.com/office/drawing/2014/main" id="{1412DE2A-C823-4B8A-BDB4-FCCAADD19757}"/>
+                <a16:creationId xmlns:a16="http://schemas.microsoft.com/office/drawing/2014/main" id="{FD304B9D-CEE5-4CEF-9759-E50EFDFC2FA1}"/>
               </a:ext>
             </a:extLst>
           </p:cNvPr>
@@ -2649,7 +2644,7 @@
           <p:cNvPr id="23" name="gallery-bad-label">
             <a:extLst xmlns:a="http://schemas.openxmlformats.org/drawingml/2006/main">
               <a:ext uri="{FF2B5EF4-FFF2-40B4-BE49-F238E27FC236}">
-                <a16:creationId xmlns:a16="http://schemas.microsoft.com/office/drawing/2014/main" id="{4F90E44A-902D-4D7B-B5E1-FC35603A5B86}"/>
+                <a16:creationId xmlns:a16="http://schemas.microsoft.com/office/drawing/2014/main" id="{31F1B3AC-5BBF-4374-9B4F-8602A3B81479}"/>
               </a:ext>
             </a:extLst>
           </p:cNvPr>
@@ -2707,7 +2702,7 @@
           <p:cNvPr id="24" name="gallery-bad-sub">
             <a:extLst xmlns:a="http://schemas.openxmlformats.org/drawingml/2006/main">
               <a:ext uri="{FF2B5EF4-FFF2-40B4-BE49-F238E27FC236}">
-                <a16:creationId xmlns:a16="http://schemas.microsoft.com/office/drawing/2014/main" id="{EECE856F-DA62-4274-838A-4BF61C75D5A4}"/>
+                <a16:creationId xmlns:a16="http://schemas.microsoft.com/office/drawing/2014/main" id="{D0A9247D-465D-4E35-9691-DE563D63B49D}"/>
               </a:ext>
             </a:extLst>
           </p:cNvPr>
@@ -2765,7 +2760,7 @@
           <p:cNvPr id="25" name="auto-text-5">
             <a:extLst xmlns:a="http://schemas.openxmlformats.org/drawingml/2006/main">
               <a:ext uri="{FF2B5EF4-FFF2-40B4-BE49-F238E27FC236}">
-                <a16:creationId xmlns:a16="http://schemas.microsoft.com/office/drawing/2014/main" id="{87EEB1D1-CFB4-41E2-8450-2DA23FA619F0}"/>
+                <a16:creationId xmlns:a16="http://schemas.microsoft.com/office/drawing/2014/main" id="{4023FEFE-BE79-49FC-B9F2-035B77D8EEDF}"/>
               </a:ext>
             </a:extLst>
           </p:cNvPr>
@@ -2823,7 +2818,7 @@
           <p:cNvPr id="26" name="auto-text-6">
             <a:extLst xmlns:a="http://schemas.openxmlformats.org/drawingml/2006/main">
               <a:ext uri="{FF2B5EF4-FFF2-40B4-BE49-F238E27FC236}">
-                <a16:creationId xmlns:a16="http://schemas.microsoft.com/office/drawing/2014/main" id="{3CAB2C8E-C1C8-471F-A978-A617F2616317}"/>
+                <a16:creationId xmlns:a16="http://schemas.microsoft.com/office/drawing/2014/main" id="{E347040C-30A3-41B1-949C-6AF6FFFB3139}"/>
               </a:ext>
             </a:extLst>
           </p:cNvPr>
@@ -2881,7 +2876,7 @@
           <p:cNvPr id="27" name="auto-text-7">
             <a:extLst xmlns:a="http://schemas.openxmlformats.org/drawingml/2006/main">
               <a:ext uri="{FF2B5EF4-FFF2-40B4-BE49-F238E27FC236}">
-                <a16:creationId xmlns:a16="http://schemas.microsoft.com/office/drawing/2014/main" id="{42B5CF26-5BF6-4D8B-8D6B-1A30592E52DA}"/>
+                <a16:creationId xmlns:a16="http://schemas.microsoft.com/office/drawing/2014/main" id="{7ACB6283-CA33-44BF-A24B-7AE3F1320500}"/>
               </a:ext>
             </a:extLst>
           </p:cNvPr>
@@ -2939,7 +2934,7 @@
           <p:cNvPr id="28" name="slide1-conclusion">
             <a:extLst xmlns:a="http://schemas.openxmlformats.org/drawingml/2006/main">
               <a:ext uri="{FF2B5EF4-FFF2-40B4-BE49-F238E27FC236}">
-                <a16:creationId xmlns:a16="http://schemas.microsoft.com/office/drawing/2014/main" id="{1416774B-F1B3-4658-9453-2F64C2DAB7FE}"/>
+                <a16:creationId xmlns:a16="http://schemas.microsoft.com/office/drawing/2014/main" id="{D8C342B3-3B40-420F-A237-06FBEDCA2DB8}"/>
               </a:ext>
             </a:extLst>
           </p:cNvPr>
@@ -2974,7 +2969,7 @@
           <p:cNvPr id="29" name="auto-text-8">
             <a:extLst xmlns:a="http://schemas.openxmlformats.org/drawingml/2006/main">
               <a:ext uri="{FF2B5EF4-FFF2-40B4-BE49-F238E27FC236}">
-                <a16:creationId xmlns:a16="http://schemas.microsoft.com/office/drawing/2014/main" id="{7B67DE97-F897-43CE-B63D-793E8B929DBB}"/>
+                <a16:creationId xmlns:a16="http://schemas.microsoft.com/office/drawing/2014/main" id="{328EF635-6AFF-496C-A1E9-EBF63EBE3D49}"/>
               </a:ext>
             </a:extLst>
           </p:cNvPr>
@@ -3032,7 +3027,7 @@
           <p:cNvPr id="30" name="auto-text-9">
             <a:extLst xmlns:a="http://schemas.openxmlformats.org/drawingml/2006/main">
               <a:ext uri="{FF2B5EF4-FFF2-40B4-BE49-F238E27FC236}">
-                <a16:creationId xmlns:a16="http://schemas.microsoft.com/office/drawing/2014/main" id="{C44A1EAD-E328-4077-AF15-70507D51F7E1}"/>
+                <a16:creationId xmlns:a16="http://schemas.microsoft.com/office/drawing/2014/main" id="{4EA2A08C-9D93-4465-95CC-CA3CCC20E507}"/>
               </a:ext>
             </a:extLst>
           </p:cNvPr>
@@ -3088,7 +3083,7 @@
     </p:spTree>
     <p:extLst>
       <p:ext uri="{BB962C8B-B14F-4D97-AF65-F5344CB8AC3E}">
-        <p14:creationId xmlns:p14="http://schemas.microsoft.com/office/powerpoint/2010/main" val="252651356"/>
+        <p14:creationId xmlns:p14="http://schemas.microsoft.com/office/powerpoint/2010/main" val="168785140"/>
       </p:ext>
     </p:extLst>
   </p:cSld>
@@ -3119,7 +3114,7 @@
           <p:cNvPr id="30" name="accent-2">
             <a:extLst xmlns:a="http://schemas.openxmlformats.org/drawingml/2006/main">
               <a:ext uri="{FF2B5EF4-FFF2-40B4-BE49-F238E27FC236}">
-                <a16:creationId xmlns:a16="http://schemas.microsoft.com/office/drawing/2014/main" id="{247A374D-AA8F-464A-88F0-4A156E0973C1}"/>
+                <a16:creationId xmlns:a16="http://schemas.microsoft.com/office/drawing/2014/main" id="{B23409F7-4715-439C-AD04-B4F2E81F6D55}"/>
               </a:ext>
             </a:extLst>
           </p:cNvPr>
@@ -3154,7 +3149,7 @@
           <p:cNvPr id="2" name="title-2">
             <a:extLst xmlns:a="http://schemas.openxmlformats.org/drawingml/2006/main">
               <a:ext uri="{FF2B5EF4-FFF2-40B4-BE49-F238E27FC236}">
-                <a16:creationId xmlns:a16="http://schemas.microsoft.com/office/drawing/2014/main" id="{BB100D3A-EBEB-4DA9-AAEB-A80452227FCF}"/>
+                <a16:creationId xmlns:a16="http://schemas.microsoft.com/office/drawing/2014/main" id="{D80C5D7F-1974-4B50-B998-72DFF660B77B}"/>
               </a:ext>
             </a:extLst>
           </p:cNvPr>
@@ -3212,7 +3207,7 @@
           <p:cNvPr id="3" name="page-2">
             <a:extLst xmlns:a="http://schemas.openxmlformats.org/drawingml/2006/main">
               <a:ext uri="{FF2B5EF4-FFF2-40B4-BE49-F238E27FC236}">
-                <a16:creationId xmlns:a16="http://schemas.microsoft.com/office/drawing/2014/main" id="{39DF6F88-9DEC-46F4-9630-690B82C44E93}"/>
+                <a16:creationId xmlns:a16="http://schemas.microsoft.com/office/drawing/2014/main" id="{2FB31FB3-511E-4CFF-B53A-AE843765CFDF}"/>
               </a:ext>
             </a:extLst>
           </p:cNvPr>
@@ -3270,7 +3265,7 @@
           <p:cNvPr id="4" name="auto-text-10">
             <a:extLst xmlns:a="http://schemas.openxmlformats.org/drawingml/2006/main">
               <a:ext uri="{FF2B5EF4-FFF2-40B4-BE49-F238E27FC236}">
-                <a16:creationId xmlns:a16="http://schemas.microsoft.com/office/drawing/2014/main" id="{9992616A-A86D-422E-8A48-2CAF803C2D7C}"/>
+                <a16:creationId xmlns:a16="http://schemas.microsoft.com/office/drawing/2014/main" id="{634B8EEC-D36B-44CC-AE5D-EA2C45A74AFF}"/>
               </a:ext>
             </a:extLst>
           </p:cNvPr>
@@ -3328,7 +3323,7 @@
           <p:cNvPr id="5" name="step-dot-0">
             <a:extLst xmlns:a="http://schemas.openxmlformats.org/drawingml/2006/main">
               <a:ext uri="{FF2B5EF4-FFF2-40B4-BE49-F238E27FC236}">
-                <a16:creationId xmlns:a16="http://schemas.microsoft.com/office/drawing/2014/main" id="{09CC6424-EF7E-4F4A-82C5-C57FDFFA6E18}"/>
+                <a16:creationId xmlns:a16="http://schemas.microsoft.com/office/drawing/2014/main" id="{FD73E74A-661A-48F0-8993-195327F952F4}"/>
               </a:ext>
             </a:extLst>
           </p:cNvPr>
@@ -3363,7 +3358,7 @@
           <p:cNvPr id="6" name="step-line-0">
             <a:extLst xmlns:a="http://schemas.openxmlformats.org/drawingml/2006/main">
               <a:ext uri="{FF2B5EF4-FFF2-40B4-BE49-F238E27FC236}">
-                <a16:creationId xmlns:a16="http://schemas.microsoft.com/office/drawing/2014/main" id="{52D6E37A-D9C2-466D-B308-72F9330D2132}"/>
+                <a16:creationId xmlns:a16="http://schemas.microsoft.com/office/drawing/2014/main" id="{E4F39A6E-95CA-4EEF-B5B5-C545146D8E1E}"/>
               </a:ext>
             </a:extLst>
           </p:cNvPr>
@@ -3398,7 +3393,7 @@
           <p:cNvPr id="7" name="step-text-0">
             <a:extLst xmlns:a="http://schemas.openxmlformats.org/drawingml/2006/main">
               <a:ext uri="{FF2B5EF4-FFF2-40B4-BE49-F238E27FC236}">
-                <a16:creationId xmlns:a16="http://schemas.microsoft.com/office/drawing/2014/main" id="{2ED0DC7B-1A41-4FA4-9555-365C7CACA07A}"/>
+                <a16:creationId xmlns:a16="http://schemas.microsoft.com/office/drawing/2014/main" id="{BEC8D033-4948-457D-A582-55978AD8A5AF}"/>
               </a:ext>
             </a:extLst>
           </p:cNvPr>
@@ -3456,7 +3451,7 @@
           <p:cNvPr id="8" name="step-dot-1">
             <a:extLst xmlns:a="http://schemas.openxmlformats.org/drawingml/2006/main">
               <a:ext uri="{FF2B5EF4-FFF2-40B4-BE49-F238E27FC236}">
-                <a16:creationId xmlns:a16="http://schemas.microsoft.com/office/drawing/2014/main" id="{BDA5A043-E9AF-4E66-A0C8-37628C9E93D3}"/>
+                <a16:creationId xmlns:a16="http://schemas.microsoft.com/office/drawing/2014/main" id="{59436CBE-7CA2-40C4-BB92-B5CAAA7E3111}"/>
               </a:ext>
             </a:extLst>
           </p:cNvPr>
@@ -3491,7 +3486,7 @@
           <p:cNvPr id="9" name="step-line-1">
             <a:extLst xmlns:a="http://schemas.openxmlformats.org/drawingml/2006/main">
               <a:ext uri="{FF2B5EF4-FFF2-40B4-BE49-F238E27FC236}">
-                <a16:creationId xmlns:a16="http://schemas.microsoft.com/office/drawing/2014/main" id="{0FEC3488-FCD3-4EDE-A307-E6BC985D7DD7}"/>
+                <a16:creationId xmlns:a16="http://schemas.microsoft.com/office/drawing/2014/main" id="{11427E0F-6D75-4CBB-BF5B-B61F44CBBDEA}"/>
               </a:ext>
             </a:extLst>
           </p:cNvPr>
@@ -3526,7 +3521,7 @@
           <p:cNvPr id="10" name="step-text-1">
             <a:extLst xmlns:a="http://schemas.openxmlformats.org/drawingml/2006/main">
               <a:ext uri="{FF2B5EF4-FFF2-40B4-BE49-F238E27FC236}">
-                <a16:creationId xmlns:a16="http://schemas.microsoft.com/office/drawing/2014/main" id="{BCE7A8A6-1DF9-4DA6-A4B6-88753C3C2E14}"/>
+                <a16:creationId xmlns:a16="http://schemas.microsoft.com/office/drawing/2014/main" id="{3BCC69FF-F2B1-450D-B614-659DA54D95E8}"/>
               </a:ext>
             </a:extLst>
           </p:cNvPr>
@@ -3584,7 +3579,7 @@
           <p:cNvPr id="11" name="step-dot-2">
             <a:extLst xmlns:a="http://schemas.openxmlformats.org/drawingml/2006/main">
               <a:ext uri="{FF2B5EF4-FFF2-40B4-BE49-F238E27FC236}">
-                <a16:creationId xmlns:a16="http://schemas.microsoft.com/office/drawing/2014/main" id="{7E5F6A53-C140-4059-9364-E58AE433A752}"/>
+                <a16:creationId xmlns:a16="http://schemas.microsoft.com/office/drawing/2014/main" id="{FED07AAD-5B31-481E-9285-846F047721AA}"/>
               </a:ext>
             </a:extLst>
           </p:cNvPr>
@@ -3619,7 +3614,7 @@
           <p:cNvPr id="12" name="step-line-2">
             <a:extLst xmlns:a="http://schemas.openxmlformats.org/drawingml/2006/main">
               <a:ext uri="{FF2B5EF4-FFF2-40B4-BE49-F238E27FC236}">
-                <a16:creationId xmlns:a16="http://schemas.microsoft.com/office/drawing/2014/main" id="{2D162183-6B14-415A-9219-066B5B837572}"/>
+                <a16:creationId xmlns:a16="http://schemas.microsoft.com/office/drawing/2014/main" id="{1457A00D-BF13-43B9-93D8-110A76F67EE4}"/>
               </a:ext>
             </a:extLst>
           </p:cNvPr>
@@ -3654,7 +3649,7 @@
           <p:cNvPr id="13" name="step-text-2">
             <a:extLst xmlns:a="http://schemas.openxmlformats.org/drawingml/2006/main">
               <a:ext uri="{FF2B5EF4-FFF2-40B4-BE49-F238E27FC236}">
-                <a16:creationId xmlns:a16="http://schemas.microsoft.com/office/drawing/2014/main" id="{46AD0DBF-61C8-4CD0-A102-4E24312FC939}"/>
+                <a16:creationId xmlns:a16="http://schemas.microsoft.com/office/drawing/2014/main" id="{B1A4DE3B-20ED-4222-B235-93798BA84FF0}"/>
               </a:ext>
             </a:extLst>
           </p:cNvPr>
@@ -3712,7 +3707,7 @@
           <p:cNvPr id="14" name="step-dot-3">
             <a:extLst xmlns:a="http://schemas.openxmlformats.org/drawingml/2006/main">
               <a:ext uri="{FF2B5EF4-FFF2-40B4-BE49-F238E27FC236}">
-                <a16:creationId xmlns:a16="http://schemas.microsoft.com/office/drawing/2014/main" id="{84803876-CB06-4B12-9B94-221A6266FC95}"/>
+                <a16:creationId xmlns:a16="http://schemas.microsoft.com/office/drawing/2014/main" id="{1D56F304-A2DC-4CF3-B4E2-EF1F62E729BA}"/>
               </a:ext>
             </a:extLst>
           </p:cNvPr>
@@ -3747,7 +3742,7 @@
           <p:cNvPr id="15" name="step-line-3">
             <a:extLst xmlns:a="http://schemas.openxmlformats.org/drawingml/2006/main">
               <a:ext uri="{FF2B5EF4-FFF2-40B4-BE49-F238E27FC236}">
-                <a16:creationId xmlns:a16="http://schemas.microsoft.com/office/drawing/2014/main" id="{37E01275-559C-4473-B243-C8AC14619556}"/>
+                <a16:creationId xmlns:a16="http://schemas.microsoft.com/office/drawing/2014/main" id="{D5209A36-28D8-41AB-80DC-E292D1F6CD71}"/>
               </a:ext>
             </a:extLst>
           </p:cNvPr>
@@ -3782,7 +3777,7 @@
           <p:cNvPr id="16" name="step-text-3">
             <a:extLst xmlns:a="http://schemas.openxmlformats.org/drawingml/2006/main">
               <a:ext uri="{FF2B5EF4-FFF2-40B4-BE49-F238E27FC236}">
-                <a16:creationId xmlns:a16="http://schemas.microsoft.com/office/drawing/2014/main" id="{3CDC592D-EA63-44FD-8836-FF6EFB9A79DF}"/>
+                <a16:creationId xmlns:a16="http://schemas.microsoft.com/office/drawing/2014/main" id="{DB894428-D172-43EF-A317-683D17B7D4C6}"/>
               </a:ext>
             </a:extLst>
           </p:cNvPr>
@@ -3840,7 +3835,7 @@
           <p:cNvPr id="17" name="step-dot-4">
             <a:extLst xmlns:a="http://schemas.openxmlformats.org/drawingml/2006/main">
               <a:ext uri="{FF2B5EF4-FFF2-40B4-BE49-F238E27FC236}">
-                <a16:creationId xmlns:a16="http://schemas.microsoft.com/office/drawing/2014/main" id="{F0B367A1-1155-45F1-B4E6-1ABC89BAB4DE}"/>
+                <a16:creationId xmlns:a16="http://schemas.microsoft.com/office/drawing/2014/main" id="{0A1D33ED-3CA7-43E5-A252-162D842D236F}"/>
               </a:ext>
             </a:extLst>
           </p:cNvPr>
@@ -3875,7 +3870,7 @@
           <p:cNvPr id="18" name="step-text-4">
             <a:extLst xmlns:a="http://schemas.openxmlformats.org/drawingml/2006/main">
               <a:ext uri="{FF2B5EF4-FFF2-40B4-BE49-F238E27FC236}">
-                <a16:creationId xmlns:a16="http://schemas.microsoft.com/office/drawing/2014/main" id="{A188772F-3F39-44F4-8D17-337DF7DEE079}"/>
+                <a16:creationId xmlns:a16="http://schemas.microsoft.com/office/drawing/2014/main" id="{A130CDDF-32EC-4517-ABE5-72DE7990F236}"/>
               </a:ext>
             </a:extLst>
           </p:cNvPr>
@@ -3933,7 +3928,7 @@
           <p:cNvPr id="19" name="pain-summary">
             <a:extLst xmlns:a="http://schemas.openxmlformats.org/drawingml/2006/main">
               <a:ext uri="{FF2B5EF4-FFF2-40B4-BE49-F238E27FC236}">
-                <a16:creationId xmlns:a16="http://schemas.microsoft.com/office/drawing/2014/main" id="{95B3A311-CEA5-48F4-8B26-258BA726E1ED}"/>
+                <a16:creationId xmlns:a16="http://schemas.microsoft.com/office/drawing/2014/main" id="{8FADFE4B-501E-4B0E-81ED-23F07DB7818F}"/>
               </a:ext>
             </a:extLst>
           </p:cNvPr>
@@ -3968,7 +3963,7 @@
           <p:cNvPr id="20" name="auto-text-11">
             <a:extLst xmlns:a="http://schemas.openxmlformats.org/drawingml/2006/main">
               <a:ext uri="{FF2B5EF4-FFF2-40B4-BE49-F238E27FC236}">
-                <a16:creationId xmlns:a16="http://schemas.microsoft.com/office/drawing/2014/main" id="{2E5D6E6A-2E94-44F7-9414-2CFE20506117}"/>
+                <a16:creationId xmlns:a16="http://schemas.microsoft.com/office/drawing/2014/main" id="{9C4D364E-4353-4E79-86A4-04A1C5BCEFBB}"/>
               </a:ext>
             </a:extLst>
           </p:cNvPr>
@@ -4026,7 +4021,7 @@
           <p:cNvPr id="21" name="auto-text-12">
             <a:extLst xmlns:a="http://schemas.openxmlformats.org/drawingml/2006/main">
               <a:ext uri="{FF2B5EF4-FFF2-40B4-BE49-F238E27FC236}">
-                <a16:creationId xmlns:a16="http://schemas.microsoft.com/office/drawing/2014/main" id="{D63C4F66-66D7-4B9A-BB0A-C5B367252F0E}"/>
+                <a16:creationId xmlns:a16="http://schemas.microsoft.com/office/drawing/2014/main" id="{EDC41233-64B2-4AFF-8953-922956CD3061}"/>
               </a:ext>
             </a:extLst>
           </p:cNvPr>
@@ -4153,7 +4148,7 @@
           <p:cNvPr id="22" name="auto-text-13">
             <a:extLst xmlns:a="http://schemas.openxmlformats.org/drawingml/2006/main">
               <a:ext uri="{FF2B5EF4-FFF2-40B4-BE49-F238E27FC236}">
-                <a16:creationId xmlns:a16="http://schemas.microsoft.com/office/drawing/2014/main" id="{1F97706B-582B-417B-BA56-BFB77D6DC702}"/>
+                <a16:creationId xmlns:a16="http://schemas.microsoft.com/office/drawing/2014/main" id="{9407AC3B-B053-40F1-8CC8-5D57A067A2B5}"/>
               </a:ext>
             </a:extLst>
           </p:cNvPr>
@@ -4211,7 +4206,7 @@
           <p:cNvPr id="23" name="prompt-shot-frame">
             <a:extLst xmlns:a="http://schemas.openxmlformats.org/drawingml/2006/main">
               <a:ext uri="{FF2B5EF4-FFF2-40B4-BE49-F238E27FC236}">
-                <a16:creationId xmlns:a16="http://schemas.microsoft.com/office/drawing/2014/main" id="{6463C3D5-7224-4871-8A87-1D3A54243C7B}"/>
+                <a16:creationId xmlns:a16="http://schemas.microsoft.com/office/drawing/2014/main" id="{271E73EA-5396-4FFE-BD95-3CECB93D676A}"/>
               </a:ext>
             </a:extLst>
           </p:cNvPr>
@@ -4246,7 +4241,7 @@
           <p:cNvPr id="24" name="prompt-shot-label">
             <a:extLst xmlns:a="http://schemas.openxmlformats.org/drawingml/2006/main">
               <a:ext uri="{FF2B5EF4-FFF2-40B4-BE49-F238E27FC236}">
-                <a16:creationId xmlns:a16="http://schemas.microsoft.com/office/drawing/2014/main" id="{AD3AE4AE-6D51-4B99-BEC4-103B0A31B710}"/>
+                <a16:creationId xmlns:a16="http://schemas.microsoft.com/office/drawing/2014/main" id="{AD36AA83-9C3A-417C-9AB7-8D13C890A556}"/>
               </a:ext>
             </a:extLst>
           </p:cNvPr>
@@ -4304,7 +4299,7 @@
           <p:cNvPr id="25" name="prompt-shot-sub">
             <a:extLst xmlns:a="http://schemas.openxmlformats.org/drawingml/2006/main">
               <a:ext uri="{FF2B5EF4-FFF2-40B4-BE49-F238E27FC236}">
-                <a16:creationId xmlns:a16="http://schemas.microsoft.com/office/drawing/2014/main" id="{70DD3ECF-1591-417F-8F1A-4D9A3CBD93BE}"/>
+                <a16:creationId xmlns:a16="http://schemas.microsoft.com/office/drawing/2014/main" id="{1D9CBCB8-AEEE-4452-ABF1-304C22D0C529}"/>
               </a:ext>
             </a:extLst>
           </p:cNvPr>
@@ -4362,7 +4357,7 @@
           <p:cNvPr id="26" name="misjudge-case-frame">
             <a:extLst xmlns:a="http://schemas.openxmlformats.org/drawingml/2006/main">
               <a:ext uri="{FF2B5EF4-FFF2-40B4-BE49-F238E27FC236}">
-                <a16:creationId xmlns:a16="http://schemas.microsoft.com/office/drawing/2014/main" id="{B839B8EE-5121-4071-BCD8-B20102E18FBD}"/>
+                <a16:creationId xmlns:a16="http://schemas.microsoft.com/office/drawing/2014/main" id="{D81DFDC3-B8DA-4126-993B-D2437D97EA98}"/>
               </a:ext>
             </a:extLst>
           </p:cNvPr>
@@ -4397,7 +4392,7 @@
           <p:cNvPr id="27" name="misjudge-case-label">
             <a:extLst xmlns:a="http://schemas.openxmlformats.org/drawingml/2006/main">
               <a:ext uri="{FF2B5EF4-FFF2-40B4-BE49-F238E27FC236}">
-                <a16:creationId xmlns:a16="http://schemas.microsoft.com/office/drawing/2014/main" id="{B7ECE82A-D3C9-41FA-8562-18A1255A1869}"/>
+                <a16:creationId xmlns:a16="http://schemas.microsoft.com/office/drawing/2014/main" id="{223F6C7B-F728-4C57-8EEC-B709086423DF}"/>
               </a:ext>
             </a:extLst>
           </p:cNvPr>
@@ -4455,7 +4450,7 @@
           <p:cNvPr id="28" name="misjudge-case-sub">
             <a:extLst xmlns:a="http://schemas.openxmlformats.org/drawingml/2006/main">
               <a:ext uri="{FF2B5EF4-FFF2-40B4-BE49-F238E27FC236}">
-                <a16:creationId xmlns:a16="http://schemas.microsoft.com/office/drawing/2014/main" id="{FA8A65A1-8F9F-4B84-9F81-23D801844383}"/>
+                <a16:creationId xmlns:a16="http://schemas.microsoft.com/office/drawing/2014/main" id="{524DAB5A-E968-45E1-972E-05D016084568}"/>
               </a:ext>
             </a:extLst>
           </p:cNvPr>
@@ -4513,7 +4508,7 @@
           <p:cNvPr id="29" name="auto-text-14">
             <a:extLst xmlns:a="http://schemas.openxmlformats.org/drawingml/2006/main">
               <a:ext uri="{FF2B5EF4-FFF2-40B4-BE49-F238E27FC236}">
-                <a16:creationId xmlns:a16="http://schemas.microsoft.com/office/drawing/2014/main" id="{D5C796B7-3748-4756-9655-88C7C08439D4}"/>
+                <a16:creationId xmlns:a16="http://schemas.microsoft.com/office/drawing/2014/main" id="{09A1FA64-C6B0-49C7-ADAE-7BB6FAC255C9}"/>
               </a:ext>
             </a:extLst>
           </p:cNvPr>
@@ -4569,7 +4564,7 @@
     </p:spTree>
     <p:extLst>
       <p:ext uri="{BB962C8B-B14F-4D97-AF65-F5344CB8AC3E}">
-        <p14:creationId xmlns:p14="http://schemas.microsoft.com/office/powerpoint/2010/main" val="1774512191"/>
+        <p14:creationId xmlns:p14="http://schemas.microsoft.com/office/powerpoint/2010/main" val="2138584723"/>
       </p:ext>
     </p:extLst>
   </p:cSld>
@@ -4597,10 +4592,10 @@
       </p:grpSpPr>
       <p:sp>
         <p:nvSpPr>
-          <p:cNvPr id="14" name="accent-3">
-            <a:extLst xmlns:a="http://schemas.openxmlformats.org/drawingml/2006/main">
-              <a:ext uri="{FF2B5EF4-FFF2-40B4-BE49-F238E27FC236}">
-                <a16:creationId xmlns:a16="http://schemas.microsoft.com/office/drawing/2014/main" id="{2049BCBD-B5A4-462F-8981-AB188CF03B37}"/>
+          <p:cNvPr id="33" name="accent-3">
+            <a:extLst xmlns:a="http://schemas.openxmlformats.org/drawingml/2006/main">
+              <a:ext uri="{FF2B5EF4-FFF2-40B4-BE49-F238E27FC236}">
+                <a16:creationId xmlns:a16="http://schemas.microsoft.com/office/drawing/2014/main" id="{9E64398B-93BC-4D55-8EB7-92CC502D6A6B}"/>
               </a:ext>
             </a:extLst>
           </p:cNvPr>
@@ -4635,7 +4630,7 @@
           <p:cNvPr id="2" name="title-3">
             <a:extLst xmlns:a="http://schemas.openxmlformats.org/drawingml/2006/main">
               <a:ext uri="{FF2B5EF4-FFF2-40B4-BE49-F238E27FC236}">
-                <a16:creationId xmlns:a16="http://schemas.microsoft.com/office/drawing/2014/main" id="{70382952-F01B-417D-B96D-C021FD7E2AA7}"/>
+                <a16:creationId xmlns:a16="http://schemas.microsoft.com/office/drawing/2014/main" id="{2D6C0DF1-3F08-47D8-8CB1-6C0D75A3CA1D}"/>
               </a:ext>
             </a:extLst>
           </p:cNvPr>
@@ -4683,7 +4678,7 @@
                 <a:ea typeface="Microsoft YaHei"/>
                 <a:cs typeface="Microsoft YaHei"/>
               </a:rPr>
-              <a:t>VLM Judge正在成为图像数据筛选和模型训练的关键能力</a:t>
+              <a:t>学术界正从“单一Judge打分”转向任务自适应的组合评估</a:t>
             </a:r>
           </a:p>
         </p:txBody>
@@ -4693,7 +4688,7 @@
           <p:cNvPr id="3" name="page-3">
             <a:extLst xmlns:a="http://schemas.openxmlformats.org/drawingml/2006/main">
               <a:ext uri="{FF2B5EF4-FFF2-40B4-BE49-F238E27FC236}">
-                <a16:creationId xmlns:a16="http://schemas.microsoft.com/office/drawing/2014/main" id="{C9FA7035-47B7-4306-9532-2580A6DB6993}"/>
+                <a16:creationId xmlns:a16="http://schemas.microsoft.com/office/drawing/2014/main" id="{5087BCBD-EB8C-47DC-8EB5-CCC5CDF57513}"/>
               </a:ext>
             </a:extLst>
           </p:cNvPr>
@@ -4751,7 +4746,7 @@
           <p:cNvPr id="4" name="auto-text-15">
             <a:extLst xmlns:a="http://schemas.openxmlformats.org/drawingml/2006/main">
               <a:ext uri="{FF2B5EF4-FFF2-40B4-BE49-F238E27FC236}">
-                <a16:creationId xmlns:a16="http://schemas.microsoft.com/office/drawing/2014/main" id="{C013EDFE-F46D-4FAE-AD69-F3DD4690744A}"/>
+                <a16:creationId xmlns:a16="http://schemas.microsoft.com/office/drawing/2014/main" id="{EBABA679-4DCF-4247-8BA2-BAE59EA4843A}"/>
               </a:ext>
             </a:extLst>
           </p:cNvPr>
@@ -4781,7 +4776,7 @@
           <a:lstStyle xmlns:a="http://schemas.openxmlformats.org/drawingml/2006/main"/>
           <a:p xmlns:a="http://schemas.openxmlformats.org/drawingml/2006/main">
             <a:pPr algn="l">
-              <a:defRPr sz="1425" b="0" i="0">
+              <a:defRPr sz="1350" b="0" i="0">
                 <a:solidFill>
                   <a:srgbClr val="66778A"/>
                 </a:solidFill>
@@ -4791,7 +4786,7 @@
               </a:defRPr>
             </a:pPr>
             <a:r>
-              <a:rPr sz="1425" b="0" i="0">
+              <a:rPr sz="1350" b="0" i="0">
                 <a:solidFill>
                   <a:srgbClr val="66778A"/>
                 </a:solidFill>
@@ -4799,267 +4794,33 @@
                 <a:ea typeface="Microsoft YaHei"/>
                 <a:cs typeface="Microsoft YaHei"/>
               </a:rPr>
-              <a:t>2025–2026年的研究重点已从“能否评价图像”，转向多维标准、细粒度任务和评价结果进入训练闭环。</a:t>
-            </a:r>
-          </a:p>
-        </p:txBody>
-      </p:sp>
-      <p:sp>
-        <p:nvSpPr>
-          <p:cNvPr id="5" name="mjbench-dimensions-back">
-            <a:extLst xmlns:a="http://schemas.openxmlformats.org/drawingml/2006/main">
-              <a:ext uri="{FF2B5EF4-FFF2-40B4-BE49-F238E27FC236}">
-                <a16:creationId xmlns:a16="http://schemas.microsoft.com/office/drawing/2014/main" id="{46DBE557-D215-43D8-ABCE-4283A89233D9}"/>
-              </a:ext>
-            </a:extLst>
-          </p:cNvPr>
-          <p:cNvSpPr>
-            <a:spLocks xmlns:a="http://schemas.openxmlformats.org/drawingml/2006/main" noGrp="1"/>
-          </p:cNvSpPr>
-          <p:nvPr/>
-        </p:nvSpPr>
-        <p:spPr>
-          <a:xfrm xmlns:a="http://schemas.openxmlformats.org/drawingml/2006/main">
-            <a:off x="495300" y="1504950"/>
-            <a:ext cx="5372100" cy="3371850"/>
+              <a:t>2025–2026年的关键进展分布在三条路线，VLM Judge只是可被校准和组合的基础评估器之一。</a:t>
+            </a:r>
+          </a:p>
+        </p:txBody>
+      </p:sp>
+      <p:sp>
+        <p:nvSpPr>
+          <p:cNvPr id="5" name="track-0">
+            <a:extLst xmlns:a="http://schemas.openxmlformats.org/drawingml/2006/main">
+              <a:ext uri="{FF2B5EF4-FFF2-40B4-BE49-F238E27FC236}">
+                <a16:creationId xmlns:a16="http://schemas.microsoft.com/office/drawing/2014/main" id="{C09E18B6-5C42-49AE-B778-2C091C038D82}"/>
+              </a:ext>
+            </a:extLst>
+          </p:cNvPr>
+          <p:cNvSpPr>
+            <a:spLocks xmlns:a="http://schemas.openxmlformats.org/drawingml/2006/main" noGrp="1"/>
+          </p:cNvSpPr>
+          <p:nvPr/>
+        </p:nvSpPr>
+        <p:spPr>
+          <a:xfrm xmlns:a="http://schemas.openxmlformats.org/drawingml/2006/main">
+            <a:off x="514350" y="1581150"/>
+            <a:ext cx="3390900" cy="3714750"/>
           </a:xfrm>
           <a:prstGeom xmlns:a="http://schemas.openxmlformats.org/drawingml/2006/main" prst="roundRect">
             <a:avLst>
-              <a:gd name="adj" fmla="val 2260"/>
-            </a:avLst>
-          </a:prstGeom>
-          <a:solidFill xmlns:a="http://schemas.openxmlformats.org/drawingml/2006/main">
-            <a:srgbClr val="FFFFFF"/>
-          </a:solidFill>
-          <a:ln xmlns:a="http://schemas.openxmlformats.org/drawingml/2006/main" w="9525">
-            <a:solidFill>
-              <a:srgbClr val="D8E0E8"/>
-            </a:solidFill>
-            <a:prstDash val="solid"/>
-          </a:ln>
-        </p:spPr>
-      </p:sp>
-      <p:pic>
-        <p:nvPicPr>
-          <p:cNvPr id="19" name=""/>
-          <p:cNvPicPr>
-            <a:picLocks xmlns:a="http://schemas.openxmlformats.org/drawingml/2006/main" noChangeAspect="1"/>
-          </p:cNvPicPr>
-          <p:nvPr/>
-        </p:nvPicPr>
-        <p:blipFill>
-          <a:blip xmlns:r="http://schemas.openxmlformats.org/officeDocument/2006/relationships" xmlns:a="http://schemas.openxmlformats.org/drawingml/2006/main" r:embed="R1aed782c5c804b61"/>
-          <a:stretch xmlns:a="http://schemas.openxmlformats.org/drawingml/2006/main"/>
-        </p:blipFill>
-        <p:spPr>
-          <a:xfrm xmlns:a="http://schemas.openxmlformats.org/drawingml/2006/main">
-            <a:off x="931746" y="1524000"/>
-            <a:ext cx="4499207" cy="3333750"/>
-          </a:xfrm>
-          <a:prstGeom xmlns:a="http://schemas.openxmlformats.org/drawingml/2006/main" prst="roundRect">
-            <a:avLst>
-              <a:gd name="adj" fmla="val 2286"/>
-            </a:avLst>
-          </a:prstGeom>
-        </p:spPr>
-      </p:pic>
-      <p:sp>
-        <p:nvSpPr>
-          <p:cNvPr id="7" name="mmrb2-tasks-back">
-            <a:extLst xmlns:a="http://schemas.openxmlformats.org/drawingml/2006/main">
-              <a:ext uri="{FF2B5EF4-FFF2-40B4-BE49-F238E27FC236}">
-                <a16:creationId xmlns:a16="http://schemas.microsoft.com/office/drawing/2014/main" id="{69D58279-4AB1-4C5A-9D38-B53FBEC19E29}"/>
-              </a:ext>
-            </a:extLst>
-          </p:cNvPr>
-          <p:cNvSpPr>
-            <a:spLocks xmlns:a="http://schemas.openxmlformats.org/drawingml/2006/main" noGrp="1"/>
-          </p:cNvSpPr>
-          <p:nvPr/>
-        </p:nvSpPr>
-        <p:spPr>
-          <a:xfrm xmlns:a="http://schemas.openxmlformats.org/drawingml/2006/main">
-            <a:off x="6324600" y="1504950"/>
-            <a:ext cx="5372100" cy="3371850"/>
-          </a:xfrm>
-          <a:prstGeom xmlns:a="http://schemas.openxmlformats.org/drawingml/2006/main" prst="roundRect">
-            <a:avLst>
-              <a:gd name="adj" fmla="val 2260"/>
-            </a:avLst>
-          </a:prstGeom>
-          <a:solidFill xmlns:a="http://schemas.openxmlformats.org/drawingml/2006/main">
-            <a:srgbClr val="FFFFFF"/>
-          </a:solidFill>
-          <a:ln xmlns:a="http://schemas.openxmlformats.org/drawingml/2006/main" w="9525">
-            <a:solidFill>
-              <a:srgbClr val="D8E0E8"/>
-            </a:solidFill>
-            <a:prstDash val="solid"/>
-          </a:ln>
-        </p:spPr>
-      </p:sp>
-      <p:pic>
-        <p:nvPicPr>
-          <p:cNvPr id="21" name=""/>
-          <p:cNvPicPr>
-            <a:picLocks xmlns:a="http://schemas.openxmlformats.org/drawingml/2006/main" noChangeAspect="1"/>
-          </p:cNvPicPr>
-          <p:nvPr/>
-        </p:nvPicPr>
-        <p:blipFill>
-          <a:blip xmlns:r="http://schemas.openxmlformats.org/officeDocument/2006/relationships" xmlns:a="http://schemas.openxmlformats.org/drawingml/2006/main" r:embed="Ra72faef281e6476c"/>
-          <a:stretch xmlns:a="http://schemas.openxmlformats.org/drawingml/2006/main"/>
-        </p:blipFill>
-        <p:spPr>
-          <a:xfrm xmlns:a="http://schemas.openxmlformats.org/drawingml/2006/main">
-            <a:off x="6685429" y="1524000"/>
-            <a:ext cx="4650441" cy="3333750"/>
-          </a:xfrm>
-          <a:prstGeom xmlns:a="http://schemas.openxmlformats.org/drawingml/2006/main" prst="roundRect">
-            <a:avLst>
-              <a:gd name="adj" fmla="val 2286"/>
-            </a:avLst>
-          </a:prstGeom>
-        </p:spPr>
-      </p:pic>
-      <p:sp>
-        <p:nvSpPr>
-          <p:cNvPr id="9" name="auto-text-16">
-            <a:extLst xmlns:a="http://schemas.openxmlformats.org/drawingml/2006/main">
-              <a:ext uri="{FF2B5EF4-FFF2-40B4-BE49-F238E27FC236}">
-                <a16:creationId xmlns:a16="http://schemas.microsoft.com/office/drawing/2014/main" id="{3D92A2A3-6E1F-400D-8183-27E410932E9C}"/>
-              </a:ext>
-            </a:extLst>
-          </p:cNvPr>
-          <p:cNvSpPr>
-            <a:spLocks xmlns:a="http://schemas.openxmlformats.org/drawingml/2006/main" noGrp="1"/>
-          </p:cNvSpPr>
-          <p:nvPr/>
-        </p:nvSpPr>
-        <p:spPr>
-          <a:xfrm xmlns:a="http://schemas.openxmlformats.org/drawingml/2006/main">
-            <a:off x="552450" y="5048250"/>
-            <a:ext cx="5143500" cy="523875"/>
-          </a:xfrm>
-          <a:prstGeom xmlns:a="http://schemas.openxmlformats.org/drawingml/2006/main" prst="rect">
-            <a:avLst/>
-          </a:prstGeom>
-          <a:noFill xmlns:a="http://schemas.openxmlformats.org/drawingml/2006/main"/>
-          <a:ln xmlns:a="http://schemas.openxmlformats.org/drawingml/2006/main" w="0">
-            <a:noFill/>
-            <a:prstDash val="solid"/>
-          </a:ln>
-        </p:spPr>
-        <p:txBody>
-          <a:bodyPr xmlns:a="http://schemas.openxmlformats.org/drawingml/2006/main" wrap="square" lIns="0" tIns="0" rIns="0" bIns="0" anchor="t">
-            <a:normAutofit fontScale="100000"/>
-          </a:bodyPr>
-          <a:lstStyle xmlns:a="http://schemas.openxmlformats.org/drawingml/2006/main"/>
-          <a:p xmlns:a="http://schemas.openxmlformats.org/drawingml/2006/main">
-            <a:pPr algn="l">
-              <a:defRPr sz="1350" b="1" i="0">
-                <a:solidFill>
-                  <a:srgbClr val="12263A"/>
-                </a:solidFill>
-                <a:latin typeface="Microsoft YaHei"/>
-                <a:ea typeface="Microsoft YaHei"/>
-                <a:cs typeface="Microsoft YaHei"/>
-              </a:defRPr>
-            </a:pPr>
-            <a:r>
-              <a:rPr sz="1350" b="1" i="0">
-                <a:solidFill>
-                  <a:srgbClr val="12263A"/>
-                </a:solidFill>
-                <a:latin typeface="Microsoft YaHei"/>
-                <a:ea typeface="Microsoft YaHei"/>
-                <a:cs typeface="Microsoft YaHei"/>
-              </a:rPr>
-              <a:t>图像评价已从单一质量分数扩展到一致性、安全、质量、偏差、构图等多个维度。</a:t>
-            </a:r>
-          </a:p>
-        </p:txBody>
-      </p:sp>
-      <p:sp>
-        <p:nvSpPr>
-          <p:cNvPr id="10" name="auto-text-17">
-            <a:extLst xmlns:a="http://schemas.openxmlformats.org/drawingml/2006/main">
-              <a:ext uri="{FF2B5EF4-FFF2-40B4-BE49-F238E27FC236}">
-                <a16:creationId xmlns:a16="http://schemas.microsoft.com/office/drawing/2014/main" id="{18197D70-0C78-4E93-98B8-8E774E60A0EF}"/>
-              </a:ext>
-            </a:extLst>
-          </p:cNvPr>
-          <p:cNvSpPr>
-            <a:spLocks xmlns:a="http://schemas.openxmlformats.org/drawingml/2006/main" noGrp="1"/>
-          </p:cNvSpPr>
-          <p:nvPr/>
-        </p:nvSpPr>
-        <p:spPr>
-          <a:xfrm xmlns:a="http://schemas.openxmlformats.org/drawingml/2006/main">
-            <a:off x="6381750" y="5048250"/>
-            <a:ext cx="5143500" cy="523875"/>
-          </a:xfrm>
-          <a:prstGeom xmlns:a="http://schemas.openxmlformats.org/drawingml/2006/main" prst="rect">
-            <a:avLst/>
-          </a:prstGeom>
-          <a:noFill xmlns:a="http://schemas.openxmlformats.org/drawingml/2006/main"/>
-          <a:ln xmlns:a="http://schemas.openxmlformats.org/drawingml/2006/main" w="0">
-            <a:noFill/>
-            <a:prstDash val="solid"/>
-          </a:ln>
-        </p:spPr>
-        <p:txBody>
-          <a:bodyPr xmlns:a="http://schemas.openxmlformats.org/drawingml/2006/main" wrap="square" lIns="0" tIns="0" rIns="0" bIns="0" anchor="t">
-            <a:normAutofit fontScale="100000"/>
-          </a:bodyPr>
-          <a:lstStyle xmlns:a="http://schemas.openxmlformats.org/drawingml/2006/main"/>
-          <a:p xmlns:a="http://schemas.openxmlformats.org/drawingml/2006/main">
-            <a:pPr algn="l">
-              <a:defRPr sz="1350" b="1" i="0">
-                <a:solidFill>
-                  <a:srgbClr val="12263A"/>
-                </a:solidFill>
-                <a:latin typeface="Microsoft YaHei"/>
-                <a:ea typeface="Microsoft YaHei"/>
-                <a:cs typeface="Microsoft YaHei"/>
-              </a:defRPr>
-            </a:pPr>
-            <a:r>
-              <a:rPr sz="1350" b="1" i="0">
-                <a:solidFill>
-                  <a:srgbClr val="12263A"/>
-                </a:solidFill>
-                <a:latin typeface="Microsoft YaHei"/>
-                <a:ea typeface="Microsoft YaHei"/>
-                <a:cs typeface="Microsoft YaHei"/>
-              </a:rPr>
-              <a:t>Judge开始覆盖文本生图、图像编辑、图文交错生成和视觉推理，并与人类偏好共同构成训练反馈。</a:t>
-            </a:r>
-          </a:p>
-        </p:txBody>
-      </p:sp>
-      <p:sp>
-        <p:nvSpPr>
-          <p:cNvPr id="11" name="trend-conclusion">
-            <a:extLst xmlns:a="http://schemas.openxmlformats.org/drawingml/2006/main">
-              <a:ext uri="{FF2B5EF4-FFF2-40B4-BE49-F238E27FC236}">
-                <a16:creationId xmlns:a16="http://schemas.microsoft.com/office/drawing/2014/main" id="{1A8B8197-3E74-4281-B2C9-8B76A8AC4528}"/>
-              </a:ext>
-            </a:extLst>
-          </p:cNvPr>
-          <p:cNvSpPr>
-            <a:spLocks xmlns:a="http://schemas.openxmlformats.org/drawingml/2006/main" noGrp="1"/>
-          </p:cNvSpPr>
-          <p:nvPr/>
-        </p:nvSpPr>
-        <p:spPr>
-          <a:xfrm xmlns:a="http://schemas.openxmlformats.org/drawingml/2006/main">
-            <a:off x="514350" y="5715000"/>
-            <a:ext cx="11163300" cy="419100"/>
-          </a:xfrm>
-          <a:prstGeom xmlns:a="http://schemas.openxmlformats.org/drawingml/2006/main" prst="roundRect">
-            <a:avLst>
-              <a:gd name="adj" fmla="val 18182"/>
+              <a:gd name="adj" fmla="val 3371"/>
             </a:avLst>
           </a:prstGeom>
           <a:solidFill xmlns:a="http://schemas.openxmlformats.org/drawingml/2006/main">
@@ -5075,22 +4836,347 @@
       </p:sp>
       <p:sp>
         <p:nvSpPr>
-          <p:cNvPr id="12" name="auto-text-18">
-            <a:extLst xmlns:a="http://schemas.openxmlformats.org/drawingml/2006/main">
-              <a:ext uri="{FF2B5EF4-FFF2-40B4-BE49-F238E27FC236}">
-                <a16:creationId xmlns:a16="http://schemas.microsoft.com/office/drawing/2014/main" id="{D1650898-C3E4-4E1E-A4B2-2F6342A6D1BB}"/>
-              </a:ext>
-            </a:extLst>
-          </p:cNvPr>
-          <p:cNvSpPr>
-            <a:spLocks xmlns:a="http://schemas.openxmlformats.org/drawingml/2006/main" noGrp="1"/>
-          </p:cNvSpPr>
-          <p:nvPr/>
-        </p:nvSpPr>
-        <p:spPr>
-          <a:xfrm xmlns:a="http://schemas.openxmlformats.org/drawingml/2006/main">
-            <a:off x="723900" y="5810250"/>
-            <a:ext cx="10744200" cy="228600"/>
+          <p:cNvPr id="6" name="track-no-0">
+            <a:extLst xmlns:a="http://schemas.openxmlformats.org/drawingml/2006/main">
+              <a:ext uri="{FF2B5EF4-FFF2-40B4-BE49-F238E27FC236}">
+                <a16:creationId xmlns:a16="http://schemas.microsoft.com/office/drawing/2014/main" id="{D1C9D96C-1890-4617-AB70-583048ED27A6}"/>
+              </a:ext>
+            </a:extLst>
+          </p:cNvPr>
+          <p:cNvSpPr>
+            <a:spLocks xmlns:a="http://schemas.openxmlformats.org/drawingml/2006/main" noGrp="1"/>
+          </p:cNvSpPr>
+          <p:nvPr/>
+        </p:nvSpPr>
+        <p:spPr>
+          <a:xfrm xmlns:a="http://schemas.openxmlformats.org/drawingml/2006/main">
+            <a:off x="742950" y="1809750"/>
+            <a:ext cx="552450" cy="342900"/>
+          </a:xfrm>
+          <a:prstGeom xmlns:a="http://schemas.openxmlformats.org/drawingml/2006/main" prst="rect">
+            <a:avLst/>
+          </a:prstGeom>
+          <a:noFill xmlns:a="http://schemas.openxmlformats.org/drawingml/2006/main"/>
+          <a:ln xmlns:a="http://schemas.openxmlformats.org/drawingml/2006/main" w="0">
+            <a:noFill/>
+            <a:prstDash val="solid"/>
+          </a:ln>
+        </p:spPr>
+        <p:txBody>
+          <a:bodyPr xmlns:a="http://schemas.openxmlformats.org/drawingml/2006/main" wrap="square" lIns="0" tIns="0" rIns="0" bIns="0" anchor="t">
+            <a:normAutofit fontScale="100000"/>
+          </a:bodyPr>
+          <a:lstStyle xmlns:a="http://schemas.openxmlformats.org/drawingml/2006/main"/>
+          <a:p xmlns:a="http://schemas.openxmlformats.org/drawingml/2006/main">
+            <a:pPr algn="l">
+              <a:defRPr sz="2025" b="1" i="0">
+                <a:solidFill>
+                  <a:srgbClr val="2F6BFF"/>
+                </a:solidFill>
+                <a:latin typeface="Microsoft YaHei"/>
+                <a:ea typeface="Microsoft YaHei"/>
+                <a:cs typeface="Microsoft YaHei"/>
+              </a:defRPr>
+            </a:pPr>
+            <a:r>
+              <a:rPr sz="2025" b="1" i="0">
+                <a:solidFill>
+                  <a:srgbClr val="2F6BFF"/>
+                </a:solidFill>
+                <a:latin typeface="Microsoft YaHei"/>
+                <a:ea typeface="Microsoft YaHei"/>
+                <a:cs typeface="Microsoft YaHei"/>
+              </a:rPr>
+              <a:t>01</a:t>
+            </a:r>
+          </a:p>
+        </p:txBody>
+      </p:sp>
+      <p:sp>
+        <p:nvSpPr>
+          <p:cNvPr id="7" name="track-title-0">
+            <a:extLst xmlns:a="http://schemas.openxmlformats.org/drawingml/2006/main">
+              <a:ext uri="{FF2B5EF4-FFF2-40B4-BE49-F238E27FC236}">
+                <a16:creationId xmlns:a16="http://schemas.microsoft.com/office/drawing/2014/main" id="{DC58A933-E929-41F9-837C-FF618C1948EF}"/>
+              </a:ext>
+            </a:extLst>
+          </p:cNvPr>
+          <p:cNvSpPr>
+            <a:spLocks xmlns:a="http://schemas.openxmlformats.org/drawingml/2006/main" noGrp="1"/>
+          </p:cNvSpPr>
+          <p:nvPr/>
+        </p:nvSpPr>
+        <p:spPr>
+          <a:xfrm xmlns:a="http://schemas.openxmlformats.org/drawingml/2006/main">
+            <a:off x="1295400" y="1809750"/>
+            <a:ext cx="2343150" cy="342900"/>
+          </a:xfrm>
+          <a:prstGeom xmlns:a="http://schemas.openxmlformats.org/drawingml/2006/main" prst="rect">
+            <a:avLst/>
+          </a:prstGeom>
+          <a:noFill xmlns:a="http://schemas.openxmlformats.org/drawingml/2006/main"/>
+          <a:ln xmlns:a="http://schemas.openxmlformats.org/drawingml/2006/main" w="0">
+            <a:noFill/>
+            <a:prstDash val="solid"/>
+          </a:ln>
+        </p:spPr>
+        <p:txBody>
+          <a:bodyPr xmlns:a="http://schemas.openxmlformats.org/drawingml/2006/main" wrap="square" lIns="0" tIns="0" rIns="0" bIns="0" anchor="t">
+            <a:normAutofit fontScale="100000"/>
+          </a:bodyPr>
+          <a:lstStyle xmlns:a="http://schemas.openxmlformats.org/drawingml/2006/main"/>
+          <a:p xmlns:a="http://schemas.openxmlformats.org/drawingml/2006/main">
+            <a:pPr algn="l">
+              <a:defRPr sz="1725" b="1" i="0">
+                <a:solidFill>
+                  <a:srgbClr val="2F6BFF"/>
+                </a:solidFill>
+                <a:latin typeface="Microsoft YaHei"/>
+                <a:ea typeface="Microsoft YaHei"/>
+                <a:cs typeface="Microsoft YaHei"/>
+              </a:defRPr>
+            </a:pPr>
+            <a:r>
+              <a:rPr sz="1725" b="1" i="0">
+                <a:solidFill>
+                  <a:srgbClr val="2F6BFF"/>
+                </a:solidFill>
+                <a:latin typeface="Microsoft YaHei"/>
+                <a:ea typeface="Microsoft YaHei"/>
+                <a:cs typeface="Microsoft YaHei"/>
+              </a:rPr>
+              <a:t>后验校准与偏移鲁棒</a:t>
+            </a:r>
+          </a:p>
+        </p:txBody>
+      </p:sp>
+      <p:sp>
+        <p:nvSpPr>
+          <p:cNvPr id="8" name="track-lead-0">
+            <a:extLst xmlns:a="http://schemas.openxmlformats.org/drawingml/2006/main">
+              <a:ext uri="{FF2B5EF4-FFF2-40B4-BE49-F238E27FC236}">
+                <a16:creationId xmlns:a16="http://schemas.microsoft.com/office/drawing/2014/main" id="{D41BE652-C262-45F1-811E-F10A5BD8CF8F}"/>
+              </a:ext>
+            </a:extLst>
+          </p:cNvPr>
+          <p:cNvSpPr>
+            <a:spLocks xmlns:a="http://schemas.openxmlformats.org/drawingml/2006/main" noGrp="1"/>
+          </p:cNvSpPr>
+          <p:nvPr/>
+        </p:nvSpPr>
+        <p:spPr>
+          <a:xfrm xmlns:a="http://schemas.openxmlformats.org/drawingml/2006/main">
+            <a:off x="742950" y="2400300"/>
+            <a:ext cx="2933700" cy="895350"/>
+          </a:xfrm>
+          <a:prstGeom xmlns:a="http://schemas.openxmlformats.org/drawingml/2006/main" prst="rect">
+            <a:avLst/>
+          </a:prstGeom>
+          <a:noFill xmlns:a="http://schemas.openxmlformats.org/drawingml/2006/main"/>
+          <a:ln xmlns:a="http://schemas.openxmlformats.org/drawingml/2006/main" w="0">
+            <a:noFill/>
+            <a:prstDash val="solid"/>
+          </a:ln>
+        </p:spPr>
+        <p:txBody>
+          <a:bodyPr xmlns:a="http://schemas.openxmlformats.org/drawingml/2006/main" wrap="square" lIns="0" tIns="0" rIns="0" bIns="0" anchor="t">
+            <a:normAutofit fontScale="100000"/>
+          </a:bodyPr>
+          <a:lstStyle xmlns:a="http://schemas.openxmlformats.org/drawingml/2006/main"/>
+          <a:p xmlns:a="http://schemas.openxmlformats.org/drawingml/2006/main">
+            <a:pPr algn="l">
+              <a:defRPr sz="1425" b="1" i="0">
+                <a:solidFill>
+                  <a:srgbClr val="12263A"/>
+                </a:solidFill>
+                <a:latin typeface="Microsoft YaHei"/>
+                <a:ea typeface="Microsoft YaHei"/>
+                <a:cs typeface="Microsoft YaHei"/>
+              </a:defRPr>
+            </a:pPr>
+            <a:r>
+              <a:rPr sz="1425" b="1" i="0">
+                <a:solidFill>
+                  <a:srgbClr val="12263A"/>
+                </a:solidFill>
+                <a:latin typeface="Microsoft YaHei"/>
+                <a:ea typeface="Microsoft YaHei"/>
+                <a:cs typeface="Microsoft YaHei"/>
+              </a:rPr>
+              <a:t>用少量验证样本修正评分偏差，而不是为每个新任务重训模型。</a:t>
+            </a:r>
+          </a:p>
+        </p:txBody>
+      </p:sp>
+      <p:sp>
+        <p:nvSpPr>
+          <p:cNvPr id="9" name="track-divider-0">
+            <a:extLst xmlns:a="http://schemas.openxmlformats.org/drawingml/2006/main">
+              <a:ext uri="{FF2B5EF4-FFF2-40B4-BE49-F238E27FC236}">
+                <a16:creationId xmlns:a16="http://schemas.microsoft.com/office/drawing/2014/main" id="{A8F5B42F-4862-4DC6-A697-554B323D7C0D}"/>
+              </a:ext>
+            </a:extLst>
+          </p:cNvPr>
+          <p:cNvSpPr>
+            <a:spLocks xmlns:a="http://schemas.openxmlformats.org/drawingml/2006/main" noGrp="1"/>
+          </p:cNvSpPr>
+          <p:nvPr/>
+        </p:nvSpPr>
+        <p:spPr>
+          <a:xfrm xmlns:a="http://schemas.openxmlformats.org/drawingml/2006/main">
+            <a:off x="742950" y="3467100"/>
+            <a:ext cx="2933700" cy="19050"/>
+          </a:xfrm>
+          <a:prstGeom xmlns:a="http://schemas.openxmlformats.org/drawingml/2006/main" prst="roundRect">
+            <a:avLst>
+              <a:gd name="adj" fmla="val 50000"/>
+            </a:avLst>
+          </a:prstGeom>
+          <a:solidFill xmlns:a="http://schemas.openxmlformats.org/drawingml/2006/main">
+            <a:srgbClr val="2F6BFF"/>
+          </a:solidFill>
+          <a:ln xmlns:a="http://schemas.openxmlformats.org/drawingml/2006/main" w="9525">
+            <a:solidFill>
+              <a:srgbClr val="2F6BFF"/>
+            </a:solidFill>
+            <a:prstDash val="solid"/>
+          </a:ln>
+        </p:spPr>
+      </p:sp>
+      <p:sp>
+        <p:nvSpPr>
+          <p:cNvPr id="10" name="track-evidence-label-0">
+            <a:extLst xmlns:a="http://schemas.openxmlformats.org/drawingml/2006/main">
+              <a:ext uri="{FF2B5EF4-FFF2-40B4-BE49-F238E27FC236}">
+                <a16:creationId xmlns:a16="http://schemas.microsoft.com/office/drawing/2014/main" id="{004BAECE-C50E-4AA0-B11D-ACCC7FFE089D}"/>
+              </a:ext>
+            </a:extLst>
+          </p:cNvPr>
+          <p:cNvSpPr>
+            <a:spLocks xmlns:a="http://schemas.openxmlformats.org/drawingml/2006/main" noGrp="1"/>
+          </p:cNvSpPr>
+          <p:nvPr/>
+        </p:nvSpPr>
+        <p:spPr>
+          <a:xfrm xmlns:a="http://schemas.openxmlformats.org/drawingml/2006/main">
+            <a:off x="742950" y="3676650"/>
+            <a:ext cx="1428750" cy="247650"/>
+          </a:xfrm>
+          <a:prstGeom xmlns:a="http://schemas.openxmlformats.org/drawingml/2006/main" prst="rect">
+            <a:avLst/>
+          </a:prstGeom>
+          <a:noFill xmlns:a="http://schemas.openxmlformats.org/drawingml/2006/main"/>
+          <a:ln xmlns:a="http://schemas.openxmlformats.org/drawingml/2006/main" w="0">
+            <a:noFill/>
+            <a:prstDash val="solid"/>
+          </a:ln>
+        </p:spPr>
+        <p:txBody>
+          <a:bodyPr xmlns:a="http://schemas.openxmlformats.org/drawingml/2006/main" wrap="square" lIns="0" tIns="0" rIns="0" bIns="0" anchor="t">
+            <a:normAutofit fontScale="100000"/>
+          </a:bodyPr>
+          <a:lstStyle xmlns:a="http://schemas.openxmlformats.org/drawingml/2006/main"/>
+          <a:p xmlns:a="http://schemas.openxmlformats.org/drawingml/2006/main">
+            <a:pPr algn="l">
+              <a:defRPr sz="1200" b="1" i="0">
+                <a:solidFill>
+                  <a:srgbClr val="2F6BFF"/>
+                </a:solidFill>
+                <a:latin typeface="Microsoft YaHei"/>
+                <a:ea typeface="Microsoft YaHei"/>
+                <a:cs typeface="Microsoft YaHei"/>
+              </a:defRPr>
+            </a:pPr>
+            <a:r>
+              <a:rPr sz="1200" b="1" i="0">
+                <a:solidFill>
+                  <a:srgbClr val="2F6BFF"/>
+                </a:solidFill>
+                <a:latin typeface="Microsoft YaHei"/>
+                <a:ea typeface="Microsoft YaHei"/>
+                <a:cs typeface="Microsoft YaHei"/>
+              </a:rPr>
+              <a:t>最新研究结论</a:t>
+            </a:r>
+          </a:p>
+        </p:txBody>
+      </p:sp>
+      <p:sp>
+        <p:nvSpPr>
+          <p:cNvPr id="11" name="track-evidence-0">
+            <a:extLst xmlns:a="http://schemas.openxmlformats.org/drawingml/2006/main">
+              <a:ext uri="{FF2B5EF4-FFF2-40B4-BE49-F238E27FC236}">
+                <a16:creationId xmlns:a16="http://schemas.microsoft.com/office/drawing/2014/main" id="{5EAC2908-456E-4ABB-BF4D-65972C68B1D1}"/>
+              </a:ext>
+            </a:extLst>
+          </p:cNvPr>
+          <p:cNvSpPr>
+            <a:spLocks xmlns:a="http://schemas.openxmlformats.org/drawingml/2006/main" noGrp="1"/>
+          </p:cNvSpPr>
+          <p:nvPr/>
+        </p:nvSpPr>
+        <p:spPr>
+          <a:xfrm xmlns:a="http://schemas.openxmlformats.org/drawingml/2006/main">
+            <a:off x="742950" y="4019550"/>
+            <a:ext cx="2933700" cy="742950"/>
+          </a:xfrm>
+          <a:prstGeom xmlns:a="http://schemas.openxmlformats.org/drawingml/2006/main" prst="rect">
+            <a:avLst/>
+          </a:prstGeom>
+          <a:noFill xmlns:a="http://schemas.openxmlformats.org/drawingml/2006/main"/>
+          <a:ln xmlns:a="http://schemas.openxmlformats.org/drawingml/2006/main" w="0">
+            <a:noFill/>
+            <a:prstDash val="solid"/>
+          </a:ln>
+        </p:spPr>
+        <p:txBody>
+          <a:bodyPr xmlns:a="http://schemas.openxmlformats.org/drawingml/2006/main" wrap="square" lIns="0" tIns="0" rIns="0" bIns="0" anchor="t">
+            <a:normAutofit fontScale="100000"/>
+          </a:bodyPr>
+          <a:lstStyle xmlns:a="http://schemas.openxmlformats.org/drawingml/2006/main"/>
+          <a:p xmlns:a="http://schemas.openxmlformats.org/drawingml/2006/main">
+            <a:pPr algn="l">
+              <a:defRPr sz="1275" b="0" i="0">
+                <a:solidFill>
+                  <a:srgbClr val="25364A"/>
+                </a:solidFill>
+                <a:latin typeface="Microsoft YaHei"/>
+                <a:ea typeface="Microsoft YaHei"/>
+                <a:cs typeface="Microsoft YaHei"/>
+              </a:defRPr>
+            </a:pPr>
+            <a:r>
+              <a:rPr sz="1275" b="0" i="0">
+                <a:solidFill>
+                  <a:srgbClr val="25364A"/>
+                </a:solidFill>
+                <a:latin typeface="Microsoft YaHei"/>
+                <a:ea typeface="Microsoft YaHei"/>
+                <a:cs typeface="Microsoft YaHei"/>
+              </a:rPr>
+              <a:t>可利用转移矩阵与Prompt加权，结合分数缩放和阈值校准纠正评分误差。</a:t>
+            </a:r>
+          </a:p>
+        </p:txBody>
+      </p:sp>
+      <p:sp>
+        <p:nvSpPr>
+          <p:cNvPr id="12" name="track-signal-0">
+            <a:extLst xmlns:a="http://schemas.openxmlformats.org/drawingml/2006/main">
+              <a:ext uri="{FF2B5EF4-FFF2-40B4-BE49-F238E27FC236}">
+                <a16:creationId xmlns:a16="http://schemas.microsoft.com/office/drawing/2014/main" id="{4AC3C7FF-90A8-4D7F-81E9-C8F69C91CC6D}"/>
+              </a:ext>
+            </a:extLst>
+          </p:cNvPr>
+          <p:cNvSpPr>
+            <a:spLocks xmlns:a="http://schemas.openxmlformats.org/drawingml/2006/main" noGrp="1"/>
+          </p:cNvSpPr>
+          <p:nvPr/>
+        </p:nvSpPr>
+        <p:spPr>
+          <a:xfrm xmlns:a="http://schemas.openxmlformats.org/drawingml/2006/main">
+            <a:off x="742950" y="4914900"/>
+            <a:ext cx="2933700" cy="247650"/>
           </a:xfrm>
           <a:prstGeom xmlns:a="http://schemas.openxmlformats.org/drawingml/2006/main" prst="rect">
             <a:avLst/>
@@ -5108,9 +5194,218 @@
           <a:lstStyle xmlns:a="http://schemas.openxmlformats.org/drawingml/2006/main"/>
           <a:p xmlns:a="http://schemas.openxmlformats.org/drawingml/2006/main">
             <a:pPr algn="ctr">
+              <a:defRPr sz="1200" b="1" i="0">
+                <a:solidFill>
+                  <a:srgbClr val="2F6BFF"/>
+                </a:solidFill>
+                <a:latin typeface="Microsoft YaHei"/>
+                <a:ea typeface="Microsoft YaHei"/>
+                <a:cs typeface="Microsoft YaHei"/>
+              </a:defRPr>
+            </a:pPr>
+            <a:r>
+              <a:rPr sz="1200" b="1" i="0">
+                <a:solidFill>
+                  <a:srgbClr val="2F6BFF"/>
+                </a:solidFill>
+                <a:latin typeface="Microsoft YaHei"/>
+                <a:ea typeface="Microsoft YaHei"/>
+                <a:cs typeface="Microsoft YaHei"/>
+              </a:rPr>
+              <a:t>对应：任务偏好／分数／权重／阈值校准</a:t>
+            </a:r>
+          </a:p>
+        </p:txBody>
+      </p:sp>
+      <p:sp>
+        <p:nvSpPr>
+          <p:cNvPr id="13" name="track-1">
+            <a:extLst xmlns:a="http://schemas.openxmlformats.org/drawingml/2006/main">
+              <a:ext uri="{FF2B5EF4-FFF2-40B4-BE49-F238E27FC236}">
+                <a16:creationId xmlns:a16="http://schemas.microsoft.com/office/drawing/2014/main" id="{F3881286-DFF2-4ED8-B70B-4BA276DBB8F4}"/>
+              </a:ext>
+            </a:extLst>
+          </p:cNvPr>
+          <p:cNvSpPr>
+            <a:spLocks xmlns:a="http://schemas.openxmlformats.org/drawingml/2006/main" noGrp="1"/>
+          </p:cNvSpPr>
+          <p:nvPr/>
+        </p:nvSpPr>
+        <p:spPr>
+          <a:xfrm xmlns:a="http://schemas.openxmlformats.org/drawingml/2006/main">
+            <a:off x="4248150" y="1581150"/>
+            <a:ext cx="3390900" cy="3714750"/>
+          </a:xfrm>
+          <a:prstGeom xmlns:a="http://schemas.openxmlformats.org/drawingml/2006/main" prst="roundRect">
+            <a:avLst>
+              <a:gd name="adj" fmla="val 3371"/>
+            </a:avLst>
+          </a:prstGeom>
+          <a:solidFill xmlns:a="http://schemas.openxmlformats.org/drawingml/2006/main">
+            <a:srgbClr val="F1EDFF"/>
+          </a:solidFill>
+          <a:ln xmlns:a="http://schemas.openxmlformats.org/drawingml/2006/main" w="9525">
+            <a:solidFill>
+              <a:srgbClr val="F1EDFF"/>
+            </a:solidFill>
+            <a:prstDash val="solid"/>
+          </a:ln>
+        </p:spPr>
+      </p:sp>
+      <p:sp>
+        <p:nvSpPr>
+          <p:cNvPr id="14" name="track-no-1">
+            <a:extLst xmlns:a="http://schemas.openxmlformats.org/drawingml/2006/main">
+              <a:ext uri="{FF2B5EF4-FFF2-40B4-BE49-F238E27FC236}">
+                <a16:creationId xmlns:a16="http://schemas.microsoft.com/office/drawing/2014/main" id="{0B631EFD-3AAD-45B2-8A81-3527FF249F49}"/>
+              </a:ext>
+            </a:extLst>
+          </p:cNvPr>
+          <p:cNvSpPr>
+            <a:spLocks xmlns:a="http://schemas.openxmlformats.org/drawingml/2006/main" noGrp="1"/>
+          </p:cNvSpPr>
+          <p:nvPr/>
+        </p:nvSpPr>
+        <p:spPr>
+          <a:xfrm xmlns:a="http://schemas.openxmlformats.org/drawingml/2006/main">
+            <a:off x="4476750" y="1809750"/>
+            <a:ext cx="552450" cy="342900"/>
+          </a:xfrm>
+          <a:prstGeom xmlns:a="http://schemas.openxmlformats.org/drawingml/2006/main" prst="rect">
+            <a:avLst/>
+          </a:prstGeom>
+          <a:noFill xmlns:a="http://schemas.openxmlformats.org/drawingml/2006/main"/>
+          <a:ln xmlns:a="http://schemas.openxmlformats.org/drawingml/2006/main" w="0">
+            <a:noFill/>
+            <a:prstDash val="solid"/>
+          </a:ln>
+        </p:spPr>
+        <p:txBody>
+          <a:bodyPr xmlns:a="http://schemas.openxmlformats.org/drawingml/2006/main" wrap="square" lIns="0" tIns="0" rIns="0" bIns="0" anchor="t">
+            <a:normAutofit fontScale="100000"/>
+          </a:bodyPr>
+          <a:lstStyle xmlns:a="http://schemas.openxmlformats.org/drawingml/2006/main"/>
+          <a:p xmlns:a="http://schemas.openxmlformats.org/drawingml/2006/main">
+            <a:pPr algn="l">
+              <a:defRPr sz="2025" b="1" i="0">
+                <a:solidFill>
+                  <a:srgbClr val="7B61D1"/>
+                </a:solidFill>
+                <a:latin typeface="Microsoft YaHei"/>
+                <a:ea typeface="Microsoft YaHei"/>
+                <a:cs typeface="Microsoft YaHei"/>
+              </a:defRPr>
+            </a:pPr>
+            <a:r>
+              <a:rPr sz="2025" b="1" i="0">
+                <a:solidFill>
+                  <a:srgbClr val="7B61D1"/>
+                </a:solidFill>
+                <a:latin typeface="Microsoft YaHei"/>
+                <a:ea typeface="Microsoft YaHei"/>
+                <a:cs typeface="Microsoft YaHei"/>
+              </a:rPr>
+              <a:t>02</a:t>
+            </a:r>
+          </a:p>
+        </p:txBody>
+      </p:sp>
+      <p:sp>
+        <p:nvSpPr>
+          <p:cNvPr id="15" name="track-title-1">
+            <a:extLst xmlns:a="http://schemas.openxmlformats.org/drawingml/2006/main">
+              <a:ext uri="{FF2B5EF4-FFF2-40B4-BE49-F238E27FC236}">
+                <a16:creationId xmlns:a16="http://schemas.microsoft.com/office/drawing/2014/main" id="{0005F5DE-9601-46D6-9DFE-EBD19316923A}"/>
+              </a:ext>
+            </a:extLst>
+          </p:cNvPr>
+          <p:cNvSpPr>
+            <a:spLocks xmlns:a="http://schemas.openxmlformats.org/drawingml/2006/main" noGrp="1"/>
+          </p:cNvSpPr>
+          <p:nvPr/>
+        </p:nvSpPr>
+        <p:spPr>
+          <a:xfrm xmlns:a="http://schemas.openxmlformats.org/drawingml/2006/main">
+            <a:off x="5029200" y="1809750"/>
+            <a:ext cx="2343150" cy="342900"/>
+          </a:xfrm>
+          <a:prstGeom xmlns:a="http://schemas.openxmlformats.org/drawingml/2006/main" prst="rect">
+            <a:avLst/>
+          </a:prstGeom>
+          <a:noFill xmlns:a="http://schemas.openxmlformats.org/drawingml/2006/main"/>
+          <a:ln xmlns:a="http://schemas.openxmlformats.org/drawingml/2006/main" w="0">
+            <a:noFill/>
+            <a:prstDash val="solid"/>
+          </a:ln>
+        </p:spPr>
+        <p:txBody>
+          <a:bodyPr xmlns:a="http://schemas.openxmlformats.org/drawingml/2006/main" wrap="square" lIns="0" tIns="0" rIns="0" bIns="0" anchor="t">
+            <a:normAutofit fontScale="100000"/>
+          </a:bodyPr>
+          <a:lstStyle xmlns:a="http://schemas.openxmlformats.org/drawingml/2006/main"/>
+          <a:p xmlns:a="http://schemas.openxmlformats.org/drawingml/2006/main">
+            <a:pPr algn="l">
+              <a:defRPr sz="1725" b="1" i="0">
+                <a:solidFill>
+                  <a:srgbClr val="7B61D1"/>
+                </a:solidFill>
+                <a:latin typeface="Microsoft YaHei"/>
+                <a:ea typeface="Microsoft YaHei"/>
+                <a:cs typeface="Microsoft YaHei"/>
+              </a:defRPr>
+            </a:pPr>
+            <a:r>
+              <a:rPr sz="1725" b="1" i="0">
+                <a:solidFill>
+                  <a:srgbClr val="7B61D1"/>
+                </a:solidFill>
+                <a:latin typeface="Microsoft YaHei"/>
+                <a:ea typeface="Microsoft YaHei"/>
+                <a:cs typeface="Microsoft YaHei"/>
+              </a:rPr>
+              <a:t>邻域共识与鲁棒选择</a:t>
+            </a:r>
+          </a:p>
+        </p:txBody>
+      </p:sp>
+      <p:sp>
+        <p:nvSpPr>
+          <p:cNvPr id="16" name="track-lead-1">
+            <a:extLst xmlns:a="http://schemas.openxmlformats.org/drawingml/2006/main">
+              <a:ext uri="{FF2B5EF4-FFF2-40B4-BE49-F238E27FC236}">
+                <a16:creationId xmlns:a16="http://schemas.microsoft.com/office/drawing/2014/main" id="{383FA7A2-5307-4496-B6E7-1B4FD7F1D862}"/>
+              </a:ext>
+            </a:extLst>
+          </p:cNvPr>
+          <p:cNvSpPr>
+            <a:spLocks xmlns:a="http://schemas.openxmlformats.org/drawingml/2006/main" noGrp="1"/>
+          </p:cNvSpPr>
+          <p:nvPr/>
+        </p:nvSpPr>
+        <p:spPr>
+          <a:xfrm xmlns:a="http://schemas.openxmlformats.org/drawingml/2006/main">
+            <a:off x="4476750" y="2400300"/>
+            <a:ext cx="2933700" cy="895350"/>
+          </a:xfrm>
+          <a:prstGeom xmlns:a="http://schemas.openxmlformats.org/drawingml/2006/main" prst="rect">
+            <a:avLst/>
+          </a:prstGeom>
+          <a:noFill xmlns:a="http://schemas.openxmlformats.org/drawingml/2006/main"/>
+          <a:ln xmlns:a="http://schemas.openxmlformats.org/drawingml/2006/main" w="0">
+            <a:noFill/>
+            <a:prstDash val="solid"/>
+          </a:ln>
+        </p:spPr>
+        <p:txBody>
+          <a:bodyPr xmlns:a="http://schemas.openxmlformats.org/drawingml/2006/main" wrap="square" lIns="0" tIns="0" rIns="0" bIns="0" anchor="t">
+            <a:normAutofit fontScale="100000"/>
+          </a:bodyPr>
+          <a:lstStyle xmlns:a="http://schemas.openxmlformats.org/drawingml/2006/main"/>
+          <a:p xmlns:a="http://schemas.openxmlformats.org/drawingml/2006/main">
+            <a:pPr algn="l">
               <a:defRPr sz="1425" b="1" i="0">
                 <a:solidFill>
-                  <a:srgbClr val="2F6BFF"/>
+                  <a:srgbClr val="12263A"/>
                 </a:solidFill>
                 <a:latin typeface="Microsoft YaHei"/>
                 <a:ea typeface="Microsoft YaHei"/>
@@ -5120,23 +5415,801 @@
             <a:r>
               <a:rPr sz="1425" b="1" i="0">
                 <a:solidFill>
-                  <a:srgbClr val="2F6BFF"/>
-                </a:solidFill>
-                <a:latin typeface="Microsoft YaHei"/>
-                <a:ea typeface="Microsoft YaHei"/>
-                <a:cs typeface="Microsoft YaHei"/>
-              </a:rPr>
-              <a:t>共同趋势：任务化Rubric → VLM自动评估 → 人工校验 → 数据筛选与训练回流</a:t>
-            </a:r>
-          </a:p>
-        </p:txBody>
-      </p:sp>
-      <p:sp>
-        <p:nvSpPr>
-          <p:cNvPr id="13" name="source-650-0.4428498297981984">
-            <a:extLst xmlns:a="http://schemas.openxmlformats.org/drawingml/2006/main">
-              <a:ext uri="{FF2B5EF4-FFF2-40B4-BE49-F238E27FC236}">
-                <a16:creationId xmlns:a16="http://schemas.microsoft.com/office/drawing/2014/main" id="{AC9763D8-6D35-4B1D-B24B-21541F5F9DCC}"/>
+                  <a:srgbClr val="12263A"/>
+                </a:solidFill>
+                <a:latin typeface="Microsoft YaHei"/>
+                <a:ea typeface="Microsoft YaHei"/>
+                <a:cs typeface="Microsoft YaHei"/>
+              </a:rPr>
+              <a:t>不把一次Prompt或单一权重配置当作最终结论，而是在相邻偏好上形成候选池。</a:t>
+            </a:r>
+          </a:p>
+        </p:txBody>
+      </p:sp>
+      <p:sp>
+        <p:nvSpPr>
+          <p:cNvPr id="17" name="track-divider-1">
+            <a:extLst xmlns:a="http://schemas.openxmlformats.org/drawingml/2006/main">
+              <a:ext uri="{FF2B5EF4-FFF2-40B4-BE49-F238E27FC236}">
+                <a16:creationId xmlns:a16="http://schemas.microsoft.com/office/drawing/2014/main" id="{F06D91C3-E794-4894-9C76-8BF649F639C0}"/>
+              </a:ext>
+            </a:extLst>
+          </p:cNvPr>
+          <p:cNvSpPr>
+            <a:spLocks xmlns:a="http://schemas.openxmlformats.org/drawingml/2006/main" noGrp="1"/>
+          </p:cNvSpPr>
+          <p:nvPr/>
+        </p:nvSpPr>
+        <p:spPr>
+          <a:xfrm xmlns:a="http://schemas.openxmlformats.org/drawingml/2006/main">
+            <a:off x="4476750" y="3467100"/>
+            <a:ext cx="2933700" cy="19050"/>
+          </a:xfrm>
+          <a:prstGeom xmlns:a="http://schemas.openxmlformats.org/drawingml/2006/main" prst="roundRect">
+            <a:avLst>
+              <a:gd name="adj" fmla="val 50000"/>
+            </a:avLst>
+          </a:prstGeom>
+          <a:solidFill xmlns:a="http://schemas.openxmlformats.org/drawingml/2006/main">
+            <a:srgbClr val="7B61D1"/>
+          </a:solidFill>
+          <a:ln xmlns:a="http://schemas.openxmlformats.org/drawingml/2006/main" w="9525">
+            <a:solidFill>
+              <a:srgbClr val="7B61D1"/>
+            </a:solidFill>
+            <a:prstDash val="solid"/>
+          </a:ln>
+        </p:spPr>
+      </p:sp>
+      <p:sp>
+        <p:nvSpPr>
+          <p:cNvPr id="18" name="track-evidence-label-1">
+            <a:extLst xmlns:a="http://schemas.openxmlformats.org/drawingml/2006/main">
+              <a:ext uri="{FF2B5EF4-FFF2-40B4-BE49-F238E27FC236}">
+                <a16:creationId xmlns:a16="http://schemas.microsoft.com/office/drawing/2014/main" id="{ABABC629-FF21-43CB-B3A8-C856D5F43998}"/>
+              </a:ext>
+            </a:extLst>
+          </p:cNvPr>
+          <p:cNvSpPr>
+            <a:spLocks xmlns:a="http://schemas.openxmlformats.org/drawingml/2006/main" noGrp="1"/>
+          </p:cNvSpPr>
+          <p:nvPr/>
+        </p:nvSpPr>
+        <p:spPr>
+          <a:xfrm xmlns:a="http://schemas.openxmlformats.org/drawingml/2006/main">
+            <a:off x="4476750" y="3676650"/>
+            <a:ext cx="1428750" cy="247650"/>
+          </a:xfrm>
+          <a:prstGeom xmlns:a="http://schemas.openxmlformats.org/drawingml/2006/main" prst="rect">
+            <a:avLst/>
+          </a:prstGeom>
+          <a:noFill xmlns:a="http://schemas.openxmlformats.org/drawingml/2006/main"/>
+          <a:ln xmlns:a="http://schemas.openxmlformats.org/drawingml/2006/main" w="0">
+            <a:noFill/>
+            <a:prstDash val="solid"/>
+          </a:ln>
+        </p:spPr>
+        <p:txBody>
+          <a:bodyPr xmlns:a="http://schemas.openxmlformats.org/drawingml/2006/main" wrap="square" lIns="0" tIns="0" rIns="0" bIns="0" anchor="t">
+            <a:normAutofit fontScale="100000"/>
+          </a:bodyPr>
+          <a:lstStyle xmlns:a="http://schemas.openxmlformats.org/drawingml/2006/main"/>
+          <a:p xmlns:a="http://schemas.openxmlformats.org/drawingml/2006/main">
+            <a:pPr algn="l">
+              <a:defRPr sz="1200" b="1" i="0">
+                <a:solidFill>
+                  <a:srgbClr val="7B61D1"/>
+                </a:solidFill>
+                <a:latin typeface="Microsoft YaHei"/>
+                <a:ea typeface="Microsoft YaHei"/>
+                <a:cs typeface="Microsoft YaHei"/>
+              </a:defRPr>
+            </a:pPr>
+            <a:r>
+              <a:rPr sz="1200" b="1" i="0">
+                <a:solidFill>
+                  <a:srgbClr val="7B61D1"/>
+                </a:solidFill>
+                <a:latin typeface="Microsoft YaHei"/>
+                <a:ea typeface="Microsoft YaHei"/>
+                <a:cs typeface="Microsoft YaHei"/>
+              </a:rPr>
+              <a:t>最新研究结论</a:t>
+            </a:r>
+          </a:p>
+        </p:txBody>
+      </p:sp>
+      <p:sp>
+        <p:nvSpPr>
+          <p:cNvPr id="19" name="track-evidence-1">
+            <a:extLst xmlns:a="http://schemas.openxmlformats.org/drawingml/2006/main">
+              <a:ext uri="{FF2B5EF4-FFF2-40B4-BE49-F238E27FC236}">
+                <a16:creationId xmlns:a16="http://schemas.microsoft.com/office/drawing/2014/main" id="{C9DDE856-12BD-42B0-A330-501711587000}"/>
+              </a:ext>
+            </a:extLst>
+          </p:cNvPr>
+          <p:cNvSpPr>
+            <a:spLocks xmlns:a="http://schemas.openxmlformats.org/drawingml/2006/main" noGrp="1"/>
+          </p:cNvSpPr>
+          <p:nvPr/>
+        </p:nvSpPr>
+        <p:spPr>
+          <a:xfrm xmlns:a="http://schemas.openxmlformats.org/drawingml/2006/main">
+            <a:off x="4476750" y="4019550"/>
+            <a:ext cx="2933700" cy="742950"/>
+          </a:xfrm>
+          <a:prstGeom xmlns:a="http://schemas.openxmlformats.org/drawingml/2006/main" prst="rect">
+            <a:avLst/>
+          </a:prstGeom>
+          <a:noFill xmlns:a="http://schemas.openxmlformats.org/drawingml/2006/main"/>
+          <a:ln xmlns:a="http://schemas.openxmlformats.org/drawingml/2006/main" w="0">
+            <a:noFill/>
+            <a:prstDash val="solid"/>
+          </a:ln>
+        </p:spPr>
+        <p:txBody>
+          <a:bodyPr xmlns:a="http://schemas.openxmlformats.org/drawingml/2006/main" wrap="square" lIns="0" tIns="0" rIns="0" bIns="0" anchor="t">
+            <a:normAutofit fontScale="100000"/>
+          </a:bodyPr>
+          <a:lstStyle xmlns:a="http://schemas.openxmlformats.org/drawingml/2006/main"/>
+          <a:p xmlns:a="http://schemas.openxmlformats.org/drawingml/2006/main">
+            <a:pPr algn="l">
+              <a:defRPr sz="1275" b="0" i="0">
+                <a:solidFill>
+                  <a:srgbClr val="25364A"/>
+                </a:solidFill>
+                <a:latin typeface="Microsoft YaHei"/>
+                <a:ea typeface="Microsoft YaHei"/>
+                <a:cs typeface="Microsoft YaHei"/>
+              </a:defRPr>
+            </a:pPr>
+            <a:r>
+              <a:rPr sz="1275" b="0" i="0">
+                <a:solidFill>
+                  <a:srgbClr val="25364A"/>
+                </a:solidFill>
+                <a:latin typeface="Microsoft YaHei"/>
+                <a:ea typeface="Microsoft YaHei"/>
+                <a:cs typeface="Microsoft YaHei"/>
+              </a:rPr>
+              <a:t>2026年研究显示：无需重训练，邻域共识在长尾偏好上取得最高69%的胜率。</a:t>
+            </a:r>
+          </a:p>
+        </p:txBody>
+      </p:sp>
+      <p:sp>
+        <p:nvSpPr>
+          <p:cNvPr id="20" name="track-signal-1">
+            <a:extLst xmlns:a="http://schemas.openxmlformats.org/drawingml/2006/main">
+              <a:ext uri="{FF2B5EF4-FFF2-40B4-BE49-F238E27FC236}">
+                <a16:creationId xmlns:a16="http://schemas.microsoft.com/office/drawing/2014/main" id="{626828E2-BD6C-4A28-A722-C5B3FCF13F93}"/>
+              </a:ext>
+            </a:extLst>
+          </p:cNvPr>
+          <p:cNvSpPr>
+            <a:spLocks xmlns:a="http://schemas.openxmlformats.org/drawingml/2006/main" noGrp="1"/>
+          </p:cNvSpPr>
+          <p:nvPr/>
+        </p:nvSpPr>
+        <p:spPr>
+          <a:xfrm xmlns:a="http://schemas.openxmlformats.org/drawingml/2006/main">
+            <a:off x="4476750" y="4914900"/>
+            <a:ext cx="2933700" cy="247650"/>
+          </a:xfrm>
+          <a:prstGeom xmlns:a="http://schemas.openxmlformats.org/drawingml/2006/main" prst="rect">
+            <a:avLst/>
+          </a:prstGeom>
+          <a:noFill xmlns:a="http://schemas.openxmlformats.org/drawingml/2006/main"/>
+          <a:ln xmlns:a="http://schemas.openxmlformats.org/drawingml/2006/main" w="0">
+            <a:noFill/>
+            <a:prstDash val="solid"/>
+          </a:ln>
+        </p:spPr>
+        <p:txBody>
+          <a:bodyPr xmlns:a="http://schemas.openxmlformats.org/drawingml/2006/main" wrap="square" lIns="0" tIns="0" rIns="0" bIns="0" anchor="t">
+            <a:normAutofit fontScale="100000"/>
+          </a:bodyPr>
+          <a:lstStyle xmlns:a="http://schemas.openxmlformats.org/drawingml/2006/main"/>
+          <a:p xmlns:a="http://schemas.openxmlformats.org/drawingml/2006/main">
+            <a:pPr algn="ctr">
+              <a:defRPr sz="1200" b="1" i="0">
+                <a:solidFill>
+                  <a:srgbClr val="7B61D1"/>
+                </a:solidFill>
+                <a:latin typeface="Microsoft YaHei"/>
+                <a:ea typeface="Microsoft YaHei"/>
+                <a:cs typeface="Microsoft YaHei"/>
+              </a:defRPr>
+            </a:pPr>
+            <a:r>
+              <a:rPr sz="1200" b="1" i="0">
+                <a:solidFill>
+                  <a:srgbClr val="7B61D1"/>
+                </a:solidFill>
+                <a:latin typeface="Microsoft YaHei"/>
+                <a:ea typeface="Microsoft YaHei"/>
+                <a:cs typeface="Microsoft YaHei"/>
+              </a:rPr>
+              <a:t>对应：多视角／分歧检测／保守选择</a:t>
+            </a:r>
+          </a:p>
+        </p:txBody>
+      </p:sp>
+      <p:sp>
+        <p:nvSpPr>
+          <p:cNvPr id="21" name="track-2">
+            <a:extLst xmlns:a="http://schemas.openxmlformats.org/drawingml/2006/main">
+              <a:ext uri="{FF2B5EF4-FFF2-40B4-BE49-F238E27FC236}">
+                <a16:creationId xmlns:a16="http://schemas.microsoft.com/office/drawing/2014/main" id="{B6F85723-20BD-4626-8A10-07FBAEC9E872}"/>
+              </a:ext>
+            </a:extLst>
+          </p:cNvPr>
+          <p:cNvSpPr>
+            <a:spLocks xmlns:a="http://schemas.openxmlformats.org/drawingml/2006/main" noGrp="1"/>
+          </p:cNvSpPr>
+          <p:nvPr/>
+        </p:nvSpPr>
+        <p:spPr>
+          <a:xfrm xmlns:a="http://schemas.openxmlformats.org/drawingml/2006/main">
+            <a:off x="7981950" y="1581150"/>
+            <a:ext cx="3390900" cy="3714750"/>
+          </a:xfrm>
+          <a:prstGeom xmlns:a="http://schemas.openxmlformats.org/drawingml/2006/main" prst="roundRect">
+            <a:avLst>
+              <a:gd name="adj" fmla="val 3371"/>
+            </a:avLst>
+          </a:prstGeom>
+          <a:solidFill xmlns:a="http://schemas.openxmlformats.org/drawingml/2006/main">
+            <a:srgbClr val="E7F6F3"/>
+          </a:solidFill>
+          <a:ln xmlns:a="http://schemas.openxmlformats.org/drawingml/2006/main" w="9525">
+            <a:solidFill>
+              <a:srgbClr val="E7F6F3"/>
+            </a:solidFill>
+            <a:prstDash val="solid"/>
+          </a:ln>
+        </p:spPr>
+      </p:sp>
+      <p:sp>
+        <p:nvSpPr>
+          <p:cNvPr id="22" name="track-no-2">
+            <a:extLst xmlns:a="http://schemas.openxmlformats.org/drawingml/2006/main">
+              <a:ext uri="{FF2B5EF4-FFF2-40B4-BE49-F238E27FC236}">
+                <a16:creationId xmlns:a16="http://schemas.microsoft.com/office/drawing/2014/main" id="{C77E9B07-E11F-4A3B-A418-F50083C3D081}"/>
+              </a:ext>
+            </a:extLst>
+          </p:cNvPr>
+          <p:cNvSpPr>
+            <a:spLocks xmlns:a="http://schemas.openxmlformats.org/drawingml/2006/main" noGrp="1"/>
+          </p:cNvSpPr>
+          <p:nvPr/>
+        </p:nvSpPr>
+        <p:spPr>
+          <a:xfrm xmlns:a="http://schemas.openxmlformats.org/drawingml/2006/main">
+            <a:off x="8210550" y="1809750"/>
+            <a:ext cx="552450" cy="342900"/>
+          </a:xfrm>
+          <a:prstGeom xmlns:a="http://schemas.openxmlformats.org/drawingml/2006/main" prst="rect">
+            <a:avLst/>
+          </a:prstGeom>
+          <a:noFill xmlns:a="http://schemas.openxmlformats.org/drawingml/2006/main"/>
+          <a:ln xmlns:a="http://schemas.openxmlformats.org/drawingml/2006/main" w="0">
+            <a:noFill/>
+            <a:prstDash val="solid"/>
+          </a:ln>
+        </p:spPr>
+        <p:txBody>
+          <a:bodyPr xmlns:a="http://schemas.openxmlformats.org/drawingml/2006/main" wrap="square" lIns="0" tIns="0" rIns="0" bIns="0" anchor="t">
+            <a:normAutofit fontScale="100000"/>
+          </a:bodyPr>
+          <a:lstStyle xmlns:a="http://schemas.openxmlformats.org/drawingml/2006/main"/>
+          <a:p xmlns:a="http://schemas.openxmlformats.org/drawingml/2006/main">
+            <a:pPr algn="l">
+              <a:defRPr sz="2025" b="1" i="0">
+                <a:solidFill>
+                  <a:srgbClr val="159A91"/>
+                </a:solidFill>
+                <a:latin typeface="Microsoft YaHei"/>
+                <a:ea typeface="Microsoft YaHei"/>
+                <a:cs typeface="Microsoft YaHei"/>
+              </a:defRPr>
+            </a:pPr>
+            <a:r>
+              <a:rPr sz="2025" b="1" i="0">
+                <a:solidFill>
+                  <a:srgbClr val="159A91"/>
+                </a:solidFill>
+                <a:latin typeface="Microsoft YaHei"/>
+                <a:ea typeface="Microsoft YaHei"/>
+                <a:cs typeface="Microsoft YaHei"/>
+              </a:rPr>
+              <a:t>03</a:t>
+            </a:r>
+          </a:p>
+        </p:txBody>
+      </p:sp>
+      <p:sp>
+        <p:nvSpPr>
+          <p:cNvPr id="23" name="track-title-2">
+            <a:extLst xmlns:a="http://schemas.openxmlformats.org/drawingml/2006/main">
+              <a:ext uri="{FF2B5EF4-FFF2-40B4-BE49-F238E27FC236}">
+                <a16:creationId xmlns:a16="http://schemas.microsoft.com/office/drawing/2014/main" id="{65674DED-ED1C-4F75-977A-70F5F01A96F9}"/>
+              </a:ext>
+            </a:extLst>
+          </p:cNvPr>
+          <p:cNvSpPr>
+            <a:spLocks xmlns:a="http://schemas.openxmlformats.org/drawingml/2006/main" noGrp="1"/>
+          </p:cNvSpPr>
+          <p:nvPr/>
+        </p:nvSpPr>
+        <p:spPr>
+          <a:xfrm xmlns:a="http://schemas.openxmlformats.org/drawingml/2006/main">
+            <a:off x="8763000" y="1809750"/>
+            <a:ext cx="2343150" cy="342900"/>
+          </a:xfrm>
+          <a:prstGeom xmlns:a="http://schemas.openxmlformats.org/drawingml/2006/main" prst="rect">
+            <a:avLst/>
+          </a:prstGeom>
+          <a:noFill xmlns:a="http://schemas.openxmlformats.org/drawingml/2006/main"/>
+          <a:ln xmlns:a="http://schemas.openxmlformats.org/drawingml/2006/main" w="0">
+            <a:noFill/>
+            <a:prstDash val="solid"/>
+          </a:ln>
+        </p:spPr>
+        <p:txBody>
+          <a:bodyPr xmlns:a="http://schemas.openxmlformats.org/drawingml/2006/main" wrap="square" lIns="0" tIns="0" rIns="0" bIns="0" anchor="t">
+            <a:normAutofit fontScale="100000"/>
+          </a:bodyPr>
+          <a:lstStyle xmlns:a="http://schemas.openxmlformats.org/drawingml/2006/main"/>
+          <a:p xmlns:a="http://schemas.openxmlformats.org/drawingml/2006/main">
+            <a:pPr algn="l">
+              <a:defRPr sz="1725" b="1" i="0">
+                <a:solidFill>
+                  <a:srgbClr val="159A91"/>
+                </a:solidFill>
+                <a:latin typeface="Microsoft YaHei"/>
+                <a:ea typeface="Microsoft YaHei"/>
+                <a:cs typeface="Microsoft YaHei"/>
+              </a:defRPr>
+            </a:pPr>
+            <a:r>
+              <a:rPr sz="1725" b="1" i="0">
+                <a:solidFill>
+                  <a:srgbClr val="159A91"/>
+                </a:solidFill>
+                <a:latin typeface="Microsoft YaHei"/>
+                <a:ea typeface="Microsoft YaHei"/>
+                <a:cs typeface="Microsoft YaHei"/>
+              </a:rPr>
+              <a:t>证据核验与人机协同</a:t>
+            </a:r>
+          </a:p>
+        </p:txBody>
+      </p:sp>
+      <p:sp>
+        <p:nvSpPr>
+          <p:cNvPr id="24" name="track-lead-2">
+            <a:extLst xmlns:a="http://schemas.openxmlformats.org/drawingml/2006/main">
+              <a:ext uri="{FF2B5EF4-FFF2-40B4-BE49-F238E27FC236}">
+                <a16:creationId xmlns:a16="http://schemas.microsoft.com/office/drawing/2014/main" id="{F827189C-2EA4-425F-96C1-BCA720CBE462}"/>
+              </a:ext>
+            </a:extLst>
+          </p:cNvPr>
+          <p:cNvSpPr>
+            <a:spLocks xmlns:a="http://schemas.openxmlformats.org/drawingml/2006/main" noGrp="1"/>
+          </p:cNvSpPr>
+          <p:nvPr/>
+        </p:nvSpPr>
+        <p:spPr>
+          <a:xfrm xmlns:a="http://schemas.openxmlformats.org/drawingml/2006/main">
+            <a:off x="8210550" y="2400300"/>
+            <a:ext cx="2933700" cy="895350"/>
+          </a:xfrm>
+          <a:prstGeom xmlns:a="http://schemas.openxmlformats.org/drawingml/2006/main" prst="rect">
+            <a:avLst/>
+          </a:prstGeom>
+          <a:noFill xmlns:a="http://schemas.openxmlformats.org/drawingml/2006/main"/>
+          <a:ln xmlns:a="http://schemas.openxmlformats.org/drawingml/2006/main" w="0">
+            <a:noFill/>
+            <a:prstDash val="solid"/>
+          </a:ln>
+        </p:spPr>
+        <p:txBody>
+          <a:bodyPr xmlns:a="http://schemas.openxmlformats.org/drawingml/2006/main" wrap="square" lIns="0" tIns="0" rIns="0" bIns="0" anchor="t">
+            <a:normAutofit fontScale="100000"/>
+          </a:bodyPr>
+          <a:lstStyle xmlns:a="http://schemas.openxmlformats.org/drawingml/2006/main"/>
+          <a:p xmlns:a="http://schemas.openxmlformats.org/drawingml/2006/main">
+            <a:pPr algn="l">
+              <a:defRPr sz="1425" b="1" i="0">
+                <a:solidFill>
+                  <a:srgbClr val="12263A"/>
+                </a:solidFill>
+                <a:latin typeface="Microsoft YaHei"/>
+                <a:ea typeface="Microsoft YaHei"/>
+                <a:cs typeface="Microsoft YaHei"/>
+              </a:defRPr>
+            </a:pPr>
+            <a:r>
+              <a:rPr sz="1425" b="1" i="0">
+                <a:solidFill>
+                  <a:srgbClr val="12263A"/>
+                </a:solidFill>
+                <a:latin typeface="Microsoft YaHei"/>
+                <a:ea typeface="Microsoft YaHei"/>
+                <a:cs typeface="Microsoft YaHei"/>
+              </a:rPr>
+              <a:t>模型分数必须能回到对象、属性、区域、OCR或结构化视觉证据上核验。</a:t>
+            </a:r>
+          </a:p>
+        </p:txBody>
+      </p:sp>
+      <p:sp>
+        <p:nvSpPr>
+          <p:cNvPr id="25" name="track-divider-2">
+            <a:extLst xmlns:a="http://schemas.openxmlformats.org/drawingml/2006/main">
+              <a:ext uri="{FF2B5EF4-FFF2-40B4-BE49-F238E27FC236}">
+                <a16:creationId xmlns:a16="http://schemas.microsoft.com/office/drawing/2014/main" id="{772797F2-E611-4DAE-BFCB-0257AE161E5E}"/>
+              </a:ext>
+            </a:extLst>
+          </p:cNvPr>
+          <p:cNvSpPr>
+            <a:spLocks xmlns:a="http://schemas.openxmlformats.org/drawingml/2006/main" noGrp="1"/>
+          </p:cNvSpPr>
+          <p:nvPr/>
+        </p:nvSpPr>
+        <p:spPr>
+          <a:xfrm xmlns:a="http://schemas.openxmlformats.org/drawingml/2006/main">
+            <a:off x="8210550" y="3467100"/>
+            <a:ext cx="2933700" cy="19050"/>
+          </a:xfrm>
+          <a:prstGeom xmlns:a="http://schemas.openxmlformats.org/drawingml/2006/main" prst="roundRect">
+            <a:avLst>
+              <a:gd name="adj" fmla="val 50000"/>
+            </a:avLst>
+          </a:prstGeom>
+          <a:solidFill xmlns:a="http://schemas.openxmlformats.org/drawingml/2006/main">
+            <a:srgbClr val="159A91"/>
+          </a:solidFill>
+          <a:ln xmlns:a="http://schemas.openxmlformats.org/drawingml/2006/main" w="9525">
+            <a:solidFill>
+              <a:srgbClr val="159A91"/>
+            </a:solidFill>
+            <a:prstDash val="solid"/>
+          </a:ln>
+        </p:spPr>
+      </p:sp>
+      <p:sp>
+        <p:nvSpPr>
+          <p:cNvPr id="26" name="track-evidence-label-2">
+            <a:extLst xmlns:a="http://schemas.openxmlformats.org/drawingml/2006/main">
+              <a:ext uri="{FF2B5EF4-FFF2-40B4-BE49-F238E27FC236}">
+                <a16:creationId xmlns:a16="http://schemas.microsoft.com/office/drawing/2014/main" id="{A0C4B789-D667-4411-AA03-F3FE09335008}"/>
+              </a:ext>
+            </a:extLst>
+          </p:cNvPr>
+          <p:cNvSpPr>
+            <a:spLocks xmlns:a="http://schemas.openxmlformats.org/drawingml/2006/main" noGrp="1"/>
+          </p:cNvSpPr>
+          <p:nvPr/>
+        </p:nvSpPr>
+        <p:spPr>
+          <a:xfrm xmlns:a="http://schemas.openxmlformats.org/drawingml/2006/main">
+            <a:off x="8210550" y="3676650"/>
+            <a:ext cx="1428750" cy="247650"/>
+          </a:xfrm>
+          <a:prstGeom xmlns:a="http://schemas.openxmlformats.org/drawingml/2006/main" prst="rect">
+            <a:avLst/>
+          </a:prstGeom>
+          <a:noFill xmlns:a="http://schemas.openxmlformats.org/drawingml/2006/main"/>
+          <a:ln xmlns:a="http://schemas.openxmlformats.org/drawingml/2006/main" w="0">
+            <a:noFill/>
+            <a:prstDash val="solid"/>
+          </a:ln>
+        </p:spPr>
+        <p:txBody>
+          <a:bodyPr xmlns:a="http://schemas.openxmlformats.org/drawingml/2006/main" wrap="square" lIns="0" tIns="0" rIns="0" bIns="0" anchor="t">
+            <a:normAutofit fontScale="100000"/>
+          </a:bodyPr>
+          <a:lstStyle xmlns:a="http://schemas.openxmlformats.org/drawingml/2006/main"/>
+          <a:p xmlns:a="http://schemas.openxmlformats.org/drawingml/2006/main">
+            <a:pPr algn="l">
+              <a:defRPr sz="1200" b="1" i="0">
+                <a:solidFill>
+                  <a:srgbClr val="159A91"/>
+                </a:solidFill>
+                <a:latin typeface="Microsoft YaHei"/>
+                <a:ea typeface="Microsoft YaHei"/>
+                <a:cs typeface="Microsoft YaHei"/>
+              </a:defRPr>
+            </a:pPr>
+            <a:r>
+              <a:rPr sz="1200" b="1" i="0">
+                <a:solidFill>
+                  <a:srgbClr val="159A91"/>
+                </a:solidFill>
+                <a:latin typeface="Microsoft YaHei"/>
+                <a:ea typeface="Microsoft YaHei"/>
+                <a:cs typeface="Microsoft YaHei"/>
+              </a:rPr>
+              <a:t>最新研究结论</a:t>
+            </a:r>
+          </a:p>
+        </p:txBody>
+      </p:sp>
+      <p:sp>
+        <p:nvSpPr>
+          <p:cNvPr id="27" name="track-evidence-2">
+            <a:extLst xmlns:a="http://schemas.openxmlformats.org/drawingml/2006/main">
+              <a:ext uri="{FF2B5EF4-FFF2-40B4-BE49-F238E27FC236}">
+                <a16:creationId xmlns:a16="http://schemas.microsoft.com/office/drawing/2014/main" id="{D3C433BB-264E-4448-BB12-158FE4B32450}"/>
+              </a:ext>
+            </a:extLst>
+          </p:cNvPr>
+          <p:cNvSpPr>
+            <a:spLocks xmlns:a="http://schemas.openxmlformats.org/drawingml/2006/main" noGrp="1"/>
+          </p:cNvSpPr>
+          <p:nvPr/>
+        </p:nvSpPr>
+        <p:spPr>
+          <a:xfrm xmlns:a="http://schemas.openxmlformats.org/drawingml/2006/main">
+            <a:off x="8210550" y="4019550"/>
+            <a:ext cx="2933700" cy="742950"/>
+          </a:xfrm>
+          <a:prstGeom xmlns:a="http://schemas.openxmlformats.org/drawingml/2006/main" prst="rect">
+            <a:avLst/>
+          </a:prstGeom>
+          <a:noFill xmlns:a="http://schemas.openxmlformats.org/drawingml/2006/main"/>
+          <a:ln xmlns:a="http://schemas.openxmlformats.org/drawingml/2006/main" w="0">
+            <a:noFill/>
+            <a:prstDash val="solid"/>
+          </a:ln>
+        </p:spPr>
+        <p:txBody>
+          <a:bodyPr xmlns:a="http://schemas.openxmlformats.org/drawingml/2006/main" wrap="square" lIns="0" tIns="0" rIns="0" bIns="0" anchor="t">
+            <a:normAutofit fontScale="100000"/>
+          </a:bodyPr>
+          <a:lstStyle xmlns:a="http://schemas.openxmlformats.org/drawingml/2006/main"/>
+          <a:p xmlns:a="http://schemas.openxmlformats.org/drawingml/2006/main">
+            <a:pPr algn="l">
+              <a:defRPr sz="1275" b="0" i="0">
+                <a:solidFill>
+                  <a:srgbClr val="25364A"/>
+                </a:solidFill>
+                <a:latin typeface="Microsoft YaHei"/>
+                <a:ea typeface="Microsoft YaHei"/>
+                <a:cs typeface="Microsoft YaHei"/>
+              </a:defRPr>
+            </a:pPr>
+            <a:r>
+              <a:rPr sz="1275" b="0" i="0">
+                <a:solidFill>
+                  <a:srgbClr val="25364A"/>
+                </a:solidFill>
+                <a:latin typeface="Microsoft YaHei"/>
+                <a:ea typeface="Microsoft YaHei"/>
+                <a:cs typeface="Microsoft YaHei"/>
+              </a:rPr>
+              <a:t>研究以场景图和可执行程序核验1.06万条视觉问答，减少对主观Judge的依赖。</a:t>
+            </a:r>
+          </a:p>
+        </p:txBody>
+      </p:sp>
+      <p:sp>
+        <p:nvSpPr>
+          <p:cNvPr id="28" name="track-signal-2">
+            <a:extLst xmlns:a="http://schemas.openxmlformats.org/drawingml/2006/main">
+              <a:ext uri="{FF2B5EF4-FFF2-40B4-BE49-F238E27FC236}">
+                <a16:creationId xmlns:a16="http://schemas.microsoft.com/office/drawing/2014/main" id="{8D4CB693-7DE0-410F-8973-8A119F98C1C6}"/>
+              </a:ext>
+            </a:extLst>
+          </p:cNvPr>
+          <p:cNvSpPr>
+            <a:spLocks xmlns:a="http://schemas.openxmlformats.org/drawingml/2006/main" noGrp="1"/>
+          </p:cNvSpPr>
+          <p:nvPr/>
+        </p:nvSpPr>
+        <p:spPr>
+          <a:xfrm xmlns:a="http://schemas.openxmlformats.org/drawingml/2006/main">
+            <a:off x="8210550" y="4914900"/>
+            <a:ext cx="2933700" cy="247650"/>
+          </a:xfrm>
+          <a:prstGeom xmlns:a="http://schemas.openxmlformats.org/drawingml/2006/main" prst="rect">
+            <a:avLst/>
+          </a:prstGeom>
+          <a:noFill xmlns:a="http://schemas.openxmlformats.org/drawingml/2006/main"/>
+          <a:ln xmlns:a="http://schemas.openxmlformats.org/drawingml/2006/main" w="0">
+            <a:noFill/>
+            <a:prstDash val="solid"/>
+          </a:ln>
+        </p:spPr>
+        <p:txBody>
+          <a:bodyPr xmlns:a="http://schemas.openxmlformats.org/drawingml/2006/main" wrap="square" lIns="0" tIns="0" rIns="0" bIns="0" anchor="t">
+            <a:normAutofit fontScale="100000"/>
+          </a:bodyPr>
+          <a:lstStyle xmlns:a="http://schemas.openxmlformats.org/drawingml/2006/main"/>
+          <a:p xmlns:a="http://schemas.openxmlformats.org/drawingml/2006/main">
+            <a:pPr algn="ctr">
+              <a:defRPr sz="1200" b="1" i="0">
+                <a:solidFill>
+                  <a:srgbClr val="159A91"/>
+                </a:solidFill>
+                <a:latin typeface="Microsoft YaHei"/>
+                <a:ea typeface="Microsoft YaHei"/>
+                <a:cs typeface="Microsoft YaHei"/>
+              </a:defRPr>
+            </a:pPr>
+            <a:r>
+              <a:rPr sz="1200" b="1" i="0">
+                <a:solidFill>
+                  <a:srgbClr val="159A91"/>
+                </a:solidFill>
+                <a:latin typeface="Microsoft YaHei"/>
+                <a:ea typeface="Microsoft YaHei"/>
+                <a:cs typeface="Microsoft YaHei"/>
+              </a:rPr>
+              <a:t>对应：证据仲裁／人工复核／闭环验证</a:t>
+            </a:r>
+          </a:p>
+        </p:txBody>
+      </p:sp>
+      <p:sp>
+        <p:nvSpPr>
+          <p:cNvPr id="29" name="research-conclusion">
+            <a:extLst xmlns:a="http://schemas.openxmlformats.org/drawingml/2006/main">
+              <a:ext uri="{FF2B5EF4-FFF2-40B4-BE49-F238E27FC236}">
+                <a16:creationId xmlns:a16="http://schemas.microsoft.com/office/drawing/2014/main" id="{C9F75DEF-64F4-4B59-8325-514EF012F178}"/>
+              </a:ext>
+            </a:extLst>
+          </p:cNvPr>
+          <p:cNvSpPr>
+            <a:spLocks xmlns:a="http://schemas.openxmlformats.org/drawingml/2006/main" noGrp="1"/>
+          </p:cNvSpPr>
+          <p:nvPr/>
+        </p:nvSpPr>
+        <p:spPr>
+          <a:xfrm xmlns:a="http://schemas.openxmlformats.org/drawingml/2006/main">
+            <a:off x="514350" y="5562600"/>
+            <a:ext cx="11163300" cy="552450"/>
+          </a:xfrm>
+          <a:prstGeom xmlns:a="http://schemas.openxmlformats.org/drawingml/2006/main" prst="roundRect">
+            <a:avLst>
+              <a:gd name="adj" fmla="val 13793"/>
+            </a:avLst>
+          </a:prstGeom>
+          <a:solidFill xmlns:a="http://schemas.openxmlformats.org/drawingml/2006/main">
+            <a:srgbClr val="12263A"/>
+          </a:solidFill>
+          <a:ln xmlns:a="http://schemas.openxmlformats.org/drawingml/2006/main" w="9525">
+            <a:solidFill>
+              <a:srgbClr val="12263A"/>
+            </a:solidFill>
+            <a:prstDash val="solid"/>
+          </a:ln>
+        </p:spPr>
+      </p:sp>
+      <p:sp>
+        <p:nvSpPr>
+          <p:cNvPr id="30" name="auto-text-16">
+            <a:extLst xmlns:a="http://schemas.openxmlformats.org/drawingml/2006/main">
+              <a:ext uri="{FF2B5EF4-FFF2-40B4-BE49-F238E27FC236}">
+                <a16:creationId xmlns:a16="http://schemas.microsoft.com/office/drawing/2014/main" id="{9F1E2C7A-BD7F-48DF-A8A6-23DD41CC1977}"/>
+              </a:ext>
+            </a:extLst>
+          </p:cNvPr>
+          <p:cNvSpPr>
+            <a:spLocks xmlns:a="http://schemas.openxmlformats.org/drawingml/2006/main" noGrp="1"/>
+          </p:cNvSpPr>
+          <p:nvPr/>
+        </p:nvSpPr>
+        <p:spPr>
+          <a:xfrm xmlns:a="http://schemas.openxmlformats.org/drawingml/2006/main">
+            <a:off x="723900" y="5715000"/>
+            <a:ext cx="1047750" cy="266700"/>
+          </a:xfrm>
+          <a:prstGeom xmlns:a="http://schemas.openxmlformats.org/drawingml/2006/main" prst="rect">
+            <a:avLst/>
+          </a:prstGeom>
+          <a:noFill xmlns:a="http://schemas.openxmlformats.org/drawingml/2006/main"/>
+          <a:ln xmlns:a="http://schemas.openxmlformats.org/drawingml/2006/main" w="0">
+            <a:noFill/>
+            <a:prstDash val="solid"/>
+          </a:ln>
+        </p:spPr>
+        <p:txBody>
+          <a:bodyPr xmlns:a="http://schemas.openxmlformats.org/drawingml/2006/main" wrap="square" lIns="0" tIns="0" rIns="0" bIns="0" anchor="t">
+            <a:normAutofit fontScale="100000"/>
+          </a:bodyPr>
+          <a:lstStyle xmlns:a="http://schemas.openxmlformats.org/drawingml/2006/main"/>
+          <a:p xmlns:a="http://schemas.openxmlformats.org/drawingml/2006/main">
+            <a:pPr algn="l">
+              <a:defRPr sz="1350" b="1" i="0">
+                <a:solidFill>
+                  <a:srgbClr val="8EB0FF"/>
+                </a:solidFill>
+                <a:latin typeface="Microsoft YaHei"/>
+                <a:ea typeface="Microsoft YaHei"/>
+                <a:cs typeface="Microsoft YaHei"/>
+              </a:defRPr>
+            </a:pPr>
+            <a:r>
+              <a:rPr sz="1350" b="1" i="0">
+                <a:solidFill>
+                  <a:srgbClr val="8EB0FF"/>
+                </a:solidFill>
+                <a:latin typeface="Microsoft YaHei"/>
+                <a:ea typeface="Microsoft YaHei"/>
+                <a:cs typeface="Microsoft YaHei"/>
+              </a:rPr>
+              <a:t>研究共识</a:t>
+            </a:r>
+          </a:p>
+        </p:txBody>
+      </p:sp>
+      <p:sp>
+        <p:nvSpPr>
+          <p:cNvPr id="31" name="auto-text-17">
+            <a:extLst xmlns:a="http://schemas.openxmlformats.org/drawingml/2006/main">
+              <a:ext uri="{FF2B5EF4-FFF2-40B4-BE49-F238E27FC236}">
+                <a16:creationId xmlns:a16="http://schemas.microsoft.com/office/drawing/2014/main" id="{B809FDEE-B03B-4549-BB9D-C30070D0A056}"/>
+              </a:ext>
+            </a:extLst>
+          </p:cNvPr>
+          <p:cNvSpPr>
+            <a:spLocks xmlns:a="http://schemas.openxmlformats.org/drawingml/2006/main" noGrp="1"/>
+          </p:cNvSpPr>
+          <p:nvPr/>
+        </p:nvSpPr>
+        <p:spPr>
+          <a:xfrm xmlns:a="http://schemas.openxmlformats.org/drawingml/2006/main">
+            <a:off x="1847850" y="5695950"/>
+            <a:ext cx="9525000" cy="285750"/>
+          </a:xfrm>
+          <a:prstGeom xmlns:a="http://schemas.openxmlformats.org/drawingml/2006/main" prst="rect">
+            <a:avLst/>
+          </a:prstGeom>
+          <a:noFill xmlns:a="http://schemas.openxmlformats.org/drawingml/2006/main"/>
+          <a:ln xmlns:a="http://schemas.openxmlformats.org/drawingml/2006/main" w="0">
+            <a:noFill/>
+            <a:prstDash val="solid"/>
+          </a:ln>
+        </p:spPr>
+        <p:txBody>
+          <a:bodyPr xmlns:a="http://schemas.openxmlformats.org/drawingml/2006/main" wrap="square" lIns="0" tIns="0" rIns="0" bIns="0" anchor="t">
+            <a:normAutofit fontScale="100000"/>
+          </a:bodyPr>
+          <a:lstStyle xmlns:a="http://schemas.openxmlformats.org/drawingml/2006/main"/>
+          <a:p xmlns:a="http://schemas.openxmlformats.org/drawingml/2006/main">
+            <a:pPr algn="l">
+              <a:defRPr sz="1500" b="1" i="0">
+                <a:solidFill>
+                  <a:srgbClr val="FFFFFF"/>
+                </a:solidFill>
+                <a:latin typeface="Microsoft YaHei"/>
+                <a:ea typeface="Microsoft YaHei"/>
+                <a:cs typeface="Microsoft YaHei"/>
+              </a:defRPr>
+            </a:pPr>
+            <a:r>
+              <a:rPr sz="1500" b="1" i="0">
+                <a:solidFill>
+                  <a:srgbClr val="FFFFFF"/>
+                </a:solidFill>
+                <a:latin typeface="Microsoft YaHei"/>
+                <a:ea typeface="Microsoft YaHei"/>
+                <a:cs typeface="Microsoft YaHei"/>
+              </a:rPr>
+              <a:t>评估能力的增量来自校准、组合与核验，而不仅是更换一个更大的VLM。</a:t>
+            </a:r>
+          </a:p>
+        </p:txBody>
+      </p:sp>
+      <p:sp>
+        <p:nvSpPr>
+          <p:cNvPr id="32" name="source-650-0.10995500117001122">
+            <a:extLst xmlns:a="http://schemas.openxmlformats.org/drawingml/2006/main">
+              <a:ext uri="{FF2B5EF4-FFF2-40B4-BE49-F238E27FC236}">
+                <a16:creationId xmlns:a16="http://schemas.microsoft.com/office/drawing/2014/main" id="{10D95A6F-D905-42DD-8EE2-9CB626938E8C}"/>
               </a:ext>
             </a:extLst>
           </p:cNvPr>
@@ -5184,7 +6257,7 @@
                 <a:ea typeface="Cambria"/>
                 <a:cs typeface="Cambria"/>
               </a:rPr>
-              <a:t>图源：MJ-Bench（NeurIPS 2025）；Multimodal RewardBench 2（CVPR 2026）</a:t>
+              <a:t>依据：ICLR 2025／2026；ICCV 2025；AAAI 2025相关研究结论</a:t>
             </a:r>
           </a:p>
         </p:txBody>
@@ -5192,7 +6265,7 @@
     </p:spTree>
     <p:extLst>
       <p:ext uri="{BB962C8B-B14F-4D97-AF65-F5344CB8AC3E}">
-        <p14:creationId xmlns:p14="http://schemas.microsoft.com/office/powerpoint/2010/main" val="23789263"/>
+        <p14:creationId xmlns:p14="http://schemas.microsoft.com/office/powerpoint/2010/main" val="1122536046"/>
       </p:ext>
     </p:extLst>
   </p:cSld>
@@ -5223,7 +6296,7 @@
           <p:cNvPr id="28" name="accent-4">
             <a:extLst xmlns:a="http://schemas.openxmlformats.org/drawingml/2006/main">
               <a:ext uri="{FF2B5EF4-FFF2-40B4-BE49-F238E27FC236}">
-                <a16:creationId xmlns:a16="http://schemas.microsoft.com/office/drawing/2014/main" id="{F873B106-55C7-4712-8156-95978284E523}"/>
+                <a16:creationId xmlns:a16="http://schemas.microsoft.com/office/drawing/2014/main" id="{853DA1DD-5DB3-4175-B460-35D1933EF4B9}"/>
               </a:ext>
             </a:extLst>
           </p:cNvPr>
@@ -5258,7 +6331,7 @@
           <p:cNvPr id="2" name="title-4">
             <a:extLst xmlns:a="http://schemas.openxmlformats.org/drawingml/2006/main">
               <a:ext uri="{FF2B5EF4-FFF2-40B4-BE49-F238E27FC236}">
-                <a16:creationId xmlns:a16="http://schemas.microsoft.com/office/drawing/2014/main" id="{4E71CF60-D29D-4A62-B050-5D9AFEB80282}"/>
+                <a16:creationId xmlns:a16="http://schemas.microsoft.com/office/drawing/2014/main" id="{F96CD90E-690C-413A-99AE-773F44EDED66}"/>
               </a:ext>
             </a:extLst>
           </p:cNvPr>
@@ -5316,7 +6389,7 @@
           <p:cNvPr id="3" name="page-4">
             <a:extLst xmlns:a="http://schemas.openxmlformats.org/drawingml/2006/main">
               <a:ext uri="{FF2B5EF4-FFF2-40B4-BE49-F238E27FC236}">
-                <a16:creationId xmlns:a16="http://schemas.microsoft.com/office/drawing/2014/main" id="{3666CB23-3173-453A-9EF3-4556684EF79B}"/>
+                <a16:creationId xmlns:a16="http://schemas.microsoft.com/office/drawing/2014/main" id="{FACCE44B-02C1-46AF-9274-6477663549E4}"/>
               </a:ext>
             </a:extLst>
           </p:cNvPr>
@@ -5371,10 +6444,10 @@
       </p:sp>
       <p:sp>
         <p:nvSpPr>
-          <p:cNvPr id="4" name="auto-text-19">
-            <a:extLst xmlns:a="http://schemas.openxmlformats.org/drawingml/2006/main">
-              <a:ext uri="{FF2B5EF4-FFF2-40B4-BE49-F238E27FC236}">
-                <a16:creationId xmlns:a16="http://schemas.microsoft.com/office/drawing/2014/main" id="{6EF79B60-1356-4EF5-B9C3-5B7CB4E01358}"/>
+          <p:cNvPr id="4" name="auto-text-18">
+            <a:extLst xmlns:a="http://schemas.openxmlformats.org/drawingml/2006/main">
+              <a:ext uri="{FF2B5EF4-FFF2-40B4-BE49-F238E27FC236}">
+                <a16:creationId xmlns:a16="http://schemas.microsoft.com/office/drawing/2014/main" id="{035C6D54-C2BC-4FF5-8649-CC7FC1DA2B62}"/>
               </a:ext>
             </a:extLst>
           </p:cNvPr>
@@ -5429,10 +6502,10 @@
       </p:sp>
       <p:sp>
         <p:nvSpPr>
-          <p:cNvPr id="5" name="auto-text-20">
-            <a:extLst xmlns:a="http://schemas.openxmlformats.org/drawingml/2006/main">
-              <a:ext uri="{FF2B5EF4-FFF2-40B4-BE49-F238E27FC236}">
-                <a16:creationId xmlns:a16="http://schemas.microsoft.com/office/drawing/2014/main" id="{F6DF4BC1-8FE0-4E8D-ABF7-AA20ADBDB6F4}"/>
+          <p:cNvPr id="5" name="auto-text-19">
+            <a:extLst xmlns:a="http://schemas.openxmlformats.org/drawingml/2006/main">
+              <a:ext uri="{FF2B5EF4-FFF2-40B4-BE49-F238E27FC236}">
+                <a16:creationId xmlns:a16="http://schemas.microsoft.com/office/drawing/2014/main" id="{4AF55766-16A0-47DB-B0D6-7B3A9E943A53}"/>
               </a:ext>
             </a:extLst>
           </p:cNvPr>
@@ -5487,10 +6560,10 @@
       </p:sp>
       <p:sp>
         <p:nvSpPr>
-          <p:cNvPr id="6" name="auto-text-21">
-            <a:extLst xmlns:a="http://schemas.openxmlformats.org/drawingml/2006/main">
-              <a:ext uri="{FF2B5EF4-FFF2-40B4-BE49-F238E27FC236}">
-                <a16:creationId xmlns:a16="http://schemas.microsoft.com/office/drawing/2014/main" id="{0184258A-B1A4-4C98-B127-4C5ACE58964D}"/>
+          <p:cNvPr id="6" name="auto-text-20">
+            <a:extLst xmlns:a="http://schemas.openxmlformats.org/drawingml/2006/main">
+              <a:ext uri="{FF2B5EF4-FFF2-40B4-BE49-F238E27FC236}">
+                <a16:creationId xmlns:a16="http://schemas.microsoft.com/office/drawing/2014/main" id="{8AA96BB6-E416-44DE-94BE-031ED5567632}"/>
               </a:ext>
             </a:extLst>
           </p:cNvPr>
@@ -5545,10 +6618,10 @@
       </p:sp>
       <p:sp>
         <p:nvSpPr>
-          <p:cNvPr id="7" name="auto-text-22">
-            <a:extLst xmlns:a="http://schemas.openxmlformats.org/drawingml/2006/main">
-              <a:ext uri="{FF2B5EF4-FFF2-40B4-BE49-F238E27FC236}">
-                <a16:creationId xmlns:a16="http://schemas.microsoft.com/office/drawing/2014/main" id="{BA46CB41-8A3E-4194-BC17-F97CABBF966C}"/>
+          <p:cNvPr id="7" name="auto-text-21">
+            <a:extLst xmlns:a="http://schemas.openxmlformats.org/drawingml/2006/main">
+              <a:ext uri="{FF2B5EF4-FFF2-40B4-BE49-F238E27FC236}">
+                <a16:creationId xmlns:a16="http://schemas.microsoft.com/office/drawing/2014/main" id="{4EA72525-C8AE-4C28-B8EF-2E055DC153A0}"/>
               </a:ext>
             </a:extLst>
           </p:cNvPr>
@@ -5606,7 +6679,7 @@
           <p:cNvPr id="8" name="company-row-0">
             <a:extLst xmlns:a="http://schemas.openxmlformats.org/drawingml/2006/main">
               <a:ext uri="{FF2B5EF4-FFF2-40B4-BE49-F238E27FC236}">
-                <a16:creationId xmlns:a16="http://schemas.microsoft.com/office/drawing/2014/main" id="{334714F6-1DBD-4876-AD5C-27A8E0754E11}"/>
+                <a16:creationId xmlns:a16="http://schemas.microsoft.com/office/drawing/2014/main" id="{0971BFF8-0BC4-4DB5-9F8E-B2826426A7EE}"/>
               </a:ext>
             </a:extLst>
           </p:cNvPr>
@@ -5641,7 +6714,7 @@
           <p:cNvPr id="9" name="company-name-0">
             <a:extLst xmlns:a="http://schemas.openxmlformats.org/drawingml/2006/main">
               <a:ext uri="{FF2B5EF4-FFF2-40B4-BE49-F238E27FC236}">
-                <a16:creationId xmlns:a16="http://schemas.microsoft.com/office/drawing/2014/main" id="{5E33E864-1875-4F04-A5AC-0664D76EB830}"/>
+                <a16:creationId xmlns:a16="http://schemas.microsoft.com/office/drawing/2014/main" id="{E85E1298-A05B-4F5D-BF2D-C44BC25EECF9}"/>
               </a:ext>
             </a:extLst>
           </p:cNvPr>
@@ -5699,7 +6772,7 @@
           <p:cNvPr id="10" name="company-body-0">
             <a:extLst xmlns:a="http://schemas.openxmlformats.org/drawingml/2006/main">
               <a:ext uri="{FF2B5EF4-FFF2-40B4-BE49-F238E27FC236}">
-                <a16:creationId xmlns:a16="http://schemas.microsoft.com/office/drawing/2014/main" id="{A44335B0-BB3C-41BF-9596-E4A44157D710}"/>
+                <a16:creationId xmlns:a16="http://schemas.microsoft.com/office/drawing/2014/main" id="{2F23FF16-FB34-4A51-AD83-2DE93AB1A9EF}"/>
               </a:ext>
             </a:extLst>
           </p:cNvPr>
@@ -5757,7 +6830,7 @@
           <p:cNvPr id="11" name="company-tag-0">
             <a:extLst xmlns:a="http://schemas.openxmlformats.org/drawingml/2006/main">
               <a:ext uri="{FF2B5EF4-FFF2-40B4-BE49-F238E27FC236}">
-                <a16:creationId xmlns:a16="http://schemas.microsoft.com/office/drawing/2014/main" id="{0F91A6A3-B599-4042-AFEE-1EF493F3A96E}"/>
+                <a16:creationId xmlns:a16="http://schemas.microsoft.com/office/drawing/2014/main" id="{3C5055C7-1698-40AD-879D-2A82AC194CA5}"/>
               </a:ext>
             </a:extLst>
           </p:cNvPr>
@@ -5815,7 +6888,7 @@
           <p:cNvPr id="12" name="company-row-1">
             <a:extLst xmlns:a="http://schemas.openxmlformats.org/drawingml/2006/main">
               <a:ext uri="{FF2B5EF4-FFF2-40B4-BE49-F238E27FC236}">
-                <a16:creationId xmlns:a16="http://schemas.microsoft.com/office/drawing/2014/main" id="{9C5F8D87-CF40-4C22-896A-D7F990EFC53D}"/>
+                <a16:creationId xmlns:a16="http://schemas.microsoft.com/office/drawing/2014/main" id="{4FAA1C3A-F2C6-47A9-98AD-07F4E8CB5CA9}"/>
               </a:ext>
             </a:extLst>
           </p:cNvPr>
@@ -5850,7 +6923,7 @@
           <p:cNvPr id="13" name="company-name-1">
             <a:extLst xmlns:a="http://schemas.openxmlformats.org/drawingml/2006/main">
               <a:ext uri="{FF2B5EF4-FFF2-40B4-BE49-F238E27FC236}">
-                <a16:creationId xmlns:a16="http://schemas.microsoft.com/office/drawing/2014/main" id="{4D614C6E-D1BE-44B3-BA6B-0B75E218DA22}"/>
+                <a16:creationId xmlns:a16="http://schemas.microsoft.com/office/drawing/2014/main" id="{1CB6402E-90D5-4537-8279-B1F166D11DEC}"/>
               </a:ext>
             </a:extLst>
           </p:cNvPr>
@@ -5908,7 +6981,7 @@
           <p:cNvPr id="14" name="company-body-1">
             <a:extLst xmlns:a="http://schemas.openxmlformats.org/drawingml/2006/main">
               <a:ext uri="{FF2B5EF4-FFF2-40B4-BE49-F238E27FC236}">
-                <a16:creationId xmlns:a16="http://schemas.microsoft.com/office/drawing/2014/main" id="{811C9E61-379F-423B-A63C-9C2B3B51B2A0}"/>
+                <a16:creationId xmlns:a16="http://schemas.microsoft.com/office/drawing/2014/main" id="{72BF7FE3-9189-429F-8885-D83EFEA6128B}"/>
               </a:ext>
             </a:extLst>
           </p:cNvPr>
@@ -5966,7 +7039,7 @@
           <p:cNvPr id="15" name="company-tag-1">
             <a:extLst xmlns:a="http://schemas.openxmlformats.org/drawingml/2006/main">
               <a:ext uri="{FF2B5EF4-FFF2-40B4-BE49-F238E27FC236}">
-                <a16:creationId xmlns:a16="http://schemas.microsoft.com/office/drawing/2014/main" id="{D57CBBD6-5492-49B0-97CD-42382E3EF0C1}"/>
+                <a16:creationId xmlns:a16="http://schemas.microsoft.com/office/drawing/2014/main" id="{2972AB90-FB19-4FFB-841C-731D33E026E2}"/>
               </a:ext>
             </a:extLst>
           </p:cNvPr>
@@ -6024,7 +7097,7 @@
           <p:cNvPr id="16" name="company-row-2">
             <a:extLst xmlns:a="http://schemas.openxmlformats.org/drawingml/2006/main">
               <a:ext uri="{FF2B5EF4-FFF2-40B4-BE49-F238E27FC236}">
-                <a16:creationId xmlns:a16="http://schemas.microsoft.com/office/drawing/2014/main" id="{094AD8E1-1950-4309-A475-E6F35065C1A5}"/>
+                <a16:creationId xmlns:a16="http://schemas.microsoft.com/office/drawing/2014/main" id="{D97403A7-6D60-4C3E-A16B-82079FC4A73F}"/>
               </a:ext>
             </a:extLst>
           </p:cNvPr>
@@ -6059,7 +7132,7 @@
           <p:cNvPr id="17" name="company-name-2">
             <a:extLst xmlns:a="http://schemas.openxmlformats.org/drawingml/2006/main">
               <a:ext uri="{FF2B5EF4-FFF2-40B4-BE49-F238E27FC236}">
-                <a16:creationId xmlns:a16="http://schemas.microsoft.com/office/drawing/2014/main" id="{04A754B7-5882-4309-8D70-CCA607AE0FE8}"/>
+                <a16:creationId xmlns:a16="http://schemas.microsoft.com/office/drawing/2014/main" id="{98915046-A431-4A8C-9172-E35B4FE0955A}"/>
               </a:ext>
             </a:extLst>
           </p:cNvPr>
@@ -6117,7 +7190,7 @@
           <p:cNvPr id="18" name="company-body-2">
             <a:extLst xmlns:a="http://schemas.openxmlformats.org/drawingml/2006/main">
               <a:ext uri="{FF2B5EF4-FFF2-40B4-BE49-F238E27FC236}">
-                <a16:creationId xmlns:a16="http://schemas.microsoft.com/office/drawing/2014/main" id="{0C032ECB-68DD-4F3B-A1AE-51D7E9D1B94F}"/>
+                <a16:creationId xmlns:a16="http://schemas.microsoft.com/office/drawing/2014/main" id="{1016E8CE-1CAF-4498-8280-4844F1028264}"/>
               </a:ext>
             </a:extLst>
           </p:cNvPr>
@@ -6175,7 +7248,7 @@
           <p:cNvPr id="19" name="company-tag-2">
             <a:extLst xmlns:a="http://schemas.openxmlformats.org/drawingml/2006/main">
               <a:ext uri="{FF2B5EF4-FFF2-40B4-BE49-F238E27FC236}">
-                <a16:creationId xmlns:a16="http://schemas.microsoft.com/office/drawing/2014/main" id="{D530D33C-B827-4CDC-8EA9-4F201F702954}"/>
+                <a16:creationId xmlns:a16="http://schemas.microsoft.com/office/drawing/2014/main" id="{0FEE3420-36D2-4C07-847A-B3A7A4D8AC12}"/>
               </a:ext>
             </a:extLst>
           </p:cNvPr>
@@ -6233,7 +7306,7 @@
           <p:cNvPr id="20" name="company-row-3">
             <a:extLst xmlns:a="http://schemas.openxmlformats.org/drawingml/2006/main">
               <a:ext uri="{FF2B5EF4-FFF2-40B4-BE49-F238E27FC236}">
-                <a16:creationId xmlns:a16="http://schemas.microsoft.com/office/drawing/2014/main" id="{4CDBE11B-C2D9-4BA8-927F-EFB7D557CAF1}"/>
+                <a16:creationId xmlns:a16="http://schemas.microsoft.com/office/drawing/2014/main" id="{D1DB1A1D-A138-4605-BB33-0F70ADFD86E2}"/>
               </a:ext>
             </a:extLst>
           </p:cNvPr>
@@ -6268,7 +7341,7 @@
           <p:cNvPr id="21" name="company-name-3">
             <a:extLst xmlns:a="http://schemas.openxmlformats.org/drawingml/2006/main">
               <a:ext uri="{FF2B5EF4-FFF2-40B4-BE49-F238E27FC236}">
-                <a16:creationId xmlns:a16="http://schemas.microsoft.com/office/drawing/2014/main" id="{3D227F35-17B2-4842-9D53-77D41C9D7C5F}"/>
+                <a16:creationId xmlns:a16="http://schemas.microsoft.com/office/drawing/2014/main" id="{BB3960C6-EF42-4DED-B85B-DCD64A3A4A38}"/>
               </a:ext>
             </a:extLst>
           </p:cNvPr>
@@ -6326,7 +7399,7 @@
           <p:cNvPr id="22" name="company-body-3">
             <a:extLst xmlns:a="http://schemas.openxmlformats.org/drawingml/2006/main">
               <a:ext uri="{FF2B5EF4-FFF2-40B4-BE49-F238E27FC236}">
-                <a16:creationId xmlns:a16="http://schemas.microsoft.com/office/drawing/2014/main" id="{EB0F82F5-525A-4E10-A28A-1B999F35DDA6}"/>
+                <a16:creationId xmlns:a16="http://schemas.microsoft.com/office/drawing/2014/main" id="{65A33F45-CD9D-4093-BECC-C28C654D894E}"/>
               </a:ext>
             </a:extLst>
           </p:cNvPr>
@@ -6384,7 +7457,7 @@
           <p:cNvPr id="23" name="company-tag-3">
             <a:extLst xmlns:a="http://schemas.openxmlformats.org/drawingml/2006/main">
               <a:ext uri="{FF2B5EF4-FFF2-40B4-BE49-F238E27FC236}">
-                <a16:creationId xmlns:a16="http://schemas.microsoft.com/office/drawing/2014/main" id="{DEB8B8CA-B2A2-4826-877B-E33E6A51D3FD}"/>
+                <a16:creationId xmlns:a16="http://schemas.microsoft.com/office/drawing/2014/main" id="{F852DDAB-1987-40FB-B870-CD43BC231688}"/>
               </a:ext>
             </a:extLst>
           </p:cNvPr>
@@ -6442,7 +7515,7 @@
           <p:cNvPr id="24" name="company-conclusion">
             <a:extLst xmlns:a="http://schemas.openxmlformats.org/drawingml/2006/main">
               <a:ext uri="{FF2B5EF4-FFF2-40B4-BE49-F238E27FC236}">
-                <a16:creationId xmlns:a16="http://schemas.microsoft.com/office/drawing/2014/main" id="{74C01788-67CB-4F3A-B680-00903AE528E8}"/>
+                <a16:creationId xmlns:a16="http://schemas.microsoft.com/office/drawing/2014/main" id="{17459817-4AE6-4E9C-AFCB-D687C6278DDD}"/>
               </a:ext>
             </a:extLst>
           </p:cNvPr>
@@ -6474,10 +7547,10 @@
       </p:sp>
       <p:sp>
         <p:nvSpPr>
-          <p:cNvPr id="25" name="auto-text-23">
-            <a:extLst xmlns:a="http://schemas.openxmlformats.org/drawingml/2006/main">
-              <a:ext uri="{FF2B5EF4-FFF2-40B4-BE49-F238E27FC236}">
-                <a16:creationId xmlns:a16="http://schemas.microsoft.com/office/drawing/2014/main" id="{8F8B8E00-A675-4BA7-9F8D-4D72C4539905}"/>
+          <p:cNvPr id="25" name="auto-text-22">
+            <a:extLst xmlns:a="http://schemas.openxmlformats.org/drawingml/2006/main">
+              <a:ext uri="{FF2B5EF4-FFF2-40B4-BE49-F238E27FC236}">
+                <a16:creationId xmlns:a16="http://schemas.microsoft.com/office/drawing/2014/main" id="{2965CD7A-87F5-4C6D-A6C0-21E272FF4A96}"/>
               </a:ext>
             </a:extLst>
           </p:cNvPr>
@@ -6532,10 +7605,10 @@
       </p:sp>
       <p:sp>
         <p:nvSpPr>
-          <p:cNvPr id="26" name="auto-text-24">
-            <a:extLst xmlns:a="http://schemas.openxmlformats.org/drawingml/2006/main">
-              <a:ext uri="{FF2B5EF4-FFF2-40B4-BE49-F238E27FC236}">
-                <a16:creationId xmlns:a16="http://schemas.microsoft.com/office/drawing/2014/main" id="{0B3002E6-FF9D-4AA2-A6CD-623BB505180E}"/>
+          <p:cNvPr id="26" name="auto-text-23">
+            <a:extLst xmlns:a="http://schemas.openxmlformats.org/drawingml/2006/main">
+              <a:ext uri="{FF2B5EF4-FFF2-40B4-BE49-F238E27FC236}">
+                <a16:creationId xmlns:a16="http://schemas.microsoft.com/office/drawing/2014/main" id="{0DD1F947-DF0E-4210-953E-E39B4DD64494}"/>
               </a:ext>
             </a:extLst>
           </p:cNvPr>
@@ -6590,10 +7663,10 @@
       </p:sp>
       <p:sp>
         <p:nvSpPr>
-          <p:cNvPr id="27" name="source-650-0.29204073758027194">
-            <a:extLst xmlns:a="http://schemas.openxmlformats.org/drawingml/2006/main">
-              <a:ext uri="{FF2B5EF4-FFF2-40B4-BE49-F238E27FC236}">
-                <a16:creationId xmlns:a16="http://schemas.microsoft.com/office/drawing/2014/main" id="{24BF9F33-724E-481F-BC72-E034E77BC63F}"/>
+          <p:cNvPr id="27" name="source-650-0.8494237009190406">
+            <a:extLst xmlns:a="http://schemas.openxmlformats.org/drawingml/2006/main">
+              <a:ext uri="{FF2B5EF4-FFF2-40B4-BE49-F238E27FC236}">
+                <a16:creationId xmlns:a16="http://schemas.microsoft.com/office/drawing/2014/main" id="{CC4E280C-39ED-4409-8888-EA3788FC8A8C}"/>
               </a:ext>
             </a:extLst>
           </p:cNvPr>
@@ -6649,7 +7722,7 @@
     </p:spTree>
     <p:extLst>
       <p:ext uri="{BB962C8B-B14F-4D97-AF65-F5344CB8AC3E}">
-        <p14:creationId xmlns:p14="http://schemas.microsoft.com/office/powerpoint/2010/main" val="1066314508"/>
+        <p14:creationId xmlns:p14="http://schemas.microsoft.com/office/powerpoint/2010/main" val="1532199214"/>
       </p:ext>
     </p:extLst>
   </p:cSld>
@@ -6677,10 +7750,10 @@
       </p:grpSpPr>
       <p:sp>
         <p:nvSpPr>
-          <p:cNvPr id="20" name="accent-5">
-            <a:extLst xmlns:a="http://schemas.openxmlformats.org/drawingml/2006/main">
-              <a:ext uri="{FF2B5EF4-FFF2-40B4-BE49-F238E27FC236}">
-                <a16:creationId xmlns:a16="http://schemas.microsoft.com/office/drawing/2014/main" id="{95A69164-6ACA-4E59-8AA7-A7FCDAA7BF73}"/>
+          <p:cNvPr id="30" name="accent-5">
+            <a:extLst xmlns:a="http://schemas.openxmlformats.org/drawingml/2006/main">
+              <a:ext uri="{FF2B5EF4-FFF2-40B4-BE49-F238E27FC236}">
+                <a16:creationId xmlns:a16="http://schemas.microsoft.com/office/drawing/2014/main" id="{78F62BA9-BF29-45F4-A9D3-506E197D308C}"/>
               </a:ext>
             </a:extLst>
           </p:cNvPr>
@@ -6715,7 +7788,7 @@
           <p:cNvPr id="2" name="title-5">
             <a:extLst xmlns:a="http://schemas.openxmlformats.org/drawingml/2006/main">
               <a:ext uri="{FF2B5EF4-FFF2-40B4-BE49-F238E27FC236}">
-                <a16:creationId xmlns:a16="http://schemas.microsoft.com/office/drawing/2014/main" id="{C0575721-80EA-417C-874F-58B72147CEC5}"/>
+                <a16:creationId xmlns:a16="http://schemas.microsoft.com/office/drawing/2014/main" id="{581499D9-284A-4C04-AA38-461332EDCE7C}"/>
               </a:ext>
             </a:extLst>
           </p:cNvPr>
@@ -6763,7 +7836,7 @@
                 <a:ea typeface="Microsoft YaHei"/>
                 <a:cs typeface="Microsoft YaHei"/>
               </a:rPr>
-              <a:t>VLM能够规模化评价图像，但仍需校准、共识与证据核验</a:t>
+              <a:t>合作项目研究的是上层评估机制，而非单一VLM Judge</a:t>
             </a:r>
           </a:p>
         </p:txBody>
@@ -6773,7 +7846,7 @@
           <p:cNvPr id="3" name="page-5">
             <a:extLst xmlns:a="http://schemas.openxmlformats.org/drawingml/2006/main">
               <a:ext uri="{FF2B5EF4-FFF2-40B4-BE49-F238E27FC236}">
-                <a16:creationId xmlns:a16="http://schemas.microsoft.com/office/drawing/2014/main" id="{EED95B75-094D-4BC3-A744-BB75A291DE7E}"/>
+                <a16:creationId xmlns:a16="http://schemas.microsoft.com/office/drawing/2014/main" id="{7D11C190-2933-4FAD-866D-4E1ED9C44A51}"/>
               </a:ext>
             </a:extLst>
           </p:cNvPr>
@@ -6828,235 +7901,84 @@
       </p:sp>
       <p:sp>
         <p:nvSpPr>
-          <p:cNvPr id="4" name="stat-left">
-            <a:extLst xmlns:a="http://schemas.openxmlformats.org/drawingml/2006/main">
-              <a:ext uri="{FF2B5EF4-FFF2-40B4-BE49-F238E27FC236}">
-                <a16:creationId xmlns:a16="http://schemas.microsoft.com/office/drawing/2014/main" id="{502825D5-72BD-4C64-9546-5832F371FF64}"/>
-              </a:ext>
-            </a:extLst>
-          </p:cNvPr>
-          <p:cNvSpPr>
-            <a:spLocks xmlns:a="http://schemas.openxmlformats.org/drawingml/2006/main" noGrp="1"/>
-          </p:cNvSpPr>
-          <p:nvPr/>
-        </p:nvSpPr>
-        <p:spPr>
-          <a:xfrm xmlns:a="http://schemas.openxmlformats.org/drawingml/2006/main">
-            <a:off x="514350" y="1200150"/>
-            <a:ext cx="5334000" cy="990600"/>
+          <p:cNvPr id="4" name="auto-text-24">
+            <a:extLst xmlns:a="http://schemas.openxmlformats.org/drawingml/2006/main">
+              <a:ext uri="{FF2B5EF4-FFF2-40B4-BE49-F238E27FC236}">
+                <a16:creationId xmlns:a16="http://schemas.microsoft.com/office/drawing/2014/main" id="{DF32CBD4-E653-49DD-AFA3-623298E110CC}"/>
+              </a:ext>
+            </a:extLst>
+          </p:cNvPr>
+          <p:cNvSpPr>
+            <a:spLocks xmlns:a="http://schemas.openxmlformats.org/drawingml/2006/main" noGrp="1"/>
+          </p:cNvSpPr>
+          <p:nvPr/>
+        </p:nvSpPr>
+        <p:spPr>
+          <a:xfrm xmlns:a="http://schemas.openxmlformats.org/drawingml/2006/main">
+            <a:off x="628650" y="990600"/>
+            <a:ext cx="10668000" cy="323850"/>
+          </a:xfrm>
+          <a:prstGeom xmlns:a="http://schemas.openxmlformats.org/drawingml/2006/main" prst="rect">
+            <a:avLst/>
+          </a:prstGeom>
+          <a:noFill xmlns:a="http://schemas.openxmlformats.org/drawingml/2006/main"/>
+          <a:ln xmlns:a="http://schemas.openxmlformats.org/drawingml/2006/main" w="0">
+            <a:noFill/>
+            <a:prstDash val="solid"/>
+          </a:ln>
+        </p:spPr>
+        <p:txBody>
+          <a:bodyPr xmlns:a="http://schemas.openxmlformats.org/drawingml/2006/main" wrap="square" lIns="0" tIns="0" rIns="0" bIns="0" anchor="t">
+            <a:normAutofit fontScale="100000"/>
+          </a:bodyPr>
+          <a:lstStyle xmlns:a="http://schemas.openxmlformats.org/drawingml/2006/main"/>
+          <a:p xmlns:a="http://schemas.openxmlformats.org/drawingml/2006/main">
+            <a:pPr algn="l">
+              <a:defRPr sz="1350" b="0" i="0">
+                <a:solidFill>
+                  <a:srgbClr val="66778A"/>
+                </a:solidFill>
+                <a:latin typeface="Microsoft YaHei"/>
+                <a:ea typeface="Microsoft YaHei"/>
+                <a:cs typeface="Microsoft YaHei"/>
+              </a:defRPr>
+            </a:pPr>
+            <a:r>
+              <a:rPr sz="1350" b="0" i="0">
+                <a:solidFill>
+                  <a:srgbClr val="66778A"/>
+                </a:solidFill>
+                <a:latin typeface="Microsoft YaHei"/>
+                <a:ea typeface="Microsoft YaHei"/>
+                <a:cs typeface="Microsoft YaHei"/>
+              </a:rPr>
+              <a:t>SOW的三个核心模块作用于多种既有评估器之上，负责适配任务、稳定结论并提供证据。</a:t>
+            </a:r>
+          </a:p>
+        </p:txBody>
+      </p:sp>
+      <p:sp>
+        <p:nvSpPr>
+          <p:cNvPr id="5" name="sow-module-0">
+            <a:extLst xmlns:a="http://schemas.openxmlformats.org/drawingml/2006/main">
+              <a:ext uri="{FF2B5EF4-FFF2-40B4-BE49-F238E27FC236}">
+                <a16:creationId xmlns:a16="http://schemas.microsoft.com/office/drawing/2014/main" id="{F119F5FA-A9BC-4792-B14B-1CA42A4D82D9}"/>
+              </a:ext>
+            </a:extLst>
+          </p:cNvPr>
+          <p:cNvSpPr>
+            <a:spLocks xmlns:a="http://schemas.openxmlformats.org/drawingml/2006/main" noGrp="1"/>
+          </p:cNvSpPr>
+          <p:nvPr/>
+        </p:nvSpPr>
+        <p:spPr>
+          <a:xfrm xmlns:a="http://schemas.openxmlformats.org/drawingml/2006/main">
+            <a:off x="514350" y="1562100"/>
+            <a:ext cx="3390900" cy="2686050"/>
           </a:xfrm>
           <a:prstGeom xmlns:a="http://schemas.openxmlformats.org/drawingml/2006/main" prst="roundRect">
             <a:avLst>
-              <a:gd name="adj" fmla="val 11538"/>
-            </a:avLst>
-          </a:prstGeom>
-          <a:solidFill xmlns:a="http://schemas.openxmlformats.org/drawingml/2006/main">
-            <a:srgbClr val="FCECEB"/>
-          </a:solidFill>
-          <a:ln xmlns:a="http://schemas.openxmlformats.org/drawingml/2006/main" w="9525">
-            <a:solidFill>
-              <a:srgbClr val="FCECEB"/>
-            </a:solidFill>
-            <a:prstDash val="solid"/>
-          </a:ln>
-        </p:spPr>
-      </p:sp>
-      <p:sp>
-        <p:nvSpPr>
-          <p:cNvPr id="5" name="auto-text-25">
-            <a:extLst xmlns:a="http://schemas.openxmlformats.org/drawingml/2006/main">
-              <a:ext uri="{FF2B5EF4-FFF2-40B4-BE49-F238E27FC236}">
-                <a16:creationId xmlns:a16="http://schemas.microsoft.com/office/drawing/2014/main" id="{F22ED6C1-5F76-4F69-A75E-862B6DDBA406}"/>
-              </a:ext>
-            </a:extLst>
-          </p:cNvPr>
-          <p:cNvSpPr>
-            <a:spLocks xmlns:a="http://schemas.openxmlformats.org/drawingml/2006/main" noGrp="1"/>
-          </p:cNvSpPr>
-          <p:nvPr/>
-        </p:nvSpPr>
-        <p:spPr>
-          <a:xfrm xmlns:a="http://schemas.openxmlformats.org/drawingml/2006/main">
-            <a:off x="742950" y="1333500"/>
-            <a:ext cx="1714500" cy="495300"/>
-          </a:xfrm>
-          <a:prstGeom xmlns:a="http://schemas.openxmlformats.org/drawingml/2006/main" prst="rect">
-            <a:avLst/>
-          </a:prstGeom>
-          <a:noFill xmlns:a="http://schemas.openxmlformats.org/drawingml/2006/main"/>
-          <a:ln xmlns:a="http://schemas.openxmlformats.org/drawingml/2006/main" w="0">
-            <a:noFill/>
-            <a:prstDash val="solid"/>
-          </a:ln>
-        </p:spPr>
-        <p:txBody>
-          <a:bodyPr xmlns:a="http://schemas.openxmlformats.org/drawingml/2006/main" wrap="square" lIns="0" tIns="0" rIns="0" bIns="0" anchor="t">
-            <a:normAutofit fontScale="100000"/>
-          </a:bodyPr>
-          <a:lstStyle xmlns:a="http://schemas.openxmlformats.org/drawingml/2006/main"/>
-          <a:p xmlns:a="http://schemas.openxmlformats.org/drawingml/2006/main">
-            <a:pPr algn="l">
-              <a:defRPr sz="2850" b="1" i="0">
-                <a:solidFill>
-                  <a:srgbClr val="E65C55"/>
-                </a:solidFill>
-                <a:latin typeface="Microsoft YaHei"/>
-                <a:ea typeface="Microsoft YaHei"/>
-                <a:cs typeface="Microsoft YaHei"/>
-              </a:defRPr>
-            </a:pPr>
-            <a:r>
-              <a:rPr sz="2850" b="1" i="0">
-                <a:solidFill>
-                  <a:srgbClr val="E65C55"/>
-                </a:solidFill>
-                <a:latin typeface="Microsoft YaHei"/>
-                <a:ea typeface="Microsoft YaHei"/>
-                <a:cs typeface="Microsoft YaHei"/>
-              </a:rPr>
-              <a:t>66–75%</a:t>
-            </a:r>
-          </a:p>
-        </p:txBody>
-      </p:sp>
-      <p:sp>
-        <p:nvSpPr>
-          <p:cNvPr id="6" name="auto-text-26">
-            <a:extLst xmlns:a="http://schemas.openxmlformats.org/drawingml/2006/main">
-              <a:ext uri="{FF2B5EF4-FFF2-40B4-BE49-F238E27FC236}">
-                <a16:creationId xmlns:a16="http://schemas.microsoft.com/office/drawing/2014/main" id="{F7A47AD4-1F59-441A-BA04-FB535D1FF753}"/>
-              </a:ext>
-            </a:extLst>
-          </p:cNvPr>
-          <p:cNvSpPr>
-            <a:spLocks xmlns:a="http://schemas.openxmlformats.org/drawingml/2006/main" noGrp="1"/>
-          </p:cNvSpPr>
-          <p:nvPr/>
-        </p:nvSpPr>
-        <p:spPr>
-          <a:xfrm xmlns:a="http://schemas.openxmlformats.org/drawingml/2006/main">
-            <a:off x="2438400" y="1428750"/>
-            <a:ext cx="3048000" cy="266700"/>
-          </a:xfrm>
-          <a:prstGeom xmlns:a="http://schemas.openxmlformats.org/drawingml/2006/main" prst="rect">
-            <a:avLst/>
-          </a:prstGeom>
-          <a:noFill xmlns:a="http://schemas.openxmlformats.org/drawingml/2006/main"/>
-          <a:ln xmlns:a="http://schemas.openxmlformats.org/drawingml/2006/main" w="0">
-            <a:noFill/>
-            <a:prstDash val="solid"/>
-          </a:ln>
-        </p:spPr>
-        <p:txBody>
-          <a:bodyPr xmlns:a="http://schemas.openxmlformats.org/drawingml/2006/main" wrap="square" lIns="0" tIns="0" rIns="0" bIns="0" anchor="t">
-            <a:normAutofit fontScale="100000"/>
-          </a:bodyPr>
-          <a:lstStyle xmlns:a="http://schemas.openxmlformats.org/drawingml/2006/main"/>
-          <a:p xmlns:a="http://schemas.openxmlformats.org/drawingml/2006/main">
-            <a:pPr algn="l">
-              <a:defRPr sz="1425" b="1" i="0">
-                <a:solidFill>
-                  <a:srgbClr val="12263A"/>
-                </a:solidFill>
-                <a:latin typeface="Microsoft YaHei"/>
-                <a:ea typeface="Microsoft YaHei"/>
-                <a:cs typeface="Microsoft YaHei"/>
-              </a:defRPr>
-            </a:pPr>
-            <a:r>
-              <a:rPr sz="1425" b="1" i="0">
-                <a:solidFill>
-                  <a:srgbClr val="12263A"/>
-                </a:solidFill>
-                <a:latin typeface="Microsoft YaHei"/>
-                <a:ea typeface="Microsoft YaHei"/>
-                <a:cs typeface="Microsoft YaHei"/>
-              </a:rPr>
-              <a:t>头部多模态Judge准确率</a:t>
-            </a:r>
-          </a:p>
-        </p:txBody>
-      </p:sp>
-      <p:sp>
-        <p:nvSpPr>
-          <p:cNvPr id="7" name="auto-text-27">
-            <a:extLst xmlns:a="http://schemas.openxmlformats.org/drawingml/2006/main">
-              <a:ext uri="{FF2B5EF4-FFF2-40B4-BE49-F238E27FC236}">
-                <a16:creationId xmlns:a16="http://schemas.microsoft.com/office/drawing/2014/main" id="{00525442-42BE-4894-B5E0-1C0EC334C704}"/>
-              </a:ext>
-            </a:extLst>
-          </p:cNvPr>
-          <p:cNvSpPr>
-            <a:spLocks xmlns:a="http://schemas.openxmlformats.org/drawingml/2006/main" noGrp="1"/>
-          </p:cNvSpPr>
-          <p:nvPr/>
-        </p:nvSpPr>
-        <p:spPr>
-          <a:xfrm xmlns:a="http://schemas.openxmlformats.org/drawingml/2006/main">
-            <a:off x="2438400" y="1733550"/>
-            <a:ext cx="2857500" cy="247650"/>
-          </a:xfrm>
-          <a:prstGeom xmlns:a="http://schemas.openxmlformats.org/drawingml/2006/main" prst="rect">
-            <a:avLst/>
-          </a:prstGeom>
-          <a:noFill xmlns:a="http://schemas.openxmlformats.org/drawingml/2006/main"/>
-          <a:ln xmlns:a="http://schemas.openxmlformats.org/drawingml/2006/main" w="0">
-            <a:noFill/>
-            <a:prstDash val="solid"/>
-          </a:ln>
-        </p:spPr>
-        <p:txBody>
-          <a:bodyPr xmlns:a="http://schemas.openxmlformats.org/drawingml/2006/main" wrap="square" lIns="0" tIns="0" rIns="0" bIns="0" anchor="t">
-            <a:normAutofit fontScale="100000"/>
-          </a:bodyPr>
-          <a:lstStyle xmlns:a="http://schemas.openxmlformats.org/drawingml/2006/main"/>
-          <a:p xmlns:a="http://schemas.openxmlformats.org/drawingml/2006/main">
-            <a:pPr algn="l">
-              <a:defRPr sz="1200" b="0" i="0">
-                <a:solidFill>
-                  <a:srgbClr val="66778A"/>
-                </a:solidFill>
-                <a:latin typeface="Microsoft YaHei"/>
-                <a:ea typeface="Microsoft YaHei"/>
-                <a:cs typeface="Microsoft YaHei"/>
-              </a:defRPr>
-            </a:pPr>
-            <a:r>
-              <a:rPr sz="1200" b="0" i="0">
-                <a:solidFill>
-                  <a:srgbClr val="66778A"/>
-                </a:solidFill>
-                <a:latin typeface="Microsoft YaHei"/>
-                <a:ea typeface="Microsoft YaHei"/>
-                <a:cs typeface="Microsoft YaHei"/>
-              </a:rPr>
-              <a:t>对比：人类专家 &gt;90%</a:t>
-            </a:r>
-          </a:p>
-        </p:txBody>
-      </p:sp>
-      <p:sp>
-        <p:nvSpPr>
-          <p:cNvPr id="8" name="stat-right">
-            <a:extLst xmlns:a="http://schemas.openxmlformats.org/drawingml/2006/main">
-              <a:ext uri="{FF2B5EF4-FFF2-40B4-BE49-F238E27FC236}">
-                <a16:creationId xmlns:a16="http://schemas.microsoft.com/office/drawing/2014/main" id="{2F7340E2-C158-4D1E-9DF9-AD6A35C5BAE8}"/>
-              </a:ext>
-            </a:extLst>
-          </p:cNvPr>
-          <p:cNvSpPr>
-            <a:spLocks xmlns:a="http://schemas.openxmlformats.org/drawingml/2006/main" noGrp="1"/>
-          </p:cNvSpPr>
-          <p:nvPr/>
-        </p:nvSpPr>
-        <p:spPr>
-          <a:xfrm xmlns:a="http://schemas.openxmlformats.org/drawingml/2006/main">
-            <a:off x="6343650" y="1200150"/>
-            <a:ext cx="5334000" cy="990600"/>
-          </a:xfrm>
-          <a:prstGeom xmlns:a="http://schemas.openxmlformats.org/drawingml/2006/main" prst="roundRect">
-            <a:avLst>
-              <a:gd name="adj" fmla="val 11538"/>
+              <a:gd name="adj" fmla="val 4255"/>
             </a:avLst>
           </a:prstGeom>
           <a:solidFill xmlns:a="http://schemas.openxmlformats.org/drawingml/2006/main">
@@ -7072,22 +7994,22 @@
       </p:sp>
       <p:sp>
         <p:nvSpPr>
-          <p:cNvPr id="9" name="auto-text-28">
-            <a:extLst xmlns:a="http://schemas.openxmlformats.org/drawingml/2006/main">
-              <a:ext uri="{FF2B5EF4-FFF2-40B4-BE49-F238E27FC236}">
-                <a16:creationId xmlns:a16="http://schemas.microsoft.com/office/drawing/2014/main" id="{26E35736-D455-4190-8006-63EEF3FEA78A}"/>
-              </a:ext>
-            </a:extLst>
-          </p:cNvPr>
-          <p:cNvSpPr>
-            <a:spLocks xmlns:a="http://schemas.openxmlformats.org/drawingml/2006/main" noGrp="1"/>
-          </p:cNvSpPr>
-          <p:nvPr/>
-        </p:nvSpPr>
-        <p:spPr>
-          <a:xfrm xmlns:a="http://schemas.openxmlformats.org/drawingml/2006/main">
-            <a:off x="6572250" y="1362075"/>
-            <a:ext cx="2095500" cy="381000"/>
+          <p:cNvPr id="6" name="sow-no-0">
+            <a:extLst xmlns:a="http://schemas.openxmlformats.org/drawingml/2006/main">
+              <a:ext uri="{FF2B5EF4-FFF2-40B4-BE49-F238E27FC236}">
+                <a16:creationId xmlns:a16="http://schemas.microsoft.com/office/drawing/2014/main" id="{874AB140-60E7-44CC-848E-7BB9D9E16055}"/>
+              </a:ext>
+            </a:extLst>
+          </p:cNvPr>
+          <p:cNvSpPr>
+            <a:spLocks xmlns:a="http://schemas.openxmlformats.org/drawingml/2006/main" noGrp="1"/>
+          </p:cNvSpPr>
+          <p:nvPr/>
+        </p:nvSpPr>
+        <p:spPr>
+          <a:xfrm xmlns:a="http://schemas.openxmlformats.org/drawingml/2006/main">
+            <a:off x="742950" y="1790700"/>
+            <a:ext cx="838200" cy="266700"/>
           </a:xfrm>
           <a:prstGeom xmlns:a="http://schemas.openxmlformats.org/drawingml/2006/main" prst="rect">
             <a:avLst/>
@@ -7105,7 +8027,7 @@
           <a:lstStyle xmlns:a="http://schemas.openxmlformats.org/drawingml/2006/main"/>
           <a:p xmlns:a="http://schemas.openxmlformats.org/drawingml/2006/main">
             <a:pPr algn="l">
-              <a:defRPr sz="1950" b="1" i="0">
+              <a:defRPr sz="1350" b="1" i="0">
                 <a:solidFill>
                   <a:srgbClr val="2F6BFF"/>
                 </a:solidFill>
@@ -7115,7 +8037,7 @@
               </a:defRPr>
             </a:pPr>
             <a:r>
-              <a:rPr sz="1950" b="1" i="0">
+              <a:rPr sz="1350" b="1" i="0">
                 <a:solidFill>
                   <a:srgbClr val="2F6BFF"/>
                 </a:solidFill>
@@ -7123,29 +8045,29 @@
                 <a:ea typeface="Microsoft YaHei"/>
                 <a:cs typeface="Microsoft YaHei"/>
               </a:rPr>
-              <a:t>少量验证样本</a:t>
-            </a:r>
-          </a:p>
-        </p:txBody>
-      </p:sp>
-      <p:sp>
-        <p:nvSpPr>
-          <p:cNvPr id="10" name="auto-text-29">
-            <a:extLst xmlns:a="http://schemas.openxmlformats.org/drawingml/2006/main">
-              <a:ext uri="{FF2B5EF4-FFF2-40B4-BE49-F238E27FC236}">
-                <a16:creationId xmlns:a16="http://schemas.microsoft.com/office/drawing/2014/main" id="{DF8FA692-652D-481A-A6D0-4029F007803B}"/>
-              </a:ext>
-            </a:extLst>
-          </p:cNvPr>
-          <p:cNvSpPr>
-            <a:spLocks xmlns:a="http://schemas.openxmlformats.org/drawingml/2006/main" noGrp="1"/>
-          </p:cNvSpPr>
-          <p:nvPr/>
-        </p:nvSpPr>
-        <p:spPr>
-          <a:xfrm xmlns:a="http://schemas.openxmlformats.org/drawingml/2006/main">
-            <a:off x="8629650" y="1362075"/>
-            <a:ext cx="2781300" cy="533400"/>
+              <a:t>模块一</a:t>
+            </a:r>
+          </a:p>
+        </p:txBody>
+      </p:sp>
+      <p:sp>
+        <p:nvSpPr>
+          <p:cNvPr id="7" name="sow-title-0">
+            <a:extLst xmlns:a="http://schemas.openxmlformats.org/drawingml/2006/main">
+              <a:ext uri="{FF2B5EF4-FFF2-40B4-BE49-F238E27FC236}">
+                <a16:creationId xmlns:a16="http://schemas.microsoft.com/office/drawing/2014/main" id="{CDF95CB7-7474-4958-837E-DF153331A829}"/>
+              </a:ext>
+            </a:extLst>
+          </p:cNvPr>
+          <p:cNvSpPr>
+            <a:spLocks xmlns:a="http://schemas.openxmlformats.org/drawingml/2006/main" noGrp="1"/>
+          </p:cNvSpPr>
+          <p:nvPr/>
+        </p:nvSpPr>
+        <p:spPr>
+          <a:xfrm xmlns:a="http://schemas.openxmlformats.org/drawingml/2006/main">
+            <a:off x="742950" y="2171700"/>
+            <a:ext cx="2933700" cy="552450"/>
           </a:xfrm>
           <a:prstGeom xmlns:a="http://schemas.openxmlformats.org/drawingml/2006/main" prst="rect">
             <a:avLst/>
@@ -7163,7 +8085,7 @@
           <a:lstStyle xmlns:a="http://schemas.openxmlformats.org/drawingml/2006/main"/>
           <a:p xmlns:a="http://schemas.openxmlformats.org/drawingml/2006/main">
             <a:pPr algn="l">
-              <a:defRPr sz="1275" b="1" i="0">
+              <a:defRPr sz="1725" b="1" i="0">
                 <a:solidFill>
                   <a:srgbClr val="12263A"/>
                 </a:solidFill>
@@ -7173,7 +8095,7 @@
               </a:defRPr>
             </a:pPr>
             <a:r>
-              <a:rPr sz="1275" b="1" i="0">
+              <a:rPr sz="1725" b="1" i="0">
                 <a:solidFill>
                   <a:srgbClr val="12263A"/>
                 </a:solidFill>
@@ -7181,267 +8103,741 @@
                 <a:ea typeface="Microsoft YaHei"/>
                 <a:cs typeface="Microsoft YaHei"/>
               </a:rPr>
-              <a:t>即可学习不同Prompt／视觉类型的权重，并改善置信度校准</a:t>
-            </a:r>
-          </a:p>
-        </p:txBody>
-      </p:sp>
-      <p:sp>
-        <p:nvSpPr>
-          <p:cNvPr id="11" name="mmrb2-results-back">
-            <a:extLst xmlns:a="http://schemas.openxmlformats.org/drawingml/2006/main">
-              <a:ext uri="{FF2B5EF4-FFF2-40B4-BE49-F238E27FC236}">
-                <a16:creationId xmlns:a16="http://schemas.microsoft.com/office/drawing/2014/main" id="{F36489D8-3BDC-46D5-878D-8C9875BA9A8D}"/>
-              </a:ext>
-            </a:extLst>
-          </p:cNvPr>
-          <p:cNvSpPr>
-            <a:spLocks xmlns:a="http://schemas.openxmlformats.org/drawingml/2006/main" noGrp="1"/>
-          </p:cNvSpPr>
-          <p:nvPr/>
-        </p:nvSpPr>
-        <p:spPr>
-          <a:xfrm xmlns:a="http://schemas.openxmlformats.org/drawingml/2006/main">
-            <a:off x="495300" y="2400300"/>
-            <a:ext cx="5372100" cy="2667000"/>
+              <a:t>任务偏好建模与后验校准</a:t>
+            </a:r>
+          </a:p>
+        </p:txBody>
+      </p:sp>
+      <p:sp>
+        <p:nvSpPr>
+          <p:cNvPr id="8" name="sow-body-0">
+            <a:extLst xmlns:a="http://schemas.openxmlformats.org/drawingml/2006/main">
+              <a:ext uri="{FF2B5EF4-FFF2-40B4-BE49-F238E27FC236}">
+                <a16:creationId xmlns:a16="http://schemas.microsoft.com/office/drawing/2014/main" id="{63FF5F86-EFA5-4E1E-9430-9831D3660CA0}"/>
+              </a:ext>
+            </a:extLst>
+          </p:cNvPr>
+          <p:cNvSpPr>
+            <a:spLocks xmlns:a="http://schemas.openxmlformats.org/drawingml/2006/main" noGrp="1"/>
+          </p:cNvSpPr>
+          <p:nvPr/>
+        </p:nvSpPr>
+        <p:spPr>
+          <a:xfrm xmlns:a="http://schemas.openxmlformats.org/drawingml/2006/main">
+            <a:off x="742950" y="2914650"/>
+            <a:ext cx="2933700" cy="800100"/>
+          </a:xfrm>
+          <a:prstGeom xmlns:a="http://schemas.openxmlformats.org/drawingml/2006/main" prst="rect">
+            <a:avLst/>
+          </a:prstGeom>
+          <a:noFill xmlns:a="http://schemas.openxmlformats.org/drawingml/2006/main"/>
+          <a:ln xmlns:a="http://schemas.openxmlformats.org/drawingml/2006/main" w="0">
+            <a:noFill/>
+            <a:prstDash val="solid"/>
+          </a:ln>
+        </p:spPr>
+        <p:txBody>
+          <a:bodyPr xmlns:a="http://schemas.openxmlformats.org/drawingml/2006/main" wrap="square" lIns="0" tIns="0" rIns="0" bIns="0" anchor="t">
+            <a:normAutofit fontScale="100000"/>
+          </a:bodyPr>
+          <a:lstStyle xmlns:a="http://schemas.openxmlformats.org/drawingml/2006/main"/>
+          <a:p xmlns:a="http://schemas.openxmlformats.org/drawingml/2006/main">
+            <a:pPr algn="l">
+              <a:defRPr sz="1275" b="0" i="0">
+                <a:solidFill>
+                  <a:srgbClr val="25364A"/>
+                </a:solidFill>
+                <a:latin typeface="Microsoft YaHei"/>
+                <a:ea typeface="Microsoft YaHei"/>
+                <a:cs typeface="Microsoft YaHei"/>
+              </a:defRPr>
+            </a:pPr>
+            <a:r>
+              <a:rPr sz="1275" b="0" i="0">
+                <a:solidFill>
+                  <a:srgbClr val="25364A"/>
+                </a:solidFill>
+                <a:latin typeface="Microsoft YaHei"/>
+                <a:ea typeface="Microsoft YaHei"/>
+                <a:cs typeface="Microsoft YaHei"/>
+              </a:rPr>
+              <a:t>把任务描述、少量验证样本和专家偏好转成质量方向；校准分数、维度权重、阈值与置信度。</a:t>
+            </a:r>
+          </a:p>
+        </p:txBody>
+      </p:sp>
+      <p:sp>
+        <p:nvSpPr>
+          <p:cNvPr id="9" name="sow-output-0">
+            <a:extLst xmlns:a="http://schemas.openxmlformats.org/drawingml/2006/main">
+              <a:ext uri="{FF2B5EF4-FFF2-40B4-BE49-F238E27FC236}">
+                <a16:creationId xmlns:a16="http://schemas.microsoft.com/office/drawing/2014/main" id="{40BCB133-5DB1-4B42-83A1-3ED5718C6404}"/>
+              </a:ext>
+            </a:extLst>
+          </p:cNvPr>
+          <p:cNvSpPr>
+            <a:spLocks xmlns:a="http://schemas.openxmlformats.org/drawingml/2006/main" noGrp="1"/>
+          </p:cNvSpPr>
+          <p:nvPr/>
+        </p:nvSpPr>
+        <p:spPr>
+          <a:xfrm xmlns:a="http://schemas.openxmlformats.org/drawingml/2006/main">
+            <a:off x="742950" y="3810000"/>
+            <a:ext cx="2933700" cy="266700"/>
+          </a:xfrm>
+          <a:prstGeom xmlns:a="http://schemas.openxmlformats.org/drawingml/2006/main" prst="rect">
+            <a:avLst/>
+          </a:prstGeom>
+          <a:noFill xmlns:a="http://schemas.openxmlformats.org/drawingml/2006/main"/>
+          <a:ln xmlns:a="http://schemas.openxmlformats.org/drawingml/2006/main" w="0">
+            <a:noFill/>
+            <a:prstDash val="solid"/>
+          </a:ln>
+        </p:spPr>
+        <p:txBody>
+          <a:bodyPr xmlns:a="http://schemas.openxmlformats.org/drawingml/2006/main" wrap="square" lIns="0" tIns="0" rIns="0" bIns="0" anchor="t">
+            <a:normAutofit fontScale="100000"/>
+          </a:bodyPr>
+          <a:lstStyle xmlns:a="http://schemas.openxmlformats.org/drawingml/2006/main"/>
+          <a:p xmlns:a="http://schemas.openxmlformats.org/drawingml/2006/main">
+            <a:pPr algn="ctr">
+              <a:defRPr sz="1200" b="1" i="0">
+                <a:solidFill>
+                  <a:srgbClr val="2F6BFF"/>
+                </a:solidFill>
+                <a:latin typeface="Microsoft YaHei"/>
+                <a:ea typeface="Microsoft YaHei"/>
+                <a:cs typeface="Microsoft YaHei"/>
+              </a:defRPr>
+            </a:pPr>
+            <a:r>
+              <a:rPr sz="1200" b="1" i="0">
+                <a:solidFill>
+                  <a:srgbClr val="2F6BFF"/>
+                </a:solidFill>
+                <a:latin typeface="Microsoft YaHei"/>
+                <a:ea typeface="Microsoft YaHei"/>
+                <a:cs typeface="Microsoft YaHei"/>
+              </a:rPr>
+              <a:t>输出：任务适配后的评分标准</a:t>
+            </a:r>
+          </a:p>
+        </p:txBody>
+      </p:sp>
+      <p:sp>
+        <p:nvSpPr>
+          <p:cNvPr id="10" name="sow-module-1">
+            <a:extLst xmlns:a="http://schemas.openxmlformats.org/drawingml/2006/main">
+              <a:ext uri="{FF2B5EF4-FFF2-40B4-BE49-F238E27FC236}">
+                <a16:creationId xmlns:a16="http://schemas.microsoft.com/office/drawing/2014/main" id="{43A8845D-4B5F-44A9-9B38-4EF9A080AE19}"/>
+              </a:ext>
+            </a:extLst>
+          </p:cNvPr>
+          <p:cNvSpPr>
+            <a:spLocks xmlns:a="http://schemas.openxmlformats.org/drawingml/2006/main" noGrp="1"/>
+          </p:cNvSpPr>
+          <p:nvPr/>
+        </p:nvSpPr>
+        <p:spPr>
+          <a:xfrm xmlns:a="http://schemas.openxmlformats.org/drawingml/2006/main">
+            <a:off x="4248150" y="1562100"/>
+            <a:ext cx="3390900" cy="2686050"/>
           </a:xfrm>
           <a:prstGeom xmlns:a="http://schemas.openxmlformats.org/drawingml/2006/main" prst="roundRect">
             <a:avLst>
-              <a:gd name="adj" fmla="val 2857"/>
+              <a:gd name="adj" fmla="val 4255"/>
             </a:avLst>
           </a:prstGeom>
           <a:solidFill xmlns:a="http://schemas.openxmlformats.org/drawingml/2006/main">
-            <a:srgbClr val="FFFFFF"/>
+            <a:srgbClr val="F1EDFF"/>
           </a:solidFill>
           <a:ln xmlns:a="http://schemas.openxmlformats.org/drawingml/2006/main" w="9525">
             <a:solidFill>
-              <a:srgbClr val="D8E0E8"/>
+              <a:srgbClr val="F1EDFF"/>
             </a:solidFill>
             <a:prstDash val="solid"/>
           </a:ln>
         </p:spPr>
       </p:sp>
-      <p:pic>
-        <p:nvPicPr>
-          <p:cNvPr id="31" name=""/>
-          <p:cNvPicPr>
-            <a:picLocks xmlns:a="http://schemas.openxmlformats.org/drawingml/2006/main" noChangeAspect="1"/>
-          </p:cNvPicPr>
-          <p:nvPr/>
-        </p:nvPicPr>
-        <p:blipFill>
-          <a:blip xmlns:r="http://schemas.openxmlformats.org/officeDocument/2006/relationships" xmlns:a="http://schemas.openxmlformats.org/drawingml/2006/main" r:embed="R1e87d69a04ec4424"/>
-          <a:stretch xmlns:a="http://schemas.openxmlformats.org/drawingml/2006/main"/>
-        </p:blipFill>
-        <p:spPr>
-          <a:xfrm xmlns:a="http://schemas.openxmlformats.org/drawingml/2006/main">
-            <a:off x="627135" y="2419350"/>
-            <a:ext cx="5108431" cy="2628900"/>
+      <p:sp>
+        <p:nvSpPr>
+          <p:cNvPr id="11" name="sow-no-1">
+            <a:extLst xmlns:a="http://schemas.openxmlformats.org/drawingml/2006/main">
+              <a:ext uri="{FF2B5EF4-FFF2-40B4-BE49-F238E27FC236}">
+                <a16:creationId xmlns:a16="http://schemas.microsoft.com/office/drawing/2014/main" id="{8B1E7847-833F-4306-A164-40EB5EBA61E9}"/>
+              </a:ext>
+            </a:extLst>
+          </p:cNvPr>
+          <p:cNvSpPr>
+            <a:spLocks xmlns:a="http://schemas.openxmlformats.org/drawingml/2006/main" noGrp="1"/>
+          </p:cNvSpPr>
+          <p:nvPr/>
+        </p:nvSpPr>
+        <p:spPr>
+          <a:xfrm xmlns:a="http://schemas.openxmlformats.org/drawingml/2006/main">
+            <a:off x="4476750" y="1790700"/>
+            <a:ext cx="838200" cy="266700"/>
+          </a:xfrm>
+          <a:prstGeom xmlns:a="http://schemas.openxmlformats.org/drawingml/2006/main" prst="rect">
+            <a:avLst/>
+          </a:prstGeom>
+          <a:noFill xmlns:a="http://schemas.openxmlformats.org/drawingml/2006/main"/>
+          <a:ln xmlns:a="http://schemas.openxmlformats.org/drawingml/2006/main" w="0">
+            <a:noFill/>
+            <a:prstDash val="solid"/>
+          </a:ln>
+        </p:spPr>
+        <p:txBody>
+          <a:bodyPr xmlns:a="http://schemas.openxmlformats.org/drawingml/2006/main" wrap="square" lIns="0" tIns="0" rIns="0" bIns="0" anchor="t">
+            <a:normAutofit fontScale="100000"/>
+          </a:bodyPr>
+          <a:lstStyle xmlns:a="http://schemas.openxmlformats.org/drawingml/2006/main"/>
+          <a:p xmlns:a="http://schemas.openxmlformats.org/drawingml/2006/main">
+            <a:pPr algn="l">
+              <a:defRPr sz="1350" b="1" i="0">
+                <a:solidFill>
+                  <a:srgbClr val="7B61D1"/>
+                </a:solidFill>
+                <a:latin typeface="Microsoft YaHei"/>
+                <a:ea typeface="Microsoft YaHei"/>
+                <a:cs typeface="Microsoft YaHei"/>
+              </a:defRPr>
+            </a:pPr>
+            <a:r>
+              <a:rPr sz="1350" b="1" i="0">
+                <a:solidFill>
+                  <a:srgbClr val="7B61D1"/>
+                </a:solidFill>
+                <a:latin typeface="Microsoft YaHei"/>
+                <a:ea typeface="Microsoft YaHei"/>
+                <a:cs typeface="Microsoft YaHei"/>
+              </a:rPr>
+              <a:t>模块二</a:t>
+            </a:r>
+          </a:p>
+        </p:txBody>
+      </p:sp>
+      <p:sp>
+        <p:nvSpPr>
+          <p:cNvPr id="12" name="sow-title-1">
+            <a:extLst xmlns:a="http://schemas.openxmlformats.org/drawingml/2006/main">
+              <a:ext uri="{FF2B5EF4-FFF2-40B4-BE49-F238E27FC236}">
+                <a16:creationId xmlns:a16="http://schemas.microsoft.com/office/drawing/2014/main" id="{E1AA028C-A2D3-4D0E-8986-DFC207109CA2}"/>
+              </a:ext>
+            </a:extLst>
+          </p:cNvPr>
+          <p:cNvSpPr>
+            <a:spLocks xmlns:a="http://schemas.openxmlformats.org/drawingml/2006/main" noGrp="1"/>
+          </p:cNvSpPr>
+          <p:nvPr/>
+        </p:nvSpPr>
+        <p:spPr>
+          <a:xfrm xmlns:a="http://schemas.openxmlformats.org/drawingml/2006/main">
+            <a:off x="4476750" y="2171700"/>
+            <a:ext cx="2933700" cy="552450"/>
+          </a:xfrm>
+          <a:prstGeom xmlns:a="http://schemas.openxmlformats.org/drawingml/2006/main" prst="rect">
+            <a:avLst/>
+          </a:prstGeom>
+          <a:noFill xmlns:a="http://schemas.openxmlformats.org/drawingml/2006/main"/>
+          <a:ln xmlns:a="http://schemas.openxmlformats.org/drawingml/2006/main" w="0">
+            <a:noFill/>
+            <a:prstDash val="solid"/>
+          </a:ln>
+        </p:spPr>
+        <p:txBody>
+          <a:bodyPr xmlns:a="http://schemas.openxmlformats.org/drawingml/2006/main" wrap="square" lIns="0" tIns="0" rIns="0" bIns="0" anchor="t">
+            <a:normAutofit fontScale="100000"/>
+          </a:bodyPr>
+          <a:lstStyle xmlns:a="http://schemas.openxmlformats.org/drawingml/2006/main"/>
+          <a:p xmlns:a="http://schemas.openxmlformats.org/drawingml/2006/main">
+            <a:pPr algn="l">
+              <a:defRPr sz="1725" b="1" i="0">
+                <a:solidFill>
+                  <a:srgbClr val="12263A"/>
+                </a:solidFill>
+                <a:latin typeface="Microsoft YaHei"/>
+                <a:ea typeface="Microsoft YaHei"/>
+                <a:cs typeface="Microsoft YaHei"/>
+              </a:defRPr>
+            </a:pPr>
+            <a:r>
+              <a:rPr sz="1725" b="1" i="0">
+                <a:solidFill>
+                  <a:srgbClr val="12263A"/>
+                </a:solidFill>
+                <a:latin typeface="Microsoft YaHei"/>
+                <a:ea typeface="Microsoft YaHei"/>
+                <a:cs typeface="Microsoft YaHei"/>
+              </a:rPr>
+              <a:t>邻域共识与分歧鲁棒选择</a:t>
+            </a:r>
+          </a:p>
+        </p:txBody>
+      </p:sp>
+      <p:sp>
+        <p:nvSpPr>
+          <p:cNvPr id="13" name="sow-body-1">
+            <a:extLst xmlns:a="http://schemas.openxmlformats.org/drawingml/2006/main">
+              <a:ext uri="{FF2B5EF4-FFF2-40B4-BE49-F238E27FC236}">
+                <a16:creationId xmlns:a16="http://schemas.microsoft.com/office/drawing/2014/main" id="{8ECC6A32-7811-4678-B609-6FA68A876EEA}"/>
+              </a:ext>
+            </a:extLst>
+          </p:cNvPr>
+          <p:cNvSpPr>
+            <a:spLocks xmlns:a="http://schemas.openxmlformats.org/drawingml/2006/main" noGrp="1"/>
+          </p:cNvSpPr>
+          <p:nvPr/>
+        </p:nvSpPr>
+        <p:spPr>
+          <a:xfrm xmlns:a="http://schemas.openxmlformats.org/drawingml/2006/main">
+            <a:off x="4476750" y="2914650"/>
+            <a:ext cx="2933700" cy="800100"/>
+          </a:xfrm>
+          <a:prstGeom xmlns:a="http://schemas.openxmlformats.org/drawingml/2006/main" prst="rect">
+            <a:avLst/>
+          </a:prstGeom>
+          <a:noFill xmlns:a="http://schemas.openxmlformats.org/drawingml/2006/main"/>
+          <a:ln xmlns:a="http://schemas.openxmlformats.org/drawingml/2006/main" w="0">
+            <a:noFill/>
+            <a:prstDash val="solid"/>
+          </a:ln>
+        </p:spPr>
+        <p:txBody>
+          <a:bodyPr xmlns:a="http://schemas.openxmlformats.org/drawingml/2006/main" wrap="square" lIns="0" tIns="0" rIns="0" bIns="0" anchor="t">
+            <a:normAutofit fontScale="100000"/>
+          </a:bodyPr>
+          <a:lstStyle xmlns:a="http://schemas.openxmlformats.org/drawingml/2006/main"/>
+          <a:p xmlns:a="http://schemas.openxmlformats.org/drawingml/2006/main">
+            <a:pPr algn="l">
+              <a:defRPr sz="1275" b="0" i="0">
+                <a:solidFill>
+                  <a:srgbClr val="25364A"/>
+                </a:solidFill>
+                <a:latin typeface="Microsoft YaHei"/>
+                <a:ea typeface="Microsoft YaHei"/>
+                <a:cs typeface="Microsoft YaHei"/>
+              </a:defRPr>
+            </a:pPr>
+            <a:r>
+              <a:rPr sz="1275" b="0" i="0">
+                <a:solidFill>
+                  <a:srgbClr val="25364A"/>
+                </a:solidFill>
+                <a:latin typeface="Microsoft YaHei"/>
+                <a:ea typeface="Microsoft YaHei"/>
+                <a:cs typeface="Microsoft YaHei"/>
+              </a:rPr>
+              <a:t>生成相邻Rubric、Prompt和权重配置；聚合多视角结论，对分歧样本进行保守判定或转人工。</a:t>
+            </a:r>
+          </a:p>
+        </p:txBody>
+      </p:sp>
+      <p:sp>
+        <p:nvSpPr>
+          <p:cNvPr id="14" name="sow-output-1">
+            <a:extLst xmlns:a="http://schemas.openxmlformats.org/drawingml/2006/main">
+              <a:ext uri="{FF2B5EF4-FFF2-40B4-BE49-F238E27FC236}">
+                <a16:creationId xmlns:a16="http://schemas.microsoft.com/office/drawing/2014/main" id="{ACB15CEE-52C9-43AD-85AF-4B9A3D6F854E}"/>
+              </a:ext>
+            </a:extLst>
+          </p:cNvPr>
+          <p:cNvSpPr>
+            <a:spLocks xmlns:a="http://schemas.openxmlformats.org/drawingml/2006/main" noGrp="1"/>
+          </p:cNvSpPr>
+          <p:nvPr/>
+        </p:nvSpPr>
+        <p:spPr>
+          <a:xfrm xmlns:a="http://schemas.openxmlformats.org/drawingml/2006/main">
+            <a:off x="4476750" y="3810000"/>
+            <a:ext cx="2933700" cy="266700"/>
+          </a:xfrm>
+          <a:prstGeom xmlns:a="http://schemas.openxmlformats.org/drawingml/2006/main" prst="rect">
+            <a:avLst/>
+          </a:prstGeom>
+          <a:noFill xmlns:a="http://schemas.openxmlformats.org/drawingml/2006/main"/>
+          <a:ln xmlns:a="http://schemas.openxmlformats.org/drawingml/2006/main" w="0">
+            <a:noFill/>
+            <a:prstDash val="solid"/>
+          </a:ln>
+        </p:spPr>
+        <p:txBody>
+          <a:bodyPr xmlns:a="http://schemas.openxmlformats.org/drawingml/2006/main" wrap="square" lIns="0" tIns="0" rIns="0" bIns="0" anchor="t">
+            <a:normAutofit fontScale="100000"/>
+          </a:bodyPr>
+          <a:lstStyle xmlns:a="http://schemas.openxmlformats.org/drawingml/2006/main"/>
+          <a:p xmlns:a="http://schemas.openxmlformats.org/drawingml/2006/main">
+            <a:pPr algn="ctr">
+              <a:defRPr sz="1200" b="1" i="0">
+                <a:solidFill>
+                  <a:srgbClr val="7B61D1"/>
+                </a:solidFill>
+                <a:latin typeface="Microsoft YaHei"/>
+                <a:ea typeface="Microsoft YaHei"/>
+                <a:cs typeface="Microsoft YaHei"/>
+              </a:defRPr>
+            </a:pPr>
+            <a:r>
+              <a:rPr sz="1200" b="1" i="0">
+                <a:solidFill>
+                  <a:srgbClr val="7B61D1"/>
+                </a:solidFill>
+                <a:latin typeface="Microsoft YaHei"/>
+                <a:ea typeface="Microsoft YaHei"/>
+                <a:cs typeface="Microsoft YaHei"/>
+              </a:rPr>
+              <a:t>输出：更稳定的筛选结论</a:t>
+            </a:r>
+          </a:p>
+        </p:txBody>
+      </p:sp>
+      <p:sp>
+        <p:nvSpPr>
+          <p:cNvPr id="15" name="sow-module-2">
+            <a:extLst xmlns:a="http://schemas.openxmlformats.org/drawingml/2006/main">
+              <a:ext uri="{FF2B5EF4-FFF2-40B4-BE49-F238E27FC236}">
+                <a16:creationId xmlns:a16="http://schemas.microsoft.com/office/drawing/2014/main" id="{FE84DDC3-9C3F-4BB7-82AC-2E4893C3E915}"/>
+              </a:ext>
+            </a:extLst>
+          </p:cNvPr>
+          <p:cNvSpPr>
+            <a:spLocks xmlns:a="http://schemas.openxmlformats.org/drawingml/2006/main" noGrp="1"/>
+          </p:cNvSpPr>
+          <p:nvPr/>
+        </p:nvSpPr>
+        <p:spPr>
+          <a:xfrm xmlns:a="http://schemas.openxmlformats.org/drawingml/2006/main">
+            <a:off x="7981950" y="1562100"/>
+            <a:ext cx="3390900" cy="2686050"/>
           </a:xfrm>
           <a:prstGeom xmlns:a="http://schemas.openxmlformats.org/drawingml/2006/main" prst="roundRect">
             <a:avLst>
-              <a:gd name="adj" fmla="val 2899"/>
+              <a:gd name="adj" fmla="val 4255"/>
             </a:avLst>
           </a:prstGeom>
-        </p:spPr>
-      </p:pic>
-      <p:sp>
-        <p:nvSpPr>
-          <p:cNvPr id="13" name="calibration-curves-back">
-            <a:extLst xmlns:a="http://schemas.openxmlformats.org/drawingml/2006/main">
-              <a:ext uri="{FF2B5EF4-FFF2-40B4-BE49-F238E27FC236}">
-                <a16:creationId xmlns:a16="http://schemas.microsoft.com/office/drawing/2014/main" id="{2F7533A3-720A-45F4-9D11-D534CA4C7479}"/>
-              </a:ext>
-            </a:extLst>
-          </p:cNvPr>
-          <p:cNvSpPr>
-            <a:spLocks xmlns:a="http://schemas.openxmlformats.org/drawingml/2006/main" noGrp="1"/>
-          </p:cNvSpPr>
-          <p:nvPr/>
-        </p:nvSpPr>
-        <p:spPr>
-          <a:xfrm xmlns:a="http://schemas.openxmlformats.org/drawingml/2006/main">
-            <a:off x="6324600" y="2400300"/>
-            <a:ext cx="5372100" cy="2667000"/>
-          </a:xfrm>
-          <a:prstGeom xmlns:a="http://schemas.openxmlformats.org/drawingml/2006/main" prst="roundRect">
-            <a:avLst>
-              <a:gd name="adj" fmla="val 2857"/>
-            </a:avLst>
-          </a:prstGeom>
           <a:solidFill xmlns:a="http://schemas.openxmlformats.org/drawingml/2006/main">
-            <a:srgbClr val="FFFFFF"/>
+            <a:srgbClr val="E7F6F3"/>
           </a:solidFill>
           <a:ln xmlns:a="http://schemas.openxmlformats.org/drawingml/2006/main" w="9525">
             <a:solidFill>
-              <a:srgbClr val="D8E0E8"/>
+              <a:srgbClr val="E7F6F3"/>
             </a:solidFill>
             <a:prstDash val="solid"/>
           </a:ln>
         </p:spPr>
       </p:sp>
-      <p:pic>
-        <p:nvPicPr>
-          <p:cNvPr id="33" name=""/>
-          <p:cNvPicPr>
-            <a:picLocks xmlns:a="http://schemas.openxmlformats.org/drawingml/2006/main" noChangeAspect="1"/>
-          </p:cNvPicPr>
-          <p:nvPr/>
-        </p:nvPicPr>
-        <p:blipFill>
-          <a:blip xmlns:r="http://schemas.openxmlformats.org/officeDocument/2006/relationships" xmlns:a="http://schemas.openxmlformats.org/drawingml/2006/main" r:embed="Re817d940fdbd47d4"/>
-          <a:stretch xmlns:a="http://schemas.openxmlformats.org/drawingml/2006/main"/>
-        </p:blipFill>
-        <p:spPr>
-          <a:xfrm xmlns:a="http://schemas.openxmlformats.org/drawingml/2006/main">
-            <a:off x="6343650" y="2514600"/>
-            <a:ext cx="5334000" cy="2438400"/>
+      <p:sp>
+        <p:nvSpPr>
+          <p:cNvPr id="16" name="sow-no-2">
+            <a:extLst xmlns:a="http://schemas.openxmlformats.org/drawingml/2006/main">
+              <a:ext uri="{FF2B5EF4-FFF2-40B4-BE49-F238E27FC236}">
+                <a16:creationId xmlns:a16="http://schemas.microsoft.com/office/drawing/2014/main" id="{8F4C0E1C-EDAE-4D4C-A397-1AABF0AF59C3}"/>
+              </a:ext>
+            </a:extLst>
+          </p:cNvPr>
+          <p:cNvSpPr>
+            <a:spLocks xmlns:a="http://schemas.openxmlformats.org/drawingml/2006/main" noGrp="1"/>
+          </p:cNvSpPr>
+          <p:nvPr/>
+        </p:nvSpPr>
+        <p:spPr>
+          <a:xfrm xmlns:a="http://schemas.openxmlformats.org/drawingml/2006/main">
+            <a:off x="8210550" y="1790700"/>
+            <a:ext cx="838200" cy="266700"/>
+          </a:xfrm>
+          <a:prstGeom xmlns:a="http://schemas.openxmlformats.org/drawingml/2006/main" prst="rect">
+            <a:avLst/>
+          </a:prstGeom>
+          <a:noFill xmlns:a="http://schemas.openxmlformats.org/drawingml/2006/main"/>
+          <a:ln xmlns:a="http://schemas.openxmlformats.org/drawingml/2006/main" w="0">
+            <a:noFill/>
+            <a:prstDash val="solid"/>
+          </a:ln>
+        </p:spPr>
+        <p:txBody>
+          <a:bodyPr xmlns:a="http://schemas.openxmlformats.org/drawingml/2006/main" wrap="square" lIns="0" tIns="0" rIns="0" bIns="0" anchor="t">
+            <a:normAutofit fontScale="100000"/>
+          </a:bodyPr>
+          <a:lstStyle xmlns:a="http://schemas.openxmlformats.org/drawingml/2006/main"/>
+          <a:p xmlns:a="http://schemas.openxmlformats.org/drawingml/2006/main">
+            <a:pPr algn="l">
+              <a:defRPr sz="1350" b="1" i="0">
+                <a:solidFill>
+                  <a:srgbClr val="159A91"/>
+                </a:solidFill>
+                <a:latin typeface="Microsoft YaHei"/>
+                <a:ea typeface="Microsoft YaHei"/>
+                <a:cs typeface="Microsoft YaHei"/>
+              </a:defRPr>
+            </a:pPr>
+            <a:r>
+              <a:rPr sz="1350" b="1" i="0">
+                <a:solidFill>
+                  <a:srgbClr val="159A91"/>
+                </a:solidFill>
+                <a:latin typeface="Microsoft YaHei"/>
+                <a:ea typeface="Microsoft YaHei"/>
+                <a:cs typeface="Microsoft YaHei"/>
+              </a:rPr>
+              <a:t>模块三</a:t>
+            </a:r>
+          </a:p>
+        </p:txBody>
+      </p:sp>
+      <p:sp>
+        <p:nvSpPr>
+          <p:cNvPr id="17" name="sow-title-2">
+            <a:extLst xmlns:a="http://schemas.openxmlformats.org/drawingml/2006/main">
+              <a:ext uri="{FF2B5EF4-FFF2-40B4-BE49-F238E27FC236}">
+                <a16:creationId xmlns:a16="http://schemas.microsoft.com/office/drawing/2014/main" id="{012A2538-91B2-4FBF-8D5C-E25684FBA2AE}"/>
+              </a:ext>
+            </a:extLst>
+          </p:cNvPr>
+          <p:cNvSpPr>
+            <a:spLocks xmlns:a="http://schemas.openxmlformats.org/drawingml/2006/main" noGrp="1"/>
+          </p:cNvSpPr>
+          <p:nvPr/>
+        </p:nvSpPr>
+        <p:spPr>
+          <a:xfrm xmlns:a="http://schemas.openxmlformats.org/drawingml/2006/main">
+            <a:off x="8210550" y="2171700"/>
+            <a:ext cx="2933700" cy="552450"/>
+          </a:xfrm>
+          <a:prstGeom xmlns:a="http://schemas.openxmlformats.org/drawingml/2006/main" prst="rect">
+            <a:avLst/>
+          </a:prstGeom>
+          <a:noFill xmlns:a="http://schemas.openxmlformats.org/drawingml/2006/main"/>
+          <a:ln xmlns:a="http://schemas.openxmlformats.org/drawingml/2006/main" w="0">
+            <a:noFill/>
+            <a:prstDash val="solid"/>
+          </a:ln>
+        </p:spPr>
+        <p:txBody>
+          <a:bodyPr xmlns:a="http://schemas.openxmlformats.org/drawingml/2006/main" wrap="square" lIns="0" tIns="0" rIns="0" bIns="0" anchor="t">
+            <a:normAutofit fontScale="100000"/>
+          </a:bodyPr>
+          <a:lstStyle xmlns:a="http://schemas.openxmlformats.org/drawingml/2006/main"/>
+          <a:p xmlns:a="http://schemas.openxmlformats.org/drawingml/2006/main">
+            <a:pPr algn="l">
+              <a:defRPr sz="1725" b="1" i="0">
+                <a:solidFill>
+                  <a:srgbClr val="12263A"/>
+                </a:solidFill>
+                <a:latin typeface="Microsoft YaHei"/>
+                <a:ea typeface="Microsoft YaHei"/>
+                <a:cs typeface="Microsoft YaHei"/>
+              </a:defRPr>
+            </a:pPr>
+            <a:r>
+              <a:rPr sz="1725" b="1" i="0">
+                <a:solidFill>
+                  <a:srgbClr val="12263A"/>
+                </a:solidFill>
+                <a:latin typeface="Microsoft YaHei"/>
+                <a:ea typeface="Microsoft YaHei"/>
+                <a:cs typeface="Microsoft YaHei"/>
+              </a:rPr>
+              <a:t>图文证据核验与闭环验证</a:t>
+            </a:r>
+          </a:p>
+        </p:txBody>
+      </p:sp>
+      <p:sp>
+        <p:nvSpPr>
+          <p:cNvPr id="18" name="sow-body-2">
+            <a:extLst xmlns:a="http://schemas.openxmlformats.org/drawingml/2006/main">
+              <a:ext uri="{FF2B5EF4-FFF2-40B4-BE49-F238E27FC236}">
+                <a16:creationId xmlns:a16="http://schemas.microsoft.com/office/drawing/2014/main" id="{E67B4F78-128B-451F-BC86-63AD9761AE99}"/>
+              </a:ext>
+            </a:extLst>
+          </p:cNvPr>
+          <p:cNvSpPr>
+            <a:spLocks xmlns:a="http://schemas.openxmlformats.org/drawingml/2006/main" noGrp="1"/>
+          </p:cNvSpPr>
+          <p:nvPr/>
+        </p:nvSpPr>
+        <p:spPr>
+          <a:xfrm xmlns:a="http://schemas.openxmlformats.org/drawingml/2006/main">
+            <a:off x="8210550" y="2914650"/>
+            <a:ext cx="2933700" cy="800100"/>
+          </a:xfrm>
+          <a:prstGeom xmlns:a="http://schemas.openxmlformats.org/drawingml/2006/main" prst="rect">
+            <a:avLst/>
+          </a:prstGeom>
+          <a:noFill xmlns:a="http://schemas.openxmlformats.org/drawingml/2006/main"/>
+          <a:ln xmlns:a="http://schemas.openxmlformats.org/drawingml/2006/main" w="0">
+            <a:noFill/>
+            <a:prstDash val="solid"/>
+          </a:ln>
+        </p:spPr>
+        <p:txBody>
+          <a:bodyPr xmlns:a="http://schemas.openxmlformats.org/drawingml/2006/main" wrap="square" lIns="0" tIns="0" rIns="0" bIns="0" anchor="t">
+            <a:normAutofit fontScale="100000"/>
+          </a:bodyPr>
+          <a:lstStyle xmlns:a="http://schemas.openxmlformats.org/drawingml/2006/main"/>
+          <a:p xmlns:a="http://schemas.openxmlformats.org/drawingml/2006/main">
+            <a:pPr algn="l">
+              <a:defRPr sz="1275" b="0" i="0">
+                <a:solidFill>
+                  <a:srgbClr val="25364A"/>
+                </a:solidFill>
+                <a:latin typeface="Microsoft YaHei"/>
+                <a:ea typeface="Microsoft YaHei"/>
+                <a:cs typeface="Microsoft YaHei"/>
+              </a:defRPr>
+            </a:pPr>
+            <a:r>
+              <a:rPr sz="1275" b="0" i="0">
+                <a:solidFill>
+                  <a:srgbClr val="25364A"/>
+                </a:solidFill>
+                <a:latin typeface="Microsoft YaHei"/>
+                <a:ea typeface="Microsoft YaHei"/>
+                <a:cs typeface="Microsoft YaHei"/>
+              </a:rPr>
+              <a:t>核验对象、属性、数量、空间关系和局部瑕疵；比较筛选前后的训练或评测指标变化。</a:t>
+            </a:r>
+          </a:p>
+        </p:txBody>
+      </p:sp>
+      <p:sp>
+        <p:nvSpPr>
+          <p:cNvPr id="19" name="sow-output-2">
+            <a:extLst xmlns:a="http://schemas.openxmlformats.org/drawingml/2006/main">
+              <a:ext uri="{FF2B5EF4-FFF2-40B4-BE49-F238E27FC236}">
+                <a16:creationId xmlns:a16="http://schemas.microsoft.com/office/drawing/2014/main" id="{19D947F7-4725-474B-861D-DFBC1857E11F}"/>
+              </a:ext>
+            </a:extLst>
+          </p:cNvPr>
+          <p:cNvSpPr>
+            <a:spLocks xmlns:a="http://schemas.openxmlformats.org/drawingml/2006/main" noGrp="1"/>
+          </p:cNvSpPr>
+          <p:nvPr/>
+        </p:nvSpPr>
+        <p:spPr>
+          <a:xfrm xmlns:a="http://schemas.openxmlformats.org/drawingml/2006/main">
+            <a:off x="8210550" y="3810000"/>
+            <a:ext cx="2933700" cy="266700"/>
+          </a:xfrm>
+          <a:prstGeom xmlns:a="http://schemas.openxmlformats.org/drawingml/2006/main" prst="rect">
+            <a:avLst/>
+          </a:prstGeom>
+          <a:noFill xmlns:a="http://schemas.openxmlformats.org/drawingml/2006/main"/>
+          <a:ln xmlns:a="http://schemas.openxmlformats.org/drawingml/2006/main" w="0">
+            <a:noFill/>
+            <a:prstDash val="solid"/>
+          </a:ln>
+        </p:spPr>
+        <p:txBody>
+          <a:bodyPr xmlns:a="http://schemas.openxmlformats.org/drawingml/2006/main" wrap="square" lIns="0" tIns="0" rIns="0" bIns="0" anchor="t">
+            <a:normAutofit fontScale="100000"/>
+          </a:bodyPr>
+          <a:lstStyle xmlns:a="http://schemas.openxmlformats.org/drawingml/2006/main"/>
+          <a:p xmlns:a="http://schemas.openxmlformats.org/drawingml/2006/main">
+            <a:pPr algn="ctr">
+              <a:defRPr sz="1200" b="1" i="0">
+                <a:solidFill>
+                  <a:srgbClr val="159A91"/>
+                </a:solidFill>
+                <a:latin typeface="Microsoft YaHei"/>
+                <a:ea typeface="Microsoft YaHei"/>
+                <a:cs typeface="Microsoft YaHei"/>
+              </a:defRPr>
+            </a:pPr>
+            <a:r>
+              <a:rPr sz="1200" b="1" i="0">
+                <a:solidFill>
+                  <a:srgbClr val="159A91"/>
+                </a:solidFill>
+                <a:latin typeface="Microsoft YaHei"/>
+                <a:ea typeface="Microsoft YaHei"/>
+                <a:cs typeface="Microsoft YaHei"/>
+              </a:rPr>
+              <a:t>输出：证据、标签与适用边界</a:t>
+            </a:r>
+          </a:p>
+        </p:txBody>
+      </p:sp>
+      <p:sp>
+        <p:nvSpPr>
+          <p:cNvPr id="20" name="auto-text-25">
+            <a:extLst xmlns:a="http://schemas.openxmlformats.org/drawingml/2006/main">
+              <a:ext uri="{FF2B5EF4-FFF2-40B4-BE49-F238E27FC236}">
+                <a16:creationId xmlns:a16="http://schemas.microsoft.com/office/drawing/2014/main" id="{1ECBD117-1DF2-490A-9E5A-BA8EF0539B00}"/>
+              </a:ext>
+            </a:extLst>
+          </p:cNvPr>
+          <p:cNvSpPr>
+            <a:spLocks xmlns:a="http://schemas.openxmlformats.org/drawingml/2006/main" noGrp="1"/>
+          </p:cNvSpPr>
+          <p:nvPr/>
+        </p:nvSpPr>
+        <p:spPr>
+          <a:xfrm xmlns:a="http://schemas.openxmlformats.org/drawingml/2006/main">
+            <a:off x="514350" y="4476750"/>
+            <a:ext cx="3429000" cy="285750"/>
+          </a:xfrm>
+          <a:prstGeom xmlns:a="http://schemas.openxmlformats.org/drawingml/2006/main" prst="rect">
+            <a:avLst/>
+          </a:prstGeom>
+          <a:noFill xmlns:a="http://schemas.openxmlformats.org/drawingml/2006/main"/>
+          <a:ln xmlns:a="http://schemas.openxmlformats.org/drawingml/2006/main" w="0">
+            <a:noFill/>
+            <a:prstDash val="solid"/>
+          </a:ln>
+        </p:spPr>
+        <p:txBody>
+          <a:bodyPr xmlns:a="http://schemas.openxmlformats.org/drawingml/2006/main" wrap="square" lIns="0" tIns="0" rIns="0" bIns="0" anchor="t">
+            <a:normAutofit fontScale="100000"/>
+          </a:bodyPr>
+          <a:lstStyle xmlns:a="http://schemas.openxmlformats.org/drawingml/2006/main"/>
+          <a:p xmlns:a="http://schemas.openxmlformats.org/drawingml/2006/main">
+            <a:pPr algn="l">
+              <a:defRPr sz="1575" b="1" i="0">
+                <a:solidFill>
+                  <a:srgbClr val="12263A"/>
+                </a:solidFill>
+                <a:latin typeface="Microsoft YaHei"/>
+                <a:ea typeface="Microsoft YaHei"/>
+                <a:cs typeface="Microsoft YaHei"/>
+              </a:defRPr>
+            </a:pPr>
+            <a:r>
+              <a:rPr sz="1575" b="1" i="0">
+                <a:solidFill>
+                  <a:srgbClr val="12263A"/>
+                </a:solidFill>
+                <a:latin typeface="Microsoft YaHei"/>
+                <a:ea typeface="Microsoft YaHei"/>
+                <a:cs typeface="Microsoft YaHei"/>
+              </a:rPr>
+              <a:t>可调用的底层评估器与证据工具</a:t>
+            </a:r>
+          </a:p>
+        </p:txBody>
+      </p:sp>
+      <p:sp>
+        <p:nvSpPr>
+          <p:cNvPr id="21" name="evaluator-pool">
+            <a:extLst xmlns:a="http://schemas.openxmlformats.org/drawingml/2006/main">
+              <a:ext uri="{FF2B5EF4-FFF2-40B4-BE49-F238E27FC236}">
+                <a16:creationId xmlns:a16="http://schemas.microsoft.com/office/drawing/2014/main" id="{5E06837C-9AF9-4D71-A8C7-D14EE09BBA2A}"/>
+              </a:ext>
+            </a:extLst>
+          </p:cNvPr>
+          <p:cNvSpPr>
+            <a:spLocks xmlns:a="http://schemas.openxmlformats.org/drawingml/2006/main" noGrp="1"/>
+          </p:cNvSpPr>
+          <p:nvPr/>
+        </p:nvSpPr>
+        <p:spPr>
+          <a:xfrm xmlns:a="http://schemas.openxmlformats.org/drawingml/2006/main">
+            <a:off x="514350" y="4857750"/>
+            <a:ext cx="11163300" cy="723900"/>
           </a:xfrm>
           <a:prstGeom xmlns:a="http://schemas.openxmlformats.org/drawingml/2006/main" prst="roundRect">
             <a:avLst>
-              <a:gd name="adj" fmla="val 2899"/>
-            </a:avLst>
-          </a:prstGeom>
-        </p:spPr>
-      </p:pic>
-      <p:sp>
-        <p:nvSpPr>
-          <p:cNvPr id="15" name="auto-text-30">
-            <a:extLst xmlns:a="http://schemas.openxmlformats.org/drawingml/2006/main">
-              <a:ext uri="{FF2B5EF4-FFF2-40B4-BE49-F238E27FC236}">
-                <a16:creationId xmlns:a16="http://schemas.microsoft.com/office/drawing/2014/main" id="{687146F1-4526-4F7C-86FE-5140681AAA43}"/>
-              </a:ext>
-            </a:extLst>
-          </p:cNvPr>
-          <p:cNvSpPr>
-            <a:spLocks xmlns:a="http://schemas.openxmlformats.org/drawingml/2006/main" noGrp="1"/>
-          </p:cNvSpPr>
-          <p:nvPr/>
-        </p:nvSpPr>
-        <p:spPr>
-          <a:xfrm xmlns:a="http://schemas.openxmlformats.org/drawingml/2006/main">
-            <a:off x="552450" y="5219700"/>
-            <a:ext cx="5238750" cy="457200"/>
-          </a:xfrm>
-          <a:prstGeom xmlns:a="http://schemas.openxmlformats.org/drawingml/2006/main" prst="rect">
-            <a:avLst/>
-          </a:prstGeom>
-          <a:noFill xmlns:a="http://schemas.openxmlformats.org/drawingml/2006/main"/>
-          <a:ln xmlns:a="http://schemas.openxmlformats.org/drawingml/2006/main" w="0">
-            <a:noFill/>
-            <a:prstDash val="solid"/>
-          </a:ln>
-        </p:spPr>
-        <p:txBody>
-          <a:bodyPr xmlns:a="http://schemas.openxmlformats.org/drawingml/2006/main" wrap="square" lIns="0" tIns="0" rIns="0" bIns="0" anchor="t">
-            <a:normAutofit fontScale="100000"/>
-          </a:bodyPr>
-          <a:lstStyle xmlns:a="http://schemas.openxmlformats.org/drawingml/2006/main"/>
-          <a:p xmlns:a="http://schemas.openxmlformats.org/drawingml/2006/main">
-            <a:pPr algn="l">
-              <a:defRPr sz="1275" b="1" i="0">
-                <a:solidFill>
-                  <a:srgbClr val="12263A"/>
-                </a:solidFill>
-                <a:latin typeface="Microsoft YaHei"/>
-                <a:ea typeface="Microsoft YaHei"/>
-                <a:cs typeface="Microsoft YaHei"/>
-              </a:defRPr>
-            </a:pPr>
-            <a:r>
-              <a:rPr sz="1275" b="1" i="0">
-                <a:solidFill>
-                  <a:srgbClr val="12263A"/>
-                </a:solidFill>
-                <a:latin typeface="Microsoft YaHei"/>
-                <a:ea typeface="Microsoft YaHei"/>
-                <a:cs typeface="Microsoft YaHei"/>
-              </a:rPr>
-              <a:t>结论一｜通用Judge与专家偏好仍有明显差距，且不同任务表现差异较大。</a:t>
-            </a:r>
-          </a:p>
-        </p:txBody>
-      </p:sp>
-      <p:sp>
-        <p:nvSpPr>
-          <p:cNvPr id="16" name="auto-text-31">
-            <a:extLst xmlns:a="http://schemas.openxmlformats.org/drawingml/2006/main">
-              <a:ext uri="{FF2B5EF4-FFF2-40B4-BE49-F238E27FC236}">
-                <a16:creationId xmlns:a16="http://schemas.microsoft.com/office/drawing/2014/main" id="{D1DE009D-7CD4-4455-9E70-D2542E5B1F20}"/>
-              </a:ext>
-            </a:extLst>
-          </p:cNvPr>
-          <p:cNvSpPr>
-            <a:spLocks xmlns:a="http://schemas.openxmlformats.org/drawingml/2006/main" noGrp="1"/>
-          </p:cNvSpPr>
-          <p:nvPr/>
-        </p:nvSpPr>
-        <p:spPr>
-          <a:xfrm xmlns:a="http://schemas.openxmlformats.org/drawingml/2006/main">
-            <a:off x="6381750" y="5219700"/>
-            <a:ext cx="5238750" cy="457200"/>
-          </a:xfrm>
-          <a:prstGeom xmlns:a="http://schemas.openxmlformats.org/drawingml/2006/main" prst="rect">
-            <a:avLst/>
-          </a:prstGeom>
-          <a:noFill xmlns:a="http://schemas.openxmlformats.org/drawingml/2006/main"/>
-          <a:ln xmlns:a="http://schemas.openxmlformats.org/drawingml/2006/main" w="0">
-            <a:noFill/>
-            <a:prstDash val="solid"/>
-          </a:ln>
-        </p:spPr>
-        <p:txBody>
-          <a:bodyPr xmlns:a="http://schemas.openxmlformats.org/drawingml/2006/main" wrap="square" lIns="0" tIns="0" rIns="0" bIns="0" anchor="t">
-            <a:normAutofit fontScale="100000"/>
-          </a:bodyPr>
-          <a:lstStyle xmlns:a="http://schemas.openxmlformats.org/drawingml/2006/main"/>
-          <a:p xmlns:a="http://schemas.openxmlformats.org/drawingml/2006/main">
-            <a:pPr algn="l">
-              <a:defRPr sz="1275" b="1" i="0">
-                <a:solidFill>
-                  <a:srgbClr val="12263A"/>
-                </a:solidFill>
-                <a:latin typeface="Microsoft YaHei"/>
-                <a:ea typeface="Microsoft YaHei"/>
-                <a:cs typeface="Microsoft YaHei"/>
-              </a:defRPr>
-            </a:pPr>
-            <a:r>
-              <a:rPr sz="1275" b="1" i="0">
-                <a:solidFill>
-                  <a:srgbClr val="12263A"/>
-                </a:solidFill>
-                <a:latin typeface="Microsoft YaHei"/>
-                <a:ea typeface="Microsoft YaHei"/>
-                <a:cs typeface="Microsoft YaHei"/>
-              </a:rPr>
-              <a:t>结论二｜视觉任务需要专门校准；低置信和分歧样本应转入证据核验或人工复核。</a:t>
-            </a:r>
-          </a:p>
-        </p:txBody>
-      </p:sp>
-      <p:sp>
-        <p:nvSpPr>
-          <p:cNvPr id="17" name="gap-conclusion">
-            <a:extLst xmlns:a="http://schemas.openxmlformats.org/drawingml/2006/main">
-              <a:ext uri="{FF2B5EF4-FFF2-40B4-BE49-F238E27FC236}">
-                <a16:creationId xmlns:a16="http://schemas.microsoft.com/office/drawing/2014/main" id="{430D96FD-617E-4ACB-9E42-CACBA4F0A767}"/>
-              </a:ext>
-            </a:extLst>
-          </p:cNvPr>
-          <p:cNvSpPr>
-            <a:spLocks xmlns:a="http://schemas.openxmlformats.org/drawingml/2006/main" noGrp="1"/>
-          </p:cNvSpPr>
-          <p:nvPr/>
-        </p:nvSpPr>
-        <p:spPr>
-          <a:xfrm xmlns:a="http://schemas.openxmlformats.org/drawingml/2006/main">
-            <a:off x="514350" y="5753100"/>
-            <a:ext cx="11163300" cy="381000"/>
-          </a:xfrm>
-          <a:prstGeom xmlns:a="http://schemas.openxmlformats.org/drawingml/2006/main" prst="roundRect">
-            <a:avLst>
-              <a:gd name="adj" fmla="val 20000"/>
+              <a:gd name="adj" fmla="val 10526"/>
             </a:avLst>
           </a:prstGeom>
           <a:solidFill xmlns:a="http://schemas.openxmlformats.org/drawingml/2006/main">
@@ -7457,22 +8853,22 @@
       </p:sp>
       <p:sp>
         <p:nvSpPr>
-          <p:cNvPr id="18" name="auto-text-32">
-            <a:extLst xmlns:a="http://schemas.openxmlformats.org/drawingml/2006/main">
-              <a:ext uri="{FF2B5EF4-FFF2-40B4-BE49-F238E27FC236}">
-                <a16:creationId xmlns:a16="http://schemas.microsoft.com/office/drawing/2014/main" id="{5654669D-99EE-472C-9E2C-184A411F4B4A}"/>
-              </a:ext>
-            </a:extLst>
-          </p:cNvPr>
-          <p:cNvSpPr>
-            <a:spLocks xmlns:a="http://schemas.openxmlformats.org/drawingml/2006/main" noGrp="1"/>
-          </p:cNvSpPr>
-          <p:nvPr/>
-        </p:nvSpPr>
-        <p:spPr>
-          <a:xfrm xmlns:a="http://schemas.openxmlformats.org/drawingml/2006/main">
-            <a:off x="704850" y="5838825"/>
-            <a:ext cx="10782300" cy="228600"/>
+          <p:cNvPr id="22" name="tool-0">
+            <a:extLst xmlns:a="http://schemas.openxmlformats.org/drawingml/2006/main">
+              <a:ext uri="{FF2B5EF4-FFF2-40B4-BE49-F238E27FC236}">
+                <a16:creationId xmlns:a16="http://schemas.microsoft.com/office/drawing/2014/main" id="{DDDC929E-1AAD-4E98-B3FF-C28FDB034054}"/>
+              </a:ext>
+            </a:extLst>
+          </p:cNvPr>
+          <p:cNvSpPr>
+            <a:spLocks xmlns:a="http://schemas.openxmlformats.org/drawingml/2006/main" noGrp="1"/>
+          </p:cNvSpPr>
+          <p:nvPr/>
+        </p:nvSpPr>
+        <p:spPr>
+          <a:xfrm xmlns:a="http://schemas.openxmlformats.org/drawingml/2006/main">
+            <a:off x="647700" y="5076825"/>
+            <a:ext cx="2057400" cy="285750"/>
           </a:xfrm>
           <a:prstGeom xmlns:a="http://schemas.openxmlformats.org/drawingml/2006/main" prst="rect">
             <a:avLst/>
@@ -7490,46 +8886,371 @@
           <a:lstStyle xmlns:a="http://schemas.openxmlformats.org/drawingml/2006/main"/>
           <a:p xmlns:a="http://schemas.openxmlformats.org/drawingml/2006/main">
             <a:pPr algn="ctr">
-              <a:defRPr sz="1350" b="1" i="0">
-                <a:solidFill>
-                  <a:srgbClr val="12263A"/>
-                </a:solidFill>
-                <a:latin typeface="Microsoft YaHei"/>
-                <a:ea typeface="Microsoft YaHei"/>
-                <a:cs typeface="Microsoft YaHei"/>
-              </a:defRPr>
-            </a:pPr>
-            <a:r>
-              <a:rPr sz="1350" b="1" i="0">
-                <a:solidFill>
-                  <a:srgbClr val="12263A"/>
-                </a:solidFill>
-                <a:latin typeface="Microsoft YaHei"/>
-                <a:ea typeface="Microsoft YaHei"/>
-                <a:cs typeface="Microsoft YaHei"/>
-              </a:rPr>
-              <a:t>真正需要建设的不是“能打分的模型”，而是“能根据任务校准、识别分歧并给出证据的评估机制”。</a:t>
-            </a:r>
-          </a:p>
-        </p:txBody>
-      </p:sp>
-      <p:sp>
-        <p:nvSpPr>
-          <p:cNvPr id="19" name="source-650-0.23211381938726783">
-            <a:extLst xmlns:a="http://schemas.openxmlformats.org/drawingml/2006/main">
-              <a:ext uri="{FF2B5EF4-FFF2-40B4-BE49-F238E27FC236}">
-                <a16:creationId xmlns:a16="http://schemas.microsoft.com/office/drawing/2014/main" id="{CB4F7130-3E5F-4F19-A178-AC88BE156CD6}"/>
-              </a:ext>
-            </a:extLst>
-          </p:cNvPr>
-          <p:cNvSpPr>
-            <a:spLocks xmlns:a="http://schemas.openxmlformats.org/drawingml/2006/main" noGrp="1"/>
-          </p:cNvSpPr>
-          <p:nvPr/>
-        </p:nvSpPr>
-        <p:spPr>
-          <a:xfrm xmlns:a="http://schemas.openxmlformats.org/drawingml/2006/main">
-            <a:off x="476250" y="6191250"/>
+              <a:defRPr sz="1275" b="1" i="0">
+                <a:solidFill>
+                  <a:srgbClr val="2F6BFF"/>
+                </a:solidFill>
+                <a:latin typeface="Microsoft YaHei"/>
+                <a:ea typeface="Microsoft YaHei"/>
+                <a:cs typeface="Microsoft YaHei"/>
+              </a:defRPr>
+            </a:pPr>
+            <a:r>
+              <a:rPr sz="1275" b="1" i="0">
+                <a:solidFill>
+                  <a:srgbClr val="2F6BFF"/>
+                </a:solidFill>
+                <a:latin typeface="Microsoft YaHei"/>
+                <a:ea typeface="Microsoft YaHei"/>
+                <a:cs typeface="Microsoft YaHei"/>
+              </a:rPr>
+              <a:t>VLM／MLLM Judge</a:t>
+            </a:r>
+          </a:p>
+        </p:txBody>
+      </p:sp>
+      <p:sp>
+        <p:nvSpPr>
+          <p:cNvPr id="23" name="tool-1">
+            <a:extLst xmlns:a="http://schemas.openxmlformats.org/drawingml/2006/main">
+              <a:ext uri="{FF2B5EF4-FFF2-40B4-BE49-F238E27FC236}">
+                <a16:creationId xmlns:a16="http://schemas.microsoft.com/office/drawing/2014/main" id="{EB363679-E0E9-485B-A470-8A011F17A48C}"/>
+              </a:ext>
+            </a:extLst>
+          </p:cNvPr>
+          <p:cNvSpPr>
+            <a:spLocks xmlns:a="http://schemas.openxmlformats.org/drawingml/2006/main" noGrp="1"/>
+          </p:cNvSpPr>
+          <p:nvPr/>
+        </p:nvSpPr>
+        <p:spPr>
+          <a:xfrm xmlns:a="http://schemas.openxmlformats.org/drawingml/2006/main">
+            <a:off x="2838450" y="5076825"/>
+            <a:ext cx="2057400" cy="285750"/>
+          </a:xfrm>
+          <a:prstGeom xmlns:a="http://schemas.openxmlformats.org/drawingml/2006/main" prst="rect">
+            <a:avLst/>
+          </a:prstGeom>
+          <a:noFill xmlns:a="http://schemas.openxmlformats.org/drawingml/2006/main"/>
+          <a:ln xmlns:a="http://schemas.openxmlformats.org/drawingml/2006/main" w="0">
+            <a:noFill/>
+            <a:prstDash val="solid"/>
+          </a:ln>
+        </p:spPr>
+        <p:txBody>
+          <a:bodyPr xmlns:a="http://schemas.openxmlformats.org/drawingml/2006/main" wrap="square" lIns="0" tIns="0" rIns="0" bIns="0" anchor="t">
+            <a:normAutofit fontScale="100000"/>
+          </a:bodyPr>
+          <a:lstStyle xmlns:a="http://schemas.openxmlformats.org/drawingml/2006/main"/>
+          <a:p xmlns:a="http://schemas.openxmlformats.org/drawingml/2006/main">
+            <a:pPr algn="ctr">
+              <a:defRPr sz="1275" b="1" i="0">
+                <a:solidFill>
+                  <a:srgbClr val="7B61D1"/>
+                </a:solidFill>
+                <a:latin typeface="Microsoft YaHei"/>
+                <a:ea typeface="Microsoft YaHei"/>
+                <a:cs typeface="Microsoft YaHei"/>
+              </a:defRPr>
+            </a:pPr>
+            <a:r>
+              <a:rPr sz="1275" b="1" i="0">
+                <a:solidFill>
+                  <a:srgbClr val="7B61D1"/>
+                </a:solidFill>
+                <a:latin typeface="Microsoft YaHei"/>
+                <a:ea typeface="Microsoft YaHei"/>
+                <a:cs typeface="Microsoft YaHei"/>
+              </a:rPr>
+              <a:t>CLIP／SigLIP相似度</a:t>
+            </a:r>
+          </a:p>
+        </p:txBody>
+      </p:sp>
+      <p:sp>
+        <p:nvSpPr>
+          <p:cNvPr id="24" name="tool-2">
+            <a:extLst xmlns:a="http://schemas.openxmlformats.org/drawingml/2006/main">
+              <a:ext uri="{FF2B5EF4-FFF2-40B4-BE49-F238E27FC236}">
+                <a16:creationId xmlns:a16="http://schemas.microsoft.com/office/drawing/2014/main" id="{38DB3BF3-19B0-4702-9BD5-99A991D11A19}"/>
+              </a:ext>
+            </a:extLst>
+          </p:cNvPr>
+          <p:cNvSpPr>
+            <a:spLocks xmlns:a="http://schemas.openxmlformats.org/drawingml/2006/main" noGrp="1"/>
+          </p:cNvSpPr>
+          <p:nvPr/>
+        </p:nvSpPr>
+        <p:spPr>
+          <a:xfrm xmlns:a="http://schemas.openxmlformats.org/drawingml/2006/main">
+            <a:off x="5029200" y="5076825"/>
+            <a:ext cx="2057400" cy="285750"/>
+          </a:xfrm>
+          <a:prstGeom xmlns:a="http://schemas.openxmlformats.org/drawingml/2006/main" prst="rect">
+            <a:avLst/>
+          </a:prstGeom>
+          <a:noFill xmlns:a="http://schemas.openxmlformats.org/drawingml/2006/main"/>
+          <a:ln xmlns:a="http://schemas.openxmlformats.org/drawingml/2006/main" w="0">
+            <a:noFill/>
+            <a:prstDash val="solid"/>
+          </a:ln>
+        </p:spPr>
+        <p:txBody>
+          <a:bodyPr xmlns:a="http://schemas.openxmlformats.org/drawingml/2006/main" wrap="square" lIns="0" tIns="0" rIns="0" bIns="0" anchor="t">
+            <a:normAutofit fontScale="100000"/>
+          </a:bodyPr>
+          <a:lstStyle xmlns:a="http://schemas.openxmlformats.org/drawingml/2006/main"/>
+          <a:p xmlns:a="http://schemas.openxmlformats.org/drawingml/2006/main">
+            <a:pPr algn="ctr">
+              <a:defRPr sz="1275" b="1" i="0">
+                <a:solidFill>
+                  <a:srgbClr val="E65C55"/>
+                </a:solidFill>
+                <a:latin typeface="Microsoft YaHei"/>
+                <a:ea typeface="Microsoft YaHei"/>
+                <a:cs typeface="Microsoft YaHei"/>
+              </a:defRPr>
+            </a:pPr>
+            <a:r>
+              <a:rPr sz="1275" b="1" i="0">
+                <a:solidFill>
+                  <a:srgbClr val="E65C55"/>
+                </a:solidFill>
+                <a:latin typeface="Microsoft YaHei"/>
+                <a:ea typeface="Microsoft YaHei"/>
+                <a:cs typeface="Microsoft YaHei"/>
+              </a:rPr>
+              <a:t>DINO／LPIPS视觉指标</a:t>
+            </a:r>
+          </a:p>
+        </p:txBody>
+      </p:sp>
+      <p:sp>
+        <p:nvSpPr>
+          <p:cNvPr id="25" name="tool-3">
+            <a:extLst xmlns:a="http://schemas.openxmlformats.org/drawingml/2006/main">
+              <a:ext uri="{FF2B5EF4-FFF2-40B4-BE49-F238E27FC236}">
+                <a16:creationId xmlns:a16="http://schemas.microsoft.com/office/drawing/2014/main" id="{1B3409C8-0F07-49C5-B04A-69F51F2C56CD}"/>
+              </a:ext>
+            </a:extLst>
+          </p:cNvPr>
+          <p:cNvSpPr>
+            <a:spLocks xmlns:a="http://schemas.openxmlformats.org/drawingml/2006/main" noGrp="1"/>
+          </p:cNvSpPr>
+          <p:nvPr/>
+        </p:nvSpPr>
+        <p:spPr>
+          <a:xfrm xmlns:a="http://schemas.openxmlformats.org/drawingml/2006/main">
+            <a:off x="7219950" y="5076825"/>
+            <a:ext cx="2057400" cy="285750"/>
+          </a:xfrm>
+          <a:prstGeom xmlns:a="http://schemas.openxmlformats.org/drawingml/2006/main" prst="rect">
+            <a:avLst/>
+          </a:prstGeom>
+          <a:noFill xmlns:a="http://schemas.openxmlformats.org/drawingml/2006/main"/>
+          <a:ln xmlns:a="http://schemas.openxmlformats.org/drawingml/2006/main" w="0">
+            <a:noFill/>
+            <a:prstDash val="solid"/>
+          </a:ln>
+        </p:spPr>
+        <p:txBody>
+          <a:bodyPr xmlns:a="http://schemas.openxmlformats.org/drawingml/2006/main" wrap="square" lIns="0" tIns="0" rIns="0" bIns="0" anchor="t">
+            <a:normAutofit fontScale="100000"/>
+          </a:bodyPr>
+          <a:lstStyle xmlns:a="http://schemas.openxmlformats.org/drawingml/2006/main"/>
+          <a:p xmlns:a="http://schemas.openxmlformats.org/drawingml/2006/main">
+            <a:pPr algn="ctr">
+              <a:defRPr sz="1275" b="1" i="0">
+                <a:solidFill>
+                  <a:srgbClr val="159A91"/>
+                </a:solidFill>
+                <a:latin typeface="Microsoft YaHei"/>
+                <a:ea typeface="Microsoft YaHei"/>
+                <a:cs typeface="Microsoft YaHei"/>
+              </a:defRPr>
+            </a:pPr>
+            <a:r>
+              <a:rPr sz="1275" b="1" i="0">
+                <a:solidFill>
+                  <a:srgbClr val="159A91"/>
+                </a:solidFill>
+                <a:latin typeface="Microsoft YaHei"/>
+                <a:ea typeface="Microsoft YaHei"/>
+                <a:cs typeface="Microsoft YaHei"/>
+              </a:rPr>
+              <a:t>OCR／检测／视觉定位</a:t>
+            </a:r>
+          </a:p>
+        </p:txBody>
+      </p:sp>
+      <p:sp>
+        <p:nvSpPr>
+          <p:cNvPr id="26" name="tool-4">
+            <a:extLst xmlns:a="http://schemas.openxmlformats.org/drawingml/2006/main">
+              <a:ext uri="{FF2B5EF4-FFF2-40B4-BE49-F238E27FC236}">
+                <a16:creationId xmlns:a16="http://schemas.microsoft.com/office/drawing/2014/main" id="{97719324-517A-48CC-B1DD-13A72FEEC157}"/>
+              </a:ext>
+            </a:extLst>
+          </p:cNvPr>
+          <p:cNvSpPr>
+            <a:spLocks xmlns:a="http://schemas.openxmlformats.org/drawingml/2006/main" noGrp="1"/>
+          </p:cNvSpPr>
+          <p:nvPr/>
+        </p:nvSpPr>
+        <p:spPr>
+          <a:xfrm xmlns:a="http://schemas.openxmlformats.org/drawingml/2006/main">
+            <a:off x="9410700" y="5076825"/>
+            <a:ext cx="2057400" cy="285750"/>
+          </a:xfrm>
+          <a:prstGeom xmlns:a="http://schemas.openxmlformats.org/drawingml/2006/main" prst="rect">
+            <a:avLst/>
+          </a:prstGeom>
+          <a:noFill xmlns:a="http://schemas.openxmlformats.org/drawingml/2006/main"/>
+          <a:ln xmlns:a="http://schemas.openxmlformats.org/drawingml/2006/main" w="0">
+            <a:noFill/>
+            <a:prstDash val="solid"/>
+          </a:ln>
+        </p:spPr>
+        <p:txBody>
+          <a:bodyPr xmlns:a="http://schemas.openxmlformats.org/drawingml/2006/main" wrap="square" lIns="0" tIns="0" rIns="0" bIns="0" anchor="t">
+            <a:normAutofit fontScale="100000"/>
+          </a:bodyPr>
+          <a:lstStyle xmlns:a="http://schemas.openxmlformats.org/drawingml/2006/main"/>
+          <a:p xmlns:a="http://schemas.openxmlformats.org/drawingml/2006/main">
+            <a:pPr algn="ctr">
+              <a:defRPr sz="1275" b="1" i="0">
+                <a:solidFill>
+                  <a:srgbClr val="C78B17"/>
+                </a:solidFill>
+                <a:latin typeface="Microsoft YaHei"/>
+                <a:ea typeface="Microsoft YaHei"/>
+                <a:cs typeface="Microsoft YaHei"/>
+              </a:defRPr>
+            </a:pPr>
+            <a:r>
+              <a:rPr sz="1275" b="1" i="0">
+                <a:solidFill>
+                  <a:srgbClr val="C78B17"/>
+                </a:solidFill>
+                <a:latin typeface="Microsoft YaHei"/>
+                <a:ea typeface="Microsoft YaHei"/>
+                <a:cs typeface="Microsoft YaHei"/>
+              </a:rPr>
+              <a:t>业务规则／人工反馈</a:t>
+            </a:r>
+          </a:p>
+        </p:txBody>
+      </p:sp>
+      <p:sp>
+        <p:nvSpPr>
+          <p:cNvPr id="27" name="scope-conclusion">
+            <a:extLst xmlns:a="http://schemas.openxmlformats.org/drawingml/2006/main">
+              <a:ext uri="{FF2B5EF4-FFF2-40B4-BE49-F238E27FC236}">
+                <a16:creationId xmlns:a16="http://schemas.microsoft.com/office/drawing/2014/main" id="{FD7DEF1C-8696-4745-9C58-D81EF4D46D65}"/>
+              </a:ext>
+            </a:extLst>
+          </p:cNvPr>
+          <p:cNvSpPr>
+            <a:spLocks xmlns:a="http://schemas.openxmlformats.org/drawingml/2006/main" noGrp="1"/>
+          </p:cNvSpPr>
+          <p:nvPr/>
+        </p:nvSpPr>
+        <p:spPr>
+          <a:xfrm xmlns:a="http://schemas.openxmlformats.org/drawingml/2006/main">
+            <a:off x="514350" y="5772150"/>
+            <a:ext cx="11163300" cy="400050"/>
+          </a:xfrm>
+          <a:prstGeom xmlns:a="http://schemas.openxmlformats.org/drawingml/2006/main" prst="roundRect">
+            <a:avLst>
+              <a:gd name="adj" fmla="val 19048"/>
+            </a:avLst>
+          </a:prstGeom>
+          <a:solidFill xmlns:a="http://schemas.openxmlformats.org/drawingml/2006/main">
+            <a:srgbClr val="12263A"/>
+          </a:solidFill>
+          <a:ln xmlns:a="http://schemas.openxmlformats.org/drawingml/2006/main" w="9525">
+            <a:solidFill>
+              <a:srgbClr val="12263A"/>
+            </a:solidFill>
+            <a:prstDash val="solid"/>
+          </a:ln>
+        </p:spPr>
+      </p:sp>
+      <p:sp>
+        <p:nvSpPr>
+          <p:cNvPr id="28" name="auto-text-26">
+            <a:extLst xmlns:a="http://schemas.openxmlformats.org/drawingml/2006/main">
+              <a:ext uri="{FF2B5EF4-FFF2-40B4-BE49-F238E27FC236}">
+                <a16:creationId xmlns:a16="http://schemas.microsoft.com/office/drawing/2014/main" id="{266345E3-B253-4D35-AB5C-4BF3334A8F7C}"/>
+              </a:ext>
+            </a:extLst>
+          </p:cNvPr>
+          <p:cNvSpPr>
+            <a:spLocks xmlns:a="http://schemas.openxmlformats.org/drawingml/2006/main" noGrp="1"/>
+          </p:cNvSpPr>
+          <p:nvPr/>
+        </p:nvSpPr>
+        <p:spPr>
+          <a:xfrm xmlns:a="http://schemas.openxmlformats.org/drawingml/2006/main">
+            <a:off x="723900" y="5867400"/>
+            <a:ext cx="10744200" cy="228600"/>
+          </a:xfrm>
+          <a:prstGeom xmlns:a="http://schemas.openxmlformats.org/drawingml/2006/main" prst="rect">
+            <a:avLst/>
+          </a:prstGeom>
+          <a:noFill xmlns:a="http://schemas.openxmlformats.org/drawingml/2006/main"/>
+          <a:ln xmlns:a="http://schemas.openxmlformats.org/drawingml/2006/main" w="0">
+            <a:noFill/>
+            <a:prstDash val="solid"/>
+          </a:ln>
+        </p:spPr>
+        <p:txBody>
+          <a:bodyPr xmlns:a="http://schemas.openxmlformats.org/drawingml/2006/main" wrap="square" lIns="0" tIns="0" rIns="0" bIns="0" anchor="t">
+            <a:normAutofit fontScale="100000"/>
+          </a:bodyPr>
+          <a:lstStyle xmlns:a="http://schemas.openxmlformats.org/drawingml/2006/main"/>
+          <a:p xmlns:a="http://schemas.openxmlformats.org/drawingml/2006/main">
+            <a:pPr algn="ctr">
+              <a:defRPr sz="1425" b="1" i="0">
+                <a:solidFill>
+                  <a:srgbClr val="FFFFFF"/>
+                </a:solidFill>
+                <a:latin typeface="Microsoft YaHei"/>
+                <a:ea typeface="Microsoft YaHei"/>
+                <a:cs typeface="Microsoft YaHei"/>
+              </a:defRPr>
+            </a:pPr>
+            <a:r>
+              <a:rPr sz="1425" b="1" i="0">
+                <a:solidFill>
+                  <a:srgbClr val="FFFFFF"/>
+                </a:solidFill>
+                <a:latin typeface="Microsoft YaHei"/>
+                <a:ea typeface="Microsoft YaHei"/>
+                <a:cs typeface="Microsoft YaHei"/>
+              </a:rPr>
+              <a:t>VLM Judge是输入之一；项目核心增量是对多源评估结果进行校准、共识、仲裁与验证。</a:t>
+            </a:r>
+          </a:p>
+        </p:txBody>
+      </p:sp>
+      <p:sp>
+        <p:nvSpPr>
+          <p:cNvPr id="29" name="source-654-0.059264807216863113">
+            <a:extLst xmlns:a="http://schemas.openxmlformats.org/drawingml/2006/main">
+              <a:ext uri="{FF2B5EF4-FFF2-40B4-BE49-F238E27FC236}">
+                <a16:creationId xmlns:a16="http://schemas.microsoft.com/office/drawing/2014/main" id="{8AB48763-80FD-4A2D-A2AD-67B09A8B68FB}"/>
+              </a:ext>
+            </a:extLst>
+          </p:cNvPr>
+          <p:cNvSpPr>
+            <a:spLocks xmlns:a="http://schemas.openxmlformats.org/drawingml/2006/main" noGrp="1"/>
+          </p:cNvSpPr>
+          <p:nvPr/>
+        </p:nvSpPr>
+        <p:spPr>
+          <a:xfrm xmlns:a="http://schemas.openxmlformats.org/drawingml/2006/main">
+            <a:off x="476250" y="6229350"/>
             <a:ext cx="10763250" cy="209550"/>
           </a:xfrm>
           <a:prstGeom xmlns:a="http://schemas.openxmlformats.org/drawingml/2006/main" prst="rect">
@@ -7566,7 +9287,7 @@
                 <a:ea typeface="Cambria"/>
                 <a:cs typeface="Cambria"/>
               </a:rPr>
-              <a:t>数据与图源：Multimodal RewardBench 2（CVPR 2026）；Calibrating MLLM-as-a-Judge（ICCV 2025）</a:t>
+              <a:t>依据：项目SOW 1.1.2 开发内容、1.2.1 技术方法及技术交付目标</a:t>
             </a:r>
           </a:p>
         </p:txBody>
@@ -7574,7 +9295,7 @@
     </p:spTree>
     <p:extLst>
       <p:ext uri="{BB962C8B-B14F-4D97-AF65-F5344CB8AC3E}">
-        <p14:creationId xmlns:p14="http://schemas.microsoft.com/office/powerpoint/2010/main" val="1394194579"/>
+        <p14:creationId xmlns:p14="http://schemas.microsoft.com/office/powerpoint/2010/main" val="1964977541"/>
       </p:ext>
     </p:extLst>
   </p:cSld>
@@ -7605,7 +9326,7 @@
           <p:cNvPr id="22" name="accent-6">
             <a:extLst xmlns:a="http://schemas.openxmlformats.org/drawingml/2006/main">
               <a:ext uri="{FF2B5EF4-FFF2-40B4-BE49-F238E27FC236}">
-                <a16:creationId xmlns:a16="http://schemas.microsoft.com/office/drawing/2014/main" id="{909E4D01-ABD9-4B04-8397-EC7C09FEEF5C}"/>
+                <a16:creationId xmlns:a16="http://schemas.microsoft.com/office/drawing/2014/main" id="{341FF358-595C-4AF3-949E-3CB757F4B898}"/>
               </a:ext>
             </a:extLst>
           </p:cNvPr>
@@ -7640,7 +9361,7 @@
           <p:cNvPr id="2" name="title-6">
             <a:extLst xmlns:a="http://schemas.openxmlformats.org/drawingml/2006/main">
               <a:ext uri="{FF2B5EF4-FFF2-40B4-BE49-F238E27FC236}">
-                <a16:creationId xmlns:a16="http://schemas.microsoft.com/office/drawing/2014/main" id="{D6749101-A04D-4CC3-84F9-7BFF4CE7D370}"/>
+                <a16:creationId xmlns:a16="http://schemas.microsoft.com/office/drawing/2014/main" id="{3BC1205B-C14D-4526-B1F4-F66C066619FD}"/>
               </a:ext>
             </a:extLst>
           </p:cNvPr>
@@ -7698,7 +9419,7 @@
           <p:cNvPr id="3" name="page-6">
             <a:extLst xmlns:a="http://schemas.openxmlformats.org/drawingml/2006/main">
               <a:ext uri="{FF2B5EF4-FFF2-40B4-BE49-F238E27FC236}">
-                <a16:creationId xmlns:a16="http://schemas.microsoft.com/office/drawing/2014/main" id="{35778D7C-9000-4F51-A824-B7440AF3DEE9}"/>
+                <a16:creationId xmlns:a16="http://schemas.microsoft.com/office/drawing/2014/main" id="{79DD9253-AD45-483A-8D9D-450FEAE79C39}"/>
               </a:ext>
             </a:extLst>
           </p:cNvPr>
@@ -7753,10 +9474,10 @@
       </p:sp>
       <p:sp>
         <p:nvSpPr>
-          <p:cNvPr id="4" name="auto-text-33">
-            <a:extLst xmlns:a="http://schemas.openxmlformats.org/drawingml/2006/main">
-              <a:ext uri="{FF2B5EF4-FFF2-40B4-BE49-F238E27FC236}">
-                <a16:creationId xmlns:a16="http://schemas.microsoft.com/office/drawing/2014/main" id="{A4AE0745-C467-4D02-9FA2-8532AF9FF95B}"/>
+          <p:cNvPr id="4" name="auto-text-27">
+            <a:extLst xmlns:a="http://schemas.openxmlformats.org/drawingml/2006/main">
+              <a:ext uri="{FF2B5EF4-FFF2-40B4-BE49-F238E27FC236}">
+                <a16:creationId xmlns:a16="http://schemas.microsoft.com/office/drawing/2014/main" id="{94A79717-BDDD-464F-8F55-BD79DE0964C1}"/>
               </a:ext>
             </a:extLst>
           </p:cNvPr>
@@ -7814,7 +9535,7 @@
           <p:cNvPr id="5" name="input-node">
             <a:extLst xmlns:a="http://schemas.openxmlformats.org/drawingml/2006/main">
               <a:ext uri="{FF2B5EF4-FFF2-40B4-BE49-F238E27FC236}">
-                <a16:creationId xmlns:a16="http://schemas.microsoft.com/office/drawing/2014/main" id="{26864CB3-0A83-47C6-A691-4CC796607F86}"/>
+                <a16:creationId xmlns:a16="http://schemas.microsoft.com/office/drawing/2014/main" id="{6DFFA87D-3932-4ACF-9F59-6A63B3F4A8EA}"/>
               </a:ext>
             </a:extLst>
           </p:cNvPr>
@@ -7846,10 +9567,10 @@
       </p:sp>
       <p:sp>
         <p:nvSpPr>
-          <p:cNvPr id="6" name="auto-text-34">
-            <a:extLst xmlns:a="http://schemas.openxmlformats.org/drawingml/2006/main">
-              <a:ext uri="{FF2B5EF4-FFF2-40B4-BE49-F238E27FC236}">
-                <a16:creationId xmlns:a16="http://schemas.microsoft.com/office/drawing/2014/main" id="{6959B036-10B9-4D36-B8C5-8AAB97E1ECEE}"/>
+          <p:cNvPr id="6" name="auto-text-28">
+            <a:extLst xmlns:a="http://schemas.openxmlformats.org/drawingml/2006/main">
+              <a:ext uri="{FF2B5EF4-FFF2-40B4-BE49-F238E27FC236}">
+                <a16:creationId xmlns:a16="http://schemas.microsoft.com/office/drawing/2014/main" id="{3BD8D974-BC37-4BA2-8828-FCE49726AC11}"/>
               </a:ext>
             </a:extLst>
           </p:cNvPr>
@@ -7904,10 +9625,10 @@
       </p:sp>
       <p:sp>
         <p:nvSpPr>
-          <p:cNvPr id="7" name="auto-text-35">
-            <a:extLst xmlns:a="http://schemas.openxmlformats.org/drawingml/2006/main">
-              <a:ext uri="{FF2B5EF4-FFF2-40B4-BE49-F238E27FC236}">
-                <a16:creationId xmlns:a16="http://schemas.microsoft.com/office/drawing/2014/main" id="{1C041F79-C70F-433F-BC8F-D3AA709C1916}"/>
+          <p:cNvPr id="7" name="auto-text-29">
+            <a:extLst xmlns:a="http://schemas.openxmlformats.org/drawingml/2006/main">
+              <a:ext uri="{FF2B5EF4-FFF2-40B4-BE49-F238E27FC236}">
+                <a16:creationId xmlns:a16="http://schemas.microsoft.com/office/drawing/2014/main" id="{D9E610F2-5A51-41DB-A449-3E7240DEB6A0}"/>
               </a:ext>
             </a:extLst>
           </p:cNvPr>
@@ -8046,10 +9767,10 @@
       </p:sp>
       <p:sp>
         <p:nvSpPr>
-          <p:cNvPr id="8" name="auto-text-36">
-            <a:extLst xmlns:a="http://schemas.openxmlformats.org/drawingml/2006/main">
-              <a:ext uri="{FF2B5EF4-FFF2-40B4-BE49-F238E27FC236}">
-                <a16:creationId xmlns:a16="http://schemas.microsoft.com/office/drawing/2014/main" id="{029DFD7F-9525-4E2B-9D90-C99CB4E9A676}"/>
+          <p:cNvPr id="8" name="auto-text-30">
+            <a:extLst xmlns:a="http://schemas.openxmlformats.org/drawingml/2006/main">
+              <a:ext uri="{FF2B5EF4-FFF2-40B4-BE49-F238E27FC236}">
+                <a16:creationId xmlns:a16="http://schemas.microsoft.com/office/drawing/2014/main" id="{C88BF042-9FE8-4F61-B249-FB598954B697}"/>
               </a:ext>
             </a:extLst>
           </p:cNvPr>
@@ -8107,7 +9828,7 @@
           <p:cNvPr id="9" name="calibration-node">
             <a:extLst xmlns:a="http://schemas.openxmlformats.org/drawingml/2006/main">
               <a:ext uri="{FF2B5EF4-FFF2-40B4-BE49-F238E27FC236}">
-                <a16:creationId xmlns:a16="http://schemas.microsoft.com/office/drawing/2014/main" id="{701F1F2D-B42E-4DD3-904E-DD7BDFF5D50C}"/>
+                <a16:creationId xmlns:a16="http://schemas.microsoft.com/office/drawing/2014/main" id="{CB76C14B-A2C8-45F1-9EC6-37B3467D5E39}"/>
               </a:ext>
             </a:extLst>
           </p:cNvPr>
@@ -8139,10 +9860,10 @@
       </p:sp>
       <p:sp>
         <p:nvSpPr>
-          <p:cNvPr id="10" name="auto-text-37">
-            <a:extLst xmlns:a="http://schemas.openxmlformats.org/drawingml/2006/main">
-              <a:ext uri="{FF2B5EF4-FFF2-40B4-BE49-F238E27FC236}">
-                <a16:creationId xmlns:a16="http://schemas.microsoft.com/office/drawing/2014/main" id="{412BD883-FFFE-4B5A-B79F-A2303E6C3A89}"/>
+          <p:cNvPr id="10" name="auto-text-31">
+            <a:extLst xmlns:a="http://schemas.openxmlformats.org/drawingml/2006/main">
+              <a:ext uri="{FF2B5EF4-FFF2-40B4-BE49-F238E27FC236}">
+                <a16:creationId xmlns:a16="http://schemas.microsoft.com/office/drawing/2014/main" id="{45158B01-31E5-4370-BD0D-1488EE9F5BE3}"/>
               </a:ext>
             </a:extLst>
           </p:cNvPr>
@@ -8197,10 +9918,10 @@
       </p:sp>
       <p:sp>
         <p:nvSpPr>
-          <p:cNvPr id="11" name="auto-text-38">
-            <a:extLst xmlns:a="http://schemas.openxmlformats.org/drawingml/2006/main">
-              <a:ext uri="{FF2B5EF4-FFF2-40B4-BE49-F238E27FC236}">
-                <a16:creationId xmlns:a16="http://schemas.microsoft.com/office/drawing/2014/main" id="{44C239D0-9632-4718-A982-36FDD7521F67}"/>
+          <p:cNvPr id="11" name="auto-text-32">
+            <a:extLst xmlns:a="http://schemas.openxmlformats.org/drawingml/2006/main">
+              <a:ext uri="{FF2B5EF4-FFF2-40B4-BE49-F238E27FC236}">
+                <a16:creationId xmlns:a16="http://schemas.microsoft.com/office/drawing/2014/main" id="{C8E61F95-CEA5-458B-A1AD-64AAF4C8F751}"/>
               </a:ext>
             </a:extLst>
           </p:cNvPr>
@@ -8339,10 +10060,10 @@
       </p:sp>
       <p:sp>
         <p:nvSpPr>
-          <p:cNvPr id="12" name="auto-text-39">
-            <a:extLst xmlns:a="http://schemas.openxmlformats.org/drawingml/2006/main">
-              <a:ext uri="{FF2B5EF4-FFF2-40B4-BE49-F238E27FC236}">
-                <a16:creationId xmlns:a16="http://schemas.microsoft.com/office/drawing/2014/main" id="{4D4377D3-4E6A-40EA-BB31-CA62A0CA5585}"/>
+          <p:cNvPr id="12" name="auto-text-33">
+            <a:extLst xmlns:a="http://schemas.openxmlformats.org/drawingml/2006/main">
+              <a:ext uri="{FF2B5EF4-FFF2-40B4-BE49-F238E27FC236}">
+                <a16:creationId xmlns:a16="http://schemas.microsoft.com/office/drawing/2014/main" id="{5BDDD454-8414-47E0-981A-223219A34F4E}"/>
               </a:ext>
             </a:extLst>
           </p:cNvPr>
@@ -8400,7 +10121,7 @@
           <p:cNvPr id="13" name="output-node">
             <a:extLst xmlns:a="http://schemas.openxmlformats.org/drawingml/2006/main">
               <a:ext uri="{FF2B5EF4-FFF2-40B4-BE49-F238E27FC236}">
-                <a16:creationId xmlns:a16="http://schemas.microsoft.com/office/drawing/2014/main" id="{450AE108-F70F-4DB2-A090-5894346C7DB0}"/>
+                <a16:creationId xmlns:a16="http://schemas.microsoft.com/office/drawing/2014/main" id="{B8DA92E5-8621-42FC-926C-A64BFB9003E8}"/>
               </a:ext>
             </a:extLst>
           </p:cNvPr>
@@ -8432,10 +10153,10 @@
       </p:sp>
       <p:sp>
         <p:nvSpPr>
-          <p:cNvPr id="14" name="auto-text-40">
-            <a:extLst xmlns:a="http://schemas.openxmlformats.org/drawingml/2006/main">
-              <a:ext uri="{FF2B5EF4-FFF2-40B4-BE49-F238E27FC236}">
-                <a16:creationId xmlns:a16="http://schemas.microsoft.com/office/drawing/2014/main" id="{785F55D4-7FB3-4F86-868D-A0F2FCE97BDD}"/>
+          <p:cNvPr id="14" name="auto-text-34">
+            <a:extLst xmlns:a="http://schemas.openxmlformats.org/drawingml/2006/main">
+              <a:ext uri="{FF2B5EF4-FFF2-40B4-BE49-F238E27FC236}">
+                <a16:creationId xmlns:a16="http://schemas.microsoft.com/office/drawing/2014/main" id="{5D87EE9A-4695-44AB-BF8E-49D67364760B}"/>
               </a:ext>
             </a:extLst>
           </p:cNvPr>
@@ -8490,10 +10211,10 @@
       </p:sp>
       <p:sp>
         <p:nvSpPr>
-          <p:cNvPr id="15" name="auto-text-41">
-            <a:extLst xmlns:a="http://schemas.openxmlformats.org/drawingml/2006/main">
-              <a:ext uri="{FF2B5EF4-FFF2-40B4-BE49-F238E27FC236}">
-                <a16:creationId xmlns:a16="http://schemas.microsoft.com/office/drawing/2014/main" id="{427D202C-E90F-4B0B-872B-C30E907254B1}"/>
+          <p:cNvPr id="15" name="auto-text-35">
+            <a:extLst xmlns:a="http://schemas.openxmlformats.org/drawingml/2006/main">
+              <a:ext uri="{FF2B5EF4-FFF2-40B4-BE49-F238E27FC236}">
+                <a16:creationId xmlns:a16="http://schemas.microsoft.com/office/drawing/2014/main" id="{7935F32B-2342-415A-8B8E-A7B660BEEB53}"/>
               </a:ext>
             </a:extLst>
           </p:cNvPr>
@@ -8663,7 +10384,7 @@
           <p:cNvPr id="16" name="scenario-band">
             <a:extLst xmlns:a="http://schemas.openxmlformats.org/drawingml/2006/main">
               <a:ext uri="{FF2B5EF4-FFF2-40B4-BE49-F238E27FC236}">
-                <a16:creationId xmlns:a16="http://schemas.microsoft.com/office/drawing/2014/main" id="{DEA4D5B2-78D1-47A8-812F-6D162FED2FB7}"/>
+                <a16:creationId xmlns:a16="http://schemas.microsoft.com/office/drawing/2014/main" id="{293E335A-DA68-4ADD-B7A4-AADB844017A2}"/>
               </a:ext>
             </a:extLst>
           </p:cNvPr>
@@ -8695,10 +10416,10 @@
       </p:sp>
       <p:sp>
         <p:nvSpPr>
-          <p:cNvPr id="17" name="auto-text-42">
-            <a:extLst xmlns:a="http://schemas.openxmlformats.org/drawingml/2006/main">
-              <a:ext uri="{FF2B5EF4-FFF2-40B4-BE49-F238E27FC236}">
-                <a16:creationId xmlns:a16="http://schemas.microsoft.com/office/drawing/2014/main" id="{8B07032B-A038-4575-809B-D35E491A8A8B}"/>
+          <p:cNvPr id="17" name="auto-text-36">
+            <a:extLst xmlns:a="http://schemas.openxmlformats.org/drawingml/2006/main">
+              <a:ext uri="{FF2B5EF4-FFF2-40B4-BE49-F238E27FC236}">
+                <a16:creationId xmlns:a16="http://schemas.microsoft.com/office/drawing/2014/main" id="{51B727C1-3E7B-4383-9F29-7C3D5487D8A0}"/>
               </a:ext>
             </a:extLst>
           </p:cNvPr>
@@ -8756,7 +10477,7 @@
           <p:cNvPr id="18" name="current-pipeline-frame">
             <a:extLst xmlns:a="http://schemas.openxmlformats.org/drawingml/2006/main">
               <a:ext uri="{FF2B5EF4-FFF2-40B4-BE49-F238E27FC236}">
-                <a16:creationId xmlns:a16="http://schemas.microsoft.com/office/drawing/2014/main" id="{AC72DA3E-2C45-4F83-9192-9D8AA8FC35E2}"/>
+                <a16:creationId xmlns:a16="http://schemas.microsoft.com/office/drawing/2014/main" id="{8FAB0A9B-99C8-44DD-ABBB-23BA03F58F17}"/>
               </a:ext>
             </a:extLst>
           </p:cNvPr>
@@ -8791,7 +10512,7 @@
           <p:cNvPr id="19" name="current-pipeline-label">
             <a:extLst xmlns:a="http://schemas.openxmlformats.org/drawingml/2006/main">
               <a:ext uri="{FF2B5EF4-FFF2-40B4-BE49-F238E27FC236}">
-                <a16:creationId xmlns:a16="http://schemas.microsoft.com/office/drawing/2014/main" id="{8A836FAC-A0F0-40E9-B367-298947DD4220}"/>
+                <a16:creationId xmlns:a16="http://schemas.microsoft.com/office/drawing/2014/main" id="{141F58B7-2286-440E-A037-B0ECDE0D5C30}"/>
               </a:ext>
             </a:extLst>
           </p:cNvPr>
@@ -8849,7 +10570,7 @@
           <p:cNvPr id="20" name="current-pipeline-sub">
             <a:extLst xmlns:a="http://schemas.openxmlformats.org/drawingml/2006/main">
               <a:ext uri="{FF2B5EF4-FFF2-40B4-BE49-F238E27FC236}">
-                <a16:creationId xmlns:a16="http://schemas.microsoft.com/office/drawing/2014/main" id="{C6DE9030-DA76-4B5A-AF27-E72065C33700}"/>
+                <a16:creationId xmlns:a16="http://schemas.microsoft.com/office/drawing/2014/main" id="{68840E42-63B1-4371-83FB-07A23B072F0A}"/>
               </a:ext>
             </a:extLst>
           </p:cNvPr>
@@ -8904,10 +10625,10 @@
       </p:sp>
       <p:sp>
         <p:nvSpPr>
-          <p:cNvPr id="21" name="auto-text-43">
-            <a:extLst xmlns:a="http://schemas.openxmlformats.org/drawingml/2006/main">
-              <a:ext uri="{FF2B5EF4-FFF2-40B4-BE49-F238E27FC236}">
-                <a16:creationId xmlns:a16="http://schemas.microsoft.com/office/drawing/2014/main" id="{ED56648D-FF3B-4036-A8E3-803CA5E24F3A}"/>
+          <p:cNvPr id="21" name="auto-text-37">
+            <a:extLst xmlns:a="http://schemas.openxmlformats.org/drawingml/2006/main">
+              <a:ext uri="{FF2B5EF4-FFF2-40B4-BE49-F238E27FC236}">
+                <a16:creationId xmlns:a16="http://schemas.microsoft.com/office/drawing/2014/main" id="{DCB8D66E-C2BA-4E52-96C3-9AB13A318EA8}"/>
               </a:ext>
             </a:extLst>
           </p:cNvPr>
@@ -8963,7 +10684,7 @@
     </p:spTree>
     <p:extLst>
       <p:ext uri="{BB962C8B-B14F-4D97-AF65-F5344CB8AC3E}">
-        <p14:creationId xmlns:p14="http://schemas.microsoft.com/office/powerpoint/2010/main" val="1530288938"/>
+        <p14:creationId xmlns:p14="http://schemas.microsoft.com/office/powerpoint/2010/main" val="1709826605"/>
       </p:ext>
     </p:extLst>
   </p:cSld>
@@ -8994,7 +10715,7 @@
           <p:cNvPr id="33" name="accent-7">
             <a:extLst xmlns:a="http://schemas.openxmlformats.org/drawingml/2006/main">
               <a:ext uri="{FF2B5EF4-FFF2-40B4-BE49-F238E27FC236}">
-                <a16:creationId xmlns:a16="http://schemas.microsoft.com/office/drawing/2014/main" id="{370DD843-DED4-4341-A359-5ED3095D10B3}"/>
+                <a16:creationId xmlns:a16="http://schemas.microsoft.com/office/drawing/2014/main" id="{0C298FF0-E123-4239-A4D1-49E2AB29AEB0}"/>
               </a:ext>
             </a:extLst>
           </p:cNvPr>
@@ -9029,7 +10750,7 @@
           <p:cNvPr id="2" name="title-7">
             <a:extLst xmlns:a="http://schemas.openxmlformats.org/drawingml/2006/main">
               <a:ext uri="{FF2B5EF4-FFF2-40B4-BE49-F238E27FC236}">
-                <a16:creationId xmlns:a16="http://schemas.microsoft.com/office/drawing/2014/main" id="{EE03C538-9C74-4CA0-9ACA-5C68F9729763}"/>
+                <a16:creationId xmlns:a16="http://schemas.microsoft.com/office/drawing/2014/main" id="{932F2301-6155-4D3E-8F85-69D9F854033C}"/>
               </a:ext>
             </a:extLst>
           </p:cNvPr>
@@ -9087,7 +10808,7 @@
           <p:cNvPr id="3" name="page-7">
             <a:extLst xmlns:a="http://schemas.openxmlformats.org/drawingml/2006/main">
               <a:ext uri="{FF2B5EF4-FFF2-40B4-BE49-F238E27FC236}">
-                <a16:creationId xmlns:a16="http://schemas.microsoft.com/office/drawing/2014/main" id="{2404C339-3546-4A76-B73B-FF84BE61F739}"/>
+                <a16:creationId xmlns:a16="http://schemas.microsoft.com/office/drawing/2014/main" id="{5D10A000-A4D8-4FEA-AE74-63D4A5F6C351}"/>
               </a:ext>
             </a:extLst>
           </p:cNvPr>
@@ -9142,10 +10863,10 @@
       </p:sp>
       <p:sp>
         <p:nvSpPr>
-          <p:cNvPr id="4" name="auto-text-44">
-            <a:extLst xmlns:a="http://schemas.openxmlformats.org/drawingml/2006/main">
-              <a:ext uri="{FF2B5EF4-FFF2-40B4-BE49-F238E27FC236}">
-                <a16:creationId xmlns:a16="http://schemas.microsoft.com/office/drawing/2014/main" id="{6F4B1A53-6661-41F9-952B-86066EB3EBB2}"/>
+          <p:cNvPr id="4" name="auto-text-38">
+            <a:extLst xmlns:a="http://schemas.openxmlformats.org/drawingml/2006/main">
+              <a:ext uri="{FF2B5EF4-FFF2-40B4-BE49-F238E27FC236}">
+                <a16:creationId xmlns:a16="http://schemas.microsoft.com/office/drawing/2014/main" id="{D87961CD-63A1-4885-B4C0-7377F4DCBA41}"/>
               </a:ext>
             </a:extLst>
           </p:cNvPr>
@@ -9203,7 +10924,7 @@
           <p:cNvPr id="5" name="value-0">
             <a:extLst xmlns:a="http://schemas.openxmlformats.org/drawingml/2006/main">
               <a:ext uri="{FF2B5EF4-FFF2-40B4-BE49-F238E27FC236}">
-                <a16:creationId xmlns:a16="http://schemas.microsoft.com/office/drawing/2014/main" id="{5A45D8BB-B101-4BB8-80B2-D743241498F4}"/>
+                <a16:creationId xmlns:a16="http://schemas.microsoft.com/office/drawing/2014/main" id="{468304E8-8787-4F4E-87BA-01131AE5E2A1}"/>
               </a:ext>
             </a:extLst>
           </p:cNvPr>
@@ -9238,7 +10959,7 @@
           <p:cNvPr id="6" name="value-title-0">
             <a:extLst xmlns:a="http://schemas.openxmlformats.org/drawingml/2006/main">
               <a:ext uri="{FF2B5EF4-FFF2-40B4-BE49-F238E27FC236}">
-                <a16:creationId xmlns:a16="http://schemas.microsoft.com/office/drawing/2014/main" id="{73CC0331-F9DE-41FA-9F86-9AF919AB7C0F}"/>
+                <a16:creationId xmlns:a16="http://schemas.microsoft.com/office/drawing/2014/main" id="{A2891542-0723-4263-B416-76D71A8D92FB}"/>
               </a:ext>
             </a:extLst>
           </p:cNvPr>
@@ -9296,7 +11017,7 @@
           <p:cNvPr id="7" name="value-body-0">
             <a:extLst xmlns:a="http://schemas.openxmlformats.org/drawingml/2006/main">
               <a:ext uri="{FF2B5EF4-FFF2-40B4-BE49-F238E27FC236}">
-                <a16:creationId xmlns:a16="http://schemas.microsoft.com/office/drawing/2014/main" id="{BE374A20-2D8C-4C81-89FE-588FFF6240D5}"/>
+                <a16:creationId xmlns:a16="http://schemas.microsoft.com/office/drawing/2014/main" id="{1A926F64-22B1-4F56-9D0D-394F466CFADB}"/>
               </a:ext>
             </a:extLst>
           </p:cNvPr>
@@ -9400,7 +11121,7 @@
           <p:cNvPr id="8" name="value-1">
             <a:extLst xmlns:a="http://schemas.openxmlformats.org/drawingml/2006/main">
               <a:ext uri="{FF2B5EF4-FFF2-40B4-BE49-F238E27FC236}">
-                <a16:creationId xmlns:a16="http://schemas.microsoft.com/office/drawing/2014/main" id="{D8C9B661-AD8D-48CB-9FB6-1EDB350FA798}"/>
+                <a16:creationId xmlns:a16="http://schemas.microsoft.com/office/drawing/2014/main" id="{17B0A95E-D646-4758-B4BA-8D626EEC4D65}"/>
               </a:ext>
             </a:extLst>
           </p:cNvPr>
@@ -9435,7 +11156,7 @@
           <p:cNvPr id="9" name="value-title-1">
             <a:extLst xmlns:a="http://schemas.openxmlformats.org/drawingml/2006/main">
               <a:ext uri="{FF2B5EF4-FFF2-40B4-BE49-F238E27FC236}">
-                <a16:creationId xmlns:a16="http://schemas.microsoft.com/office/drawing/2014/main" id="{402809ED-43F2-4E33-97A5-75924C352400}"/>
+                <a16:creationId xmlns:a16="http://schemas.microsoft.com/office/drawing/2014/main" id="{F93D6A48-EB3C-41C8-9769-A94E5B0E18D7}"/>
               </a:ext>
             </a:extLst>
           </p:cNvPr>
@@ -9493,7 +11214,7 @@
           <p:cNvPr id="10" name="value-body-1">
             <a:extLst xmlns:a="http://schemas.openxmlformats.org/drawingml/2006/main">
               <a:ext uri="{FF2B5EF4-FFF2-40B4-BE49-F238E27FC236}">
-                <a16:creationId xmlns:a16="http://schemas.microsoft.com/office/drawing/2014/main" id="{44FA4840-E6B6-4B48-99AC-B4F72B4F9058}"/>
+                <a16:creationId xmlns:a16="http://schemas.microsoft.com/office/drawing/2014/main" id="{19D15129-614B-47B3-84CB-D77D46F8D126}"/>
               </a:ext>
             </a:extLst>
           </p:cNvPr>
@@ -9597,7 +11318,7 @@
           <p:cNvPr id="11" name="value-2">
             <a:extLst xmlns:a="http://schemas.openxmlformats.org/drawingml/2006/main">
               <a:ext uri="{FF2B5EF4-FFF2-40B4-BE49-F238E27FC236}">
-                <a16:creationId xmlns:a16="http://schemas.microsoft.com/office/drawing/2014/main" id="{CCF1A12F-FC35-4FD3-851C-1EA57375BBC7}"/>
+                <a16:creationId xmlns:a16="http://schemas.microsoft.com/office/drawing/2014/main" id="{EA300516-3542-4E99-BE01-9E17C9816040}"/>
               </a:ext>
             </a:extLst>
           </p:cNvPr>
@@ -9632,7 +11353,7 @@
           <p:cNvPr id="12" name="value-title-2">
             <a:extLst xmlns:a="http://schemas.openxmlformats.org/drawingml/2006/main">
               <a:ext uri="{FF2B5EF4-FFF2-40B4-BE49-F238E27FC236}">
-                <a16:creationId xmlns:a16="http://schemas.microsoft.com/office/drawing/2014/main" id="{E4B085E3-4356-4C6C-8B63-F3343C883684}"/>
+                <a16:creationId xmlns:a16="http://schemas.microsoft.com/office/drawing/2014/main" id="{31C7CF46-CC8F-4FEB-9953-1EE437459FF5}"/>
               </a:ext>
             </a:extLst>
           </p:cNvPr>
@@ -9690,7 +11411,7 @@
           <p:cNvPr id="13" name="value-body-2">
             <a:extLst xmlns:a="http://schemas.openxmlformats.org/drawingml/2006/main">
               <a:ext uri="{FF2B5EF4-FFF2-40B4-BE49-F238E27FC236}">
-                <a16:creationId xmlns:a16="http://schemas.microsoft.com/office/drawing/2014/main" id="{E9BC181E-32F1-4243-934E-F0D57101606C}"/>
+                <a16:creationId xmlns:a16="http://schemas.microsoft.com/office/drawing/2014/main" id="{0F626BCF-4FEF-4D75-8572-F40F4C63139E}"/>
               </a:ext>
             </a:extLst>
           </p:cNvPr>
@@ -9791,10 +11512,10 @@
       </p:sp>
       <p:sp>
         <p:nvSpPr>
-          <p:cNvPr id="14" name="auto-text-45">
-            <a:extLst xmlns:a="http://schemas.openxmlformats.org/drawingml/2006/main">
-              <a:ext uri="{FF2B5EF4-FFF2-40B4-BE49-F238E27FC236}">
-                <a16:creationId xmlns:a16="http://schemas.microsoft.com/office/drawing/2014/main" id="{CE0C7D5B-093E-4DBA-B640-3CACE51301F2}"/>
+          <p:cNvPr id="14" name="auto-text-39">
+            <a:extLst xmlns:a="http://schemas.openxmlformats.org/drawingml/2006/main">
+              <a:ext uri="{FF2B5EF4-FFF2-40B4-BE49-F238E27FC236}">
+                <a16:creationId xmlns:a16="http://schemas.microsoft.com/office/drawing/2014/main" id="{ECB5D677-CDEA-42C6-8A9A-8EE54D724ADB}"/>
               </a:ext>
             </a:extLst>
           </p:cNvPr>
@@ -9852,7 +11573,7 @@
           <p:cNvPr id="15" name="metric-0">
             <a:extLst xmlns:a="http://schemas.openxmlformats.org/drawingml/2006/main">
               <a:ext uri="{FF2B5EF4-FFF2-40B4-BE49-F238E27FC236}">
-                <a16:creationId xmlns:a16="http://schemas.microsoft.com/office/drawing/2014/main" id="{6014A61A-B868-48D5-BE93-27C7553D2163}"/>
+                <a16:creationId xmlns:a16="http://schemas.microsoft.com/office/drawing/2014/main" id="{011FCC5E-D3F5-41D2-B28D-A6B51A386317}"/>
               </a:ext>
             </a:extLst>
           </p:cNvPr>
@@ -9887,7 +11608,7 @@
           <p:cNvPr id="16" name="metric-stat-0">
             <a:extLst xmlns:a="http://schemas.openxmlformats.org/drawingml/2006/main">
               <a:ext uri="{FF2B5EF4-FFF2-40B4-BE49-F238E27FC236}">
-                <a16:creationId xmlns:a16="http://schemas.microsoft.com/office/drawing/2014/main" id="{B1DAFDBD-4ADD-4910-B625-56E46A3BD9B1}"/>
+                <a16:creationId xmlns:a16="http://schemas.microsoft.com/office/drawing/2014/main" id="{3BDAC5D0-3D72-4A0E-A3A1-68E1EF951CA1}"/>
               </a:ext>
             </a:extLst>
           </p:cNvPr>
@@ -9945,7 +11666,7 @@
           <p:cNvPr id="17" name="metric-label-0">
             <a:extLst xmlns:a="http://schemas.openxmlformats.org/drawingml/2006/main">
               <a:ext uri="{FF2B5EF4-FFF2-40B4-BE49-F238E27FC236}">
-                <a16:creationId xmlns:a16="http://schemas.microsoft.com/office/drawing/2014/main" id="{74CE1E8B-1D33-46F1-AA05-33C071CA3947}"/>
+                <a16:creationId xmlns:a16="http://schemas.microsoft.com/office/drawing/2014/main" id="{4FF9565A-C9C1-4DF3-96A5-506FE0E4B1B9}"/>
               </a:ext>
             </a:extLst>
           </p:cNvPr>
@@ -10003,7 +11724,7 @@
           <p:cNvPr id="18" name="metric-1">
             <a:extLst xmlns:a="http://schemas.openxmlformats.org/drawingml/2006/main">
               <a:ext uri="{FF2B5EF4-FFF2-40B4-BE49-F238E27FC236}">
-                <a16:creationId xmlns:a16="http://schemas.microsoft.com/office/drawing/2014/main" id="{15527CF8-A213-40DC-9428-D674C5965BE5}"/>
+                <a16:creationId xmlns:a16="http://schemas.microsoft.com/office/drawing/2014/main" id="{2D3D7F0C-DA6C-4473-99C2-4322B851FE83}"/>
               </a:ext>
             </a:extLst>
           </p:cNvPr>
@@ -10038,7 +11759,7 @@
           <p:cNvPr id="19" name="metric-stat-1">
             <a:extLst xmlns:a="http://schemas.openxmlformats.org/drawingml/2006/main">
               <a:ext uri="{FF2B5EF4-FFF2-40B4-BE49-F238E27FC236}">
-                <a16:creationId xmlns:a16="http://schemas.microsoft.com/office/drawing/2014/main" id="{065EB09A-EA82-47CC-AE83-86569376F342}"/>
+                <a16:creationId xmlns:a16="http://schemas.microsoft.com/office/drawing/2014/main" id="{90BB03F3-7FA1-4504-BAF2-7FC6FF03307A}"/>
               </a:ext>
             </a:extLst>
           </p:cNvPr>
@@ -10096,7 +11817,7 @@
           <p:cNvPr id="20" name="metric-label-1">
             <a:extLst xmlns:a="http://schemas.openxmlformats.org/drawingml/2006/main">
               <a:ext uri="{FF2B5EF4-FFF2-40B4-BE49-F238E27FC236}">
-                <a16:creationId xmlns:a16="http://schemas.microsoft.com/office/drawing/2014/main" id="{D388FE81-92C2-41B5-91F3-9D6D782B9EE1}"/>
+                <a16:creationId xmlns:a16="http://schemas.microsoft.com/office/drawing/2014/main" id="{28D9ABDD-589B-4BC9-88AD-6AD34FD59B62}"/>
               </a:ext>
             </a:extLst>
           </p:cNvPr>
@@ -10154,7 +11875,7 @@
           <p:cNvPr id="21" name="metric-2">
             <a:extLst xmlns:a="http://schemas.openxmlformats.org/drawingml/2006/main">
               <a:ext uri="{FF2B5EF4-FFF2-40B4-BE49-F238E27FC236}">
-                <a16:creationId xmlns:a16="http://schemas.microsoft.com/office/drawing/2014/main" id="{402B7488-D890-466B-B9DD-EA0B0D6F6E8E}"/>
+                <a16:creationId xmlns:a16="http://schemas.microsoft.com/office/drawing/2014/main" id="{91F6E740-68EB-463D-B64D-B73A0CAA2542}"/>
               </a:ext>
             </a:extLst>
           </p:cNvPr>
@@ -10189,7 +11910,7 @@
           <p:cNvPr id="22" name="metric-stat-2">
             <a:extLst xmlns:a="http://schemas.openxmlformats.org/drawingml/2006/main">
               <a:ext uri="{FF2B5EF4-FFF2-40B4-BE49-F238E27FC236}">
-                <a16:creationId xmlns:a16="http://schemas.microsoft.com/office/drawing/2014/main" id="{2016E897-B4B6-4517-868B-D82F8E818508}"/>
+                <a16:creationId xmlns:a16="http://schemas.microsoft.com/office/drawing/2014/main" id="{5801B90F-4B82-4EB6-B775-0B4CE5E40DA5}"/>
               </a:ext>
             </a:extLst>
           </p:cNvPr>
@@ -10247,7 +11968,7 @@
           <p:cNvPr id="23" name="metric-label-2">
             <a:extLst xmlns:a="http://schemas.openxmlformats.org/drawingml/2006/main">
               <a:ext uri="{FF2B5EF4-FFF2-40B4-BE49-F238E27FC236}">
-                <a16:creationId xmlns:a16="http://schemas.microsoft.com/office/drawing/2014/main" id="{E5E083F4-1643-4F24-94E0-64B23805668D}"/>
+                <a16:creationId xmlns:a16="http://schemas.microsoft.com/office/drawing/2014/main" id="{5DF058CB-D03D-4203-B693-599021229195}"/>
               </a:ext>
             </a:extLst>
           </p:cNvPr>
@@ -10305,7 +12026,7 @@
           <p:cNvPr id="24" name="metric-3">
             <a:extLst xmlns:a="http://schemas.openxmlformats.org/drawingml/2006/main">
               <a:ext uri="{FF2B5EF4-FFF2-40B4-BE49-F238E27FC236}">
-                <a16:creationId xmlns:a16="http://schemas.microsoft.com/office/drawing/2014/main" id="{EAB2C6D7-C743-49DE-8D2B-72FED6A320B0}"/>
+                <a16:creationId xmlns:a16="http://schemas.microsoft.com/office/drawing/2014/main" id="{F07710B0-5559-4B2F-8E64-854BF6F2CCEE}"/>
               </a:ext>
             </a:extLst>
           </p:cNvPr>
@@ -10340,7 +12061,7 @@
           <p:cNvPr id="25" name="metric-stat-3">
             <a:extLst xmlns:a="http://schemas.openxmlformats.org/drawingml/2006/main">
               <a:ext uri="{FF2B5EF4-FFF2-40B4-BE49-F238E27FC236}">
-                <a16:creationId xmlns:a16="http://schemas.microsoft.com/office/drawing/2014/main" id="{19299C51-7D82-4F79-B9EB-EFF8194885FE}"/>
+                <a16:creationId xmlns:a16="http://schemas.microsoft.com/office/drawing/2014/main" id="{3F65044D-C906-477A-BEAC-E167B8497332}"/>
               </a:ext>
             </a:extLst>
           </p:cNvPr>
@@ -10398,7 +12119,7 @@
           <p:cNvPr id="26" name="metric-label-3">
             <a:extLst xmlns:a="http://schemas.openxmlformats.org/drawingml/2006/main">
               <a:ext uri="{FF2B5EF4-FFF2-40B4-BE49-F238E27FC236}">
-                <a16:creationId xmlns:a16="http://schemas.microsoft.com/office/drawing/2014/main" id="{B5470FA0-6398-4376-AD15-F8145E26990A}"/>
+                <a16:creationId xmlns:a16="http://schemas.microsoft.com/office/drawing/2014/main" id="{91F99807-18FF-4A7D-9CDF-09904AD1E540}"/>
               </a:ext>
             </a:extLst>
           </p:cNvPr>
@@ -10456,7 +12177,7 @@
           <p:cNvPr id="27" name="metric-4">
             <a:extLst xmlns:a="http://schemas.openxmlformats.org/drawingml/2006/main">
               <a:ext uri="{FF2B5EF4-FFF2-40B4-BE49-F238E27FC236}">
-                <a16:creationId xmlns:a16="http://schemas.microsoft.com/office/drawing/2014/main" id="{0F365740-83C1-4F50-A176-C8D0C21AB333}"/>
+                <a16:creationId xmlns:a16="http://schemas.microsoft.com/office/drawing/2014/main" id="{E9AB92B2-3566-47E6-A9EF-F7F6B4106C68}"/>
               </a:ext>
             </a:extLst>
           </p:cNvPr>
@@ -10491,7 +12212,7 @@
           <p:cNvPr id="28" name="metric-stat-4">
             <a:extLst xmlns:a="http://schemas.openxmlformats.org/drawingml/2006/main">
               <a:ext uri="{FF2B5EF4-FFF2-40B4-BE49-F238E27FC236}">
-                <a16:creationId xmlns:a16="http://schemas.microsoft.com/office/drawing/2014/main" id="{5C68CC8A-32C6-4D40-842E-EB4DCD61C79E}"/>
+                <a16:creationId xmlns:a16="http://schemas.microsoft.com/office/drawing/2014/main" id="{8A0435B6-C4D2-45EA-861F-86ED651EFF20}"/>
               </a:ext>
             </a:extLst>
           </p:cNvPr>
@@ -10549,7 +12270,7 @@
           <p:cNvPr id="29" name="metric-label-4">
             <a:extLst xmlns:a="http://schemas.openxmlformats.org/drawingml/2006/main">
               <a:ext uri="{FF2B5EF4-FFF2-40B4-BE49-F238E27FC236}">
-                <a16:creationId xmlns:a16="http://schemas.microsoft.com/office/drawing/2014/main" id="{015AECFD-1D85-4877-847E-19122FC10426}"/>
+                <a16:creationId xmlns:a16="http://schemas.microsoft.com/office/drawing/2014/main" id="{885AE5F7-1E79-467D-8C98-740E5359D81B}"/>
               </a:ext>
             </a:extLst>
           </p:cNvPr>
@@ -10604,10 +12325,10 @@
       </p:sp>
       <p:sp>
         <p:nvSpPr>
-          <p:cNvPr id="30" name="auto-text-46">
-            <a:extLst xmlns:a="http://schemas.openxmlformats.org/drawingml/2006/main">
-              <a:ext uri="{FF2B5EF4-FFF2-40B4-BE49-F238E27FC236}">
-                <a16:creationId xmlns:a16="http://schemas.microsoft.com/office/drawing/2014/main" id="{03198D85-53B3-4AFC-8878-2EAE6865408F}"/>
+          <p:cNvPr id="30" name="auto-text-40">
+            <a:extLst xmlns:a="http://schemas.openxmlformats.org/drawingml/2006/main">
+              <a:ext uri="{FF2B5EF4-FFF2-40B4-BE49-F238E27FC236}">
+                <a16:creationId xmlns:a16="http://schemas.microsoft.com/office/drawing/2014/main" id="{5C35EC40-CA9B-4A93-A227-0B52A41CA3BF}"/>
               </a:ext>
             </a:extLst>
           </p:cNvPr>
@@ -10665,7 +12386,7 @@
           <p:cNvPr id="31" name="approval-band">
             <a:extLst xmlns:a="http://schemas.openxmlformats.org/drawingml/2006/main">
               <a:ext uri="{FF2B5EF4-FFF2-40B4-BE49-F238E27FC236}">
-                <a16:creationId xmlns:a16="http://schemas.microsoft.com/office/drawing/2014/main" id="{A1E7BC61-408D-4D58-8FB5-C7DF8A8FD54A}"/>
+                <a16:creationId xmlns:a16="http://schemas.microsoft.com/office/drawing/2014/main" id="{5CD62670-376D-4080-84FA-EBF8149B573C}"/>
               </a:ext>
             </a:extLst>
           </p:cNvPr>
@@ -10697,10 +12418,10 @@
       </p:sp>
       <p:sp>
         <p:nvSpPr>
-          <p:cNvPr id="32" name="auto-text-47">
-            <a:extLst xmlns:a="http://schemas.openxmlformats.org/drawingml/2006/main">
-              <a:ext uri="{FF2B5EF4-FFF2-40B4-BE49-F238E27FC236}">
-                <a16:creationId xmlns:a16="http://schemas.microsoft.com/office/drawing/2014/main" id="{CE5E424F-CCBB-4374-8B34-CBCE38E220FD}"/>
+          <p:cNvPr id="32" name="auto-text-41">
+            <a:extLst xmlns:a="http://schemas.openxmlformats.org/drawingml/2006/main">
+              <a:ext uri="{FF2B5EF4-FFF2-40B4-BE49-F238E27FC236}">
+                <a16:creationId xmlns:a16="http://schemas.microsoft.com/office/drawing/2014/main" id="{9F041957-A538-414F-AF40-9348E0A129B0}"/>
               </a:ext>
             </a:extLst>
           </p:cNvPr>
@@ -10756,7 +12477,7 @@
     </p:spTree>
     <p:extLst>
       <p:ext uri="{BB962C8B-B14F-4D97-AF65-F5344CB8AC3E}">
-        <p14:creationId xmlns:p14="http://schemas.microsoft.com/office/powerpoint/2010/main" val="1598991922"/>
+        <p14:creationId xmlns:p14="http://schemas.microsoft.com/office/powerpoint/2010/main" val="135676628"/>
       </p:ext>
     </p:extLst>
   </p:cSld>

--- a/场景与价值_汇报模块.pptx
+++ b/场景与价值_汇报模块.pptx
@@ -2,19 +2,18 @@
 <file path=ppt/presentation.xml><?xml version="1.0" encoding="utf-8"?>
 <p:presentation xmlns:p="http://schemas.openxmlformats.org/presentationml/2006/main">
   <p:sldMasterIdLst>
-    <p:sldMasterId xmlns:r="http://schemas.openxmlformats.org/officeDocument/2006/relationships" id="2147483648" r:id="Rca4bbb6d3b0d4d13"/>
+    <p:sldMasterId xmlns:r="http://schemas.openxmlformats.org/officeDocument/2006/relationships" id="2147483648" r:id="Rccf27042b25e47c4"/>
   </p:sldMasterIdLst>
   <p:notesMasterIdLst>
-    <p:notesMasterId xmlns:r="http://schemas.openxmlformats.org/officeDocument/2006/relationships" r:id="R9f5ef66de9614c6e"/>
+    <p:notesMasterId xmlns:r="http://schemas.openxmlformats.org/officeDocument/2006/relationships" r:id="R299f2143f24f43b8"/>
   </p:notesMasterIdLst>
   <p:sldIdLst>
-    <p:sldId xmlns:r="http://schemas.openxmlformats.org/officeDocument/2006/relationships" id="256" r:id="R7ed6104f1d0246fc"/>
-    <p:sldId xmlns:r="http://schemas.openxmlformats.org/officeDocument/2006/relationships" id="257" r:id="R98e6e42e78c44054"/>
-    <p:sldId xmlns:r="http://schemas.openxmlformats.org/officeDocument/2006/relationships" id="258" r:id="R13ac2705235d4e89"/>
-    <p:sldId xmlns:r="http://schemas.openxmlformats.org/officeDocument/2006/relationships" id="259" r:id="R025a00fe80e94e3b"/>
-    <p:sldId xmlns:r="http://schemas.openxmlformats.org/officeDocument/2006/relationships" id="260" r:id="R5789e67e7b66450d"/>
-    <p:sldId xmlns:r="http://schemas.openxmlformats.org/officeDocument/2006/relationships" id="261" r:id="Rff49a18b0a1a47da"/>
-    <p:sldId xmlns:r="http://schemas.openxmlformats.org/officeDocument/2006/relationships" id="262" r:id="R38965814f7024885"/>
+    <p:sldId xmlns:r="http://schemas.openxmlformats.org/officeDocument/2006/relationships" id="256" r:id="Reb0abeb50e304c61"/>
+    <p:sldId xmlns:r="http://schemas.openxmlformats.org/officeDocument/2006/relationships" id="257" r:id="R779a6349da104ab1"/>
+    <p:sldId xmlns:r="http://schemas.openxmlformats.org/officeDocument/2006/relationships" id="258" r:id="Rdc360bd035b7454e"/>
+    <p:sldId xmlns:r="http://schemas.openxmlformats.org/officeDocument/2006/relationships" id="259" r:id="R3584485b06fb4004"/>
+    <p:sldId xmlns:r="http://schemas.openxmlformats.org/officeDocument/2006/relationships" id="260" r:id="R79a3844969be4422"/>
+    <p:sldId xmlns:r="http://schemas.openxmlformats.org/officeDocument/2006/relationships" id="261" r:id="Rd655a0da8a484321"/>
   </p:sldIdLst>
   <p:sldSz cx="12192000" cy="6858000"/>
   <p:notesSz cx="6858000" cy="9144000"/>
@@ -793,7 +792,7 @@
           <a:lstStyle xmlns:a="http://schemas.openxmlformats.org/drawingml/2006/main"/>
           <a:p xmlns:a="http://schemas.openxmlformats.org/drawingml/2006/main">
             <a:r>
-              <a:t>这页需要明确纠正一个可能的误解：高校不是来交付一个VLM Judge。VLM、CLIP、OCR、视觉定位、传统指标和人工反馈都可以成为底层输入。合作项目真正交付的是三层上层算法：第一层把业务偏好转换成可优化的评分标准并做后验校准；第二层通过相邻配置和共识处理单一Prompt的不稳定；第三层用专用工具核验证据，并通过下游实验验证筛选是否有效。因此项目价值在于形成可迁移的评估机制，而不是绑定某个模型。</a:t>
+              <a:t>这页合并说明项目路线和预期能力。左侧输入业务任务、少量专家样本以及VLM、CLIP、OCR、规则等已有评估结果；中间通过任务偏好与后验校准、邻域共识与分歧选择、图文证据核验与闭环验证三类算法进行处理；右侧形成可落地的质量分数、筛选结论、证据、置信度、复核建议和接口脚本。项目不是研发单一VLM Judge，也不重建生产平台，而是在现有能力上增加可插拔的任务自适应层。</a:t>
             </a:r>
           </a:p>
         </p:txBody>
@@ -824,76 +823,6 @@
 </file>
 
 <file path=ppt/notesSlides/notesSlide6.xml><?xml version="1.0" encoding="utf-8"?>
-<p:notes xmlns:p="http://schemas.openxmlformats.org/presentationml/2006/main">
-  <p:cSld>
-    <p:spTree>
-      <p:nvGrpSpPr>
-        <p:cNvPr id="1" name=""/>
-        <p:cNvGrpSpPr/>
-        <p:nvPr/>
-      </p:nvGrpSpPr>
-      <p:grpSpPr>
-        <a:xfrm xmlns:a="http://schemas.openxmlformats.org/drawingml/2006/main"/>
-      </p:grpSpPr>
-      <p:sp>
-        <p:nvSpPr>
-          <p:cNvPr id="2" name="Slide Image Placeholder 1"/>
-          <p:cNvSpPr>
-            <a:spLocks xmlns:a="http://schemas.openxmlformats.org/drawingml/2006/main" noGrp="1"/>
-          </p:cNvSpPr>
-          <p:nvPr>
-            <p:ph type="sldImg" idx="0"/>
-          </p:nvPr>
-        </p:nvSpPr>
-        <p:spPr/>
-      </p:sp>
-      <p:sp>
-        <p:nvSpPr>
-          <p:cNvPr id="3" name="Notes Placeholder 2"/>
-          <p:cNvSpPr>
-            <a:spLocks xmlns:a="http://schemas.openxmlformats.org/drawingml/2006/main" noGrp="1"/>
-          </p:cNvSpPr>
-          <p:nvPr>
-            <p:ph type="body" idx="1"/>
-          </p:nvPr>
-        </p:nvSpPr>
-        <p:spPr/>
-        <p:txBody>
-          <a:bodyPr xmlns:a="http://schemas.openxmlformats.org/drawingml/2006/main"/>
-          <a:lstStyle xmlns:a="http://schemas.openxmlformats.org/drawingml/2006/main"/>
-          <a:p xmlns:a="http://schemas.openxmlformats.org/drawingml/2006/main">
-            <a:r>
-              <a:t>项目不是再建设一套数据平台，而是在现有规则、Prompt和VLM之上增加一层可插拔的任务自适应能力。输入新任务描述、少量专家样本和已有评估结果，输出经过校准的分数、证据、置信度和人工复核建议。建议首批优先用多图编辑和AIGC图库做闭环验证。</a:t>
-            </a:r>
-          </a:p>
-        </p:txBody>
-      </p:sp>
-      <p:sp>
-        <p:nvSpPr>
-          <p:cNvPr id="4" name="Slide Number Placeholder 3"/>
-          <p:cNvSpPr>
-            <a:spLocks xmlns:a="http://schemas.openxmlformats.org/drawingml/2006/main" noGrp="1"/>
-          </p:cNvSpPr>
-          <p:nvPr>
-            <p:ph type="sldNum" idx="5"/>
-          </p:nvPr>
-        </p:nvSpPr>
-        <p:spPr/>
-        <p:txBody>
-          <a:bodyPr xmlns:a="http://schemas.openxmlformats.org/drawingml/2006/main"/>
-          <a:lstStyle xmlns:a="http://schemas.openxmlformats.org/drawingml/2006/main"/>
-          <a:p xmlns:a="http://schemas.openxmlformats.org/drawingml/2006/main"/>
-        </p:txBody>
-      </p:sp>
-    </p:spTree>
-  </p:cSld>
-  <p:clrMapOvr>
-    <a:masterClrMapping xmlns:a="http://schemas.openxmlformats.org/drawingml/2006/main"/>
-  </p:clrMapOvr>
-</p:notes>
-</file>
-
-<file path=ppt/notesSlides/notesSlide7.xml><?xml version="1.0" encoding="utf-8"?>
 <p:notes xmlns:p="http://schemas.openxmlformats.org/presentationml/2006/main">
   <p:cSld>
     <p:spTree>
@@ -1001,7 +930,7 @@
   </p:cSld>
   <p:clrMap bg1="lt1" tx1="dk1" bg2="lt2" tx2="dk2" accent1="accent1" accent2="accent2" accent3="accent3" accent4="accent4" accent5="accent5" accent6="accent6" hlink="hlink" folHlink="folHlink"/>
   <p:sldLayoutIdLst>
-    <p:sldLayoutId xmlns:r="http://schemas.openxmlformats.org/officeDocument/2006/relationships" id="2147483649" r:id="R1f9dc170802d4c87"/>
+    <p:sldLayoutId xmlns:r="http://schemas.openxmlformats.org/officeDocument/2006/relationships" id="2147483649" r:id="R421688a0ed194fca"/>
   </p:sldLayoutIdLst>
   <p:txStyles>
     <p:titleStyle>
@@ -1552,7 +1481,7 @@
           <p:cNvPr id="31" name="accent-1">
             <a:extLst xmlns:a="http://schemas.openxmlformats.org/drawingml/2006/main">
               <a:ext uri="{FF2B5EF4-FFF2-40B4-BE49-F238E27FC236}">
-                <a16:creationId xmlns:a16="http://schemas.microsoft.com/office/drawing/2014/main" id="{72E3BF9C-0602-4691-8FD2-182368DDA024}"/>
+                <a16:creationId xmlns:a16="http://schemas.microsoft.com/office/drawing/2014/main" id="{4F839A93-E68E-407B-882C-F6288376DD5B}"/>
               </a:ext>
             </a:extLst>
           </p:cNvPr>
@@ -1587,7 +1516,7 @@
           <p:cNvPr id="2" name="title-1">
             <a:extLst xmlns:a="http://schemas.openxmlformats.org/drawingml/2006/main">
               <a:ext uri="{FF2B5EF4-FFF2-40B4-BE49-F238E27FC236}">
-                <a16:creationId xmlns:a16="http://schemas.microsoft.com/office/drawing/2014/main" id="{5F9E27E2-3EF1-4D08-8F61-FF63E9751DC8}"/>
+                <a16:creationId xmlns:a16="http://schemas.microsoft.com/office/drawing/2014/main" id="{9A82889D-7323-4EF0-B077-666F2A25A330}"/>
               </a:ext>
             </a:extLst>
           </p:cNvPr>
@@ -1645,7 +1574,7 @@
           <p:cNvPr id="3" name="page-1">
             <a:extLst xmlns:a="http://schemas.openxmlformats.org/drawingml/2006/main">
               <a:ext uri="{FF2B5EF4-FFF2-40B4-BE49-F238E27FC236}">
-                <a16:creationId xmlns:a16="http://schemas.microsoft.com/office/drawing/2014/main" id="{27D091C1-C150-495C-97A5-0C92804B9E8A}"/>
+                <a16:creationId xmlns:a16="http://schemas.microsoft.com/office/drawing/2014/main" id="{38A67260-7339-457A-8217-980A83830EEC}"/>
               </a:ext>
             </a:extLst>
           </p:cNvPr>
@@ -1703,7 +1632,7 @@
           <p:cNvPr id="4" name="auto-text-1">
             <a:extLst xmlns:a="http://schemas.openxmlformats.org/drawingml/2006/main">
               <a:ext uri="{FF2B5EF4-FFF2-40B4-BE49-F238E27FC236}">
-                <a16:creationId xmlns:a16="http://schemas.microsoft.com/office/drawing/2014/main" id="{1568F0E7-39D5-4C1F-9DC5-7C2858D158F0}"/>
+                <a16:creationId xmlns:a16="http://schemas.microsoft.com/office/drawing/2014/main" id="{F285F07C-86A9-44CE-94A0-18E8C755BA80}"/>
               </a:ext>
             </a:extLst>
           </p:cNvPr>
@@ -1761,7 +1690,7 @@
           <p:cNvPr id="5" name="auto-text-2">
             <a:extLst xmlns:a="http://schemas.openxmlformats.org/drawingml/2006/main">
               <a:ext uri="{FF2B5EF4-FFF2-40B4-BE49-F238E27FC236}">
-                <a16:creationId xmlns:a16="http://schemas.microsoft.com/office/drawing/2014/main" id="{5FF97A5E-FB93-4C3D-BDF3-E17840E62594}"/>
+                <a16:creationId xmlns:a16="http://schemas.microsoft.com/office/drawing/2014/main" id="{10204224-46DF-4C36-A2DE-9643EA27FFB2}"/>
               </a:ext>
             </a:extLst>
           </p:cNvPr>
@@ -1819,7 +1748,7 @@
           <p:cNvPr id="6" name="auto-text-3">
             <a:extLst xmlns:a="http://schemas.openxmlformats.org/drawingml/2006/main">
               <a:ext uri="{FF2B5EF4-FFF2-40B4-BE49-F238E27FC236}">
-                <a16:creationId xmlns:a16="http://schemas.microsoft.com/office/drawing/2014/main" id="{5A3E2A82-6691-489F-A524-F7C328A39A57}"/>
+                <a16:creationId xmlns:a16="http://schemas.microsoft.com/office/drawing/2014/main" id="{EC51D8C6-BF68-4642-9C57-B767D69B5B82}"/>
               </a:ext>
             </a:extLst>
           </p:cNvPr>
@@ -1877,7 +1806,7 @@
           <p:cNvPr id="7" name="edit-media-surface">
             <a:extLst xmlns:a="http://schemas.openxmlformats.org/drawingml/2006/main">
               <a:ext uri="{FF2B5EF4-FFF2-40B4-BE49-F238E27FC236}">
-                <a16:creationId xmlns:a16="http://schemas.microsoft.com/office/drawing/2014/main" id="{CEC6FEBC-B26A-46EF-9E6A-1E332B3A84A9}"/>
+                <a16:creationId xmlns:a16="http://schemas.microsoft.com/office/drawing/2014/main" id="{FE025C7F-4FFF-41CA-8303-FB57B5D6AE3B}"/>
               </a:ext>
             </a:extLst>
           </p:cNvPr>
@@ -1912,7 +1841,7 @@
           <p:cNvPr id="8" name="edit-source-frame">
             <a:extLst xmlns:a="http://schemas.openxmlformats.org/drawingml/2006/main">
               <a:ext uri="{FF2B5EF4-FFF2-40B4-BE49-F238E27FC236}">
-                <a16:creationId xmlns:a16="http://schemas.microsoft.com/office/drawing/2014/main" id="{C156C8DE-F52E-4DAD-A601-BE03CA11A81E}"/>
+                <a16:creationId xmlns:a16="http://schemas.microsoft.com/office/drawing/2014/main" id="{424E276D-4123-4F05-B495-E9EA48CA6471}"/>
               </a:ext>
             </a:extLst>
           </p:cNvPr>
@@ -1947,7 +1876,7 @@
           <p:cNvPr id="9" name="edit-source-label">
             <a:extLst xmlns:a="http://schemas.openxmlformats.org/drawingml/2006/main">
               <a:ext uri="{FF2B5EF4-FFF2-40B4-BE49-F238E27FC236}">
-                <a16:creationId xmlns:a16="http://schemas.microsoft.com/office/drawing/2014/main" id="{24DC80AE-AF94-4AA5-86B5-7A18558AB025}"/>
+                <a16:creationId xmlns:a16="http://schemas.microsoft.com/office/drawing/2014/main" id="{975AC682-6645-4726-91E3-51951552B3FF}"/>
               </a:ext>
             </a:extLst>
           </p:cNvPr>
@@ -2005,7 +1934,7 @@
           <p:cNvPr id="10" name="edit-source-sub">
             <a:extLst xmlns:a="http://schemas.openxmlformats.org/drawingml/2006/main">
               <a:ext uri="{FF2B5EF4-FFF2-40B4-BE49-F238E27FC236}">
-                <a16:creationId xmlns:a16="http://schemas.microsoft.com/office/drawing/2014/main" id="{75A36E67-CE3E-496C-8441-D417A8F9B9BE}"/>
+                <a16:creationId xmlns:a16="http://schemas.microsoft.com/office/drawing/2014/main" id="{229CAD11-1248-4F68-9866-FD131F0C32A4}"/>
               </a:ext>
             </a:extLst>
           </p:cNvPr>
@@ -2063,7 +1992,7 @@
           <p:cNvPr id="11" name="edit-reference-frame">
             <a:extLst xmlns:a="http://schemas.openxmlformats.org/drawingml/2006/main">
               <a:ext uri="{FF2B5EF4-FFF2-40B4-BE49-F238E27FC236}">
-                <a16:creationId xmlns:a16="http://schemas.microsoft.com/office/drawing/2014/main" id="{992CFEBC-3C86-49EE-8BB6-18DB7E370D78}"/>
+                <a16:creationId xmlns:a16="http://schemas.microsoft.com/office/drawing/2014/main" id="{38A8C8BF-E46C-4823-857C-6278BE6B2FE0}"/>
               </a:ext>
             </a:extLst>
           </p:cNvPr>
@@ -2098,7 +2027,7 @@
           <p:cNvPr id="12" name="edit-reference-label">
             <a:extLst xmlns:a="http://schemas.openxmlformats.org/drawingml/2006/main">
               <a:ext uri="{FF2B5EF4-FFF2-40B4-BE49-F238E27FC236}">
-                <a16:creationId xmlns:a16="http://schemas.microsoft.com/office/drawing/2014/main" id="{280C28A8-48F8-4556-9377-401BA0553858}"/>
+                <a16:creationId xmlns:a16="http://schemas.microsoft.com/office/drawing/2014/main" id="{6C3B75B0-A5E9-4B5A-B68E-6FF588F4205D}"/>
               </a:ext>
             </a:extLst>
           </p:cNvPr>
@@ -2156,7 +2085,7 @@
           <p:cNvPr id="13" name="edit-reference-sub">
             <a:extLst xmlns:a="http://schemas.openxmlformats.org/drawingml/2006/main">
               <a:ext uri="{FF2B5EF4-FFF2-40B4-BE49-F238E27FC236}">
-                <a16:creationId xmlns:a16="http://schemas.microsoft.com/office/drawing/2014/main" id="{ADA27781-51C3-4E60-8E03-6A4435C9E883}"/>
+                <a16:creationId xmlns:a16="http://schemas.microsoft.com/office/drawing/2014/main" id="{BAD86F46-0317-4F1C-8E95-030B9DF92354}"/>
               </a:ext>
             </a:extLst>
           </p:cNvPr>
@@ -2214,7 +2143,7 @@
           <p:cNvPr id="14" name="edit-output-frame">
             <a:extLst xmlns:a="http://schemas.openxmlformats.org/drawingml/2006/main">
               <a:ext uri="{FF2B5EF4-FFF2-40B4-BE49-F238E27FC236}">
-                <a16:creationId xmlns:a16="http://schemas.microsoft.com/office/drawing/2014/main" id="{6CB075E8-F044-410C-A26C-1C78D41BD3C1}"/>
+                <a16:creationId xmlns:a16="http://schemas.microsoft.com/office/drawing/2014/main" id="{DE8EF774-A70C-49B9-AAD9-5364874F7150}"/>
               </a:ext>
             </a:extLst>
           </p:cNvPr>
@@ -2249,7 +2178,7 @@
           <p:cNvPr id="15" name="edit-output-label">
             <a:extLst xmlns:a="http://schemas.openxmlformats.org/drawingml/2006/main">
               <a:ext uri="{FF2B5EF4-FFF2-40B4-BE49-F238E27FC236}">
-                <a16:creationId xmlns:a16="http://schemas.microsoft.com/office/drawing/2014/main" id="{92EFED62-F7D0-44BE-8F04-5EEC7BB95933}"/>
+                <a16:creationId xmlns:a16="http://schemas.microsoft.com/office/drawing/2014/main" id="{2D199DCA-FF98-4EB6-8E38-E45849E4B597}"/>
               </a:ext>
             </a:extLst>
           </p:cNvPr>
@@ -2307,7 +2236,7 @@
           <p:cNvPr id="16" name="edit-output-sub">
             <a:extLst xmlns:a="http://schemas.openxmlformats.org/drawingml/2006/main">
               <a:ext uri="{FF2B5EF4-FFF2-40B4-BE49-F238E27FC236}">
-                <a16:creationId xmlns:a16="http://schemas.microsoft.com/office/drawing/2014/main" id="{1668C043-F927-4CA6-BAE7-5358E1522D78}"/>
+                <a16:creationId xmlns:a16="http://schemas.microsoft.com/office/drawing/2014/main" id="{A140A53F-A3A2-4C07-BF0F-97B5F1FB6B23}"/>
               </a:ext>
             </a:extLst>
           </p:cNvPr>
@@ -2365,7 +2294,7 @@
           <p:cNvPr id="17" name="auto-text-4">
             <a:extLst xmlns:a="http://schemas.openxmlformats.org/drawingml/2006/main">
               <a:ext uri="{FF2B5EF4-FFF2-40B4-BE49-F238E27FC236}">
-                <a16:creationId xmlns:a16="http://schemas.microsoft.com/office/drawing/2014/main" id="{F98B02C8-3B01-47A1-A164-BDB9DF270868}"/>
+                <a16:creationId xmlns:a16="http://schemas.microsoft.com/office/drawing/2014/main" id="{2F0EE434-F081-4196-B628-B712DDCFE17E}"/>
               </a:ext>
             </a:extLst>
           </p:cNvPr>
@@ -2423,7 +2352,7 @@
           <p:cNvPr id="18" name="gallery-media-surface">
             <a:extLst xmlns:a="http://schemas.openxmlformats.org/drawingml/2006/main">
               <a:ext uri="{FF2B5EF4-FFF2-40B4-BE49-F238E27FC236}">
-                <a16:creationId xmlns:a16="http://schemas.microsoft.com/office/drawing/2014/main" id="{7C0D55E9-2652-4709-B439-FF97FAE11599}"/>
+                <a16:creationId xmlns:a16="http://schemas.microsoft.com/office/drawing/2014/main" id="{1A812605-745B-40D0-AA30-ADC800054C27}"/>
               </a:ext>
             </a:extLst>
           </p:cNvPr>
@@ -2458,7 +2387,7 @@
           <p:cNvPr id="19" name="gallery-good-frame">
             <a:extLst xmlns:a="http://schemas.openxmlformats.org/drawingml/2006/main">
               <a:ext uri="{FF2B5EF4-FFF2-40B4-BE49-F238E27FC236}">
-                <a16:creationId xmlns:a16="http://schemas.microsoft.com/office/drawing/2014/main" id="{7C97C144-AD7C-479D-ABF0-14A1053E4A71}"/>
+                <a16:creationId xmlns:a16="http://schemas.microsoft.com/office/drawing/2014/main" id="{0686C153-8BE2-4408-8355-795ECA38300F}"/>
               </a:ext>
             </a:extLst>
           </p:cNvPr>
@@ -2493,7 +2422,7 @@
           <p:cNvPr id="20" name="gallery-good-label">
             <a:extLst xmlns:a="http://schemas.openxmlformats.org/drawingml/2006/main">
               <a:ext uri="{FF2B5EF4-FFF2-40B4-BE49-F238E27FC236}">
-                <a16:creationId xmlns:a16="http://schemas.microsoft.com/office/drawing/2014/main" id="{3211E937-671B-4C5B-B394-7DC3F32F8AD0}"/>
+                <a16:creationId xmlns:a16="http://schemas.microsoft.com/office/drawing/2014/main" id="{60DE572E-583E-4D01-9E48-D4139ADAF986}"/>
               </a:ext>
             </a:extLst>
           </p:cNvPr>
@@ -2551,7 +2480,7 @@
           <p:cNvPr id="21" name="gallery-good-sub">
             <a:extLst xmlns:a="http://schemas.openxmlformats.org/drawingml/2006/main">
               <a:ext uri="{FF2B5EF4-FFF2-40B4-BE49-F238E27FC236}">
-                <a16:creationId xmlns:a16="http://schemas.microsoft.com/office/drawing/2014/main" id="{7C045741-4833-413E-8038-39D17B96442D}"/>
+                <a16:creationId xmlns:a16="http://schemas.microsoft.com/office/drawing/2014/main" id="{B741222A-893E-4A41-8AD0-B6D2C34C8198}"/>
               </a:ext>
             </a:extLst>
           </p:cNvPr>
@@ -2609,7 +2538,7 @@
           <p:cNvPr id="22" name="gallery-bad-frame">
             <a:extLst xmlns:a="http://schemas.openxmlformats.org/drawingml/2006/main">
               <a:ext uri="{FF2B5EF4-FFF2-40B4-BE49-F238E27FC236}">
-                <a16:creationId xmlns:a16="http://schemas.microsoft.com/office/drawing/2014/main" id="{FD304B9D-CEE5-4CEF-9759-E50EFDFC2FA1}"/>
+                <a16:creationId xmlns:a16="http://schemas.microsoft.com/office/drawing/2014/main" id="{6A9D007A-5F55-47F7-8F0A-867EE3ADF622}"/>
               </a:ext>
             </a:extLst>
           </p:cNvPr>
@@ -2644,7 +2573,7 @@
           <p:cNvPr id="23" name="gallery-bad-label">
             <a:extLst xmlns:a="http://schemas.openxmlformats.org/drawingml/2006/main">
               <a:ext uri="{FF2B5EF4-FFF2-40B4-BE49-F238E27FC236}">
-                <a16:creationId xmlns:a16="http://schemas.microsoft.com/office/drawing/2014/main" id="{31F1B3AC-5BBF-4374-9B4F-8602A3B81479}"/>
+                <a16:creationId xmlns:a16="http://schemas.microsoft.com/office/drawing/2014/main" id="{0BD39804-08CA-4935-BBA9-CE32500AEACA}"/>
               </a:ext>
             </a:extLst>
           </p:cNvPr>
@@ -2702,7 +2631,7 @@
           <p:cNvPr id="24" name="gallery-bad-sub">
             <a:extLst xmlns:a="http://schemas.openxmlformats.org/drawingml/2006/main">
               <a:ext uri="{FF2B5EF4-FFF2-40B4-BE49-F238E27FC236}">
-                <a16:creationId xmlns:a16="http://schemas.microsoft.com/office/drawing/2014/main" id="{D0A9247D-465D-4E35-9691-DE563D63B49D}"/>
+                <a16:creationId xmlns:a16="http://schemas.microsoft.com/office/drawing/2014/main" id="{535017E9-C41E-4216-8259-D7E29E89E448}"/>
               </a:ext>
             </a:extLst>
           </p:cNvPr>
@@ -2760,7 +2689,7 @@
           <p:cNvPr id="25" name="auto-text-5">
             <a:extLst xmlns:a="http://schemas.openxmlformats.org/drawingml/2006/main">
               <a:ext uri="{FF2B5EF4-FFF2-40B4-BE49-F238E27FC236}">
-                <a16:creationId xmlns:a16="http://schemas.microsoft.com/office/drawing/2014/main" id="{4023FEFE-BE79-49FC-B9F2-035B77D8EEDF}"/>
+                <a16:creationId xmlns:a16="http://schemas.microsoft.com/office/drawing/2014/main" id="{03DDE0A0-E7D7-4AC2-B3D3-89A53D3CCC06}"/>
               </a:ext>
             </a:extLst>
           </p:cNvPr>
@@ -2818,7 +2747,7 @@
           <p:cNvPr id="26" name="auto-text-6">
             <a:extLst xmlns:a="http://schemas.openxmlformats.org/drawingml/2006/main">
               <a:ext uri="{FF2B5EF4-FFF2-40B4-BE49-F238E27FC236}">
-                <a16:creationId xmlns:a16="http://schemas.microsoft.com/office/drawing/2014/main" id="{E347040C-30A3-41B1-949C-6AF6FFFB3139}"/>
+                <a16:creationId xmlns:a16="http://schemas.microsoft.com/office/drawing/2014/main" id="{168138B1-B7D6-4067-8C20-7D323726C29D}"/>
               </a:ext>
             </a:extLst>
           </p:cNvPr>
@@ -2876,7 +2805,7 @@
           <p:cNvPr id="27" name="auto-text-7">
             <a:extLst xmlns:a="http://schemas.openxmlformats.org/drawingml/2006/main">
               <a:ext uri="{FF2B5EF4-FFF2-40B4-BE49-F238E27FC236}">
-                <a16:creationId xmlns:a16="http://schemas.microsoft.com/office/drawing/2014/main" id="{7ACB6283-CA33-44BF-A24B-7AE3F1320500}"/>
+                <a16:creationId xmlns:a16="http://schemas.microsoft.com/office/drawing/2014/main" id="{CAB749AA-BB29-478F-A410-E8E9F3464D2C}"/>
               </a:ext>
             </a:extLst>
           </p:cNvPr>
@@ -2934,7 +2863,7 @@
           <p:cNvPr id="28" name="slide1-conclusion">
             <a:extLst xmlns:a="http://schemas.openxmlformats.org/drawingml/2006/main">
               <a:ext uri="{FF2B5EF4-FFF2-40B4-BE49-F238E27FC236}">
-                <a16:creationId xmlns:a16="http://schemas.microsoft.com/office/drawing/2014/main" id="{D8C342B3-3B40-420F-A237-06FBEDCA2DB8}"/>
+                <a16:creationId xmlns:a16="http://schemas.microsoft.com/office/drawing/2014/main" id="{10A60729-D500-443D-9D8A-A8DD7D569650}"/>
               </a:ext>
             </a:extLst>
           </p:cNvPr>
@@ -2969,7 +2898,7 @@
           <p:cNvPr id="29" name="auto-text-8">
             <a:extLst xmlns:a="http://schemas.openxmlformats.org/drawingml/2006/main">
               <a:ext uri="{FF2B5EF4-FFF2-40B4-BE49-F238E27FC236}">
-                <a16:creationId xmlns:a16="http://schemas.microsoft.com/office/drawing/2014/main" id="{328EF635-6AFF-496C-A1E9-EBF63EBE3D49}"/>
+                <a16:creationId xmlns:a16="http://schemas.microsoft.com/office/drawing/2014/main" id="{2004ED73-4CBF-4BB0-B76C-8EAE9E395D62}"/>
               </a:ext>
             </a:extLst>
           </p:cNvPr>
@@ -3027,7 +2956,7 @@
           <p:cNvPr id="30" name="auto-text-9">
             <a:extLst xmlns:a="http://schemas.openxmlformats.org/drawingml/2006/main">
               <a:ext uri="{FF2B5EF4-FFF2-40B4-BE49-F238E27FC236}">
-                <a16:creationId xmlns:a16="http://schemas.microsoft.com/office/drawing/2014/main" id="{4EA2A08C-9D93-4465-95CC-CA3CCC20E507}"/>
+                <a16:creationId xmlns:a16="http://schemas.microsoft.com/office/drawing/2014/main" id="{82259A21-ED48-4F5A-BFEF-62A6B2684EFC}"/>
               </a:ext>
             </a:extLst>
           </p:cNvPr>
@@ -3083,7 +3012,7 @@
     </p:spTree>
     <p:extLst>
       <p:ext uri="{BB962C8B-B14F-4D97-AF65-F5344CB8AC3E}">
-        <p14:creationId xmlns:p14="http://schemas.microsoft.com/office/powerpoint/2010/main" val="168785140"/>
+        <p14:creationId xmlns:p14="http://schemas.microsoft.com/office/powerpoint/2010/main" val="26575476"/>
       </p:ext>
     </p:extLst>
   </p:cSld>
@@ -3114,7 +3043,7 @@
           <p:cNvPr id="30" name="accent-2">
             <a:extLst xmlns:a="http://schemas.openxmlformats.org/drawingml/2006/main">
               <a:ext uri="{FF2B5EF4-FFF2-40B4-BE49-F238E27FC236}">
-                <a16:creationId xmlns:a16="http://schemas.microsoft.com/office/drawing/2014/main" id="{B23409F7-4715-439C-AD04-B4F2E81F6D55}"/>
+                <a16:creationId xmlns:a16="http://schemas.microsoft.com/office/drawing/2014/main" id="{FA4D26B4-48EC-481D-9B06-6C5DD93D388F}"/>
               </a:ext>
             </a:extLst>
           </p:cNvPr>
@@ -3149,7 +3078,7 @@
           <p:cNvPr id="2" name="title-2">
             <a:extLst xmlns:a="http://schemas.openxmlformats.org/drawingml/2006/main">
               <a:ext uri="{FF2B5EF4-FFF2-40B4-BE49-F238E27FC236}">
-                <a16:creationId xmlns:a16="http://schemas.microsoft.com/office/drawing/2014/main" id="{D80C5D7F-1974-4B50-B998-72DFF660B77B}"/>
+                <a16:creationId xmlns:a16="http://schemas.microsoft.com/office/drawing/2014/main" id="{B003038A-5576-41DC-9139-6C56118F059A}"/>
               </a:ext>
             </a:extLst>
           </p:cNvPr>
@@ -3207,7 +3136,7 @@
           <p:cNvPr id="3" name="page-2">
             <a:extLst xmlns:a="http://schemas.openxmlformats.org/drawingml/2006/main">
               <a:ext uri="{FF2B5EF4-FFF2-40B4-BE49-F238E27FC236}">
-                <a16:creationId xmlns:a16="http://schemas.microsoft.com/office/drawing/2014/main" id="{2FB31FB3-511E-4CFF-B53A-AE843765CFDF}"/>
+                <a16:creationId xmlns:a16="http://schemas.microsoft.com/office/drawing/2014/main" id="{142A74E4-C2AE-4A95-86B0-532CD9AA4AFC}"/>
               </a:ext>
             </a:extLst>
           </p:cNvPr>
@@ -3265,7 +3194,7 @@
           <p:cNvPr id="4" name="auto-text-10">
             <a:extLst xmlns:a="http://schemas.openxmlformats.org/drawingml/2006/main">
               <a:ext uri="{FF2B5EF4-FFF2-40B4-BE49-F238E27FC236}">
-                <a16:creationId xmlns:a16="http://schemas.microsoft.com/office/drawing/2014/main" id="{634B8EEC-D36B-44CC-AE5D-EA2C45A74AFF}"/>
+                <a16:creationId xmlns:a16="http://schemas.microsoft.com/office/drawing/2014/main" id="{5EF03389-55FF-4B65-AD66-C11D36814A59}"/>
               </a:ext>
             </a:extLst>
           </p:cNvPr>
@@ -3323,7 +3252,7 @@
           <p:cNvPr id="5" name="step-dot-0">
             <a:extLst xmlns:a="http://schemas.openxmlformats.org/drawingml/2006/main">
               <a:ext uri="{FF2B5EF4-FFF2-40B4-BE49-F238E27FC236}">
-                <a16:creationId xmlns:a16="http://schemas.microsoft.com/office/drawing/2014/main" id="{FD73E74A-661A-48F0-8993-195327F952F4}"/>
+                <a16:creationId xmlns:a16="http://schemas.microsoft.com/office/drawing/2014/main" id="{D6A711EB-66AB-4F73-829E-05001EAE5E0B}"/>
               </a:ext>
             </a:extLst>
           </p:cNvPr>
@@ -3358,7 +3287,7 @@
           <p:cNvPr id="6" name="step-line-0">
             <a:extLst xmlns:a="http://schemas.openxmlformats.org/drawingml/2006/main">
               <a:ext uri="{FF2B5EF4-FFF2-40B4-BE49-F238E27FC236}">
-                <a16:creationId xmlns:a16="http://schemas.microsoft.com/office/drawing/2014/main" id="{E4F39A6E-95CA-4EEF-B5B5-C545146D8E1E}"/>
+                <a16:creationId xmlns:a16="http://schemas.microsoft.com/office/drawing/2014/main" id="{612E9642-531D-494D-BD3A-B270D9BBFCF4}"/>
               </a:ext>
             </a:extLst>
           </p:cNvPr>
@@ -3393,7 +3322,7 @@
           <p:cNvPr id="7" name="step-text-0">
             <a:extLst xmlns:a="http://schemas.openxmlformats.org/drawingml/2006/main">
               <a:ext uri="{FF2B5EF4-FFF2-40B4-BE49-F238E27FC236}">
-                <a16:creationId xmlns:a16="http://schemas.microsoft.com/office/drawing/2014/main" id="{BEC8D033-4948-457D-A582-55978AD8A5AF}"/>
+                <a16:creationId xmlns:a16="http://schemas.microsoft.com/office/drawing/2014/main" id="{E092610B-729B-4723-ADBF-2EB71BD1D805}"/>
               </a:ext>
             </a:extLst>
           </p:cNvPr>
@@ -3451,7 +3380,7 @@
           <p:cNvPr id="8" name="step-dot-1">
             <a:extLst xmlns:a="http://schemas.openxmlformats.org/drawingml/2006/main">
               <a:ext uri="{FF2B5EF4-FFF2-40B4-BE49-F238E27FC236}">
-                <a16:creationId xmlns:a16="http://schemas.microsoft.com/office/drawing/2014/main" id="{59436CBE-7CA2-40C4-BB92-B5CAAA7E3111}"/>
+                <a16:creationId xmlns:a16="http://schemas.microsoft.com/office/drawing/2014/main" id="{169E565F-1014-4B31-957B-AF11AF4230F0}"/>
               </a:ext>
             </a:extLst>
           </p:cNvPr>
@@ -3486,7 +3415,7 @@
           <p:cNvPr id="9" name="step-line-1">
             <a:extLst xmlns:a="http://schemas.openxmlformats.org/drawingml/2006/main">
               <a:ext uri="{FF2B5EF4-FFF2-40B4-BE49-F238E27FC236}">
-                <a16:creationId xmlns:a16="http://schemas.microsoft.com/office/drawing/2014/main" id="{11427E0F-6D75-4CBB-BF5B-B61F44CBBDEA}"/>
+                <a16:creationId xmlns:a16="http://schemas.microsoft.com/office/drawing/2014/main" id="{DEBEA66E-1609-4692-BC68-4BA5F5EF1590}"/>
               </a:ext>
             </a:extLst>
           </p:cNvPr>
@@ -3521,7 +3450,7 @@
           <p:cNvPr id="10" name="step-text-1">
             <a:extLst xmlns:a="http://schemas.openxmlformats.org/drawingml/2006/main">
               <a:ext uri="{FF2B5EF4-FFF2-40B4-BE49-F238E27FC236}">
-                <a16:creationId xmlns:a16="http://schemas.microsoft.com/office/drawing/2014/main" id="{3BCC69FF-F2B1-450D-B614-659DA54D95E8}"/>
+                <a16:creationId xmlns:a16="http://schemas.microsoft.com/office/drawing/2014/main" id="{B891E1F1-D1E4-4311-A0AD-77051C5EF555}"/>
               </a:ext>
             </a:extLst>
           </p:cNvPr>
@@ -3579,7 +3508,7 @@
           <p:cNvPr id="11" name="step-dot-2">
             <a:extLst xmlns:a="http://schemas.openxmlformats.org/drawingml/2006/main">
               <a:ext uri="{FF2B5EF4-FFF2-40B4-BE49-F238E27FC236}">
-                <a16:creationId xmlns:a16="http://schemas.microsoft.com/office/drawing/2014/main" id="{FED07AAD-5B31-481E-9285-846F047721AA}"/>
+                <a16:creationId xmlns:a16="http://schemas.microsoft.com/office/drawing/2014/main" id="{2D8F66C8-203B-4AA0-9669-906F1E959561}"/>
               </a:ext>
             </a:extLst>
           </p:cNvPr>
@@ -3614,7 +3543,7 @@
           <p:cNvPr id="12" name="step-line-2">
             <a:extLst xmlns:a="http://schemas.openxmlformats.org/drawingml/2006/main">
               <a:ext uri="{FF2B5EF4-FFF2-40B4-BE49-F238E27FC236}">
-                <a16:creationId xmlns:a16="http://schemas.microsoft.com/office/drawing/2014/main" id="{1457A00D-BF13-43B9-93D8-110A76F67EE4}"/>
+                <a16:creationId xmlns:a16="http://schemas.microsoft.com/office/drawing/2014/main" id="{C0A5815A-2B68-42EB-97D6-2C060BD58C89}"/>
               </a:ext>
             </a:extLst>
           </p:cNvPr>
@@ -3649,7 +3578,7 @@
           <p:cNvPr id="13" name="step-text-2">
             <a:extLst xmlns:a="http://schemas.openxmlformats.org/drawingml/2006/main">
               <a:ext uri="{FF2B5EF4-FFF2-40B4-BE49-F238E27FC236}">
-                <a16:creationId xmlns:a16="http://schemas.microsoft.com/office/drawing/2014/main" id="{B1A4DE3B-20ED-4222-B235-93798BA84FF0}"/>
+                <a16:creationId xmlns:a16="http://schemas.microsoft.com/office/drawing/2014/main" id="{743B4B24-9FF2-407E-8C52-13D72CC08FEE}"/>
               </a:ext>
             </a:extLst>
           </p:cNvPr>
@@ -3707,7 +3636,7 @@
           <p:cNvPr id="14" name="step-dot-3">
             <a:extLst xmlns:a="http://schemas.openxmlformats.org/drawingml/2006/main">
               <a:ext uri="{FF2B5EF4-FFF2-40B4-BE49-F238E27FC236}">
-                <a16:creationId xmlns:a16="http://schemas.microsoft.com/office/drawing/2014/main" id="{1D56F304-A2DC-4CF3-B4E2-EF1F62E729BA}"/>
+                <a16:creationId xmlns:a16="http://schemas.microsoft.com/office/drawing/2014/main" id="{02B37CB3-2284-414C-8AE7-C9DAD679AC40}"/>
               </a:ext>
             </a:extLst>
           </p:cNvPr>
@@ -3742,7 +3671,7 @@
           <p:cNvPr id="15" name="step-line-3">
             <a:extLst xmlns:a="http://schemas.openxmlformats.org/drawingml/2006/main">
               <a:ext uri="{FF2B5EF4-FFF2-40B4-BE49-F238E27FC236}">
-                <a16:creationId xmlns:a16="http://schemas.microsoft.com/office/drawing/2014/main" id="{D5209A36-28D8-41AB-80DC-E292D1F6CD71}"/>
+                <a16:creationId xmlns:a16="http://schemas.microsoft.com/office/drawing/2014/main" id="{6D2921C7-6483-4B76-BDB8-D25DB38A531E}"/>
               </a:ext>
             </a:extLst>
           </p:cNvPr>
@@ -3777,7 +3706,7 @@
           <p:cNvPr id="16" name="step-text-3">
             <a:extLst xmlns:a="http://schemas.openxmlformats.org/drawingml/2006/main">
               <a:ext uri="{FF2B5EF4-FFF2-40B4-BE49-F238E27FC236}">
-                <a16:creationId xmlns:a16="http://schemas.microsoft.com/office/drawing/2014/main" id="{DB894428-D172-43EF-A317-683D17B7D4C6}"/>
+                <a16:creationId xmlns:a16="http://schemas.microsoft.com/office/drawing/2014/main" id="{C7B9E17B-4B05-481B-8B71-51A1B32D2B2F}"/>
               </a:ext>
             </a:extLst>
           </p:cNvPr>
@@ -3835,7 +3764,7 @@
           <p:cNvPr id="17" name="step-dot-4">
             <a:extLst xmlns:a="http://schemas.openxmlformats.org/drawingml/2006/main">
               <a:ext uri="{FF2B5EF4-FFF2-40B4-BE49-F238E27FC236}">
-                <a16:creationId xmlns:a16="http://schemas.microsoft.com/office/drawing/2014/main" id="{0A1D33ED-3CA7-43E5-A252-162D842D236F}"/>
+                <a16:creationId xmlns:a16="http://schemas.microsoft.com/office/drawing/2014/main" id="{24DA844D-8A46-4B6D-805D-2F41783E600B}"/>
               </a:ext>
             </a:extLst>
           </p:cNvPr>
@@ -3870,7 +3799,7 @@
           <p:cNvPr id="18" name="step-text-4">
             <a:extLst xmlns:a="http://schemas.openxmlformats.org/drawingml/2006/main">
               <a:ext uri="{FF2B5EF4-FFF2-40B4-BE49-F238E27FC236}">
-                <a16:creationId xmlns:a16="http://schemas.microsoft.com/office/drawing/2014/main" id="{A130CDDF-32EC-4517-ABE5-72DE7990F236}"/>
+                <a16:creationId xmlns:a16="http://schemas.microsoft.com/office/drawing/2014/main" id="{A999A097-2BE6-43A5-82B3-F977D0207598}"/>
               </a:ext>
             </a:extLst>
           </p:cNvPr>
@@ -3928,7 +3857,7 @@
           <p:cNvPr id="19" name="pain-summary">
             <a:extLst xmlns:a="http://schemas.openxmlformats.org/drawingml/2006/main">
               <a:ext uri="{FF2B5EF4-FFF2-40B4-BE49-F238E27FC236}">
-                <a16:creationId xmlns:a16="http://schemas.microsoft.com/office/drawing/2014/main" id="{8FADFE4B-501E-4B0E-81ED-23F07DB7818F}"/>
+                <a16:creationId xmlns:a16="http://schemas.microsoft.com/office/drawing/2014/main" id="{81958BA4-8532-4BB6-ADA8-2A9BA3E329AE}"/>
               </a:ext>
             </a:extLst>
           </p:cNvPr>
@@ -3963,7 +3892,7 @@
           <p:cNvPr id="20" name="auto-text-11">
             <a:extLst xmlns:a="http://schemas.openxmlformats.org/drawingml/2006/main">
               <a:ext uri="{FF2B5EF4-FFF2-40B4-BE49-F238E27FC236}">
-                <a16:creationId xmlns:a16="http://schemas.microsoft.com/office/drawing/2014/main" id="{9C4D364E-4353-4E79-86A4-04A1C5BCEFBB}"/>
+                <a16:creationId xmlns:a16="http://schemas.microsoft.com/office/drawing/2014/main" id="{AACC5D4A-812F-4BAE-8284-C81F897F4AD9}"/>
               </a:ext>
             </a:extLst>
           </p:cNvPr>
@@ -4021,7 +3950,7 @@
           <p:cNvPr id="21" name="auto-text-12">
             <a:extLst xmlns:a="http://schemas.openxmlformats.org/drawingml/2006/main">
               <a:ext uri="{FF2B5EF4-FFF2-40B4-BE49-F238E27FC236}">
-                <a16:creationId xmlns:a16="http://schemas.microsoft.com/office/drawing/2014/main" id="{EDC41233-64B2-4AFF-8953-922956CD3061}"/>
+                <a16:creationId xmlns:a16="http://schemas.microsoft.com/office/drawing/2014/main" id="{5DC6E27B-536D-44D3-8C87-0D6A40A92FD9}"/>
               </a:ext>
             </a:extLst>
           </p:cNvPr>
@@ -4148,7 +4077,7 @@
           <p:cNvPr id="22" name="auto-text-13">
             <a:extLst xmlns:a="http://schemas.openxmlformats.org/drawingml/2006/main">
               <a:ext uri="{FF2B5EF4-FFF2-40B4-BE49-F238E27FC236}">
-                <a16:creationId xmlns:a16="http://schemas.microsoft.com/office/drawing/2014/main" id="{9407AC3B-B053-40F1-8CC8-5D57A067A2B5}"/>
+                <a16:creationId xmlns:a16="http://schemas.microsoft.com/office/drawing/2014/main" id="{E6951480-EACB-4F40-AEEA-4D92AB51634D}"/>
               </a:ext>
             </a:extLst>
           </p:cNvPr>
@@ -4206,7 +4135,7 @@
           <p:cNvPr id="23" name="prompt-shot-frame">
             <a:extLst xmlns:a="http://schemas.openxmlformats.org/drawingml/2006/main">
               <a:ext uri="{FF2B5EF4-FFF2-40B4-BE49-F238E27FC236}">
-                <a16:creationId xmlns:a16="http://schemas.microsoft.com/office/drawing/2014/main" id="{271E73EA-5396-4FFE-BD95-3CECB93D676A}"/>
+                <a16:creationId xmlns:a16="http://schemas.microsoft.com/office/drawing/2014/main" id="{307941D8-99F4-4CE9-8DA7-9637FF24C031}"/>
               </a:ext>
             </a:extLst>
           </p:cNvPr>
@@ -4241,7 +4170,7 @@
           <p:cNvPr id="24" name="prompt-shot-label">
             <a:extLst xmlns:a="http://schemas.openxmlformats.org/drawingml/2006/main">
               <a:ext uri="{FF2B5EF4-FFF2-40B4-BE49-F238E27FC236}">
-                <a16:creationId xmlns:a16="http://schemas.microsoft.com/office/drawing/2014/main" id="{AD36AA83-9C3A-417C-9AB7-8D13C890A556}"/>
+                <a16:creationId xmlns:a16="http://schemas.microsoft.com/office/drawing/2014/main" id="{616BFD8C-9D81-4DB6-8540-9F58CF800196}"/>
               </a:ext>
             </a:extLst>
           </p:cNvPr>
@@ -4299,7 +4228,7 @@
           <p:cNvPr id="25" name="prompt-shot-sub">
             <a:extLst xmlns:a="http://schemas.openxmlformats.org/drawingml/2006/main">
               <a:ext uri="{FF2B5EF4-FFF2-40B4-BE49-F238E27FC236}">
-                <a16:creationId xmlns:a16="http://schemas.microsoft.com/office/drawing/2014/main" id="{1D9CBCB8-AEEE-4452-ABF1-304C22D0C529}"/>
+                <a16:creationId xmlns:a16="http://schemas.microsoft.com/office/drawing/2014/main" id="{42CC7503-3947-4FF7-81B5-6AD08D3611E6}"/>
               </a:ext>
             </a:extLst>
           </p:cNvPr>
@@ -4357,7 +4286,7 @@
           <p:cNvPr id="26" name="misjudge-case-frame">
             <a:extLst xmlns:a="http://schemas.openxmlformats.org/drawingml/2006/main">
               <a:ext uri="{FF2B5EF4-FFF2-40B4-BE49-F238E27FC236}">
-                <a16:creationId xmlns:a16="http://schemas.microsoft.com/office/drawing/2014/main" id="{D81DFDC3-B8DA-4126-993B-D2437D97EA98}"/>
+                <a16:creationId xmlns:a16="http://schemas.microsoft.com/office/drawing/2014/main" id="{706C0D0C-FFAB-4ED4-A260-2F70344318A8}"/>
               </a:ext>
             </a:extLst>
           </p:cNvPr>
@@ -4392,7 +4321,7 @@
           <p:cNvPr id="27" name="misjudge-case-label">
             <a:extLst xmlns:a="http://schemas.openxmlformats.org/drawingml/2006/main">
               <a:ext uri="{FF2B5EF4-FFF2-40B4-BE49-F238E27FC236}">
-                <a16:creationId xmlns:a16="http://schemas.microsoft.com/office/drawing/2014/main" id="{223F6C7B-F728-4C57-8EEC-B709086423DF}"/>
+                <a16:creationId xmlns:a16="http://schemas.microsoft.com/office/drawing/2014/main" id="{A166AD50-1901-4677-B14C-EFB84DE9D022}"/>
               </a:ext>
             </a:extLst>
           </p:cNvPr>
@@ -4450,7 +4379,7 @@
           <p:cNvPr id="28" name="misjudge-case-sub">
             <a:extLst xmlns:a="http://schemas.openxmlformats.org/drawingml/2006/main">
               <a:ext uri="{FF2B5EF4-FFF2-40B4-BE49-F238E27FC236}">
-                <a16:creationId xmlns:a16="http://schemas.microsoft.com/office/drawing/2014/main" id="{524DAB5A-E968-45E1-972E-05D016084568}"/>
+                <a16:creationId xmlns:a16="http://schemas.microsoft.com/office/drawing/2014/main" id="{8EDDE250-D409-4C2F-BF30-15799754490D}"/>
               </a:ext>
             </a:extLst>
           </p:cNvPr>
@@ -4508,7 +4437,7 @@
           <p:cNvPr id="29" name="auto-text-14">
             <a:extLst xmlns:a="http://schemas.openxmlformats.org/drawingml/2006/main">
               <a:ext uri="{FF2B5EF4-FFF2-40B4-BE49-F238E27FC236}">
-                <a16:creationId xmlns:a16="http://schemas.microsoft.com/office/drawing/2014/main" id="{09A1FA64-C6B0-49C7-ADAE-7BB6FAC255C9}"/>
+                <a16:creationId xmlns:a16="http://schemas.microsoft.com/office/drawing/2014/main" id="{DBC1374B-D9C8-49EC-B92A-FC49E4D668B9}"/>
               </a:ext>
             </a:extLst>
           </p:cNvPr>
@@ -4564,7 +4493,7 @@
     </p:spTree>
     <p:extLst>
       <p:ext uri="{BB962C8B-B14F-4D97-AF65-F5344CB8AC3E}">
-        <p14:creationId xmlns:p14="http://schemas.microsoft.com/office/powerpoint/2010/main" val="2138584723"/>
+        <p14:creationId xmlns:p14="http://schemas.microsoft.com/office/powerpoint/2010/main" val="967765964"/>
       </p:ext>
     </p:extLst>
   </p:cSld>
@@ -4595,7 +4524,7 @@
           <p:cNvPr id="33" name="accent-3">
             <a:extLst xmlns:a="http://schemas.openxmlformats.org/drawingml/2006/main">
               <a:ext uri="{FF2B5EF4-FFF2-40B4-BE49-F238E27FC236}">
-                <a16:creationId xmlns:a16="http://schemas.microsoft.com/office/drawing/2014/main" id="{9E64398B-93BC-4D55-8EB7-92CC502D6A6B}"/>
+                <a16:creationId xmlns:a16="http://schemas.microsoft.com/office/drawing/2014/main" id="{B6941013-46C3-477F-8E5D-D625800BC0F8}"/>
               </a:ext>
             </a:extLst>
           </p:cNvPr>
@@ -4630,7 +4559,7 @@
           <p:cNvPr id="2" name="title-3">
             <a:extLst xmlns:a="http://schemas.openxmlformats.org/drawingml/2006/main">
               <a:ext uri="{FF2B5EF4-FFF2-40B4-BE49-F238E27FC236}">
-                <a16:creationId xmlns:a16="http://schemas.microsoft.com/office/drawing/2014/main" id="{2D6C0DF1-3F08-47D8-8CB1-6C0D75A3CA1D}"/>
+                <a16:creationId xmlns:a16="http://schemas.microsoft.com/office/drawing/2014/main" id="{F2BE71B8-84C8-40BD-AE49-47A7604028DF}"/>
               </a:ext>
             </a:extLst>
           </p:cNvPr>
@@ -4688,7 +4617,7 @@
           <p:cNvPr id="3" name="page-3">
             <a:extLst xmlns:a="http://schemas.openxmlformats.org/drawingml/2006/main">
               <a:ext uri="{FF2B5EF4-FFF2-40B4-BE49-F238E27FC236}">
-                <a16:creationId xmlns:a16="http://schemas.microsoft.com/office/drawing/2014/main" id="{5087BCBD-EB8C-47DC-8EB5-CCC5CDF57513}"/>
+                <a16:creationId xmlns:a16="http://schemas.microsoft.com/office/drawing/2014/main" id="{CA15898F-CBFB-404E-BBB4-D6CBBB5FA352}"/>
               </a:ext>
             </a:extLst>
           </p:cNvPr>
@@ -4746,7 +4675,7 @@
           <p:cNvPr id="4" name="auto-text-15">
             <a:extLst xmlns:a="http://schemas.openxmlformats.org/drawingml/2006/main">
               <a:ext uri="{FF2B5EF4-FFF2-40B4-BE49-F238E27FC236}">
-                <a16:creationId xmlns:a16="http://schemas.microsoft.com/office/drawing/2014/main" id="{EBABA679-4DCF-4247-8BA2-BAE59EA4843A}"/>
+                <a16:creationId xmlns:a16="http://schemas.microsoft.com/office/drawing/2014/main" id="{252BBB51-4A5F-4B0D-904E-CFA897A56A63}"/>
               </a:ext>
             </a:extLst>
           </p:cNvPr>
@@ -4804,7 +4733,7 @@
           <p:cNvPr id="5" name="track-0">
             <a:extLst xmlns:a="http://schemas.openxmlformats.org/drawingml/2006/main">
               <a:ext uri="{FF2B5EF4-FFF2-40B4-BE49-F238E27FC236}">
-                <a16:creationId xmlns:a16="http://schemas.microsoft.com/office/drawing/2014/main" id="{C09E18B6-5C42-49AE-B778-2C091C038D82}"/>
+                <a16:creationId xmlns:a16="http://schemas.microsoft.com/office/drawing/2014/main" id="{6398A8C7-79FB-49D5-A5E0-8B3FF45C6DCC}"/>
               </a:ext>
             </a:extLst>
           </p:cNvPr>
@@ -4839,7 +4768,7 @@
           <p:cNvPr id="6" name="track-no-0">
             <a:extLst xmlns:a="http://schemas.openxmlformats.org/drawingml/2006/main">
               <a:ext uri="{FF2B5EF4-FFF2-40B4-BE49-F238E27FC236}">
-                <a16:creationId xmlns:a16="http://schemas.microsoft.com/office/drawing/2014/main" id="{D1C9D96C-1890-4617-AB70-583048ED27A6}"/>
+                <a16:creationId xmlns:a16="http://schemas.microsoft.com/office/drawing/2014/main" id="{1F868107-E089-4BF1-8C00-CBDE7996A8F8}"/>
               </a:ext>
             </a:extLst>
           </p:cNvPr>
@@ -4897,7 +4826,7 @@
           <p:cNvPr id="7" name="track-title-0">
             <a:extLst xmlns:a="http://schemas.openxmlformats.org/drawingml/2006/main">
               <a:ext uri="{FF2B5EF4-FFF2-40B4-BE49-F238E27FC236}">
-                <a16:creationId xmlns:a16="http://schemas.microsoft.com/office/drawing/2014/main" id="{DC58A933-E929-41F9-837C-FF618C1948EF}"/>
+                <a16:creationId xmlns:a16="http://schemas.microsoft.com/office/drawing/2014/main" id="{7E5D3886-DD66-40EE-9DD7-2870CAFB135A}"/>
               </a:ext>
             </a:extLst>
           </p:cNvPr>
@@ -4955,7 +4884,7 @@
           <p:cNvPr id="8" name="track-lead-0">
             <a:extLst xmlns:a="http://schemas.openxmlformats.org/drawingml/2006/main">
               <a:ext uri="{FF2B5EF4-FFF2-40B4-BE49-F238E27FC236}">
-                <a16:creationId xmlns:a16="http://schemas.microsoft.com/office/drawing/2014/main" id="{D41BE652-C262-45F1-811E-F10A5BD8CF8F}"/>
+                <a16:creationId xmlns:a16="http://schemas.microsoft.com/office/drawing/2014/main" id="{54CD255A-501F-403B-8A87-A09E9CC39554}"/>
               </a:ext>
             </a:extLst>
           </p:cNvPr>
@@ -5013,7 +4942,7 @@
           <p:cNvPr id="9" name="track-divider-0">
             <a:extLst xmlns:a="http://schemas.openxmlformats.org/drawingml/2006/main">
               <a:ext uri="{FF2B5EF4-FFF2-40B4-BE49-F238E27FC236}">
-                <a16:creationId xmlns:a16="http://schemas.microsoft.com/office/drawing/2014/main" id="{A8F5B42F-4862-4DC6-A697-554B323D7C0D}"/>
+                <a16:creationId xmlns:a16="http://schemas.microsoft.com/office/drawing/2014/main" id="{495F3C2C-F591-49DE-906D-A64D737390DD}"/>
               </a:ext>
             </a:extLst>
           </p:cNvPr>
@@ -5048,7 +4977,7 @@
           <p:cNvPr id="10" name="track-evidence-label-0">
             <a:extLst xmlns:a="http://schemas.openxmlformats.org/drawingml/2006/main">
               <a:ext uri="{FF2B5EF4-FFF2-40B4-BE49-F238E27FC236}">
-                <a16:creationId xmlns:a16="http://schemas.microsoft.com/office/drawing/2014/main" id="{004BAECE-C50E-4AA0-B11D-ACCC7FFE089D}"/>
+                <a16:creationId xmlns:a16="http://schemas.microsoft.com/office/drawing/2014/main" id="{96C8F2F7-958E-4E50-8A06-01E55E008E7F}"/>
               </a:ext>
             </a:extLst>
           </p:cNvPr>
@@ -5106,7 +5035,7 @@
           <p:cNvPr id="11" name="track-evidence-0">
             <a:extLst xmlns:a="http://schemas.openxmlformats.org/drawingml/2006/main">
               <a:ext uri="{FF2B5EF4-FFF2-40B4-BE49-F238E27FC236}">
-                <a16:creationId xmlns:a16="http://schemas.microsoft.com/office/drawing/2014/main" id="{5EAC2908-456E-4ABB-BF4D-65972C68B1D1}"/>
+                <a16:creationId xmlns:a16="http://schemas.microsoft.com/office/drawing/2014/main" id="{6AD30619-E241-4191-BBFF-B7C0507DBBF9}"/>
               </a:ext>
             </a:extLst>
           </p:cNvPr>
@@ -5164,7 +5093,7 @@
           <p:cNvPr id="12" name="track-signal-0">
             <a:extLst xmlns:a="http://schemas.openxmlformats.org/drawingml/2006/main">
               <a:ext uri="{FF2B5EF4-FFF2-40B4-BE49-F238E27FC236}">
-                <a16:creationId xmlns:a16="http://schemas.microsoft.com/office/drawing/2014/main" id="{4AC3C7FF-90A8-4D7F-81E9-C8F69C91CC6D}"/>
+                <a16:creationId xmlns:a16="http://schemas.microsoft.com/office/drawing/2014/main" id="{455D2960-83B2-452A-B1B0-BA7EE835F9D0}"/>
               </a:ext>
             </a:extLst>
           </p:cNvPr>
@@ -5222,7 +5151,7 @@
           <p:cNvPr id="13" name="track-1">
             <a:extLst xmlns:a="http://schemas.openxmlformats.org/drawingml/2006/main">
               <a:ext uri="{FF2B5EF4-FFF2-40B4-BE49-F238E27FC236}">
-                <a16:creationId xmlns:a16="http://schemas.microsoft.com/office/drawing/2014/main" id="{F3881286-DFF2-4ED8-B70B-4BA276DBB8F4}"/>
+                <a16:creationId xmlns:a16="http://schemas.microsoft.com/office/drawing/2014/main" id="{8FA1DA81-4B19-43DA-B5AA-8A5535C2A03E}"/>
               </a:ext>
             </a:extLst>
           </p:cNvPr>
@@ -5257,7 +5186,7 @@
           <p:cNvPr id="14" name="track-no-1">
             <a:extLst xmlns:a="http://schemas.openxmlformats.org/drawingml/2006/main">
               <a:ext uri="{FF2B5EF4-FFF2-40B4-BE49-F238E27FC236}">
-                <a16:creationId xmlns:a16="http://schemas.microsoft.com/office/drawing/2014/main" id="{0B631EFD-3AAD-45B2-8A81-3527FF249F49}"/>
+                <a16:creationId xmlns:a16="http://schemas.microsoft.com/office/drawing/2014/main" id="{8D75DFCE-72CC-42A7-9D3C-C8DB2BB0EC5C}"/>
               </a:ext>
             </a:extLst>
           </p:cNvPr>
@@ -5315,7 +5244,7 @@
           <p:cNvPr id="15" name="track-title-1">
             <a:extLst xmlns:a="http://schemas.openxmlformats.org/drawingml/2006/main">
               <a:ext uri="{FF2B5EF4-FFF2-40B4-BE49-F238E27FC236}">
-                <a16:creationId xmlns:a16="http://schemas.microsoft.com/office/drawing/2014/main" id="{0005F5DE-9601-46D6-9DFE-EBD19316923A}"/>
+                <a16:creationId xmlns:a16="http://schemas.microsoft.com/office/drawing/2014/main" id="{12A7E792-70C4-443E-A8C7-E6EE05F381DC}"/>
               </a:ext>
             </a:extLst>
           </p:cNvPr>
@@ -5373,7 +5302,7 @@
           <p:cNvPr id="16" name="track-lead-1">
             <a:extLst xmlns:a="http://schemas.openxmlformats.org/drawingml/2006/main">
               <a:ext uri="{FF2B5EF4-FFF2-40B4-BE49-F238E27FC236}">
-                <a16:creationId xmlns:a16="http://schemas.microsoft.com/office/drawing/2014/main" id="{383FA7A2-5307-4496-B6E7-1B4FD7F1D862}"/>
+                <a16:creationId xmlns:a16="http://schemas.microsoft.com/office/drawing/2014/main" id="{9AA5121B-611A-4576-BB9D-54F67765246D}"/>
               </a:ext>
             </a:extLst>
           </p:cNvPr>
@@ -5431,7 +5360,7 @@
           <p:cNvPr id="17" name="track-divider-1">
             <a:extLst xmlns:a="http://schemas.openxmlformats.org/drawingml/2006/main">
               <a:ext uri="{FF2B5EF4-FFF2-40B4-BE49-F238E27FC236}">
-                <a16:creationId xmlns:a16="http://schemas.microsoft.com/office/drawing/2014/main" id="{F06D91C3-E794-4894-9C76-8BF649F639C0}"/>
+                <a16:creationId xmlns:a16="http://schemas.microsoft.com/office/drawing/2014/main" id="{8B869F6D-49A9-4174-89FA-F100D3460A7C}"/>
               </a:ext>
             </a:extLst>
           </p:cNvPr>
@@ -5466,7 +5395,7 @@
           <p:cNvPr id="18" name="track-evidence-label-1">
             <a:extLst xmlns:a="http://schemas.openxmlformats.org/drawingml/2006/main">
               <a:ext uri="{FF2B5EF4-FFF2-40B4-BE49-F238E27FC236}">
-                <a16:creationId xmlns:a16="http://schemas.microsoft.com/office/drawing/2014/main" id="{ABABC629-FF21-43CB-B3A8-C856D5F43998}"/>
+                <a16:creationId xmlns:a16="http://schemas.microsoft.com/office/drawing/2014/main" id="{22A82857-17F0-44C5-904E-B392A136C6FC}"/>
               </a:ext>
             </a:extLst>
           </p:cNvPr>
@@ -5524,7 +5453,7 @@
           <p:cNvPr id="19" name="track-evidence-1">
             <a:extLst xmlns:a="http://schemas.openxmlformats.org/drawingml/2006/main">
               <a:ext uri="{FF2B5EF4-FFF2-40B4-BE49-F238E27FC236}">
-                <a16:creationId xmlns:a16="http://schemas.microsoft.com/office/drawing/2014/main" id="{C9DDE856-12BD-42B0-A330-501711587000}"/>
+                <a16:creationId xmlns:a16="http://schemas.microsoft.com/office/drawing/2014/main" id="{8FEFB643-914A-4EB6-B605-147DECFC4A4B}"/>
               </a:ext>
             </a:extLst>
           </p:cNvPr>
@@ -5582,7 +5511,7 @@
           <p:cNvPr id="20" name="track-signal-1">
             <a:extLst xmlns:a="http://schemas.openxmlformats.org/drawingml/2006/main">
               <a:ext uri="{FF2B5EF4-FFF2-40B4-BE49-F238E27FC236}">
-                <a16:creationId xmlns:a16="http://schemas.microsoft.com/office/drawing/2014/main" id="{626828E2-BD6C-4A28-A722-C5B3FCF13F93}"/>
+                <a16:creationId xmlns:a16="http://schemas.microsoft.com/office/drawing/2014/main" id="{7CFA471F-42B2-4451-AFB5-24C69412331B}"/>
               </a:ext>
             </a:extLst>
           </p:cNvPr>
@@ -5640,7 +5569,7 @@
           <p:cNvPr id="21" name="track-2">
             <a:extLst xmlns:a="http://schemas.openxmlformats.org/drawingml/2006/main">
               <a:ext uri="{FF2B5EF4-FFF2-40B4-BE49-F238E27FC236}">
-                <a16:creationId xmlns:a16="http://schemas.microsoft.com/office/drawing/2014/main" id="{B6F85723-20BD-4626-8A10-07FBAEC9E872}"/>
+                <a16:creationId xmlns:a16="http://schemas.microsoft.com/office/drawing/2014/main" id="{7CC68896-D1BF-417C-809A-046A90017CEE}"/>
               </a:ext>
             </a:extLst>
           </p:cNvPr>
@@ -5675,7 +5604,7 @@
           <p:cNvPr id="22" name="track-no-2">
             <a:extLst xmlns:a="http://schemas.openxmlformats.org/drawingml/2006/main">
               <a:ext uri="{FF2B5EF4-FFF2-40B4-BE49-F238E27FC236}">
-                <a16:creationId xmlns:a16="http://schemas.microsoft.com/office/drawing/2014/main" id="{C77E9B07-E11F-4A3B-A418-F50083C3D081}"/>
+                <a16:creationId xmlns:a16="http://schemas.microsoft.com/office/drawing/2014/main" id="{B0E6DF52-3832-4A3E-A033-00BB9E36AD20}"/>
               </a:ext>
             </a:extLst>
           </p:cNvPr>
@@ -5733,7 +5662,7 @@
           <p:cNvPr id="23" name="track-title-2">
             <a:extLst xmlns:a="http://schemas.openxmlformats.org/drawingml/2006/main">
               <a:ext uri="{FF2B5EF4-FFF2-40B4-BE49-F238E27FC236}">
-                <a16:creationId xmlns:a16="http://schemas.microsoft.com/office/drawing/2014/main" id="{65674DED-ED1C-4F75-977A-70F5F01A96F9}"/>
+                <a16:creationId xmlns:a16="http://schemas.microsoft.com/office/drawing/2014/main" id="{609DA1D6-10A6-4C8C-9ED7-17DE3F48F433}"/>
               </a:ext>
             </a:extLst>
           </p:cNvPr>
@@ -5791,7 +5720,7 @@
           <p:cNvPr id="24" name="track-lead-2">
             <a:extLst xmlns:a="http://schemas.openxmlformats.org/drawingml/2006/main">
               <a:ext uri="{FF2B5EF4-FFF2-40B4-BE49-F238E27FC236}">
-                <a16:creationId xmlns:a16="http://schemas.microsoft.com/office/drawing/2014/main" id="{F827189C-2EA4-425F-96C1-BCA720CBE462}"/>
+                <a16:creationId xmlns:a16="http://schemas.microsoft.com/office/drawing/2014/main" id="{8C99CC6C-01F3-406B-A3A5-8FDDEE7969E4}"/>
               </a:ext>
             </a:extLst>
           </p:cNvPr>
@@ -5849,7 +5778,7 @@
           <p:cNvPr id="25" name="track-divider-2">
             <a:extLst xmlns:a="http://schemas.openxmlformats.org/drawingml/2006/main">
               <a:ext uri="{FF2B5EF4-FFF2-40B4-BE49-F238E27FC236}">
-                <a16:creationId xmlns:a16="http://schemas.microsoft.com/office/drawing/2014/main" id="{772797F2-E611-4DAE-BFCB-0257AE161E5E}"/>
+                <a16:creationId xmlns:a16="http://schemas.microsoft.com/office/drawing/2014/main" id="{CE4894D4-371F-47D2-9C02-BA5C8CEAAF19}"/>
               </a:ext>
             </a:extLst>
           </p:cNvPr>
@@ -5884,7 +5813,7 @@
           <p:cNvPr id="26" name="track-evidence-label-2">
             <a:extLst xmlns:a="http://schemas.openxmlformats.org/drawingml/2006/main">
               <a:ext uri="{FF2B5EF4-FFF2-40B4-BE49-F238E27FC236}">
-                <a16:creationId xmlns:a16="http://schemas.microsoft.com/office/drawing/2014/main" id="{A0C4B789-D667-4411-AA03-F3FE09335008}"/>
+                <a16:creationId xmlns:a16="http://schemas.microsoft.com/office/drawing/2014/main" id="{034CD633-6652-4F18-A84A-FA55D1581D91}"/>
               </a:ext>
             </a:extLst>
           </p:cNvPr>
@@ -5942,7 +5871,7 @@
           <p:cNvPr id="27" name="track-evidence-2">
             <a:extLst xmlns:a="http://schemas.openxmlformats.org/drawingml/2006/main">
               <a:ext uri="{FF2B5EF4-FFF2-40B4-BE49-F238E27FC236}">
-                <a16:creationId xmlns:a16="http://schemas.microsoft.com/office/drawing/2014/main" id="{D3C433BB-264E-4448-BB12-158FE4B32450}"/>
+                <a16:creationId xmlns:a16="http://schemas.microsoft.com/office/drawing/2014/main" id="{5DEA99E1-A642-4781-9157-672488110741}"/>
               </a:ext>
             </a:extLst>
           </p:cNvPr>
@@ -6000,7 +5929,7 @@
           <p:cNvPr id="28" name="track-signal-2">
             <a:extLst xmlns:a="http://schemas.openxmlformats.org/drawingml/2006/main">
               <a:ext uri="{FF2B5EF4-FFF2-40B4-BE49-F238E27FC236}">
-                <a16:creationId xmlns:a16="http://schemas.microsoft.com/office/drawing/2014/main" id="{8D4CB693-7DE0-410F-8973-8A119F98C1C6}"/>
+                <a16:creationId xmlns:a16="http://schemas.microsoft.com/office/drawing/2014/main" id="{F27396BF-650F-4086-9F54-6B35C10FF7B4}"/>
               </a:ext>
             </a:extLst>
           </p:cNvPr>
@@ -6058,7 +5987,7 @@
           <p:cNvPr id="29" name="research-conclusion">
             <a:extLst xmlns:a="http://schemas.openxmlformats.org/drawingml/2006/main">
               <a:ext uri="{FF2B5EF4-FFF2-40B4-BE49-F238E27FC236}">
-                <a16:creationId xmlns:a16="http://schemas.microsoft.com/office/drawing/2014/main" id="{C9F75DEF-64F4-4B59-8325-514EF012F178}"/>
+                <a16:creationId xmlns:a16="http://schemas.microsoft.com/office/drawing/2014/main" id="{B8E58402-5DF8-4EEA-B653-84BDF65381EA}"/>
               </a:ext>
             </a:extLst>
           </p:cNvPr>
@@ -6093,7 +6022,7 @@
           <p:cNvPr id="30" name="auto-text-16">
             <a:extLst xmlns:a="http://schemas.openxmlformats.org/drawingml/2006/main">
               <a:ext uri="{FF2B5EF4-FFF2-40B4-BE49-F238E27FC236}">
-                <a16:creationId xmlns:a16="http://schemas.microsoft.com/office/drawing/2014/main" id="{9F1E2C7A-BD7F-48DF-A8A6-23DD41CC1977}"/>
+                <a16:creationId xmlns:a16="http://schemas.microsoft.com/office/drawing/2014/main" id="{7BD3A092-FB24-49DE-BF74-A4400A55BE5F}"/>
               </a:ext>
             </a:extLst>
           </p:cNvPr>
@@ -6151,7 +6080,7 @@
           <p:cNvPr id="31" name="auto-text-17">
             <a:extLst xmlns:a="http://schemas.openxmlformats.org/drawingml/2006/main">
               <a:ext uri="{FF2B5EF4-FFF2-40B4-BE49-F238E27FC236}">
-                <a16:creationId xmlns:a16="http://schemas.microsoft.com/office/drawing/2014/main" id="{B809FDEE-B03B-4549-BB9D-C30070D0A056}"/>
+                <a16:creationId xmlns:a16="http://schemas.microsoft.com/office/drawing/2014/main" id="{E7594B1F-EA7F-465D-B5FD-3DAEC0397991}"/>
               </a:ext>
             </a:extLst>
           </p:cNvPr>
@@ -6206,10 +6135,10 @@
       </p:sp>
       <p:sp>
         <p:nvSpPr>
-          <p:cNvPr id="32" name="source-650-0.10995500117001122">
-            <a:extLst xmlns:a="http://schemas.openxmlformats.org/drawingml/2006/main">
-              <a:ext uri="{FF2B5EF4-FFF2-40B4-BE49-F238E27FC236}">
-                <a16:creationId xmlns:a16="http://schemas.microsoft.com/office/drawing/2014/main" id="{10D95A6F-D905-42DD-8EE2-9CB626938E8C}"/>
+          <p:cNvPr id="32" name="source-650-0.9949618410014753">
+            <a:extLst xmlns:a="http://schemas.openxmlformats.org/drawingml/2006/main">
+              <a:ext uri="{FF2B5EF4-FFF2-40B4-BE49-F238E27FC236}">
+                <a16:creationId xmlns:a16="http://schemas.microsoft.com/office/drawing/2014/main" id="{782F995E-5684-4AEC-BC80-99D36F2A7995}"/>
               </a:ext>
             </a:extLst>
           </p:cNvPr>
@@ -6265,7 +6194,7 @@
     </p:spTree>
     <p:extLst>
       <p:ext uri="{BB962C8B-B14F-4D97-AF65-F5344CB8AC3E}">
-        <p14:creationId xmlns:p14="http://schemas.microsoft.com/office/powerpoint/2010/main" val="1122536046"/>
+        <p14:creationId xmlns:p14="http://schemas.microsoft.com/office/powerpoint/2010/main" val="721660966"/>
       </p:ext>
     </p:extLst>
   </p:cSld>
@@ -6296,7 +6225,7 @@
           <p:cNvPr id="28" name="accent-4">
             <a:extLst xmlns:a="http://schemas.openxmlformats.org/drawingml/2006/main">
               <a:ext uri="{FF2B5EF4-FFF2-40B4-BE49-F238E27FC236}">
-                <a16:creationId xmlns:a16="http://schemas.microsoft.com/office/drawing/2014/main" id="{853DA1DD-5DB3-4175-B460-35D1933EF4B9}"/>
+                <a16:creationId xmlns:a16="http://schemas.microsoft.com/office/drawing/2014/main" id="{EBC5CB2B-AF5C-43E0-B182-9643E8633D33}"/>
               </a:ext>
             </a:extLst>
           </p:cNvPr>
@@ -6331,7 +6260,7 @@
           <p:cNvPr id="2" name="title-4">
             <a:extLst xmlns:a="http://schemas.openxmlformats.org/drawingml/2006/main">
               <a:ext uri="{FF2B5EF4-FFF2-40B4-BE49-F238E27FC236}">
-                <a16:creationId xmlns:a16="http://schemas.microsoft.com/office/drawing/2014/main" id="{F96CD90E-690C-413A-99AE-773F44EDED66}"/>
+                <a16:creationId xmlns:a16="http://schemas.microsoft.com/office/drawing/2014/main" id="{491CF828-4829-41B7-AEB5-71ECAC8B68AF}"/>
               </a:ext>
             </a:extLst>
           </p:cNvPr>
@@ -6389,7 +6318,7 @@
           <p:cNvPr id="3" name="page-4">
             <a:extLst xmlns:a="http://schemas.openxmlformats.org/drawingml/2006/main">
               <a:ext uri="{FF2B5EF4-FFF2-40B4-BE49-F238E27FC236}">
-                <a16:creationId xmlns:a16="http://schemas.microsoft.com/office/drawing/2014/main" id="{FACCE44B-02C1-46AF-9274-6477663549E4}"/>
+                <a16:creationId xmlns:a16="http://schemas.microsoft.com/office/drawing/2014/main" id="{2668C037-D015-43E7-B3BD-7FB352753140}"/>
               </a:ext>
             </a:extLst>
           </p:cNvPr>
@@ -6447,7 +6376,7 @@
           <p:cNvPr id="4" name="auto-text-18">
             <a:extLst xmlns:a="http://schemas.openxmlformats.org/drawingml/2006/main">
               <a:ext uri="{FF2B5EF4-FFF2-40B4-BE49-F238E27FC236}">
-                <a16:creationId xmlns:a16="http://schemas.microsoft.com/office/drawing/2014/main" id="{035C6D54-C2BC-4FF5-8649-CC7FC1DA2B62}"/>
+                <a16:creationId xmlns:a16="http://schemas.microsoft.com/office/drawing/2014/main" id="{088E5528-1BBC-44E4-9416-8F5FF3B91DB3}"/>
               </a:ext>
             </a:extLst>
           </p:cNvPr>
@@ -6505,7 +6434,7 @@
           <p:cNvPr id="5" name="auto-text-19">
             <a:extLst xmlns:a="http://schemas.openxmlformats.org/drawingml/2006/main">
               <a:ext uri="{FF2B5EF4-FFF2-40B4-BE49-F238E27FC236}">
-                <a16:creationId xmlns:a16="http://schemas.microsoft.com/office/drawing/2014/main" id="{4AF55766-16A0-47DB-B0D6-7B3A9E943A53}"/>
+                <a16:creationId xmlns:a16="http://schemas.microsoft.com/office/drawing/2014/main" id="{BFAFA318-6CB5-454D-80A7-F27755FDCE48}"/>
               </a:ext>
             </a:extLst>
           </p:cNvPr>
@@ -6563,7 +6492,7 @@
           <p:cNvPr id="6" name="auto-text-20">
             <a:extLst xmlns:a="http://schemas.openxmlformats.org/drawingml/2006/main">
               <a:ext uri="{FF2B5EF4-FFF2-40B4-BE49-F238E27FC236}">
-                <a16:creationId xmlns:a16="http://schemas.microsoft.com/office/drawing/2014/main" id="{8AA96BB6-E416-44DE-94BE-031ED5567632}"/>
+                <a16:creationId xmlns:a16="http://schemas.microsoft.com/office/drawing/2014/main" id="{77BF4683-E6B5-4BA0-AECE-9D7F848CE45D}"/>
               </a:ext>
             </a:extLst>
           </p:cNvPr>
@@ -6621,7 +6550,7 @@
           <p:cNvPr id="7" name="auto-text-21">
             <a:extLst xmlns:a="http://schemas.openxmlformats.org/drawingml/2006/main">
               <a:ext uri="{FF2B5EF4-FFF2-40B4-BE49-F238E27FC236}">
-                <a16:creationId xmlns:a16="http://schemas.microsoft.com/office/drawing/2014/main" id="{4EA72525-C8AE-4C28-B8EF-2E055DC153A0}"/>
+                <a16:creationId xmlns:a16="http://schemas.microsoft.com/office/drawing/2014/main" id="{4F11196A-B1E3-4295-8B22-35BA31FBE265}"/>
               </a:ext>
             </a:extLst>
           </p:cNvPr>
@@ -6679,7 +6608,7 @@
           <p:cNvPr id="8" name="company-row-0">
             <a:extLst xmlns:a="http://schemas.openxmlformats.org/drawingml/2006/main">
               <a:ext uri="{FF2B5EF4-FFF2-40B4-BE49-F238E27FC236}">
-                <a16:creationId xmlns:a16="http://schemas.microsoft.com/office/drawing/2014/main" id="{0971BFF8-0BC4-4DB5-9F8E-B2826426A7EE}"/>
+                <a16:creationId xmlns:a16="http://schemas.microsoft.com/office/drawing/2014/main" id="{E7611890-ACA6-41B4-BFA5-3106866BB278}"/>
               </a:ext>
             </a:extLst>
           </p:cNvPr>
@@ -6714,7 +6643,7 @@
           <p:cNvPr id="9" name="company-name-0">
             <a:extLst xmlns:a="http://schemas.openxmlformats.org/drawingml/2006/main">
               <a:ext uri="{FF2B5EF4-FFF2-40B4-BE49-F238E27FC236}">
-                <a16:creationId xmlns:a16="http://schemas.microsoft.com/office/drawing/2014/main" id="{E85E1298-A05B-4F5D-BF2D-C44BC25EECF9}"/>
+                <a16:creationId xmlns:a16="http://schemas.microsoft.com/office/drawing/2014/main" id="{89352C2B-F13B-4F67-8B57-12EB97687240}"/>
               </a:ext>
             </a:extLst>
           </p:cNvPr>
@@ -6772,7 +6701,7 @@
           <p:cNvPr id="10" name="company-body-0">
             <a:extLst xmlns:a="http://schemas.openxmlformats.org/drawingml/2006/main">
               <a:ext uri="{FF2B5EF4-FFF2-40B4-BE49-F238E27FC236}">
-                <a16:creationId xmlns:a16="http://schemas.microsoft.com/office/drawing/2014/main" id="{2F23FF16-FB34-4A51-AD83-2DE93AB1A9EF}"/>
+                <a16:creationId xmlns:a16="http://schemas.microsoft.com/office/drawing/2014/main" id="{DC2ECC01-F08D-49BC-BF62-2AD4FA19D920}"/>
               </a:ext>
             </a:extLst>
           </p:cNvPr>
@@ -6830,7 +6759,7 @@
           <p:cNvPr id="11" name="company-tag-0">
             <a:extLst xmlns:a="http://schemas.openxmlformats.org/drawingml/2006/main">
               <a:ext uri="{FF2B5EF4-FFF2-40B4-BE49-F238E27FC236}">
-                <a16:creationId xmlns:a16="http://schemas.microsoft.com/office/drawing/2014/main" id="{3C5055C7-1698-40AD-879D-2A82AC194CA5}"/>
+                <a16:creationId xmlns:a16="http://schemas.microsoft.com/office/drawing/2014/main" id="{CAE93206-F601-44C3-BADB-AE0DEC652F81}"/>
               </a:ext>
             </a:extLst>
           </p:cNvPr>
@@ -6888,7 +6817,7 @@
           <p:cNvPr id="12" name="company-row-1">
             <a:extLst xmlns:a="http://schemas.openxmlformats.org/drawingml/2006/main">
               <a:ext uri="{FF2B5EF4-FFF2-40B4-BE49-F238E27FC236}">
-                <a16:creationId xmlns:a16="http://schemas.microsoft.com/office/drawing/2014/main" id="{4FAA1C3A-F2C6-47A9-98AD-07F4E8CB5CA9}"/>
+                <a16:creationId xmlns:a16="http://schemas.microsoft.com/office/drawing/2014/main" id="{CD0F52CC-B5E5-4714-98FA-C98345A66576}"/>
               </a:ext>
             </a:extLst>
           </p:cNvPr>
@@ -6923,7 +6852,7 @@
           <p:cNvPr id="13" name="company-name-1">
             <a:extLst xmlns:a="http://schemas.openxmlformats.org/drawingml/2006/main">
               <a:ext uri="{FF2B5EF4-FFF2-40B4-BE49-F238E27FC236}">
-                <a16:creationId xmlns:a16="http://schemas.microsoft.com/office/drawing/2014/main" id="{1CB6402E-90D5-4537-8279-B1F166D11DEC}"/>
+                <a16:creationId xmlns:a16="http://schemas.microsoft.com/office/drawing/2014/main" id="{012E1FAB-D3BF-46ED-82EF-28913DCEE045}"/>
               </a:ext>
             </a:extLst>
           </p:cNvPr>
@@ -6981,7 +6910,7 @@
           <p:cNvPr id="14" name="company-body-1">
             <a:extLst xmlns:a="http://schemas.openxmlformats.org/drawingml/2006/main">
               <a:ext uri="{FF2B5EF4-FFF2-40B4-BE49-F238E27FC236}">
-                <a16:creationId xmlns:a16="http://schemas.microsoft.com/office/drawing/2014/main" id="{72BF7FE3-9189-429F-8885-D83EFEA6128B}"/>
+                <a16:creationId xmlns:a16="http://schemas.microsoft.com/office/drawing/2014/main" id="{8F8AB7C6-84A0-49CE-996E-B8F48F82F09B}"/>
               </a:ext>
             </a:extLst>
           </p:cNvPr>
@@ -7039,7 +6968,7 @@
           <p:cNvPr id="15" name="company-tag-1">
             <a:extLst xmlns:a="http://schemas.openxmlformats.org/drawingml/2006/main">
               <a:ext uri="{FF2B5EF4-FFF2-40B4-BE49-F238E27FC236}">
-                <a16:creationId xmlns:a16="http://schemas.microsoft.com/office/drawing/2014/main" id="{2972AB90-FB19-4FFB-841C-731D33E026E2}"/>
+                <a16:creationId xmlns:a16="http://schemas.microsoft.com/office/drawing/2014/main" id="{BC2DC7C1-5895-4AB0-8198-AC0A49DC3813}"/>
               </a:ext>
             </a:extLst>
           </p:cNvPr>
@@ -7097,7 +7026,7 @@
           <p:cNvPr id="16" name="company-row-2">
             <a:extLst xmlns:a="http://schemas.openxmlformats.org/drawingml/2006/main">
               <a:ext uri="{FF2B5EF4-FFF2-40B4-BE49-F238E27FC236}">
-                <a16:creationId xmlns:a16="http://schemas.microsoft.com/office/drawing/2014/main" id="{D97403A7-6D60-4C3E-A16B-82079FC4A73F}"/>
+                <a16:creationId xmlns:a16="http://schemas.microsoft.com/office/drawing/2014/main" id="{4E661D3D-07B8-4350-ADDC-6B8CE7C6AE66}"/>
               </a:ext>
             </a:extLst>
           </p:cNvPr>
@@ -7132,7 +7061,7 @@
           <p:cNvPr id="17" name="company-name-2">
             <a:extLst xmlns:a="http://schemas.openxmlformats.org/drawingml/2006/main">
               <a:ext uri="{FF2B5EF4-FFF2-40B4-BE49-F238E27FC236}">
-                <a16:creationId xmlns:a16="http://schemas.microsoft.com/office/drawing/2014/main" id="{98915046-A431-4A8C-9172-E35B4FE0955A}"/>
+                <a16:creationId xmlns:a16="http://schemas.microsoft.com/office/drawing/2014/main" id="{F3C22F4D-282A-4D80-B652-83D4056F9414}"/>
               </a:ext>
             </a:extLst>
           </p:cNvPr>
@@ -7190,7 +7119,7 @@
           <p:cNvPr id="18" name="company-body-2">
             <a:extLst xmlns:a="http://schemas.openxmlformats.org/drawingml/2006/main">
               <a:ext uri="{FF2B5EF4-FFF2-40B4-BE49-F238E27FC236}">
-                <a16:creationId xmlns:a16="http://schemas.microsoft.com/office/drawing/2014/main" id="{1016E8CE-1CAF-4498-8280-4844F1028264}"/>
+                <a16:creationId xmlns:a16="http://schemas.microsoft.com/office/drawing/2014/main" id="{D1927DAA-FB6B-4B2E-9C9C-A7A9401AE698}"/>
               </a:ext>
             </a:extLst>
           </p:cNvPr>
@@ -7248,7 +7177,7 @@
           <p:cNvPr id="19" name="company-tag-2">
             <a:extLst xmlns:a="http://schemas.openxmlformats.org/drawingml/2006/main">
               <a:ext uri="{FF2B5EF4-FFF2-40B4-BE49-F238E27FC236}">
-                <a16:creationId xmlns:a16="http://schemas.microsoft.com/office/drawing/2014/main" id="{0FEE3420-36D2-4C07-847A-B3A7A4D8AC12}"/>
+                <a16:creationId xmlns:a16="http://schemas.microsoft.com/office/drawing/2014/main" id="{8B4A5D16-0C80-473B-94F4-E515B51FBD37}"/>
               </a:ext>
             </a:extLst>
           </p:cNvPr>
@@ -7306,7 +7235,7 @@
           <p:cNvPr id="20" name="company-row-3">
             <a:extLst xmlns:a="http://schemas.openxmlformats.org/drawingml/2006/main">
               <a:ext uri="{FF2B5EF4-FFF2-40B4-BE49-F238E27FC236}">
-                <a16:creationId xmlns:a16="http://schemas.microsoft.com/office/drawing/2014/main" id="{D1DB1A1D-A138-4605-BB33-0F70ADFD86E2}"/>
+                <a16:creationId xmlns:a16="http://schemas.microsoft.com/office/drawing/2014/main" id="{C28142B6-6F45-47D6-B9B5-1449F70C2D0D}"/>
               </a:ext>
             </a:extLst>
           </p:cNvPr>
@@ -7341,7 +7270,7 @@
           <p:cNvPr id="21" name="company-name-3">
             <a:extLst xmlns:a="http://schemas.openxmlformats.org/drawingml/2006/main">
               <a:ext uri="{FF2B5EF4-FFF2-40B4-BE49-F238E27FC236}">
-                <a16:creationId xmlns:a16="http://schemas.microsoft.com/office/drawing/2014/main" id="{BB3960C6-EF42-4DED-B85B-DCD64A3A4A38}"/>
+                <a16:creationId xmlns:a16="http://schemas.microsoft.com/office/drawing/2014/main" id="{605BCE7D-08FF-4375-94D0-6EC289BD87DF}"/>
               </a:ext>
             </a:extLst>
           </p:cNvPr>
@@ -7399,7 +7328,7 @@
           <p:cNvPr id="22" name="company-body-3">
             <a:extLst xmlns:a="http://schemas.openxmlformats.org/drawingml/2006/main">
               <a:ext uri="{FF2B5EF4-FFF2-40B4-BE49-F238E27FC236}">
-                <a16:creationId xmlns:a16="http://schemas.microsoft.com/office/drawing/2014/main" id="{65A33F45-CD9D-4093-BECC-C28C654D894E}"/>
+                <a16:creationId xmlns:a16="http://schemas.microsoft.com/office/drawing/2014/main" id="{5645D030-B300-4543-B866-42D95ED85790}"/>
               </a:ext>
             </a:extLst>
           </p:cNvPr>
@@ -7457,7 +7386,7 @@
           <p:cNvPr id="23" name="company-tag-3">
             <a:extLst xmlns:a="http://schemas.openxmlformats.org/drawingml/2006/main">
               <a:ext uri="{FF2B5EF4-FFF2-40B4-BE49-F238E27FC236}">
-                <a16:creationId xmlns:a16="http://schemas.microsoft.com/office/drawing/2014/main" id="{F852DDAB-1987-40FB-B870-CD43BC231688}"/>
+                <a16:creationId xmlns:a16="http://schemas.microsoft.com/office/drawing/2014/main" id="{126C9D86-5C4A-423A-8F8A-64283A06B3BC}"/>
               </a:ext>
             </a:extLst>
           </p:cNvPr>
@@ -7515,7 +7444,7 @@
           <p:cNvPr id="24" name="company-conclusion">
             <a:extLst xmlns:a="http://schemas.openxmlformats.org/drawingml/2006/main">
               <a:ext uri="{FF2B5EF4-FFF2-40B4-BE49-F238E27FC236}">
-                <a16:creationId xmlns:a16="http://schemas.microsoft.com/office/drawing/2014/main" id="{17459817-4AE6-4E9C-AFCB-D687C6278DDD}"/>
+                <a16:creationId xmlns:a16="http://schemas.microsoft.com/office/drawing/2014/main" id="{85371D0C-3110-4F0D-94F5-BF3D3DB92550}"/>
               </a:ext>
             </a:extLst>
           </p:cNvPr>
@@ -7550,7 +7479,7 @@
           <p:cNvPr id="25" name="auto-text-22">
             <a:extLst xmlns:a="http://schemas.openxmlformats.org/drawingml/2006/main">
               <a:ext uri="{FF2B5EF4-FFF2-40B4-BE49-F238E27FC236}">
-                <a16:creationId xmlns:a16="http://schemas.microsoft.com/office/drawing/2014/main" id="{2965CD7A-87F5-4C6D-A6C0-21E272FF4A96}"/>
+                <a16:creationId xmlns:a16="http://schemas.microsoft.com/office/drawing/2014/main" id="{BD51EBA6-27C8-4041-9C7C-8947EE73886A}"/>
               </a:ext>
             </a:extLst>
           </p:cNvPr>
@@ -7608,7 +7537,7 @@
           <p:cNvPr id="26" name="auto-text-23">
             <a:extLst xmlns:a="http://schemas.openxmlformats.org/drawingml/2006/main">
               <a:ext uri="{FF2B5EF4-FFF2-40B4-BE49-F238E27FC236}">
-                <a16:creationId xmlns:a16="http://schemas.microsoft.com/office/drawing/2014/main" id="{0DD1F947-DF0E-4210-953E-E39B4DD64494}"/>
+                <a16:creationId xmlns:a16="http://schemas.microsoft.com/office/drawing/2014/main" id="{F91F839B-CF79-4361-8437-DBAF457FDA18}"/>
               </a:ext>
             </a:extLst>
           </p:cNvPr>
@@ -7663,10 +7592,10 @@
       </p:sp>
       <p:sp>
         <p:nvSpPr>
-          <p:cNvPr id="27" name="source-650-0.8494237009190406">
-            <a:extLst xmlns:a="http://schemas.openxmlformats.org/drawingml/2006/main">
-              <a:ext uri="{FF2B5EF4-FFF2-40B4-BE49-F238E27FC236}">
-                <a16:creationId xmlns:a16="http://schemas.microsoft.com/office/drawing/2014/main" id="{CC4E280C-39ED-4409-8888-EA3788FC8A8C}"/>
+          <p:cNvPr id="27" name="source-650-0.7902498349186582">
+            <a:extLst xmlns:a="http://schemas.openxmlformats.org/drawingml/2006/main">
+              <a:ext uri="{FF2B5EF4-FFF2-40B4-BE49-F238E27FC236}">
+                <a16:creationId xmlns:a16="http://schemas.microsoft.com/office/drawing/2014/main" id="{9D6AEC30-90A0-46E5-B7FF-2542C7C09BA3}"/>
               </a:ext>
             </a:extLst>
           </p:cNvPr>
@@ -7722,7 +7651,7 @@
     </p:spTree>
     <p:extLst>
       <p:ext uri="{BB962C8B-B14F-4D97-AF65-F5344CB8AC3E}">
-        <p14:creationId xmlns:p14="http://schemas.microsoft.com/office/powerpoint/2010/main" val="1532199214"/>
+        <p14:creationId xmlns:p14="http://schemas.microsoft.com/office/powerpoint/2010/main" val="290815881"/>
       </p:ext>
     </p:extLst>
   </p:cSld>
@@ -7750,10 +7679,10 @@
       </p:grpSpPr>
       <p:sp>
         <p:nvSpPr>
-          <p:cNvPr id="30" name="accent-5">
-            <a:extLst xmlns:a="http://schemas.openxmlformats.org/drawingml/2006/main">
-              <a:ext uri="{FF2B5EF4-FFF2-40B4-BE49-F238E27FC236}">
-                <a16:creationId xmlns:a16="http://schemas.microsoft.com/office/drawing/2014/main" id="{78F62BA9-BF29-45F4-A9D3-506E197D308C}"/>
+          <p:cNvPr id="33" name="accent-5">
+            <a:extLst xmlns:a="http://schemas.openxmlformats.org/drawingml/2006/main">
+              <a:ext uri="{FF2B5EF4-FFF2-40B4-BE49-F238E27FC236}">
+                <a16:creationId xmlns:a16="http://schemas.microsoft.com/office/drawing/2014/main" id="{B3E3BA5E-0989-4D7A-A92C-6BFDB8C92018}"/>
               </a:ext>
             </a:extLst>
           </p:cNvPr>
@@ -7788,7 +7717,7 @@
           <p:cNvPr id="2" name="title-5">
             <a:extLst xmlns:a="http://schemas.openxmlformats.org/drawingml/2006/main">
               <a:ext uri="{FF2B5EF4-FFF2-40B4-BE49-F238E27FC236}">
-                <a16:creationId xmlns:a16="http://schemas.microsoft.com/office/drawing/2014/main" id="{581499D9-284A-4C04-AA38-461332EDCE7C}"/>
+                <a16:creationId xmlns:a16="http://schemas.microsoft.com/office/drawing/2014/main" id="{84D0602B-CE12-482A-96C4-96E8F7924F18}"/>
               </a:ext>
             </a:extLst>
           </p:cNvPr>
@@ -7836,7 +7765,7 @@
                 <a:ea typeface="Microsoft YaHei"/>
                 <a:cs typeface="Microsoft YaHei"/>
               </a:rPr>
-              <a:t>合作项目研究的是上层评估机制，而非单一VLM Judge</a:t>
+              <a:t>项目将多源评估器组合为任务自适应质量能力</a:t>
             </a:r>
           </a:p>
         </p:txBody>
@@ -7846,7 +7775,7 @@
           <p:cNvPr id="3" name="page-5">
             <a:extLst xmlns:a="http://schemas.openxmlformats.org/drawingml/2006/main">
               <a:ext uri="{FF2B5EF4-FFF2-40B4-BE49-F238E27FC236}">
-                <a16:creationId xmlns:a16="http://schemas.microsoft.com/office/drawing/2014/main" id="{7D11C190-2933-4FAD-866D-4E1ED9C44A51}"/>
+                <a16:creationId xmlns:a16="http://schemas.microsoft.com/office/drawing/2014/main" id="{30480D74-C7DA-49D8-B0D8-0C04C3A17D06}"/>
               </a:ext>
             </a:extLst>
           </p:cNvPr>
@@ -7904,7 +7833,7 @@
           <p:cNvPr id="4" name="auto-text-24">
             <a:extLst xmlns:a="http://schemas.openxmlformats.org/drawingml/2006/main">
               <a:ext uri="{FF2B5EF4-FFF2-40B4-BE49-F238E27FC236}">
-                <a16:creationId xmlns:a16="http://schemas.microsoft.com/office/drawing/2014/main" id="{DF32CBD4-E653-49DD-AFA3-623298E110CC}"/>
+                <a16:creationId xmlns:a16="http://schemas.microsoft.com/office/drawing/2014/main" id="{0378314D-BA51-4E66-8A23-58E04F19BE7B}"/>
               </a:ext>
             </a:extLst>
           </p:cNvPr>
@@ -7952,17 +7881,17 @@
                 <a:ea typeface="Microsoft YaHei"/>
                 <a:cs typeface="Microsoft YaHei"/>
               </a:rPr>
-              <a:t>SOW的三个核心模块作用于多种既有评估器之上，负责适配任务、稳定结论并提供证据。</a:t>
-            </a:r>
-          </a:p>
-        </p:txBody>
-      </p:sp>
-      <p:sp>
-        <p:nvSpPr>
-          <p:cNvPr id="5" name="sow-module-0">
-            <a:extLst xmlns:a="http://schemas.openxmlformats.org/drawingml/2006/main">
-              <a:ext uri="{FF2B5EF4-FFF2-40B4-BE49-F238E27FC236}">
-                <a16:creationId xmlns:a16="http://schemas.microsoft.com/office/drawing/2014/main" id="{F119F5FA-A9BC-4792-B14B-1CA42A4D82D9}"/>
+              <a:t>不重建生产平台：输入任务要求、少量专家样本和既有评估结果，经三类上层算法形成可复用输出。</a:t>
+            </a:r>
+          </a:p>
+        </p:txBody>
+      </p:sp>
+      <p:sp>
+        <p:nvSpPr>
+          <p:cNvPr id="5" name="input-node">
+            <a:extLst xmlns:a="http://schemas.openxmlformats.org/drawingml/2006/main">
+              <a:ext uri="{FF2B5EF4-FFF2-40B4-BE49-F238E27FC236}">
+                <a16:creationId xmlns:a16="http://schemas.microsoft.com/office/drawing/2014/main" id="{4D8038A5-C3DA-48E5-BA09-7C01EF89FDDF}"/>
               </a:ext>
             </a:extLst>
           </p:cNvPr>
@@ -7974,11 +7903,450 @@
         <p:spPr>
           <a:xfrm xmlns:a="http://schemas.openxmlformats.org/drawingml/2006/main">
             <a:off x="514350" y="1562100"/>
-            <a:ext cx="3390900" cy="2686050"/>
+            <a:ext cx="2571750" cy="3600450"/>
           </a:xfrm>
           <a:prstGeom xmlns:a="http://schemas.openxmlformats.org/drawingml/2006/main" prst="roundRect">
             <a:avLst>
-              <a:gd name="adj" fmla="val 4255"/>
+              <a:gd name="adj" fmla="val 4444"/>
+            </a:avLst>
+          </a:prstGeom>
+          <a:solidFill xmlns:a="http://schemas.openxmlformats.org/drawingml/2006/main">
+            <a:srgbClr val="F4F7FA"/>
+          </a:solidFill>
+          <a:ln xmlns:a="http://schemas.openxmlformats.org/drawingml/2006/main" w="9525">
+            <a:solidFill>
+              <a:srgbClr val="D8E0E8"/>
+            </a:solidFill>
+            <a:prstDash val="solid"/>
+          </a:ln>
+        </p:spPr>
+      </p:sp>
+      <p:sp>
+        <p:nvSpPr>
+          <p:cNvPr id="6" name="auto-text-25">
+            <a:extLst xmlns:a="http://schemas.openxmlformats.org/drawingml/2006/main">
+              <a:ext uri="{FF2B5EF4-FFF2-40B4-BE49-F238E27FC236}">
+                <a16:creationId xmlns:a16="http://schemas.microsoft.com/office/drawing/2014/main" id="{A1B12F8F-00AD-4936-8951-2DB607F937E7}"/>
+              </a:ext>
+            </a:extLst>
+          </p:cNvPr>
+          <p:cNvSpPr>
+            <a:spLocks xmlns:a="http://schemas.openxmlformats.org/drawingml/2006/main" noGrp="1"/>
+          </p:cNvSpPr>
+          <p:nvPr/>
+        </p:nvSpPr>
+        <p:spPr>
+          <a:xfrm xmlns:a="http://schemas.openxmlformats.org/drawingml/2006/main">
+            <a:off x="742950" y="1790700"/>
+            <a:ext cx="1809750" cy="323850"/>
+          </a:xfrm>
+          <a:prstGeom xmlns:a="http://schemas.openxmlformats.org/drawingml/2006/main" prst="rect">
+            <a:avLst/>
+          </a:prstGeom>
+          <a:noFill xmlns:a="http://schemas.openxmlformats.org/drawingml/2006/main"/>
+          <a:ln xmlns:a="http://schemas.openxmlformats.org/drawingml/2006/main" w="0">
+            <a:noFill/>
+            <a:prstDash val="solid"/>
+          </a:ln>
+        </p:spPr>
+        <p:txBody>
+          <a:bodyPr xmlns:a="http://schemas.openxmlformats.org/drawingml/2006/main" wrap="square" lIns="0" tIns="0" rIns="0" bIns="0" anchor="t">
+            <a:normAutofit fontScale="100000"/>
+          </a:bodyPr>
+          <a:lstStyle xmlns:a="http://schemas.openxmlformats.org/drawingml/2006/main"/>
+          <a:p xmlns:a="http://schemas.openxmlformats.org/drawingml/2006/main">
+            <a:pPr algn="l">
+              <a:defRPr sz="1875" b="1" i="0">
+                <a:solidFill>
+                  <a:srgbClr val="2F6BFF"/>
+                </a:solidFill>
+                <a:latin typeface="Microsoft YaHei"/>
+                <a:ea typeface="Microsoft YaHei"/>
+                <a:cs typeface="Microsoft YaHei"/>
+              </a:defRPr>
+            </a:pPr>
+            <a:r>
+              <a:rPr sz="1875" b="1" i="0">
+                <a:solidFill>
+                  <a:srgbClr val="2F6BFF"/>
+                </a:solidFill>
+                <a:latin typeface="Microsoft YaHei"/>
+                <a:ea typeface="Microsoft YaHei"/>
+                <a:cs typeface="Microsoft YaHei"/>
+              </a:rPr>
+              <a:t>输入与底座</a:t>
+            </a:r>
+          </a:p>
+        </p:txBody>
+      </p:sp>
+      <p:sp>
+        <p:nvSpPr>
+          <p:cNvPr id="7" name="auto-text-26">
+            <a:extLst xmlns:a="http://schemas.openxmlformats.org/drawingml/2006/main">
+              <a:ext uri="{FF2B5EF4-FFF2-40B4-BE49-F238E27FC236}">
+                <a16:creationId xmlns:a16="http://schemas.microsoft.com/office/drawing/2014/main" id="{6738F80A-4592-48C8-99F8-845C48837BB8}"/>
+              </a:ext>
+            </a:extLst>
+          </p:cNvPr>
+          <p:cNvSpPr>
+            <a:spLocks xmlns:a="http://schemas.openxmlformats.org/drawingml/2006/main" noGrp="1"/>
+          </p:cNvSpPr>
+          <p:nvPr/>
+        </p:nvSpPr>
+        <p:spPr>
+          <a:xfrm xmlns:a="http://schemas.openxmlformats.org/drawingml/2006/main">
+            <a:off x="742950" y="2343150"/>
+            <a:ext cx="2095500" cy="1428750"/>
+          </a:xfrm>
+          <a:prstGeom xmlns:a="http://schemas.openxmlformats.org/drawingml/2006/main" prst="rect">
+            <a:avLst/>
+          </a:prstGeom>
+          <a:noFill xmlns:a="http://schemas.openxmlformats.org/drawingml/2006/main"/>
+          <a:ln xmlns:a="http://schemas.openxmlformats.org/drawingml/2006/main" w="0">
+            <a:noFill/>
+            <a:prstDash val="solid"/>
+          </a:ln>
+        </p:spPr>
+        <p:txBody>
+          <a:bodyPr xmlns:a="http://schemas.openxmlformats.org/drawingml/2006/main" wrap="square" lIns="0" tIns="0" rIns="0" bIns="0" anchor="t">
+            <a:normAutofit fontScale="100000"/>
+          </a:bodyPr>
+          <a:lstStyle xmlns:a="http://schemas.openxmlformats.org/drawingml/2006/main"/>
+          <a:p xmlns:a="http://schemas.openxmlformats.org/drawingml/2006/main">
+            <a:pPr algn="l">
+              <a:defRPr sz="1275" b="0" i="0">
+                <a:solidFill>
+                  <a:srgbClr val="25364A"/>
+                </a:solidFill>
+                <a:latin typeface="Microsoft YaHei"/>
+                <a:ea typeface="Microsoft YaHei"/>
+                <a:cs typeface="Microsoft YaHei"/>
+              </a:defRPr>
+            </a:pPr>
+            <a:r>
+              <a:rPr sz="1275" b="0" i="0">
+                <a:solidFill>
+                  <a:srgbClr val="25364A"/>
+                </a:solidFill>
+                <a:latin typeface="Microsoft YaHei"/>
+                <a:ea typeface="Microsoft YaHei"/>
+                <a:cs typeface="Microsoft YaHei"/>
+              </a:rPr>
+              <a:t>任务描述与质量维度</a:t>
+            </a:r>
+          </a:p>
+          <a:p xmlns:a="http://schemas.openxmlformats.org/drawingml/2006/main">
+            <a:r>
+              <a:t/>
+            </a:r>
+          </a:p>
+          <a:p xmlns:a="http://schemas.openxmlformats.org/drawingml/2006/main">
+            <a:pPr algn="l">
+              <a:defRPr sz="1275" b="0" i="0">
+                <a:solidFill>
+                  <a:srgbClr val="25364A"/>
+                </a:solidFill>
+                <a:latin typeface="Microsoft YaHei"/>
+                <a:ea typeface="Microsoft YaHei"/>
+                <a:cs typeface="Microsoft YaHei"/>
+              </a:defRPr>
+            </a:pPr>
+            <a:r>
+              <a:rPr sz="1275" b="0" i="0">
+                <a:solidFill>
+                  <a:srgbClr val="25364A"/>
+                </a:solidFill>
+                <a:latin typeface="Microsoft YaHei"/>
+                <a:ea typeface="Microsoft YaHei"/>
+                <a:cs typeface="Microsoft YaHei"/>
+              </a:rPr>
+              <a:t>少量验证样本／专家偏好</a:t>
+            </a:r>
+          </a:p>
+          <a:p xmlns:a="http://schemas.openxmlformats.org/drawingml/2006/main">
+            <a:r>
+              <a:t/>
+            </a:r>
+          </a:p>
+          <a:p xmlns:a="http://schemas.openxmlformats.org/drawingml/2006/main">
+            <a:pPr algn="l">
+              <a:defRPr sz="1275" b="0" i="0">
+                <a:solidFill>
+                  <a:srgbClr val="25364A"/>
+                </a:solidFill>
+                <a:latin typeface="Microsoft YaHei"/>
+                <a:ea typeface="Microsoft YaHei"/>
+                <a:cs typeface="Microsoft YaHei"/>
+              </a:defRPr>
+            </a:pPr>
+            <a:r>
+              <a:rPr sz="1275" b="0" i="0">
+                <a:solidFill>
+                  <a:srgbClr val="25364A"/>
+                </a:solidFill>
+                <a:latin typeface="Microsoft YaHei"/>
+                <a:ea typeface="Microsoft YaHei"/>
+                <a:cs typeface="Microsoft YaHei"/>
+              </a:rPr>
+              <a:t>已有规则、Prompt和评估结果</a:t>
+            </a:r>
+          </a:p>
+        </p:txBody>
+      </p:sp>
+      <p:sp>
+        <p:nvSpPr>
+          <p:cNvPr id="8" name="input-divider">
+            <a:extLst xmlns:a="http://schemas.openxmlformats.org/drawingml/2006/main">
+              <a:ext uri="{FF2B5EF4-FFF2-40B4-BE49-F238E27FC236}">
+                <a16:creationId xmlns:a16="http://schemas.microsoft.com/office/drawing/2014/main" id="{9544057F-49BB-4BBC-B121-0A157B9870D4}"/>
+              </a:ext>
+            </a:extLst>
+          </p:cNvPr>
+          <p:cNvSpPr>
+            <a:spLocks xmlns:a="http://schemas.openxmlformats.org/drawingml/2006/main" noGrp="1"/>
+          </p:cNvSpPr>
+          <p:nvPr/>
+        </p:nvSpPr>
+        <p:spPr>
+          <a:xfrm xmlns:a="http://schemas.openxmlformats.org/drawingml/2006/main">
+            <a:off x="742950" y="3905250"/>
+            <a:ext cx="2095500" cy="19050"/>
+          </a:xfrm>
+          <a:prstGeom xmlns:a="http://schemas.openxmlformats.org/drawingml/2006/main" prst="roundRect">
+            <a:avLst>
+              <a:gd name="adj" fmla="val 50000"/>
+            </a:avLst>
+          </a:prstGeom>
+          <a:solidFill xmlns:a="http://schemas.openxmlformats.org/drawingml/2006/main">
+            <a:srgbClr val="D8E0E8"/>
+          </a:solidFill>
+          <a:ln xmlns:a="http://schemas.openxmlformats.org/drawingml/2006/main" w="9525">
+            <a:solidFill>
+              <a:srgbClr val="D8E0E8"/>
+            </a:solidFill>
+            <a:prstDash val="solid"/>
+          </a:ln>
+        </p:spPr>
+      </p:sp>
+      <p:sp>
+        <p:nvSpPr>
+          <p:cNvPr id="9" name="auto-text-27">
+            <a:extLst xmlns:a="http://schemas.openxmlformats.org/drawingml/2006/main">
+              <a:ext uri="{FF2B5EF4-FFF2-40B4-BE49-F238E27FC236}">
+                <a16:creationId xmlns:a16="http://schemas.microsoft.com/office/drawing/2014/main" id="{761C8248-4EF6-4E79-B27F-26D9CE61F829}"/>
+              </a:ext>
+            </a:extLst>
+          </p:cNvPr>
+          <p:cNvSpPr>
+            <a:spLocks xmlns:a="http://schemas.openxmlformats.org/drawingml/2006/main" noGrp="1"/>
+          </p:cNvSpPr>
+          <p:nvPr/>
+        </p:nvSpPr>
+        <p:spPr>
+          <a:xfrm xmlns:a="http://schemas.openxmlformats.org/drawingml/2006/main">
+            <a:off x="742950" y="4095750"/>
+            <a:ext cx="1143000" cy="266700"/>
+          </a:xfrm>
+          <a:prstGeom xmlns:a="http://schemas.openxmlformats.org/drawingml/2006/main" prst="rect">
+            <a:avLst/>
+          </a:prstGeom>
+          <a:noFill xmlns:a="http://schemas.openxmlformats.org/drawingml/2006/main"/>
+          <a:ln xmlns:a="http://schemas.openxmlformats.org/drawingml/2006/main" w="0">
+            <a:noFill/>
+            <a:prstDash val="solid"/>
+          </a:ln>
+        </p:spPr>
+        <p:txBody>
+          <a:bodyPr xmlns:a="http://schemas.openxmlformats.org/drawingml/2006/main" wrap="square" lIns="0" tIns="0" rIns="0" bIns="0" anchor="t">
+            <a:normAutofit fontScale="100000"/>
+          </a:bodyPr>
+          <a:lstStyle xmlns:a="http://schemas.openxmlformats.org/drawingml/2006/main"/>
+          <a:p xmlns:a="http://schemas.openxmlformats.org/drawingml/2006/main">
+            <a:pPr algn="l">
+              <a:defRPr sz="1350" b="1" i="0">
+                <a:solidFill>
+                  <a:srgbClr val="12263A"/>
+                </a:solidFill>
+                <a:latin typeface="Microsoft YaHei"/>
+                <a:ea typeface="Microsoft YaHei"/>
+                <a:cs typeface="Microsoft YaHei"/>
+              </a:defRPr>
+            </a:pPr>
+            <a:r>
+              <a:rPr sz="1350" b="1" i="0">
+                <a:solidFill>
+                  <a:srgbClr val="12263A"/>
+                </a:solidFill>
+                <a:latin typeface="Microsoft YaHei"/>
+                <a:ea typeface="Microsoft YaHei"/>
+                <a:cs typeface="Microsoft YaHei"/>
+              </a:rPr>
+              <a:t>评估器池</a:t>
+            </a:r>
+          </a:p>
+        </p:txBody>
+      </p:sp>
+      <p:sp>
+        <p:nvSpPr>
+          <p:cNvPr id="10" name="auto-text-28">
+            <a:extLst xmlns:a="http://schemas.openxmlformats.org/drawingml/2006/main">
+              <a:ext uri="{FF2B5EF4-FFF2-40B4-BE49-F238E27FC236}">
+                <a16:creationId xmlns:a16="http://schemas.microsoft.com/office/drawing/2014/main" id="{B93B7AE2-C926-46A6-A2A2-C76E9F4C0736}"/>
+              </a:ext>
+            </a:extLst>
+          </p:cNvPr>
+          <p:cNvSpPr>
+            <a:spLocks xmlns:a="http://schemas.openxmlformats.org/drawingml/2006/main" noGrp="1"/>
+          </p:cNvSpPr>
+          <p:nvPr/>
+        </p:nvSpPr>
+        <p:spPr>
+          <a:xfrm xmlns:a="http://schemas.openxmlformats.org/drawingml/2006/main">
+            <a:off x="742950" y="4457700"/>
+            <a:ext cx="2095500" cy="533400"/>
+          </a:xfrm>
+          <a:prstGeom xmlns:a="http://schemas.openxmlformats.org/drawingml/2006/main" prst="rect">
+            <a:avLst/>
+          </a:prstGeom>
+          <a:noFill xmlns:a="http://schemas.openxmlformats.org/drawingml/2006/main"/>
+          <a:ln xmlns:a="http://schemas.openxmlformats.org/drawingml/2006/main" w="0">
+            <a:noFill/>
+            <a:prstDash val="solid"/>
+          </a:ln>
+        </p:spPr>
+        <p:txBody>
+          <a:bodyPr xmlns:a="http://schemas.openxmlformats.org/drawingml/2006/main" wrap="square" lIns="0" tIns="0" rIns="0" bIns="0" anchor="t">
+            <a:normAutofit fontScale="100000"/>
+          </a:bodyPr>
+          <a:lstStyle xmlns:a="http://schemas.openxmlformats.org/drawingml/2006/main"/>
+          <a:p xmlns:a="http://schemas.openxmlformats.org/drawingml/2006/main">
+            <a:pPr algn="l">
+              <a:defRPr sz="1200" b="1" i="0">
+                <a:solidFill>
+                  <a:srgbClr val="2F6BFF"/>
+                </a:solidFill>
+                <a:latin typeface="Microsoft YaHei"/>
+                <a:ea typeface="Microsoft YaHei"/>
+                <a:cs typeface="Microsoft YaHei"/>
+              </a:defRPr>
+            </a:pPr>
+            <a:r>
+              <a:rPr sz="1200" b="1" i="0">
+                <a:solidFill>
+                  <a:srgbClr val="2F6BFF"/>
+                </a:solidFill>
+                <a:latin typeface="Microsoft YaHei"/>
+                <a:ea typeface="Microsoft YaHei"/>
+                <a:cs typeface="Microsoft YaHei"/>
+              </a:rPr>
+              <a:t>VLM／CLIP／DINO／LPIPS</a:t>
+            </a:r>
+          </a:p>
+          <a:p xmlns:a="http://schemas.openxmlformats.org/drawingml/2006/main">
+            <a:pPr algn="l">
+              <a:defRPr sz="1200" b="1" i="0">
+                <a:solidFill>
+                  <a:srgbClr val="2F6BFF"/>
+                </a:solidFill>
+                <a:latin typeface="Microsoft YaHei"/>
+                <a:ea typeface="Microsoft YaHei"/>
+                <a:cs typeface="Microsoft YaHei"/>
+              </a:defRPr>
+            </a:pPr>
+            <a:r>
+              <a:rPr sz="1200" b="1" i="0">
+                <a:solidFill>
+                  <a:srgbClr val="2F6BFF"/>
+                </a:solidFill>
+                <a:latin typeface="Microsoft YaHei"/>
+                <a:ea typeface="Microsoft YaHei"/>
+                <a:cs typeface="Microsoft YaHei"/>
+              </a:rPr>
+              <a:t>OCR／检测／定位／业务规则</a:t>
+            </a:r>
+          </a:p>
+        </p:txBody>
+      </p:sp>
+      <p:sp>
+        <p:nvSpPr>
+          <p:cNvPr id="11" name="auto-text-29">
+            <a:extLst xmlns:a="http://schemas.openxmlformats.org/drawingml/2006/main">
+              <a:ext uri="{FF2B5EF4-FFF2-40B4-BE49-F238E27FC236}">
+                <a16:creationId xmlns:a16="http://schemas.microsoft.com/office/drawing/2014/main" id="{31949251-3A25-4CC9-AF9F-8C0DAF8A4B1C}"/>
+              </a:ext>
+            </a:extLst>
+          </p:cNvPr>
+          <p:cNvSpPr>
+            <a:spLocks xmlns:a="http://schemas.openxmlformats.org/drawingml/2006/main" noGrp="1"/>
+          </p:cNvSpPr>
+          <p:nvPr/>
+        </p:nvSpPr>
+        <p:spPr>
+          <a:xfrm xmlns:a="http://schemas.openxmlformats.org/drawingml/2006/main">
+            <a:off x="3105150" y="2857500"/>
+            <a:ext cx="400050" cy="571500"/>
+          </a:xfrm>
+          <a:prstGeom xmlns:a="http://schemas.openxmlformats.org/drawingml/2006/main" prst="rect">
+            <a:avLst/>
+          </a:prstGeom>
+          <a:noFill xmlns:a="http://schemas.openxmlformats.org/drawingml/2006/main"/>
+          <a:ln xmlns:a="http://schemas.openxmlformats.org/drawingml/2006/main" w="0">
+            <a:noFill/>
+            <a:prstDash val="solid"/>
+          </a:ln>
+        </p:spPr>
+        <p:txBody>
+          <a:bodyPr xmlns:a="http://schemas.openxmlformats.org/drawingml/2006/main" wrap="square" lIns="0" tIns="0" rIns="0" bIns="0" anchor="t">
+            <a:normAutofit fontScale="100000"/>
+          </a:bodyPr>
+          <a:lstStyle xmlns:a="http://schemas.openxmlformats.org/drawingml/2006/main"/>
+          <a:p xmlns:a="http://schemas.openxmlformats.org/drawingml/2006/main">
+            <a:pPr algn="ctr">
+              <a:defRPr sz="3150" b="1" i="0">
+                <a:solidFill>
+                  <a:srgbClr val="9BB3E9"/>
+                </a:solidFill>
+                <a:latin typeface="Microsoft YaHei"/>
+                <a:ea typeface="Microsoft YaHei"/>
+                <a:cs typeface="Microsoft YaHei"/>
+              </a:defRPr>
+            </a:pPr>
+            <a:r>
+              <a:rPr sz="3150" b="1" i="0">
+                <a:solidFill>
+                  <a:srgbClr val="9BB3E9"/>
+                </a:solidFill>
+                <a:latin typeface="Microsoft YaHei"/>
+                <a:ea typeface="Microsoft YaHei"/>
+                <a:cs typeface="Microsoft YaHei"/>
+              </a:rPr>
+              <a:t>→</a:t>
+            </a:r>
+          </a:p>
+        </p:txBody>
+      </p:sp>
+      <p:sp>
+        <p:nvSpPr>
+          <p:cNvPr id="12" name="adaptive-node">
+            <a:extLst xmlns:a="http://schemas.openxmlformats.org/drawingml/2006/main">
+              <a:ext uri="{FF2B5EF4-FFF2-40B4-BE49-F238E27FC236}">
+                <a16:creationId xmlns:a16="http://schemas.microsoft.com/office/drawing/2014/main" id="{1854C3A6-2FEE-4111-A11F-26F7D2F08988}"/>
+              </a:ext>
+            </a:extLst>
+          </p:cNvPr>
+          <p:cNvSpPr>
+            <a:spLocks xmlns:a="http://schemas.openxmlformats.org/drawingml/2006/main" noGrp="1"/>
+          </p:cNvSpPr>
+          <p:nvPr/>
+        </p:nvSpPr>
+        <p:spPr>
+          <a:xfrm xmlns:a="http://schemas.openxmlformats.org/drawingml/2006/main">
+            <a:off x="3524250" y="1466850"/>
+            <a:ext cx="5162550" cy="3790950"/>
+          </a:xfrm>
+          <a:prstGeom xmlns:a="http://schemas.openxmlformats.org/drawingml/2006/main" prst="roundRect">
+            <a:avLst>
+              <a:gd name="adj" fmla="val 3015"/>
             </a:avLst>
           </a:prstGeom>
           <a:solidFill xmlns:a="http://schemas.openxmlformats.org/drawingml/2006/main">
@@ -7986,7 +8354,7 @@
           </a:solidFill>
           <a:ln xmlns:a="http://schemas.openxmlformats.org/drawingml/2006/main" w="9525">
             <a:solidFill>
-              <a:srgbClr val="EAF0FF"/>
+              <a:srgbClr val="B7C8F5"/>
             </a:solidFill>
             <a:prstDash val="solid"/>
           </a:ln>
@@ -7994,22 +8362,80 @@
       </p:sp>
       <p:sp>
         <p:nvSpPr>
-          <p:cNvPr id="6" name="sow-no-0">
-            <a:extLst xmlns:a="http://schemas.openxmlformats.org/drawingml/2006/main">
-              <a:ext uri="{FF2B5EF4-FFF2-40B4-BE49-F238E27FC236}">
-                <a16:creationId xmlns:a16="http://schemas.microsoft.com/office/drawing/2014/main" id="{874AB140-60E7-44CC-848E-7BB9D9E16055}"/>
-              </a:ext>
-            </a:extLst>
-          </p:cNvPr>
-          <p:cNvSpPr>
-            <a:spLocks xmlns:a="http://schemas.openxmlformats.org/drawingml/2006/main" noGrp="1"/>
-          </p:cNvSpPr>
-          <p:nvPr/>
-        </p:nvSpPr>
-        <p:spPr>
-          <a:xfrm xmlns:a="http://schemas.openxmlformats.org/drawingml/2006/main">
-            <a:off x="742950" y="1790700"/>
-            <a:ext cx="838200" cy="266700"/>
+          <p:cNvPr id="13" name="auto-text-30">
+            <a:extLst xmlns:a="http://schemas.openxmlformats.org/drawingml/2006/main">
+              <a:ext uri="{FF2B5EF4-FFF2-40B4-BE49-F238E27FC236}">
+                <a16:creationId xmlns:a16="http://schemas.microsoft.com/office/drawing/2014/main" id="{A0319CDF-BDF1-4A95-B8AC-B630B2747206}"/>
+              </a:ext>
+            </a:extLst>
+          </p:cNvPr>
+          <p:cNvSpPr>
+            <a:spLocks xmlns:a="http://schemas.openxmlformats.org/drawingml/2006/main" noGrp="1"/>
+          </p:cNvSpPr>
+          <p:nvPr/>
+        </p:nvSpPr>
+        <p:spPr>
+          <a:xfrm xmlns:a="http://schemas.openxmlformats.org/drawingml/2006/main">
+            <a:off x="3790950" y="1695450"/>
+            <a:ext cx="4629150" cy="361950"/>
+          </a:xfrm>
+          <a:prstGeom xmlns:a="http://schemas.openxmlformats.org/drawingml/2006/main" prst="rect">
+            <a:avLst/>
+          </a:prstGeom>
+          <a:noFill xmlns:a="http://schemas.openxmlformats.org/drawingml/2006/main"/>
+          <a:ln xmlns:a="http://schemas.openxmlformats.org/drawingml/2006/main" w="0">
+            <a:noFill/>
+            <a:prstDash val="solid"/>
+          </a:ln>
+        </p:spPr>
+        <p:txBody>
+          <a:bodyPr xmlns:a="http://schemas.openxmlformats.org/drawingml/2006/main" wrap="square" lIns="0" tIns="0" rIns="0" bIns="0" anchor="t">
+            <a:normAutofit fontScale="100000"/>
+          </a:bodyPr>
+          <a:lstStyle xmlns:a="http://schemas.openxmlformats.org/drawingml/2006/main"/>
+          <a:p xmlns:a="http://schemas.openxmlformats.org/drawingml/2006/main">
+            <a:pPr algn="ctr">
+              <a:defRPr sz="1950" b="1" i="0">
+                <a:solidFill>
+                  <a:srgbClr val="2F6BFF"/>
+                </a:solidFill>
+                <a:latin typeface="Microsoft YaHei"/>
+                <a:ea typeface="Microsoft YaHei"/>
+                <a:cs typeface="Microsoft YaHei"/>
+              </a:defRPr>
+            </a:pPr>
+            <a:r>
+              <a:rPr sz="1950" b="1" i="0">
+                <a:solidFill>
+                  <a:srgbClr val="2F6BFF"/>
+                </a:solidFill>
+                <a:latin typeface="Microsoft YaHei"/>
+                <a:ea typeface="Microsoft YaHei"/>
+                <a:cs typeface="Microsoft YaHei"/>
+              </a:rPr>
+              <a:t>任务自适应质量评估层</a:t>
+            </a:r>
+          </a:p>
+        </p:txBody>
+      </p:sp>
+      <p:sp>
+        <p:nvSpPr>
+          <p:cNvPr id="14" name="module-no-0">
+            <a:extLst xmlns:a="http://schemas.openxmlformats.org/drawingml/2006/main">
+              <a:ext uri="{FF2B5EF4-FFF2-40B4-BE49-F238E27FC236}">
+                <a16:creationId xmlns:a16="http://schemas.microsoft.com/office/drawing/2014/main" id="{CBF01D96-5D2B-4CF7-8D91-897D3EEB5F9C}"/>
+              </a:ext>
+            </a:extLst>
+          </p:cNvPr>
+          <p:cNvSpPr>
+            <a:spLocks xmlns:a="http://schemas.openxmlformats.org/drawingml/2006/main" noGrp="1"/>
+          </p:cNvSpPr>
+          <p:nvPr/>
+        </p:nvSpPr>
+        <p:spPr>
+          <a:xfrm xmlns:a="http://schemas.openxmlformats.org/drawingml/2006/main">
+            <a:off x="3790950" y="2324100"/>
+            <a:ext cx="514350" cy="285750"/>
           </a:xfrm>
           <a:prstGeom xmlns:a="http://schemas.openxmlformats.org/drawingml/2006/main" prst="rect">
             <a:avLst/>
@@ -8027,7 +8453,7 @@
           <a:lstStyle xmlns:a="http://schemas.openxmlformats.org/drawingml/2006/main"/>
           <a:p xmlns:a="http://schemas.openxmlformats.org/drawingml/2006/main">
             <a:pPr algn="l">
-              <a:defRPr sz="1350" b="1" i="0">
+              <a:defRPr sz="1575" b="1" i="0">
                 <a:solidFill>
                   <a:srgbClr val="2F6BFF"/>
                 </a:solidFill>
@@ -8037,7 +8463,7 @@
               </a:defRPr>
             </a:pPr>
             <a:r>
-              <a:rPr sz="1350" b="1" i="0">
+              <a:rPr sz="1575" b="1" i="0">
                 <a:solidFill>
                   <a:srgbClr val="2F6BFF"/>
                 </a:solidFill>
@@ -8045,29 +8471,29 @@
                 <a:ea typeface="Microsoft YaHei"/>
                 <a:cs typeface="Microsoft YaHei"/>
               </a:rPr>
-              <a:t>模块一</a:t>
-            </a:r>
-          </a:p>
-        </p:txBody>
-      </p:sp>
-      <p:sp>
-        <p:nvSpPr>
-          <p:cNvPr id="7" name="sow-title-0">
-            <a:extLst xmlns:a="http://schemas.openxmlformats.org/drawingml/2006/main">
-              <a:ext uri="{FF2B5EF4-FFF2-40B4-BE49-F238E27FC236}">
-                <a16:creationId xmlns:a16="http://schemas.microsoft.com/office/drawing/2014/main" id="{CDF95CB7-7474-4958-837E-DF153331A829}"/>
-              </a:ext>
-            </a:extLst>
-          </p:cNvPr>
-          <p:cNvSpPr>
-            <a:spLocks xmlns:a="http://schemas.openxmlformats.org/drawingml/2006/main" noGrp="1"/>
-          </p:cNvSpPr>
-          <p:nvPr/>
-        </p:nvSpPr>
-        <p:spPr>
-          <a:xfrm xmlns:a="http://schemas.openxmlformats.org/drawingml/2006/main">
-            <a:off x="742950" y="2171700"/>
-            <a:ext cx="2933700" cy="552450"/>
+              <a:t>01</a:t>
+            </a:r>
+          </a:p>
+        </p:txBody>
+      </p:sp>
+      <p:sp>
+        <p:nvSpPr>
+          <p:cNvPr id="15" name="module-title-0">
+            <a:extLst xmlns:a="http://schemas.openxmlformats.org/drawingml/2006/main">
+              <a:ext uri="{FF2B5EF4-FFF2-40B4-BE49-F238E27FC236}">
+                <a16:creationId xmlns:a16="http://schemas.microsoft.com/office/drawing/2014/main" id="{6F69F385-A669-48BC-BC04-EB6E77195BA8}"/>
+              </a:ext>
+            </a:extLst>
+          </p:cNvPr>
+          <p:cNvSpPr>
+            <a:spLocks xmlns:a="http://schemas.openxmlformats.org/drawingml/2006/main" noGrp="1"/>
+          </p:cNvSpPr>
+          <p:nvPr/>
+        </p:nvSpPr>
+        <p:spPr>
+          <a:xfrm xmlns:a="http://schemas.openxmlformats.org/drawingml/2006/main">
+            <a:off x="4362450" y="2247900"/>
+            <a:ext cx="3771900" cy="304800"/>
           </a:xfrm>
           <a:prstGeom xmlns:a="http://schemas.openxmlformats.org/drawingml/2006/main" prst="rect">
             <a:avLst/>
@@ -8085,7 +8511,7 @@
           <a:lstStyle xmlns:a="http://schemas.openxmlformats.org/drawingml/2006/main"/>
           <a:p xmlns:a="http://schemas.openxmlformats.org/drawingml/2006/main">
             <a:pPr algn="l">
-              <a:defRPr sz="1725" b="1" i="0">
+              <a:defRPr sz="1500" b="1" i="0">
                 <a:solidFill>
                   <a:srgbClr val="12263A"/>
                 </a:solidFill>
@@ -8095,7 +8521,7 @@
               </a:defRPr>
             </a:pPr>
             <a:r>
-              <a:rPr sz="1725" b="1" i="0">
+              <a:rPr sz="1500" b="1" i="0">
                 <a:solidFill>
                   <a:srgbClr val="12263A"/>
                 </a:solidFill>
@@ -8110,22 +8536,22 @@
       </p:sp>
       <p:sp>
         <p:nvSpPr>
-          <p:cNvPr id="8" name="sow-body-0">
-            <a:extLst xmlns:a="http://schemas.openxmlformats.org/drawingml/2006/main">
-              <a:ext uri="{FF2B5EF4-FFF2-40B4-BE49-F238E27FC236}">
-                <a16:creationId xmlns:a16="http://schemas.microsoft.com/office/drawing/2014/main" id="{63FF5F86-EFA5-4E1E-9430-9831D3660CA0}"/>
-              </a:ext>
-            </a:extLst>
-          </p:cNvPr>
-          <p:cNvSpPr>
-            <a:spLocks xmlns:a="http://schemas.openxmlformats.org/drawingml/2006/main" noGrp="1"/>
-          </p:cNvSpPr>
-          <p:nvPr/>
-        </p:nvSpPr>
-        <p:spPr>
-          <a:xfrm xmlns:a="http://schemas.openxmlformats.org/drawingml/2006/main">
-            <a:off x="742950" y="2914650"/>
-            <a:ext cx="2933700" cy="800100"/>
+          <p:cNvPr id="16" name="module-body-0">
+            <a:extLst xmlns:a="http://schemas.openxmlformats.org/drawingml/2006/main">
+              <a:ext uri="{FF2B5EF4-FFF2-40B4-BE49-F238E27FC236}">
+                <a16:creationId xmlns:a16="http://schemas.microsoft.com/office/drawing/2014/main" id="{1F43DCD6-7969-40E0-A62E-F2300BB92DE3}"/>
+              </a:ext>
+            </a:extLst>
+          </p:cNvPr>
+          <p:cNvSpPr>
+            <a:spLocks xmlns:a="http://schemas.openxmlformats.org/drawingml/2006/main" noGrp="1"/>
+          </p:cNvSpPr>
+          <p:nvPr/>
+        </p:nvSpPr>
+        <p:spPr>
+          <a:xfrm xmlns:a="http://schemas.openxmlformats.org/drawingml/2006/main">
+            <a:off x="4362450" y="2609850"/>
+            <a:ext cx="3771900" cy="323850"/>
           </a:xfrm>
           <a:prstGeom xmlns:a="http://schemas.openxmlformats.org/drawingml/2006/main" prst="rect">
             <a:avLst/>
@@ -8143,7 +8569,7 @@
           <a:lstStyle xmlns:a="http://schemas.openxmlformats.org/drawingml/2006/main"/>
           <a:p xmlns:a="http://schemas.openxmlformats.org/drawingml/2006/main">
             <a:pPr algn="l">
-              <a:defRPr sz="1275" b="0" i="0">
+              <a:defRPr sz="1200" b="0" i="0">
                 <a:solidFill>
                   <a:srgbClr val="25364A"/>
                 </a:solidFill>
@@ -8153,7 +8579,7 @@
               </a:defRPr>
             </a:pPr>
             <a:r>
-              <a:rPr sz="1275" b="0" i="0">
+              <a:rPr sz="1200" b="0" i="0">
                 <a:solidFill>
                   <a:srgbClr val="25364A"/>
                 </a:solidFill>
@@ -8161,29 +8587,377 @@
                 <a:ea typeface="Microsoft YaHei"/>
                 <a:cs typeface="Microsoft YaHei"/>
               </a:rPr>
-              <a:t>把任务描述、少量验证样本和专家偏好转成质量方向；校准分数、维度权重、阈值与置信度。</a:t>
-            </a:r>
-          </a:p>
-        </p:txBody>
-      </p:sp>
-      <p:sp>
-        <p:nvSpPr>
-          <p:cNvPr id="9" name="sow-output-0">
-            <a:extLst xmlns:a="http://schemas.openxmlformats.org/drawingml/2006/main">
-              <a:ext uri="{FF2B5EF4-FFF2-40B4-BE49-F238E27FC236}">
-                <a16:creationId xmlns:a16="http://schemas.microsoft.com/office/drawing/2014/main" id="{40BCB133-5DB1-4B42-83A1-3ED5718C6404}"/>
-              </a:ext>
-            </a:extLst>
-          </p:cNvPr>
-          <p:cNvSpPr>
-            <a:spLocks xmlns:a="http://schemas.openxmlformats.org/drawingml/2006/main" noGrp="1"/>
-          </p:cNvSpPr>
-          <p:nvPr/>
-        </p:nvSpPr>
-        <p:spPr>
-          <a:xfrm xmlns:a="http://schemas.openxmlformats.org/drawingml/2006/main">
-            <a:off x="742950" y="3810000"/>
-            <a:ext cx="2933700" cy="266700"/>
+              <a:t>校准分数、维度权重、阈值与置信度</a:t>
+            </a:r>
+          </a:p>
+        </p:txBody>
+      </p:sp>
+      <p:sp>
+        <p:nvSpPr>
+          <p:cNvPr id="17" name="module-no-1">
+            <a:extLst xmlns:a="http://schemas.openxmlformats.org/drawingml/2006/main">
+              <a:ext uri="{FF2B5EF4-FFF2-40B4-BE49-F238E27FC236}">
+                <a16:creationId xmlns:a16="http://schemas.microsoft.com/office/drawing/2014/main" id="{CB7CABFA-AD97-44CB-AC9D-BD72C593DC96}"/>
+              </a:ext>
+            </a:extLst>
+          </p:cNvPr>
+          <p:cNvSpPr>
+            <a:spLocks xmlns:a="http://schemas.openxmlformats.org/drawingml/2006/main" noGrp="1"/>
+          </p:cNvSpPr>
+          <p:nvPr/>
+        </p:nvSpPr>
+        <p:spPr>
+          <a:xfrm xmlns:a="http://schemas.openxmlformats.org/drawingml/2006/main">
+            <a:off x="3790950" y="3238500"/>
+            <a:ext cx="514350" cy="285750"/>
+          </a:xfrm>
+          <a:prstGeom xmlns:a="http://schemas.openxmlformats.org/drawingml/2006/main" prst="rect">
+            <a:avLst/>
+          </a:prstGeom>
+          <a:noFill xmlns:a="http://schemas.openxmlformats.org/drawingml/2006/main"/>
+          <a:ln xmlns:a="http://schemas.openxmlformats.org/drawingml/2006/main" w="0">
+            <a:noFill/>
+            <a:prstDash val="solid"/>
+          </a:ln>
+        </p:spPr>
+        <p:txBody>
+          <a:bodyPr xmlns:a="http://schemas.openxmlformats.org/drawingml/2006/main" wrap="square" lIns="0" tIns="0" rIns="0" bIns="0" anchor="t">
+            <a:normAutofit fontScale="100000"/>
+          </a:bodyPr>
+          <a:lstStyle xmlns:a="http://schemas.openxmlformats.org/drawingml/2006/main"/>
+          <a:p xmlns:a="http://schemas.openxmlformats.org/drawingml/2006/main">
+            <a:pPr algn="l">
+              <a:defRPr sz="1575" b="1" i="0">
+                <a:solidFill>
+                  <a:srgbClr val="7B61D1"/>
+                </a:solidFill>
+                <a:latin typeface="Microsoft YaHei"/>
+                <a:ea typeface="Microsoft YaHei"/>
+                <a:cs typeface="Microsoft YaHei"/>
+              </a:defRPr>
+            </a:pPr>
+            <a:r>
+              <a:rPr sz="1575" b="1" i="0">
+                <a:solidFill>
+                  <a:srgbClr val="7B61D1"/>
+                </a:solidFill>
+                <a:latin typeface="Microsoft YaHei"/>
+                <a:ea typeface="Microsoft YaHei"/>
+                <a:cs typeface="Microsoft YaHei"/>
+              </a:rPr>
+              <a:t>02</a:t>
+            </a:r>
+          </a:p>
+        </p:txBody>
+      </p:sp>
+      <p:sp>
+        <p:nvSpPr>
+          <p:cNvPr id="18" name="module-title-1">
+            <a:extLst xmlns:a="http://schemas.openxmlformats.org/drawingml/2006/main">
+              <a:ext uri="{FF2B5EF4-FFF2-40B4-BE49-F238E27FC236}">
+                <a16:creationId xmlns:a16="http://schemas.microsoft.com/office/drawing/2014/main" id="{151D5F93-0FCF-4BEE-9000-056D675D9A31}"/>
+              </a:ext>
+            </a:extLst>
+          </p:cNvPr>
+          <p:cNvSpPr>
+            <a:spLocks xmlns:a="http://schemas.openxmlformats.org/drawingml/2006/main" noGrp="1"/>
+          </p:cNvSpPr>
+          <p:nvPr/>
+        </p:nvSpPr>
+        <p:spPr>
+          <a:xfrm xmlns:a="http://schemas.openxmlformats.org/drawingml/2006/main">
+            <a:off x="4362450" y="3162300"/>
+            <a:ext cx="3771900" cy="304800"/>
+          </a:xfrm>
+          <a:prstGeom xmlns:a="http://schemas.openxmlformats.org/drawingml/2006/main" prst="rect">
+            <a:avLst/>
+          </a:prstGeom>
+          <a:noFill xmlns:a="http://schemas.openxmlformats.org/drawingml/2006/main"/>
+          <a:ln xmlns:a="http://schemas.openxmlformats.org/drawingml/2006/main" w="0">
+            <a:noFill/>
+            <a:prstDash val="solid"/>
+          </a:ln>
+        </p:spPr>
+        <p:txBody>
+          <a:bodyPr xmlns:a="http://schemas.openxmlformats.org/drawingml/2006/main" wrap="square" lIns="0" tIns="0" rIns="0" bIns="0" anchor="t">
+            <a:normAutofit fontScale="100000"/>
+          </a:bodyPr>
+          <a:lstStyle xmlns:a="http://schemas.openxmlformats.org/drawingml/2006/main"/>
+          <a:p xmlns:a="http://schemas.openxmlformats.org/drawingml/2006/main">
+            <a:pPr algn="l">
+              <a:defRPr sz="1500" b="1" i="0">
+                <a:solidFill>
+                  <a:srgbClr val="12263A"/>
+                </a:solidFill>
+                <a:latin typeface="Microsoft YaHei"/>
+                <a:ea typeface="Microsoft YaHei"/>
+                <a:cs typeface="Microsoft YaHei"/>
+              </a:defRPr>
+            </a:pPr>
+            <a:r>
+              <a:rPr sz="1500" b="1" i="0">
+                <a:solidFill>
+                  <a:srgbClr val="12263A"/>
+                </a:solidFill>
+                <a:latin typeface="Microsoft YaHei"/>
+                <a:ea typeface="Microsoft YaHei"/>
+                <a:cs typeface="Microsoft YaHei"/>
+              </a:rPr>
+              <a:t>邻域共识与分歧鲁棒选择</a:t>
+            </a:r>
+          </a:p>
+        </p:txBody>
+      </p:sp>
+      <p:sp>
+        <p:nvSpPr>
+          <p:cNvPr id="19" name="module-body-1">
+            <a:extLst xmlns:a="http://schemas.openxmlformats.org/drawingml/2006/main">
+              <a:ext uri="{FF2B5EF4-FFF2-40B4-BE49-F238E27FC236}">
+                <a16:creationId xmlns:a16="http://schemas.microsoft.com/office/drawing/2014/main" id="{D0C46A6A-7C1C-427C-B717-588C41518B6E}"/>
+              </a:ext>
+            </a:extLst>
+          </p:cNvPr>
+          <p:cNvSpPr>
+            <a:spLocks xmlns:a="http://schemas.openxmlformats.org/drawingml/2006/main" noGrp="1"/>
+          </p:cNvSpPr>
+          <p:nvPr/>
+        </p:nvSpPr>
+        <p:spPr>
+          <a:xfrm xmlns:a="http://schemas.openxmlformats.org/drawingml/2006/main">
+            <a:off x="4362450" y="3524250"/>
+            <a:ext cx="3771900" cy="323850"/>
+          </a:xfrm>
+          <a:prstGeom xmlns:a="http://schemas.openxmlformats.org/drawingml/2006/main" prst="rect">
+            <a:avLst/>
+          </a:prstGeom>
+          <a:noFill xmlns:a="http://schemas.openxmlformats.org/drawingml/2006/main"/>
+          <a:ln xmlns:a="http://schemas.openxmlformats.org/drawingml/2006/main" w="0">
+            <a:noFill/>
+            <a:prstDash val="solid"/>
+          </a:ln>
+        </p:spPr>
+        <p:txBody>
+          <a:bodyPr xmlns:a="http://schemas.openxmlformats.org/drawingml/2006/main" wrap="square" lIns="0" tIns="0" rIns="0" bIns="0" anchor="t">
+            <a:normAutofit fontScale="100000"/>
+          </a:bodyPr>
+          <a:lstStyle xmlns:a="http://schemas.openxmlformats.org/drawingml/2006/main"/>
+          <a:p xmlns:a="http://schemas.openxmlformats.org/drawingml/2006/main">
+            <a:pPr algn="l">
+              <a:defRPr sz="1200" b="0" i="0">
+                <a:solidFill>
+                  <a:srgbClr val="25364A"/>
+                </a:solidFill>
+                <a:latin typeface="Microsoft YaHei"/>
+                <a:ea typeface="Microsoft YaHei"/>
+                <a:cs typeface="Microsoft YaHei"/>
+              </a:defRPr>
+            </a:pPr>
+            <a:r>
+              <a:rPr sz="1200" b="0" i="0">
+                <a:solidFill>
+                  <a:srgbClr val="25364A"/>
+                </a:solidFill>
+                <a:latin typeface="Microsoft YaHei"/>
+                <a:ea typeface="Microsoft YaHei"/>
+                <a:cs typeface="Microsoft YaHei"/>
+              </a:rPr>
+              <a:t>聚合相邻Rubric／Prompt，对分歧样本保守判定</a:t>
+            </a:r>
+          </a:p>
+        </p:txBody>
+      </p:sp>
+      <p:sp>
+        <p:nvSpPr>
+          <p:cNvPr id="20" name="module-no-2">
+            <a:extLst xmlns:a="http://schemas.openxmlformats.org/drawingml/2006/main">
+              <a:ext uri="{FF2B5EF4-FFF2-40B4-BE49-F238E27FC236}">
+                <a16:creationId xmlns:a16="http://schemas.microsoft.com/office/drawing/2014/main" id="{998585AA-12B0-45B2-BD19-948BD92A54C4}"/>
+              </a:ext>
+            </a:extLst>
+          </p:cNvPr>
+          <p:cNvSpPr>
+            <a:spLocks xmlns:a="http://schemas.openxmlformats.org/drawingml/2006/main" noGrp="1"/>
+          </p:cNvSpPr>
+          <p:nvPr/>
+        </p:nvSpPr>
+        <p:spPr>
+          <a:xfrm xmlns:a="http://schemas.openxmlformats.org/drawingml/2006/main">
+            <a:off x="3790950" y="4152900"/>
+            <a:ext cx="514350" cy="285750"/>
+          </a:xfrm>
+          <a:prstGeom xmlns:a="http://schemas.openxmlformats.org/drawingml/2006/main" prst="rect">
+            <a:avLst/>
+          </a:prstGeom>
+          <a:noFill xmlns:a="http://schemas.openxmlformats.org/drawingml/2006/main"/>
+          <a:ln xmlns:a="http://schemas.openxmlformats.org/drawingml/2006/main" w="0">
+            <a:noFill/>
+            <a:prstDash val="solid"/>
+          </a:ln>
+        </p:spPr>
+        <p:txBody>
+          <a:bodyPr xmlns:a="http://schemas.openxmlformats.org/drawingml/2006/main" wrap="square" lIns="0" tIns="0" rIns="0" bIns="0" anchor="t">
+            <a:normAutofit fontScale="100000"/>
+          </a:bodyPr>
+          <a:lstStyle xmlns:a="http://schemas.openxmlformats.org/drawingml/2006/main"/>
+          <a:p xmlns:a="http://schemas.openxmlformats.org/drawingml/2006/main">
+            <a:pPr algn="l">
+              <a:defRPr sz="1575" b="1" i="0">
+                <a:solidFill>
+                  <a:srgbClr val="159A91"/>
+                </a:solidFill>
+                <a:latin typeface="Microsoft YaHei"/>
+                <a:ea typeface="Microsoft YaHei"/>
+                <a:cs typeface="Microsoft YaHei"/>
+              </a:defRPr>
+            </a:pPr>
+            <a:r>
+              <a:rPr sz="1575" b="1" i="0">
+                <a:solidFill>
+                  <a:srgbClr val="159A91"/>
+                </a:solidFill>
+                <a:latin typeface="Microsoft YaHei"/>
+                <a:ea typeface="Microsoft YaHei"/>
+                <a:cs typeface="Microsoft YaHei"/>
+              </a:rPr>
+              <a:t>03</a:t>
+            </a:r>
+          </a:p>
+        </p:txBody>
+      </p:sp>
+      <p:sp>
+        <p:nvSpPr>
+          <p:cNvPr id="21" name="module-title-2">
+            <a:extLst xmlns:a="http://schemas.openxmlformats.org/drawingml/2006/main">
+              <a:ext uri="{FF2B5EF4-FFF2-40B4-BE49-F238E27FC236}">
+                <a16:creationId xmlns:a16="http://schemas.microsoft.com/office/drawing/2014/main" id="{867F60C0-3D22-452D-857B-D2986DE3A03A}"/>
+              </a:ext>
+            </a:extLst>
+          </p:cNvPr>
+          <p:cNvSpPr>
+            <a:spLocks xmlns:a="http://schemas.openxmlformats.org/drawingml/2006/main" noGrp="1"/>
+          </p:cNvSpPr>
+          <p:nvPr/>
+        </p:nvSpPr>
+        <p:spPr>
+          <a:xfrm xmlns:a="http://schemas.openxmlformats.org/drawingml/2006/main">
+            <a:off x="4362450" y="4076700"/>
+            <a:ext cx="3771900" cy="304800"/>
+          </a:xfrm>
+          <a:prstGeom xmlns:a="http://schemas.openxmlformats.org/drawingml/2006/main" prst="rect">
+            <a:avLst/>
+          </a:prstGeom>
+          <a:noFill xmlns:a="http://schemas.openxmlformats.org/drawingml/2006/main"/>
+          <a:ln xmlns:a="http://schemas.openxmlformats.org/drawingml/2006/main" w="0">
+            <a:noFill/>
+            <a:prstDash val="solid"/>
+          </a:ln>
+        </p:spPr>
+        <p:txBody>
+          <a:bodyPr xmlns:a="http://schemas.openxmlformats.org/drawingml/2006/main" wrap="square" lIns="0" tIns="0" rIns="0" bIns="0" anchor="t">
+            <a:normAutofit fontScale="100000"/>
+          </a:bodyPr>
+          <a:lstStyle xmlns:a="http://schemas.openxmlformats.org/drawingml/2006/main"/>
+          <a:p xmlns:a="http://schemas.openxmlformats.org/drawingml/2006/main">
+            <a:pPr algn="l">
+              <a:defRPr sz="1500" b="1" i="0">
+                <a:solidFill>
+                  <a:srgbClr val="12263A"/>
+                </a:solidFill>
+                <a:latin typeface="Microsoft YaHei"/>
+                <a:ea typeface="Microsoft YaHei"/>
+                <a:cs typeface="Microsoft YaHei"/>
+              </a:defRPr>
+            </a:pPr>
+            <a:r>
+              <a:rPr sz="1500" b="1" i="0">
+                <a:solidFill>
+                  <a:srgbClr val="12263A"/>
+                </a:solidFill>
+                <a:latin typeface="Microsoft YaHei"/>
+                <a:ea typeface="Microsoft YaHei"/>
+                <a:cs typeface="Microsoft YaHei"/>
+              </a:rPr>
+              <a:t>图文证据核验与闭环验证</a:t>
+            </a:r>
+          </a:p>
+        </p:txBody>
+      </p:sp>
+      <p:sp>
+        <p:nvSpPr>
+          <p:cNvPr id="22" name="module-body-2">
+            <a:extLst xmlns:a="http://schemas.openxmlformats.org/drawingml/2006/main">
+              <a:ext uri="{FF2B5EF4-FFF2-40B4-BE49-F238E27FC236}">
+                <a16:creationId xmlns:a16="http://schemas.microsoft.com/office/drawing/2014/main" id="{FA8F96F0-F5BC-44D6-88F3-0842F05993C1}"/>
+              </a:ext>
+            </a:extLst>
+          </p:cNvPr>
+          <p:cNvSpPr>
+            <a:spLocks xmlns:a="http://schemas.openxmlformats.org/drawingml/2006/main" noGrp="1"/>
+          </p:cNvSpPr>
+          <p:nvPr/>
+        </p:nvSpPr>
+        <p:spPr>
+          <a:xfrm xmlns:a="http://schemas.openxmlformats.org/drawingml/2006/main">
+            <a:off x="4362450" y="4438650"/>
+            <a:ext cx="3771900" cy="323850"/>
+          </a:xfrm>
+          <a:prstGeom xmlns:a="http://schemas.openxmlformats.org/drawingml/2006/main" prst="rect">
+            <a:avLst/>
+          </a:prstGeom>
+          <a:noFill xmlns:a="http://schemas.openxmlformats.org/drawingml/2006/main"/>
+          <a:ln xmlns:a="http://schemas.openxmlformats.org/drawingml/2006/main" w="0">
+            <a:noFill/>
+            <a:prstDash val="solid"/>
+          </a:ln>
+        </p:spPr>
+        <p:txBody>
+          <a:bodyPr xmlns:a="http://schemas.openxmlformats.org/drawingml/2006/main" wrap="square" lIns="0" tIns="0" rIns="0" bIns="0" anchor="t">
+            <a:normAutofit fontScale="100000"/>
+          </a:bodyPr>
+          <a:lstStyle xmlns:a="http://schemas.openxmlformats.org/drawingml/2006/main"/>
+          <a:p xmlns:a="http://schemas.openxmlformats.org/drawingml/2006/main">
+            <a:pPr algn="l">
+              <a:defRPr sz="1200" b="0" i="0">
+                <a:solidFill>
+                  <a:srgbClr val="25364A"/>
+                </a:solidFill>
+                <a:latin typeface="Microsoft YaHei"/>
+                <a:ea typeface="Microsoft YaHei"/>
+                <a:cs typeface="Microsoft YaHei"/>
+              </a:defRPr>
+            </a:pPr>
+            <a:r>
+              <a:rPr sz="1200" b="0" i="0">
+                <a:solidFill>
+                  <a:srgbClr val="25364A"/>
+                </a:solidFill>
+                <a:latin typeface="Microsoft YaHei"/>
+                <a:ea typeface="Microsoft YaHei"/>
+                <a:cs typeface="Microsoft YaHei"/>
+              </a:rPr>
+              <a:t>核验对象、属性、数量、关系，并验证下游增益</a:t>
+            </a:r>
+          </a:p>
+        </p:txBody>
+      </p:sp>
+      <p:sp>
+        <p:nvSpPr>
+          <p:cNvPr id="23" name="auto-text-31">
+            <a:extLst xmlns:a="http://schemas.openxmlformats.org/drawingml/2006/main">
+              <a:ext uri="{FF2B5EF4-FFF2-40B4-BE49-F238E27FC236}">
+                <a16:creationId xmlns:a16="http://schemas.microsoft.com/office/drawing/2014/main" id="{DF9DA4FF-F97E-42EC-A8DF-2E335DA32552}"/>
+              </a:ext>
+            </a:extLst>
+          </p:cNvPr>
+          <p:cNvSpPr>
+            <a:spLocks xmlns:a="http://schemas.openxmlformats.org/drawingml/2006/main" noGrp="1"/>
+          </p:cNvSpPr>
+          <p:nvPr/>
+        </p:nvSpPr>
+        <p:spPr>
+          <a:xfrm xmlns:a="http://schemas.openxmlformats.org/drawingml/2006/main">
+            <a:off x="8705850" y="2857500"/>
+            <a:ext cx="400050" cy="571500"/>
           </a:xfrm>
           <a:prstGeom xmlns:a="http://schemas.openxmlformats.org/drawingml/2006/main" prst="rect">
             <a:avLst/>
@@ -8201,318 +8975,51 @@
           <a:lstStyle xmlns:a="http://schemas.openxmlformats.org/drawingml/2006/main"/>
           <a:p xmlns:a="http://schemas.openxmlformats.org/drawingml/2006/main">
             <a:pPr algn="ctr">
-              <a:defRPr sz="1200" b="1" i="0">
-                <a:solidFill>
-                  <a:srgbClr val="2F6BFF"/>
-                </a:solidFill>
-                <a:latin typeface="Microsoft YaHei"/>
-                <a:ea typeface="Microsoft YaHei"/>
-                <a:cs typeface="Microsoft YaHei"/>
-              </a:defRPr>
-            </a:pPr>
-            <a:r>
-              <a:rPr sz="1200" b="1" i="0">
-                <a:solidFill>
-                  <a:srgbClr val="2F6BFF"/>
-                </a:solidFill>
-                <a:latin typeface="Microsoft YaHei"/>
-                <a:ea typeface="Microsoft YaHei"/>
-                <a:cs typeface="Microsoft YaHei"/>
-              </a:rPr>
-              <a:t>输出：任务适配后的评分标准</a:t>
-            </a:r>
-          </a:p>
-        </p:txBody>
-      </p:sp>
-      <p:sp>
-        <p:nvSpPr>
-          <p:cNvPr id="10" name="sow-module-1">
-            <a:extLst xmlns:a="http://schemas.openxmlformats.org/drawingml/2006/main">
-              <a:ext uri="{FF2B5EF4-FFF2-40B4-BE49-F238E27FC236}">
-                <a16:creationId xmlns:a16="http://schemas.microsoft.com/office/drawing/2014/main" id="{43A8845D-4B5F-44A9-9B38-4EF9A080AE19}"/>
-              </a:ext>
-            </a:extLst>
-          </p:cNvPr>
-          <p:cNvSpPr>
-            <a:spLocks xmlns:a="http://schemas.openxmlformats.org/drawingml/2006/main" noGrp="1"/>
-          </p:cNvSpPr>
-          <p:nvPr/>
-        </p:nvSpPr>
-        <p:spPr>
-          <a:xfrm xmlns:a="http://schemas.openxmlformats.org/drawingml/2006/main">
-            <a:off x="4248150" y="1562100"/>
-            <a:ext cx="3390900" cy="2686050"/>
+              <a:defRPr sz="3150" b="1" i="0">
+                <a:solidFill>
+                  <a:srgbClr val="86C9C2"/>
+                </a:solidFill>
+                <a:latin typeface="Microsoft YaHei"/>
+                <a:ea typeface="Microsoft YaHei"/>
+                <a:cs typeface="Microsoft YaHei"/>
+              </a:defRPr>
+            </a:pPr>
+            <a:r>
+              <a:rPr sz="3150" b="1" i="0">
+                <a:solidFill>
+                  <a:srgbClr val="86C9C2"/>
+                </a:solidFill>
+                <a:latin typeface="Microsoft YaHei"/>
+                <a:ea typeface="Microsoft YaHei"/>
+                <a:cs typeface="Microsoft YaHei"/>
+              </a:rPr>
+              <a:t>→</a:t>
+            </a:r>
+          </a:p>
+        </p:txBody>
+      </p:sp>
+      <p:sp>
+        <p:nvSpPr>
+          <p:cNvPr id="24" name="output-node">
+            <a:extLst xmlns:a="http://schemas.openxmlformats.org/drawingml/2006/main">
+              <a:ext uri="{FF2B5EF4-FFF2-40B4-BE49-F238E27FC236}">
+                <a16:creationId xmlns:a16="http://schemas.microsoft.com/office/drawing/2014/main" id="{5D31F80A-2788-4A91-8160-CAE046FA9AAC}"/>
+              </a:ext>
+            </a:extLst>
+          </p:cNvPr>
+          <p:cNvSpPr>
+            <a:spLocks xmlns:a="http://schemas.openxmlformats.org/drawingml/2006/main" noGrp="1"/>
+          </p:cNvSpPr>
+          <p:nvPr/>
+        </p:nvSpPr>
+        <p:spPr>
+          <a:xfrm xmlns:a="http://schemas.openxmlformats.org/drawingml/2006/main">
+            <a:off x="9124950" y="1562100"/>
+            <a:ext cx="2552700" cy="3600450"/>
           </a:xfrm>
           <a:prstGeom xmlns:a="http://schemas.openxmlformats.org/drawingml/2006/main" prst="roundRect">
             <a:avLst>
-              <a:gd name="adj" fmla="val 4255"/>
-            </a:avLst>
-          </a:prstGeom>
-          <a:solidFill xmlns:a="http://schemas.openxmlformats.org/drawingml/2006/main">
-            <a:srgbClr val="F1EDFF"/>
-          </a:solidFill>
-          <a:ln xmlns:a="http://schemas.openxmlformats.org/drawingml/2006/main" w="9525">
-            <a:solidFill>
-              <a:srgbClr val="F1EDFF"/>
-            </a:solidFill>
-            <a:prstDash val="solid"/>
-          </a:ln>
-        </p:spPr>
-      </p:sp>
-      <p:sp>
-        <p:nvSpPr>
-          <p:cNvPr id="11" name="sow-no-1">
-            <a:extLst xmlns:a="http://schemas.openxmlformats.org/drawingml/2006/main">
-              <a:ext uri="{FF2B5EF4-FFF2-40B4-BE49-F238E27FC236}">
-                <a16:creationId xmlns:a16="http://schemas.microsoft.com/office/drawing/2014/main" id="{8B1E7847-833F-4306-A164-40EB5EBA61E9}"/>
-              </a:ext>
-            </a:extLst>
-          </p:cNvPr>
-          <p:cNvSpPr>
-            <a:spLocks xmlns:a="http://schemas.openxmlformats.org/drawingml/2006/main" noGrp="1"/>
-          </p:cNvSpPr>
-          <p:nvPr/>
-        </p:nvSpPr>
-        <p:spPr>
-          <a:xfrm xmlns:a="http://schemas.openxmlformats.org/drawingml/2006/main">
-            <a:off x="4476750" y="1790700"/>
-            <a:ext cx="838200" cy="266700"/>
-          </a:xfrm>
-          <a:prstGeom xmlns:a="http://schemas.openxmlformats.org/drawingml/2006/main" prst="rect">
-            <a:avLst/>
-          </a:prstGeom>
-          <a:noFill xmlns:a="http://schemas.openxmlformats.org/drawingml/2006/main"/>
-          <a:ln xmlns:a="http://schemas.openxmlformats.org/drawingml/2006/main" w="0">
-            <a:noFill/>
-            <a:prstDash val="solid"/>
-          </a:ln>
-        </p:spPr>
-        <p:txBody>
-          <a:bodyPr xmlns:a="http://schemas.openxmlformats.org/drawingml/2006/main" wrap="square" lIns="0" tIns="0" rIns="0" bIns="0" anchor="t">
-            <a:normAutofit fontScale="100000"/>
-          </a:bodyPr>
-          <a:lstStyle xmlns:a="http://schemas.openxmlformats.org/drawingml/2006/main"/>
-          <a:p xmlns:a="http://schemas.openxmlformats.org/drawingml/2006/main">
-            <a:pPr algn="l">
-              <a:defRPr sz="1350" b="1" i="0">
-                <a:solidFill>
-                  <a:srgbClr val="7B61D1"/>
-                </a:solidFill>
-                <a:latin typeface="Microsoft YaHei"/>
-                <a:ea typeface="Microsoft YaHei"/>
-                <a:cs typeface="Microsoft YaHei"/>
-              </a:defRPr>
-            </a:pPr>
-            <a:r>
-              <a:rPr sz="1350" b="1" i="0">
-                <a:solidFill>
-                  <a:srgbClr val="7B61D1"/>
-                </a:solidFill>
-                <a:latin typeface="Microsoft YaHei"/>
-                <a:ea typeface="Microsoft YaHei"/>
-                <a:cs typeface="Microsoft YaHei"/>
-              </a:rPr>
-              <a:t>模块二</a:t>
-            </a:r>
-          </a:p>
-        </p:txBody>
-      </p:sp>
-      <p:sp>
-        <p:nvSpPr>
-          <p:cNvPr id="12" name="sow-title-1">
-            <a:extLst xmlns:a="http://schemas.openxmlformats.org/drawingml/2006/main">
-              <a:ext uri="{FF2B5EF4-FFF2-40B4-BE49-F238E27FC236}">
-                <a16:creationId xmlns:a16="http://schemas.microsoft.com/office/drawing/2014/main" id="{E1AA028C-A2D3-4D0E-8986-DFC207109CA2}"/>
-              </a:ext>
-            </a:extLst>
-          </p:cNvPr>
-          <p:cNvSpPr>
-            <a:spLocks xmlns:a="http://schemas.openxmlformats.org/drawingml/2006/main" noGrp="1"/>
-          </p:cNvSpPr>
-          <p:nvPr/>
-        </p:nvSpPr>
-        <p:spPr>
-          <a:xfrm xmlns:a="http://schemas.openxmlformats.org/drawingml/2006/main">
-            <a:off x="4476750" y="2171700"/>
-            <a:ext cx="2933700" cy="552450"/>
-          </a:xfrm>
-          <a:prstGeom xmlns:a="http://schemas.openxmlformats.org/drawingml/2006/main" prst="rect">
-            <a:avLst/>
-          </a:prstGeom>
-          <a:noFill xmlns:a="http://schemas.openxmlformats.org/drawingml/2006/main"/>
-          <a:ln xmlns:a="http://schemas.openxmlformats.org/drawingml/2006/main" w="0">
-            <a:noFill/>
-            <a:prstDash val="solid"/>
-          </a:ln>
-        </p:spPr>
-        <p:txBody>
-          <a:bodyPr xmlns:a="http://schemas.openxmlformats.org/drawingml/2006/main" wrap="square" lIns="0" tIns="0" rIns="0" bIns="0" anchor="t">
-            <a:normAutofit fontScale="100000"/>
-          </a:bodyPr>
-          <a:lstStyle xmlns:a="http://schemas.openxmlformats.org/drawingml/2006/main"/>
-          <a:p xmlns:a="http://schemas.openxmlformats.org/drawingml/2006/main">
-            <a:pPr algn="l">
-              <a:defRPr sz="1725" b="1" i="0">
-                <a:solidFill>
-                  <a:srgbClr val="12263A"/>
-                </a:solidFill>
-                <a:latin typeface="Microsoft YaHei"/>
-                <a:ea typeface="Microsoft YaHei"/>
-                <a:cs typeface="Microsoft YaHei"/>
-              </a:defRPr>
-            </a:pPr>
-            <a:r>
-              <a:rPr sz="1725" b="1" i="0">
-                <a:solidFill>
-                  <a:srgbClr val="12263A"/>
-                </a:solidFill>
-                <a:latin typeface="Microsoft YaHei"/>
-                <a:ea typeface="Microsoft YaHei"/>
-                <a:cs typeface="Microsoft YaHei"/>
-              </a:rPr>
-              <a:t>邻域共识与分歧鲁棒选择</a:t>
-            </a:r>
-          </a:p>
-        </p:txBody>
-      </p:sp>
-      <p:sp>
-        <p:nvSpPr>
-          <p:cNvPr id="13" name="sow-body-1">
-            <a:extLst xmlns:a="http://schemas.openxmlformats.org/drawingml/2006/main">
-              <a:ext uri="{FF2B5EF4-FFF2-40B4-BE49-F238E27FC236}">
-                <a16:creationId xmlns:a16="http://schemas.microsoft.com/office/drawing/2014/main" id="{8ECC6A32-7811-4678-B609-6FA68A876EEA}"/>
-              </a:ext>
-            </a:extLst>
-          </p:cNvPr>
-          <p:cNvSpPr>
-            <a:spLocks xmlns:a="http://schemas.openxmlformats.org/drawingml/2006/main" noGrp="1"/>
-          </p:cNvSpPr>
-          <p:nvPr/>
-        </p:nvSpPr>
-        <p:spPr>
-          <a:xfrm xmlns:a="http://schemas.openxmlformats.org/drawingml/2006/main">
-            <a:off x="4476750" y="2914650"/>
-            <a:ext cx="2933700" cy="800100"/>
-          </a:xfrm>
-          <a:prstGeom xmlns:a="http://schemas.openxmlformats.org/drawingml/2006/main" prst="rect">
-            <a:avLst/>
-          </a:prstGeom>
-          <a:noFill xmlns:a="http://schemas.openxmlformats.org/drawingml/2006/main"/>
-          <a:ln xmlns:a="http://schemas.openxmlformats.org/drawingml/2006/main" w="0">
-            <a:noFill/>
-            <a:prstDash val="solid"/>
-          </a:ln>
-        </p:spPr>
-        <p:txBody>
-          <a:bodyPr xmlns:a="http://schemas.openxmlformats.org/drawingml/2006/main" wrap="square" lIns="0" tIns="0" rIns="0" bIns="0" anchor="t">
-            <a:normAutofit fontScale="100000"/>
-          </a:bodyPr>
-          <a:lstStyle xmlns:a="http://schemas.openxmlformats.org/drawingml/2006/main"/>
-          <a:p xmlns:a="http://schemas.openxmlformats.org/drawingml/2006/main">
-            <a:pPr algn="l">
-              <a:defRPr sz="1275" b="0" i="0">
-                <a:solidFill>
-                  <a:srgbClr val="25364A"/>
-                </a:solidFill>
-                <a:latin typeface="Microsoft YaHei"/>
-                <a:ea typeface="Microsoft YaHei"/>
-                <a:cs typeface="Microsoft YaHei"/>
-              </a:defRPr>
-            </a:pPr>
-            <a:r>
-              <a:rPr sz="1275" b="0" i="0">
-                <a:solidFill>
-                  <a:srgbClr val="25364A"/>
-                </a:solidFill>
-                <a:latin typeface="Microsoft YaHei"/>
-                <a:ea typeface="Microsoft YaHei"/>
-                <a:cs typeface="Microsoft YaHei"/>
-              </a:rPr>
-              <a:t>生成相邻Rubric、Prompt和权重配置；聚合多视角结论，对分歧样本进行保守判定或转人工。</a:t>
-            </a:r>
-          </a:p>
-        </p:txBody>
-      </p:sp>
-      <p:sp>
-        <p:nvSpPr>
-          <p:cNvPr id="14" name="sow-output-1">
-            <a:extLst xmlns:a="http://schemas.openxmlformats.org/drawingml/2006/main">
-              <a:ext uri="{FF2B5EF4-FFF2-40B4-BE49-F238E27FC236}">
-                <a16:creationId xmlns:a16="http://schemas.microsoft.com/office/drawing/2014/main" id="{ACB15CEE-52C9-43AD-85AF-4B9A3D6F854E}"/>
-              </a:ext>
-            </a:extLst>
-          </p:cNvPr>
-          <p:cNvSpPr>
-            <a:spLocks xmlns:a="http://schemas.openxmlformats.org/drawingml/2006/main" noGrp="1"/>
-          </p:cNvSpPr>
-          <p:nvPr/>
-        </p:nvSpPr>
-        <p:spPr>
-          <a:xfrm xmlns:a="http://schemas.openxmlformats.org/drawingml/2006/main">
-            <a:off x="4476750" y="3810000"/>
-            <a:ext cx="2933700" cy="266700"/>
-          </a:xfrm>
-          <a:prstGeom xmlns:a="http://schemas.openxmlformats.org/drawingml/2006/main" prst="rect">
-            <a:avLst/>
-          </a:prstGeom>
-          <a:noFill xmlns:a="http://schemas.openxmlformats.org/drawingml/2006/main"/>
-          <a:ln xmlns:a="http://schemas.openxmlformats.org/drawingml/2006/main" w="0">
-            <a:noFill/>
-            <a:prstDash val="solid"/>
-          </a:ln>
-        </p:spPr>
-        <p:txBody>
-          <a:bodyPr xmlns:a="http://schemas.openxmlformats.org/drawingml/2006/main" wrap="square" lIns="0" tIns="0" rIns="0" bIns="0" anchor="t">
-            <a:normAutofit fontScale="100000"/>
-          </a:bodyPr>
-          <a:lstStyle xmlns:a="http://schemas.openxmlformats.org/drawingml/2006/main"/>
-          <a:p xmlns:a="http://schemas.openxmlformats.org/drawingml/2006/main">
-            <a:pPr algn="ctr">
-              <a:defRPr sz="1200" b="1" i="0">
-                <a:solidFill>
-                  <a:srgbClr val="7B61D1"/>
-                </a:solidFill>
-                <a:latin typeface="Microsoft YaHei"/>
-                <a:ea typeface="Microsoft YaHei"/>
-                <a:cs typeface="Microsoft YaHei"/>
-              </a:defRPr>
-            </a:pPr>
-            <a:r>
-              <a:rPr sz="1200" b="1" i="0">
-                <a:solidFill>
-                  <a:srgbClr val="7B61D1"/>
-                </a:solidFill>
-                <a:latin typeface="Microsoft YaHei"/>
-                <a:ea typeface="Microsoft YaHei"/>
-                <a:cs typeface="Microsoft YaHei"/>
-              </a:rPr>
-              <a:t>输出：更稳定的筛选结论</a:t>
-            </a:r>
-          </a:p>
-        </p:txBody>
-      </p:sp>
-      <p:sp>
-        <p:nvSpPr>
-          <p:cNvPr id="15" name="sow-module-2">
-            <a:extLst xmlns:a="http://schemas.openxmlformats.org/drawingml/2006/main">
-              <a:ext uri="{FF2B5EF4-FFF2-40B4-BE49-F238E27FC236}">
-                <a16:creationId xmlns:a16="http://schemas.microsoft.com/office/drawing/2014/main" id="{FE84DDC3-9C3F-4BB7-82AC-2E4893C3E915}"/>
-              </a:ext>
-            </a:extLst>
-          </p:cNvPr>
-          <p:cNvSpPr>
-            <a:spLocks xmlns:a="http://schemas.openxmlformats.org/drawingml/2006/main" noGrp="1"/>
-          </p:cNvSpPr>
-          <p:nvPr/>
-        </p:nvSpPr>
-        <p:spPr>
-          <a:xfrm xmlns:a="http://schemas.openxmlformats.org/drawingml/2006/main">
-            <a:off x="7981950" y="1562100"/>
-            <a:ext cx="3390900" cy="2686050"/>
-          </a:xfrm>
-          <a:prstGeom xmlns:a="http://schemas.openxmlformats.org/drawingml/2006/main" prst="roundRect">
-            <a:avLst>
-              <a:gd name="adj" fmla="val 4255"/>
+              <a:gd name="adj" fmla="val 4478"/>
             </a:avLst>
           </a:prstGeom>
           <a:solidFill xmlns:a="http://schemas.openxmlformats.org/drawingml/2006/main">
@@ -8520,7 +9027,7 @@
           </a:solidFill>
           <a:ln xmlns:a="http://schemas.openxmlformats.org/drawingml/2006/main" w="9525">
             <a:solidFill>
-              <a:srgbClr val="E7F6F3"/>
+              <a:srgbClr val="B6DDD8"/>
             </a:solidFill>
             <a:prstDash val="solid"/>
           </a:ln>
@@ -8528,22 +9035,22 @@
       </p:sp>
       <p:sp>
         <p:nvSpPr>
-          <p:cNvPr id="16" name="sow-no-2">
-            <a:extLst xmlns:a="http://schemas.openxmlformats.org/drawingml/2006/main">
-              <a:ext uri="{FF2B5EF4-FFF2-40B4-BE49-F238E27FC236}">
-                <a16:creationId xmlns:a16="http://schemas.microsoft.com/office/drawing/2014/main" id="{8F4C0E1C-EDAE-4D4C-A397-1AABF0AF59C3}"/>
-              </a:ext>
-            </a:extLst>
-          </p:cNvPr>
-          <p:cNvSpPr>
-            <a:spLocks xmlns:a="http://schemas.openxmlformats.org/drawingml/2006/main" noGrp="1"/>
-          </p:cNvSpPr>
-          <p:nvPr/>
-        </p:nvSpPr>
-        <p:spPr>
-          <a:xfrm xmlns:a="http://schemas.openxmlformats.org/drawingml/2006/main">
-            <a:off x="8210550" y="1790700"/>
-            <a:ext cx="838200" cy="266700"/>
+          <p:cNvPr id="25" name="auto-text-32">
+            <a:extLst xmlns:a="http://schemas.openxmlformats.org/drawingml/2006/main">
+              <a:ext uri="{FF2B5EF4-FFF2-40B4-BE49-F238E27FC236}">
+                <a16:creationId xmlns:a16="http://schemas.microsoft.com/office/drawing/2014/main" id="{08FB96D5-15BF-4EE3-A61B-1FEC5A3559BC}"/>
+              </a:ext>
+            </a:extLst>
+          </p:cNvPr>
+          <p:cNvSpPr>
+            <a:spLocks xmlns:a="http://schemas.openxmlformats.org/drawingml/2006/main" noGrp="1"/>
+          </p:cNvSpPr>
+          <p:nvPr/>
+        </p:nvSpPr>
+        <p:spPr>
+          <a:xfrm xmlns:a="http://schemas.openxmlformats.org/drawingml/2006/main">
+            <a:off x="9372600" y="1790700"/>
+            <a:ext cx="1809750" cy="323850"/>
           </a:xfrm>
           <a:prstGeom xmlns:a="http://schemas.openxmlformats.org/drawingml/2006/main" prst="rect">
             <a:avLst/>
@@ -8561,7 +9068,7 @@
           <a:lstStyle xmlns:a="http://schemas.openxmlformats.org/drawingml/2006/main"/>
           <a:p xmlns:a="http://schemas.openxmlformats.org/drawingml/2006/main">
             <a:pPr algn="l">
-              <a:defRPr sz="1350" b="1" i="0">
+              <a:defRPr sz="1875" b="1" i="0">
                 <a:solidFill>
                   <a:srgbClr val="159A91"/>
                 </a:solidFill>
@@ -8571,7 +9078,7 @@
               </a:defRPr>
             </a:pPr>
             <a:r>
-              <a:rPr sz="1350" b="1" i="0">
+              <a:rPr sz="1875" b="1" i="0">
                 <a:solidFill>
                   <a:srgbClr val="159A91"/>
                 </a:solidFill>
@@ -8579,87 +9086,29 @@
                 <a:ea typeface="Microsoft YaHei"/>
                 <a:cs typeface="Microsoft YaHei"/>
               </a:rPr>
-              <a:t>模块三</a:t>
-            </a:r>
-          </a:p>
-        </p:txBody>
-      </p:sp>
-      <p:sp>
-        <p:nvSpPr>
-          <p:cNvPr id="17" name="sow-title-2">
-            <a:extLst xmlns:a="http://schemas.openxmlformats.org/drawingml/2006/main">
-              <a:ext uri="{FF2B5EF4-FFF2-40B4-BE49-F238E27FC236}">
-                <a16:creationId xmlns:a16="http://schemas.microsoft.com/office/drawing/2014/main" id="{012A2538-91B2-4FBF-8D5C-E25684FBA2AE}"/>
-              </a:ext>
-            </a:extLst>
-          </p:cNvPr>
-          <p:cNvSpPr>
-            <a:spLocks xmlns:a="http://schemas.openxmlformats.org/drawingml/2006/main" noGrp="1"/>
-          </p:cNvSpPr>
-          <p:nvPr/>
-        </p:nvSpPr>
-        <p:spPr>
-          <a:xfrm xmlns:a="http://schemas.openxmlformats.org/drawingml/2006/main">
-            <a:off x="8210550" y="2171700"/>
-            <a:ext cx="2933700" cy="552450"/>
-          </a:xfrm>
-          <a:prstGeom xmlns:a="http://schemas.openxmlformats.org/drawingml/2006/main" prst="rect">
-            <a:avLst/>
-          </a:prstGeom>
-          <a:noFill xmlns:a="http://schemas.openxmlformats.org/drawingml/2006/main"/>
-          <a:ln xmlns:a="http://schemas.openxmlformats.org/drawingml/2006/main" w="0">
-            <a:noFill/>
-            <a:prstDash val="solid"/>
-          </a:ln>
-        </p:spPr>
-        <p:txBody>
-          <a:bodyPr xmlns:a="http://schemas.openxmlformats.org/drawingml/2006/main" wrap="square" lIns="0" tIns="0" rIns="0" bIns="0" anchor="t">
-            <a:normAutofit fontScale="100000"/>
-          </a:bodyPr>
-          <a:lstStyle xmlns:a="http://schemas.openxmlformats.org/drawingml/2006/main"/>
-          <a:p xmlns:a="http://schemas.openxmlformats.org/drawingml/2006/main">
-            <a:pPr algn="l">
-              <a:defRPr sz="1725" b="1" i="0">
-                <a:solidFill>
-                  <a:srgbClr val="12263A"/>
-                </a:solidFill>
-                <a:latin typeface="Microsoft YaHei"/>
-                <a:ea typeface="Microsoft YaHei"/>
-                <a:cs typeface="Microsoft YaHei"/>
-              </a:defRPr>
-            </a:pPr>
-            <a:r>
-              <a:rPr sz="1725" b="1" i="0">
-                <a:solidFill>
-                  <a:srgbClr val="12263A"/>
-                </a:solidFill>
-                <a:latin typeface="Microsoft YaHei"/>
-                <a:ea typeface="Microsoft YaHei"/>
-                <a:cs typeface="Microsoft YaHei"/>
-              </a:rPr>
-              <a:t>图文证据核验与闭环验证</a:t>
-            </a:r>
-          </a:p>
-        </p:txBody>
-      </p:sp>
-      <p:sp>
-        <p:nvSpPr>
-          <p:cNvPr id="18" name="sow-body-2">
-            <a:extLst xmlns:a="http://schemas.openxmlformats.org/drawingml/2006/main">
-              <a:ext uri="{FF2B5EF4-FFF2-40B4-BE49-F238E27FC236}">
-                <a16:creationId xmlns:a16="http://schemas.microsoft.com/office/drawing/2014/main" id="{E67B4F78-128B-451F-BC86-63AD9761AE99}"/>
-              </a:ext>
-            </a:extLst>
-          </p:cNvPr>
-          <p:cNvSpPr>
-            <a:spLocks xmlns:a="http://schemas.openxmlformats.org/drawingml/2006/main" noGrp="1"/>
-          </p:cNvSpPr>
-          <p:nvPr/>
-        </p:nvSpPr>
-        <p:spPr>
-          <a:xfrm xmlns:a="http://schemas.openxmlformats.org/drawingml/2006/main">
-            <a:off x="8210550" y="2914650"/>
-            <a:ext cx="2933700" cy="800100"/>
+              <a:t>预期能力</a:t>
+            </a:r>
+          </a:p>
+        </p:txBody>
+      </p:sp>
+      <p:sp>
+        <p:nvSpPr>
+          <p:cNvPr id="26" name="auto-text-33">
+            <a:extLst xmlns:a="http://schemas.openxmlformats.org/drawingml/2006/main">
+              <a:ext uri="{FF2B5EF4-FFF2-40B4-BE49-F238E27FC236}">
+                <a16:creationId xmlns:a16="http://schemas.microsoft.com/office/drawing/2014/main" id="{DE198FC0-C0D6-445B-9B06-F3A8DDFD8F71}"/>
+              </a:ext>
+            </a:extLst>
+          </p:cNvPr>
+          <p:cNvSpPr>
+            <a:spLocks xmlns:a="http://schemas.openxmlformats.org/drawingml/2006/main" noGrp="1"/>
+          </p:cNvSpPr>
+          <p:nvPr/>
+        </p:nvSpPr>
+        <p:spPr>
+          <a:xfrm xmlns:a="http://schemas.openxmlformats.org/drawingml/2006/main">
+            <a:off x="9372600" y="2343150"/>
+            <a:ext cx="2057400" cy="2381250"/>
           </a:xfrm>
           <a:prstGeom xmlns:a="http://schemas.openxmlformats.org/drawingml/2006/main" prst="rect">
             <a:avLst/>
@@ -8695,149 +9144,145 @@
                 <a:ea typeface="Microsoft YaHei"/>
                 <a:cs typeface="Microsoft YaHei"/>
               </a:rPr>
-              <a:t>核验对象、属性、数量、空间关系和局部瑕疵；比较筛选前后的训练或评测指标变化。</a:t>
-            </a:r>
-          </a:p>
-        </p:txBody>
-      </p:sp>
-      <p:sp>
-        <p:nvSpPr>
-          <p:cNvPr id="19" name="sow-output-2">
-            <a:extLst xmlns:a="http://schemas.openxmlformats.org/drawingml/2006/main">
-              <a:ext uri="{FF2B5EF4-FFF2-40B4-BE49-F238E27FC236}">
-                <a16:creationId xmlns:a16="http://schemas.microsoft.com/office/drawing/2014/main" id="{19D947F7-4725-474B-861D-DFBC1857E11F}"/>
-              </a:ext>
-            </a:extLst>
-          </p:cNvPr>
-          <p:cNvSpPr>
-            <a:spLocks xmlns:a="http://schemas.openxmlformats.org/drawingml/2006/main" noGrp="1"/>
-          </p:cNvSpPr>
-          <p:nvPr/>
-        </p:nvSpPr>
-        <p:spPr>
-          <a:xfrm xmlns:a="http://schemas.openxmlformats.org/drawingml/2006/main">
-            <a:off x="8210550" y="3810000"/>
-            <a:ext cx="2933700" cy="266700"/>
-          </a:xfrm>
-          <a:prstGeom xmlns:a="http://schemas.openxmlformats.org/drawingml/2006/main" prst="rect">
-            <a:avLst/>
-          </a:prstGeom>
-          <a:noFill xmlns:a="http://schemas.openxmlformats.org/drawingml/2006/main"/>
-          <a:ln xmlns:a="http://schemas.openxmlformats.org/drawingml/2006/main" w="0">
-            <a:noFill/>
-            <a:prstDash val="solid"/>
-          </a:ln>
-        </p:spPr>
-        <p:txBody>
-          <a:bodyPr xmlns:a="http://schemas.openxmlformats.org/drawingml/2006/main" wrap="square" lIns="0" tIns="0" rIns="0" bIns="0" anchor="t">
-            <a:normAutofit fontScale="100000"/>
-          </a:bodyPr>
-          <a:lstStyle xmlns:a="http://schemas.openxmlformats.org/drawingml/2006/main"/>
-          <a:p xmlns:a="http://schemas.openxmlformats.org/drawingml/2006/main">
-            <a:pPr algn="ctr">
-              <a:defRPr sz="1200" b="1" i="0">
-                <a:solidFill>
-                  <a:srgbClr val="159A91"/>
-                </a:solidFill>
-                <a:latin typeface="Microsoft YaHei"/>
-                <a:ea typeface="Microsoft YaHei"/>
-                <a:cs typeface="Microsoft YaHei"/>
-              </a:defRPr>
-            </a:pPr>
-            <a:r>
-              <a:rPr sz="1200" b="1" i="0">
-                <a:solidFill>
-                  <a:srgbClr val="159A91"/>
-                </a:solidFill>
-                <a:latin typeface="Microsoft YaHei"/>
-                <a:ea typeface="Microsoft YaHei"/>
-                <a:cs typeface="Microsoft YaHei"/>
-              </a:rPr>
-              <a:t>输出：证据、标签与适用边界</a:t>
-            </a:r>
-          </a:p>
-        </p:txBody>
-      </p:sp>
-      <p:sp>
-        <p:nvSpPr>
-          <p:cNvPr id="20" name="auto-text-25">
-            <a:extLst xmlns:a="http://schemas.openxmlformats.org/drawingml/2006/main">
-              <a:ext uri="{FF2B5EF4-FFF2-40B4-BE49-F238E27FC236}">
-                <a16:creationId xmlns:a16="http://schemas.microsoft.com/office/drawing/2014/main" id="{1ECBD117-1DF2-490A-9E5A-BA8EF0539B00}"/>
-              </a:ext>
-            </a:extLst>
-          </p:cNvPr>
-          <p:cNvSpPr>
-            <a:spLocks xmlns:a="http://schemas.openxmlformats.org/drawingml/2006/main" noGrp="1"/>
-          </p:cNvSpPr>
-          <p:nvPr/>
-        </p:nvSpPr>
-        <p:spPr>
-          <a:xfrm xmlns:a="http://schemas.openxmlformats.org/drawingml/2006/main">
-            <a:off x="514350" y="4476750"/>
-            <a:ext cx="3429000" cy="285750"/>
-          </a:xfrm>
-          <a:prstGeom xmlns:a="http://schemas.openxmlformats.org/drawingml/2006/main" prst="rect">
-            <a:avLst/>
-          </a:prstGeom>
-          <a:noFill xmlns:a="http://schemas.openxmlformats.org/drawingml/2006/main"/>
-          <a:ln xmlns:a="http://schemas.openxmlformats.org/drawingml/2006/main" w="0">
-            <a:noFill/>
-            <a:prstDash val="solid"/>
-          </a:ln>
-        </p:spPr>
-        <p:txBody>
-          <a:bodyPr xmlns:a="http://schemas.openxmlformats.org/drawingml/2006/main" wrap="square" lIns="0" tIns="0" rIns="0" bIns="0" anchor="t">
-            <a:normAutofit fontScale="100000"/>
-          </a:bodyPr>
-          <a:lstStyle xmlns:a="http://schemas.openxmlformats.org/drawingml/2006/main"/>
+              <a:t>任务适配的质量分数</a:t>
+            </a:r>
+          </a:p>
+          <a:p xmlns:a="http://schemas.openxmlformats.org/drawingml/2006/main">
+            <a:r>
+              <a:t/>
+            </a:r>
+          </a:p>
           <a:p xmlns:a="http://schemas.openxmlformats.org/drawingml/2006/main">
             <a:pPr algn="l">
-              <a:defRPr sz="1575" b="1" i="0">
-                <a:solidFill>
-                  <a:srgbClr val="12263A"/>
-                </a:solidFill>
-                <a:latin typeface="Microsoft YaHei"/>
-                <a:ea typeface="Microsoft YaHei"/>
-                <a:cs typeface="Microsoft YaHei"/>
-              </a:defRPr>
-            </a:pPr>
-            <a:r>
-              <a:rPr sz="1575" b="1" i="0">
-                <a:solidFill>
-                  <a:srgbClr val="12263A"/>
-                </a:solidFill>
-                <a:latin typeface="Microsoft YaHei"/>
-                <a:ea typeface="Microsoft YaHei"/>
-                <a:cs typeface="Microsoft YaHei"/>
-              </a:rPr>
-              <a:t>可调用的底层评估器与证据工具</a:t>
-            </a:r>
-          </a:p>
-        </p:txBody>
-      </p:sp>
-      <p:sp>
-        <p:nvSpPr>
-          <p:cNvPr id="21" name="evaluator-pool">
-            <a:extLst xmlns:a="http://schemas.openxmlformats.org/drawingml/2006/main">
-              <a:ext uri="{FF2B5EF4-FFF2-40B4-BE49-F238E27FC236}">
-                <a16:creationId xmlns:a16="http://schemas.microsoft.com/office/drawing/2014/main" id="{5E06837C-9AF9-4D71-A8C7-D14EE09BBA2A}"/>
-              </a:ext>
-            </a:extLst>
-          </p:cNvPr>
-          <p:cNvSpPr>
-            <a:spLocks xmlns:a="http://schemas.openxmlformats.org/drawingml/2006/main" noGrp="1"/>
-          </p:cNvSpPr>
-          <p:nvPr/>
-        </p:nvSpPr>
-        <p:spPr>
-          <a:xfrm xmlns:a="http://schemas.openxmlformats.org/drawingml/2006/main">
-            <a:off x="514350" y="4857750"/>
-            <a:ext cx="11163300" cy="723900"/>
+              <a:defRPr sz="1275" b="0" i="0">
+                <a:solidFill>
+                  <a:srgbClr val="25364A"/>
+                </a:solidFill>
+                <a:latin typeface="Microsoft YaHei"/>
+                <a:ea typeface="Microsoft YaHei"/>
+                <a:cs typeface="Microsoft YaHei"/>
+              </a:defRPr>
+            </a:pPr>
+            <a:r>
+              <a:rPr sz="1275" b="0" i="0">
+                <a:solidFill>
+                  <a:srgbClr val="25364A"/>
+                </a:solidFill>
+                <a:latin typeface="Microsoft YaHei"/>
+                <a:ea typeface="Microsoft YaHei"/>
+                <a:cs typeface="Microsoft YaHei"/>
+              </a:rPr>
+              <a:t>高／低质量筛选结论</a:t>
+            </a:r>
+          </a:p>
+          <a:p xmlns:a="http://schemas.openxmlformats.org/drawingml/2006/main">
+            <a:r>
+              <a:t/>
+            </a:r>
+          </a:p>
+          <a:p xmlns:a="http://schemas.openxmlformats.org/drawingml/2006/main">
+            <a:pPr algn="l">
+              <a:defRPr sz="1275" b="0" i="0">
+                <a:solidFill>
+                  <a:srgbClr val="25364A"/>
+                </a:solidFill>
+                <a:latin typeface="Microsoft YaHei"/>
+                <a:ea typeface="Microsoft YaHei"/>
+                <a:cs typeface="Microsoft YaHei"/>
+              </a:defRPr>
+            </a:pPr>
+            <a:r>
+              <a:rPr sz="1275" b="0" i="0">
+                <a:solidFill>
+                  <a:srgbClr val="25364A"/>
+                </a:solidFill>
+                <a:latin typeface="Microsoft YaHei"/>
+                <a:ea typeface="Microsoft YaHei"/>
+                <a:cs typeface="Microsoft YaHei"/>
+              </a:rPr>
+              <a:t>问题标签与证据摘要</a:t>
+            </a:r>
+          </a:p>
+          <a:p xmlns:a="http://schemas.openxmlformats.org/drawingml/2006/main">
+            <a:r>
+              <a:t/>
+            </a:r>
+          </a:p>
+          <a:p xmlns:a="http://schemas.openxmlformats.org/drawingml/2006/main">
+            <a:pPr algn="l">
+              <a:defRPr sz="1275" b="0" i="0">
+                <a:solidFill>
+                  <a:srgbClr val="25364A"/>
+                </a:solidFill>
+                <a:latin typeface="Microsoft YaHei"/>
+                <a:ea typeface="Microsoft YaHei"/>
+                <a:cs typeface="Microsoft YaHei"/>
+              </a:defRPr>
+            </a:pPr>
+            <a:r>
+              <a:rPr sz="1275" b="0" i="0">
+                <a:solidFill>
+                  <a:srgbClr val="25364A"/>
+                </a:solidFill>
+                <a:latin typeface="Microsoft YaHei"/>
+                <a:ea typeface="Microsoft YaHei"/>
+                <a:cs typeface="Microsoft YaHei"/>
+              </a:rPr>
+              <a:t>置信度与人工复核建议</a:t>
+            </a:r>
+          </a:p>
+          <a:p xmlns:a="http://schemas.openxmlformats.org/drawingml/2006/main">
+            <a:r>
+              <a:t/>
+            </a:r>
+          </a:p>
+          <a:p xmlns:a="http://schemas.openxmlformats.org/drawingml/2006/main">
+            <a:pPr algn="l">
+              <a:defRPr sz="1275" b="0" i="0">
+                <a:solidFill>
+                  <a:srgbClr val="25364A"/>
+                </a:solidFill>
+                <a:latin typeface="Microsoft YaHei"/>
+                <a:ea typeface="Microsoft YaHei"/>
+                <a:cs typeface="Microsoft YaHei"/>
+              </a:defRPr>
+            </a:pPr>
+            <a:r>
+              <a:rPr sz="1275" b="0" i="0">
+                <a:solidFill>
+                  <a:srgbClr val="25364A"/>
+                </a:solidFill>
+                <a:latin typeface="Microsoft YaHei"/>
+                <a:ea typeface="Microsoft YaHei"/>
+                <a:cs typeface="Microsoft YaHei"/>
+              </a:rPr>
+              <a:t>可复用接口与评测脚本</a:t>
+            </a:r>
+          </a:p>
+        </p:txBody>
+      </p:sp>
+      <p:sp>
+        <p:nvSpPr>
+          <p:cNvPr id="27" name="scenario-band">
+            <a:extLst xmlns:a="http://schemas.openxmlformats.org/drawingml/2006/main">
+              <a:ext uri="{FF2B5EF4-FFF2-40B4-BE49-F238E27FC236}">
+                <a16:creationId xmlns:a16="http://schemas.microsoft.com/office/drawing/2014/main" id="{8D24DCD0-9E17-46C6-AD22-EB99439BB14B}"/>
+              </a:ext>
+            </a:extLst>
+          </p:cNvPr>
+          <p:cNvSpPr>
+            <a:spLocks xmlns:a="http://schemas.openxmlformats.org/drawingml/2006/main" noGrp="1"/>
+          </p:cNvSpPr>
+          <p:nvPr/>
+        </p:nvSpPr>
+        <p:spPr>
+          <a:xfrm xmlns:a="http://schemas.openxmlformats.org/drawingml/2006/main">
+            <a:off x="514350" y="5505450"/>
+            <a:ext cx="7810500" cy="533400"/>
           </a:xfrm>
           <a:prstGeom xmlns:a="http://schemas.openxmlformats.org/drawingml/2006/main" prst="roundRect">
             <a:avLst>
-              <a:gd name="adj" fmla="val 10526"/>
+              <a:gd name="adj" fmla="val 14286"/>
             </a:avLst>
           </a:prstGeom>
           <a:solidFill xmlns:a="http://schemas.openxmlformats.org/drawingml/2006/main">
@@ -8853,22 +9298,22 @@
       </p:sp>
       <p:sp>
         <p:nvSpPr>
-          <p:cNvPr id="22" name="tool-0">
-            <a:extLst xmlns:a="http://schemas.openxmlformats.org/drawingml/2006/main">
-              <a:ext uri="{FF2B5EF4-FFF2-40B4-BE49-F238E27FC236}">
-                <a16:creationId xmlns:a16="http://schemas.microsoft.com/office/drawing/2014/main" id="{DDDC929E-1AAD-4E98-B3FF-C28FDB034054}"/>
-              </a:ext>
-            </a:extLst>
-          </p:cNvPr>
-          <p:cNvSpPr>
-            <a:spLocks xmlns:a="http://schemas.openxmlformats.org/drawingml/2006/main" noGrp="1"/>
-          </p:cNvSpPr>
-          <p:nvPr/>
-        </p:nvSpPr>
-        <p:spPr>
-          <a:xfrm xmlns:a="http://schemas.openxmlformats.org/drawingml/2006/main">
-            <a:off x="647700" y="5076825"/>
-            <a:ext cx="2057400" cy="285750"/>
+          <p:cNvPr id="28" name="auto-text-34">
+            <a:extLst xmlns:a="http://schemas.openxmlformats.org/drawingml/2006/main">
+              <a:ext uri="{FF2B5EF4-FFF2-40B4-BE49-F238E27FC236}">
+                <a16:creationId xmlns:a16="http://schemas.microsoft.com/office/drawing/2014/main" id="{F33F449C-8BBD-482A-9DBC-FAEC86842959}"/>
+              </a:ext>
+            </a:extLst>
+          </p:cNvPr>
+          <p:cNvSpPr>
+            <a:spLocks xmlns:a="http://schemas.openxmlformats.org/drawingml/2006/main" noGrp="1"/>
+          </p:cNvSpPr>
+          <p:nvPr/>
+        </p:nvSpPr>
+        <p:spPr>
+          <a:xfrm xmlns:a="http://schemas.openxmlformats.org/drawingml/2006/main">
+            <a:off x="723900" y="5648325"/>
+            <a:ext cx="7391400" cy="247650"/>
           </a:xfrm>
           <a:prstGeom xmlns:a="http://schemas.openxmlformats.org/drawingml/2006/main" prst="rect">
             <a:avLst/>
@@ -8886,291 +9331,59 @@
           <a:lstStyle xmlns:a="http://schemas.openxmlformats.org/drawingml/2006/main"/>
           <a:p xmlns:a="http://schemas.openxmlformats.org/drawingml/2006/main">
             <a:pPr algn="ctr">
-              <a:defRPr sz="1275" b="1" i="0">
-                <a:solidFill>
-                  <a:srgbClr val="2F6BFF"/>
-                </a:solidFill>
-                <a:latin typeface="Microsoft YaHei"/>
-                <a:ea typeface="Microsoft YaHei"/>
-                <a:cs typeface="Microsoft YaHei"/>
-              </a:defRPr>
-            </a:pPr>
-            <a:r>
-              <a:rPr sz="1275" b="1" i="0">
-                <a:solidFill>
-                  <a:srgbClr val="2F6BFF"/>
-                </a:solidFill>
-                <a:latin typeface="Microsoft YaHei"/>
-                <a:ea typeface="Microsoft YaHei"/>
-                <a:cs typeface="Microsoft YaHei"/>
-              </a:rPr>
-              <a:t>VLM／MLLM Judge</a:t>
-            </a:r>
-          </a:p>
-        </p:txBody>
-      </p:sp>
-      <p:sp>
-        <p:nvSpPr>
-          <p:cNvPr id="23" name="tool-1">
-            <a:extLst xmlns:a="http://schemas.openxmlformats.org/drawingml/2006/main">
-              <a:ext uri="{FF2B5EF4-FFF2-40B4-BE49-F238E27FC236}">
-                <a16:creationId xmlns:a16="http://schemas.microsoft.com/office/drawing/2014/main" id="{EB363679-E0E9-485B-A470-8A011F17A48C}"/>
-              </a:ext>
-            </a:extLst>
-          </p:cNvPr>
-          <p:cNvSpPr>
-            <a:spLocks xmlns:a="http://schemas.openxmlformats.org/drawingml/2006/main" noGrp="1"/>
-          </p:cNvSpPr>
-          <p:nvPr/>
-        </p:nvSpPr>
-        <p:spPr>
-          <a:xfrm xmlns:a="http://schemas.openxmlformats.org/drawingml/2006/main">
-            <a:off x="2838450" y="5076825"/>
-            <a:ext cx="2057400" cy="285750"/>
-          </a:xfrm>
-          <a:prstGeom xmlns:a="http://schemas.openxmlformats.org/drawingml/2006/main" prst="rect">
-            <a:avLst/>
-          </a:prstGeom>
-          <a:noFill xmlns:a="http://schemas.openxmlformats.org/drawingml/2006/main"/>
-          <a:ln xmlns:a="http://schemas.openxmlformats.org/drawingml/2006/main" w="0">
-            <a:noFill/>
-            <a:prstDash val="solid"/>
-          </a:ln>
-        </p:spPr>
-        <p:txBody>
-          <a:bodyPr xmlns:a="http://schemas.openxmlformats.org/drawingml/2006/main" wrap="square" lIns="0" tIns="0" rIns="0" bIns="0" anchor="t">
-            <a:normAutofit fontScale="100000"/>
-          </a:bodyPr>
-          <a:lstStyle xmlns:a="http://schemas.openxmlformats.org/drawingml/2006/main"/>
-          <a:p xmlns:a="http://schemas.openxmlformats.org/drawingml/2006/main">
-            <a:pPr algn="ctr">
-              <a:defRPr sz="1275" b="1" i="0">
-                <a:solidFill>
-                  <a:srgbClr val="7B61D1"/>
-                </a:solidFill>
-                <a:latin typeface="Microsoft YaHei"/>
-                <a:ea typeface="Microsoft YaHei"/>
-                <a:cs typeface="Microsoft YaHei"/>
-              </a:defRPr>
-            </a:pPr>
-            <a:r>
-              <a:rPr sz="1275" b="1" i="0">
-                <a:solidFill>
-                  <a:srgbClr val="7B61D1"/>
-                </a:solidFill>
-                <a:latin typeface="Microsoft YaHei"/>
-                <a:ea typeface="Microsoft YaHei"/>
-                <a:cs typeface="Microsoft YaHei"/>
-              </a:rPr>
-              <a:t>CLIP／SigLIP相似度</a:t>
-            </a:r>
-          </a:p>
-        </p:txBody>
-      </p:sp>
-      <p:sp>
-        <p:nvSpPr>
-          <p:cNvPr id="24" name="tool-2">
-            <a:extLst xmlns:a="http://schemas.openxmlformats.org/drawingml/2006/main">
-              <a:ext uri="{FF2B5EF4-FFF2-40B4-BE49-F238E27FC236}">
-                <a16:creationId xmlns:a16="http://schemas.microsoft.com/office/drawing/2014/main" id="{38DB3BF3-19B0-4702-9BD5-99A991D11A19}"/>
-              </a:ext>
-            </a:extLst>
-          </p:cNvPr>
-          <p:cNvSpPr>
-            <a:spLocks xmlns:a="http://schemas.openxmlformats.org/drawingml/2006/main" noGrp="1"/>
-          </p:cNvSpPr>
-          <p:nvPr/>
-        </p:nvSpPr>
-        <p:spPr>
-          <a:xfrm xmlns:a="http://schemas.openxmlformats.org/drawingml/2006/main">
-            <a:off x="5029200" y="5076825"/>
-            <a:ext cx="2057400" cy="285750"/>
-          </a:xfrm>
-          <a:prstGeom xmlns:a="http://schemas.openxmlformats.org/drawingml/2006/main" prst="rect">
-            <a:avLst/>
-          </a:prstGeom>
-          <a:noFill xmlns:a="http://schemas.openxmlformats.org/drawingml/2006/main"/>
-          <a:ln xmlns:a="http://schemas.openxmlformats.org/drawingml/2006/main" w="0">
-            <a:noFill/>
-            <a:prstDash val="solid"/>
-          </a:ln>
-        </p:spPr>
-        <p:txBody>
-          <a:bodyPr xmlns:a="http://schemas.openxmlformats.org/drawingml/2006/main" wrap="square" lIns="0" tIns="0" rIns="0" bIns="0" anchor="t">
-            <a:normAutofit fontScale="100000"/>
-          </a:bodyPr>
-          <a:lstStyle xmlns:a="http://schemas.openxmlformats.org/drawingml/2006/main"/>
-          <a:p xmlns:a="http://schemas.openxmlformats.org/drawingml/2006/main">
-            <a:pPr algn="ctr">
-              <a:defRPr sz="1275" b="1" i="0">
-                <a:solidFill>
-                  <a:srgbClr val="E65C55"/>
-                </a:solidFill>
-                <a:latin typeface="Microsoft YaHei"/>
-                <a:ea typeface="Microsoft YaHei"/>
-                <a:cs typeface="Microsoft YaHei"/>
-              </a:defRPr>
-            </a:pPr>
-            <a:r>
-              <a:rPr sz="1275" b="1" i="0">
-                <a:solidFill>
-                  <a:srgbClr val="E65C55"/>
-                </a:solidFill>
-                <a:latin typeface="Microsoft YaHei"/>
-                <a:ea typeface="Microsoft YaHei"/>
-                <a:cs typeface="Microsoft YaHei"/>
-              </a:rPr>
-              <a:t>DINO／LPIPS视觉指标</a:t>
-            </a:r>
-          </a:p>
-        </p:txBody>
-      </p:sp>
-      <p:sp>
-        <p:nvSpPr>
-          <p:cNvPr id="25" name="tool-3">
-            <a:extLst xmlns:a="http://schemas.openxmlformats.org/drawingml/2006/main">
-              <a:ext uri="{FF2B5EF4-FFF2-40B4-BE49-F238E27FC236}">
-                <a16:creationId xmlns:a16="http://schemas.microsoft.com/office/drawing/2014/main" id="{1B3409C8-0F07-49C5-B04A-69F51F2C56CD}"/>
-              </a:ext>
-            </a:extLst>
-          </p:cNvPr>
-          <p:cNvSpPr>
-            <a:spLocks xmlns:a="http://schemas.openxmlformats.org/drawingml/2006/main" noGrp="1"/>
-          </p:cNvSpPr>
-          <p:nvPr/>
-        </p:nvSpPr>
-        <p:spPr>
-          <a:xfrm xmlns:a="http://schemas.openxmlformats.org/drawingml/2006/main">
-            <a:off x="7219950" y="5076825"/>
-            <a:ext cx="2057400" cy="285750"/>
-          </a:xfrm>
-          <a:prstGeom xmlns:a="http://schemas.openxmlformats.org/drawingml/2006/main" prst="rect">
-            <a:avLst/>
-          </a:prstGeom>
-          <a:noFill xmlns:a="http://schemas.openxmlformats.org/drawingml/2006/main"/>
-          <a:ln xmlns:a="http://schemas.openxmlformats.org/drawingml/2006/main" w="0">
-            <a:noFill/>
-            <a:prstDash val="solid"/>
-          </a:ln>
-        </p:spPr>
-        <p:txBody>
-          <a:bodyPr xmlns:a="http://schemas.openxmlformats.org/drawingml/2006/main" wrap="square" lIns="0" tIns="0" rIns="0" bIns="0" anchor="t">
-            <a:normAutofit fontScale="100000"/>
-          </a:bodyPr>
-          <a:lstStyle xmlns:a="http://schemas.openxmlformats.org/drawingml/2006/main"/>
-          <a:p xmlns:a="http://schemas.openxmlformats.org/drawingml/2006/main">
-            <a:pPr algn="ctr">
-              <a:defRPr sz="1275" b="1" i="0">
-                <a:solidFill>
-                  <a:srgbClr val="159A91"/>
-                </a:solidFill>
-                <a:latin typeface="Microsoft YaHei"/>
-                <a:ea typeface="Microsoft YaHei"/>
-                <a:cs typeface="Microsoft YaHei"/>
-              </a:defRPr>
-            </a:pPr>
-            <a:r>
-              <a:rPr sz="1275" b="1" i="0">
-                <a:solidFill>
-                  <a:srgbClr val="159A91"/>
-                </a:solidFill>
-                <a:latin typeface="Microsoft YaHei"/>
-                <a:ea typeface="Microsoft YaHei"/>
-                <a:cs typeface="Microsoft YaHei"/>
-              </a:rPr>
-              <a:t>OCR／检测／视觉定位</a:t>
-            </a:r>
-          </a:p>
-        </p:txBody>
-      </p:sp>
-      <p:sp>
-        <p:nvSpPr>
-          <p:cNvPr id="26" name="tool-4">
-            <a:extLst xmlns:a="http://schemas.openxmlformats.org/drawingml/2006/main">
-              <a:ext uri="{FF2B5EF4-FFF2-40B4-BE49-F238E27FC236}">
-                <a16:creationId xmlns:a16="http://schemas.microsoft.com/office/drawing/2014/main" id="{97719324-517A-48CC-B1DD-13A72FEEC157}"/>
-              </a:ext>
-            </a:extLst>
-          </p:cNvPr>
-          <p:cNvSpPr>
-            <a:spLocks xmlns:a="http://schemas.openxmlformats.org/drawingml/2006/main" noGrp="1"/>
-          </p:cNvSpPr>
-          <p:nvPr/>
-        </p:nvSpPr>
-        <p:spPr>
-          <a:xfrm xmlns:a="http://schemas.openxmlformats.org/drawingml/2006/main">
-            <a:off x="9410700" y="5076825"/>
-            <a:ext cx="2057400" cy="285750"/>
-          </a:xfrm>
-          <a:prstGeom xmlns:a="http://schemas.openxmlformats.org/drawingml/2006/main" prst="rect">
-            <a:avLst/>
-          </a:prstGeom>
-          <a:noFill xmlns:a="http://schemas.openxmlformats.org/drawingml/2006/main"/>
-          <a:ln xmlns:a="http://schemas.openxmlformats.org/drawingml/2006/main" w="0">
-            <a:noFill/>
-            <a:prstDash val="solid"/>
-          </a:ln>
-        </p:spPr>
-        <p:txBody>
-          <a:bodyPr xmlns:a="http://schemas.openxmlformats.org/drawingml/2006/main" wrap="square" lIns="0" tIns="0" rIns="0" bIns="0" anchor="t">
-            <a:normAutofit fontScale="100000"/>
-          </a:bodyPr>
-          <a:lstStyle xmlns:a="http://schemas.openxmlformats.org/drawingml/2006/main"/>
-          <a:p xmlns:a="http://schemas.openxmlformats.org/drawingml/2006/main">
-            <a:pPr algn="ctr">
-              <a:defRPr sz="1275" b="1" i="0">
-                <a:solidFill>
-                  <a:srgbClr val="C78B17"/>
-                </a:solidFill>
-                <a:latin typeface="Microsoft YaHei"/>
-                <a:ea typeface="Microsoft YaHei"/>
-                <a:cs typeface="Microsoft YaHei"/>
-              </a:defRPr>
-            </a:pPr>
-            <a:r>
-              <a:rPr sz="1275" b="1" i="0">
-                <a:solidFill>
-                  <a:srgbClr val="C78B17"/>
-                </a:solidFill>
-                <a:latin typeface="Microsoft YaHei"/>
-                <a:ea typeface="Microsoft YaHei"/>
-                <a:cs typeface="Microsoft YaHei"/>
-              </a:rPr>
-              <a:t>业务规则／人工反馈</a:t>
-            </a:r>
-          </a:p>
-        </p:txBody>
-      </p:sp>
-      <p:sp>
-        <p:nvSpPr>
-          <p:cNvPr id="27" name="scope-conclusion">
-            <a:extLst xmlns:a="http://schemas.openxmlformats.org/drawingml/2006/main">
-              <a:ext uri="{FF2B5EF4-FFF2-40B4-BE49-F238E27FC236}">
-                <a16:creationId xmlns:a16="http://schemas.microsoft.com/office/drawing/2014/main" id="{FD7DEF1C-8696-4745-9C58-D81EF4D46D65}"/>
-              </a:ext>
-            </a:extLst>
-          </p:cNvPr>
-          <p:cNvSpPr>
-            <a:spLocks xmlns:a="http://schemas.openxmlformats.org/drawingml/2006/main" noGrp="1"/>
-          </p:cNvSpPr>
-          <p:nvPr/>
-        </p:nvSpPr>
-        <p:spPr>
-          <a:xfrm xmlns:a="http://schemas.openxmlformats.org/drawingml/2006/main">
-            <a:off x="514350" y="5772150"/>
-            <a:ext cx="11163300" cy="400050"/>
+              <a:defRPr sz="1350" b="1" i="0">
+                <a:solidFill>
+                  <a:srgbClr val="12263A"/>
+                </a:solidFill>
+                <a:latin typeface="Microsoft YaHei"/>
+                <a:ea typeface="Microsoft YaHei"/>
+                <a:cs typeface="Microsoft YaHei"/>
+              </a:defRPr>
+            </a:pPr>
+            <a:r>
+              <a:rPr sz="1350" b="1" i="0">
+                <a:solidFill>
+                  <a:srgbClr val="12263A"/>
+                </a:solidFill>
+                <a:latin typeface="Microsoft YaHei"/>
+                <a:ea typeface="Microsoft YaHei"/>
+                <a:cs typeface="Microsoft YaHei"/>
+              </a:rPr>
+              <a:t>首批验证：多图编辑＋AIGC图库　｜　后续泛化：盲超分＋颜色标注</a:t>
+            </a:r>
+          </a:p>
+        </p:txBody>
+      </p:sp>
+      <p:sp>
+        <p:nvSpPr>
+          <p:cNvPr id="29" name="current-pipeline-frame">
+            <a:extLst xmlns:a="http://schemas.openxmlformats.org/drawingml/2006/main">
+              <a:ext uri="{FF2B5EF4-FFF2-40B4-BE49-F238E27FC236}">
+                <a16:creationId xmlns:a16="http://schemas.microsoft.com/office/drawing/2014/main" id="{AF3ADABF-879A-41A0-A097-571174D09A9A}"/>
+              </a:ext>
+            </a:extLst>
+          </p:cNvPr>
+          <p:cNvSpPr>
+            <a:spLocks xmlns:a="http://schemas.openxmlformats.org/drawingml/2006/main" noGrp="1"/>
+          </p:cNvSpPr>
+          <p:nvPr/>
+        </p:nvSpPr>
+        <p:spPr>
+          <a:xfrm xmlns:a="http://schemas.openxmlformats.org/drawingml/2006/main">
+            <a:off x="8572500" y="5505450"/>
+            <a:ext cx="3105150" cy="533400"/>
           </a:xfrm>
           <a:prstGeom xmlns:a="http://schemas.openxmlformats.org/drawingml/2006/main" prst="roundRect">
             <a:avLst>
-              <a:gd name="adj" fmla="val 19048"/>
+              <a:gd name="adj" fmla="val 14286"/>
             </a:avLst>
           </a:prstGeom>
           <a:solidFill xmlns:a="http://schemas.openxmlformats.org/drawingml/2006/main">
-            <a:srgbClr val="12263A"/>
+            <a:srgbClr val="F0F3F6"/>
           </a:solidFill>
           <a:ln xmlns:a="http://schemas.openxmlformats.org/drawingml/2006/main" w="9525">
             <a:solidFill>
-              <a:srgbClr val="12263A"/>
+              <a:srgbClr val="AAB5C0"/>
             </a:solidFill>
             <a:prstDash val="solid"/>
           </a:ln>
@@ -9178,116 +9391,174 @@
       </p:sp>
       <p:sp>
         <p:nvSpPr>
-          <p:cNvPr id="28" name="auto-text-26">
-            <a:extLst xmlns:a="http://schemas.openxmlformats.org/drawingml/2006/main">
-              <a:ext uri="{FF2B5EF4-FFF2-40B4-BE49-F238E27FC236}">
-                <a16:creationId xmlns:a16="http://schemas.microsoft.com/office/drawing/2014/main" id="{266345E3-B253-4D35-AB5C-4BF3334A8F7C}"/>
-              </a:ext>
-            </a:extLst>
-          </p:cNvPr>
-          <p:cNvSpPr>
-            <a:spLocks xmlns:a="http://schemas.openxmlformats.org/drawingml/2006/main" noGrp="1"/>
-          </p:cNvSpPr>
-          <p:nvPr/>
-        </p:nvSpPr>
-        <p:spPr>
-          <a:xfrm xmlns:a="http://schemas.openxmlformats.org/drawingml/2006/main">
-            <a:off x="723900" y="5867400"/>
-            <a:ext cx="10744200" cy="228600"/>
-          </a:xfrm>
-          <a:prstGeom xmlns:a="http://schemas.openxmlformats.org/drawingml/2006/main" prst="rect">
-            <a:avLst/>
-          </a:prstGeom>
-          <a:noFill xmlns:a="http://schemas.openxmlformats.org/drawingml/2006/main"/>
-          <a:ln xmlns:a="http://schemas.openxmlformats.org/drawingml/2006/main" w="0">
-            <a:noFill/>
-            <a:prstDash val="solid"/>
-          </a:ln>
-        </p:spPr>
-        <p:txBody>
-          <a:bodyPr xmlns:a="http://schemas.openxmlformats.org/drawingml/2006/main" wrap="square" lIns="0" tIns="0" rIns="0" bIns="0" anchor="t">
+          <p:cNvPr id="30" name="current-pipeline-label">
+            <a:extLst xmlns:a="http://schemas.openxmlformats.org/drawingml/2006/main">
+              <a:ext uri="{FF2B5EF4-FFF2-40B4-BE49-F238E27FC236}">
+                <a16:creationId xmlns:a16="http://schemas.microsoft.com/office/drawing/2014/main" id="{B379B2A8-BFF3-4E13-BE68-32BE63A90A11}"/>
+              </a:ext>
+            </a:extLst>
+          </p:cNvPr>
+          <p:cNvSpPr>
+            <a:spLocks xmlns:a="http://schemas.openxmlformats.org/drawingml/2006/main" noGrp="1"/>
+          </p:cNvSpPr>
+          <p:nvPr/>
+        </p:nvSpPr>
+        <p:spPr>
+          <a:xfrm xmlns:a="http://schemas.openxmlformats.org/drawingml/2006/main">
+            <a:off x="8724900" y="5543550"/>
+            <a:ext cx="2800350" cy="266700"/>
+          </a:xfrm>
+          <a:prstGeom xmlns:a="http://schemas.openxmlformats.org/drawingml/2006/main" prst="rect">
+            <a:avLst/>
+          </a:prstGeom>
+          <a:noFill xmlns:a="http://schemas.openxmlformats.org/drawingml/2006/main"/>
+          <a:ln xmlns:a="http://schemas.openxmlformats.org/drawingml/2006/main" w="0">
+            <a:noFill/>
+            <a:prstDash val="solid"/>
+          </a:ln>
+        </p:spPr>
+        <p:txBody>
+          <a:bodyPr xmlns:a="http://schemas.openxmlformats.org/drawingml/2006/main" wrap="square" lIns="0" tIns="0" rIns="0" bIns="0" anchor="ctr">
             <a:normAutofit fontScale="100000"/>
           </a:bodyPr>
           <a:lstStyle xmlns:a="http://schemas.openxmlformats.org/drawingml/2006/main"/>
           <a:p xmlns:a="http://schemas.openxmlformats.org/drawingml/2006/main">
             <a:pPr algn="ctr">
-              <a:defRPr sz="1425" b="1" i="0">
-                <a:solidFill>
-                  <a:srgbClr val="FFFFFF"/>
-                </a:solidFill>
-                <a:latin typeface="Microsoft YaHei"/>
-                <a:ea typeface="Microsoft YaHei"/>
-                <a:cs typeface="Microsoft YaHei"/>
-              </a:defRPr>
-            </a:pPr>
-            <a:r>
-              <a:rPr sz="1425" b="1" i="0">
-                <a:solidFill>
-                  <a:srgbClr val="FFFFFF"/>
-                </a:solidFill>
-                <a:latin typeface="Microsoft YaHei"/>
-                <a:ea typeface="Microsoft YaHei"/>
-                <a:cs typeface="Microsoft YaHei"/>
-              </a:rPr>
-              <a:t>VLM Judge是输入之一；项目核心增量是对多源评估结果进行校准、共识、仲裁与验证。</a:t>
-            </a:r>
-          </a:p>
-        </p:txBody>
-      </p:sp>
-      <p:sp>
-        <p:nvSpPr>
-          <p:cNvPr id="29" name="source-654-0.059264807216863113">
-            <a:extLst xmlns:a="http://schemas.openxmlformats.org/drawingml/2006/main">
-              <a:ext uri="{FF2B5EF4-FFF2-40B4-BE49-F238E27FC236}">
-                <a16:creationId xmlns:a16="http://schemas.microsoft.com/office/drawing/2014/main" id="{8AB48763-80FD-4A2D-A2AD-67B09A8B68FB}"/>
-              </a:ext>
-            </a:extLst>
-          </p:cNvPr>
-          <p:cNvSpPr>
-            <a:spLocks xmlns:a="http://schemas.openxmlformats.org/drawingml/2006/main" noGrp="1"/>
-          </p:cNvSpPr>
-          <p:nvPr/>
-        </p:nvSpPr>
-        <p:spPr>
-          <a:xfrm xmlns:a="http://schemas.openxmlformats.org/drawingml/2006/main">
-            <a:off x="476250" y="6229350"/>
-            <a:ext cx="10763250" cy="209550"/>
-          </a:xfrm>
-          <a:prstGeom xmlns:a="http://schemas.openxmlformats.org/drawingml/2006/main" prst="rect">
-            <a:avLst/>
-          </a:prstGeom>
-          <a:noFill xmlns:a="http://schemas.openxmlformats.org/drawingml/2006/main"/>
-          <a:ln xmlns:a="http://schemas.openxmlformats.org/drawingml/2006/main" w="0">
-            <a:noFill/>
-            <a:prstDash val="solid"/>
-          </a:ln>
-        </p:spPr>
-        <p:txBody>
-          <a:bodyPr xmlns:a="http://schemas.openxmlformats.org/drawingml/2006/main" wrap="square" lIns="0" tIns="0" rIns="0" bIns="0" anchor="t">
-            <a:normAutofit fontScale="100000"/>
-          </a:bodyPr>
-          <a:lstStyle xmlns:a="http://schemas.openxmlformats.org/drawingml/2006/main"/>
-          <a:p xmlns:a="http://schemas.openxmlformats.org/drawingml/2006/main">
-            <a:pPr algn="l">
-              <a:defRPr sz="825" b="0" i="1">
-                <a:solidFill>
-                  <a:srgbClr val="7B8794"/>
-                </a:solidFill>
-                <a:latin typeface="Cambria"/>
-                <a:ea typeface="Cambria"/>
-                <a:cs typeface="Cambria"/>
-              </a:defRPr>
-            </a:pPr>
-            <a:r>
-              <a:rPr sz="825" b="0" i="1">
-                <a:solidFill>
-                  <a:srgbClr val="7B8794"/>
-                </a:solidFill>
-                <a:latin typeface="Cambria"/>
-                <a:ea typeface="Cambria"/>
-                <a:cs typeface="Cambria"/>
-              </a:rPr>
-              <a:t>依据：项目SOW 1.1.2 开发内容、1.2.1 技术方法及技术交付目标</a:t>
+              <a:defRPr sz="1350" b="1" i="0">
+                <a:solidFill>
+                  <a:srgbClr val="5E6C7A"/>
+                </a:solidFill>
+                <a:latin typeface="Microsoft YaHei"/>
+                <a:ea typeface="Microsoft YaHei"/>
+                <a:cs typeface="Microsoft YaHei"/>
+              </a:defRPr>
+            </a:pPr>
+            <a:r>
+              <a:rPr sz="1350" b="1" i="0">
+                <a:solidFill>
+                  <a:srgbClr val="5E6C7A"/>
+                </a:solidFill>
+                <a:latin typeface="Microsoft YaHei"/>
+                <a:ea typeface="Microsoft YaHei"/>
+                <a:cs typeface="Microsoft YaHei"/>
+              </a:rPr>
+              <a:t>可选｜现有质检Pipeline截图</a:t>
+            </a:r>
+          </a:p>
+        </p:txBody>
+      </p:sp>
+      <p:sp>
+        <p:nvSpPr>
+          <p:cNvPr id="31" name="current-pipeline-sub">
+            <a:extLst xmlns:a="http://schemas.openxmlformats.org/drawingml/2006/main">
+              <a:ext uri="{FF2B5EF4-FFF2-40B4-BE49-F238E27FC236}">
+                <a16:creationId xmlns:a16="http://schemas.microsoft.com/office/drawing/2014/main" id="{7B2F3CF7-64BF-453C-BA5D-797F9FC4363E}"/>
+              </a:ext>
+            </a:extLst>
+          </p:cNvPr>
+          <p:cNvSpPr>
+            <a:spLocks xmlns:a="http://schemas.openxmlformats.org/drawingml/2006/main" noGrp="1"/>
+          </p:cNvSpPr>
+          <p:nvPr/>
+        </p:nvSpPr>
+        <p:spPr>
+          <a:xfrm xmlns:a="http://schemas.openxmlformats.org/drawingml/2006/main">
+            <a:off x="8724900" y="5848350"/>
+            <a:ext cx="2800350" cy="209550"/>
+          </a:xfrm>
+          <a:prstGeom xmlns:a="http://schemas.openxmlformats.org/drawingml/2006/main" prst="rect">
+            <a:avLst/>
+          </a:prstGeom>
+          <a:noFill xmlns:a="http://schemas.openxmlformats.org/drawingml/2006/main"/>
+          <a:ln xmlns:a="http://schemas.openxmlformats.org/drawingml/2006/main" w="0">
+            <a:noFill/>
+            <a:prstDash val="solid"/>
+          </a:ln>
+        </p:spPr>
+        <p:txBody>
+          <a:bodyPr xmlns:a="http://schemas.openxmlformats.org/drawingml/2006/main" wrap="square" lIns="0" tIns="0" rIns="0" bIns="0" anchor="t">
+            <a:normAutofit fontScale="100000"/>
+          </a:bodyPr>
+          <a:lstStyle xmlns:a="http://schemas.openxmlformats.org/drawingml/2006/main"/>
+          <a:p xmlns:a="http://schemas.openxmlformats.org/drawingml/2006/main">
+            <a:pPr algn="ctr">
+              <a:defRPr sz="975" b="0" i="0">
+                <a:solidFill>
+                  <a:srgbClr val="8A98A8"/>
+                </a:solidFill>
+                <a:latin typeface="Microsoft YaHei"/>
+                <a:ea typeface="Microsoft YaHei"/>
+                <a:cs typeface="Microsoft YaHei"/>
+              </a:defRPr>
+            </a:pPr>
+            <a:r>
+              <a:rPr sz="975" b="0" i="0">
+                <a:solidFill>
+                  <a:srgbClr val="8A98A8"/>
+                </a:solidFill>
+                <a:latin typeface="Microsoft YaHei"/>
+                <a:ea typeface="Microsoft YaHei"/>
+                <a:cs typeface="Microsoft YaHei"/>
+              </a:rPr>
+              <a:t>如无材料可删除此框</a:t>
+            </a:r>
+          </a:p>
+        </p:txBody>
+      </p:sp>
+      <p:sp>
+        <p:nvSpPr>
+          <p:cNvPr id="32" name="auto-text-35">
+            <a:extLst xmlns:a="http://schemas.openxmlformats.org/drawingml/2006/main">
+              <a:ext uri="{FF2B5EF4-FFF2-40B4-BE49-F238E27FC236}">
+                <a16:creationId xmlns:a16="http://schemas.microsoft.com/office/drawing/2014/main" id="{238B32CC-1D7D-4596-9F8C-6E8D49DD1881}"/>
+              </a:ext>
+            </a:extLst>
+          </p:cNvPr>
+          <p:cNvSpPr>
+            <a:spLocks xmlns:a="http://schemas.openxmlformats.org/drawingml/2006/main" noGrp="1"/>
+          </p:cNvSpPr>
+          <p:nvPr/>
+        </p:nvSpPr>
+        <p:spPr>
+          <a:xfrm xmlns:a="http://schemas.openxmlformats.org/drawingml/2006/main">
+            <a:off x="628650" y="6191250"/>
+            <a:ext cx="10668000" cy="247650"/>
+          </a:xfrm>
+          <a:prstGeom xmlns:a="http://schemas.openxmlformats.org/drawingml/2006/main" prst="rect">
+            <a:avLst/>
+          </a:prstGeom>
+          <a:noFill xmlns:a="http://schemas.openxmlformats.org/drawingml/2006/main"/>
+          <a:ln xmlns:a="http://schemas.openxmlformats.org/drawingml/2006/main" w="0">
+            <a:noFill/>
+            <a:prstDash val="solid"/>
+          </a:ln>
+        </p:spPr>
+        <p:txBody>
+          <a:bodyPr xmlns:a="http://schemas.openxmlformats.org/drawingml/2006/main" wrap="square" lIns="0" tIns="0" rIns="0" bIns="0" anchor="t">
+            <a:normAutofit fontScale="100000"/>
+          </a:bodyPr>
+          <a:lstStyle xmlns:a="http://schemas.openxmlformats.org/drawingml/2006/main"/>
+          <a:p xmlns:a="http://schemas.openxmlformats.org/drawingml/2006/main">
+            <a:pPr algn="ctr">
+              <a:defRPr sz="975" b="0" i="0">
+                <a:solidFill>
+                  <a:srgbClr val="66778A"/>
+                </a:solidFill>
+                <a:latin typeface="Microsoft YaHei"/>
+                <a:ea typeface="Microsoft YaHei"/>
+                <a:cs typeface="Microsoft YaHei"/>
+              </a:defRPr>
+            </a:pPr>
+            <a:r>
+              <a:rPr sz="975" b="0" i="0">
+                <a:solidFill>
+                  <a:srgbClr val="66778A"/>
+                </a:solidFill>
+                <a:latin typeface="Microsoft YaHei"/>
+                <a:ea typeface="Microsoft YaHei"/>
+                <a:cs typeface="Microsoft YaHei"/>
+              </a:rPr>
+              <a:t>定位：VLM Judge是输入之一；高校交付算法原型与评测方法，公司负责业务数据和平台集成。</a:t>
             </a:r>
           </a:p>
         </p:txBody>
@@ -9295,7 +9566,7 @@
     </p:spTree>
     <p:extLst>
       <p:ext uri="{BB962C8B-B14F-4D97-AF65-F5344CB8AC3E}">
-        <p14:creationId xmlns:p14="http://schemas.microsoft.com/office/powerpoint/2010/main" val="1964977541"/>
+        <p14:creationId xmlns:p14="http://schemas.microsoft.com/office/powerpoint/2010/main" val="832923275"/>
       </p:ext>
     </p:extLst>
   </p:cSld>
@@ -9323,10 +9594,10 @@
       </p:grpSpPr>
       <p:sp>
         <p:nvSpPr>
-          <p:cNvPr id="22" name="accent-6">
-            <a:extLst xmlns:a="http://schemas.openxmlformats.org/drawingml/2006/main">
-              <a:ext uri="{FF2B5EF4-FFF2-40B4-BE49-F238E27FC236}">
-                <a16:creationId xmlns:a16="http://schemas.microsoft.com/office/drawing/2014/main" id="{341FF358-595C-4AF3-949E-3CB757F4B898}"/>
+          <p:cNvPr id="33" name="accent-6">
+            <a:extLst xmlns:a="http://schemas.openxmlformats.org/drawingml/2006/main">
+              <a:ext uri="{FF2B5EF4-FFF2-40B4-BE49-F238E27FC236}">
+                <a16:creationId xmlns:a16="http://schemas.microsoft.com/office/drawing/2014/main" id="{C17D4E4D-DB7B-44AB-B843-EB27F944CFC1}"/>
               </a:ext>
             </a:extLst>
           </p:cNvPr>
@@ -9361,7 +9632,7 @@
           <p:cNvPr id="2" name="title-6">
             <a:extLst xmlns:a="http://schemas.openxmlformats.org/drawingml/2006/main">
               <a:ext uri="{FF2B5EF4-FFF2-40B4-BE49-F238E27FC236}">
-                <a16:creationId xmlns:a16="http://schemas.microsoft.com/office/drawing/2014/main" id="{3BC1205B-C14D-4526-B1F4-F66C066619FD}"/>
+                <a16:creationId xmlns:a16="http://schemas.microsoft.com/office/drawing/2014/main" id="{6BCB0084-B737-4F88-929A-99BC4E5CF8D9}"/>
               </a:ext>
             </a:extLst>
           </p:cNvPr>
@@ -9409,7 +9680,7 @@
                 <a:ea typeface="Microsoft YaHei"/>
                 <a:cs typeface="Microsoft YaHei"/>
               </a:rPr>
-              <a:t>项目将在现有质检能力之上增加可复用的任务自适应评估层</a:t>
+              <a:t>合作项目将把临时质检方案沉淀为可复用、可验证的质量能力</a:t>
             </a:r>
           </a:p>
         </p:txBody>
@@ -9419,7 +9690,7 @@
           <p:cNvPr id="3" name="page-6">
             <a:extLst xmlns:a="http://schemas.openxmlformats.org/drawingml/2006/main">
               <a:ext uri="{FF2B5EF4-FFF2-40B4-BE49-F238E27FC236}">
-                <a16:creationId xmlns:a16="http://schemas.microsoft.com/office/drawing/2014/main" id="{79DD9253-AD45-483A-8D9D-450FEAE79C39}"/>
+                <a16:creationId xmlns:a16="http://schemas.microsoft.com/office/drawing/2014/main" id="{780CC468-490B-486A-A174-CCB75AD57D37}"/>
               </a:ext>
             </a:extLst>
           </p:cNvPr>
@@ -9474,10 +9745,10 @@
       </p:sp>
       <p:sp>
         <p:nvSpPr>
-          <p:cNvPr id="4" name="auto-text-27">
-            <a:extLst xmlns:a="http://schemas.openxmlformats.org/drawingml/2006/main">
-              <a:ext uri="{FF2B5EF4-FFF2-40B4-BE49-F238E27FC236}">
-                <a16:creationId xmlns:a16="http://schemas.microsoft.com/office/drawing/2014/main" id="{94A79717-BDDD-464F-8F55-BD79DE0964C1}"/>
+          <p:cNvPr id="4" name="auto-text-36">
+            <a:extLst xmlns:a="http://schemas.openxmlformats.org/drawingml/2006/main">
+              <a:ext uri="{FF2B5EF4-FFF2-40B4-BE49-F238E27FC236}">
+                <a16:creationId xmlns:a16="http://schemas.microsoft.com/office/drawing/2014/main" id="{8F9B23C9-3925-4C30-BCC2-44B23E042312}"/>
               </a:ext>
             </a:extLst>
           </p:cNvPr>
@@ -9525,326 +9796,33 @@
                 <a:ea typeface="Microsoft YaHei"/>
                 <a:cs typeface="Microsoft YaHei"/>
               </a:rPr>
-              <a:t>不重建生产平台，而是利用少量专家样本，对已有规则、Prompt和VLM Judge进行后验校准。</a:t>
-            </a:r>
-          </a:p>
-        </p:txBody>
-      </p:sp>
-      <p:sp>
-        <p:nvSpPr>
-          <p:cNvPr id="5" name="input-node">
-            <a:extLst xmlns:a="http://schemas.openxmlformats.org/drawingml/2006/main">
-              <a:ext uri="{FF2B5EF4-FFF2-40B4-BE49-F238E27FC236}">
-                <a16:creationId xmlns:a16="http://schemas.microsoft.com/office/drawing/2014/main" id="{6DFFA87D-3932-4ACF-9F59-6A63B3F4A8EA}"/>
-              </a:ext>
-            </a:extLst>
-          </p:cNvPr>
-          <p:cNvSpPr>
-            <a:spLocks xmlns:a="http://schemas.openxmlformats.org/drawingml/2006/main" noGrp="1"/>
-          </p:cNvSpPr>
-          <p:nvPr/>
-        </p:nvSpPr>
-        <p:spPr>
-          <a:xfrm xmlns:a="http://schemas.openxmlformats.org/drawingml/2006/main">
-            <a:off x="514350" y="1695450"/>
-            <a:ext cx="2952750" cy="3276600"/>
+              <a:t>项目价值不仅是提高一次筛选准确率，更重要的是形成可服务多个图像项目的共同能力。</a:t>
+            </a:r>
+          </a:p>
+        </p:txBody>
+      </p:sp>
+      <p:sp>
+        <p:nvSpPr>
+          <p:cNvPr id="5" name="value-0">
+            <a:extLst xmlns:a="http://schemas.openxmlformats.org/drawingml/2006/main">
+              <a:ext uri="{FF2B5EF4-FFF2-40B4-BE49-F238E27FC236}">
+                <a16:creationId xmlns:a16="http://schemas.microsoft.com/office/drawing/2014/main" id="{BD25ED19-8A51-4802-B230-2E6BDDD311CC}"/>
+              </a:ext>
+            </a:extLst>
+          </p:cNvPr>
+          <p:cNvSpPr>
+            <a:spLocks xmlns:a="http://schemas.openxmlformats.org/drawingml/2006/main" noGrp="1"/>
+          </p:cNvSpPr>
+          <p:nvPr/>
+        </p:nvSpPr>
+        <p:spPr>
+          <a:xfrm xmlns:a="http://schemas.openxmlformats.org/drawingml/2006/main">
+            <a:off x="514350" y="1581150"/>
+            <a:ext cx="3314700" cy="2133600"/>
           </a:xfrm>
           <a:prstGeom xmlns:a="http://schemas.openxmlformats.org/drawingml/2006/main" prst="roundRect">
             <a:avLst>
-              <a:gd name="adj" fmla="val 3871"/>
-            </a:avLst>
-          </a:prstGeom>
-          <a:solidFill xmlns:a="http://schemas.openxmlformats.org/drawingml/2006/main">
-            <a:srgbClr val="F4F7FA"/>
-          </a:solidFill>
-          <a:ln xmlns:a="http://schemas.openxmlformats.org/drawingml/2006/main" w="9525">
-            <a:solidFill>
-              <a:srgbClr val="D8E0E8"/>
-            </a:solidFill>
-            <a:prstDash val="solid"/>
-          </a:ln>
-        </p:spPr>
-      </p:sp>
-      <p:sp>
-        <p:nvSpPr>
-          <p:cNvPr id="6" name="auto-text-28">
-            <a:extLst xmlns:a="http://schemas.openxmlformats.org/drawingml/2006/main">
-              <a:ext uri="{FF2B5EF4-FFF2-40B4-BE49-F238E27FC236}">
-                <a16:creationId xmlns:a16="http://schemas.microsoft.com/office/drawing/2014/main" id="{3BD8D974-BC37-4BA2-8828-FCE49726AC11}"/>
-              </a:ext>
-            </a:extLst>
-          </p:cNvPr>
-          <p:cNvSpPr>
-            <a:spLocks xmlns:a="http://schemas.openxmlformats.org/drawingml/2006/main" noGrp="1"/>
-          </p:cNvSpPr>
-          <p:nvPr/>
-        </p:nvSpPr>
-        <p:spPr>
-          <a:xfrm xmlns:a="http://schemas.openxmlformats.org/drawingml/2006/main">
-            <a:off x="762000" y="1924050"/>
-            <a:ext cx="1143000" cy="323850"/>
-          </a:xfrm>
-          <a:prstGeom xmlns:a="http://schemas.openxmlformats.org/drawingml/2006/main" prst="rect">
-            <a:avLst/>
-          </a:prstGeom>
-          <a:noFill xmlns:a="http://schemas.openxmlformats.org/drawingml/2006/main"/>
-          <a:ln xmlns:a="http://schemas.openxmlformats.org/drawingml/2006/main" w="0">
-            <a:noFill/>
-            <a:prstDash val="solid"/>
-          </a:ln>
-        </p:spPr>
-        <p:txBody>
-          <a:bodyPr xmlns:a="http://schemas.openxmlformats.org/drawingml/2006/main" wrap="square" lIns="0" tIns="0" rIns="0" bIns="0" anchor="t">
-            <a:normAutofit fontScale="100000"/>
-          </a:bodyPr>
-          <a:lstStyle xmlns:a="http://schemas.openxmlformats.org/drawingml/2006/main"/>
-          <a:p xmlns:a="http://schemas.openxmlformats.org/drawingml/2006/main">
-            <a:pPr algn="l">
-              <a:defRPr sz="1875" b="1" i="0">
-                <a:solidFill>
-                  <a:srgbClr val="2F6BFF"/>
-                </a:solidFill>
-                <a:latin typeface="Microsoft YaHei"/>
-                <a:ea typeface="Microsoft YaHei"/>
-                <a:cs typeface="Microsoft YaHei"/>
-              </a:defRPr>
-            </a:pPr>
-            <a:r>
-              <a:rPr sz="1875" b="1" i="0">
-                <a:solidFill>
-                  <a:srgbClr val="2F6BFF"/>
-                </a:solidFill>
-                <a:latin typeface="Microsoft YaHei"/>
-                <a:ea typeface="Microsoft YaHei"/>
-                <a:cs typeface="Microsoft YaHei"/>
-              </a:rPr>
-              <a:t>输入</a:t>
-            </a:r>
-          </a:p>
-        </p:txBody>
-      </p:sp>
-      <p:sp>
-        <p:nvSpPr>
-          <p:cNvPr id="7" name="auto-text-29">
-            <a:extLst xmlns:a="http://schemas.openxmlformats.org/drawingml/2006/main">
-              <a:ext uri="{FF2B5EF4-FFF2-40B4-BE49-F238E27FC236}">
-                <a16:creationId xmlns:a16="http://schemas.microsoft.com/office/drawing/2014/main" id="{D9E610F2-5A51-41DB-A449-3E7240DEB6A0}"/>
-              </a:ext>
-            </a:extLst>
-          </p:cNvPr>
-          <p:cNvSpPr>
-            <a:spLocks xmlns:a="http://schemas.openxmlformats.org/drawingml/2006/main" noGrp="1"/>
-          </p:cNvSpPr>
-          <p:nvPr/>
-        </p:nvSpPr>
-        <p:spPr>
-          <a:xfrm xmlns:a="http://schemas.openxmlformats.org/drawingml/2006/main">
-            <a:off x="762000" y="2419350"/>
-            <a:ext cx="2381250" cy="2095500"/>
-          </a:xfrm>
-          <a:prstGeom xmlns:a="http://schemas.openxmlformats.org/drawingml/2006/main" prst="rect">
-            <a:avLst/>
-          </a:prstGeom>
-          <a:noFill xmlns:a="http://schemas.openxmlformats.org/drawingml/2006/main"/>
-          <a:ln xmlns:a="http://schemas.openxmlformats.org/drawingml/2006/main" w="0">
-            <a:noFill/>
-            <a:prstDash val="solid"/>
-          </a:ln>
-        </p:spPr>
-        <p:txBody>
-          <a:bodyPr xmlns:a="http://schemas.openxmlformats.org/drawingml/2006/main" wrap="square" lIns="0" tIns="0" rIns="0" bIns="0" anchor="t">
-            <a:normAutofit fontScale="100000"/>
-          </a:bodyPr>
-          <a:lstStyle xmlns:a="http://schemas.openxmlformats.org/drawingml/2006/main"/>
-          <a:p xmlns:a="http://schemas.openxmlformats.org/drawingml/2006/main">
-            <a:pPr algn="l">
-              <a:defRPr sz="1350" b="0" i="0">
-                <a:solidFill>
-                  <a:srgbClr val="25364A"/>
-                </a:solidFill>
-                <a:latin typeface="Microsoft YaHei"/>
-                <a:ea typeface="Microsoft YaHei"/>
-                <a:cs typeface="Microsoft YaHei"/>
-              </a:defRPr>
-            </a:pPr>
-            <a:r>
-              <a:rPr sz="1350" b="0" i="0">
-                <a:solidFill>
-                  <a:srgbClr val="25364A"/>
-                </a:solidFill>
-                <a:latin typeface="Microsoft YaHei"/>
-                <a:ea typeface="Microsoft YaHei"/>
-                <a:cs typeface="Microsoft YaHei"/>
-              </a:rPr>
-              <a:t>任务描述</a:t>
-            </a:r>
-          </a:p>
-          <a:p xmlns:a="http://schemas.openxmlformats.org/drawingml/2006/main">
-            <a:r>
-              <a:t/>
-            </a:r>
-          </a:p>
-          <a:p xmlns:a="http://schemas.openxmlformats.org/drawingml/2006/main">
-            <a:pPr algn="l">
-              <a:defRPr sz="1350" b="0" i="0">
-                <a:solidFill>
-                  <a:srgbClr val="25364A"/>
-                </a:solidFill>
-                <a:latin typeface="Microsoft YaHei"/>
-                <a:ea typeface="Microsoft YaHei"/>
-                <a:cs typeface="Microsoft YaHei"/>
-              </a:defRPr>
-            </a:pPr>
-            <a:r>
-              <a:rPr sz="1350" b="0" i="0">
-                <a:solidFill>
-                  <a:srgbClr val="25364A"/>
-                </a:solidFill>
-                <a:latin typeface="Microsoft YaHei"/>
-                <a:ea typeface="Microsoft YaHei"/>
-                <a:cs typeface="Microsoft YaHei"/>
-              </a:rPr>
-              <a:t>少量人工标注／专家偏好</a:t>
-            </a:r>
-          </a:p>
-          <a:p xmlns:a="http://schemas.openxmlformats.org/drawingml/2006/main">
-            <a:r>
-              <a:t/>
-            </a:r>
-          </a:p>
-          <a:p xmlns:a="http://schemas.openxmlformats.org/drawingml/2006/main">
-            <a:pPr algn="l">
-              <a:defRPr sz="1350" b="0" i="0">
-                <a:solidFill>
-                  <a:srgbClr val="25364A"/>
-                </a:solidFill>
-                <a:latin typeface="Microsoft YaHei"/>
-                <a:ea typeface="Microsoft YaHei"/>
-                <a:cs typeface="Microsoft YaHei"/>
-              </a:defRPr>
-            </a:pPr>
-            <a:r>
-              <a:rPr sz="1350" b="0" i="0">
-                <a:solidFill>
-                  <a:srgbClr val="25364A"/>
-                </a:solidFill>
-                <a:latin typeface="Microsoft YaHei"/>
-                <a:ea typeface="Microsoft YaHei"/>
-                <a:cs typeface="Microsoft YaHei"/>
-              </a:rPr>
-              <a:t>已有规则、Prompt和评估器输出</a:t>
-            </a:r>
-          </a:p>
-          <a:p xmlns:a="http://schemas.openxmlformats.org/drawingml/2006/main">
-            <a:r>
-              <a:t/>
-            </a:r>
-          </a:p>
-          <a:p xmlns:a="http://schemas.openxmlformats.org/drawingml/2006/main">
-            <a:pPr algn="l">
-              <a:defRPr sz="1350" b="0" i="0">
-                <a:solidFill>
-                  <a:srgbClr val="25364A"/>
-                </a:solidFill>
-                <a:latin typeface="Microsoft YaHei"/>
-                <a:ea typeface="Microsoft YaHei"/>
-                <a:cs typeface="Microsoft YaHei"/>
-              </a:defRPr>
-            </a:pPr>
-            <a:r>
-              <a:rPr sz="1350" b="0" i="0">
-                <a:solidFill>
-                  <a:srgbClr val="25364A"/>
-                </a:solidFill>
-                <a:latin typeface="Microsoft YaHei"/>
-                <a:ea typeface="Microsoft YaHei"/>
-                <a:cs typeface="Microsoft YaHei"/>
-              </a:rPr>
-              <a:t>业务关注的质量维度</a:t>
-            </a:r>
-          </a:p>
-        </p:txBody>
-      </p:sp>
-      <p:sp>
-        <p:nvSpPr>
-          <p:cNvPr id="8" name="auto-text-30">
-            <a:extLst xmlns:a="http://schemas.openxmlformats.org/drawingml/2006/main">
-              <a:ext uri="{FF2B5EF4-FFF2-40B4-BE49-F238E27FC236}">
-                <a16:creationId xmlns:a16="http://schemas.microsoft.com/office/drawing/2014/main" id="{C88BF042-9FE8-4F61-B249-FB598954B697}"/>
-              </a:ext>
-            </a:extLst>
-          </p:cNvPr>
-          <p:cNvSpPr>
-            <a:spLocks xmlns:a="http://schemas.openxmlformats.org/drawingml/2006/main" noGrp="1"/>
-          </p:cNvSpPr>
-          <p:nvPr/>
-        </p:nvSpPr>
-        <p:spPr>
-          <a:xfrm xmlns:a="http://schemas.openxmlformats.org/drawingml/2006/main">
-            <a:off x="3562350" y="2971800"/>
-            <a:ext cx="685800" cy="685800"/>
-          </a:xfrm>
-          <a:prstGeom xmlns:a="http://schemas.openxmlformats.org/drawingml/2006/main" prst="rect">
-            <a:avLst/>
-          </a:prstGeom>
-          <a:noFill xmlns:a="http://schemas.openxmlformats.org/drawingml/2006/main"/>
-          <a:ln xmlns:a="http://schemas.openxmlformats.org/drawingml/2006/main" w="0">
-            <a:noFill/>
-            <a:prstDash val="solid"/>
-          </a:ln>
-        </p:spPr>
-        <p:txBody>
-          <a:bodyPr xmlns:a="http://schemas.openxmlformats.org/drawingml/2006/main" wrap="square" lIns="0" tIns="0" rIns="0" bIns="0" anchor="t">
-            <a:normAutofit fontScale="100000"/>
-          </a:bodyPr>
-          <a:lstStyle xmlns:a="http://schemas.openxmlformats.org/drawingml/2006/main"/>
-          <a:p xmlns:a="http://schemas.openxmlformats.org/drawingml/2006/main">
-            <a:pPr algn="ctr">
-              <a:defRPr sz="3900" b="1" i="0">
-                <a:solidFill>
-                  <a:srgbClr val="9BB3E9"/>
-                </a:solidFill>
-                <a:latin typeface="Microsoft YaHei"/>
-                <a:ea typeface="Microsoft YaHei"/>
-                <a:cs typeface="Microsoft YaHei"/>
-              </a:defRPr>
-            </a:pPr>
-            <a:r>
-              <a:rPr sz="3900" b="1" i="0">
-                <a:solidFill>
-                  <a:srgbClr val="9BB3E9"/>
-                </a:solidFill>
-                <a:latin typeface="Microsoft YaHei"/>
-                <a:ea typeface="Microsoft YaHei"/>
-                <a:cs typeface="Microsoft YaHei"/>
-              </a:rPr>
-              <a:t>→</a:t>
-            </a:r>
-          </a:p>
-        </p:txBody>
-      </p:sp>
-      <p:sp>
-        <p:nvSpPr>
-          <p:cNvPr id="9" name="calibration-node">
-            <a:extLst xmlns:a="http://schemas.openxmlformats.org/drawingml/2006/main">
-              <a:ext uri="{FF2B5EF4-FFF2-40B4-BE49-F238E27FC236}">
-                <a16:creationId xmlns:a16="http://schemas.microsoft.com/office/drawing/2014/main" id="{CB76C14B-A2C8-45F1-9EC6-37B3467D5E39}"/>
-              </a:ext>
-            </a:extLst>
-          </p:cNvPr>
-          <p:cNvSpPr>
-            <a:spLocks xmlns:a="http://schemas.openxmlformats.org/drawingml/2006/main" noGrp="1"/>
-          </p:cNvSpPr>
-          <p:nvPr/>
-        </p:nvSpPr>
-        <p:spPr>
-          <a:xfrm xmlns:a="http://schemas.openxmlformats.org/drawingml/2006/main">
-            <a:off x="4191000" y="1504950"/>
-            <a:ext cx="3810000" cy="3657600"/>
-          </a:xfrm>
-          <a:prstGeom xmlns:a="http://schemas.openxmlformats.org/drawingml/2006/main" prst="roundRect">
-            <a:avLst>
-              <a:gd name="adj" fmla="val 3125"/>
+              <a:gd name="adj" fmla="val 5357"/>
             </a:avLst>
           </a:prstGeom>
           <a:solidFill xmlns:a="http://schemas.openxmlformats.org/drawingml/2006/main">
@@ -9852,7 +9830,7 @@
           </a:solidFill>
           <a:ln xmlns:a="http://schemas.openxmlformats.org/drawingml/2006/main" w="9525">
             <a:solidFill>
-              <a:srgbClr val="B7C8F5"/>
+              <a:srgbClr val="EAF0FF"/>
             </a:solidFill>
             <a:prstDash val="solid"/>
           </a:ln>
@@ -9860,40 +9838,40 @@
       </p:sp>
       <p:sp>
         <p:nvSpPr>
-          <p:cNvPr id="10" name="auto-text-31">
-            <a:extLst xmlns:a="http://schemas.openxmlformats.org/drawingml/2006/main">
-              <a:ext uri="{FF2B5EF4-FFF2-40B4-BE49-F238E27FC236}">
-                <a16:creationId xmlns:a16="http://schemas.microsoft.com/office/drawing/2014/main" id="{45158B01-31E5-4370-BD0D-1488EE9F5BE3}"/>
-              </a:ext>
-            </a:extLst>
-          </p:cNvPr>
-          <p:cNvSpPr>
-            <a:spLocks xmlns:a="http://schemas.openxmlformats.org/drawingml/2006/main" noGrp="1"/>
-          </p:cNvSpPr>
-          <p:nvPr/>
-        </p:nvSpPr>
-        <p:spPr>
-          <a:xfrm xmlns:a="http://schemas.openxmlformats.org/drawingml/2006/main">
-            <a:off x="4495800" y="1809750"/>
-            <a:ext cx="3219450" cy="381000"/>
-          </a:xfrm>
-          <a:prstGeom xmlns:a="http://schemas.openxmlformats.org/drawingml/2006/main" prst="rect">
-            <a:avLst/>
-          </a:prstGeom>
-          <a:noFill xmlns:a="http://schemas.openxmlformats.org/drawingml/2006/main"/>
-          <a:ln xmlns:a="http://schemas.openxmlformats.org/drawingml/2006/main" w="0">
-            <a:noFill/>
-            <a:prstDash val="solid"/>
-          </a:ln>
-        </p:spPr>
-        <p:txBody>
-          <a:bodyPr xmlns:a="http://schemas.openxmlformats.org/drawingml/2006/main" wrap="square" lIns="0" tIns="0" rIns="0" bIns="0" anchor="t">
-            <a:normAutofit fontScale="100000"/>
-          </a:bodyPr>
-          <a:lstStyle xmlns:a="http://schemas.openxmlformats.org/drawingml/2006/main"/>
-          <a:p xmlns:a="http://schemas.openxmlformats.org/drawingml/2006/main">
-            <a:pPr algn="ctr">
-              <a:defRPr sz="2025" b="1" i="0">
+          <p:cNvPr id="6" name="value-title-0">
+            <a:extLst xmlns:a="http://schemas.openxmlformats.org/drawingml/2006/main">
+              <a:ext uri="{FF2B5EF4-FFF2-40B4-BE49-F238E27FC236}">
+                <a16:creationId xmlns:a16="http://schemas.microsoft.com/office/drawing/2014/main" id="{C73AE096-0CF6-446D-9F3D-81E6626A9797}"/>
+              </a:ext>
+            </a:extLst>
+          </p:cNvPr>
+          <p:cNvSpPr>
+            <a:spLocks xmlns:a="http://schemas.openxmlformats.org/drawingml/2006/main" noGrp="1"/>
+          </p:cNvSpPr>
+          <p:nvPr/>
+        </p:nvSpPr>
+        <p:spPr>
+          <a:xfrm xmlns:a="http://schemas.openxmlformats.org/drawingml/2006/main">
+            <a:off x="742950" y="1809750"/>
+            <a:ext cx="2857500" cy="323850"/>
+          </a:xfrm>
+          <a:prstGeom xmlns:a="http://schemas.openxmlformats.org/drawingml/2006/main" prst="rect">
+            <a:avLst/>
+          </a:prstGeom>
+          <a:noFill xmlns:a="http://schemas.openxmlformats.org/drawingml/2006/main"/>
+          <a:ln xmlns:a="http://schemas.openxmlformats.org/drawingml/2006/main" w="0">
+            <a:noFill/>
+            <a:prstDash val="solid"/>
+          </a:ln>
+        </p:spPr>
+        <p:txBody>
+          <a:bodyPr xmlns:a="http://schemas.openxmlformats.org/drawingml/2006/main" wrap="square" lIns="0" tIns="0" rIns="0" bIns="0" anchor="t">
+            <a:normAutofit fontScale="100000"/>
+          </a:bodyPr>
+          <a:lstStyle xmlns:a="http://schemas.openxmlformats.org/drawingml/2006/main"/>
+          <a:p xmlns:a="http://schemas.openxmlformats.org/drawingml/2006/main">
+            <a:pPr algn="l">
+              <a:defRPr sz="1875" b="1" i="0">
                 <a:solidFill>
                   <a:srgbClr val="2F6BFF"/>
                 </a:solidFill>
@@ -9903,7 +9881,7 @@
               </a:defRPr>
             </a:pPr>
             <a:r>
-              <a:rPr sz="2025" b="1" i="0">
+              <a:rPr sz="1875" b="1" i="0">
                 <a:solidFill>
                   <a:srgbClr val="2F6BFF"/>
                 </a:solidFill>
@@ -9911,29 +9889,29 @@
                 <a:ea typeface="Microsoft YaHei"/>
                 <a:cs typeface="Microsoft YaHei"/>
               </a:rPr>
-              <a:t>任务自适应质量评估层</a:t>
-            </a:r>
-          </a:p>
-        </p:txBody>
-      </p:sp>
-      <p:sp>
-        <p:nvSpPr>
-          <p:cNvPr id="11" name="auto-text-32">
-            <a:extLst xmlns:a="http://schemas.openxmlformats.org/drawingml/2006/main">
-              <a:ext uri="{FF2B5EF4-FFF2-40B4-BE49-F238E27FC236}">
-                <a16:creationId xmlns:a16="http://schemas.microsoft.com/office/drawing/2014/main" id="{C8E61F95-CEA5-458B-A1AD-64AAF4C8F751}"/>
-              </a:ext>
-            </a:extLst>
-          </p:cNvPr>
-          <p:cNvSpPr>
-            <a:spLocks xmlns:a="http://schemas.openxmlformats.org/drawingml/2006/main" noGrp="1"/>
-          </p:cNvSpPr>
-          <p:nvPr/>
-        </p:nvSpPr>
-        <p:spPr>
-          <a:xfrm xmlns:a="http://schemas.openxmlformats.org/drawingml/2006/main">
-            <a:off x="4552950" y="2438400"/>
-            <a:ext cx="3143250" cy="2152650"/>
+              <a:t>业务价值</a:t>
+            </a:r>
+          </a:p>
+        </p:txBody>
+      </p:sp>
+      <p:sp>
+        <p:nvSpPr>
+          <p:cNvPr id="7" name="value-body-0">
+            <a:extLst xmlns:a="http://schemas.openxmlformats.org/drawingml/2006/main">
+              <a:ext uri="{FF2B5EF4-FFF2-40B4-BE49-F238E27FC236}">
+                <a16:creationId xmlns:a16="http://schemas.microsoft.com/office/drawing/2014/main" id="{EE488468-D7E1-4FB3-B498-FD1351F66BEE}"/>
+              </a:ext>
+            </a:extLst>
+          </p:cNvPr>
+          <p:cNvSpPr>
+            <a:spLocks xmlns:a="http://schemas.openxmlformats.org/drawingml/2006/main" noGrp="1"/>
+          </p:cNvSpPr>
+          <p:nvPr/>
+        </p:nvSpPr>
+        <p:spPr>
+          <a:xfrm xmlns:a="http://schemas.openxmlformats.org/drawingml/2006/main">
+            <a:off x="742950" y="2286000"/>
+            <a:ext cx="2857500" cy="1123950"/>
           </a:xfrm>
           <a:prstGeom xmlns:a="http://schemas.openxmlformats.org/drawingml/2006/main" prst="rect">
             <a:avLst/>
@@ -9951,7 +9929,7 @@
           <a:lstStyle xmlns:a="http://schemas.openxmlformats.org/drawingml/2006/main"/>
           <a:p xmlns:a="http://schemas.openxmlformats.org/drawingml/2006/main">
             <a:pPr algn="l">
-              <a:defRPr sz="1350" b="0" i="0">
+              <a:defRPr sz="1275" b="0" i="0">
                 <a:solidFill>
                   <a:srgbClr val="12263A"/>
                 </a:solidFill>
@@ -9961,7 +9939,7 @@
               </a:defRPr>
             </a:pPr>
             <a:r>
-              <a:rPr sz="1350" b="0" i="0">
+              <a:rPr sz="1275" b="0" i="0">
                 <a:solidFill>
                   <a:srgbClr val="12263A"/>
                 </a:solidFill>
@@ -9969,17 +9947,12 @@
                 <a:ea typeface="Microsoft YaHei"/>
                 <a:cs typeface="Microsoft YaHei"/>
               </a:rPr>
-              <a:t>01  任务偏好与质量维度建模</a:t>
-            </a:r>
-          </a:p>
-          <a:p xmlns:a="http://schemas.openxmlformats.org/drawingml/2006/main">
-            <a:r>
-              <a:t/>
+              <a:t>• 减少重复设计和搭建质检流程</a:t>
             </a:r>
           </a:p>
           <a:p xmlns:a="http://schemas.openxmlformats.org/drawingml/2006/main">
             <a:pPr algn="l">
-              <a:defRPr sz="1350" b="0" i="0">
+              <a:defRPr sz="1275" b="0" i="0">
                 <a:solidFill>
                   <a:srgbClr val="12263A"/>
                 </a:solidFill>
@@ -9989,7 +9962,7 @@
               </a:defRPr>
             </a:pPr>
             <a:r>
-              <a:rPr sz="1350" b="0" i="0">
+              <a:rPr sz="1275" b="0" i="0">
                 <a:solidFill>
                   <a:srgbClr val="12263A"/>
                 </a:solidFill>
@@ -9997,17 +9970,12 @@
                 <a:ea typeface="Microsoft YaHei"/>
                 <a:cs typeface="Microsoft YaHei"/>
               </a:rPr>
-              <a:t>02  分数／权重／阈值与置信度校准</a:t>
-            </a:r>
-          </a:p>
-          <a:p xmlns:a="http://schemas.openxmlformats.org/drawingml/2006/main">
-            <a:r>
-              <a:t/>
+              <a:t>• 将人工集中到困难和高风险样本</a:t>
             </a:r>
           </a:p>
           <a:p xmlns:a="http://schemas.openxmlformats.org/drawingml/2006/main">
             <a:pPr algn="l">
-              <a:defRPr sz="1350" b="0" i="0">
+              <a:defRPr sz="1275" b="0" i="0">
                 <a:solidFill>
                   <a:srgbClr val="12263A"/>
                 </a:solidFill>
@@ -10017,7 +9985,7 @@
               </a:defRPr>
             </a:pPr>
             <a:r>
-              <a:rPr sz="1350" b="0" i="0">
+              <a:rPr sz="1275" b="0" i="0">
                 <a:solidFill>
                   <a:srgbClr val="12263A"/>
                 </a:solidFill>
@@ -10025,119 +9993,33 @@
                 <a:ea typeface="Microsoft YaHei"/>
                 <a:cs typeface="Microsoft YaHei"/>
               </a:rPr>
-              <a:t>03  多视角邻域共识与分歧检测</a:t>
-            </a:r>
-          </a:p>
-          <a:p xmlns:a="http://schemas.openxmlformats.org/drawingml/2006/main">
-            <a:r>
-              <a:t/>
-            </a:r>
-          </a:p>
-          <a:p xmlns:a="http://schemas.openxmlformats.org/drawingml/2006/main">
-            <a:pPr algn="l">
-              <a:defRPr sz="1350" b="0" i="0">
-                <a:solidFill>
-                  <a:srgbClr val="12263A"/>
-                </a:solidFill>
-                <a:latin typeface="Microsoft YaHei"/>
-                <a:ea typeface="Microsoft YaHei"/>
-                <a:cs typeface="Microsoft YaHei"/>
-              </a:defRPr>
-            </a:pPr>
-            <a:r>
-              <a:rPr sz="1350" b="0" i="0">
-                <a:solidFill>
-                  <a:srgbClr val="12263A"/>
-                </a:solidFill>
-                <a:latin typeface="Microsoft YaHei"/>
-                <a:ea typeface="Microsoft YaHei"/>
-                <a:cs typeface="Microsoft YaHei"/>
-              </a:rPr>
-              <a:t>04  对象、属性、数量、空间关系等证据核验</a:t>
-            </a:r>
-          </a:p>
-        </p:txBody>
-      </p:sp>
-      <p:sp>
-        <p:nvSpPr>
-          <p:cNvPr id="12" name="auto-text-33">
-            <a:extLst xmlns:a="http://schemas.openxmlformats.org/drawingml/2006/main">
-              <a:ext uri="{FF2B5EF4-FFF2-40B4-BE49-F238E27FC236}">
-                <a16:creationId xmlns:a16="http://schemas.microsoft.com/office/drawing/2014/main" id="{5BDDD454-8414-47E0-981A-223219A34F4E}"/>
-              </a:ext>
-            </a:extLst>
-          </p:cNvPr>
-          <p:cNvSpPr>
-            <a:spLocks xmlns:a="http://schemas.openxmlformats.org/drawingml/2006/main" noGrp="1"/>
-          </p:cNvSpPr>
-          <p:nvPr/>
-        </p:nvSpPr>
-        <p:spPr>
-          <a:xfrm xmlns:a="http://schemas.openxmlformats.org/drawingml/2006/main">
-            <a:off x="8096250" y="2971800"/>
-            <a:ext cx="685800" cy="685800"/>
-          </a:xfrm>
-          <a:prstGeom xmlns:a="http://schemas.openxmlformats.org/drawingml/2006/main" prst="rect">
-            <a:avLst/>
-          </a:prstGeom>
-          <a:noFill xmlns:a="http://schemas.openxmlformats.org/drawingml/2006/main"/>
-          <a:ln xmlns:a="http://schemas.openxmlformats.org/drawingml/2006/main" w="0">
-            <a:noFill/>
-            <a:prstDash val="solid"/>
-          </a:ln>
-        </p:spPr>
-        <p:txBody>
-          <a:bodyPr xmlns:a="http://schemas.openxmlformats.org/drawingml/2006/main" wrap="square" lIns="0" tIns="0" rIns="0" bIns="0" anchor="t">
-            <a:normAutofit fontScale="100000"/>
-          </a:bodyPr>
-          <a:lstStyle xmlns:a="http://schemas.openxmlformats.org/drawingml/2006/main"/>
-          <a:p xmlns:a="http://schemas.openxmlformats.org/drawingml/2006/main">
-            <a:pPr algn="ctr">
-              <a:defRPr sz="3900" b="1" i="0">
-                <a:solidFill>
-                  <a:srgbClr val="86C9C2"/>
-                </a:solidFill>
-                <a:latin typeface="Microsoft YaHei"/>
-                <a:ea typeface="Microsoft YaHei"/>
-                <a:cs typeface="Microsoft YaHei"/>
-              </a:defRPr>
-            </a:pPr>
-            <a:r>
-              <a:rPr sz="3900" b="1" i="0">
-                <a:solidFill>
-                  <a:srgbClr val="86C9C2"/>
-                </a:solidFill>
-                <a:latin typeface="Microsoft YaHei"/>
-                <a:ea typeface="Microsoft YaHei"/>
-                <a:cs typeface="Microsoft YaHei"/>
-              </a:rPr>
-              <a:t>→</a:t>
-            </a:r>
-          </a:p>
-        </p:txBody>
-      </p:sp>
-      <p:sp>
-        <p:nvSpPr>
-          <p:cNvPr id="13" name="output-node">
-            <a:extLst xmlns:a="http://schemas.openxmlformats.org/drawingml/2006/main">
-              <a:ext uri="{FF2B5EF4-FFF2-40B4-BE49-F238E27FC236}">
-                <a16:creationId xmlns:a16="http://schemas.microsoft.com/office/drawing/2014/main" id="{B8DA92E5-8621-42FC-926C-A64BFB9003E8}"/>
-              </a:ext>
-            </a:extLst>
-          </p:cNvPr>
-          <p:cNvSpPr>
-            <a:spLocks xmlns:a="http://schemas.openxmlformats.org/drawingml/2006/main" noGrp="1"/>
-          </p:cNvSpPr>
-          <p:nvPr/>
-        </p:nvSpPr>
-        <p:spPr>
-          <a:xfrm xmlns:a="http://schemas.openxmlformats.org/drawingml/2006/main">
-            <a:off x="8724900" y="1695450"/>
-            <a:ext cx="2952750" cy="3276600"/>
+              <a:t>• 缩短新任务质量标准落地周期</a:t>
+            </a:r>
+          </a:p>
+        </p:txBody>
+      </p:sp>
+      <p:sp>
+        <p:nvSpPr>
+          <p:cNvPr id="8" name="value-1">
+            <a:extLst xmlns:a="http://schemas.openxmlformats.org/drawingml/2006/main">
+              <a:ext uri="{FF2B5EF4-FFF2-40B4-BE49-F238E27FC236}">
+                <a16:creationId xmlns:a16="http://schemas.microsoft.com/office/drawing/2014/main" id="{B9F995DF-6064-457E-81E7-3A015FD5BCF4}"/>
+              </a:ext>
+            </a:extLst>
+          </p:cNvPr>
+          <p:cNvSpPr>
+            <a:spLocks xmlns:a="http://schemas.openxmlformats.org/drawingml/2006/main" noGrp="1"/>
+          </p:cNvSpPr>
+          <p:nvPr/>
+        </p:nvSpPr>
+        <p:spPr>
+          <a:xfrm xmlns:a="http://schemas.openxmlformats.org/drawingml/2006/main">
+            <a:off x="4210050" y="1581150"/>
+            <a:ext cx="3314700" cy="2133600"/>
           </a:xfrm>
           <a:prstGeom xmlns:a="http://schemas.openxmlformats.org/drawingml/2006/main" prst="roundRect">
             <a:avLst>
-              <a:gd name="adj" fmla="val 3871"/>
+              <a:gd name="adj" fmla="val 5357"/>
             </a:avLst>
           </a:prstGeom>
           <a:solidFill xmlns:a="http://schemas.openxmlformats.org/drawingml/2006/main">
@@ -10145,7 +10027,7 @@
           </a:solidFill>
           <a:ln xmlns:a="http://schemas.openxmlformats.org/drawingml/2006/main" w="9525">
             <a:solidFill>
-              <a:srgbClr val="B6DDD8"/>
+              <a:srgbClr val="E7F6F3"/>
             </a:solidFill>
             <a:prstDash val="solid"/>
           </a:ln>
@@ -10153,22 +10035,22 @@
       </p:sp>
       <p:sp>
         <p:nvSpPr>
-          <p:cNvPr id="14" name="auto-text-34">
-            <a:extLst xmlns:a="http://schemas.openxmlformats.org/drawingml/2006/main">
-              <a:ext uri="{FF2B5EF4-FFF2-40B4-BE49-F238E27FC236}">
-                <a16:creationId xmlns:a16="http://schemas.microsoft.com/office/drawing/2014/main" id="{5D87EE9A-4695-44AB-BF8E-49D67364760B}"/>
-              </a:ext>
-            </a:extLst>
-          </p:cNvPr>
-          <p:cNvSpPr>
-            <a:spLocks xmlns:a="http://schemas.openxmlformats.org/drawingml/2006/main" noGrp="1"/>
-          </p:cNvSpPr>
-          <p:nvPr/>
-        </p:nvSpPr>
-        <p:spPr>
-          <a:xfrm xmlns:a="http://schemas.openxmlformats.org/drawingml/2006/main">
-            <a:off x="8991600" y="1924050"/>
-            <a:ext cx="1143000" cy="323850"/>
+          <p:cNvPr id="9" name="value-title-1">
+            <a:extLst xmlns:a="http://schemas.openxmlformats.org/drawingml/2006/main">
+              <a:ext uri="{FF2B5EF4-FFF2-40B4-BE49-F238E27FC236}">
+                <a16:creationId xmlns:a16="http://schemas.microsoft.com/office/drawing/2014/main" id="{8223B2BB-CB94-477A-986A-CEE8835FA192}"/>
+              </a:ext>
+            </a:extLst>
+          </p:cNvPr>
+          <p:cNvSpPr>
+            <a:spLocks xmlns:a="http://schemas.openxmlformats.org/drawingml/2006/main" noGrp="1"/>
+          </p:cNvSpPr>
+          <p:nvPr/>
+        </p:nvSpPr>
+        <p:spPr>
+          <a:xfrm xmlns:a="http://schemas.openxmlformats.org/drawingml/2006/main">
+            <a:off x="4438650" y="1809750"/>
+            <a:ext cx="2857500" cy="323850"/>
           </a:xfrm>
           <a:prstGeom xmlns:a="http://schemas.openxmlformats.org/drawingml/2006/main" prst="rect">
             <a:avLst/>
@@ -10204,29 +10086,29 @@
                 <a:ea typeface="Microsoft YaHei"/>
                 <a:cs typeface="Microsoft YaHei"/>
               </a:rPr>
-              <a:t>输出</a:t>
-            </a:r>
-          </a:p>
-        </p:txBody>
-      </p:sp>
-      <p:sp>
-        <p:nvSpPr>
-          <p:cNvPr id="15" name="auto-text-35">
-            <a:extLst xmlns:a="http://schemas.openxmlformats.org/drawingml/2006/main">
-              <a:ext uri="{FF2B5EF4-FFF2-40B4-BE49-F238E27FC236}">
-                <a16:creationId xmlns:a16="http://schemas.microsoft.com/office/drawing/2014/main" id="{7935F32B-2342-415A-8B8E-A7B660BEEB53}"/>
-              </a:ext>
-            </a:extLst>
-          </p:cNvPr>
-          <p:cNvSpPr>
-            <a:spLocks xmlns:a="http://schemas.openxmlformats.org/drawingml/2006/main" noGrp="1"/>
-          </p:cNvSpPr>
-          <p:nvPr/>
-        </p:nvSpPr>
-        <p:spPr>
-          <a:xfrm xmlns:a="http://schemas.openxmlformats.org/drawingml/2006/main">
-            <a:off x="8991600" y="2419350"/>
-            <a:ext cx="2381250" cy="2266950"/>
+              <a:t>技术价值</a:t>
+            </a:r>
+          </a:p>
+        </p:txBody>
+      </p:sp>
+      <p:sp>
+        <p:nvSpPr>
+          <p:cNvPr id="10" name="value-body-1">
+            <a:extLst xmlns:a="http://schemas.openxmlformats.org/drawingml/2006/main">
+              <a:ext uri="{FF2B5EF4-FFF2-40B4-BE49-F238E27FC236}">
+                <a16:creationId xmlns:a16="http://schemas.microsoft.com/office/drawing/2014/main" id="{32C62C97-AFB9-41FA-BCE2-0B2FAE2170E0}"/>
+              </a:ext>
+            </a:extLst>
+          </p:cNvPr>
+          <p:cNvSpPr>
+            <a:spLocks xmlns:a="http://schemas.openxmlformats.org/drawingml/2006/main" noGrp="1"/>
+          </p:cNvSpPr>
+          <p:nvPr/>
+        </p:nvSpPr>
+        <p:spPr>
+          <a:xfrm xmlns:a="http://schemas.openxmlformats.org/drawingml/2006/main">
+            <a:off x="4438650" y="2286000"/>
+            <a:ext cx="2857500" cy="1123950"/>
           </a:xfrm>
           <a:prstGeom xmlns:a="http://schemas.openxmlformats.org/drawingml/2006/main" prst="rect">
             <a:avLst/>
@@ -10244,163 +10126,352 @@
           <a:lstStyle xmlns:a="http://schemas.openxmlformats.org/drawingml/2006/main"/>
           <a:p xmlns:a="http://schemas.openxmlformats.org/drawingml/2006/main">
             <a:pPr algn="l">
-              <a:defRPr sz="1350" b="0" i="0">
-                <a:solidFill>
-                  <a:srgbClr val="25364A"/>
-                </a:solidFill>
-                <a:latin typeface="Microsoft YaHei"/>
-                <a:ea typeface="Microsoft YaHei"/>
-                <a:cs typeface="Microsoft YaHei"/>
-              </a:defRPr>
-            </a:pPr>
-            <a:r>
-              <a:rPr sz="1350" b="0" i="0">
-                <a:solidFill>
-                  <a:srgbClr val="25364A"/>
-                </a:solidFill>
-                <a:latin typeface="Microsoft YaHei"/>
-                <a:ea typeface="Microsoft YaHei"/>
-                <a:cs typeface="Microsoft YaHei"/>
-              </a:rPr>
-              <a:t>任务适配后的质量分数</a:t>
-            </a:r>
-          </a:p>
-          <a:p xmlns:a="http://schemas.openxmlformats.org/drawingml/2006/main">
-            <a:r>
-              <a:t/>
+              <a:defRPr sz="1275" b="0" i="0">
+                <a:solidFill>
+                  <a:srgbClr val="12263A"/>
+                </a:solidFill>
+                <a:latin typeface="Microsoft YaHei"/>
+                <a:ea typeface="Microsoft YaHei"/>
+                <a:cs typeface="Microsoft YaHei"/>
+              </a:defRPr>
+            </a:pPr>
+            <a:r>
+              <a:rPr sz="1275" b="0" i="0">
+                <a:solidFill>
+                  <a:srgbClr val="12263A"/>
+                </a:solidFill>
+                <a:latin typeface="Microsoft YaHei"/>
+                <a:ea typeface="Microsoft YaHei"/>
+                <a:cs typeface="Microsoft YaHei"/>
+              </a:rPr>
+              <a:t>• 建立系统化Rubric和验证协议</a:t>
             </a:r>
           </a:p>
           <a:p xmlns:a="http://schemas.openxmlformats.org/drawingml/2006/main">
             <a:pPr algn="l">
-              <a:defRPr sz="1350" b="0" i="0">
-                <a:solidFill>
-                  <a:srgbClr val="25364A"/>
-                </a:solidFill>
-                <a:latin typeface="Microsoft YaHei"/>
-                <a:ea typeface="Microsoft YaHei"/>
-                <a:cs typeface="Microsoft YaHei"/>
-              </a:defRPr>
-            </a:pPr>
-            <a:r>
-              <a:rPr sz="1350" b="0" i="0">
-                <a:solidFill>
-                  <a:srgbClr val="25364A"/>
-                </a:solidFill>
-                <a:latin typeface="Microsoft YaHei"/>
-                <a:ea typeface="Microsoft YaHei"/>
-                <a:cs typeface="Microsoft YaHei"/>
-              </a:rPr>
-              <a:t>高／低质量筛选结论</a:t>
-            </a:r>
-          </a:p>
-          <a:p xmlns:a="http://schemas.openxmlformats.org/drawingml/2006/main">
-            <a:r>
-              <a:t/>
+              <a:defRPr sz="1275" b="0" i="0">
+                <a:solidFill>
+                  <a:srgbClr val="12263A"/>
+                </a:solidFill>
+                <a:latin typeface="Microsoft YaHei"/>
+                <a:ea typeface="Microsoft YaHei"/>
+                <a:cs typeface="Microsoft YaHei"/>
+              </a:defRPr>
+            </a:pPr>
+            <a:r>
+              <a:rPr sz="1275" b="0" i="0">
+                <a:solidFill>
+                  <a:srgbClr val="12263A"/>
+                </a:solidFill>
+                <a:latin typeface="Microsoft YaHei"/>
+                <a:ea typeface="Microsoft YaHei"/>
+                <a:cs typeface="Microsoft YaHei"/>
+              </a:rPr>
+              <a:t>• 让Prompt、权重和阈值可实验比较</a:t>
             </a:r>
           </a:p>
           <a:p xmlns:a="http://schemas.openxmlformats.org/drawingml/2006/main">
             <a:pPr algn="l">
-              <a:defRPr sz="1350" b="0" i="0">
-                <a:solidFill>
-                  <a:srgbClr val="25364A"/>
-                </a:solidFill>
-                <a:latin typeface="Microsoft YaHei"/>
-                <a:ea typeface="Microsoft YaHei"/>
-                <a:cs typeface="Microsoft YaHei"/>
-              </a:defRPr>
-            </a:pPr>
-            <a:r>
-              <a:rPr sz="1350" b="0" i="0">
-                <a:solidFill>
-                  <a:srgbClr val="25364A"/>
-                </a:solidFill>
-                <a:latin typeface="Microsoft YaHei"/>
-                <a:ea typeface="Microsoft YaHei"/>
-                <a:cs typeface="Microsoft YaHei"/>
-              </a:rPr>
-              <a:t>问题标签与证据摘要</a:t>
-            </a:r>
-          </a:p>
-          <a:p xmlns:a="http://schemas.openxmlformats.org/drawingml/2006/main">
-            <a:r>
-              <a:t/>
-            </a:r>
-          </a:p>
-          <a:p xmlns:a="http://schemas.openxmlformats.org/drawingml/2006/main">
-            <a:pPr algn="l">
-              <a:defRPr sz="1350" b="0" i="0">
-                <a:solidFill>
-                  <a:srgbClr val="25364A"/>
-                </a:solidFill>
-                <a:latin typeface="Microsoft YaHei"/>
-                <a:ea typeface="Microsoft YaHei"/>
-                <a:cs typeface="Microsoft YaHei"/>
-              </a:defRPr>
-            </a:pPr>
-            <a:r>
-              <a:rPr sz="1350" b="0" i="0">
-                <a:solidFill>
-                  <a:srgbClr val="25364A"/>
-                </a:solidFill>
-                <a:latin typeface="Microsoft YaHei"/>
-                <a:ea typeface="Microsoft YaHei"/>
-                <a:cs typeface="Microsoft YaHei"/>
-              </a:rPr>
-              <a:t>置信度与人工复核建议</a:t>
-            </a:r>
-          </a:p>
-          <a:p xmlns:a="http://schemas.openxmlformats.org/drawingml/2006/main">
-            <a:r>
-              <a:t/>
-            </a:r>
-          </a:p>
-          <a:p xmlns:a="http://schemas.openxmlformats.org/drawingml/2006/main">
-            <a:pPr algn="l">
-              <a:defRPr sz="1350" b="0" i="0">
-                <a:solidFill>
-                  <a:srgbClr val="25364A"/>
-                </a:solidFill>
-                <a:latin typeface="Microsoft YaHei"/>
-                <a:ea typeface="Microsoft YaHei"/>
-                <a:cs typeface="Microsoft YaHei"/>
-              </a:defRPr>
-            </a:pPr>
-            <a:r>
-              <a:rPr sz="1350" b="0" i="0">
-                <a:solidFill>
-                  <a:srgbClr val="25364A"/>
-                </a:solidFill>
-                <a:latin typeface="Microsoft YaHei"/>
-                <a:ea typeface="Microsoft YaHei"/>
-                <a:cs typeface="Microsoft YaHei"/>
-              </a:rPr>
-              <a:t>可复用接口与评测脚本</a:t>
-            </a:r>
-          </a:p>
-        </p:txBody>
-      </p:sp>
-      <p:sp>
-        <p:nvSpPr>
-          <p:cNvPr id="16" name="scenario-band">
-            <a:extLst xmlns:a="http://schemas.openxmlformats.org/drawingml/2006/main">
-              <a:ext uri="{FF2B5EF4-FFF2-40B4-BE49-F238E27FC236}">
-                <a16:creationId xmlns:a16="http://schemas.microsoft.com/office/drawing/2014/main" id="{293E335A-DA68-4ADD-B7A4-AADB844017A2}"/>
-              </a:ext>
-            </a:extLst>
-          </p:cNvPr>
-          <p:cNvSpPr>
-            <a:spLocks xmlns:a="http://schemas.openxmlformats.org/drawingml/2006/main" noGrp="1"/>
-          </p:cNvSpPr>
-          <p:nvPr/>
-        </p:nvSpPr>
-        <p:spPr>
-          <a:xfrm xmlns:a="http://schemas.openxmlformats.org/drawingml/2006/main">
-            <a:off x="514350" y="5429250"/>
-            <a:ext cx="7810500" cy="571500"/>
+              <a:defRPr sz="1275" b="0" i="0">
+                <a:solidFill>
+                  <a:srgbClr val="12263A"/>
+                </a:solidFill>
+                <a:latin typeface="Microsoft YaHei"/>
+                <a:ea typeface="Microsoft YaHei"/>
+                <a:cs typeface="Microsoft YaHei"/>
+              </a:defRPr>
+            </a:pPr>
+            <a:r>
+              <a:rPr sz="1275" b="0" i="0">
+                <a:solidFill>
+                  <a:srgbClr val="12263A"/>
+                </a:solidFill>
+                <a:latin typeface="Microsoft YaHei"/>
+                <a:ea typeface="Microsoft YaHei"/>
+                <a:cs typeface="Microsoft YaHei"/>
+              </a:rPr>
+              <a:t>• 输出分数、证据、置信度与复核建议</a:t>
+            </a:r>
+          </a:p>
+        </p:txBody>
+      </p:sp>
+      <p:sp>
+        <p:nvSpPr>
+          <p:cNvPr id="11" name="value-2">
+            <a:extLst xmlns:a="http://schemas.openxmlformats.org/drawingml/2006/main">
+              <a:ext uri="{FF2B5EF4-FFF2-40B4-BE49-F238E27FC236}">
+                <a16:creationId xmlns:a16="http://schemas.microsoft.com/office/drawing/2014/main" id="{D116944D-F4CD-47FB-8AB2-DE2254FFA9D4}"/>
+              </a:ext>
+            </a:extLst>
+          </p:cNvPr>
+          <p:cNvSpPr>
+            <a:spLocks xmlns:a="http://schemas.openxmlformats.org/drawingml/2006/main" noGrp="1"/>
+          </p:cNvSpPr>
+          <p:nvPr/>
+        </p:nvSpPr>
+        <p:spPr>
+          <a:xfrm xmlns:a="http://schemas.openxmlformats.org/drawingml/2006/main">
+            <a:off x="7905750" y="1581150"/>
+            <a:ext cx="3314700" cy="2133600"/>
           </a:xfrm>
           <a:prstGeom xmlns:a="http://schemas.openxmlformats.org/drawingml/2006/main" prst="roundRect">
             <a:avLst>
-              <a:gd name="adj" fmla="val 13333"/>
+              <a:gd name="adj" fmla="val 5357"/>
+            </a:avLst>
+          </a:prstGeom>
+          <a:solidFill xmlns:a="http://schemas.openxmlformats.org/drawingml/2006/main">
+            <a:srgbClr val="FFF5DE"/>
+          </a:solidFill>
+          <a:ln xmlns:a="http://schemas.openxmlformats.org/drawingml/2006/main" w="9525">
+            <a:solidFill>
+              <a:srgbClr val="FFF5DE"/>
+            </a:solidFill>
+            <a:prstDash val="solid"/>
+          </a:ln>
+        </p:spPr>
+      </p:sp>
+      <p:sp>
+        <p:nvSpPr>
+          <p:cNvPr id="12" name="value-title-2">
+            <a:extLst xmlns:a="http://schemas.openxmlformats.org/drawingml/2006/main">
+              <a:ext uri="{FF2B5EF4-FFF2-40B4-BE49-F238E27FC236}">
+                <a16:creationId xmlns:a16="http://schemas.microsoft.com/office/drawing/2014/main" id="{0DC047BF-E1A3-4D42-862C-92921D0CF8A8}"/>
+              </a:ext>
+            </a:extLst>
+          </p:cNvPr>
+          <p:cNvSpPr>
+            <a:spLocks xmlns:a="http://schemas.openxmlformats.org/drawingml/2006/main" noGrp="1"/>
+          </p:cNvSpPr>
+          <p:nvPr/>
+        </p:nvSpPr>
+        <p:spPr>
+          <a:xfrm xmlns:a="http://schemas.openxmlformats.org/drawingml/2006/main">
+            <a:off x="8134350" y="1809750"/>
+            <a:ext cx="2857500" cy="323850"/>
+          </a:xfrm>
+          <a:prstGeom xmlns:a="http://schemas.openxmlformats.org/drawingml/2006/main" prst="rect">
+            <a:avLst/>
+          </a:prstGeom>
+          <a:noFill xmlns:a="http://schemas.openxmlformats.org/drawingml/2006/main"/>
+          <a:ln xmlns:a="http://schemas.openxmlformats.org/drawingml/2006/main" w="0">
+            <a:noFill/>
+            <a:prstDash val="solid"/>
+          </a:ln>
+        </p:spPr>
+        <p:txBody>
+          <a:bodyPr xmlns:a="http://schemas.openxmlformats.org/drawingml/2006/main" wrap="square" lIns="0" tIns="0" rIns="0" bIns="0" anchor="t">
+            <a:normAutofit fontScale="100000"/>
+          </a:bodyPr>
+          <a:lstStyle xmlns:a="http://schemas.openxmlformats.org/drawingml/2006/main"/>
+          <a:p xmlns:a="http://schemas.openxmlformats.org/drawingml/2006/main">
+            <a:pPr algn="l">
+              <a:defRPr sz="1875" b="1" i="0">
+                <a:solidFill>
+                  <a:srgbClr val="C88919"/>
+                </a:solidFill>
+                <a:latin typeface="Microsoft YaHei"/>
+                <a:ea typeface="Microsoft YaHei"/>
+                <a:cs typeface="Microsoft YaHei"/>
+              </a:defRPr>
+            </a:pPr>
+            <a:r>
+              <a:rPr sz="1875" b="1" i="0">
+                <a:solidFill>
+                  <a:srgbClr val="C88919"/>
+                </a:solidFill>
+                <a:latin typeface="Microsoft YaHei"/>
+                <a:ea typeface="Microsoft YaHei"/>
+                <a:cs typeface="Microsoft YaHei"/>
+              </a:rPr>
+              <a:t>长期资产</a:t>
+            </a:r>
+          </a:p>
+        </p:txBody>
+      </p:sp>
+      <p:sp>
+        <p:nvSpPr>
+          <p:cNvPr id="13" name="value-body-2">
+            <a:extLst xmlns:a="http://schemas.openxmlformats.org/drawingml/2006/main">
+              <a:ext uri="{FF2B5EF4-FFF2-40B4-BE49-F238E27FC236}">
+                <a16:creationId xmlns:a16="http://schemas.microsoft.com/office/drawing/2014/main" id="{7EF21327-71E0-4394-8127-D2EF507E1C06}"/>
+              </a:ext>
+            </a:extLst>
+          </p:cNvPr>
+          <p:cNvSpPr>
+            <a:spLocks xmlns:a="http://schemas.openxmlformats.org/drawingml/2006/main" noGrp="1"/>
+          </p:cNvSpPr>
+          <p:nvPr/>
+        </p:nvSpPr>
+        <p:spPr>
+          <a:xfrm xmlns:a="http://schemas.openxmlformats.org/drawingml/2006/main">
+            <a:off x="8134350" y="2286000"/>
+            <a:ext cx="2857500" cy="1123950"/>
+          </a:xfrm>
+          <a:prstGeom xmlns:a="http://schemas.openxmlformats.org/drawingml/2006/main" prst="rect">
+            <a:avLst/>
+          </a:prstGeom>
+          <a:noFill xmlns:a="http://schemas.openxmlformats.org/drawingml/2006/main"/>
+          <a:ln xmlns:a="http://schemas.openxmlformats.org/drawingml/2006/main" w="0">
+            <a:noFill/>
+            <a:prstDash val="solid"/>
+          </a:ln>
+        </p:spPr>
+        <p:txBody>
+          <a:bodyPr xmlns:a="http://schemas.openxmlformats.org/drawingml/2006/main" wrap="square" lIns="0" tIns="0" rIns="0" bIns="0" anchor="t">
+            <a:normAutofit fontScale="100000"/>
+          </a:bodyPr>
+          <a:lstStyle xmlns:a="http://schemas.openxmlformats.org/drawingml/2006/main"/>
+          <a:p xmlns:a="http://schemas.openxmlformats.org/drawingml/2006/main">
+            <a:pPr algn="l">
+              <a:defRPr sz="1275" b="0" i="0">
+                <a:solidFill>
+                  <a:srgbClr val="12263A"/>
+                </a:solidFill>
+                <a:latin typeface="Microsoft YaHei"/>
+                <a:ea typeface="Microsoft YaHei"/>
+                <a:cs typeface="Microsoft YaHei"/>
+              </a:defRPr>
+            </a:pPr>
+            <a:r>
+              <a:rPr sz="1275" b="0" i="0">
+                <a:solidFill>
+                  <a:srgbClr val="12263A"/>
+                </a:solidFill>
+                <a:latin typeface="Microsoft YaHei"/>
+                <a:ea typeface="Microsoft YaHei"/>
+                <a:cs typeface="Microsoft YaHei"/>
+              </a:rPr>
+              <a:t>• 沉淀跨项目可复用Pipeline</a:t>
+            </a:r>
+          </a:p>
+          <a:p xmlns:a="http://schemas.openxmlformats.org/drawingml/2006/main">
+            <a:pPr algn="l">
+              <a:defRPr sz="1275" b="0" i="0">
+                <a:solidFill>
+                  <a:srgbClr val="12263A"/>
+                </a:solidFill>
+                <a:latin typeface="Microsoft YaHei"/>
+                <a:ea typeface="Microsoft YaHei"/>
+                <a:cs typeface="Microsoft YaHei"/>
+              </a:defRPr>
+            </a:pPr>
+            <a:r>
+              <a:rPr sz="1275" b="0" i="0">
+                <a:solidFill>
+                  <a:srgbClr val="12263A"/>
+                </a:solidFill>
+                <a:latin typeface="Microsoft YaHei"/>
+                <a:ea typeface="Microsoft YaHei"/>
+                <a:cs typeface="Microsoft YaHei"/>
+              </a:rPr>
+              <a:t>• 积累验证集、失败案例和专家偏好</a:t>
+            </a:r>
+          </a:p>
+          <a:p xmlns:a="http://schemas.openxmlformats.org/drawingml/2006/main">
+            <a:pPr algn="l">
+              <a:defRPr sz="1275" b="0" i="0">
+                <a:solidFill>
+                  <a:srgbClr val="12263A"/>
+                </a:solidFill>
+                <a:latin typeface="Microsoft YaHei"/>
+                <a:ea typeface="Microsoft YaHei"/>
+                <a:cs typeface="Microsoft YaHei"/>
+              </a:defRPr>
+            </a:pPr>
+            <a:r>
+              <a:rPr sz="1275" b="0" i="0">
+                <a:solidFill>
+                  <a:srgbClr val="12263A"/>
+                </a:solidFill>
+                <a:latin typeface="Microsoft YaHei"/>
+                <a:ea typeface="Microsoft YaHei"/>
+                <a:cs typeface="Microsoft YaHei"/>
+              </a:rPr>
+              <a:t>• 形成接口、论文和专利成果</a:t>
+            </a:r>
+          </a:p>
+        </p:txBody>
+      </p:sp>
+      <p:sp>
+        <p:nvSpPr>
+          <p:cNvPr id="14" name="auto-text-37">
+            <a:extLst xmlns:a="http://schemas.openxmlformats.org/drawingml/2006/main">
+              <a:ext uri="{FF2B5EF4-FFF2-40B4-BE49-F238E27FC236}">
+                <a16:creationId xmlns:a16="http://schemas.microsoft.com/office/drawing/2014/main" id="{05BA61DB-B6F5-4EAA-8C9E-08FBA95C4DD4}"/>
+              </a:ext>
+            </a:extLst>
+          </p:cNvPr>
+          <p:cNvSpPr>
+            <a:spLocks xmlns:a="http://schemas.openxmlformats.org/drawingml/2006/main" noGrp="1"/>
+          </p:cNvSpPr>
+          <p:nvPr/>
+        </p:nvSpPr>
+        <p:spPr>
+          <a:xfrm xmlns:a="http://schemas.openxmlformats.org/drawingml/2006/main">
+            <a:off x="514350" y="3962400"/>
+            <a:ext cx="3238500" cy="285750"/>
+          </a:xfrm>
+          <a:prstGeom xmlns:a="http://schemas.openxmlformats.org/drawingml/2006/main" prst="rect">
+            <a:avLst/>
+          </a:prstGeom>
+          <a:noFill xmlns:a="http://schemas.openxmlformats.org/drawingml/2006/main"/>
+          <a:ln xmlns:a="http://schemas.openxmlformats.org/drawingml/2006/main" w="0">
+            <a:noFill/>
+            <a:prstDash val="solid"/>
+          </a:ln>
+        </p:spPr>
+        <p:txBody>
+          <a:bodyPr xmlns:a="http://schemas.openxmlformats.org/drawingml/2006/main" wrap="square" lIns="0" tIns="0" rIns="0" bIns="0" anchor="t">
+            <a:normAutofit fontScale="100000"/>
+          </a:bodyPr>
+          <a:lstStyle xmlns:a="http://schemas.openxmlformats.org/drawingml/2006/main"/>
+          <a:p xmlns:a="http://schemas.openxmlformats.org/drawingml/2006/main">
+            <a:pPr algn="l">
+              <a:defRPr sz="1575" b="1" i="0">
+                <a:solidFill>
+                  <a:srgbClr val="12263A"/>
+                </a:solidFill>
+                <a:latin typeface="Microsoft YaHei"/>
+                <a:ea typeface="Microsoft YaHei"/>
+                <a:cs typeface="Microsoft YaHei"/>
+              </a:defRPr>
+            </a:pPr>
+            <a:r>
+              <a:rPr sz="1575" b="1" i="0">
+                <a:solidFill>
+                  <a:srgbClr val="12263A"/>
+                </a:solidFill>
+                <a:latin typeface="Microsoft YaHei"/>
+                <a:ea typeface="Microsoft YaHei"/>
+                <a:cs typeface="Microsoft YaHei"/>
+              </a:rPr>
+              <a:t>SOW项目目标（非现有成果）</a:t>
+            </a:r>
+          </a:p>
+        </p:txBody>
+      </p:sp>
+      <p:sp>
+        <p:nvSpPr>
+          <p:cNvPr id="15" name="metric-0">
+            <a:extLst xmlns:a="http://schemas.openxmlformats.org/drawingml/2006/main">
+              <a:ext uri="{FF2B5EF4-FFF2-40B4-BE49-F238E27FC236}">
+                <a16:creationId xmlns:a16="http://schemas.microsoft.com/office/drawing/2014/main" id="{8CC348DC-A964-4ACB-AAEB-DFF3CEB25C0D}"/>
+              </a:ext>
+            </a:extLst>
+          </p:cNvPr>
+          <p:cNvSpPr>
+            <a:spLocks xmlns:a="http://schemas.openxmlformats.org/drawingml/2006/main" noGrp="1"/>
+          </p:cNvSpPr>
+          <p:nvPr/>
+        </p:nvSpPr>
+        <p:spPr>
+          <a:xfrm xmlns:a="http://schemas.openxmlformats.org/drawingml/2006/main">
+            <a:off x="514350" y="4362450"/>
+            <a:ext cx="2057400" cy="952500"/>
+          </a:xfrm>
+          <a:prstGeom xmlns:a="http://schemas.openxmlformats.org/drawingml/2006/main" prst="roundRect">
+            <a:avLst>
+              <a:gd name="adj" fmla="val 8000"/>
             </a:avLst>
           </a:prstGeom>
           <a:solidFill xmlns:a="http://schemas.openxmlformats.org/drawingml/2006/main">
@@ -10416,22 +10487,22 @@
       </p:sp>
       <p:sp>
         <p:nvSpPr>
-          <p:cNvPr id="17" name="auto-text-36">
-            <a:extLst xmlns:a="http://schemas.openxmlformats.org/drawingml/2006/main">
-              <a:ext uri="{FF2B5EF4-FFF2-40B4-BE49-F238E27FC236}">
-                <a16:creationId xmlns:a16="http://schemas.microsoft.com/office/drawing/2014/main" id="{51B727C1-3E7B-4383-9F29-7C3D5487D8A0}"/>
-              </a:ext>
-            </a:extLst>
-          </p:cNvPr>
-          <p:cNvSpPr>
-            <a:spLocks xmlns:a="http://schemas.openxmlformats.org/drawingml/2006/main" noGrp="1"/>
-          </p:cNvSpPr>
-          <p:nvPr/>
-        </p:nvSpPr>
-        <p:spPr>
-          <a:xfrm xmlns:a="http://schemas.openxmlformats.org/drawingml/2006/main">
-            <a:off x="723900" y="5591175"/>
-            <a:ext cx="7391400" cy="247650"/>
+          <p:cNvPr id="16" name="metric-stat-0">
+            <a:extLst xmlns:a="http://schemas.openxmlformats.org/drawingml/2006/main">
+              <a:ext uri="{FF2B5EF4-FFF2-40B4-BE49-F238E27FC236}">
+                <a16:creationId xmlns:a16="http://schemas.microsoft.com/office/drawing/2014/main" id="{F94F2066-9E94-473C-AB48-ECF674175EA1}"/>
+              </a:ext>
+            </a:extLst>
+          </p:cNvPr>
+          <p:cNvSpPr>
+            <a:spLocks xmlns:a="http://schemas.openxmlformats.org/drawingml/2006/main" noGrp="1"/>
+          </p:cNvSpPr>
+          <p:nvPr/>
+        </p:nvSpPr>
+        <p:spPr>
+          <a:xfrm xmlns:a="http://schemas.openxmlformats.org/drawingml/2006/main">
+            <a:off x="666750" y="4476750"/>
+            <a:ext cx="1752600" cy="361950"/>
           </a:xfrm>
           <a:prstGeom xmlns:a="http://schemas.openxmlformats.org/drawingml/2006/main" prst="rect">
             <a:avLst/>
@@ -10449,1142 +10520,104 @@
           <a:lstStyle xmlns:a="http://schemas.openxmlformats.org/drawingml/2006/main"/>
           <a:p xmlns:a="http://schemas.openxmlformats.org/drawingml/2006/main">
             <a:pPr algn="ctr">
-              <a:defRPr sz="1350" b="1" i="0">
-                <a:solidFill>
-                  <a:srgbClr val="12263A"/>
-                </a:solidFill>
-                <a:latin typeface="Microsoft YaHei"/>
-                <a:ea typeface="Microsoft YaHei"/>
-                <a:cs typeface="Microsoft YaHei"/>
-              </a:defRPr>
-            </a:pPr>
-            <a:r>
-              <a:rPr sz="1350" b="1" i="0">
-                <a:solidFill>
-                  <a:srgbClr val="12263A"/>
-                </a:solidFill>
-                <a:latin typeface="Microsoft YaHei"/>
-                <a:ea typeface="Microsoft YaHei"/>
-                <a:cs typeface="Microsoft YaHei"/>
-              </a:rPr>
-              <a:t>首批建议验证：多图编辑＋AIGC图库　｜　后续泛化：盲超分＋颜色标注</a:t>
-            </a:r>
-          </a:p>
-        </p:txBody>
-      </p:sp>
-      <p:sp>
-        <p:nvSpPr>
-          <p:cNvPr id="18" name="current-pipeline-frame">
-            <a:extLst xmlns:a="http://schemas.openxmlformats.org/drawingml/2006/main">
-              <a:ext uri="{FF2B5EF4-FFF2-40B4-BE49-F238E27FC236}">
-                <a16:creationId xmlns:a16="http://schemas.microsoft.com/office/drawing/2014/main" id="{8FAB0A9B-99C8-44DD-ABBB-23BA03F58F17}"/>
-              </a:ext>
-            </a:extLst>
-          </p:cNvPr>
-          <p:cNvSpPr>
-            <a:spLocks xmlns:a="http://schemas.openxmlformats.org/drawingml/2006/main" noGrp="1"/>
-          </p:cNvSpPr>
-          <p:nvPr/>
-        </p:nvSpPr>
-        <p:spPr>
-          <a:xfrm xmlns:a="http://schemas.openxmlformats.org/drawingml/2006/main">
-            <a:off x="8572500" y="5429250"/>
-            <a:ext cx="3105150" cy="571500"/>
-          </a:xfrm>
-          <a:prstGeom xmlns:a="http://schemas.openxmlformats.org/drawingml/2006/main" prst="roundRect">
-            <a:avLst>
-              <a:gd name="adj" fmla="val 13333"/>
-            </a:avLst>
-          </a:prstGeom>
-          <a:solidFill xmlns:a="http://schemas.openxmlformats.org/drawingml/2006/main">
-            <a:srgbClr val="F0F3F6"/>
-          </a:solidFill>
-          <a:ln xmlns:a="http://schemas.openxmlformats.org/drawingml/2006/main" w="9525">
-            <a:solidFill>
-              <a:srgbClr val="AAB5C0"/>
-            </a:solidFill>
-            <a:prstDash val="solid"/>
-          </a:ln>
-        </p:spPr>
-      </p:sp>
-      <p:sp>
-        <p:nvSpPr>
-          <p:cNvPr id="19" name="current-pipeline-label">
-            <a:extLst xmlns:a="http://schemas.openxmlformats.org/drawingml/2006/main">
-              <a:ext uri="{FF2B5EF4-FFF2-40B4-BE49-F238E27FC236}">
-                <a16:creationId xmlns:a16="http://schemas.microsoft.com/office/drawing/2014/main" id="{141F58B7-2286-440E-A037-B0ECDE0D5C30}"/>
-              </a:ext>
-            </a:extLst>
-          </p:cNvPr>
-          <p:cNvSpPr>
-            <a:spLocks xmlns:a="http://schemas.openxmlformats.org/drawingml/2006/main" noGrp="1"/>
-          </p:cNvSpPr>
-          <p:nvPr/>
-        </p:nvSpPr>
-        <p:spPr>
-          <a:xfrm xmlns:a="http://schemas.openxmlformats.org/drawingml/2006/main">
-            <a:off x="8724900" y="5486400"/>
-            <a:ext cx="2800350" cy="266700"/>
-          </a:xfrm>
-          <a:prstGeom xmlns:a="http://schemas.openxmlformats.org/drawingml/2006/main" prst="rect">
-            <a:avLst/>
-          </a:prstGeom>
-          <a:noFill xmlns:a="http://schemas.openxmlformats.org/drawingml/2006/main"/>
-          <a:ln xmlns:a="http://schemas.openxmlformats.org/drawingml/2006/main" w="0">
-            <a:noFill/>
-            <a:prstDash val="solid"/>
-          </a:ln>
-        </p:spPr>
-        <p:txBody>
-          <a:bodyPr xmlns:a="http://schemas.openxmlformats.org/drawingml/2006/main" wrap="square" lIns="0" tIns="0" rIns="0" bIns="0" anchor="ctr">
+              <a:defRPr sz="2100" b="1" i="0">
+                <a:solidFill>
+                  <a:srgbClr val="2F6BFF"/>
+                </a:solidFill>
+                <a:latin typeface="Microsoft YaHei"/>
+                <a:ea typeface="Microsoft YaHei"/>
+                <a:cs typeface="Microsoft YaHei"/>
+              </a:defRPr>
+            </a:pPr>
+            <a:r>
+              <a:rPr sz="2100" b="1" i="0">
+                <a:solidFill>
+                  <a:srgbClr val="2F6BFF"/>
+                </a:solidFill>
+                <a:latin typeface="Microsoft YaHei"/>
+                <a:ea typeface="Microsoft YaHei"/>
+                <a:cs typeface="Microsoft YaHei"/>
+              </a:rPr>
+              <a:t>+10pp</a:t>
+            </a:r>
+          </a:p>
+        </p:txBody>
+      </p:sp>
+      <p:sp>
+        <p:nvSpPr>
+          <p:cNvPr id="17" name="metric-label-0">
+            <a:extLst xmlns:a="http://schemas.openxmlformats.org/drawingml/2006/main">
+              <a:ext uri="{FF2B5EF4-FFF2-40B4-BE49-F238E27FC236}">
+                <a16:creationId xmlns:a16="http://schemas.microsoft.com/office/drawing/2014/main" id="{08841F40-2254-40A2-B57C-CF5E0D6E41E3}"/>
+              </a:ext>
+            </a:extLst>
+          </p:cNvPr>
+          <p:cNvSpPr>
+            <a:spLocks xmlns:a="http://schemas.openxmlformats.org/drawingml/2006/main" noGrp="1"/>
+          </p:cNvSpPr>
+          <p:nvPr/>
+        </p:nvSpPr>
+        <p:spPr>
+          <a:xfrm xmlns:a="http://schemas.openxmlformats.org/drawingml/2006/main">
+            <a:off x="666750" y="4895850"/>
+            <a:ext cx="1752600" cy="228600"/>
+          </a:xfrm>
+          <a:prstGeom xmlns:a="http://schemas.openxmlformats.org/drawingml/2006/main" prst="rect">
+            <a:avLst/>
+          </a:prstGeom>
+          <a:noFill xmlns:a="http://schemas.openxmlformats.org/drawingml/2006/main"/>
+          <a:ln xmlns:a="http://schemas.openxmlformats.org/drawingml/2006/main" w="0">
+            <a:noFill/>
+            <a:prstDash val="solid"/>
+          </a:ln>
+        </p:spPr>
+        <p:txBody>
+          <a:bodyPr xmlns:a="http://schemas.openxmlformats.org/drawingml/2006/main" wrap="square" lIns="0" tIns="0" rIns="0" bIns="0" anchor="t">
             <a:normAutofit fontScale="100000"/>
           </a:bodyPr>
           <a:lstStyle xmlns:a="http://schemas.openxmlformats.org/drawingml/2006/main"/>
           <a:p xmlns:a="http://schemas.openxmlformats.org/drawingml/2006/main">
             <a:pPr algn="ctr">
-              <a:defRPr sz="1350" b="1" i="0">
-                <a:solidFill>
-                  <a:srgbClr val="5E6C7A"/>
-                </a:solidFill>
-                <a:latin typeface="Microsoft YaHei"/>
-                <a:ea typeface="Microsoft YaHei"/>
-                <a:cs typeface="Microsoft YaHei"/>
-              </a:defRPr>
-            </a:pPr>
-            <a:r>
-              <a:rPr sz="1350" b="1" i="0">
-                <a:solidFill>
-                  <a:srgbClr val="5E6C7A"/>
-                </a:solidFill>
-                <a:latin typeface="Microsoft YaHei"/>
-                <a:ea typeface="Microsoft YaHei"/>
-                <a:cs typeface="Microsoft YaHei"/>
-              </a:rPr>
-              <a:t>可选｜现有质检Pipeline截图</a:t>
-            </a:r>
-          </a:p>
-        </p:txBody>
-      </p:sp>
-      <p:sp>
-        <p:nvSpPr>
-          <p:cNvPr id="20" name="current-pipeline-sub">
-            <a:extLst xmlns:a="http://schemas.openxmlformats.org/drawingml/2006/main">
-              <a:ext uri="{FF2B5EF4-FFF2-40B4-BE49-F238E27FC236}">
-                <a16:creationId xmlns:a16="http://schemas.microsoft.com/office/drawing/2014/main" id="{68840E42-63B1-4371-83FB-07A23B072F0A}"/>
-              </a:ext>
-            </a:extLst>
-          </p:cNvPr>
-          <p:cNvSpPr>
-            <a:spLocks xmlns:a="http://schemas.openxmlformats.org/drawingml/2006/main" noGrp="1"/>
-          </p:cNvSpPr>
-          <p:nvPr/>
-        </p:nvSpPr>
-        <p:spPr>
-          <a:xfrm xmlns:a="http://schemas.openxmlformats.org/drawingml/2006/main">
-            <a:off x="8724900" y="5791200"/>
-            <a:ext cx="2800350" cy="209550"/>
-          </a:xfrm>
-          <a:prstGeom xmlns:a="http://schemas.openxmlformats.org/drawingml/2006/main" prst="rect">
-            <a:avLst/>
-          </a:prstGeom>
-          <a:noFill xmlns:a="http://schemas.openxmlformats.org/drawingml/2006/main"/>
-          <a:ln xmlns:a="http://schemas.openxmlformats.org/drawingml/2006/main" w="0">
-            <a:noFill/>
-            <a:prstDash val="solid"/>
-          </a:ln>
-        </p:spPr>
-        <p:txBody>
-          <a:bodyPr xmlns:a="http://schemas.openxmlformats.org/drawingml/2006/main" wrap="square" lIns="0" tIns="0" rIns="0" bIns="0" anchor="t">
-            <a:normAutofit fontScale="100000"/>
-          </a:bodyPr>
-          <a:lstStyle xmlns:a="http://schemas.openxmlformats.org/drawingml/2006/main"/>
-          <a:p xmlns:a="http://schemas.openxmlformats.org/drawingml/2006/main">
-            <a:pPr algn="ctr">
-              <a:defRPr sz="975" b="0" i="0">
-                <a:solidFill>
-                  <a:srgbClr val="8A98A8"/>
-                </a:solidFill>
-                <a:latin typeface="Microsoft YaHei"/>
-                <a:ea typeface="Microsoft YaHei"/>
-                <a:cs typeface="Microsoft YaHei"/>
-              </a:defRPr>
-            </a:pPr>
-            <a:r>
-              <a:rPr sz="975" b="0" i="0">
-                <a:solidFill>
-                  <a:srgbClr val="8A98A8"/>
-                </a:solidFill>
-                <a:latin typeface="Microsoft YaHei"/>
-                <a:ea typeface="Microsoft YaHei"/>
-                <a:cs typeface="Microsoft YaHei"/>
-              </a:rPr>
-              <a:t>如无材料可删除此框</a:t>
-            </a:r>
-          </a:p>
-        </p:txBody>
-      </p:sp>
-      <p:sp>
-        <p:nvSpPr>
-          <p:cNvPr id="21" name="auto-text-37">
-            <a:extLst xmlns:a="http://schemas.openxmlformats.org/drawingml/2006/main">
-              <a:ext uri="{FF2B5EF4-FFF2-40B4-BE49-F238E27FC236}">
-                <a16:creationId xmlns:a16="http://schemas.microsoft.com/office/drawing/2014/main" id="{DCB8D66E-C2BA-4E52-96C3-9AB13A318EA8}"/>
-              </a:ext>
-            </a:extLst>
-          </p:cNvPr>
-          <p:cNvSpPr>
-            <a:spLocks xmlns:a="http://schemas.openxmlformats.org/drawingml/2006/main" noGrp="1"/>
-          </p:cNvSpPr>
-          <p:nvPr/>
-        </p:nvSpPr>
-        <p:spPr>
-          <a:xfrm xmlns:a="http://schemas.openxmlformats.org/drawingml/2006/main">
-            <a:off x="628650" y="6191250"/>
-            <a:ext cx="10668000" cy="247650"/>
-          </a:xfrm>
-          <a:prstGeom xmlns:a="http://schemas.openxmlformats.org/drawingml/2006/main" prst="rect">
-            <a:avLst/>
-          </a:prstGeom>
-          <a:noFill xmlns:a="http://schemas.openxmlformats.org/drawingml/2006/main"/>
-          <a:ln xmlns:a="http://schemas.openxmlformats.org/drawingml/2006/main" w="0">
-            <a:noFill/>
-            <a:prstDash val="solid"/>
-          </a:ln>
-        </p:spPr>
-        <p:txBody>
-          <a:bodyPr xmlns:a="http://schemas.openxmlformats.org/drawingml/2006/main" wrap="square" lIns="0" tIns="0" rIns="0" bIns="0" anchor="t">
-            <a:normAutofit fontScale="100000"/>
-          </a:bodyPr>
-          <a:lstStyle xmlns:a="http://schemas.openxmlformats.org/drawingml/2006/main"/>
-          <a:p xmlns:a="http://schemas.openxmlformats.org/drawingml/2006/main">
-            <a:pPr algn="ctr">
-              <a:defRPr sz="975" b="0" i="0">
-                <a:solidFill>
-                  <a:srgbClr val="66778A"/>
-                </a:solidFill>
-                <a:latin typeface="Microsoft YaHei"/>
-                <a:ea typeface="Microsoft YaHei"/>
-                <a:cs typeface="Microsoft YaHei"/>
-              </a:defRPr>
-            </a:pPr>
-            <a:r>
-              <a:rPr sz="975" b="0" i="0">
-                <a:solidFill>
-                  <a:srgbClr val="66778A"/>
-                </a:solidFill>
-                <a:latin typeface="Microsoft YaHei"/>
-                <a:ea typeface="Microsoft YaHei"/>
-                <a:cs typeface="Microsoft YaHei"/>
-              </a:rPr>
-              <a:t>合作边界：高校交付核心算法原型与评测方法；公司提供业务数据、专家反馈，并负责后续平台集成。</a:t>
-            </a:r>
-          </a:p>
-        </p:txBody>
-      </p:sp>
-    </p:spTree>
-    <p:extLst>
-      <p:ext uri="{BB962C8B-B14F-4D97-AF65-F5344CB8AC3E}">
-        <p14:creationId xmlns:p14="http://schemas.microsoft.com/office/powerpoint/2010/main" val="1709826605"/>
-      </p:ext>
-    </p:extLst>
-  </p:cSld>
-</p:sld>
-</file>
-
-<file path=ppt/slides/slide7.xml><?xml version="1.0" encoding="utf-8"?>
-<p:sld xmlns:p="http://schemas.openxmlformats.org/presentationml/2006/main">
-  <p:cSld>
-    <p:bg>
-      <p:bgPr>
-        <a:solidFill xmlns:a="http://schemas.openxmlformats.org/drawingml/2006/main">
-          <a:srgbClr val="FFFFFF"/>
-        </a:solidFill>
-      </p:bgPr>
-    </p:bg>
-    <p:spTree>
-      <p:nvGrpSpPr>
-        <p:cNvPr id="1" name=""/>
-        <p:cNvGrpSpPr/>
-        <p:nvPr/>
-      </p:nvGrpSpPr>
-      <p:grpSpPr>
-        <a:xfrm xmlns:a="http://schemas.openxmlformats.org/drawingml/2006/main"/>
-      </p:grpSpPr>
-      <p:sp>
-        <p:nvSpPr>
-          <p:cNvPr id="33" name="accent-7">
-            <a:extLst xmlns:a="http://schemas.openxmlformats.org/drawingml/2006/main">
-              <a:ext uri="{FF2B5EF4-FFF2-40B4-BE49-F238E27FC236}">
-                <a16:creationId xmlns:a16="http://schemas.microsoft.com/office/drawing/2014/main" id="{0C298FF0-E123-4239-A4D1-49E2AB29AEB0}"/>
-              </a:ext>
-            </a:extLst>
-          </p:cNvPr>
-          <p:cNvSpPr>
-            <a:spLocks xmlns:a="http://schemas.openxmlformats.org/drawingml/2006/main" noGrp="1"/>
-          </p:cNvSpPr>
-          <p:nvPr/>
-        </p:nvSpPr>
-        <p:spPr>
-          <a:xfrm xmlns:a="http://schemas.openxmlformats.org/drawingml/2006/main">
-            <a:off x="400050" y="381000"/>
-            <a:ext cx="76200" cy="495300"/>
-          </a:xfrm>
-          <a:prstGeom xmlns:a="http://schemas.openxmlformats.org/drawingml/2006/main" prst="roundRect">
-            <a:avLst>
-              <a:gd name="adj" fmla="val 50000"/>
-            </a:avLst>
-          </a:prstGeom>
-          <a:solidFill xmlns:a="http://schemas.openxmlformats.org/drawingml/2006/main">
-            <a:srgbClr val="2F6BFF"/>
-          </a:solidFill>
-          <a:ln xmlns:a="http://schemas.openxmlformats.org/drawingml/2006/main" w="9525">
-            <a:solidFill>
-              <a:srgbClr val="2F6BFF"/>
-            </a:solidFill>
-            <a:prstDash val="solid"/>
-          </a:ln>
-        </p:spPr>
-      </p:sp>
-      <p:sp>
-        <p:nvSpPr>
-          <p:cNvPr id="2" name="title-7">
-            <a:extLst xmlns:a="http://schemas.openxmlformats.org/drawingml/2006/main">
-              <a:ext uri="{FF2B5EF4-FFF2-40B4-BE49-F238E27FC236}">
-                <a16:creationId xmlns:a16="http://schemas.microsoft.com/office/drawing/2014/main" id="{932F2301-6155-4D3E-8F85-69D9F854033C}"/>
-              </a:ext>
-            </a:extLst>
-          </p:cNvPr>
-          <p:cNvSpPr>
-            <a:spLocks xmlns:a="http://schemas.openxmlformats.org/drawingml/2006/main" noGrp="1"/>
-          </p:cNvSpPr>
-          <p:nvPr/>
-        </p:nvSpPr>
-        <p:spPr>
-          <a:xfrm xmlns:a="http://schemas.openxmlformats.org/drawingml/2006/main">
-            <a:off x="628650" y="323850"/>
-            <a:ext cx="10810875" cy="628650"/>
-          </a:xfrm>
-          <a:prstGeom xmlns:a="http://schemas.openxmlformats.org/drawingml/2006/main" prst="rect">
-            <a:avLst/>
-          </a:prstGeom>
-          <a:noFill xmlns:a="http://schemas.openxmlformats.org/drawingml/2006/main"/>
-          <a:ln xmlns:a="http://schemas.openxmlformats.org/drawingml/2006/main" w="0">
-            <a:noFill/>
-            <a:prstDash val="solid"/>
-          </a:ln>
-        </p:spPr>
-        <p:txBody>
-          <a:bodyPr xmlns:a="http://schemas.openxmlformats.org/drawingml/2006/main" wrap="square" lIns="0" tIns="0" rIns="0" bIns="0" anchor="t">
-            <a:normAutofit fontScale="100000"/>
-          </a:bodyPr>
-          <a:lstStyle xmlns:a="http://schemas.openxmlformats.org/drawingml/2006/main"/>
-          <a:p xmlns:a="http://schemas.openxmlformats.org/drawingml/2006/main">
-            <a:pPr algn="l">
-              <a:defRPr sz="3150" b="1" i="0">
-                <a:solidFill>
-                  <a:srgbClr val="12263A"/>
-                </a:solidFill>
-                <a:latin typeface="Microsoft YaHei"/>
-                <a:ea typeface="Microsoft YaHei"/>
-                <a:cs typeface="Microsoft YaHei"/>
-              </a:defRPr>
-            </a:pPr>
-            <a:r>
-              <a:rPr sz="3150" b="1" i="0">
-                <a:solidFill>
-                  <a:srgbClr val="12263A"/>
-                </a:solidFill>
-                <a:latin typeface="Microsoft YaHei"/>
-                <a:ea typeface="Microsoft YaHei"/>
-                <a:cs typeface="Microsoft YaHei"/>
-              </a:rPr>
-              <a:t>合作项目将把临时质检方案沉淀为可复用、可验证的质量能力</a:t>
-            </a:r>
-          </a:p>
-        </p:txBody>
-      </p:sp>
-      <p:sp>
-        <p:nvSpPr>
-          <p:cNvPr id="3" name="page-7">
-            <a:extLst xmlns:a="http://schemas.openxmlformats.org/drawingml/2006/main">
-              <a:ext uri="{FF2B5EF4-FFF2-40B4-BE49-F238E27FC236}">
-                <a16:creationId xmlns:a16="http://schemas.microsoft.com/office/drawing/2014/main" id="{5D10A000-A4D8-4FEA-AE74-63D4A5F6C351}"/>
-              </a:ext>
-            </a:extLst>
-          </p:cNvPr>
-          <p:cNvSpPr>
-            <a:spLocks xmlns:a="http://schemas.openxmlformats.org/drawingml/2006/main" noGrp="1"/>
-          </p:cNvSpPr>
-          <p:nvPr/>
-        </p:nvSpPr>
-        <p:spPr>
-          <a:xfrm xmlns:a="http://schemas.openxmlformats.org/drawingml/2006/main">
-            <a:off x="11287125" y="6400800"/>
-            <a:ext cx="476250" cy="190500"/>
-          </a:xfrm>
-          <a:prstGeom xmlns:a="http://schemas.openxmlformats.org/drawingml/2006/main" prst="rect">
-            <a:avLst/>
-          </a:prstGeom>
-          <a:noFill xmlns:a="http://schemas.openxmlformats.org/drawingml/2006/main"/>
-          <a:ln xmlns:a="http://schemas.openxmlformats.org/drawingml/2006/main" w="0">
-            <a:noFill/>
-            <a:prstDash val="solid"/>
-          </a:ln>
-        </p:spPr>
-        <p:txBody>
-          <a:bodyPr xmlns:a="http://schemas.openxmlformats.org/drawingml/2006/main" wrap="square" lIns="0" tIns="0" rIns="0" bIns="0" anchor="t">
-            <a:normAutofit fontScale="100000"/>
-          </a:bodyPr>
-          <a:lstStyle xmlns:a="http://schemas.openxmlformats.org/drawingml/2006/main"/>
-          <a:p xmlns:a="http://schemas.openxmlformats.org/drawingml/2006/main">
-            <a:pPr algn="r">
-              <a:defRPr sz="900" b="0" i="0">
-                <a:solidFill>
-                  <a:srgbClr val="8A98A8"/>
-                </a:solidFill>
-                <a:latin typeface="Microsoft YaHei"/>
-                <a:ea typeface="Microsoft YaHei"/>
-                <a:cs typeface="Microsoft YaHei"/>
-              </a:defRPr>
-            </a:pPr>
-            <a:r>
-              <a:rPr sz="900" b="0" i="0">
-                <a:solidFill>
-                  <a:srgbClr val="8A98A8"/>
-                </a:solidFill>
-                <a:latin typeface="Microsoft YaHei"/>
-                <a:ea typeface="Microsoft YaHei"/>
-                <a:cs typeface="Microsoft YaHei"/>
-              </a:rPr>
-              <a:t>07</a:t>
-            </a:r>
-          </a:p>
-        </p:txBody>
-      </p:sp>
-      <p:sp>
-        <p:nvSpPr>
-          <p:cNvPr id="4" name="auto-text-38">
-            <a:extLst xmlns:a="http://schemas.openxmlformats.org/drawingml/2006/main">
-              <a:ext uri="{FF2B5EF4-FFF2-40B4-BE49-F238E27FC236}">
-                <a16:creationId xmlns:a16="http://schemas.microsoft.com/office/drawing/2014/main" id="{D87961CD-63A1-4885-B4C0-7377F4DCBA41}"/>
-              </a:ext>
-            </a:extLst>
-          </p:cNvPr>
-          <p:cNvSpPr>
-            <a:spLocks xmlns:a="http://schemas.openxmlformats.org/drawingml/2006/main" noGrp="1"/>
-          </p:cNvSpPr>
-          <p:nvPr/>
-        </p:nvSpPr>
-        <p:spPr>
-          <a:xfrm xmlns:a="http://schemas.openxmlformats.org/drawingml/2006/main">
-            <a:off x="628650" y="990600"/>
-            <a:ext cx="10668000" cy="323850"/>
-          </a:xfrm>
-          <a:prstGeom xmlns:a="http://schemas.openxmlformats.org/drawingml/2006/main" prst="rect">
-            <a:avLst/>
-          </a:prstGeom>
-          <a:noFill xmlns:a="http://schemas.openxmlformats.org/drawingml/2006/main"/>
-          <a:ln xmlns:a="http://schemas.openxmlformats.org/drawingml/2006/main" w="0">
-            <a:noFill/>
-            <a:prstDash val="solid"/>
-          </a:ln>
-        </p:spPr>
-        <p:txBody>
-          <a:bodyPr xmlns:a="http://schemas.openxmlformats.org/drawingml/2006/main" wrap="square" lIns="0" tIns="0" rIns="0" bIns="0" anchor="t">
-            <a:normAutofit fontScale="100000"/>
-          </a:bodyPr>
-          <a:lstStyle xmlns:a="http://schemas.openxmlformats.org/drawingml/2006/main"/>
-          <a:p xmlns:a="http://schemas.openxmlformats.org/drawingml/2006/main">
-            <a:pPr algn="l">
-              <a:defRPr sz="1425" b="0" i="0">
-                <a:solidFill>
-                  <a:srgbClr val="66778A"/>
-                </a:solidFill>
-                <a:latin typeface="Microsoft YaHei"/>
-                <a:ea typeface="Microsoft YaHei"/>
-                <a:cs typeface="Microsoft YaHei"/>
-              </a:defRPr>
-            </a:pPr>
-            <a:r>
-              <a:rPr sz="1425" b="0" i="0">
-                <a:solidFill>
-                  <a:srgbClr val="66778A"/>
-                </a:solidFill>
-                <a:latin typeface="Microsoft YaHei"/>
-                <a:ea typeface="Microsoft YaHei"/>
-                <a:cs typeface="Microsoft YaHei"/>
-              </a:rPr>
-              <a:t>项目价值不仅是提高一次筛选准确率，更重要的是形成可服务多个图像项目的共同能力。</a:t>
-            </a:r>
-          </a:p>
-        </p:txBody>
-      </p:sp>
-      <p:sp>
-        <p:nvSpPr>
-          <p:cNvPr id="5" name="value-0">
-            <a:extLst xmlns:a="http://schemas.openxmlformats.org/drawingml/2006/main">
-              <a:ext uri="{FF2B5EF4-FFF2-40B4-BE49-F238E27FC236}">
-                <a16:creationId xmlns:a16="http://schemas.microsoft.com/office/drawing/2014/main" id="{468304E8-8787-4F4E-87BA-01131AE5E2A1}"/>
-              </a:ext>
-            </a:extLst>
-          </p:cNvPr>
-          <p:cNvSpPr>
-            <a:spLocks xmlns:a="http://schemas.openxmlformats.org/drawingml/2006/main" noGrp="1"/>
-          </p:cNvSpPr>
-          <p:nvPr/>
-        </p:nvSpPr>
-        <p:spPr>
-          <a:xfrm xmlns:a="http://schemas.openxmlformats.org/drawingml/2006/main">
-            <a:off x="514350" y="1581150"/>
-            <a:ext cx="3314700" cy="2133600"/>
-          </a:xfrm>
-          <a:prstGeom xmlns:a="http://schemas.openxmlformats.org/drawingml/2006/main" prst="roundRect">
-            <a:avLst>
-              <a:gd name="adj" fmla="val 5357"/>
-            </a:avLst>
-          </a:prstGeom>
-          <a:solidFill xmlns:a="http://schemas.openxmlformats.org/drawingml/2006/main">
-            <a:srgbClr val="EAF0FF"/>
-          </a:solidFill>
-          <a:ln xmlns:a="http://schemas.openxmlformats.org/drawingml/2006/main" w="9525">
-            <a:solidFill>
-              <a:srgbClr val="EAF0FF"/>
-            </a:solidFill>
-            <a:prstDash val="solid"/>
-          </a:ln>
-        </p:spPr>
-      </p:sp>
-      <p:sp>
-        <p:nvSpPr>
-          <p:cNvPr id="6" name="value-title-0">
-            <a:extLst xmlns:a="http://schemas.openxmlformats.org/drawingml/2006/main">
-              <a:ext uri="{FF2B5EF4-FFF2-40B4-BE49-F238E27FC236}">
-                <a16:creationId xmlns:a16="http://schemas.microsoft.com/office/drawing/2014/main" id="{A2891542-0723-4263-B416-76D71A8D92FB}"/>
-              </a:ext>
-            </a:extLst>
-          </p:cNvPr>
-          <p:cNvSpPr>
-            <a:spLocks xmlns:a="http://schemas.openxmlformats.org/drawingml/2006/main" noGrp="1"/>
-          </p:cNvSpPr>
-          <p:nvPr/>
-        </p:nvSpPr>
-        <p:spPr>
-          <a:xfrm xmlns:a="http://schemas.openxmlformats.org/drawingml/2006/main">
-            <a:off x="742950" y="1809750"/>
-            <a:ext cx="2857500" cy="323850"/>
-          </a:xfrm>
-          <a:prstGeom xmlns:a="http://schemas.openxmlformats.org/drawingml/2006/main" prst="rect">
-            <a:avLst/>
-          </a:prstGeom>
-          <a:noFill xmlns:a="http://schemas.openxmlformats.org/drawingml/2006/main"/>
-          <a:ln xmlns:a="http://schemas.openxmlformats.org/drawingml/2006/main" w="0">
-            <a:noFill/>
-            <a:prstDash val="solid"/>
-          </a:ln>
-        </p:spPr>
-        <p:txBody>
-          <a:bodyPr xmlns:a="http://schemas.openxmlformats.org/drawingml/2006/main" wrap="square" lIns="0" tIns="0" rIns="0" bIns="0" anchor="t">
-            <a:normAutofit fontScale="100000"/>
-          </a:bodyPr>
-          <a:lstStyle xmlns:a="http://schemas.openxmlformats.org/drawingml/2006/main"/>
-          <a:p xmlns:a="http://schemas.openxmlformats.org/drawingml/2006/main">
-            <a:pPr algn="l">
-              <a:defRPr sz="1875" b="1" i="0">
-                <a:solidFill>
-                  <a:srgbClr val="2F6BFF"/>
-                </a:solidFill>
-                <a:latin typeface="Microsoft YaHei"/>
-                <a:ea typeface="Microsoft YaHei"/>
-                <a:cs typeface="Microsoft YaHei"/>
-              </a:defRPr>
-            </a:pPr>
-            <a:r>
-              <a:rPr sz="1875" b="1" i="0">
-                <a:solidFill>
-                  <a:srgbClr val="2F6BFF"/>
-                </a:solidFill>
-                <a:latin typeface="Microsoft YaHei"/>
-                <a:ea typeface="Microsoft YaHei"/>
-                <a:cs typeface="Microsoft YaHei"/>
-              </a:rPr>
-              <a:t>业务价值</a:t>
-            </a:r>
-          </a:p>
-        </p:txBody>
-      </p:sp>
-      <p:sp>
-        <p:nvSpPr>
-          <p:cNvPr id="7" name="value-body-0">
-            <a:extLst xmlns:a="http://schemas.openxmlformats.org/drawingml/2006/main">
-              <a:ext uri="{FF2B5EF4-FFF2-40B4-BE49-F238E27FC236}">
-                <a16:creationId xmlns:a16="http://schemas.microsoft.com/office/drawing/2014/main" id="{1A926F64-22B1-4F56-9D0D-394F466CFADB}"/>
-              </a:ext>
-            </a:extLst>
-          </p:cNvPr>
-          <p:cNvSpPr>
-            <a:spLocks xmlns:a="http://schemas.openxmlformats.org/drawingml/2006/main" noGrp="1"/>
-          </p:cNvSpPr>
-          <p:nvPr/>
-        </p:nvSpPr>
-        <p:spPr>
-          <a:xfrm xmlns:a="http://schemas.openxmlformats.org/drawingml/2006/main">
-            <a:off x="742950" y="2286000"/>
-            <a:ext cx="2857500" cy="1123950"/>
-          </a:xfrm>
-          <a:prstGeom xmlns:a="http://schemas.openxmlformats.org/drawingml/2006/main" prst="rect">
-            <a:avLst/>
-          </a:prstGeom>
-          <a:noFill xmlns:a="http://schemas.openxmlformats.org/drawingml/2006/main"/>
-          <a:ln xmlns:a="http://schemas.openxmlformats.org/drawingml/2006/main" w="0">
-            <a:noFill/>
-            <a:prstDash val="solid"/>
-          </a:ln>
-        </p:spPr>
-        <p:txBody>
-          <a:bodyPr xmlns:a="http://schemas.openxmlformats.org/drawingml/2006/main" wrap="square" lIns="0" tIns="0" rIns="0" bIns="0" anchor="t">
-            <a:normAutofit fontScale="100000"/>
-          </a:bodyPr>
-          <a:lstStyle xmlns:a="http://schemas.openxmlformats.org/drawingml/2006/main"/>
-          <a:p xmlns:a="http://schemas.openxmlformats.org/drawingml/2006/main">
-            <a:pPr algn="l">
-              <a:defRPr sz="1275" b="0" i="0">
-                <a:solidFill>
-                  <a:srgbClr val="12263A"/>
-                </a:solidFill>
-                <a:latin typeface="Microsoft YaHei"/>
-                <a:ea typeface="Microsoft YaHei"/>
-                <a:cs typeface="Microsoft YaHei"/>
-              </a:defRPr>
-            </a:pPr>
-            <a:r>
-              <a:rPr sz="1275" b="0" i="0">
-                <a:solidFill>
-                  <a:srgbClr val="12263A"/>
-                </a:solidFill>
-                <a:latin typeface="Microsoft YaHei"/>
-                <a:ea typeface="Microsoft YaHei"/>
-                <a:cs typeface="Microsoft YaHei"/>
-              </a:rPr>
-              <a:t>• 减少重复设计和搭建质检流程</a:t>
-            </a:r>
-          </a:p>
-          <a:p xmlns:a="http://schemas.openxmlformats.org/drawingml/2006/main">
-            <a:pPr algn="l">
-              <a:defRPr sz="1275" b="0" i="0">
-                <a:solidFill>
-                  <a:srgbClr val="12263A"/>
-                </a:solidFill>
-                <a:latin typeface="Microsoft YaHei"/>
-                <a:ea typeface="Microsoft YaHei"/>
-                <a:cs typeface="Microsoft YaHei"/>
-              </a:defRPr>
-            </a:pPr>
-            <a:r>
-              <a:rPr sz="1275" b="0" i="0">
-                <a:solidFill>
-                  <a:srgbClr val="12263A"/>
-                </a:solidFill>
-                <a:latin typeface="Microsoft YaHei"/>
-                <a:ea typeface="Microsoft YaHei"/>
-                <a:cs typeface="Microsoft YaHei"/>
-              </a:rPr>
-              <a:t>• 将人工集中到困难和高风险样本</a:t>
-            </a:r>
-          </a:p>
-          <a:p xmlns:a="http://schemas.openxmlformats.org/drawingml/2006/main">
-            <a:pPr algn="l">
-              <a:defRPr sz="1275" b="0" i="0">
-                <a:solidFill>
-                  <a:srgbClr val="12263A"/>
-                </a:solidFill>
-                <a:latin typeface="Microsoft YaHei"/>
-                <a:ea typeface="Microsoft YaHei"/>
-                <a:cs typeface="Microsoft YaHei"/>
-              </a:defRPr>
-            </a:pPr>
-            <a:r>
-              <a:rPr sz="1275" b="0" i="0">
-                <a:solidFill>
-                  <a:srgbClr val="12263A"/>
-                </a:solidFill>
-                <a:latin typeface="Microsoft YaHei"/>
-                <a:ea typeface="Microsoft YaHei"/>
-                <a:cs typeface="Microsoft YaHei"/>
-              </a:rPr>
-              <a:t>• 缩短新任务质量标准落地周期</a:t>
-            </a:r>
-          </a:p>
-        </p:txBody>
-      </p:sp>
-      <p:sp>
-        <p:nvSpPr>
-          <p:cNvPr id="8" name="value-1">
-            <a:extLst xmlns:a="http://schemas.openxmlformats.org/drawingml/2006/main">
-              <a:ext uri="{FF2B5EF4-FFF2-40B4-BE49-F238E27FC236}">
-                <a16:creationId xmlns:a16="http://schemas.microsoft.com/office/drawing/2014/main" id="{17B0A95E-D646-4758-B4BA-8D626EEC4D65}"/>
-              </a:ext>
-            </a:extLst>
-          </p:cNvPr>
-          <p:cNvSpPr>
-            <a:spLocks xmlns:a="http://schemas.openxmlformats.org/drawingml/2006/main" noGrp="1"/>
-          </p:cNvSpPr>
-          <p:nvPr/>
-        </p:nvSpPr>
-        <p:spPr>
-          <a:xfrm xmlns:a="http://schemas.openxmlformats.org/drawingml/2006/main">
-            <a:off x="4210050" y="1581150"/>
-            <a:ext cx="3314700" cy="2133600"/>
-          </a:xfrm>
-          <a:prstGeom xmlns:a="http://schemas.openxmlformats.org/drawingml/2006/main" prst="roundRect">
-            <a:avLst>
-              <a:gd name="adj" fmla="val 5357"/>
-            </a:avLst>
-          </a:prstGeom>
-          <a:solidFill xmlns:a="http://schemas.openxmlformats.org/drawingml/2006/main">
-            <a:srgbClr val="E7F6F3"/>
-          </a:solidFill>
-          <a:ln xmlns:a="http://schemas.openxmlformats.org/drawingml/2006/main" w="9525">
-            <a:solidFill>
-              <a:srgbClr val="E7F6F3"/>
-            </a:solidFill>
-            <a:prstDash val="solid"/>
-          </a:ln>
-        </p:spPr>
-      </p:sp>
-      <p:sp>
-        <p:nvSpPr>
-          <p:cNvPr id="9" name="value-title-1">
-            <a:extLst xmlns:a="http://schemas.openxmlformats.org/drawingml/2006/main">
-              <a:ext uri="{FF2B5EF4-FFF2-40B4-BE49-F238E27FC236}">
-                <a16:creationId xmlns:a16="http://schemas.microsoft.com/office/drawing/2014/main" id="{F93D6A48-EB3C-41C8-9769-A94E5B0E18D7}"/>
-              </a:ext>
-            </a:extLst>
-          </p:cNvPr>
-          <p:cNvSpPr>
-            <a:spLocks xmlns:a="http://schemas.openxmlformats.org/drawingml/2006/main" noGrp="1"/>
-          </p:cNvSpPr>
-          <p:nvPr/>
-        </p:nvSpPr>
-        <p:spPr>
-          <a:xfrm xmlns:a="http://schemas.openxmlformats.org/drawingml/2006/main">
-            <a:off x="4438650" y="1809750"/>
-            <a:ext cx="2857500" cy="323850"/>
-          </a:xfrm>
-          <a:prstGeom xmlns:a="http://schemas.openxmlformats.org/drawingml/2006/main" prst="rect">
-            <a:avLst/>
-          </a:prstGeom>
-          <a:noFill xmlns:a="http://schemas.openxmlformats.org/drawingml/2006/main"/>
-          <a:ln xmlns:a="http://schemas.openxmlformats.org/drawingml/2006/main" w="0">
-            <a:noFill/>
-            <a:prstDash val="solid"/>
-          </a:ln>
-        </p:spPr>
-        <p:txBody>
-          <a:bodyPr xmlns:a="http://schemas.openxmlformats.org/drawingml/2006/main" wrap="square" lIns="0" tIns="0" rIns="0" bIns="0" anchor="t">
-            <a:normAutofit fontScale="100000"/>
-          </a:bodyPr>
-          <a:lstStyle xmlns:a="http://schemas.openxmlformats.org/drawingml/2006/main"/>
-          <a:p xmlns:a="http://schemas.openxmlformats.org/drawingml/2006/main">
-            <a:pPr algn="l">
-              <a:defRPr sz="1875" b="1" i="0">
-                <a:solidFill>
-                  <a:srgbClr val="159A91"/>
-                </a:solidFill>
-                <a:latin typeface="Microsoft YaHei"/>
-                <a:ea typeface="Microsoft YaHei"/>
-                <a:cs typeface="Microsoft YaHei"/>
-              </a:defRPr>
-            </a:pPr>
-            <a:r>
-              <a:rPr sz="1875" b="1" i="0">
-                <a:solidFill>
-                  <a:srgbClr val="159A91"/>
-                </a:solidFill>
-                <a:latin typeface="Microsoft YaHei"/>
-                <a:ea typeface="Microsoft YaHei"/>
-                <a:cs typeface="Microsoft YaHei"/>
-              </a:rPr>
-              <a:t>技术价值</a:t>
-            </a:r>
-          </a:p>
-        </p:txBody>
-      </p:sp>
-      <p:sp>
-        <p:nvSpPr>
-          <p:cNvPr id="10" name="value-body-1">
-            <a:extLst xmlns:a="http://schemas.openxmlformats.org/drawingml/2006/main">
-              <a:ext uri="{FF2B5EF4-FFF2-40B4-BE49-F238E27FC236}">
-                <a16:creationId xmlns:a16="http://schemas.microsoft.com/office/drawing/2014/main" id="{19D15129-614B-47B3-84CB-D77D46F8D126}"/>
-              </a:ext>
-            </a:extLst>
-          </p:cNvPr>
-          <p:cNvSpPr>
-            <a:spLocks xmlns:a="http://schemas.openxmlformats.org/drawingml/2006/main" noGrp="1"/>
-          </p:cNvSpPr>
-          <p:nvPr/>
-        </p:nvSpPr>
-        <p:spPr>
-          <a:xfrm xmlns:a="http://schemas.openxmlformats.org/drawingml/2006/main">
-            <a:off x="4438650" y="2286000"/>
-            <a:ext cx="2857500" cy="1123950"/>
-          </a:xfrm>
-          <a:prstGeom xmlns:a="http://schemas.openxmlformats.org/drawingml/2006/main" prst="rect">
-            <a:avLst/>
-          </a:prstGeom>
-          <a:noFill xmlns:a="http://schemas.openxmlformats.org/drawingml/2006/main"/>
-          <a:ln xmlns:a="http://schemas.openxmlformats.org/drawingml/2006/main" w="0">
-            <a:noFill/>
-            <a:prstDash val="solid"/>
-          </a:ln>
-        </p:spPr>
-        <p:txBody>
-          <a:bodyPr xmlns:a="http://schemas.openxmlformats.org/drawingml/2006/main" wrap="square" lIns="0" tIns="0" rIns="0" bIns="0" anchor="t">
-            <a:normAutofit fontScale="100000"/>
-          </a:bodyPr>
-          <a:lstStyle xmlns:a="http://schemas.openxmlformats.org/drawingml/2006/main"/>
-          <a:p xmlns:a="http://schemas.openxmlformats.org/drawingml/2006/main">
-            <a:pPr algn="l">
-              <a:defRPr sz="1275" b="0" i="0">
-                <a:solidFill>
-                  <a:srgbClr val="12263A"/>
-                </a:solidFill>
-                <a:latin typeface="Microsoft YaHei"/>
-                <a:ea typeface="Microsoft YaHei"/>
-                <a:cs typeface="Microsoft YaHei"/>
-              </a:defRPr>
-            </a:pPr>
-            <a:r>
-              <a:rPr sz="1275" b="0" i="0">
-                <a:solidFill>
-                  <a:srgbClr val="12263A"/>
-                </a:solidFill>
-                <a:latin typeface="Microsoft YaHei"/>
-                <a:ea typeface="Microsoft YaHei"/>
-                <a:cs typeface="Microsoft YaHei"/>
-              </a:rPr>
-              <a:t>• 建立系统化Rubric和验证协议</a:t>
-            </a:r>
-          </a:p>
-          <a:p xmlns:a="http://schemas.openxmlformats.org/drawingml/2006/main">
-            <a:pPr algn="l">
-              <a:defRPr sz="1275" b="0" i="0">
-                <a:solidFill>
-                  <a:srgbClr val="12263A"/>
-                </a:solidFill>
-                <a:latin typeface="Microsoft YaHei"/>
-                <a:ea typeface="Microsoft YaHei"/>
-                <a:cs typeface="Microsoft YaHei"/>
-              </a:defRPr>
-            </a:pPr>
-            <a:r>
-              <a:rPr sz="1275" b="0" i="0">
-                <a:solidFill>
-                  <a:srgbClr val="12263A"/>
-                </a:solidFill>
-                <a:latin typeface="Microsoft YaHei"/>
-                <a:ea typeface="Microsoft YaHei"/>
-                <a:cs typeface="Microsoft YaHei"/>
-              </a:rPr>
-              <a:t>• 让Prompt、权重和阈值可实验比较</a:t>
-            </a:r>
-          </a:p>
-          <a:p xmlns:a="http://schemas.openxmlformats.org/drawingml/2006/main">
-            <a:pPr algn="l">
-              <a:defRPr sz="1275" b="0" i="0">
-                <a:solidFill>
-                  <a:srgbClr val="12263A"/>
-                </a:solidFill>
-                <a:latin typeface="Microsoft YaHei"/>
-                <a:ea typeface="Microsoft YaHei"/>
-                <a:cs typeface="Microsoft YaHei"/>
-              </a:defRPr>
-            </a:pPr>
-            <a:r>
-              <a:rPr sz="1275" b="0" i="0">
-                <a:solidFill>
-                  <a:srgbClr val="12263A"/>
-                </a:solidFill>
-                <a:latin typeface="Microsoft YaHei"/>
-                <a:ea typeface="Microsoft YaHei"/>
-                <a:cs typeface="Microsoft YaHei"/>
-              </a:rPr>
-              <a:t>• 输出分数、证据、置信度与复核建议</a:t>
-            </a:r>
-          </a:p>
-        </p:txBody>
-      </p:sp>
-      <p:sp>
-        <p:nvSpPr>
-          <p:cNvPr id="11" name="value-2">
-            <a:extLst xmlns:a="http://schemas.openxmlformats.org/drawingml/2006/main">
-              <a:ext uri="{FF2B5EF4-FFF2-40B4-BE49-F238E27FC236}">
-                <a16:creationId xmlns:a16="http://schemas.microsoft.com/office/drawing/2014/main" id="{EA300516-3542-4E99-BE01-9E17C9816040}"/>
-              </a:ext>
-            </a:extLst>
-          </p:cNvPr>
-          <p:cNvSpPr>
-            <a:spLocks xmlns:a="http://schemas.openxmlformats.org/drawingml/2006/main" noGrp="1"/>
-          </p:cNvSpPr>
-          <p:nvPr/>
-        </p:nvSpPr>
-        <p:spPr>
-          <a:xfrm xmlns:a="http://schemas.openxmlformats.org/drawingml/2006/main">
-            <a:off x="7905750" y="1581150"/>
-            <a:ext cx="3314700" cy="2133600"/>
-          </a:xfrm>
-          <a:prstGeom xmlns:a="http://schemas.openxmlformats.org/drawingml/2006/main" prst="roundRect">
-            <a:avLst>
-              <a:gd name="adj" fmla="val 5357"/>
-            </a:avLst>
-          </a:prstGeom>
-          <a:solidFill xmlns:a="http://schemas.openxmlformats.org/drawingml/2006/main">
-            <a:srgbClr val="FFF5DE"/>
-          </a:solidFill>
-          <a:ln xmlns:a="http://schemas.openxmlformats.org/drawingml/2006/main" w="9525">
-            <a:solidFill>
-              <a:srgbClr val="FFF5DE"/>
-            </a:solidFill>
-            <a:prstDash val="solid"/>
-          </a:ln>
-        </p:spPr>
-      </p:sp>
-      <p:sp>
-        <p:nvSpPr>
-          <p:cNvPr id="12" name="value-title-2">
-            <a:extLst xmlns:a="http://schemas.openxmlformats.org/drawingml/2006/main">
-              <a:ext uri="{FF2B5EF4-FFF2-40B4-BE49-F238E27FC236}">
-                <a16:creationId xmlns:a16="http://schemas.microsoft.com/office/drawing/2014/main" id="{31C7CF46-CC8F-4FEB-9953-1EE437459FF5}"/>
-              </a:ext>
-            </a:extLst>
-          </p:cNvPr>
-          <p:cNvSpPr>
-            <a:spLocks xmlns:a="http://schemas.openxmlformats.org/drawingml/2006/main" noGrp="1"/>
-          </p:cNvSpPr>
-          <p:nvPr/>
-        </p:nvSpPr>
-        <p:spPr>
-          <a:xfrm xmlns:a="http://schemas.openxmlformats.org/drawingml/2006/main">
-            <a:off x="8134350" y="1809750"/>
-            <a:ext cx="2857500" cy="323850"/>
-          </a:xfrm>
-          <a:prstGeom xmlns:a="http://schemas.openxmlformats.org/drawingml/2006/main" prst="rect">
-            <a:avLst/>
-          </a:prstGeom>
-          <a:noFill xmlns:a="http://schemas.openxmlformats.org/drawingml/2006/main"/>
-          <a:ln xmlns:a="http://schemas.openxmlformats.org/drawingml/2006/main" w="0">
-            <a:noFill/>
-            <a:prstDash val="solid"/>
-          </a:ln>
-        </p:spPr>
-        <p:txBody>
-          <a:bodyPr xmlns:a="http://schemas.openxmlformats.org/drawingml/2006/main" wrap="square" lIns="0" tIns="0" rIns="0" bIns="0" anchor="t">
-            <a:normAutofit fontScale="100000"/>
-          </a:bodyPr>
-          <a:lstStyle xmlns:a="http://schemas.openxmlformats.org/drawingml/2006/main"/>
-          <a:p xmlns:a="http://schemas.openxmlformats.org/drawingml/2006/main">
-            <a:pPr algn="l">
-              <a:defRPr sz="1875" b="1" i="0">
-                <a:solidFill>
-                  <a:srgbClr val="C88919"/>
-                </a:solidFill>
-                <a:latin typeface="Microsoft YaHei"/>
-                <a:ea typeface="Microsoft YaHei"/>
-                <a:cs typeface="Microsoft YaHei"/>
-              </a:defRPr>
-            </a:pPr>
-            <a:r>
-              <a:rPr sz="1875" b="1" i="0">
-                <a:solidFill>
-                  <a:srgbClr val="C88919"/>
-                </a:solidFill>
-                <a:latin typeface="Microsoft YaHei"/>
-                <a:ea typeface="Microsoft YaHei"/>
-                <a:cs typeface="Microsoft YaHei"/>
-              </a:rPr>
-              <a:t>长期资产</a:t>
-            </a:r>
-          </a:p>
-        </p:txBody>
-      </p:sp>
-      <p:sp>
-        <p:nvSpPr>
-          <p:cNvPr id="13" name="value-body-2">
-            <a:extLst xmlns:a="http://schemas.openxmlformats.org/drawingml/2006/main">
-              <a:ext uri="{FF2B5EF4-FFF2-40B4-BE49-F238E27FC236}">
-                <a16:creationId xmlns:a16="http://schemas.microsoft.com/office/drawing/2014/main" id="{0F626BCF-4FEF-4D75-8572-F40F4C63139E}"/>
-              </a:ext>
-            </a:extLst>
-          </p:cNvPr>
-          <p:cNvSpPr>
-            <a:spLocks xmlns:a="http://schemas.openxmlformats.org/drawingml/2006/main" noGrp="1"/>
-          </p:cNvSpPr>
-          <p:nvPr/>
-        </p:nvSpPr>
-        <p:spPr>
-          <a:xfrm xmlns:a="http://schemas.openxmlformats.org/drawingml/2006/main">
-            <a:off x="8134350" y="2286000"/>
-            <a:ext cx="2857500" cy="1123950"/>
-          </a:xfrm>
-          <a:prstGeom xmlns:a="http://schemas.openxmlformats.org/drawingml/2006/main" prst="rect">
-            <a:avLst/>
-          </a:prstGeom>
-          <a:noFill xmlns:a="http://schemas.openxmlformats.org/drawingml/2006/main"/>
-          <a:ln xmlns:a="http://schemas.openxmlformats.org/drawingml/2006/main" w="0">
-            <a:noFill/>
-            <a:prstDash val="solid"/>
-          </a:ln>
-        </p:spPr>
-        <p:txBody>
-          <a:bodyPr xmlns:a="http://schemas.openxmlformats.org/drawingml/2006/main" wrap="square" lIns="0" tIns="0" rIns="0" bIns="0" anchor="t">
-            <a:normAutofit fontScale="100000"/>
-          </a:bodyPr>
-          <a:lstStyle xmlns:a="http://schemas.openxmlformats.org/drawingml/2006/main"/>
-          <a:p xmlns:a="http://schemas.openxmlformats.org/drawingml/2006/main">
-            <a:pPr algn="l">
-              <a:defRPr sz="1275" b="0" i="0">
-                <a:solidFill>
-                  <a:srgbClr val="12263A"/>
-                </a:solidFill>
-                <a:latin typeface="Microsoft YaHei"/>
-                <a:ea typeface="Microsoft YaHei"/>
-                <a:cs typeface="Microsoft YaHei"/>
-              </a:defRPr>
-            </a:pPr>
-            <a:r>
-              <a:rPr sz="1275" b="0" i="0">
-                <a:solidFill>
-                  <a:srgbClr val="12263A"/>
-                </a:solidFill>
-                <a:latin typeface="Microsoft YaHei"/>
-                <a:ea typeface="Microsoft YaHei"/>
-                <a:cs typeface="Microsoft YaHei"/>
-              </a:rPr>
-              <a:t>• 沉淀跨项目可复用Pipeline</a:t>
-            </a:r>
-          </a:p>
-          <a:p xmlns:a="http://schemas.openxmlformats.org/drawingml/2006/main">
-            <a:pPr algn="l">
-              <a:defRPr sz="1275" b="0" i="0">
-                <a:solidFill>
-                  <a:srgbClr val="12263A"/>
-                </a:solidFill>
-                <a:latin typeface="Microsoft YaHei"/>
-                <a:ea typeface="Microsoft YaHei"/>
-                <a:cs typeface="Microsoft YaHei"/>
-              </a:defRPr>
-            </a:pPr>
-            <a:r>
-              <a:rPr sz="1275" b="0" i="0">
-                <a:solidFill>
-                  <a:srgbClr val="12263A"/>
-                </a:solidFill>
-                <a:latin typeface="Microsoft YaHei"/>
-                <a:ea typeface="Microsoft YaHei"/>
-                <a:cs typeface="Microsoft YaHei"/>
-              </a:rPr>
-              <a:t>• 积累验证集、失败案例和专家偏好</a:t>
-            </a:r>
-          </a:p>
-          <a:p xmlns:a="http://schemas.openxmlformats.org/drawingml/2006/main">
-            <a:pPr algn="l">
-              <a:defRPr sz="1275" b="0" i="0">
-                <a:solidFill>
-                  <a:srgbClr val="12263A"/>
-                </a:solidFill>
-                <a:latin typeface="Microsoft YaHei"/>
-                <a:ea typeface="Microsoft YaHei"/>
-                <a:cs typeface="Microsoft YaHei"/>
-              </a:defRPr>
-            </a:pPr>
-            <a:r>
-              <a:rPr sz="1275" b="0" i="0">
-                <a:solidFill>
-                  <a:srgbClr val="12263A"/>
-                </a:solidFill>
-                <a:latin typeface="Microsoft YaHei"/>
-                <a:ea typeface="Microsoft YaHei"/>
-                <a:cs typeface="Microsoft YaHei"/>
-              </a:rPr>
-              <a:t>• 形成接口、论文和专利成果</a:t>
-            </a:r>
-          </a:p>
-        </p:txBody>
-      </p:sp>
-      <p:sp>
-        <p:nvSpPr>
-          <p:cNvPr id="14" name="auto-text-39">
-            <a:extLst xmlns:a="http://schemas.openxmlformats.org/drawingml/2006/main">
-              <a:ext uri="{FF2B5EF4-FFF2-40B4-BE49-F238E27FC236}">
-                <a16:creationId xmlns:a16="http://schemas.microsoft.com/office/drawing/2014/main" id="{ECB5D677-CDEA-42C6-8A9A-8EE54D724ADB}"/>
-              </a:ext>
-            </a:extLst>
-          </p:cNvPr>
-          <p:cNvSpPr>
-            <a:spLocks xmlns:a="http://schemas.openxmlformats.org/drawingml/2006/main" noGrp="1"/>
-          </p:cNvSpPr>
-          <p:nvPr/>
-        </p:nvSpPr>
-        <p:spPr>
-          <a:xfrm xmlns:a="http://schemas.openxmlformats.org/drawingml/2006/main">
-            <a:off x="514350" y="3962400"/>
-            <a:ext cx="3238500" cy="285750"/>
-          </a:xfrm>
-          <a:prstGeom xmlns:a="http://schemas.openxmlformats.org/drawingml/2006/main" prst="rect">
-            <a:avLst/>
-          </a:prstGeom>
-          <a:noFill xmlns:a="http://schemas.openxmlformats.org/drawingml/2006/main"/>
-          <a:ln xmlns:a="http://schemas.openxmlformats.org/drawingml/2006/main" w="0">
-            <a:noFill/>
-            <a:prstDash val="solid"/>
-          </a:ln>
-        </p:spPr>
-        <p:txBody>
-          <a:bodyPr xmlns:a="http://schemas.openxmlformats.org/drawingml/2006/main" wrap="square" lIns="0" tIns="0" rIns="0" bIns="0" anchor="t">
-            <a:normAutofit fontScale="100000"/>
-          </a:bodyPr>
-          <a:lstStyle xmlns:a="http://schemas.openxmlformats.org/drawingml/2006/main"/>
-          <a:p xmlns:a="http://schemas.openxmlformats.org/drawingml/2006/main">
-            <a:pPr algn="l">
-              <a:defRPr sz="1575" b="1" i="0">
-                <a:solidFill>
-                  <a:srgbClr val="12263A"/>
-                </a:solidFill>
-                <a:latin typeface="Microsoft YaHei"/>
-                <a:ea typeface="Microsoft YaHei"/>
-                <a:cs typeface="Microsoft YaHei"/>
-              </a:defRPr>
-            </a:pPr>
-            <a:r>
-              <a:rPr sz="1575" b="1" i="0">
-                <a:solidFill>
-                  <a:srgbClr val="12263A"/>
-                </a:solidFill>
-                <a:latin typeface="Microsoft YaHei"/>
-                <a:ea typeface="Microsoft YaHei"/>
-                <a:cs typeface="Microsoft YaHei"/>
-              </a:rPr>
-              <a:t>SOW项目目标（非现有成果）</a:t>
-            </a:r>
-          </a:p>
-        </p:txBody>
-      </p:sp>
-      <p:sp>
-        <p:nvSpPr>
-          <p:cNvPr id="15" name="metric-0">
-            <a:extLst xmlns:a="http://schemas.openxmlformats.org/drawingml/2006/main">
-              <a:ext uri="{FF2B5EF4-FFF2-40B4-BE49-F238E27FC236}">
-                <a16:creationId xmlns:a16="http://schemas.microsoft.com/office/drawing/2014/main" id="{011FCC5E-D3F5-41D2-B28D-A6B51A386317}"/>
-              </a:ext>
-            </a:extLst>
-          </p:cNvPr>
-          <p:cNvSpPr>
-            <a:spLocks xmlns:a="http://schemas.openxmlformats.org/drawingml/2006/main" noGrp="1"/>
-          </p:cNvSpPr>
-          <p:nvPr/>
-        </p:nvSpPr>
-        <p:spPr>
-          <a:xfrm xmlns:a="http://schemas.openxmlformats.org/drawingml/2006/main">
-            <a:off x="514350" y="4362450"/>
+              <a:defRPr sz="1125" b="0" i="0">
+                <a:solidFill>
+                  <a:srgbClr val="25364A"/>
+                </a:solidFill>
+                <a:latin typeface="Microsoft YaHei"/>
+                <a:ea typeface="Microsoft YaHei"/>
+                <a:cs typeface="Microsoft YaHei"/>
+              </a:defRPr>
+            </a:pPr>
+            <a:r>
+              <a:rPr sz="1125" b="0" i="0">
+                <a:solidFill>
+                  <a:srgbClr val="25364A"/>
+                </a:solidFill>
+                <a:latin typeface="Microsoft YaHei"/>
+                <a:ea typeface="Microsoft YaHei"/>
+                <a:cs typeface="Microsoft YaHei"/>
+              </a:rPr>
+              <a:t>人机一致率提升</a:t>
+            </a:r>
+          </a:p>
+        </p:txBody>
+      </p:sp>
+      <p:sp>
+        <p:nvSpPr>
+          <p:cNvPr id="18" name="metric-1">
+            <a:extLst xmlns:a="http://schemas.openxmlformats.org/drawingml/2006/main">
+              <a:ext uri="{FF2B5EF4-FFF2-40B4-BE49-F238E27FC236}">
+                <a16:creationId xmlns:a16="http://schemas.microsoft.com/office/drawing/2014/main" id="{8C80D11B-2B87-4BAD-8D09-71F8B6538738}"/>
+              </a:ext>
+            </a:extLst>
+          </p:cNvPr>
+          <p:cNvSpPr>
+            <a:spLocks xmlns:a="http://schemas.openxmlformats.org/drawingml/2006/main" noGrp="1"/>
+          </p:cNvSpPr>
+          <p:nvPr/>
+        </p:nvSpPr>
+        <p:spPr>
+          <a:xfrm xmlns:a="http://schemas.openxmlformats.org/drawingml/2006/main">
+            <a:off x="2747010" y="4362450"/>
             <a:ext cx="2057400" cy="952500"/>
           </a:xfrm>
           <a:prstGeom xmlns:a="http://schemas.openxmlformats.org/drawingml/2006/main" prst="roundRect">
@@ -11605,21 +10638,21 @@
       </p:sp>
       <p:sp>
         <p:nvSpPr>
-          <p:cNvPr id="16" name="metric-stat-0">
-            <a:extLst xmlns:a="http://schemas.openxmlformats.org/drawingml/2006/main">
-              <a:ext uri="{FF2B5EF4-FFF2-40B4-BE49-F238E27FC236}">
-                <a16:creationId xmlns:a16="http://schemas.microsoft.com/office/drawing/2014/main" id="{3BDAC5D0-3D72-4A0E-A3A1-68E1EF951CA1}"/>
-              </a:ext>
-            </a:extLst>
-          </p:cNvPr>
-          <p:cNvSpPr>
-            <a:spLocks xmlns:a="http://schemas.openxmlformats.org/drawingml/2006/main" noGrp="1"/>
-          </p:cNvSpPr>
-          <p:nvPr/>
-        </p:nvSpPr>
-        <p:spPr>
-          <a:xfrm xmlns:a="http://schemas.openxmlformats.org/drawingml/2006/main">
-            <a:off x="666750" y="4476750"/>
+          <p:cNvPr id="19" name="metric-stat-1">
+            <a:extLst xmlns:a="http://schemas.openxmlformats.org/drawingml/2006/main">
+              <a:ext uri="{FF2B5EF4-FFF2-40B4-BE49-F238E27FC236}">
+                <a16:creationId xmlns:a16="http://schemas.microsoft.com/office/drawing/2014/main" id="{D0640045-40FA-4B44-A585-3D6E9D9ABFB5}"/>
+              </a:ext>
+            </a:extLst>
+          </p:cNvPr>
+          <p:cNvSpPr>
+            <a:spLocks xmlns:a="http://schemas.openxmlformats.org/drawingml/2006/main" noGrp="1"/>
+          </p:cNvSpPr>
+          <p:nvPr/>
+        </p:nvSpPr>
+        <p:spPr>
+          <a:xfrm xmlns:a="http://schemas.openxmlformats.org/drawingml/2006/main">
+            <a:off x="2899410" y="4476750"/>
             <a:ext cx="1752600" cy="361950"/>
           </a:xfrm>
           <a:prstGeom xmlns:a="http://schemas.openxmlformats.org/drawingml/2006/main" prst="rect">
@@ -11656,28 +10689,28 @@
                 <a:ea typeface="Microsoft YaHei"/>
                 <a:cs typeface="Microsoft YaHei"/>
               </a:rPr>
-              <a:t>+10pp</a:t>
-            </a:r>
-          </a:p>
-        </p:txBody>
-      </p:sp>
-      <p:sp>
-        <p:nvSpPr>
-          <p:cNvPr id="17" name="metric-label-0">
-            <a:extLst xmlns:a="http://schemas.openxmlformats.org/drawingml/2006/main">
-              <a:ext uri="{FF2B5EF4-FFF2-40B4-BE49-F238E27FC236}">
-                <a16:creationId xmlns:a16="http://schemas.microsoft.com/office/drawing/2014/main" id="{4FF9565A-C9C1-4DF3-96A5-506FE0E4B1B9}"/>
-              </a:ext>
-            </a:extLst>
-          </p:cNvPr>
-          <p:cNvSpPr>
-            <a:spLocks xmlns:a="http://schemas.openxmlformats.org/drawingml/2006/main" noGrp="1"/>
-          </p:cNvSpPr>
-          <p:nvPr/>
-        </p:nvSpPr>
-        <p:spPr>
-          <a:xfrm xmlns:a="http://schemas.openxmlformats.org/drawingml/2006/main">
-            <a:off x="666750" y="4895850"/>
+              <a:t>≥85%</a:t>
+            </a:r>
+          </a:p>
+        </p:txBody>
+      </p:sp>
+      <p:sp>
+        <p:nvSpPr>
+          <p:cNvPr id="20" name="metric-label-1">
+            <a:extLst xmlns:a="http://schemas.openxmlformats.org/drawingml/2006/main">
+              <a:ext uri="{FF2B5EF4-FFF2-40B4-BE49-F238E27FC236}">
+                <a16:creationId xmlns:a16="http://schemas.microsoft.com/office/drawing/2014/main" id="{0DE284C8-FBB3-4CF5-853F-CE19003A741E}"/>
+              </a:ext>
+            </a:extLst>
+          </p:cNvPr>
+          <p:cNvSpPr>
+            <a:spLocks xmlns:a="http://schemas.openxmlformats.org/drawingml/2006/main" noGrp="1"/>
+          </p:cNvSpPr>
+          <p:nvPr/>
+        </p:nvSpPr>
+        <p:spPr>
+          <a:xfrm xmlns:a="http://schemas.openxmlformats.org/drawingml/2006/main">
+            <a:off x="2899410" y="4895850"/>
             <a:ext cx="1752600" cy="228600"/>
           </a:xfrm>
           <a:prstGeom xmlns:a="http://schemas.openxmlformats.org/drawingml/2006/main" prst="rect">
@@ -11714,28 +10747,28 @@
                 <a:ea typeface="Microsoft YaHei"/>
                 <a:cs typeface="Microsoft YaHei"/>
               </a:rPr>
-              <a:t>人机一致率提升</a:t>
-            </a:r>
-          </a:p>
-        </p:txBody>
-      </p:sp>
-      <p:sp>
-        <p:nvSpPr>
-          <p:cNvPr id="18" name="metric-1">
-            <a:extLst xmlns:a="http://schemas.openxmlformats.org/drawingml/2006/main">
-              <a:ext uri="{FF2B5EF4-FFF2-40B4-BE49-F238E27FC236}">
-                <a16:creationId xmlns:a16="http://schemas.microsoft.com/office/drawing/2014/main" id="{2D3D7F0C-DA6C-4473-99C2-4322B851FE83}"/>
-              </a:ext>
-            </a:extLst>
-          </p:cNvPr>
-          <p:cNvSpPr>
-            <a:spLocks xmlns:a="http://schemas.openxmlformats.org/drawingml/2006/main" noGrp="1"/>
-          </p:cNvSpPr>
-          <p:nvPr/>
-        </p:nvSpPr>
-        <p:spPr>
-          <a:xfrm xmlns:a="http://schemas.openxmlformats.org/drawingml/2006/main">
-            <a:off x="2747010" y="4362450"/>
+              <a:t>低质量召回</a:t>
+            </a:r>
+          </a:p>
+        </p:txBody>
+      </p:sp>
+      <p:sp>
+        <p:nvSpPr>
+          <p:cNvPr id="21" name="metric-2">
+            <a:extLst xmlns:a="http://schemas.openxmlformats.org/drawingml/2006/main">
+              <a:ext uri="{FF2B5EF4-FFF2-40B4-BE49-F238E27FC236}">
+                <a16:creationId xmlns:a16="http://schemas.microsoft.com/office/drawing/2014/main" id="{92996F2A-1AEC-40C5-A228-3FEE452CE2D3}"/>
+              </a:ext>
+            </a:extLst>
+          </p:cNvPr>
+          <p:cNvSpPr>
+            <a:spLocks xmlns:a="http://schemas.openxmlformats.org/drawingml/2006/main" noGrp="1"/>
+          </p:cNvSpPr>
+          <p:nvPr/>
+        </p:nvSpPr>
+        <p:spPr>
+          <a:xfrm xmlns:a="http://schemas.openxmlformats.org/drawingml/2006/main">
+            <a:off x="4979670" y="4362450"/>
             <a:ext cx="2057400" cy="952500"/>
           </a:xfrm>
           <a:prstGeom xmlns:a="http://schemas.openxmlformats.org/drawingml/2006/main" prst="roundRect">
@@ -11756,21 +10789,21 @@
       </p:sp>
       <p:sp>
         <p:nvSpPr>
-          <p:cNvPr id="19" name="metric-stat-1">
-            <a:extLst xmlns:a="http://schemas.openxmlformats.org/drawingml/2006/main">
-              <a:ext uri="{FF2B5EF4-FFF2-40B4-BE49-F238E27FC236}">
-                <a16:creationId xmlns:a16="http://schemas.microsoft.com/office/drawing/2014/main" id="{90BB03F3-7FA1-4504-BAF2-7FC6FF03307A}"/>
-              </a:ext>
-            </a:extLst>
-          </p:cNvPr>
-          <p:cNvSpPr>
-            <a:spLocks xmlns:a="http://schemas.openxmlformats.org/drawingml/2006/main" noGrp="1"/>
-          </p:cNvSpPr>
-          <p:nvPr/>
-        </p:nvSpPr>
-        <p:spPr>
-          <a:xfrm xmlns:a="http://schemas.openxmlformats.org/drawingml/2006/main">
-            <a:off x="2899410" y="4476750"/>
+          <p:cNvPr id="22" name="metric-stat-2">
+            <a:extLst xmlns:a="http://schemas.openxmlformats.org/drawingml/2006/main">
+              <a:ext uri="{FF2B5EF4-FFF2-40B4-BE49-F238E27FC236}">
+                <a16:creationId xmlns:a16="http://schemas.microsoft.com/office/drawing/2014/main" id="{C217602C-1179-4157-AD84-6DC868BD082B}"/>
+              </a:ext>
+            </a:extLst>
+          </p:cNvPr>
+          <p:cNvSpPr>
+            <a:spLocks xmlns:a="http://schemas.openxmlformats.org/drawingml/2006/main" noGrp="1"/>
+          </p:cNvSpPr>
+          <p:nvPr/>
+        </p:nvSpPr>
+        <p:spPr>
+          <a:xfrm xmlns:a="http://schemas.openxmlformats.org/drawingml/2006/main">
+            <a:off x="5132070" y="4476750"/>
             <a:ext cx="1752600" cy="361950"/>
           </a:xfrm>
           <a:prstGeom xmlns:a="http://schemas.openxmlformats.org/drawingml/2006/main" prst="rect">
@@ -11807,28 +10840,28 @@
                 <a:ea typeface="Microsoft YaHei"/>
                 <a:cs typeface="Microsoft YaHei"/>
               </a:rPr>
-              <a:t>≥85%</a:t>
-            </a:r>
-          </a:p>
-        </p:txBody>
-      </p:sp>
-      <p:sp>
-        <p:nvSpPr>
-          <p:cNvPr id="20" name="metric-label-1">
-            <a:extLst xmlns:a="http://schemas.openxmlformats.org/drawingml/2006/main">
-              <a:ext uri="{FF2B5EF4-FFF2-40B4-BE49-F238E27FC236}">
-                <a16:creationId xmlns:a16="http://schemas.microsoft.com/office/drawing/2014/main" id="{28D9ABDD-589B-4BC9-88AD-6AD34FD59B62}"/>
-              </a:ext>
-            </a:extLst>
-          </p:cNvPr>
-          <p:cNvSpPr>
-            <a:spLocks xmlns:a="http://schemas.openxmlformats.org/drawingml/2006/main" noGrp="1"/>
-          </p:cNvSpPr>
-          <p:nvPr/>
-        </p:nvSpPr>
-        <p:spPr>
-          <a:xfrm xmlns:a="http://schemas.openxmlformats.org/drawingml/2006/main">
-            <a:off x="2899410" y="4895850"/>
+              <a:t>≥88%</a:t>
+            </a:r>
+          </a:p>
+        </p:txBody>
+      </p:sp>
+      <p:sp>
+        <p:nvSpPr>
+          <p:cNvPr id="23" name="metric-label-2">
+            <a:extLst xmlns:a="http://schemas.openxmlformats.org/drawingml/2006/main">
+              <a:ext uri="{FF2B5EF4-FFF2-40B4-BE49-F238E27FC236}">
+                <a16:creationId xmlns:a16="http://schemas.microsoft.com/office/drawing/2014/main" id="{FB62CB90-13CF-4CC9-9CC6-0F7989FD738F}"/>
+              </a:ext>
+            </a:extLst>
+          </p:cNvPr>
+          <p:cNvSpPr>
+            <a:spLocks xmlns:a="http://schemas.openxmlformats.org/drawingml/2006/main" noGrp="1"/>
+          </p:cNvSpPr>
+          <p:nvPr/>
+        </p:nvSpPr>
+        <p:spPr>
+          <a:xfrm xmlns:a="http://schemas.openxmlformats.org/drawingml/2006/main">
+            <a:off x="5132070" y="4895850"/>
             <a:ext cx="1752600" cy="228600"/>
           </a:xfrm>
           <a:prstGeom xmlns:a="http://schemas.openxmlformats.org/drawingml/2006/main" prst="rect">
@@ -11865,28 +10898,28 @@
                 <a:ea typeface="Microsoft YaHei"/>
                 <a:cs typeface="Microsoft YaHei"/>
               </a:rPr>
-              <a:t>低质量召回</a:t>
-            </a:r>
-          </a:p>
-        </p:txBody>
-      </p:sp>
-      <p:sp>
-        <p:nvSpPr>
-          <p:cNvPr id="21" name="metric-2">
-            <a:extLst xmlns:a="http://schemas.openxmlformats.org/drawingml/2006/main">
-              <a:ext uri="{FF2B5EF4-FFF2-40B4-BE49-F238E27FC236}">
-                <a16:creationId xmlns:a16="http://schemas.microsoft.com/office/drawing/2014/main" id="{91F6E740-68EB-463D-B64D-B73A0CAA2542}"/>
-              </a:ext>
-            </a:extLst>
-          </p:cNvPr>
-          <p:cNvSpPr>
-            <a:spLocks xmlns:a="http://schemas.openxmlformats.org/drawingml/2006/main" noGrp="1"/>
-          </p:cNvSpPr>
-          <p:nvPr/>
-        </p:nvSpPr>
-        <p:spPr>
-          <a:xfrm xmlns:a="http://schemas.openxmlformats.org/drawingml/2006/main">
-            <a:off x="4979670" y="4362450"/>
+              <a:t>高置信优质准确率</a:t>
+            </a:r>
+          </a:p>
+        </p:txBody>
+      </p:sp>
+      <p:sp>
+        <p:nvSpPr>
+          <p:cNvPr id="24" name="metric-3">
+            <a:extLst xmlns:a="http://schemas.openxmlformats.org/drawingml/2006/main">
+              <a:ext uri="{FF2B5EF4-FFF2-40B4-BE49-F238E27FC236}">
+                <a16:creationId xmlns:a16="http://schemas.microsoft.com/office/drawing/2014/main" id="{D2E06B93-5C05-43B1-B9DF-F5CC87F13715}"/>
+              </a:ext>
+            </a:extLst>
+          </p:cNvPr>
+          <p:cNvSpPr>
+            <a:spLocks xmlns:a="http://schemas.openxmlformats.org/drawingml/2006/main" noGrp="1"/>
+          </p:cNvSpPr>
+          <p:nvPr/>
+        </p:nvSpPr>
+        <p:spPr>
+          <a:xfrm xmlns:a="http://schemas.openxmlformats.org/drawingml/2006/main">
+            <a:off x="7212330" y="4362450"/>
             <a:ext cx="2057400" cy="952500"/>
           </a:xfrm>
           <a:prstGeom xmlns:a="http://schemas.openxmlformats.org/drawingml/2006/main" prst="roundRect">
@@ -11907,21 +10940,21 @@
       </p:sp>
       <p:sp>
         <p:nvSpPr>
-          <p:cNvPr id="22" name="metric-stat-2">
-            <a:extLst xmlns:a="http://schemas.openxmlformats.org/drawingml/2006/main">
-              <a:ext uri="{FF2B5EF4-FFF2-40B4-BE49-F238E27FC236}">
-                <a16:creationId xmlns:a16="http://schemas.microsoft.com/office/drawing/2014/main" id="{5801B90F-4B82-4EB6-B775-0B4CE5E40DA5}"/>
-              </a:ext>
-            </a:extLst>
-          </p:cNvPr>
-          <p:cNvSpPr>
-            <a:spLocks xmlns:a="http://schemas.openxmlformats.org/drawingml/2006/main" noGrp="1"/>
-          </p:cNvSpPr>
-          <p:nvPr/>
-        </p:nvSpPr>
-        <p:spPr>
-          <a:xfrm xmlns:a="http://schemas.openxmlformats.org/drawingml/2006/main">
-            <a:off x="5132070" y="4476750"/>
+          <p:cNvPr id="25" name="metric-stat-3">
+            <a:extLst xmlns:a="http://schemas.openxmlformats.org/drawingml/2006/main">
+              <a:ext uri="{FF2B5EF4-FFF2-40B4-BE49-F238E27FC236}">
+                <a16:creationId xmlns:a16="http://schemas.microsoft.com/office/drawing/2014/main" id="{389C2B2B-361D-464E-8468-0390337BC8F2}"/>
+              </a:ext>
+            </a:extLst>
+          </p:cNvPr>
+          <p:cNvSpPr>
+            <a:spLocks xmlns:a="http://schemas.openxmlformats.org/drawingml/2006/main" noGrp="1"/>
+          </p:cNvSpPr>
+          <p:nvPr/>
+        </p:nvSpPr>
+        <p:spPr>
+          <a:xfrm xmlns:a="http://schemas.openxmlformats.org/drawingml/2006/main">
+            <a:off x="7364730" y="4476750"/>
             <a:ext cx="1752600" cy="361950"/>
           </a:xfrm>
           <a:prstGeom xmlns:a="http://schemas.openxmlformats.org/drawingml/2006/main" prst="rect">
@@ -11942,7 +10975,7 @@
             <a:pPr algn="ctr">
               <a:defRPr sz="2100" b="1" i="0">
                 <a:solidFill>
-                  <a:srgbClr val="2F6BFF"/>
+                  <a:srgbClr val="159A91"/>
                 </a:solidFill>
                 <a:latin typeface="Microsoft YaHei"/>
                 <a:ea typeface="Microsoft YaHei"/>
@@ -11952,34 +10985,34 @@
             <a:r>
               <a:rPr sz="2100" b="1" i="0">
                 <a:solidFill>
-                  <a:srgbClr val="2F6BFF"/>
-                </a:solidFill>
-                <a:latin typeface="Microsoft YaHei"/>
-                <a:ea typeface="Microsoft YaHei"/>
-                <a:cs typeface="Microsoft YaHei"/>
-              </a:rPr>
-              <a:t>≥88%</a:t>
-            </a:r>
-          </a:p>
-        </p:txBody>
-      </p:sp>
-      <p:sp>
-        <p:nvSpPr>
-          <p:cNvPr id="23" name="metric-label-2">
-            <a:extLst xmlns:a="http://schemas.openxmlformats.org/drawingml/2006/main">
-              <a:ext uri="{FF2B5EF4-FFF2-40B4-BE49-F238E27FC236}">
-                <a16:creationId xmlns:a16="http://schemas.microsoft.com/office/drawing/2014/main" id="{5DF058CB-D03D-4203-B693-599021229195}"/>
-              </a:ext>
-            </a:extLst>
-          </p:cNvPr>
-          <p:cNvSpPr>
-            <a:spLocks xmlns:a="http://schemas.openxmlformats.org/drawingml/2006/main" noGrp="1"/>
-          </p:cNvSpPr>
-          <p:nvPr/>
-        </p:nvSpPr>
-        <p:spPr>
-          <a:xfrm xmlns:a="http://schemas.openxmlformats.org/drawingml/2006/main">
-            <a:off x="5132070" y="4895850"/>
+                  <a:srgbClr val="159A91"/>
+                </a:solidFill>
+                <a:latin typeface="Microsoft YaHei"/>
+                <a:ea typeface="Microsoft YaHei"/>
+                <a:cs typeface="Microsoft YaHei"/>
+              </a:rPr>
+              <a:t>−30%</a:t>
+            </a:r>
+          </a:p>
+        </p:txBody>
+      </p:sp>
+      <p:sp>
+        <p:nvSpPr>
+          <p:cNvPr id="26" name="metric-label-3">
+            <a:extLst xmlns:a="http://schemas.openxmlformats.org/drawingml/2006/main">
+              <a:ext uri="{FF2B5EF4-FFF2-40B4-BE49-F238E27FC236}">
+                <a16:creationId xmlns:a16="http://schemas.microsoft.com/office/drawing/2014/main" id="{B36FAFBE-9D83-4AC9-88B7-2184ED3452FC}"/>
+              </a:ext>
+            </a:extLst>
+          </p:cNvPr>
+          <p:cNvSpPr>
+            <a:spLocks xmlns:a="http://schemas.openxmlformats.org/drawingml/2006/main" noGrp="1"/>
+          </p:cNvSpPr>
+          <p:nvPr/>
+        </p:nvSpPr>
+        <p:spPr>
+          <a:xfrm xmlns:a="http://schemas.openxmlformats.org/drawingml/2006/main">
+            <a:off x="7364730" y="4895850"/>
             <a:ext cx="1752600" cy="228600"/>
           </a:xfrm>
           <a:prstGeom xmlns:a="http://schemas.openxmlformats.org/drawingml/2006/main" prst="rect">
@@ -12016,28 +11049,28 @@
                 <a:ea typeface="Microsoft YaHei"/>
                 <a:cs typeface="Microsoft YaHei"/>
               </a:rPr>
-              <a:t>高置信优质准确率</a:t>
-            </a:r>
-          </a:p>
-        </p:txBody>
-      </p:sp>
-      <p:sp>
-        <p:nvSpPr>
-          <p:cNvPr id="24" name="metric-3">
-            <a:extLst xmlns:a="http://schemas.openxmlformats.org/drawingml/2006/main">
-              <a:ext uri="{FF2B5EF4-FFF2-40B4-BE49-F238E27FC236}">
-                <a16:creationId xmlns:a16="http://schemas.microsoft.com/office/drawing/2014/main" id="{F07710B0-5559-4B2F-8E64-854BF6F2CCEE}"/>
-              </a:ext>
-            </a:extLst>
-          </p:cNvPr>
-          <p:cNvSpPr>
-            <a:spLocks xmlns:a="http://schemas.openxmlformats.org/drawingml/2006/main" noGrp="1"/>
-          </p:cNvSpPr>
-          <p:nvPr/>
-        </p:nvSpPr>
-        <p:spPr>
-          <a:xfrm xmlns:a="http://schemas.openxmlformats.org/drawingml/2006/main">
-            <a:off x="7212330" y="4362450"/>
+              <a:t>平均评估成本</a:t>
+            </a:r>
+          </a:p>
+        </p:txBody>
+      </p:sp>
+      <p:sp>
+        <p:nvSpPr>
+          <p:cNvPr id="27" name="metric-4">
+            <a:extLst xmlns:a="http://schemas.openxmlformats.org/drawingml/2006/main">
+              <a:ext uri="{FF2B5EF4-FFF2-40B4-BE49-F238E27FC236}">
+                <a16:creationId xmlns:a16="http://schemas.microsoft.com/office/drawing/2014/main" id="{647B269F-01D5-4E74-B172-2B5857A2429D}"/>
+              </a:ext>
+            </a:extLst>
+          </p:cNvPr>
+          <p:cNvSpPr>
+            <a:spLocks xmlns:a="http://schemas.openxmlformats.org/drawingml/2006/main" noGrp="1"/>
+          </p:cNvSpPr>
+          <p:nvPr/>
+        </p:nvSpPr>
+        <p:spPr>
+          <a:xfrm xmlns:a="http://schemas.openxmlformats.org/drawingml/2006/main">
+            <a:off x="9444990" y="4362450"/>
             <a:ext cx="2057400" cy="952500"/>
           </a:xfrm>
           <a:prstGeom xmlns:a="http://schemas.openxmlformats.org/drawingml/2006/main" prst="roundRect">
@@ -12058,21 +11091,21 @@
       </p:sp>
       <p:sp>
         <p:nvSpPr>
-          <p:cNvPr id="25" name="metric-stat-3">
-            <a:extLst xmlns:a="http://schemas.openxmlformats.org/drawingml/2006/main">
-              <a:ext uri="{FF2B5EF4-FFF2-40B4-BE49-F238E27FC236}">
-                <a16:creationId xmlns:a16="http://schemas.microsoft.com/office/drawing/2014/main" id="{3F65044D-C906-477A-BEAC-E167B8497332}"/>
-              </a:ext>
-            </a:extLst>
-          </p:cNvPr>
-          <p:cNvSpPr>
-            <a:spLocks xmlns:a="http://schemas.openxmlformats.org/drawingml/2006/main" noGrp="1"/>
-          </p:cNvSpPr>
-          <p:nvPr/>
-        </p:nvSpPr>
-        <p:spPr>
-          <a:xfrm xmlns:a="http://schemas.openxmlformats.org/drawingml/2006/main">
-            <a:off x="7364730" y="4476750"/>
+          <p:cNvPr id="28" name="metric-stat-4">
+            <a:extLst xmlns:a="http://schemas.openxmlformats.org/drawingml/2006/main">
+              <a:ext uri="{FF2B5EF4-FFF2-40B4-BE49-F238E27FC236}">
+                <a16:creationId xmlns:a16="http://schemas.microsoft.com/office/drawing/2014/main" id="{2C8F49CC-EB3B-4649-BC2D-A1CC41BB1F24}"/>
+              </a:ext>
+            </a:extLst>
+          </p:cNvPr>
+          <p:cNvSpPr>
+            <a:spLocks xmlns:a="http://schemas.openxmlformats.org/drawingml/2006/main" noGrp="1"/>
+          </p:cNvSpPr>
+          <p:nvPr/>
+        </p:nvSpPr>
+        <p:spPr>
+          <a:xfrm xmlns:a="http://schemas.openxmlformats.org/drawingml/2006/main">
+            <a:off x="9597390" y="4476750"/>
             <a:ext cx="1752600" cy="361950"/>
           </a:xfrm>
           <a:prstGeom xmlns:a="http://schemas.openxmlformats.org/drawingml/2006/main" prst="rect">
@@ -12109,28 +11142,28 @@
                 <a:ea typeface="Microsoft YaHei"/>
                 <a:cs typeface="Microsoft YaHei"/>
               </a:rPr>
-              <a:t>−30%</a:t>
-            </a:r>
-          </a:p>
-        </p:txBody>
-      </p:sp>
-      <p:sp>
-        <p:nvSpPr>
-          <p:cNvPr id="26" name="metric-label-3">
-            <a:extLst xmlns:a="http://schemas.openxmlformats.org/drawingml/2006/main">
-              <a:ext uri="{FF2B5EF4-FFF2-40B4-BE49-F238E27FC236}">
-                <a16:creationId xmlns:a16="http://schemas.microsoft.com/office/drawing/2014/main" id="{91F99807-18FF-4A7D-9CDF-09904AD1E540}"/>
-              </a:ext>
-            </a:extLst>
-          </p:cNvPr>
-          <p:cNvSpPr>
-            <a:spLocks xmlns:a="http://schemas.openxmlformats.org/drawingml/2006/main" noGrp="1"/>
-          </p:cNvSpPr>
-          <p:nvPr/>
-        </p:nvSpPr>
-        <p:spPr>
-          <a:xfrm xmlns:a="http://schemas.openxmlformats.org/drawingml/2006/main">
-            <a:off x="7364730" y="4895850"/>
+              <a:t>−35%</a:t>
+            </a:r>
+          </a:p>
+        </p:txBody>
+      </p:sp>
+      <p:sp>
+        <p:nvSpPr>
+          <p:cNvPr id="29" name="metric-label-4">
+            <a:extLst xmlns:a="http://schemas.openxmlformats.org/drawingml/2006/main">
+              <a:ext uri="{FF2B5EF4-FFF2-40B4-BE49-F238E27FC236}">
+                <a16:creationId xmlns:a16="http://schemas.microsoft.com/office/drawing/2014/main" id="{AD286D52-591E-44E8-A03F-C2EE933EF098}"/>
+              </a:ext>
+            </a:extLst>
+          </p:cNvPr>
+          <p:cNvSpPr>
+            <a:spLocks xmlns:a="http://schemas.openxmlformats.org/drawingml/2006/main" noGrp="1"/>
+          </p:cNvSpPr>
+          <p:nvPr/>
+        </p:nvSpPr>
+        <p:spPr>
+          <a:xfrm xmlns:a="http://schemas.openxmlformats.org/drawingml/2006/main">
+            <a:off x="9597390" y="4895850"/>
             <a:ext cx="1752600" cy="228600"/>
           </a:xfrm>
           <a:prstGeom xmlns:a="http://schemas.openxmlformats.org/drawingml/2006/main" prst="rect">
@@ -12167,157 +11200,6 @@
                 <a:ea typeface="Microsoft YaHei"/>
                 <a:cs typeface="Microsoft YaHei"/>
               </a:rPr>
-              <a:t>平均评估成本</a:t>
-            </a:r>
-          </a:p>
-        </p:txBody>
-      </p:sp>
-      <p:sp>
-        <p:nvSpPr>
-          <p:cNvPr id="27" name="metric-4">
-            <a:extLst xmlns:a="http://schemas.openxmlformats.org/drawingml/2006/main">
-              <a:ext uri="{FF2B5EF4-FFF2-40B4-BE49-F238E27FC236}">
-                <a16:creationId xmlns:a16="http://schemas.microsoft.com/office/drawing/2014/main" id="{E9AB92B2-3566-47E6-A9EF-F7F6B4106C68}"/>
-              </a:ext>
-            </a:extLst>
-          </p:cNvPr>
-          <p:cNvSpPr>
-            <a:spLocks xmlns:a="http://schemas.openxmlformats.org/drawingml/2006/main" noGrp="1"/>
-          </p:cNvSpPr>
-          <p:nvPr/>
-        </p:nvSpPr>
-        <p:spPr>
-          <a:xfrm xmlns:a="http://schemas.openxmlformats.org/drawingml/2006/main">
-            <a:off x="9444990" y="4362450"/>
-            <a:ext cx="2057400" cy="952500"/>
-          </a:xfrm>
-          <a:prstGeom xmlns:a="http://schemas.openxmlformats.org/drawingml/2006/main" prst="roundRect">
-            <a:avLst>
-              <a:gd name="adj" fmla="val 8000"/>
-            </a:avLst>
-          </a:prstGeom>
-          <a:solidFill xmlns:a="http://schemas.openxmlformats.org/drawingml/2006/main">
-            <a:srgbClr val="F4F7FA"/>
-          </a:solidFill>
-          <a:ln xmlns:a="http://schemas.openxmlformats.org/drawingml/2006/main" w="9525">
-            <a:solidFill>
-              <a:srgbClr val="F4F7FA"/>
-            </a:solidFill>
-            <a:prstDash val="solid"/>
-          </a:ln>
-        </p:spPr>
-      </p:sp>
-      <p:sp>
-        <p:nvSpPr>
-          <p:cNvPr id="28" name="metric-stat-4">
-            <a:extLst xmlns:a="http://schemas.openxmlformats.org/drawingml/2006/main">
-              <a:ext uri="{FF2B5EF4-FFF2-40B4-BE49-F238E27FC236}">
-                <a16:creationId xmlns:a16="http://schemas.microsoft.com/office/drawing/2014/main" id="{8A0435B6-C4D2-45EA-861F-86ED651EFF20}"/>
-              </a:ext>
-            </a:extLst>
-          </p:cNvPr>
-          <p:cNvSpPr>
-            <a:spLocks xmlns:a="http://schemas.openxmlformats.org/drawingml/2006/main" noGrp="1"/>
-          </p:cNvSpPr>
-          <p:nvPr/>
-        </p:nvSpPr>
-        <p:spPr>
-          <a:xfrm xmlns:a="http://schemas.openxmlformats.org/drawingml/2006/main">
-            <a:off x="9597390" y="4476750"/>
-            <a:ext cx="1752600" cy="361950"/>
-          </a:xfrm>
-          <a:prstGeom xmlns:a="http://schemas.openxmlformats.org/drawingml/2006/main" prst="rect">
-            <a:avLst/>
-          </a:prstGeom>
-          <a:noFill xmlns:a="http://schemas.openxmlformats.org/drawingml/2006/main"/>
-          <a:ln xmlns:a="http://schemas.openxmlformats.org/drawingml/2006/main" w="0">
-            <a:noFill/>
-            <a:prstDash val="solid"/>
-          </a:ln>
-        </p:spPr>
-        <p:txBody>
-          <a:bodyPr xmlns:a="http://schemas.openxmlformats.org/drawingml/2006/main" wrap="square" lIns="0" tIns="0" rIns="0" bIns="0" anchor="t">
-            <a:normAutofit fontScale="100000"/>
-          </a:bodyPr>
-          <a:lstStyle xmlns:a="http://schemas.openxmlformats.org/drawingml/2006/main"/>
-          <a:p xmlns:a="http://schemas.openxmlformats.org/drawingml/2006/main">
-            <a:pPr algn="ctr">
-              <a:defRPr sz="2100" b="1" i="0">
-                <a:solidFill>
-                  <a:srgbClr val="159A91"/>
-                </a:solidFill>
-                <a:latin typeface="Microsoft YaHei"/>
-                <a:ea typeface="Microsoft YaHei"/>
-                <a:cs typeface="Microsoft YaHei"/>
-              </a:defRPr>
-            </a:pPr>
-            <a:r>
-              <a:rPr sz="2100" b="1" i="0">
-                <a:solidFill>
-                  <a:srgbClr val="159A91"/>
-                </a:solidFill>
-                <a:latin typeface="Microsoft YaHei"/>
-                <a:ea typeface="Microsoft YaHei"/>
-                <a:cs typeface="Microsoft YaHei"/>
-              </a:rPr>
-              <a:t>−35%</a:t>
-            </a:r>
-          </a:p>
-        </p:txBody>
-      </p:sp>
-      <p:sp>
-        <p:nvSpPr>
-          <p:cNvPr id="29" name="metric-label-4">
-            <a:extLst xmlns:a="http://schemas.openxmlformats.org/drawingml/2006/main">
-              <a:ext uri="{FF2B5EF4-FFF2-40B4-BE49-F238E27FC236}">
-                <a16:creationId xmlns:a16="http://schemas.microsoft.com/office/drawing/2014/main" id="{885AE5F7-1E79-467D-8C98-740E5359D81B}"/>
-              </a:ext>
-            </a:extLst>
-          </p:cNvPr>
-          <p:cNvSpPr>
-            <a:spLocks xmlns:a="http://schemas.openxmlformats.org/drawingml/2006/main" noGrp="1"/>
-          </p:cNvSpPr>
-          <p:nvPr/>
-        </p:nvSpPr>
-        <p:spPr>
-          <a:xfrm xmlns:a="http://schemas.openxmlformats.org/drawingml/2006/main">
-            <a:off x="9597390" y="4895850"/>
-            <a:ext cx="1752600" cy="228600"/>
-          </a:xfrm>
-          <a:prstGeom xmlns:a="http://schemas.openxmlformats.org/drawingml/2006/main" prst="rect">
-            <a:avLst/>
-          </a:prstGeom>
-          <a:noFill xmlns:a="http://schemas.openxmlformats.org/drawingml/2006/main"/>
-          <a:ln xmlns:a="http://schemas.openxmlformats.org/drawingml/2006/main" w="0">
-            <a:noFill/>
-            <a:prstDash val="solid"/>
-          </a:ln>
-        </p:spPr>
-        <p:txBody>
-          <a:bodyPr xmlns:a="http://schemas.openxmlformats.org/drawingml/2006/main" wrap="square" lIns="0" tIns="0" rIns="0" bIns="0" anchor="t">
-            <a:normAutofit fontScale="100000"/>
-          </a:bodyPr>
-          <a:lstStyle xmlns:a="http://schemas.openxmlformats.org/drawingml/2006/main"/>
-          <a:p xmlns:a="http://schemas.openxmlformats.org/drawingml/2006/main">
-            <a:pPr algn="ctr">
-              <a:defRPr sz="1125" b="0" i="0">
-                <a:solidFill>
-                  <a:srgbClr val="25364A"/>
-                </a:solidFill>
-                <a:latin typeface="Microsoft YaHei"/>
-                <a:ea typeface="Microsoft YaHei"/>
-                <a:cs typeface="Microsoft YaHei"/>
-              </a:defRPr>
-            </a:pPr>
-            <a:r>
-              <a:rPr sz="1125" b="0" i="0">
-                <a:solidFill>
-                  <a:srgbClr val="25364A"/>
-                </a:solidFill>
-                <a:latin typeface="Microsoft YaHei"/>
-                <a:ea typeface="Microsoft YaHei"/>
-                <a:cs typeface="Microsoft YaHei"/>
-              </a:rPr>
               <a:t>人工复核量</a:t>
             </a:r>
           </a:p>
@@ -12325,10 +11207,10 @@
       </p:sp>
       <p:sp>
         <p:nvSpPr>
-          <p:cNvPr id="30" name="auto-text-40">
-            <a:extLst xmlns:a="http://schemas.openxmlformats.org/drawingml/2006/main">
-              <a:ext uri="{FF2B5EF4-FFF2-40B4-BE49-F238E27FC236}">
-                <a16:creationId xmlns:a16="http://schemas.microsoft.com/office/drawing/2014/main" id="{5C35EC40-CA9B-4A93-A227-0B52A41CA3BF}"/>
+          <p:cNvPr id="30" name="auto-text-38">
+            <a:extLst xmlns:a="http://schemas.openxmlformats.org/drawingml/2006/main">
+              <a:ext uri="{FF2B5EF4-FFF2-40B4-BE49-F238E27FC236}">
+                <a16:creationId xmlns:a16="http://schemas.microsoft.com/office/drawing/2014/main" id="{5DCC531F-0D2C-447A-9A18-DD62ABFC496C}"/>
               </a:ext>
             </a:extLst>
           </p:cNvPr>
@@ -12386,7 +11268,7 @@
           <p:cNvPr id="31" name="approval-band">
             <a:extLst xmlns:a="http://schemas.openxmlformats.org/drawingml/2006/main">
               <a:ext uri="{FF2B5EF4-FFF2-40B4-BE49-F238E27FC236}">
-                <a16:creationId xmlns:a16="http://schemas.microsoft.com/office/drawing/2014/main" id="{5CD62670-376D-4080-84FA-EBF8149B573C}"/>
+                <a16:creationId xmlns:a16="http://schemas.microsoft.com/office/drawing/2014/main" id="{4B75D23A-6ADC-4C10-900B-866E1B768C79}"/>
               </a:ext>
             </a:extLst>
           </p:cNvPr>
@@ -12418,10 +11300,10 @@
       </p:sp>
       <p:sp>
         <p:nvSpPr>
-          <p:cNvPr id="32" name="auto-text-41">
-            <a:extLst xmlns:a="http://schemas.openxmlformats.org/drawingml/2006/main">
-              <a:ext uri="{FF2B5EF4-FFF2-40B4-BE49-F238E27FC236}">
-                <a16:creationId xmlns:a16="http://schemas.microsoft.com/office/drawing/2014/main" id="{9F041957-A538-414F-AF40-9348E0A129B0}"/>
+          <p:cNvPr id="32" name="auto-text-39">
+            <a:extLst xmlns:a="http://schemas.openxmlformats.org/drawingml/2006/main">
+              <a:ext uri="{FF2B5EF4-FFF2-40B4-BE49-F238E27FC236}">
+                <a16:creationId xmlns:a16="http://schemas.microsoft.com/office/drawing/2014/main" id="{C67DF6C7-398D-4C37-AD2E-AD36F9759D33}"/>
               </a:ext>
             </a:extLst>
           </p:cNvPr>
@@ -12477,7 +11359,7 @@
     </p:spTree>
     <p:extLst>
       <p:ext uri="{BB962C8B-B14F-4D97-AF65-F5344CB8AC3E}">
-        <p14:creationId xmlns:p14="http://schemas.microsoft.com/office/powerpoint/2010/main" val="135676628"/>
+        <p14:creationId xmlns:p14="http://schemas.microsoft.com/office/powerpoint/2010/main" val="1697775458"/>
       </p:ext>
     </p:extLst>
   </p:cSld>
